--- a/docs/tutorials/codebase-analysis/examples/report.pptx
+++ b/docs/tutorials/codebase-analysis/examples/report.pptx
@@ -3250,7 +3250,7 @@
               </a:defRPr>
             </a:pPr>
             <a:r>
-              <a:t>Completeness — seven independent scans, all without truncation</a:t>
+              <a:t>Completeness — 7 independent scans, no truncation</a:t>
             </a:r>
           </a:p>
         </p:txBody>

--- a/docs/tutorials/codebase-analysis/examples/report.pptx
+++ b/docs/tutorials/codebase-analysis/examples/report.pptx
@@ -8,6 +8,7 @@
     <p:sldId id="256" r:id="rId7"/>
     <p:sldId id="257" r:id="rId8"/>
     <p:sldId id="258" r:id="rId9"/>
+    <p:sldId id="266" r:id="rId17"/>
     <p:sldId id="259" r:id="rId10"/>
     <p:sldId id="260" r:id="rId11"/>
     <p:sldId id="261" r:id="rId12"/>
@@ -3250,6 +3251,298 @@
               </a:defRPr>
             </a:pPr>
             <a:r>
+              <a:t>Acceptance criteria — what 'migrated' means per consumer</a:t>
+            </a:r>
+          </a:p>
+        </p:txBody>
+      </p:sp>
+      <p:sp>
+        <p:nvSpPr>
+          <p:cNvPr id="3" name="TextBox 2"/>
+          <p:cNvSpPr txBox="1"/>
+          <p:nvPr/>
+        </p:nvSpPr>
+        <p:spPr>
+          <a:xfrm>
+            <a:off x="457200" y="1097280"/>
+            <a:ext cx="11247120" cy="5486400"/>
+          </a:xfrm>
+          <a:prstGeom prst="rect">
+            <a:avLst/>
+          </a:prstGeom>
+          <a:noFill/>
+        </p:spPr>
+        <p:txBody>
+          <a:bodyPr wrap="square">
+            <a:spAutoFit/>
+          </a:bodyPr>
+          <a:lstStyle/>
+          <a:p>
+            <a:pPr>
+              <a:defRPr sz="1300" b="0">
+                <a:solidFill>
+                  <a:srgbClr val="333333"/>
+                </a:solidFill>
+              </a:defRPr>
+            </a:pPr>
+            <a:r>
+              <a:t>For each of the 16 reports + 3 wrapper FUGRs, the replacement must:</a:t>
+            </a:r>
+          </a:p>
+          <a:p>
+            <a:pPr>
+              <a:defRPr sz="1300" b="0">
+                <a:solidFill>
+                  <a:srgbClr val="333333"/>
+                </a:solidFill>
+              </a:defRPr>
+            </a:pPr>
+          </a:p>
+          <a:p>
+            <a:pPr>
+              <a:defRPr sz="1300" b="0">
+                <a:solidFill>
+                  <a:srgbClr val="333333"/>
+                </a:solidFill>
+              </a:defRPr>
+            </a:pPr>
+            <a:r>
+              <a:t>1. Read the same zfi_constants rows (same pname, same fnam keys) — or provide a 1:1 shim.</a:t>
+            </a:r>
+          </a:p>
+          <a:p>
+            <a:pPr>
+              <a:defRPr sz="1300" b="0">
+                <a:solidFill>
+                  <a:srgbClr val="333333"/>
+                </a:solidFill>
+              </a:defRPr>
+            </a:pPr>
+          </a:p>
+          <a:p>
+            <a:pPr>
+              <a:defRPr sz="1300" b="0">
+                <a:solidFill>
+                  <a:srgbClr val="333333"/>
+                </a:solidFill>
+              </a:defRPr>
+            </a:pPr>
+            <a:r>
+              <a:t>2. Reach the same remote host with the same credentials.</a:t>
+            </a:r>
+          </a:p>
+          <a:p>
+            <a:pPr>
+              <a:defRPr sz="1300" b="0">
+                <a:solidFill>
+                  <a:srgbClr val="333333"/>
+                </a:solidFill>
+              </a:defRPr>
+            </a:pPr>
+          </a:p>
+          <a:p>
+            <a:pPr>
+              <a:defRPr sz="1300" b="0">
+                <a:solidFill>
+                  <a:srgbClr val="333333"/>
+                </a:solidFill>
+              </a:defRPr>
+            </a:pPr>
+            <a:r>
+              <a:t>3. Support both auth modes — key-based (PRIVATE_KEY_PATH + HOST_KEY + PASSPHRASE) AND password-based (FTP_PSWD).</a:t>
+            </a:r>
+          </a:p>
+          <a:p>
+            <a:pPr>
+              <a:defRPr sz="1300" b="0">
+                <a:solidFill>
+                  <a:srgbClr val="333333"/>
+                </a:solidFill>
+              </a:defRPr>
+            </a:pPr>
+          </a:p>
+          <a:p>
+            <a:pPr>
+              <a:defRPr sz="1300" b="0">
+                <a:solidFill>
+                  <a:srgbClr val="333333"/>
+                </a:solidFill>
+              </a:defRPr>
+            </a:pPr>
+            <a:r>
+              <a:t>4. Preserve PGP encryption wrap for ZSFTP_BNP_PARIBAS_WITH_PGP.</a:t>
+            </a:r>
+          </a:p>
+          <a:p>
+            <a:pPr>
+              <a:defRPr sz="1300" b="0">
+                <a:solidFill>
+                  <a:srgbClr val="333333"/>
+                </a:solidFill>
+              </a:defRPr>
+            </a:pPr>
+          </a:p>
+          <a:p>
+            <a:pPr>
+              <a:defRPr sz="1300" b="0">
+                <a:solidFill>
+                  <a:srgbClr val="333333"/>
+                </a:solidFill>
+              </a:defRPr>
+            </a:pPr>
+            <a:r>
+              <a:t>5. Return success/failure semantics compatible with caller code (exitcode, exec_protocol log).</a:t>
+            </a:r>
+          </a:p>
+          <a:p>
+            <a:pPr>
+              <a:defRPr sz="1300" b="0">
+                <a:solidFill>
+                  <a:srgbClr val="333333"/>
+                </a:solidFill>
+              </a:defRPr>
+            </a:pPr>
+          </a:p>
+          <a:p>
+            <a:pPr>
+              <a:defRPr sz="1300" b="0">
+                <a:solidFill>
+                  <a:srgbClr val="333333"/>
+                </a:solidFill>
+              </a:defRPr>
+            </a:pPr>
+            <a:r>
+              <a:t>6. Coordinate cutover for the 3 SHARED SM69 entries — both callers migrate atomically:</a:t>
+            </a:r>
+          </a:p>
+          <a:p>
+            <a:pPr>
+              <a:defRPr sz="1300" b="0">
+                <a:solidFill>
+                  <a:srgbClr val="333333"/>
+                </a:solidFill>
+              </a:defRPr>
+            </a:pPr>
+            <a:r>
+              <a:t>       • ZFTP_BNPP            ← ZSFTP_BNP_PARIBAS + ZSFTP_BNP_PARIBAS_WITH_PGP</a:t>
+            </a:r>
+          </a:p>
+          <a:p>
+            <a:pPr>
+              <a:defRPr sz="1300" b="0">
+                <a:solidFill>
+                  <a:srgbClr val="333333"/>
+                </a:solidFill>
+              </a:defRPr>
+            </a:pPr>
+            <a:r>
+              <a:t>       • ZSFTP_CERIDIAN_GET   ← ZFFIU_ACC_POST + ZSFTP_CERIDIAN_PULL</a:t>
+            </a:r>
+          </a:p>
+          <a:p>
+            <a:pPr>
+              <a:defRPr sz="1300" b="0">
+                <a:solidFill>
+                  <a:srgbClr val="333333"/>
+                </a:solidFill>
+              </a:defRPr>
+            </a:pPr>
+            <a:r>
+              <a:t>       • ZSFTP_DMS_GET / PUT  ← ZDMS_UPLOAD_FILES + ZDMS_REPLACE_FILES</a:t>
+            </a:r>
+          </a:p>
+          <a:p>
+            <a:pPr>
+              <a:defRPr sz="1300" b="0">
+                <a:solidFill>
+                  <a:srgbClr val="333333"/>
+                </a:solidFill>
+              </a:defRPr>
+            </a:pPr>
+          </a:p>
+          <a:p>
+            <a:pPr>
+              <a:defRPr sz="1300" b="0">
+                <a:solidFill>
+                  <a:srgbClr val="333333"/>
+                </a:solidFill>
+              </a:defRPr>
+            </a:pPr>
+            <a:r>
+              <a:t>7. Per-report end-to-end test: trigger the report; assert file landed (pull) or was delivered (push).</a:t>
+            </a:r>
+          </a:p>
+          <a:p>
+            <a:pPr>
+              <a:defRPr sz="1300" b="0">
+                <a:solidFill>
+                  <a:srgbClr val="333333"/>
+                </a:solidFill>
+              </a:defRPr>
+            </a:pPr>
+          </a:p>
+          <a:p>
+            <a:pPr>
+              <a:defRPr sz="1300" b="0">
+                <a:solidFill>
+                  <a:srgbClr val="333333"/>
+                </a:solidFill>
+              </a:defRPr>
+            </a:pPr>
+            <a:r>
+              <a:t>8. ZDMS_SEND_FILE / ZDMS_EXTRACT_DOCS_TO_SFTP — investigate dynamic/cross-package callers before declaring it dead.</a:t>
+            </a:r>
+          </a:p>
+        </p:txBody>
+      </p:sp>
+    </p:spTree>
+  </p:cSld>
+  <p:clrMapOvr>
+    <a:masterClrMapping/>
+  </p:clrMapOvr>
+</p:sld>
+</file>
+
+<file path=ppt/slides/slide11.xml><?xml version="1.0" encoding="utf-8"?>
+<p:sld xmlns:a="http://schemas.openxmlformats.org/drawingml/2006/main" xmlns:p="http://schemas.openxmlformats.org/presentationml/2006/main" xmlns:r="http://schemas.openxmlformats.org/officeDocument/2006/relationships">
+  <p:cSld>
+    <p:spTree>
+      <p:nvGrpSpPr>
+        <p:cNvPr id="1" name=""/>
+        <p:cNvGrpSpPr/>
+        <p:nvPr/>
+      </p:nvGrpSpPr>
+      <p:grpSpPr/>
+      <p:sp>
+        <p:nvSpPr>
+          <p:cNvPr id="2" name="TextBox 1"/>
+          <p:cNvSpPr txBox="1"/>
+          <p:nvPr/>
+        </p:nvSpPr>
+        <p:spPr>
+          <a:xfrm>
+            <a:off x="457200" y="274320"/>
+            <a:ext cx="11247120" cy="822960"/>
+          </a:xfrm>
+          <a:prstGeom prst="rect">
+            <a:avLst/>
+          </a:prstGeom>
+          <a:noFill/>
+        </p:spPr>
+        <p:txBody>
+          <a:bodyPr wrap="none">
+            <a:spAutoFit/>
+          </a:bodyPr>
+          <a:lstStyle/>
+          <a:p>
+            <a:pPr>
+              <a:defRPr sz="2800" b="1">
+                <a:solidFill>
+                  <a:srgbClr val="1F3A68"/>
+                </a:solidFill>
+              </a:defRPr>
+            </a:pPr>
+            <a:r>
               <a:t>Completeness — 7 independent scans, no truncation</a:t>
             </a:r>
           </a:p>
@@ -6411,7 +6704,7 @@
               </a:defRPr>
             </a:pPr>
             <a:r>
-              <a:t>3 wrapper function groups — single point of credential binding</a:t>
+              <a:t>Parameter matrix — what each consumer reads</a:t>
             </a:r>
           </a:p>
         </p:txBody>
@@ -6425,7 +6718,7 @@
         <p:spPr>
           <a:xfrm>
             <a:off x="457200" y="1097280"/>
-            <a:ext cx="11247120" cy="731520"/>
+            <a:ext cx="11247120" cy="640080"/>
           </a:xfrm>
           <a:prstGeom prst="rect">
             <a:avLst/>
@@ -6439,26 +6732,14 @@
           <a:lstStyle/>
           <a:p>
             <a:pPr>
-              <a:defRPr sz="1400" b="0">
+              <a:defRPr sz="1200" b="0">
                 <a:solidFill>
                   <a:srgbClr val="333333"/>
                 </a:solidFill>
               </a:defRPr>
             </a:pPr>
             <a:r>
-              <a:t>Three FUGRs wrap SXPG_COMMAND_EXECUTE so callers stay clean of SFTP plumbing.</a:t>
-            </a:r>
-          </a:p>
-          <a:p>
-            <a:pPr>
-              <a:defRPr sz="1400" b="0">
-                <a:solidFill>
-                  <a:srgbClr val="333333"/>
-                </a:solidFill>
-              </a:defRPr>
-            </a:pPr>
-            <a:r>
-              <a:t>Replace the wrapper internals once → every caller migrates as a side effect.</a:t>
+              <a:t>Each row is one consumer. ✓ = the report reads that fnam key from zfi_constants and concatenates it into the SXPG additional_parameters.</a:t>
             </a:r>
           </a:p>
         </p:txBody>
@@ -6472,8 +6753,8 @@
           <p:nvPr/>
         </p:nvGraphicFramePr>
         <p:xfrm>
-          <a:off x="457200" y="2286000"/>
-          <a:ext cx="11247120" cy="3200400"/>
+          <a:off x="365760" y="1828800"/>
+          <a:ext cx="11430000" cy="4572000"/>
         </p:xfrm>
         <a:graphic>
           <a:graphicData uri="http://schemas.openxmlformats.org/drawingml/2006/table">
@@ -6482,26 +6763,31 @@
                 <a:tableStyleId>{5C22544A-7EE6-4342-B048-85BDC9FD1C3A}</a:tableStyleId>
               </a:tblPr>
               <a:tblGrid>
-                <a:gridCol w="1645920"/>
-                <a:gridCol w="2743200"/>
-                <a:gridCol w="3657600"/>
-                <a:gridCol w="3200400"/>
+                <a:gridCol w="2468880"/>
+                <a:gridCol w="822960"/>
+                <a:gridCol w="822960"/>
+                <a:gridCol w="1005840"/>
+                <a:gridCol w="822960"/>
+                <a:gridCol w="914400"/>
+                <a:gridCol w="1371600"/>
+                <a:gridCol w="1005840"/>
+                <a:gridCol w="2194560"/>
               </a:tblGrid>
-              <a:tr h="800100">
-                <a:tc>
-                  <a:txBody>
-                    <a:bodyPr/>
-                    <a:lstStyle/>
-                    <a:p>
-                      <a:pPr>
-                        <a:defRPr sz="1200" b="1">
+              <a:tr h="304800">
+                <a:tc>
+                  <a:txBody>
+                    <a:bodyPr/>
+                    <a:lstStyle/>
+                    <a:p>
+                      <a:pPr>
+                        <a:defRPr sz="1000" b="1">
                           <a:solidFill>
                             <a:srgbClr val="FFFFFF"/>
                           </a:solidFill>
                         </a:defRPr>
                       </a:pPr>
                       <a:r>
-                        <a:t>FUGR</a:t>
+                        <a:t>Report</a:t>
                       </a:r>
                     </a:p>
                   </a:txBody>
@@ -6517,14 +6803,14 @@
                     <a:lstStyle/>
                     <a:p>
                       <a:pPr>
-                        <a:defRPr sz="1200" b="1">
+                        <a:defRPr sz="1000" b="1">
                           <a:solidFill>
                             <a:srgbClr val="FFFFFF"/>
                           </a:solidFill>
                         </a:defRPr>
                       </a:pPr>
                       <a:r>
-                        <a:t>Description</a:t>
+                        <a:t>FTP_USER</a:t>
                       </a:r>
                     </a:p>
                   </a:txBody>
@@ -6540,14 +6826,14 @@
                     <a:lstStyle/>
                     <a:p>
                       <a:pPr>
-                        <a:defRPr sz="1200" b="1">
+                        <a:defRPr sz="1000" b="1">
                           <a:solidFill>
                             <a:srgbClr val="FFFFFF"/>
                           </a:solidFill>
                         </a:defRPr>
                       </a:pPr>
                       <a:r>
-                        <a:t>Wrapper function modules</a:t>
+                        <a:t>FTP_PSWD</a:t>
                       </a:r>
                     </a:p>
                   </a:txBody>
@@ -6563,14 +6849,14 @@
                     <a:lstStyle/>
                     <a:p>
                       <a:pPr>
-                        <a:defRPr sz="1200" b="1">
+                        <a:defRPr sz="1000" b="1">
                           <a:solidFill>
                             <a:srgbClr val="FFFFFF"/>
                           </a:solidFill>
                         </a:defRPr>
                       </a:pPr>
                       <a:r>
-                        <a:t>Used by</a:t>
+                        <a:t>FTP_DOMAIN</a:t>
                       </a:r>
                     </a:p>
                   </a:txBody>
@@ -6580,91 +6866,315 @@
                     </a:solidFill>
                   </a:tcPr>
                 </a:tc>
+                <a:tc>
+                  <a:txBody>
+                    <a:bodyPr/>
+                    <a:lstStyle/>
+                    <a:p>
+                      <a:pPr>
+                        <a:defRPr sz="1000" b="1">
+                          <a:solidFill>
+                            <a:srgbClr val="FFFFFF"/>
+                          </a:solidFill>
+                        </a:defRPr>
+                      </a:pPr>
+                      <a:r>
+                        <a:t>FTP_PORT</a:t>
+                      </a:r>
+                    </a:p>
+                  </a:txBody>
+                  <a:tcPr>
+                    <a:solidFill>
+                      <a:srgbClr val="1F3A68"/>
+                    </a:solidFill>
+                  </a:tcPr>
+                </a:tc>
+                <a:tc>
+                  <a:txBody>
+                    <a:bodyPr/>
+                    <a:lstStyle/>
+                    <a:p>
+                      <a:pPr>
+                        <a:defRPr sz="1000" b="1">
+                          <a:solidFill>
+                            <a:srgbClr val="FFFFFF"/>
+                          </a:solidFill>
+                        </a:defRPr>
+                      </a:pPr>
+                      <a:r>
+                        <a:t>HOST_KEY</a:t>
+                      </a:r>
+                    </a:p>
+                  </a:txBody>
+                  <a:tcPr>
+                    <a:solidFill>
+                      <a:srgbClr val="1F3A68"/>
+                    </a:solidFill>
+                  </a:tcPr>
+                </a:tc>
+                <a:tc>
+                  <a:txBody>
+                    <a:bodyPr/>
+                    <a:lstStyle/>
+                    <a:p>
+                      <a:pPr>
+                        <a:defRPr sz="1000" b="1">
+                          <a:solidFill>
+                            <a:srgbClr val="FFFFFF"/>
+                          </a:solidFill>
+                        </a:defRPr>
+                      </a:pPr>
+                      <a:r>
+                        <a:t>PRIVATE_KEY_PATH</a:t>
+                      </a:r>
+                    </a:p>
+                  </a:txBody>
+                  <a:tcPr>
+                    <a:solidFill>
+                      <a:srgbClr val="1F3A68"/>
+                    </a:solidFill>
+                  </a:tcPr>
+                </a:tc>
+                <a:tc>
+                  <a:txBody>
+                    <a:bodyPr/>
+                    <a:lstStyle/>
+                    <a:p>
+                      <a:pPr>
+                        <a:defRPr sz="1000" b="1">
+                          <a:solidFill>
+                            <a:srgbClr val="FFFFFF"/>
+                          </a:solidFill>
+                        </a:defRPr>
+                      </a:pPr>
+                      <a:r>
+                        <a:t>PASSPHRASE</a:t>
+                      </a:r>
+                    </a:p>
+                  </a:txBody>
+                  <a:tcPr>
+                    <a:solidFill>
+                      <a:srgbClr val="1F3A68"/>
+                    </a:solidFill>
+                  </a:tcPr>
+                </a:tc>
+                <a:tc>
+                  <a:txBody>
+                    <a:bodyPr/>
+                    <a:lstStyle/>
+                    <a:p>
+                      <a:pPr>
+                        <a:defRPr sz="1000" b="1">
+                          <a:solidFill>
+                            <a:srgbClr val="FFFFFF"/>
+                          </a:solidFill>
+                        </a:defRPr>
+                      </a:pPr>
+                      <a:r>
+                        <a:t>FOLDER_PATH</a:t>
+                      </a:r>
+                    </a:p>
+                  </a:txBody>
+                  <a:tcPr>
+                    <a:solidFill>
+                      <a:srgbClr val="1F3A68"/>
+                    </a:solidFill>
+                  </a:tcPr>
+                </a:tc>
               </a:tr>
-              <a:tr h="800100">
-                <a:tc>
-                  <a:txBody>
-                    <a:bodyPr/>
-                    <a:lstStyle/>
-                    <a:p>
-                      <a:pPr>
-                        <a:defRPr sz="1200">
-                          <a:solidFill>
-                            <a:srgbClr val="333333"/>
-                          </a:solidFill>
-                        </a:defRPr>
-                      </a:pPr>
-                      <a:r>
-                        <a:t>ZMEDICARE</a:t>
-                      </a:r>
-                    </a:p>
-                  </a:txBody>
-                  <a:tcPr>
-                    <a:solidFill>
-                      <a:srgbClr val="FFFFFF"/>
-                    </a:solidFill>
-                  </a:tcPr>
-                </a:tc>
-                <a:tc>
-                  <a:txBody>
-                    <a:bodyPr/>
-                    <a:lstStyle/>
-                    <a:p>
-                      <a:pPr>
-                        <a:defRPr sz="1200">
-                          <a:solidFill>
-                            <a:srgbClr val="333333"/>
-                          </a:solidFill>
-                        </a:defRPr>
-                      </a:pPr>
-                      <a:r>
-                        <a:t>Medicare Project FG</a:t>
-                      </a:r>
-                    </a:p>
-                  </a:txBody>
-                  <a:tcPr>
-                    <a:solidFill>
-                      <a:srgbClr val="FFFFFF"/>
-                    </a:solidFill>
-                  </a:tcPr>
-                </a:tc>
-                <a:tc>
-                  <a:txBody>
-                    <a:bodyPr/>
-                    <a:lstStyle/>
-                    <a:p>
-                      <a:pPr>
-                        <a:defRPr sz="1200">
-                          <a:solidFill>
-                            <a:srgbClr val="333333"/>
-                          </a:solidFill>
-                        </a:defRPr>
-                      </a:pPr>
-                      <a:r>
-                        <a:t>ZMEDI_GET_FROM_SFTP, ZMEDI_PUT_FROM_SFTP</a:t>
-                      </a:r>
-                    </a:p>
-                  </a:txBody>
-                  <a:tcPr>
-                    <a:solidFill>
-                      <a:srgbClr val="FFFFFF"/>
-                    </a:solidFill>
-                  </a:tcPr>
-                </a:tc>
-                <a:tc>
-                  <a:txBody>
-                    <a:bodyPr/>
-                    <a:lstStyle/>
-                    <a:p>
-                      <a:pPr>
-                        <a:defRPr sz="1200">
-                          <a:solidFill>
-                            <a:srgbClr val="333333"/>
-                          </a:solidFill>
-                        </a:defRPr>
-                      </a:pPr>
-                      <a:r>
-                        <a:t>ZSD_MEDICARE_PDF_PROCESS</a:t>
+              <a:tr h="304800">
+                <a:tc>
+                  <a:txBody>
+                    <a:bodyPr/>
+                    <a:lstStyle/>
+                    <a:p>
+                      <a:pPr>
+                        <a:defRPr sz="900">
+                          <a:solidFill>
+                            <a:srgbClr val="333333"/>
+                          </a:solidFill>
+                        </a:defRPr>
+                      </a:pPr>
+                      <a:r>
+                        <a:t>ZSFTP_CITI_PULL</a:t>
+                      </a:r>
+                    </a:p>
+                  </a:txBody>
+                  <a:tcPr>
+                    <a:solidFill>
+                      <a:srgbClr val="FFFFFF"/>
+                    </a:solidFill>
+                  </a:tcPr>
+                </a:tc>
+                <a:tc>
+                  <a:txBody>
+                    <a:bodyPr/>
+                    <a:lstStyle/>
+                    <a:p>
+                      <a:pPr>
+                        <a:defRPr sz="900">
+                          <a:solidFill>
+                            <a:srgbClr val="333333"/>
+                          </a:solidFill>
+                        </a:defRPr>
+                      </a:pPr>
+                      <a:r>
+                        <a:t>✓</a:t>
+                      </a:r>
+                    </a:p>
+                  </a:txBody>
+                  <a:tcPr>
+                    <a:solidFill>
+                      <a:srgbClr val="FFFFFF"/>
+                    </a:solidFill>
+                  </a:tcPr>
+                </a:tc>
+                <a:tc>
+                  <a:txBody>
+                    <a:bodyPr/>
+                    <a:lstStyle/>
+                    <a:p>
+                      <a:pPr>
+                        <a:defRPr sz="900">
+                          <a:solidFill>
+                            <a:srgbClr val="333333"/>
+                          </a:solidFill>
+                        </a:defRPr>
+                      </a:pPr>
+                    </a:p>
+                  </a:txBody>
+                  <a:tcPr>
+                    <a:solidFill>
+                      <a:srgbClr val="FFFFFF"/>
+                    </a:solidFill>
+                  </a:tcPr>
+                </a:tc>
+                <a:tc>
+                  <a:txBody>
+                    <a:bodyPr/>
+                    <a:lstStyle/>
+                    <a:p>
+                      <a:pPr>
+                        <a:defRPr sz="900">
+                          <a:solidFill>
+                            <a:srgbClr val="333333"/>
+                          </a:solidFill>
+                        </a:defRPr>
+                      </a:pPr>
+                      <a:r>
+                        <a:t>✓</a:t>
+                      </a:r>
+                    </a:p>
+                  </a:txBody>
+                  <a:tcPr>
+                    <a:solidFill>
+                      <a:srgbClr val="FFFFFF"/>
+                    </a:solidFill>
+                  </a:tcPr>
+                </a:tc>
+                <a:tc>
+                  <a:txBody>
+                    <a:bodyPr/>
+                    <a:lstStyle/>
+                    <a:p>
+                      <a:pPr>
+                        <a:defRPr sz="900">
+                          <a:solidFill>
+                            <a:srgbClr val="333333"/>
+                          </a:solidFill>
+                        </a:defRPr>
+                      </a:pPr>
+                    </a:p>
+                  </a:txBody>
+                  <a:tcPr>
+                    <a:solidFill>
+                      <a:srgbClr val="FFFFFF"/>
+                    </a:solidFill>
+                  </a:tcPr>
+                </a:tc>
+                <a:tc>
+                  <a:txBody>
+                    <a:bodyPr/>
+                    <a:lstStyle/>
+                    <a:p>
+                      <a:pPr>
+                        <a:defRPr sz="900">
+                          <a:solidFill>
+                            <a:srgbClr val="333333"/>
+                          </a:solidFill>
+                        </a:defRPr>
+                      </a:pPr>
+                      <a:r>
+                        <a:t>✓</a:t>
+                      </a:r>
+                    </a:p>
+                  </a:txBody>
+                  <a:tcPr>
+                    <a:solidFill>
+                      <a:srgbClr val="FFFFFF"/>
+                    </a:solidFill>
+                  </a:tcPr>
+                </a:tc>
+                <a:tc>
+                  <a:txBody>
+                    <a:bodyPr/>
+                    <a:lstStyle/>
+                    <a:p>
+                      <a:pPr>
+                        <a:defRPr sz="900">
+                          <a:solidFill>
+                            <a:srgbClr val="333333"/>
+                          </a:solidFill>
+                        </a:defRPr>
+                      </a:pPr>
+                      <a:r>
+                        <a:t>✓</a:t>
+                      </a:r>
+                    </a:p>
+                  </a:txBody>
+                  <a:tcPr>
+                    <a:solidFill>
+                      <a:srgbClr val="FFFFFF"/>
+                    </a:solidFill>
+                  </a:tcPr>
+                </a:tc>
+                <a:tc>
+                  <a:txBody>
+                    <a:bodyPr/>
+                    <a:lstStyle/>
+                    <a:p>
+                      <a:pPr>
+                        <a:defRPr sz="900">
+                          <a:solidFill>
+                            <a:srgbClr val="333333"/>
+                          </a:solidFill>
+                        </a:defRPr>
+                      </a:pPr>
+                      <a:r>
+                        <a:t>✓</a:t>
+                      </a:r>
+                    </a:p>
+                  </a:txBody>
+                  <a:tcPr>
+                    <a:solidFill>
+                      <a:srgbClr val="FFFFFF"/>
+                    </a:solidFill>
+                  </a:tcPr>
+                </a:tc>
+                <a:tc>
+                  <a:txBody>
+                    <a:bodyPr/>
+                    <a:lstStyle/>
+                    <a:p>
+                      <a:pPr>
+                        <a:defRPr sz="900">
+                          <a:solidFill>
+                            <a:srgbClr val="333333"/>
+                          </a:solidFill>
+                        </a:defRPr>
+                      </a:pPr>
+                      <a:r>
+                        <a:t>SOURCE_FOLDER</a:t>
                       </a:r>
                     </a:p>
                   </a:txBody>
@@ -6675,90 +7185,199 @@
                   </a:tcPr>
                 </a:tc>
               </a:tr>
-              <a:tr h="800100">
-                <a:tc>
-                  <a:txBody>
-                    <a:bodyPr/>
-                    <a:lstStyle/>
-                    <a:p>
-                      <a:pPr>
-                        <a:defRPr sz="1200">
-                          <a:solidFill>
-                            <a:srgbClr val="333333"/>
-                          </a:solidFill>
-                        </a:defRPr>
-                      </a:pPr>
-                      <a:r>
-                        <a:t>ZERX</a:t>
-                      </a:r>
-                    </a:p>
-                  </a:txBody>
-                  <a:tcPr>
-                    <a:solidFill>
-                      <a:srgbClr val="F0F2F7"/>
-                    </a:solidFill>
-                  </a:tcPr>
-                </a:tc>
-                <a:tc>
-                  <a:txBody>
-                    <a:bodyPr/>
-                    <a:lstStyle/>
-                    <a:p>
-                      <a:pPr>
-                        <a:defRPr sz="1200">
-                          <a:solidFill>
-                            <a:srgbClr val="333333"/>
-                          </a:solidFill>
-                        </a:defRPr>
-                      </a:pPr>
-                      <a:r>
-                        <a:t>Medicare Project FG (eRx)</a:t>
-                      </a:r>
-                    </a:p>
-                  </a:txBody>
-                  <a:tcPr>
-                    <a:solidFill>
-                      <a:srgbClr val="F0F2F7"/>
-                    </a:solidFill>
-                  </a:tcPr>
-                </a:tc>
-                <a:tc>
-                  <a:txBody>
-                    <a:bodyPr/>
-                    <a:lstStyle/>
-                    <a:p>
-                      <a:pPr>
-                        <a:defRPr sz="1200">
-                          <a:solidFill>
-                            <a:srgbClr val="333333"/>
-                          </a:solidFill>
-                        </a:defRPr>
-                      </a:pPr>
-                      <a:r>
-                        <a:t>ZERX_GET_FROM_SFTP, ZERX_PUT_FROM_SFTP</a:t>
-                      </a:r>
-                    </a:p>
-                  </a:txBody>
-                  <a:tcPr>
-                    <a:solidFill>
-                      <a:srgbClr val="F0F2F7"/>
-                    </a:solidFill>
-                  </a:tcPr>
-                </a:tc>
-                <a:tc>
-                  <a:txBody>
-                    <a:bodyPr/>
-                    <a:lstStyle/>
-                    <a:p>
-                      <a:pPr>
-                        <a:defRPr sz="1200">
-                          <a:solidFill>
-                            <a:srgbClr val="333333"/>
-                          </a:solidFill>
-                        </a:defRPr>
-                      </a:pPr>
-                      <a:r>
-                        <a:t>ZSD_ERX_DMS_FILE_PROCESS</a:t>
+              <a:tr h="304800">
+                <a:tc>
+                  <a:txBody>
+                    <a:bodyPr/>
+                    <a:lstStyle/>
+                    <a:p>
+                      <a:pPr>
+                        <a:defRPr sz="900">
+                          <a:solidFill>
+                            <a:srgbClr val="333333"/>
+                          </a:solidFill>
+                        </a:defRPr>
+                      </a:pPr>
+                      <a:r>
+                        <a:t>ZSFTP_CITI_SEND</a:t>
+                      </a:r>
+                    </a:p>
+                  </a:txBody>
+                  <a:tcPr>
+                    <a:solidFill>
+                      <a:srgbClr val="F0F2F7"/>
+                    </a:solidFill>
+                  </a:tcPr>
+                </a:tc>
+                <a:tc>
+                  <a:txBody>
+                    <a:bodyPr/>
+                    <a:lstStyle/>
+                    <a:p>
+                      <a:pPr>
+                        <a:defRPr sz="900">
+                          <a:solidFill>
+                            <a:srgbClr val="333333"/>
+                          </a:solidFill>
+                        </a:defRPr>
+                      </a:pPr>
+                      <a:r>
+                        <a:t>✓</a:t>
+                      </a:r>
+                    </a:p>
+                  </a:txBody>
+                  <a:tcPr>
+                    <a:solidFill>
+                      <a:srgbClr val="F0F2F7"/>
+                    </a:solidFill>
+                  </a:tcPr>
+                </a:tc>
+                <a:tc>
+                  <a:txBody>
+                    <a:bodyPr/>
+                    <a:lstStyle/>
+                    <a:p>
+                      <a:pPr>
+                        <a:defRPr sz="900">
+                          <a:solidFill>
+                            <a:srgbClr val="333333"/>
+                          </a:solidFill>
+                        </a:defRPr>
+                      </a:pPr>
+                    </a:p>
+                  </a:txBody>
+                  <a:tcPr>
+                    <a:solidFill>
+                      <a:srgbClr val="F0F2F7"/>
+                    </a:solidFill>
+                  </a:tcPr>
+                </a:tc>
+                <a:tc>
+                  <a:txBody>
+                    <a:bodyPr/>
+                    <a:lstStyle/>
+                    <a:p>
+                      <a:pPr>
+                        <a:defRPr sz="900">
+                          <a:solidFill>
+                            <a:srgbClr val="333333"/>
+                          </a:solidFill>
+                        </a:defRPr>
+                      </a:pPr>
+                      <a:r>
+                        <a:t>✓</a:t>
+                      </a:r>
+                    </a:p>
+                  </a:txBody>
+                  <a:tcPr>
+                    <a:solidFill>
+                      <a:srgbClr val="F0F2F7"/>
+                    </a:solidFill>
+                  </a:tcPr>
+                </a:tc>
+                <a:tc>
+                  <a:txBody>
+                    <a:bodyPr/>
+                    <a:lstStyle/>
+                    <a:p>
+                      <a:pPr>
+                        <a:defRPr sz="900">
+                          <a:solidFill>
+                            <a:srgbClr val="333333"/>
+                          </a:solidFill>
+                        </a:defRPr>
+                      </a:pPr>
+                    </a:p>
+                  </a:txBody>
+                  <a:tcPr>
+                    <a:solidFill>
+                      <a:srgbClr val="F0F2F7"/>
+                    </a:solidFill>
+                  </a:tcPr>
+                </a:tc>
+                <a:tc>
+                  <a:txBody>
+                    <a:bodyPr/>
+                    <a:lstStyle/>
+                    <a:p>
+                      <a:pPr>
+                        <a:defRPr sz="900">
+                          <a:solidFill>
+                            <a:srgbClr val="333333"/>
+                          </a:solidFill>
+                        </a:defRPr>
+                      </a:pPr>
+                      <a:r>
+                        <a:t>✓</a:t>
+                      </a:r>
+                    </a:p>
+                  </a:txBody>
+                  <a:tcPr>
+                    <a:solidFill>
+                      <a:srgbClr val="F0F2F7"/>
+                    </a:solidFill>
+                  </a:tcPr>
+                </a:tc>
+                <a:tc>
+                  <a:txBody>
+                    <a:bodyPr/>
+                    <a:lstStyle/>
+                    <a:p>
+                      <a:pPr>
+                        <a:defRPr sz="900">
+                          <a:solidFill>
+                            <a:srgbClr val="333333"/>
+                          </a:solidFill>
+                        </a:defRPr>
+                      </a:pPr>
+                      <a:r>
+                        <a:t>✓</a:t>
+                      </a:r>
+                    </a:p>
+                  </a:txBody>
+                  <a:tcPr>
+                    <a:solidFill>
+                      <a:srgbClr val="F0F2F7"/>
+                    </a:solidFill>
+                  </a:tcPr>
+                </a:tc>
+                <a:tc>
+                  <a:txBody>
+                    <a:bodyPr/>
+                    <a:lstStyle/>
+                    <a:p>
+                      <a:pPr>
+                        <a:defRPr sz="900">
+                          <a:solidFill>
+                            <a:srgbClr val="333333"/>
+                          </a:solidFill>
+                        </a:defRPr>
+                      </a:pPr>
+                      <a:r>
+                        <a:t>✓</a:t>
+                      </a:r>
+                    </a:p>
+                  </a:txBody>
+                  <a:tcPr>
+                    <a:solidFill>
+                      <a:srgbClr val="F0F2F7"/>
+                    </a:solidFill>
+                  </a:tcPr>
+                </a:tc>
+                <a:tc>
+                  <a:txBody>
+                    <a:bodyPr/>
+                    <a:lstStyle/>
+                    <a:p>
+                      <a:pPr>
+                        <a:defRPr sz="900">
+                          <a:solidFill>
+                            <a:srgbClr val="333333"/>
+                          </a:solidFill>
+                        </a:defRPr>
+                      </a:pPr>
+                      <a:r>
+                        <a:t>✓</a:t>
                       </a:r>
                     </a:p>
                   </a:txBody>
@@ -6769,96 +7388,2438 @@
                   </a:tcPr>
                 </a:tc>
               </a:tr>
-              <a:tr h="800100">
-                <a:tc>
-                  <a:txBody>
-                    <a:bodyPr/>
-                    <a:lstStyle/>
-                    <a:p>
-                      <a:pPr>
-                        <a:defRPr sz="1200">
-                          <a:solidFill>
-                            <a:srgbClr val="333333"/>
-                          </a:solidFill>
-                        </a:defRPr>
-                      </a:pPr>
-                      <a:r>
-                        <a:t>ZDMS_SEND_FILE</a:t>
-                      </a:r>
-                    </a:p>
-                  </a:txBody>
-                  <a:tcPr>
-                    <a:solidFill>
-                      <a:srgbClr val="FFFFFF"/>
-                    </a:solidFill>
-                  </a:tcPr>
-                </a:tc>
-                <a:tc>
-                  <a:txBody>
-                    <a:bodyPr/>
-                    <a:lstStyle/>
-                    <a:p>
-                      <a:pPr>
-                        <a:defRPr sz="1200">
-                          <a:solidFill>
-                            <a:srgbClr val="333333"/>
-                          </a:solidFill>
-                        </a:defRPr>
-                      </a:pPr>
-                      <a:r>
-                        <a:t>DMS document extract FG</a:t>
-                      </a:r>
-                    </a:p>
-                  </a:txBody>
-                  <a:tcPr>
-                    <a:solidFill>
-                      <a:srgbClr val="FFFFFF"/>
-                    </a:solidFill>
-                  </a:tcPr>
-                </a:tc>
-                <a:tc>
-                  <a:txBody>
-                    <a:bodyPr/>
-                    <a:lstStyle/>
-                    <a:p>
-                      <a:pPr>
-                        <a:defRPr sz="1200">
-                          <a:solidFill>
-                            <a:srgbClr val="333333"/>
-                          </a:solidFill>
-                        </a:defRPr>
-                      </a:pPr>
-                      <a:r>
-                        <a:t>ZDMS_EXTRACT_DOCS_TO_SFTP</a:t>
-                      </a:r>
-                    </a:p>
-                  </a:txBody>
-                  <a:tcPr>
-                    <a:solidFill>
-                      <a:srgbClr val="FFFFFF"/>
-                    </a:solidFill>
-                  </a:tcPr>
-                </a:tc>
-                <a:tc>
-                  <a:txBody>
-                    <a:bodyPr/>
-                    <a:lstStyle/>
-                    <a:p>
-                      <a:pPr>
-                        <a:defRPr sz="1200">
-                          <a:solidFill>
-                            <a:srgbClr val="333333"/>
-                          </a:solidFill>
-                        </a:defRPr>
-                      </a:pPr>
-                      <a:r>
-                        <a:t>0 callers in Z001 (dynamic / cross-package / dead?)</a:t>
-                      </a:r>
-                    </a:p>
-                  </a:txBody>
-                  <a:tcPr>
-                    <a:solidFill>
-                      <a:srgbClr val="FFFFFF"/>
+              <a:tr h="304800">
+                <a:tc>
+                  <a:txBody>
+                    <a:bodyPr/>
+                    <a:lstStyle/>
+                    <a:p>
+                      <a:pPr>
+                        <a:defRPr sz="900">
+                          <a:solidFill>
+                            <a:srgbClr val="333333"/>
+                          </a:solidFill>
+                        </a:defRPr>
+                      </a:pPr>
+                      <a:r>
+                        <a:t>ZSFTP_BNP_PARIBAS_PULL</a:t>
+                      </a:r>
+                    </a:p>
+                  </a:txBody>
+                  <a:tcPr>
+                    <a:solidFill>
+                      <a:srgbClr val="FFFFFF"/>
+                    </a:solidFill>
+                  </a:tcPr>
+                </a:tc>
+                <a:tc>
+                  <a:txBody>
+                    <a:bodyPr/>
+                    <a:lstStyle/>
+                    <a:p>
+                      <a:pPr>
+                        <a:defRPr sz="900">
+                          <a:solidFill>
+                            <a:srgbClr val="333333"/>
+                          </a:solidFill>
+                        </a:defRPr>
+                      </a:pPr>
+                      <a:r>
+                        <a:t>✓</a:t>
+                      </a:r>
+                    </a:p>
+                  </a:txBody>
+                  <a:tcPr>
+                    <a:solidFill>
+                      <a:srgbClr val="FFFFFF"/>
+                    </a:solidFill>
+                  </a:tcPr>
+                </a:tc>
+                <a:tc>
+                  <a:txBody>
+                    <a:bodyPr/>
+                    <a:lstStyle/>
+                    <a:p>
+                      <a:pPr>
+                        <a:defRPr sz="900">
+                          <a:solidFill>
+                            <a:srgbClr val="333333"/>
+                          </a:solidFill>
+                        </a:defRPr>
+                      </a:pPr>
+                      <a:r>
+                        <a:t>✓</a:t>
+                      </a:r>
+                    </a:p>
+                  </a:txBody>
+                  <a:tcPr>
+                    <a:solidFill>
+                      <a:srgbClr val="FFFFFF"/>
+                    </a:solidFill>
+                  </a:tcPr>
+                </a:tc>
+                <a:tc>
+                  <a:txBody>
+                    <a:bodyPr/>
+                    <a:lstStyle/>
+                    <a:p>
+                      <a:pPr>
+                        <a:defRPr sz="900">
+                          <a:solidFill>
+                            <a:srgbClr val="333333"/>
+                          </a:solidFill>
+                        </a:defRPr>
+                      </a:pPr>
+                      <a:r>
+                        <a:t>✓</a:t>
+                      </a:r>
+                    </a:p>
+                  </a:txBody>
+                  <a:tcPr>
+                    <a:solidFill>
+                      <a:srgbClr val="FFFFFF"/>
+                    </a:solidFill>
+                  </a:tcPr>
+                </a:tc>
+                <a:tc>
+                  <a:txBody>
+                    <a:bodyPr/>
+                    <a:lstStyle/>
+                    <a:p>
+                      <a:pPr>
+                        <a:defRPr sz="900">
+                          <a:solidFill>
+                            <a:srgbClr val="333333"/>
+                          </a:solidFill>
+                        </a:defRPr>
+                      </a:pPr>
+                      <a:r>
+                        <a:t>✓</a:t>
+                      </a:r>
+                    </a:p>
+                  </a:txBody>
+                  <a:tcPr>
+                    <a:solidFill>
+                      <a:srgbClr val="FFFFFF"/>
+                    </a:solidFill>
+                  </a:tcPr>
+                </a:tc>
+                <a:tc>
+                  <a:txBody>
+                    <a:bodyPr/>
+                    <a:lstStyle/>
+                    <a:p>
+                      <a:pPr>
+                        <a:defRPr sz="900">
+                          <a:solidFill>
+                            <a:srgbClr val="333333"/>
+                          </a:solidFill>
+                        </a:defRPr>
+                      </a:pPr>
+                      <a:r>
+                        <a:t>✓</a:t>
+                      </a:r>
+                    </a:p>
+                  </a:txBody>
+                  <a:tcPr>
+                    <a:solidFill>
+                      <a:srgbClr val="FFFFFF"/>
+                    </a:solidFill>
+                  </a:tcPr>
+                </a:tc>
+                <a:tc>
+                  <a:txBody>
+                    <a:bodyPr/>
+                    <a:lstStyle/>
+                    <a:p>
+                      <a:pPr>
+                        <a:defRPr sz="900">
+                          <a:solidFill>
+                            <a:srgbClr val="333333"/>
+                          </a:solidFill>
+                        </a:defRPr>
+                      </a:pPr>
+                    </a:p>
+                  </a:txBody>
+                  <a:tcPr>
+                    <a:solidFill>
+                      <a:srgbClr val="FFFFFF"/>
+                    </a:solidFill>
+                  </a:tcPr>
+                </a:tc>
+                <a:tc>
+                  <a:txBody>
+                    <a:bodyPr/>
+                    <a:lstStyle/>
+                    <a:p>
+                      <a:pPr>
+                        <a:defRPr sz="900">
+                          <a:solidFill>
+                            <a:srgbClr val="333333"/>
+                          </a:solidFill>
+                        </a:defRPr>
+                      </a:pPr>
+                    </a:p>
+                  </a:txBody>
+                  <a:tcPr>
+                    <a:solidFill>
+                      <a:srgbClr val="FFFFFF"/>
+                    </a:solidFill>
+                  </a:tcPr>
+                </a:tc>
+                <a:tc>
+                  <a:txBody>
+                    <a:bodyPr/>
+                    <a:lstStyle/>
+                    <a:p>
+                      <a:pPr>
+                        <a:defRPr sz="900">
+                          <a:solidFill>
+                            <a:srgbClr val="333333"/>
+                          </a:solidFill>
+                        </a:defRPr>
+                      </a:pPr>
+                      <a:r>
+                        <a:t>✓</a:t>
+                      </a:r>
+                    </a:p>
+                  </a:txBody>
+                  <a:tcPr>
+                    <a:solidFill>
+                      <a:srgbClr val="FFFFFF"/>
+                    </a:solidFill>
+                  </a:tcPr>
+                </a:tc>
+              </a:tr>
+              <a:tr h="304800">
+                <a:tc>
+                  <a:txBody>
+                    <a:bodyPr/>
+                    <a:lstStyle/>
+                    <a:p>
+                      <a:pPr>
+                        <a:defRPr sz="900">
+                          <a:solidFill>
+                            <a:srgbClr val="333333"/>
+                          </a:solidFill>
+                        </a:defRPr>
+                      </a:pPr>
+                      <a:r>
+                        <a:t>ZSFTP_BNP_PARIBAS (password)</a:t>
+                      </a:r>
+                    </a:p>
+                  </a:txBody>
+                  <a:tcPr>
+                    <a:solidFill>
+                      <a:srgbClr val="F0F2F7"/>
+                    </a:solidFill>
+                  </a:tcPr>
+                </a:tc>
+                <a:tc>
+                  <a:txBody>
+                    <a:bodyPr/>
+                    <a:lstStyle/>
+                    <a:p>
+                      <a:pPr>
+                        <a:defRPr sz="900">
+                          <a:solidFill>
+                            <a:srgbClr val="333333"/>
+                          </a:solidFill>
+                        </a:defRPr>
+                      </a:pPr>
+                      <a:r>
+                        <a:t>✓</a:t>
+                      </a:r>
+                    </a:p>
+                  </a:txBody>
+                  <a:tcPr>
+                    <a:solidFill>
+                      <a:srgbClr val="F0F2F7"/>
+                    </a:solidFill>
+                  </a:tcPr>
+                </a:tc>
+                <a:tc>
+                  <a:txBody>
+                    <a:bodyPr/>
+                    <a:lstStyle/>
+                    <a:p>
+                      <a:pPr>
+                        <a:defRPr sz="900">
+                          <a:solidFill>
+                            <a:srgbClr val="333333"/>
+                          </a:solidFill>
+                        </a:defRPr>
+                      </a:pPr>
+                      <a:r>
+                        <a:t>✓</a:t>
+                      </a:r>
+                    </a:p>
+                  </a:txBody>
+                  <a:tcPr>
+                    <a:solidFill>
+                      <a:srgbClr val="F0F2F7"/>
+                    </a:solidFill>
+                  </a:tcPr>
+                </a:tc>
+                <a:tc>
+                  <a:txBody>
+                    <a:bodyPr/>
+                    <a:lstStyle/>
+                    <a:p>
+                      <a:pPr>
+                        <a:defRPr sz="900">
+                          <a:solidFill>
+                            <a:srgbClr val="333333"/>
+                          </a:solidFill>
+                        </a:defRPr>
+                      </a:pPr>
+                      <a:r>
+                        <a:t>✓</a:t>
+                      </a:r>
+                    </a:p>
+                  </a:txBody>
+                  <a:tcPr>
+                    <a:solidFill>
+                      <a:srgbClr val="F0F2F7"/>
+                    </a:solidFill>
+                  </a:tcPr>
+                </a:tc>
+                <a:tc>
+                  <a:txBody>
+                    <a:bodyPr/>
+                    <a:lstStyle/>
+                    <a:p>
+                      <a:pPr>
+                        <a:defRPr sz="900">
+                          <a:solidFill>
+                            <a:srgbClr val="333333"/>
+                          </a:solidFill>
+                        </a:defRPr>
+                      </a:pPr>
+                      <a:r>
+                        <a:t>✓</a:t>
+                      </a:r>
+                    </a:p>
+                  </a:txBody>
+                  <a:tcPr>
+                    <a:solidFill>
+                      <a:srgbClr val="F0F2F7"/>
+                    </a:solidFill>
+                  </a:tcPr>
+                </a:tc>
+                <a:tc>
+                  <a:txBody>
+                    <a:bodyPr/>
+                    <a:lstStyle/>
+                    <a:p>
+                      <a:pPr>
+                        <a:defRPr sz="900">
+                          <a:solidFill>
+                            <a:srgbClr val="333333"/>
+                          </a:solidFill>
+                        </a:defRPr>
+                      </a:pPr>
+                      <a:r>
+                        <a:t>✓</a:t>
+                      </a:r>
+                    </a:p>
+                  </a:txBody>
+                  <a:tcPr>
+                    <a:solidFill>
+                      <a:srgbClr val="F0F2F7"/>
+                    </a:solidFill>
+                  </a:tcPr>
+                </a:tc>
+                <a:tc>
+                  <a:txBody>
+                    <a:bodyPr/>
+                    <a:lstStyle/>
+                    <a:p>
+                      <a:pPr>
+                        <a:defRPr sz="900">
+                          <a:solidFill>
+                            <a:srgbClr val="333333"/>
+                          </a:solidFill>
+                        </a:defRPr>
+                      </a:pPr>
+                    </a:p>
+                  </a:txBody>
+                  <a:tcPr>
+                    <a:solidFill>
+                      <a:srgbClr val="F0F2F7"/>
+                    </a:solidFill>
+                  </a:tcPr>
+                </a:tc>
+                <a:tc>
+                  <a:txBody>
+                    <a:bodyPr/>
+                    <a:lstStyle/>
+                    <a:p>
+                      <a:pPr>
+                        <a:defRPr sz="900">
+                          <a:solidFill>
+                            <a:srgbClr val="333333"/>
+                          </a:solidFill>
+                        </a:defRPr>
+                      </a:pPr>
+                    </a:p>
+                  </a:txBody>
+                  <a:tcPr>
+                    <a:solidFill>
+                      <a:srgbClr val="F0F2F7"/>
+                    </a:solidFill>
+                  </a:tcPr>
+                </a:tc>
+                <a:tc>
+                  <a:txBody>
+                    <a:bodyPr/>
+                    <a:lstStyle/>
+                    <a:p>
+                      <a:pPr>
+                        <a:defRPr sz="900">
+                          <a:solidFill>
+                            <a:srgbClr val="333333"/>
+                          </a:solidFill>
+                        </a:defRPr>
+                      </a:pPr>
+                      <a:r>
+                        <a:t>✓</a:t>
+                      </a:r>
+                    </a:p>
+                  </a:txBody>
+                  <a:tcPr>
+                    <a:solidFill>
+                      <a:srgbClr val="F0F2F7"/>
+                    </a:solidFill>
+                  </a:tcPr>
+                </a:tc>
+              </a:tr>
+              <a:tr h="304800">
+                <a:tc>
+                  <a:txBody>
+                    <a:bodyPr/>
+                    <a:lstStyle/>
+                    <a:p>
+                      <a:pPr>
+                        <a:defRPr sz="900">
+                          <a:solidFill>
+                            <a:srgbClr val="333333"/>
+                          </a:solidFill>
+                        </a:defRPr>
+                      </a:pPr>
+                      <a:r>
+                        <a:t>ZSFTP_BNP_PARIBAS_WITH_PGP</a:t>
+                      </a:r>
+                    </a:p>
+                  </a:txBody>
+                  <a:tcPr>
+                    <a:solidFill>
+                      <a:srgbClr val="FFFFFF"/>
+                    </a:solidFill>
+                  </a:tcPr>
+                </a:tc>
+                <a:tc>
+                  <a:txBody>
+                    <a:bodyPr/>
+                    <a:lstStyle/>
+                    <a:p>
+                      <a:pPr>
+                        <a:defRPr sz="900">
+                          <a:solidFill>
+                            <a:srgbClr val="333333"/>
+                          </a:solidFill>
+                        </a:defRPr>
+                      </a:pPr>
+                      <a:r>
+                        <a:t>✓</a:t>
+                      </a:r>
+                    </a:p>
+                  </a:txBody>
+                  <a:tcPr>
+                    <a:solidFill>
+                      <a:srgbClr val="FFFFFF"/>
+                    </a:solidFill>
+                  </a:tcPr>
+                </a:tc>
+                <a:tc>
+                  <a:txBody>
+                    <a:bodyPr/>
+                    <a:lstStyle/>
+                    <a:p>
+                      <a:pPr>
+                        <a:defRPr sz="900">
+                          <a:solidFill>
+                            <a:srgbClr val="333333"/>
+                          </a:solidFill>
+                        </a:defRPr>
+                      </a:pPr>
+                    </a:p>
+                  </a:txBody>
+                  <a:tcPr>
+                    <a:solidFill>
+                      <a:srgbClr val="FFFFFF"/>
+                    </a:solidFill>
+                  </a:tcPr>
+                </a:tc>
+                <a:tc>
+                  <a:txBody>
+                    <a:bodyPr/>
+                    <a:lstStyle/>
+                    <a:p>
+                      <a:pPr>
+                        <a:defRPr sz="900">
+                          <a:solidFill>
+                            <a:srgbClr val="333333"/>
+                          </a:solidFill>
+                        </a:defRPr>
+                      </a:pPr>
+                      <a:r>
+                        <a:t>✓</a:t>
+                      </a:r>
+                    </a:p>
+                  </a:txBody>
+                  <a:tcPr>
+                    <a:solidFill>
+                      <a:srgbClr val="FFFFFF"/>
+                    </a:solidFill>
+                  </a:tcPr>
+                </a:tc>
+                <a:tc>
+                  <a:txBody>
+                    <a:bodyPr/>
+                    <a:lstStyle/>
+                    <a:p>
+                      <a:pPr>
+                        <a:defRPr sz="900">
+                          <a:solidFill>
+                            <a:srgbClr val="333333"/>
+                          </a:solidFill>
+                        </a:defRPr>
+                      </a:pPr>
+                    </a:p>
+                  </a:txBody>
+                  <a:tcPr>
+                    <a:solidFill>
+                      <a:srgbClr val="FFFFFF"/>
+                    </a:solidFill>
+                  </a:tcPr>
+                </a:tc>
+                <a:tc>
+                  <a:txBody>
+                    <a:bodyPr/>
+                    <a:lstStyle/>
+                    <a:p>
+                      <a:pPr>
+                        <a:defRPr sz="900">
+                          <a:solidFill>
+                            <a:srgbClr val="333333"/>
+                          </a:solidFill>
+                        </a:defRPr>
+                      </a:pPr>
+                      <a:r>
+                        <a:t>✓</a:t>
+                      </a:r>
+                    </a:p>
+                  </a:txBody>
+                  <a:tcPr>
+                    <a:solidFill>
+                      <a:srgbClr val="FFFFFF"/>
+                    </a:solidFill>
+                  </a:tcPr>
+                </a:tc>
+                <a:tc>
+                  <a:txBody>
+                    <a:bodyPr/>
+                    <a:lstStyle/>
+                    <a:p>
+                      <a:pPr>
+                        <a:defRPr sz="900">
+                          <a:solidFill>
+                            <a:srgbClr val="333333"/>
+                          </a:solidFill>
+                        </a:defRPr>
+                      </a:pPr>
+                      <a:r>
+                        <a:t>✓</a:t>
+                      </a:r>
+                    </a:p>
+                  </a:txBody>
+                  <a:tcPr>
+                    <a:solidFill>
+                      <a:srgbClr val="FFFFFF"/>
+                    </a:solidFill>
+                  </a:tcPr>
+                </a:tc>
+                <a:tc>
+                  <a:txBody>
+                    <a:bodyPr/>
+                    <a:lstStyle/>
+                    <a:p>
+                      <a:pPr>
+                        <a:defRPr sz="900">
+                          <a:solidFill>
+                            <a:srgbClr val="333333"/>
+                          </a:solidFill>
+                        </a:defRPr>
+                      </a:pPr>
+                      <a:r>
+                        <a:t>✓</a:t>
+                      </a:r>
+                    </a:p>
+                  </a:txBody>
+                  <a:tcPr>
+                    <a:solidFill>
+                      <a:srgbClr val="FFFFFF"/>
+                    </a:solidFill>
+                  </a:tcPr>
+                </a:tc>
+                <a:tc>
+                  <a:txBody>
+                    <a:bodyPr/>
+                    <a:lstStyle/>
+                    <a:p>
+                      <a:pPr>
+                        <a:defRPr sz="900">
+                          <a:solidFill>
+                            <a:srgbClr val="333333"/>
+                          </a:solidFill>
+                        </a:defRPr>
+                      </a:pPr>
+                      <a:r>
+                        <a:t>✓</a:t>
+                      </a:r>
+                    </a:p>
+                  </a:txBody>
+                  <a:tcPr>
+                    <a:solidFill>
+                      <a:srgbClr val="FFFFFF"/>
+                    </a:solidFill>
+                  </a:tcPr>
+                </a:tc>
+              </a:tr>
+              <a:tr h="304800">
+                <a:tc>
+                  <a:txBody>
+                    <a:bodyPr/>
+                    <a:lstStyle/>
+                    <a:p>
+                      <a:pPr>
+                        <a:defRPr sz="900">
+                          <a:solidFill>
+                            <a:srgbClr val="333333"/>
+                          </a:solidFill>
+                        </a:defRPr>
+                      </a:pPr>
+                      <a:r>
+                        <a:t>ZSFTP_CAPARIO_PULL</a:t>
+                      </a:r>
+                    </a:p>
+                  </a:txBody>
+                  <a:tcPr>
+                    <a:solidFill>
+                      <a:srgbClr val="F0F2F7"/>
+                    </a:solidFill>
+                  </a:tcPr>
+                </a:tc>
+                <a:tc>
+                  <a:txBody>
+                    <a:bodyPr/>
+                    <a:lstStyle/>
+                    <a:p>
+                      <a:pPr>
+                        <a:defRPr sz="900">
+                          <a:solidFill>
+                            <a:srgbClr val="333333"/>
+                          </a:solidFill>
+                        </a:defRPr>
+                      </a:pPr>
+                      <a:r>
+                        <a:t>✓</a:t>
+                      </a:r>
+                    </a:p>
+                  </a:txBody>
+                  <a:tcPr>
+                    <a:solidFill>
+                      <a:srgbClr val="F0F2F7"/>
+                    </a:solidFill>
+                  </a:tcPr>
+                </a:tc>
+                <a:tc>
+                  <a:txBody>
+                    <a:bodyPr/>
+                    <a:lstStyle/>
+                    <a:p>
+                      <a:pPr>
+                        <a:defRPr sz="900">
+                          <a:solidFill>
+                            <a:srgbClr val="333333"/>
+                          </a:solidFill>
+                        </a:defRPr>
+                      </a:pPr>
+                    </a:p>
+                  </a:txBody>
+                  <a:tcPr>
+                    <a:solidFill>
+                      <a:srgbClr val="F0F2F7"/>
+                    </a:solidFill>
+                  </a:tcPr>
+                </a:tc>
+                <a:tc>
+                  <a:txBody>
+                    <a:bodyPr/>
+                    <a:lstStyle/>
+                    <a:p>
+                      <a:pPr>
+                        <a:defRPr sz="900">
+                          <a:solidFill>
+                            <a:srgbClr val="333333"/>
+                          </a:solidFill>
+                        </a:defRPr>
+                      </a:pPr>
+                      <a:r>
+                        <a:t>✓</a:t>
+                      </a:r>
+                    </a:p>
+                  </a:txBody>
+                  <a:tcPr>
+                    <a:solidFill>
+                      <a:srgbClr val="F0F2F7"/>
+                    </a:solidFill>
+                  </a:tcPr>
+                </a:tc>
+                <a:tc>
+                  <a:txBody>
+                    <a:bodyPr/>
+                    <a:lstStyle/>
+                    <a:p>
+                      <a:pPr>
+                        <a:defRPr sz="900">
+                          <a:solidFill>
+                            <a:srgbClr val="333333"/>
+                          </a:solidFill>
+                        </a:defRPr>
+                      </a:pPr>
+                    </a:p>
+                  </a:txBody>
+                  <a:tcPr>
+                    <a:solidFill>
+                      <a:srgbClr val="F0F2F7"/>
+                    </a:solidFill>
+                  </a:tcPr>
+                </a:tc>
+                <a:tc>
+                  <a:txBody>
+                    <a:bodyPr/>
+                    <a:lstStyle/>
+                    <a:p>
+                      <a:pPr>
+                        <a:defRPr sz="900">
+                          <a:solidFill>
+                            <a:srgbClr val="333333"/>
+                          </a:solidFill>
+                        </a:defRPr>
+                      </a:pPr>
+                      <a:r>
+                        <a:t>✓</a:t>
+                      </a:r>
+                    </a:p>
+                  </a:txBody>
+                  <a:tcPr>
+                    <a:solidFill>
+                      <a:srgbClr val="F0F2F7"/>
+                    </a:solidFill>
+                  </a:tcPr>
+                </a:tc>
+                <a:tc>
+                  <a:txBody>
+                    <a:bodyPr/>
+                    <a:lstStyle/>
+                    <a:p>
+                      <a:pPr>
+                        <a:defRPr sz="900">
+                          <a:solidFill>
+                            <a:srgbClr val="333333"/>
+                          </a:solidFill>
+                        </a:defRPr>
+                      </a:pPr>
+                      <a:r>
+                        <a:t>✓</a:t>
+                      </a:r>
+                    </a:p>
+                  </a:txBody>
+                  <a:tcPr>
+                    <a:solidFill>
+                      <a:srgbClr val="F0F2F7"/>
+                    </a:solidFill>
+                  </a:tcPr>
+                </a:tc>
+                <a:tc>
+                  <a:txBody>
+                    <a:bodyPr/>
+                    <a:lstStyle/>
+                    <a:p>
+                      <a:pPr>
+                        <a:defRPr sz="900">
+                          <a:solidFill>
+                            <a:srgbClr val="333333"/>
+                          </a:solidFill>
+                        </a:defRPr>
+                      </a:pPr>
+                      <a:r>
+                        <a:t>✓</a:t>
+                      </a:r>
+                    </a:p>
+                  </a:txBody>
+                  <a:tcPr>
+                    <a:solidFill>
+                      <a:srgbClr val="F0F2F7"/>
+                    </a:solidFill>
+                  </a:tcPr>
+                </a:tc>
+                <a:tc>
+                  <a:txBody>
+                    <a:bodyPr/>
+                    <a:lstStyle/>
+                    <a:p>
+                      <a:pPr>
+                        <a:defRPr sz="900">
+                          <a:solidFill>
+                            <a:srgbClr val="333333"/>
+                          </a:solidFill>
+                        </a:defRPr>
+                      </a:pPr>
+                      <a:r>
+                        <a:t>FOLDER_PATH</a:t>
+                      </a:r>
+                    </a:p>
+                  </a:txBody>
+                  <a:tcPr>
+                    <a:solidFill>
+                      <a:srgbClr val="F0F2F7"/>
+                    </a:solidFill>
+                  </a:tcPr>
+                </a:tc>
+              </a:tr>
+              <a:tr h="304800">
+                <a:tc>
+                  <a:txBody>
+                    <a:bodyPr/>
+                    <a:lstStyle/>
+                    <a:p>
+                      <a:pPr>
+                        <a:defRPr sz="900">
+                          <a:solidFill>
+                            <a:srgbClr val="333333"/>
+                          </a:solidFill>
+                        </a:defRPr>
+                      </a:pPr>
+                      <a:r>
+                        <a:t>ZSFTP_CAPARIO</a:t>
+                      </a:r>
+                    </a:p>
+                  </a:txBody>
+                  <a:tcPr>
+                    <a:solidFill>
+                      <a:srgbClr val="FFFFFF"/>
+                    </a:solidFill>
+                  </a:tcPr>
+                </a:tc>
+                <a:tc>
+                  <a:txBody>
+                    <a:bodyPr/>
+                    <a:lstStyle/>
+                    <a:p>
+                      <a:pPr>
+                        <a:defRPr sz="900">
+                          <a:solidFill>
+                            <a:srgbClr val="333333"/>
+                          </a:solidFill>
+                        </a:defRPr>
+                      </a:pPr>
+                      <a:r>
+                        <a:t>✓</a:t>
+                      </a:r>
+                    </a:p>
+                  </a:txBody>
+                  <a:tcPr>
+                    <a:solidFill>
+                      <a:srgbClr val="FFFFFF"/>
+                    </a:solidFill>
+                  </a:tcPr>
+                </a:tc>
+                <a:tc>
+                  <a:txBody>
+                    <a:bodyPr/>
+                    <a:lstStyle/>
+                    <a:p>
+                      <a:pPr>
+                        <a:defRPr sz="900">
+                          <a:solidFill>
+                            <a:srgbClr val="333333"/>
+                          </a:solidFill>
+                        </a:defRPr>
+                      </a:pPr>
+                    </a:p>
+                  </a:txBody>
+                  <a:tcPr>
+                    <a:solidFill>
+                      <a:srgbClr val="FFFFFF"/>
+                    </a:solidFill>
+                  </a:tcPr>
+                </a:tc>
+                <a:tc>
+                  <a:txBody>
+                    <a:bodyPr/>
+                    <a:lstStyle/>
+                    <a:p>
+                      <a:pPr>
+                        <a:defRPr sz="900">
+                          <a:solidFill>
+                            <a:srgbClr val="333333"/>
+                          </a:solidFill>
+                        </a:defRPr>
+                      </a:pPr>
+                      <a:r>
+                        <a:t>✓</a:t>
+                      </a:r>
+                    </a:p>
+                  </a:txBody>
+                  <a:tcPr>
+                    <a:solidFill>
+                      <a:srgbClr val="FFFFFF"/>
+                    </a:solidFill>
+                  </a:tcPr>
+                </a:tc>
+                <a:tc>
+                  <a:txBody>
+                    <a:bodyPr/>
+                    <a:lstStyle/>
+                    <a:p>
+                      <a:pPr>
+                        <a:defRPr sz="900">
+                          <a:solidFill>
+                            <a:srgbClr val="333333"/>
+                          </a:solidFill>
+                        </a:defRPr>
+                      </a:pPr>
+                    </a:p>
+                  </a:txBody>
+                  <a:tcPr>
+                    <a:solidFill>
+                      <a:srgbClr val="FFFFFF"/>
+                    </a:solidFill>
+                  </a:tcPr>
+                </a:tc>
+                <a:tc>
+                  <a:txBody>
+                    <a:bodyPr/>
+                    <a:lstStyle/>
+                    <a:p>
+                      <a:pPr>
+                        <a:defRPr sz="900">
+                          <a:solidFill>
+                            <a:srgbClr val="333333"/>
+                          </a:solidFill>
+                        </a:defRPr>
+                      </a:pPr>
+                      <a:r>
+                        <a:t>✓</a:t>
+                      </a:r>
+                    </a:p>
+                  </a:txBody>
+                  <a:tcPr>
+                    <a:solidFill>
+                      <a:srgbClr val="FFFFFF"/>
+                    </a:solidFill>
+                  </a:tcPr>
+                </a:tc>
+                <a:tc>
+                  <a:txBody>
+                    <a:bodyPr/>
+                    <a:lstStyle/>
+                    <a:p>
+                      <a:pPr>
+                        <a:defRPr sz="900">
+                          <a:solidFill>
+                            <a:srgbClr val="333333"/>
+                          </a:solidFill>
+                        </a:defRPr>
+                      </a:pPr>
+                      <a:r>
+                        <a:t>✓</a:t>
+                      </a:r>
+                    </a:p>
+                  </a:txBody>
+                  <a:tcPr>
+                    <a:solidFill>
+                      <a:srgbClr val="FFFFFF"/>
+                    </a:solidFill>
+                  </a:tcPr>
+                </a:tc>
+                <a:tc>
+                  <a:txBody>
+                    <a:bodyPr/>
+                    <a:lstStyle/>
+                    <a:p>
+                      <a:pPr>
+                        <a:defRPr sz="900">
+                          <a:solidFill>
+                            <a:srgbClr val="333333"/>
+                          </a:solidFill>
+                        </a:defRPr>
+                      </a:pPr>
+                      <a:r>
+                        <a:t>✓</a:t>
+                      </a:r>
+                    </a:p>
+                  </a:txBody>
+                  <a:tcPr>
+                    <a:solidFill>
+                      <a:srgbClr val="FFFFFF"/>
+                    </a:solidFill>
+                  </a:tcPr>
+                </a:tc>
+                <a:tc>
+                  <a:txBody>
+                    <a:bodyPr/>
+                    <a:lstStyle/>
+                    <a:p>
+                      <a:pPr>
+                        <a:defRPr sz="900">
+                          <a:solidFill>
+                            <a:srgbClr val="333333"/>
+                          </a:solidFill>
+                        </a:defRPr>
+                      </a:pPr>
+                      <a:r>
+                        <a:t>✓</a:t>
+                      </a:r>
+                    </a:p>
+                  </a:txBody>
+                  <a:tcPr>
+                    <a:solidFill>
+                      <a:srgbClr val="FFFFFF"/>
+                    </a:solidFill>
+                  </a:tcPr>
+                </a:tc>
+              </a:tr>
+              <a:tr h="304800">
+                <a:tc>
+                  <a:txBody>
+                    <a:bodyPr/>
+                    <a:lstStyle/>
+                    <a:p>
+                      <a:pPr>
+                        <a:defRPr sz="900">
+                          <a:solidFill>
+                            <a:srgbClr val="333333"/>
+                          </a:solidFill>
+                        </a:defRPr>
+                      </a:pPr>
+                      <a:r>
+                        <a:t>ZSFTP_PATIENTCO_PULL</a:t>
+                      </a:r>
+                    </a:p>
+                  </a:txBody>
+                  <a:tcPr>
+                    <a:solidFill>
+                      <a:srgbClr val="F0F2F7"/>
+                    </a:solidFill>
+                  </a:tcPr>
+                </a:tc>
+                <a:tc>
+                  <a:txBody>
+                    <a:bodyPr/>
+                    <a:lstStyle/>
+                    <a:p>
+                      <a:pPr>
+                        <a:defRPr sz="900">
+                          <a:solidFill>
+                            <a:srgbClr val="333333"/>
+                          </a:solidFill>
+                        </a:defRPr>
+                      </a:pPr>
+                      <a:r>
+                        <a:t>✓</a:t>
+                      </a:r>
+                    </a:p>
+                  </a:txBody>
+                  <a:tcPr>
+                    <a:solidFill>
+                      <a:srgbClr val="F0F2F7"/>
+                    </a:solidFill>
+                  </a:tcPr>
+                </a:tc>
+                <a:tc>
+                  <a:txBody>
+                    <a:bodyPr/>
+                    <a:lstStyle/>
+                    <a:p>
+                      <a:pPr>
+                        <a:defRPr sz="900">
+                          <a:solidFill>
+                            <a:srgbClr val="333333"/>
+                          </a:solidFill>
+                        </a:defRPr>
+                      </a:pPr>
+                    </a:p>
+                  </a:txBody>
+                  <a:tcPr>
+                    <a:solidFill>
+                      <a:srgbClr val="F0F2F7"/>
+                    </a:solidFill>
+                  </a:tcPr>
+                </a:tc>
+                <a:tc>
+                  <a:txBody>
+                    <a:bodyPr/>
+                    <a:lstStyle/>
+                    <a:p>
+                      <a:pPr>
+                        <a:defRPr sz="900">
+                          <a:solidFill>
+                            <a:srgbClr val="333333"/>
+                          </a:solidFill>
+                        </a:defRPr>
+                      </a:pPr>
+                      <a:r>
+                        <a:t>✓</a:t>
+                      </a:r>
+                    </a:p>
+                  </a:txBody>
+                  <a:tcPr>
+                    <a:solidFill>
+                      <a:srgbClr val="F0F2F7"/>
+                    </a:solidFill>
+                  </a:tcPr>
+                </a:tc>
+                <a:tc>
+                  <a:txBody>
+                    <a:bodyPr/>
+                    <a:lstStyle/>
+                    <a:p>
+                      <a:pPr>
+                        <a:defRPr sz="900">
+                          <a:solidFill>
+                            <a:srgbClr val="333333"/>
+                          </a:solidFill>
+                        </a:defRPr>
+                      </a:pPr>
+                    </a:p>
+                  </a:txBody>
+                  <a:tcPr>
+                    <a:solidFill>
+                      <a:srgbClr val="F0F2F7"/>
+                    </a:solidFill>
+                  </a:tcPr>
+                </a:tc>
+                <a:tc>
+                  <a:txBody>
+                    <a:bodyPr/>
+                    <a:lstStyle/>
+                    <a:p>
+                      <a:pPr>
+                        <a:defRPr sz="900">
+                          <a:solidFill>
+                            <a:srgbClr val="333333"/>
+                          </a:solidFill>
+                        </a:defRPr>
+                      </a:pPr>
+                      <a:r>
+                        <a:t>✓</a:t>
+                      </a:r>
+                    </a:p>
+                  </a:txBody>
+                  <a:tcPr>
+                    <a:solidFill>
+                      <a:srgbClr val="F0F2F7"/>
+                    </a:solidFill>
+                  </a:tcPr>
+                </a:tc>
+                <a:tc>
+                  <a:txBody>
+                    <a:bodyPr/>
+                    <a:lstStyle/>
+                    <a:p>
+                      <a:pPr>
+                        <a:defRPr sz="900">
+                          <a:solidFill>
+                            <a:srgbClr val="333333"/>
+                          </a:solidFill>
+                        </a:defRPr>
+                      </a:pPr>
+                      <a:r>
+                        <a:t>✓</a:t>
+                      </a:r>
+                    </a:p>
+                  </a:txBody>
+                  <a:tcPr>
+                    <a:solidFill>
+                      <a:srgbClr val="F0F2F7"/>
+                    </a:solidFill>
+                  </a:tcPr>
+                </a:tc>
+                <a:tc>
+                  <a:txBody>
+                    <a:bodyPr/>
+                    <a:lstStyle/>
+                    <a:p>
+                      <a:pPr>
+                        <a:defRPr sz="900">
+                          <a:solidFill>
+                            <a:srgbClr val="333333"/>
+                          </a:solidFill>
+                        </a:defRPr>
+                      </a:pPr>
+                      <a:r>
+                        <a:t>✓</a:t>
+                      </a:r>
+                    </a:p>
+                  </a:txBody>
+                  <a:tcPr>
+                    <a:solidFill>
+                      <a:srgbClr val="F0F2F7"/>
+                    </a:solidFill>
+                  </a:tcPr>
+                </a:tc>
+                <a:tc>
+                  <a:txBody>
+                    <a:bodyPr/>
+                    <a:lstStyle/>
+                    <a:p>
+                      <a:pPr>
+                        <a:defRPr sz="900">
+                          <a:solidFill>
+                            <a:srgbClr val="333333"/>
+                          </a:solidFill>
+                        </a:defRPr>
+                      </a:pPr>
+                      <a:r>
+                        <a:t>✓</a:t>
+                      </a:r>
+                    </a:p>
+                  </a:txBody>
+                  <a:tcPr>
+                    <a:solidFill>
+                      <a:srgbClr val="F0F2F7"/>
+                    </a:solidFill>
+                  </a:tcPr>
+                </a:tc>
+              </a:tr>
+              <a:tr h="304800">
+                <a:tc>
+                  <a:txBody>
+                    <a:bodyPr/>
+                    <a:lstStyle/>
+                    <a:p>
+                      <a:pPr>
+                        <a:defRPr sz="900">
+                          <a:solidFill>
+                            <a:srgbClr val="333333"/>
+                          </a:solidFill>
+                        </a:defRPr>
+                      </a:pPr>
+                      <a:r>
+                        <a:t>ZSFTP_JPM / _PULL</a:t>
+                      </a:r>
+                    </a:p>
+                  </a:txBody>
+                  <a:tcPr>
+                    <a:solidFill>
+                      <a:srgbClr val="FFFFFF"/>
+                    </a:solidFill>
+                  </a:tcPr>
+                </a:tc>
+                <a:tc>
+                  <a:txBody>
+                    <a:bodyPr/>
+                    <a:lstStyle/>
+                    <a:p>
+                      <a:pPr>
+                        <a:defRPr sz="900">
+                          <a:solidFill>
+                            <a:srgbClr val="333333"/>
+                          </a:solidFill>
+                        </a:defRPr>
+                      </a:pPr>
+                      <a:r>
+                        <a:t>✓</a:t>
+                      </a:r>
+                    </a:p>
+                  </a:txBody>
+                  <a:tcPr>
+                    <a:solidFill>
+                      <a:srgbClr val="FFFFFF"/>
+                    </a:solidFill>
+                  </a:tcPr>
+                </a:tc>
+                <a:tc>
+                  <a:txBody>
+                    <a:bodyPr/>
+                    <a:lstStyle/>
+                    <a:p>
+                      <a:pPr>
+                        <a:defRPr sz="900">
+                          <a:solidFill>
+                            <a:srgbClr val="333333"/>
+                          </a:solidFill>
+                        </a:defRPr>
+                      </a:pPr>
+                    </a:p>
+                  </a:txBody>
+                  <a:tcPr>
+                    <a:solidFill>
+                      <a:srgbClr val="FFFFFF"/>
+                    </a:solidFill>
+                  </a:tcPr>
+                </a:tc>
+                <a:tc>
+                  <a:txBody>
+                    <a:bodyPr/>
+                    <a:lstStyle/>
+                    <a:p>
+                      <a:pPr>
+                        <a:defRPr sz="900">
+                          <a:solidFill>
+                            <a:srgbClr val="333333"/>
+                          </a:solidFill>
+                        </a:defRPr>
+                      </a:pPr>
+                      <a:r>
+                        <a:t>✓</a:t>
+                      </a:r>
+                    </a:p>
+                  </a:txBody>
+                  <a:tcPr>
+                    <a:solidFill>
+                      <a:srgbClr val="FFFFFF"/>
+                    </a:solidFill>
+                  </a:tcPr>
+                </a:tc>
+                <a:tc>
+                  <a:txBody>
+                    <a:bodyPr/>
+                    <a:lstStyle/>
+                    <a:p>
+                      <a:pPr>
+                        <a:defRPr sz="900">
+                          <a:solidFill>
+                            <a:srgbClr val="333333"/>
+                          </a:solidFill>
+                        </a:defRPr>
+                      </a:pPr>
+                    </a:p>
+                  </a:txBody>
+                  <a:tcPr>
+                    <a:solidFill>
+                      <a:srgbClr val="FFFFFF"/>
+                    </a:solidFill>
+                  </a:tcPr>
+                </a:tc>
+                <a:tc>
+                  <a:txBody>
+                    <a:bodyPr/>
+                    <a:lstStyle/>
+                    <a:p>
+                      <a:pPr>
+                        <a:defRPr sz="900">
+                          <a:solidFill>
+                            <a:srgbClr val="333333"/>
+                          </a:solidFill>
+                        </a:defRPr>
+                      </a:pPr>
+                      <a:r>
+                        <a:t>✓</a:t>
+                      </a:r>
+                    </a:p>
+                  </a:txBody>
+                  <a:tcPr>
+                    <a:solidFill>
+                      <a:srgbClr val="FFFFFF"/>
+                    </a:solidFill>
+                  </a:tcPr>
+                </a:tc>
+                <a:tc>
+                  <a:txBody>
+                    <a:bodyPr/>
+                    <a:lstStyle/>
+                    <a:p>
+                      <a:pPr>
+                        <a:defRPr sz="900">
+                          <a:solidFill>
+                            <a:srgbClr val="333333"/>
+                          </a:solidFill>
+                        </a:defRPr>
+                      </a:pPr>
+                      <a:r>
+                        <a:t>✓</a:t>
+                      </a:r>
+                    </a:p>
+                  </a:txBody>
+                  <a:tcPr>
+                    <a:solidFill>
+                      <a:srgbClr val="FFFFFF"/>
+                    </a:solidFill>
+                  </a:tcPr>
+                </a:tc>
+                <a:tc>
+                  <a:txBody>
+                    <a:bodyPr/>
+                    <a:lstStyle/>
+                    <a:p>
+                      <a:pPr>
+                        <a:defRPr sz="900">
+                          <a:solidFill>
+                            <a:srgbClr val="333333"/>
+                          </a:solidFill>
+                        </a:defRPr>
+                      </a:pPr>
+                      <a:r>
+                        <a:t>✓</a:t>
+                      </a:r>
+                    </a:p>
+                  </a:txBody>
+                  <a:tcPr>
+                    <a:solidFill>
+                      <a:srgbClr val="FFFFFF"/>
+                    </a:solidFill>
+                  </a:tcPr>
+                </a:tc>
+                <a:tc>
+                  <a:txBody>
+                    <a:bodyPr/>
+                    <a:lstStyle/>
+                    <a:p>
+                      <a:pPr>
+                        <a:defRPr sz="900">
+                          <a:solidFill>
+                            <a:srgbClr val="333333"/>
+                          </a:solidFill>
+                        </a:defRPr>
+                      </a:pPr>
+                      <a:r>
+                        <a:t>✓</a:t>
+                      </a:r>
+                    </a:p>
+                  </a:txBody>
+                  <a:tcPr>
+                    <a:solidFill>
+                      <a:srgbClr val="FFFFFF"/>
+                    </a:solidFill>
+                  </a:tcPr>
+                </a:tc>
+              </a:tr>
+              <a:tr h="304800">
+                <a:tc>
+                  <a:txBody>
+                    <a:bodyPr/>
+                    <a:lstStyle/>
+                    <a:p>
+                      <a:pPr>
+                        <a:defRPr sz="900">
+                          <a:solidFill>
+                            <a:srgbClr val="333333"/>
+                          </a:solidFill>
+                        </a:defRPr>
+                      </a:pPr>
+                      <a:r>
+                        <a:t>ZFFIU_ACC_POST → CERIDIAN</a:t>
+                      </a:r>
+                    </a:p>
+                  </a:txBody>
+                  <a:tcPr>
+                    <a:solidFill>
+                      <a:srgbClr val="F0F2F7"/>
+                    </a:solidFill>
+                  </a:tcPr>
+                </a:tc>
+                <a:tc>
+                  <a:txBody>
+                    <a:bodyPr/>
+                    <a:lstStyle/>
+                    <a:p>
+                      <a:pPr>
+                        <a:defRPr sz="900">
+                          <a:solidFill>
+                            <a:srgbClr val="333333"/>
+                          </a:solidFill>
+                        </a:defRPr>
+                      </a:pPr>
+                      <a:r>
+                        <a:t>✓</a:t>
+                      </a:r>
+                    </a:p>
+                  </a:txBody>
+                  <a:tcPr>
+                    <a:solidFill>
+                      <a:srgbClr val="F0F2F7"/>
+                    </a:solidFill>
+                  </a:tcPr>
+                </a:tc>
+                <a:tc>
+                  <a:txBody>
+                    <a:bodyPr/>
+                    <a:lstStyle/>
+                    <a:p>
+                      <a:pPr>
+                        <a:defRPr sz="900">
+                          <a:solidFill>
+                            <a:srgbClr val="333333"/>
+                          </a:solidFill>
+                        </a:defRPr>
+                      </a:pPr>
+                    </a:p>
+                  </a:txBody>
+                  <a:tcPr>
+                    <a:solidFill>
+                      <a:srgbClr val="F0F2F7"/>
+                    </a:solidFill>
+                  </a:tcPr>
+                </a:tc>
+                <a:tc>
+                  <a:txBody>
+                    <a:bodyPr/>
+                    <a:lstStyle/>
+                    <a:p>
+                      <a:pPr>
+                        <a:defRPr sz="900">
+                          <a:solidFill>
+                            <a:srgbClr val="333333"/>
+                          </a:solidFill>
+                        </a:defRPr>
+                      </a:pPr>
+                      <a:r>
+                        <a:t>✓</a:t>
+                      </a:r>
+                    </a:p>
+                  </a:txBody>
+                  <a:tcPr>
+                    <a:solidFill>
+                      <a:srgbClr val="F0F2F7"/>
+                    </a:solidFill>
+                  </a:tcPr>
+                </a:tc>
+                <a:tc>
+                  <a:txBody>
+                    <a:bodyPr/>
+                    <a:lstStyle/>
+                    <a:p>
+                      <a:pPr>
+                        <a:defRPr sz="900">
+                          <a:solidFill>
+                            <a:srgbClr val="333333"/>
+                          </a:solidFill>
+                        </a:defRPr>
+                      </a:pPr>
+                    </a:p>
+                  </a:txBody>
+                  <a:tcPr>
+                    <a:solidFill>
+                      <a:srgbClr val="F0F2F7"/>
+                    </a:solidFill>
+                  </a:tcPr>
+                </a:tc>
+                <a:tc>
+                  <a:txBody>
+                    <a:bodyPr/>
+                    <a:lstStyle/>
+                    <a:p>
+                      <a:pPr>
+                        <a:defRPr sz="900">
+                          <a:solidFill>
+                            <a:srgbClr val="333333"/>
+                          </a:solidFill>
+                        </a:defRPr>
+                      </a:pPr>
+                      <a:r>
+                        <a:t>✓</a:t>
+                      </a:r>
+                    </a:p>
+                  </a:txBody>
+                  <a:tcPr>
+                    <a:solidFill>
+                      <a:srgbClr val="F0F2F7"/>
+                    </a:solidFill>
+                  </a:tcPr>
+                </a:tc>
+                <a:tc>
+                  <a:txBody>
+                    <a:bodyPr/>
+                    <a:lstStyle/>
+                    <a:p>
+                      <a:pPr>
+                        <a:defRPr sz="900">
+                          <a:solidFill>
+                            <a:srgbClr val="333333"/>
+                          </a:solidFill>
+                        </a:defRPr>
+                      </a:pPr>
+                      <a:r>
+                        <a:t>✓</a:t>
+                      </a:r>
+                    </a:p>
+                  </a:txBody>
+                  <a:tcPr>
+                    <a:solidFill>
+                      <a:srgbClr val="F0F2F7"/>
+                    </a:solidFill>
+                  </a:tcPr>
+                </a:tc>
+                <a:tc>
+                  <a:txBody>
+                    <a:bodyPr/>
+                    <a:lstStyle/>
+                    <a:p>
+                      <a:pPr>
+                        <a:defRPr sz="900">
+                          <a:solidFill>
+                            <a:srgbClr val="333333"/>
+                          </a:solidFill>
+                        </a:defRPr>
+                      </a:pPr>
+                      <a:r>
+                        <a:t>✓</a:t>
+                      </a:r>
+                    </a:p>
+                  </a:txBody>
+                  <a:tcPr>
+                    <a:solidFill>
+                      <a:srgbClr val="F0F2F7"/>
+                    </a:solidFill>
+                  </a:tcPr>
+                </a:tc>
+                <a:tc>
+                  <a:txBody>
+                    <a:bodyPr/>
+                    <a:lstStyle/>
+                    <a:p>
+                      <a:pPr>
+                        <a:defRPr sz="900">
+                          <a:solidFill>
+                            <a:srgbClr val="333333"/>
+                          </a:solidFill>
+                        </a:defRPr>
+                      </a:pPr>
+                      <a:r>
+                        <a:t>SOURCE_FOLDER</a:t>
+                      </a:r>
+                    </a:p>
+                  </a:txBody>
+                  <a:tcPr>
+                    <a:solidFill>
+                      <a:srgbClr val="F0F2F7"/>
+                    </a:solidFill>
+                  </a:tcPr>
+                </a:tc>
+              </a:tr>
+              <a:tr h="304800">
+                <a:tc>
+                  <a:txBody>
+                    <a:bodyPr/>
+                    <a:lstStyle/>
+                    <a:p>
+                      <a:pPr>
+                        <a:defRPr sz="900">
+                          <a:solidFill>
+                            <a:srgbClr val="333333"/>
+                          </a:solidFill>
+                        </a:defRPr>
+                      </a:pPr>
+                      <a:r>
+                        <a:t>ZSFTP_CERIDIAN_PULL</a:t>
+                      </a:r>
+                    </a:p>
+                  </a:txBody>
+                  <a:tcPr>
+                    <a:solidFill>
+                      <a:srgbClr val="FFFFFF"/>
+                    </a:solidFill>
+                  </a:tcPr>
+                </a:tc>
+                <a:tc>
+                  <a:txBody>
+                    <a:bodyPr/>
+                    <a:lstStyle/>
+                    <a:p>
+                      <a:pPr>
+                        <a:defRPr sz="900">
+                          <a:solidFill>
+                            <a:srgbClr val="333333"/>
+                          </a:solidFill>
+                        </a:defRPr>
+                      </a:pPr>
+                      <a:r>
+                        <a:t>✓</a:t>
+                      </a:r>
+                    </a:p>
+                  </a:txBody>
+                  <a:tcPr>
+                    <a:solidFill>
+                      <a:srgbClr val="FFFFFF"/>
+                    </a:solidFill>
+                  </a:tcPr>
+                </a:tc>
+                <a:tc>
+                  <a:txBody>
+                    <a:bodyPr/>
+                    <a:lstStyle/>
+                    <a:p>
+                      <a:pPr>
+                        <a:defRPr sz="900">
+                          <a:solidFill>
+                            <a:srgbClr val="333333"/>
+                          </a:solidFill>
+                        </a:defRPr>
+                      </a:pPr>
+                    </a:p>
+                  </a:txBody>
+                  <a:tcPr>
+                    <a:solidFill>
+                      <a:srgbClr val="FFFFFF"/>
+                    </a:solidFill>
+                  </a:tcPr>
+                </a:tc>
+                <a:tc>
+                  <a:txBody>
+                    <a:bodyPr/>
+                    <a:lstStyle/>
+                    <a:p>
+                      <a:pPr>
+                        <a:defRPr sz="900">
+                          <a:solidFill>
+                            <a:srgbClr val="333333"/>
+                          </a:solidFill>
+                        </a:defRPr>
+                      </a:pPr>
+                      <a:r>
+                        <a:t>✓</a:t>
+                      </a:r>
+                    </a:p>
+                  </a:txBody>
+                  <a:tcPr>
+                    <a:solidFill>
+                      <a:srgbClr val="FFFFFF"/>
+                    </a:solidFill>
+                  </a:tcPr>
+                </a:tc>
+                <a:tc>
+                  <a:txBody>
+                    <a:bodyPr/>
+                    <a:lstStyle/>
+                    <a:p>
+                      <a:pPr>
+                        <a:defRPr sz="900">
+                          <a:solidFill>
+                            <a:srgbClr val="333333"/>
+                          </a:solidFill>
+                        </a:defRPr>
+                      </a:pPr>
+                    </a:p>
+                  </a:txBody>
+                  <a:tcPr>
+                    <a:solidFill>
+                      <a:srgbClr val="FFFFFF"/>
+                    </a:solidFill>
+                  </a:tcPr>
+                </a:tc>
+                <a:tc>
+                  <a:txBody>
+                    <a:bodyPr/>
+                    <a:lstStyle/>
+                    <a:p>
+                      <a:pPr>
+                        <a:defRPr sz="900">
+                          <a:solidFill>
+                            <a:srgbClr val="333333"/>
+                          </a:solidFill>
+                        </a:defRPr>
+                      </a:pPr>
+                      <a:r>
+                        <a:t>✓</a:t>
+                      </a:r>
+                    </a:p>
+                  </a:txBody>
+                  <a:tcPr>
+                    <a:solidFill>
+                      <a:srgbClr val="FFFFFF"/>
+                    </a:solidFill>
+                  </a:tcPr>
+                </a:tc>
+                <a:tc>
+                  <a:txBody>
+                    <a:bodyPr/>
+                    <a:lstStyle/>
+                    <a:p>
+                      <a:pPr>
+                        <a:defRPr sz="900">
+                          <a:solidFill>
+                            <a:srgbClr val="333333"/>
+                          </a:solidFill>
+                        </a:defRPr>
+                      </a:pPr>
+                      <a:r>
+                        <a:t>✓</a:t>
+                      </a:r>
+                    </a:p>
+                  </a:txBody>
+                  <a:tcPr>
+                    <a:solidFill>
+                      <a:srgbClr val="FFFFFF"/>
+                    </a:solidFill>
+                  </a:tcPr>
+                </a:tc>
+                <a:tc>
+                  <a:txBody>
+                    <a:bodyPr/>
+                    <a:lstStyle/>
+                    <a:p>
+                      <a:pPr>
+                        <a:defRPr sz="900">
+                          <a:solidFill>
+                            <a:srgbClr val="333333"/>
+                          </a:solidFill>
+                        </a:defRPr>
+                      </a:pPr>
+                      <a:r>
+                        <a:t>✓</a:t>
+                      </a:r>
+                    </a:p>
+                  </a:txBody>
+                  <a:tcPr>
+                    <a:solidFill>
+                      <a:srgbClr val="FFFFFF"/>
+                    </a:solidFill>
+                  </a:tcPr>
+                </a:tc>
+                <a:tc>
+                  <a:txBody>
+                    <a:bodyPr/>
+                    <a:lstStyle/>
+                    <a:p>
+                      <a:pPr>
+                        <a:defRPr sz="900">
+                          <a:solidFill>
+                            <a:srgbClr val="333333"/>
+                          </a:solidFill>
+                        </a:defRPr>
+                      </a:pPr>
+                      <a:r>
+                        <a:t>SOURCE_FOLDER</a:t>
+                      </a:r>
+                    </a:p>
+                  </a:txBody>
+                  <a:tcPr>
+                    <a:solidFill>
+                      <a:srgbClr val="FFFFFF"/>
+                    </a:solidFill>
+                  </a:tcPr>
+                </a:tc>
+              </a:tr>
+              <a:tr h="304800">
+                <a:tc>
+                  <a:txBody>
+                    <a:bodyPr/>
+                    <a:lstStyle/>
+                    <a:p>
+                      <a:pPr>
+                        <a:defRPr sz="900">
+                          <a:solidFill>
+                            <a:srgbClr val="333333"/>
+                          </a:solidFill>
+                        </a:defRPr>
+                      </a:pPr>
+                      <a:r>
+                        <a:t>ZDMS_UPLOAD_FILES / REPLACE</a:t>
+                      </a:r>
+                    </a:p>
+                  </a:txBody>
+                  <a:tcPr>
+                    <a:solidFill>
+                      <a:srgbClr val="F0F2F7"/>
+                    </a:solidFill>
+                  </a:tcPr>
+                </a:tc>
+                <a:tc>
+                  <a:txBody>
+                    <a:bodyPr/>
+                    <a:lstStyle/>
+                    <a:p>
+                      <a:pPr>
+                        <a:defRPr sz="900">
+                          <a:solidFill>
+                            <a:srgbClr val="333333"/>
+                          </a:solidFill>
+                        </a:defRPr>
+                      </a:pPr>
+                      <a:r>
+                        <a:t>✓</a:t>
+                      </a:r>
+                    </a:p>
+                  </a:txBody>
+                  <a:tcPr>
+                    <a:solidFill>
+                      <a:srgbClr val="F0F2F7"/>
+                    </a:solidFill>
+                  </a:tcPr>
+                </a:tc>
+                <a:tc>
+                  <a:txBody>
+                    <a:bodyPr/>
+                    <a:lstStyle/>
+                    <a:p>
+                      <a:pPr>
+                        <a:defRPr sz="900">
+                          <a:solidFill>
+                            <a:srgbClr val="333333"/>
+                          </a:solidFill>
+                        </a:defRPr>
+                      </a:pPr>
+                    </a:p>
+                  </a:txBody>
+                  <a:tcPr>
+                    <a:solidFill>
+                      <a:srgbClr val="F0F2F7"/>
+                    </a:solidFill>
+                  </a:tcPr>
+                </a:tc>
+                <a:tc>
+                  <a:txBody>
+                    <a:bodyPr/>
+                    <a:lstStyle/>
+                    <a:p>
+                      <a:pPr>
+                        <a:defRPr sz="900">
+                          <a:solidFill>
+                            <a:srgbClr val="333333"/>
+                          </a:solidFill>
+                        </a:defRPr>
+                      </a:pPr>
+                      <a:r>
+                        <a:t>✓</a:t>
+                      </a:r>
+                    </a:p>
+                  </a:txBody>
+                  <a:tcPr>
+                    <a:solidFill>
+                      <a:srgbClr val="F0F2F7"/>
+                    </a:solidFill>
+                  </a:tcPr>
+                </a:tc>
+                <a:tc>
+                  <a:txBody>
+                    <a:bodyPr/>
+                    <a:lstStyle/>
+                    <a:p>
+                      <a:pPr>
+                        <a:defRPr sz="900">
+                          <a:solidFill>
+                            <a:srgbClr val="333333"/>
+                          </a:solidFill>
+                        </a:defRPr>
+                      </a:pPr>
+                    </a:p>
+                  </a:txBody>
+                  <a:tcPr>
+                    <a:solidFill>
+                      <a:srgbClr val="F0F2F7"/>
+                    </a:solidFill>
+                  </a:tcPr>
+                </a:tc>
+                <a:tc>
+                  <a:txBody>
+                    <a:bodyPr/>
+                    <a:lstStyle/>
+                    <a:p>
+                      <a:pPr>
+                        <a:defRPr sz="900">
+                          <a:solidFill>
+                            <a:srgbClr val="333333"/>
+                          </a:solidFill>
+                        </a:defRPr>
+                      </a:pPr>
+                      <a:r>
+                        <a:t>✓</a:t>
+                      </a:r>
+                    </a:p>
+                  </a:txBody>
+                  <a:tcPr>
+                    <a:solidFill>
+                      <a:srgbClr val="F0F2F7"/>
+                    </a:solidFill>
+                  </a:tcPr>
+                </a:tc>
+                <a:tc>
+                  <a:txBody>
+                    <a:bodyPr/>
+                    <a:lstStyle/>
+                    <a:p>
+                      <a:pPr>
+                        <a:defRPr sz="900">
+                          <a:solidFill>
+                            <a:srgbClr val="333333"/>
+                          </a:solidFill>
+                        </a:defRPr>
+                      </a:pPr>
+                      <a:r>
+                        <a:t>✓</a:t>
+                      </a:r>
+                    </a:p>
+                  </a:txBody>
+                  <a:tcPr>
+                    <a:solidFill>
+                      <a:srgbClr val="F0F2F7"/>
+                    </a:solidFill>
+                  </a:tcPr>
+                </a:tc>
+                <a:tc>
+                  <a:txBody>
+                    <a:bodyPr/>
+                    <a:lstStyle/>
+                    <a:p>
+                      <a:pPr>
+                        <a:defRPr sz="900">
+                          <a:solidFill>
+                            <a:srgbClr val="333333"/>
+                          </a:solidFill>
+                        </a:defRPr>
+                      </a:pPr>
+                      <a:r>
+                        <a:t>✓</a:t>
+                      </a:r>
+                    </a:p>
+                  </a:txBody>
+                  <a:tcPr>
+                    <a:solidFill>
+                      <a:srgbClr val="F0F2F7"/>
+                    </a:solidFill>
+                  </a:tcPr>
+                </a:tc>
+                <a:tc>
+                  <a:txBody>
+                    <a:bodyPr/>
+                    <a:lstStyle/>
+                    <a:p>
+                      <a:pPr>
+                        <a:defRPr sz="900">
+                          <a:solidFill>
+                            <a:srgbClr val="333333"/>
+                          </a:solidFill>
+                        </a:defRPr>
+                      </a:pPr>
+                      <a:r>
+                        <a:t>SOURCE_FOLDER + ZDEST_FOLD</a:t>
+                      </a:r>
+                    </a:p>
+                  </a:txBody>
+                  <a:tcPr>
+                    <a:solidFill>
+                      <a:srgbClr val="F0F2F7"/>
+                    </a:solidFill>
+                  </a:tcPr>
+                </a:tc>
+              </a:tr>
+              <a:tr h="304800">
+                <a:tc>
+                  <a:txBody>
+                    <a:bodyPr/>
+                    <a:lstStyle/>
+                    <a:p>
+                      <a:pPr>
+                        <a:defRPr sz="900">
+                          <a:solidFill>
+                            <a:srgbClr val="333333"/>
+                          </a:solidFill>
+                        </a:defRPr>
+                      </a:pPr>
+                      <a:r>
+                        <a:t>ZSD_MEDICARE (via ZMEDI FM)</a:t>
+                      </a:r>
+                    </a:p>
+                  </a:txBody>
+                  <a:tcPr>
+                    <a:solidFill>
+                      <a:srgbClr val="FFFFFF"/>
+                    </a:solidFill>
+                  </a:tcPr>
+                </a:tc>
+                <a:tc>
+                  <a:txBody>
+                    <a:bodyPr/>
+                    <a:lstStyle/>
+                    <a:p>
+                      <a:pPr>
+                        <a:defRPr sz="900">
+                          <a:solidFill>
+                            <a:srgbClr val="333333"/>
+                          </a:solidFill>
+                        </a:defRPr>
+                      </a:pPr>
+                      <a:r>
+                        <a:t>✓</a:t>
+                      </a:r>
+                    </a:p>
+                  </a:txBody>
+                  <a:tcPr>
+                    <a:solidFill>
+                      <a:srgbClr val="FFFFFF"/>
+                    </a:solidFill>
+                  </a:tcPr>
+                </a:tc>
+                <a:tc>
+                  <a:txBody>
+                    <a:bodyPr/>
+                    <a:lstStyle/>
+                    <a:p>
+                      <a:pPr>
+                        <a:defRPr sz="900">
+                          <a:solidFill>
+                            <a:srgbClr val="333333"/>
+                          </a:solidFill>
+                        </a:defRPr>
+                      </a:pPr>
+                    </a:p>
+                  </a:txBody>
+                  <a:tcPr>
+                    <a:solidFill>
+                      <a:srgbClr val="FFFFFF"/>
+                    </a:solidFill>
+                  </a:tcPr>
+                </a:tc>
+                <a:tc>
+                  <a:txBody>
+                    <a:bodyPr/>
+                    <a:lstStyle/>
+                    <a:p>
+                      <a:pPr>
+                        <a:defRPr sz="900">
+                          <a:solidFill>
+                            <a:srgbClr val="333333"/>
+                          </a:solidFill>
+                        </a:defRPr>
+                      </a:pPr>
+                      <a:r>
+                        <a:t>✓</a:t>
+                      </a:r>
+                    </a:p>
+                  </a:txBody>
+                  <a:tcPr>
+                    <a:solidFill>
+                      <a:srgbClr val="FFFFFF"/>
+                    </a:solidFill>
+                  </a:tcPr>
+                </a:tc>
+                <a:tc>
+                  <a:txBody>
+                    <a:bodyPr/>
+                    <a:lstStyle/>
+                    <a:p>
+                      <a:pPr>
+                        <a:defRPr sz="900">
+                          <a:solidFill>
+                            <a:srgbClr val="333333"/>
+                          </a:solidFill>
+                        </a:defRPr>
+                      </a:pPr>
+                    </a:p>
+                  </a:txBody>
+                  <a:tcPr>
+                    <a:solidFill>
+                      <a:srgbClr val="FFFFFF"/>
+                    </a:solidFill>
+                  </a:tcPr>
+                </a:tc>
+                <a:tc>
+                  <a:txBody>
+                    <a:bodyPr/>
+                    <a:lstStyle/>
+                    <a:p>
+                      <a:pPr>
+                        <a:defRPr sz="900">
+                          <a:solidFill>
+                            <a:srgbClr val="333333"/>
+                          </a:solidFill>
+                        </a:defRPr>
+                      </a:pPr>
+                      <a:r>
+                        <a:t>✓</a:t>
+                      </a:r>
+                    </a:p>
+                  </a:txBody>
+                  <a:tcPr>
+                    <a:solidFill>
+                      <a:srgbClr val="FFFFFF"/>
+                    </a:solidFill>
+                  </a:tcPr>
+                </a:tc>
+                <a:tc>
+                  <a:txBody>
+                    <a:bodyPr/>
+                    <a:lstStyle/>
+                    <a:p>
+                      <a:pPr>
+                        <a:defRPr sz="900">
+                          <a:solidFill>
+                            <a:srgbClr val="333333"/>
+                          </a:solidFill>
+                        </a:defRPr>
+                      </a:pPr>
+                      <a:r>
+                        <a:t>✓</a:t>
+                      </a:r>
+                    </a:p>
+                  </a:txBody>
+                  <a:tcPr>
+                    <a:solidFill>
+                      <a:srgbClr val="FFFFFF"/>
+                    </a:solidFill>
+                  </a:tcPr>
+                </a:tc>
+                <a:tc>
+                  <a:txBody>
+                    <a:bodyPr/>
+                    <a:lstStyle/>
+                    <a:p>
+                      <a:pPr>
+                        <a:defRPr sz="900">
+                          <a:solidFill>
+                            <a:srgbClr val="333333"/>
+                          </a:solidFill>
+                        </a:defRPr>
+                      </a:pPr>
+                      <a:r>
+                        <a:t>✓</a:t>
+                      </a:r>
+                    </a:p>
+                  </a:txBody>
+                  <a:tcPr>
+                    <a:solidFill>
+                      <a:srgbClr val="FFFFFF"/>
+                    </a:solidFill>
+                  </a:tcPr>
+                </a:tc>
+                <a:tc>
+                  <a:txBody>
+                    <a:bodyPr/>
+                    <a:lstStyle/>
+                    <a:p>
+                      <a:pPr>
+                        <a:defRPr sz="900">
+                          <a:solidFill>
+                            <a:srgbClr val="333333"/>
+                          </a:solidFill>
+                        </a:defRPr>
+                      </a:pPr>
+                      <a:r>
+                        <a:t>SOURCE_PATH + SOURCE_FOLDER + ZDEST_FOLD</a:t>
+                      </a:r>
+                    </a:p>
+                  </a:txBody>
+                  <a:tcPr>
+                    <a:solidFill>
+                      <a:srgbClr val="FFFFFF"/>
+                    </a:solidFill>
+                  </a:tcPr>
+                </a:tc>
+              </a:tr>
+              <a:tr h="304800">
+                <a:tc>
+                  <a:txBody>
+                    <a:bodyPr/>
+                    <a:lstStyle/>
+                    <a:p>
+                      <a:pPr>
+                        <a:defRPr sz="900">
+                          <a:solidFill>
+                            <a:srgbClr val="333333"/>
+                          </a:solidFill>
+                        </a:defRPr>
+                      </a:pPr>
+                      <a:r>
+                        <a:t>ZSD_ERX_DMS (via ZERX FM)</a:t>
+                      </a:r>
+                    </a:p>
+                  </a:txBody>
+                  <a:tcPr>
+                    <a:solidFill>
+                      <a:srgbClr val="F0F2F7"/>
+                    </a:solidFill>
+                  </a:tcPr>
+                </a:tc>
+                <a:tc>
+                  <a:txBody>
+                    <a:bodyPr/>
+                    <a:lstStyle/>
+                    <a:p>
+                      <a:pPr>
+                        <a:defRPr sz="900">
+                          <a:solidFill>
+                            <a:srgbClr val="333333"/>
+                          </a:solidFill>
+                        </a:defRPr>
+                      </a:pPr>
+                      <a:r>
+                        <a:t>✓</a:t>
+                      </a:r>
+                    </a:p>
+                  </a:txBody>
+                  <a:tcPr>
+                    <a:solidFill>
+                      <a:srgbClr val="F0F2F7"/>
+                    </a:solidFill>
+                  </a:tcPr>
+                </a:tc>
+                <a:tc>
+                  <a:txBody>
+                    <a:bodyPr/>
+                    <a:lstStyle/>
+                    <a:p>
+                      <a:pPr>
+                        <a:defRPr sz="900">
+                          <a:solidFill>
+                            <a:srgbClr val="333333"/>
+                          </a:solidFill>
+                        </a:defRPr>
+                      </a:pPr>
+                    </a:p>
+                  </a:txBody>
+                  <a:tcPr>
+                    <a:solidFill>
+                      <a:srgbClr val="F0F2F7"/>
+                    </a:solidFill>
+                  </a:tcPr>
+                </a:tc>
+                <a:tc>
+                  <a:txBody>
+                    <a:bodyPr/>
+                    <a:lstStyle/>
+                    <a:p>
+                      <a:pPr>
+                        <a:defRPr sz="900">
+                          <a:solidFill>
+                            <a:srgbClr val="333333"/>
+                          </a:solidFill>
+                        </a:defRPr>
+                      </a:pPr>
+                      <a:r>
+                        <a:t>✓</a:t>
+                      </a:r>
+                    </a:p>
+                  </a:txBody>
+                  <a:tcPr>
+                    <a:solidFill>
+                      <a:srgbClr val="F0F2F7"/>
+                    </a:solidFill>
+                  </a:tcPr>
+                </a:tc>
+                <a:tc>
+                  <a:txBody>
+                    <a:bodyPr/>
+                    <a:lstStyle/>
+                    <a:p>
+                      <a:pPr>
+                        <a:defRPr sz="900">
+                          <a:solidFill>
+                            <a:srgbClr val="333333"/>
+                          </a:solidFill>
+                        </a:defRPr>
+                      </a:pPr>
+                    </a:p>
+                  </a:txBody>
+                  <a:tcPr>
+                    <a:solidFill>
+                      <a:srgbClr val="F0F2F7"/>
+                    </a:solidFill>
+                  </a:tcPr>
+                </a:tc>
+                <a:tc>
+                  <a:txBody>
+                    <a:bodyPr/>
+                    <a:lstStyle/>
+                    <a:p>
+                      <a:pPr>
+                        <a:defRPr sz="900">
+                          <a:solidFill>
+                            <a:srgbClr val="333333"/>
+                          </a:solidFill>
+                        </a:defRPr>
+                      </a:pPr>
+                      <a:r>
+                        <a:t>✓</a:t>
+                      </a:r>
+                    </a:p>
+                  </a:txBody>
+                  <a:tcPr>
+                    <a:solidFill>
+                      <a:srgbClr val="F0F2F7"/>
+                    </a:solidFill>
+                  </a:tcPr>
+                </a:tc>
+                <a:tc>
+                  <a:txBody>
+                    <a:bodyPr/>
+                    <a:lstStyle/>
+                    <a:p>
+                      <a:pPr>
+                        <a:defRPr sz="900">
+                          <a:solidFill>
+                            <a:srgbClr val="333333"/>
+                          </a:solidFill>
+                        </a:defRPr>
+                      </a:pPr>
+                      <a:r>
+                        <a:t>✓</a:t>
+                      </a:r>
+                    </a:p>
+                  </a:txBody>
+                  <a:tcPr>
+                    <a:solidFill>
+                      <a:srgbClr val="F0F2F7"/>
+                    </a:solidFill>
+                  </a:tcPr>
+                </a:tc>
+                <a:tc>
+                  <a:txBody>
+                    <a:bodyPr/>
+                    <a:lstStyle/>
+                    <a:p>
+                      <a:pPr>
+                        <a:defRPr sz="900">
+                          <a:solidFill>
+                            <a:srgbClr val="333333"/>
+                          </a:solidFill>
+                        </a:defRPr>
+                      </a:pPr>
+                      <a:r>
+                        <a:t>✓</a:t>
+                      </a:r>
+                    </a:p>
+                  </a:txBody>
+                  <a:tcPr>
+                    <a:solidFill>
+                      <a:srgbClr val="F0F2F7"/>
+                    </a:solidFill>
+                  </a:tcPr>
+                </a:tc>
+                <a:tc>
+                  <a:txBody>
+                    <a:bodyPr/>
+                    <a:lstStyle/>
+                    <a:p>
+                      <a:pPr>
+                        <a:defRPr sz="900">
+                          <a:solidFill>
+                            <a:srgbClr val="333333"/>
+                          </a:solidFill>
+                        </a:defRPr>
+                      </a:pPr>
+                      <a:r>
+                        <a:t>(via wrapper, similar to ZMEDI)</a:t>
+                      </a:r>
+                    </a:p>
+                  </a:txBody>
+                  <a:tcPr>
+                    <a:solidFill>
+                      <a:srgbClr val="F0F2F7"/>
                     </a:solidFill>
                   </a:tcPr>
                 </a:tc>
@@ -6875,8 +9836,8 @@
         </p:nvSpPr>
         <p:spPr>
           <a:xfrm>
-            <a:off x="457200" y="5760720"/>
-            <a:ext cx="11247120" cy="822960"/>
+            <a:off x="457200" y="6583680"/>
+            <a:ext cx="11247120" cy="182880"/>
           </a:xfrm>
           <a:prstGeom prst="rect">
             <a:avLst/>
@@ -6890,38 +9851,14 @@
           <a:lstStyle/>
           <a:p>
             <a:pPr>
-              <a:defRPr sz="1200" b="0">
+              <a:defRPr sz="1000" b="1">
                 <a:solidFill>
-                  <a:srgbClr val="333333"/>
+                  <a:srgbClr val="C83636"/>
                 </a:solidFill>
               </a:defRPr>
             </a:pPr>
             <a:r>
-              <a:t>Each wrapper FM reads zfi_constants, assembles the same FTP_USER/HOST_KEY/PRIVATE_KEY_PATH parameter bundle,</a:t>
-            </a:r>
-          </a:p>
-          <a:p>
-            <a:pPr>
-              <a:defRPr sz="1200" b="0">
-                <a:solidFill>
-                  <a:srgbClr val="333333"/>
-                </a:solidFill>
-              </a:defRPr>
-            </a:pPr>
-            <a:r>
-              <a:t>and calls CALL FUNCTION 'SXPG_COMMAND_EXECUTE' — exactly like the 14 direct callers.</a:t>
-            </a:r>
-          </a:p>
-          <a:p>
-            <a:pPr>
-              <a:defRPr sz="1200" b="0">
-                <a:solidFill>
-                  <a:srgbClr val="333333"/>
-                </a:solidFill>
-              </a:defRPr>
-            </a:pPr>
-            <a:r>
-              <a:t>ZDMS_SEND_FILE was discovered late, via the ZSFTP_ SM69-prefix sanity scan — not the initial wrapper-substring search.</a:t>
+              <a:t>Key observation: 1 of 16 reports uses pure password auth (ZSFTP_BNP_PARIBAS); all others use key auth or hybrid. New SFTP layer must support both.</a:t>
             </a:r>
           </a:p>
         </p:txBody>
@@ -6974,7 +9911,7 @@
               </a:defRPr>
             </a:pPr>
             <a:r>
-              <a:t>11 objects discovered beyond the stakeholder seed list</a:t>
+              <a:t>3 wrapper function groups — single point of credential binding</a:t>
             </a:r>
           </a:p>
         </p:txBody>
@@ -6987,8 +9924,8 @@
         </p:nvSpPr>
         <p:spPr>
           <a:xfrm>
-            <a:off x="457200" y="1005840"/>
-            <a:ext cx="11247120" cy="548640"/>
+            <a:off x="457200" y="1097280"/>
+            <a:ext cx="11247120" cy="731520"/>
           </a:xfrm>
           <a:prstGeom prst="rect">
             <a:avLst/>
@@ -7004,12 +9941,24 @@
             <a:pPr>
               <a:defRPr sz="1400" b="0">
                 <a:solidFill>
-                  <a:srgbClr val="C83636"/>
+                  <a:srgbClr val="333333"/>
                 </a:solidFill>
               </a:defRPr>
             </a:pPr>
             <a:r>
-              <a:t>The 13-seed list found 8 confirmed SFTP reports. Stage-3 sweep found 11 more (+46%).</a:t>
+              <a:t>Three FUGRs wrap SXPG_COMMAND_EXECUTE so callers stay clean of SFTP plumbing.</a:t>
+            </a:r>
+          </a:p>
+          <a:p>
+            <a:pPr>
+              <a:defRPr sz="1400" b="0">
+                <a:solidFill>
+                  <a:srgbClr val="333333"/>
+                </a:solidFill>
+              </a:defRPr>
+            </a:pPr>
+            <a:r>
+              <a:t>Replace the wrapper internals once → every caller migrates as a side effect.</a:t>
             </a:r>
           </a:p>
         </p:txBody>
@@ -7023,8 +9972,8 @@
           <p:nvPr/>
         </p:nvGraphicFramePr>
         <p:xfrm>
-          <a:off x="457200" y="1828800"/>
-          <a:ext cx="11247120" cy="4572000"/>
+          <a:off x="457200" y="2286000"/>
+          <a:ext cx="11247120" cy="3200400"/>
         </p:xfrm>
         <a:graphic>
           <a:graphicData uri="http://schemas.openxmlformats.org/drawingml/2006/table">
@@ -7033,25 +9982,26 @@
                 <a:tableStyleId>{5C22544A-7EE6-4342-B048-85BDC9FD1C3A}</a:tableStyleId>
               </a:tblPr>
               <a:tblGrid>
+                <a:gridCol w="1645920"/>
+                <a:gridCol w="2743200"/>
+                <a:gridCol w="3657600"/>
                 <a:gridCol w="3200400"/>
-                <a:gridCol w="914400"/>
-                <a:gridCol w="7132320"/>
               </a:tblGrid>
-              <a:tr h="381000">
-                <a:tc>
-                  <a:txBody>
-                    <a:bodyPr/>
-                    <a:lstStyle/>
-                    <a:p>
-                      <a:pPr>
-                        <a:defRPr sz="1300" b="1">
+              <a:tr h="800100">
+                <a:tc>
+                  <a:txBody>
+                    <a:bodyPr/>
+                    <a:lstStyle/>
+                    <a:p>
+                      <a:pPr>
+                        <a:defRPr sz="1200" b="1">
                           <a:solidFill>
                             <a:srgbClr val="FFFFFF"/>
                           </a:solidFill>
                         </a:defRPr>
                       </a:pPr>
                       <a:r>
-                        <a:t>Object</a:t>
+                        <a:t>FUGR</a:t>
                       </a:r>
                     </a:p>
                   </a:txBody>
@@ -7067,14 +10017,14 @@
                     <a:lstStyle/>
                     <a:p>
                       <a:pPr>
-                        <a:defRPr sz="1300" b="1">
+                        <a:defRPr sz="1200" b="1">
                           <a:solidFill>
                             <a:srgbClr val="FFFFFF"/>
                           </a:solidFill>
                         </a:defRPr>
                       </a:pPr>
                       <a:r>
-                        <a:t>Type</a:t>
+                        <a:t>Description</a:t>
                       </a:r>
                     </a:p>
                   </a:txBody>
@@ -7090,14 +10040,14 @@
                     <a:lstStyle/>
                     <a:p>
                       <a:pPr>
-                        <a:defRPr sz="1300" b="1">
+                        <a:defRPr sz="1200" b="1">
                           <a:solidFill>
                             <a:srgbClr val="FFFFFF"/>
                           </a:solidFill>
                         </a:defRPr>
                       </a:pPr>
                       <a:r>
-                        <a:t>Why missed in seed list</a:t>
+                        <a:t>Wrapper function modules</a:t>
                       </a:r>
                     </a:p>
                   </a:txBody>
@@ -7107,68 +10057,114 @@
                     </a:solidFill>
                   </a:tcPr>
                 </a:tc>
+                <a:tc>
+                  <a:txBody>
+                    <a:bodyPr/>
+                    <a:lstStyle/>
+                    <a:p>
+                      <a:pPr>
+                        <a:defRPr sz="1200" b="1">
+                          <a:solidFill>
+                            <a:srgbClr val="FFFFFF"/>
+                          </a:solidFill>
+                        </a:defRPr>
+                      </a:pPr>
+                      <a:r>
+                        <a:t>Used by</a:t>
+                      </a:r>
+                    </a:p>
+                  </a:txBody>
+                  <a:tcPr>
+                    <a:solidFill>
+                      <a:srgbClr val="1F3A68"/>
+                    </a:solidFill>
+                  </a:tcPr>
+                </a:tc>
               </a:tr>
-              <a:tr h="381000">
-                <a:tc>
-                  <a:txBody>
-                    <a:bodyPr/>
-                    <a:lstStyle/>
-                    <a:p>
-                      <a:pPr>
-                        <a:defRPr sz="1100">
-                          <a:solidFill>
-                            <a:srgbClr val="333333"/>
-                          </a:solidFill>
-                        </a:defRPr>
-                      </a:pPr>
-                      <a:r>
-                        <a:t>ZSFTP_BNP_PARIBAS</a:t>
-                      </a:r>
-                    </a:p>
-                  </a:txBody>
-                  <a:tcPr>
-                    <a:solidFill>
-                      <a:srgbClr val="FFFFFF"/>
-                    </a:solidFill>
-                  </a:tcPr>
-                </a:tc>
-                <a:tc>
-                  <a:txBody>
-                    <a:bodyPr/>
-                    <a:lstStyle/>
-                    <a:p>
-                      <a:pPr>
-                        <a:defRPr sz="1100">
-                          <a:solidFill>
-                            <a:srgbClr val="333333"/>
-                          </a:solidFill>
-                        </a:defRPr>
-                      </a:pPr>
-                      <a:r>
-                        <a:t>PROG</a:t>
-                      </a:r>
-                    </a:p>
-                  </a:txBody>
-                  <a:tcPr>
-                    <a:solidFill>
-                      <a:srgbClr val="FFFFFF"/>
-                    </a:solidFill>
-                  </a:tcPr>
-                </a:tc>
-                <a:tc>
-                  <a:txBody>
-                    <a:bodyPr/>
-                    <a:lstStyle/>
-                    <a:p>
-                      <a:pPr>
-                        <a:defRPr sz="1100">
-                          <a:solidFill>
-                            <a:srgbClr val="333333"/>
-                          </a:solidFill>
-                        </a:defRPr>
-                      </a:pPr>
-                      <a:r>
-                        <a:t>Password-only auth — no PRIVATE_KEY_PATH marker</a:t>
+              <a:tr h="800100">
+                <a:tc>
+                  <a:txBody>
+                    <a:bodyPr/>
+                    <a:lstStyle/>
+                    <a:p>
+                      <a:pPr>
+                        <a:defRPr sz="1200">
+                          <a:solidFill>
+                            <a:srgbClr val="333333"/>
+                          </a:solidFill>
+                        </a:defRPr>
+                      </a:pPr>
+                      <a:r>
+                        <a:t>ZMEDICARE</a:t>
+                      </a:r>
+                    </a:p>
+                  </a:txBody>
+                  <a:tcPr>
+                    <a:solidFill>
+                      <a:srgbClr val="FFFFFF"/>
+                    </a:solidFill>
+                  </a:tcPr>
+                </a:tc>
+                <a:tc>
+                  <a:txBody>
+                    <a:bodyPr/>
+                    <a:lstStyle/>
+                    <a:p>
+                      <a:pPr>
+                        <a:defRPr sz="1200">
+                          <a:solidFill>
+                            <a:srgbClr val="333333"/>
+                          </a:solidFill>
+                        </a:defRPr>
+                      </a:pPr>
+                      <a:r>
+                        <a:t>Medicare Project FG</a:t>
+                      </a:r>
+                    </a:p>
+                  </a:txBody>
+                  <a:tcPr>
+                    <a:solidFill>
+                      <a:srgbClr val="FFFFFF"/>
+                    </a:solidFill>
+                  </a:tcPr>
+                </a:tc>
+                <a:tc>
+                  <a:txBody>
+                    <a:bodyPr/>
+                    <a:lstStyle/>
+                    <a:p>
+                      <a:pPr>
+                        <a:defRPr sz="1200">
+                          <a:solidFill>
+                            <a:srgbClr val="333333"/>
+                          </a:solidFill>
+                        </a:defRPr>
+                      </a:pPr>
+                      <a:r>
+                        <a:t>ZMEDI_GET_FROM_SFTP, ZMEDI_PUT_FROM_SFTP</a:t>
+                      </a:r>
+                    </a:p>
+                  </a:txBody>
+                  <a:tcPr>
+                    <a:solidFill>
+                      <a:srgbClr val="FFFFFF"/>
+                    </a:solidFill>
+                  </a:tcPr>
+                </a:tc>
+                <a:tc>
+                  <a:txBody>
+                    <a:bodyPr/>
+                    <a:lstStyle/>
+                    <a:p>
+                      <a:pPr>
+                        <a:defRPr sz="1200">
+                          <a:solidFill>
+                            <a:srgbClr val="333333"/>
+                          </a:solidFill>
+                        </a:defRPr>
+                      </a:pPr>
+                      <a:r>
+                        <a:t>ZSD_MEDICARE_PDF_PROCESS</a:t>
                       </a:r>
                     </a:p>
                   </a:txBody>
@@ -7179,67 +10175,90 @@
                   </a:tcPr>
                 </a:tc>
               </a:tr>
-              <a:tr h="381000">
-                <a:tc>
-                  <a:txBody>
-                    <a:bodyPr/>
-                    <a:lstStyle/>
-                    <a:p>
-                      <a:pPr>
-                        <a:defRPr sz="1100">
-                          <a:solidFill>
-                            <a:srgbClr val="333333"/>
-                          </a:solidFill>
-                        </a:defRPr>
-                      </a:pPr>
-                      <a:r>
-                        <a:t>ZSFTP_BNP_PARIBAS_WITH_PGP</a:t>
-                      </a:r>
-                    </a:p>
-                  </a:txBody>
-                  <a:tcPr>
-                    <a:solidFill>
-                      <a:srgbClr val="F0F2F7"/>
-                    </a:solidFill>
-                  </a:tcPr>
-                </a:tc>
-                <a:tc>
-                  <a:txBody>
-                    <a:bodyPr/>
-                    <a:lstStyle/>
-                    <a:p>
-                      <a:pPr>
-                        <a:defRPr sz="1100">
-                          <a:solidFill>
-                            <a:srgbClr val="333333"/>
-                          </a:solidFill>
-                        </a:defRPr>
-                      </a:pPr>
-                      <a:r>
-                        <a:t>PROG</a:t>
-                      </a:r>
-                    </a:p>
-                  </a:txBody>
-                  <a:tcPr>
-                    <a:solidFill>
-                      <a:srgbClr val="F0F2F7"/>
-                    </a:solidFill>
-                  </a:tcPr>
-                </a:tc>
-                <a:tc>
-                  <a:txBody>
-                    <a:bodyPr/>
-                    <a:lstStyle/>
-                    <a:p>
-                      <a:pPr>
-                        <a:defRPr sz="1100">
-                          <a:solidFill>
-                            <a:srgbClr val="333333"/>
-                          </a:solidFill>
-                        </a:defRPr>
-                      </a:pPr>
-                      <a:r>
-                        <a:t>Newer PGP variant of existing BNP report</a:t>
+              <a:tr h="800100">
+                <a:tc>
+                  <a:txBody>
+                    <a:bodyPr/>
+                    <a:lstStyle/>
+                    <a:p>
+                      <a:pPr>
+                        <a:defRPr sz="1200">
+                          <a:solidFill>
+                            <a:srgbClr val="333333"/>
+                          </a:solidFill>
+                        </a:defRPr>
+                      </a:pPr>
+                      <a:r>
+                        <a:t>ZERX</a:t>
+                      </a:r>
+                    </a:p>
+                  </a:txBody>
+                  <a:tcPr>
+                    <a:solidFill>
+                      <a:srgbClr val="F0F2F7"/>
+                    </a:solidFill>
+                  </a:tcPr>
+                </a:tc>
+                <a:tc>
+                  <a:txBody>
+                    <a:bodyPr/>
+                    <a:lstStyle/>
+                    <a:p>
+                      <a:pPr>
+                        <a:defRPr sz="1200">
+                          <a:solidFill>
+                            <a:srgbClr val="333333"/>
+                          </a:solidFill>
+                        </a:defRPr>
+                      </a:pPr>
+                      <a:r>
+                        <a:t>Medicare Project FG (eRx)</a:t>
+                      </a:r>
+                    </a:p>
+                  </a:txBody>
+                  <a:tcPr>
+                    <a:solidFill>
+                      <a:srgbClr val="F0F2F7"/>
+                    </a:solidFill>
+                  </a:tcPr>
+                </a:tc>
+                <a:tc>
+                  <a:txBody>
+                    <a:bodyPr/>
+                    <a:lstStyle/>
+                    <a:p>
+                      <a:pPr>
+                        <a:defRPr sz="1200">
+                          <a:solidFill>
+                            <a:srgbClr val="333333"/>
+                          </a:solidFill>
+                        </a:defRPr>
+                      </a:pPr>
+                      <a:r>
+                        <a:t>ZERX_GET_FROM_SFTP, ZERX_PUT_FROM_SFTP</a:t>
+                      </a:r>
+                    </a:p>
+                  </a:txBody>
+                  <a:tcPr>
+                    <a:solidFill>
+                      <a:srgbClr val="F0F2F7"/>
+                    </a:solidFill>
+                  </a:tcPr>
+                </a:tc>
+                <a:tc>
+                  <a:txBody>
+                    <a:bodyPr/>
+                    <a:lstStyle/>
+                    <a:p>
+                      <a:pPr>
+                        <a:defRPr sz="1200">
+                          <a:solidFill>
+                            <a:srgbClr val="333333"/>
+                          </a:solidFill>
+                        </a:defRPr>
+                      </a:pPr>
+                      <a:r>
+                        <a:t>ZSD_ERX_DMS_FILE_PROCESS</a:t>
                       </a:r>
                     </a:p>
                   </a:txBody>
@@ -7250,582 +10269,14 @@
                   </a:tcPr>
                 </a:tc>
               </a:tr>
-              <a:tr h="381000">
-                <a:tc>
-                  <a:txBody>
-                    <a:bodyPr/>
-                    <a:lstStyle/>
-                    <a:p>
-                      <a:pPr>
-                        <a:defRPr sz="1100">
-                          <a:solidFill>
-                            <a:srgbClr val="333333"/>
-                          </a:solidFill>
-                        </a:defRPr>
-                      </a:pPr>
-                      <a:r>
-                        <a:t>ZSFTP_CERIDIAN_PULL</a:t>
-                      </a:r>
-                    </a:p>
-                  </a:txBody>
-                  <a:tcPr>
-                    <a:solidFill>
-                      <a:srgbClr val="FFFFFF"/>
-                    </a:solidFill>
-                  </a:tcPr>
-                </a:tc>
-                <a:tc>
-                  <a:txBody>
-                    <a:bodyPr/>
-                    <a:lstStyle/>
-                    <a:p>
-                      <a:pPr>
-                        <a:defRPr sz="1100">
-                          <a:solidFill>
-                            <a:srgbClr val="333333"/>
-                          </a:solidFill>
-                        </a:defRPr>
-                      </a:pPr>
-                      <a:r>
-                        <a:t>PROG</a:t>
-                      </a:r>
-                    </a:p>
-                  </a:txBody>
-                  <a:tcPr>
-                    <a:solidFill>
-                      <a:srgbClr val="FFFFFF"/>
-                    </a:solidFill>
-                  </a:tcPr>
-                </a:tc>
-                <a:tc>
-                  <a:txBody>
-                    <a:bodyPr/>
-                    <a:lstStyle/>
-                    <a:p>
-                      <a:pPr>
-                        <a:defRPr sz="1100">
-                          <a:solidFill>
-                            <a:srgbClr val="333333"/>
-                          </a:solidFill>
-                        </a:defRPr>
-                      </a:pPr>
-                      <a:r>
-                        <a:t>Operator-facing duplicate of ZFFIU_ACC_POST flow</a:t>
-                      </a:r>
-                    </a:p>
-                  </a:txBody>
-                  <a:tcPr>
-                    <a:solidFill>
-                      <a:srgbClr val="FFFFFF"/>
-                    </a:solidFill>
-                  </a:tcPr>
-                </a:tc>
-              </a:tr>
-              <a:tr h="381000">
-                <a:tc>
-                  <a:txBody>
-                    <a:bodyPr/>
-                    <a:lstStyle/>
-                    <a:p>
-                      <a:pPr>
-                        <a:defRPr sz="1100">
-                          <a:solidFill>
-                            <a:srgbClr val="333333"/>
-                          </a:solidFill>
-                        </a:defRPr>
-                      </a:pPr>
-                      <a:r>
-                        <a:t>ZSFTP_CITI_SEND</a:t>
-                      </a:r>
-                    </a:p>
-                  </a:txBody>
-                  <a:tcPr>
-                    <a:solidFill>
-                      <a:srgbClr val="F0F2F7"/>
-                    </a:solidFill>
-                  </a:tcPr>
-                </a:tc>
-                <a:tc>
-                  <a:txBody>
-                    <a:bodyPr/>
-                    <a:lstStyle/>
-                    <a:p>
-                      <a:pPr>
-                        <a:defRPr sz="1100">
-                          <a:solidFill>
-                            <a:srgbClr val="333333"/>
-                          </a:solidFill>
-                        </a:defRPr>
-                      </a:pPr>
-                      <a:r>
-                        <a:t>PROG</a:t>
-                      </a:r>
-                    </a:p>
-                  </a:txBody>
-                  <a:tcPr>
-                    <a:solidFill>
-                      <a:srgbClr val="F0F2F7"/>
-                    </a:solidFill>
-                  </a:tcPr>
-                </a:tc>
-                <a:tc>
-                  <a:txBody>
-                    <a:bodyPr/>
-                    <a:lstStyle/>
-                    <a:p>
-                      <a:pPr>
-                        <a:defRPr sz="1100">
-                          <a:solidFill>
-                            <a:srgbClr val="333333"/>
-                          </a:solidFill>
-                        </a:defRPr>
-                      </a:pPr>
-                      <a:r>
-                        <a:t>Outbound counterpart of ZSFTP_CITI_PULL</a:t>
-                      </a:r>
-                    </a:p>
-                  </a:txBody>
-                  <a:tcPr>
-                    <a:solidFill>
-                      <a:srgbClr val="F0F2F7"/>
-                    </a:solidFill>
-                  </a:tcPr>
-                </a:tc>
-              </a:tr>
-              <a:tr h="381000">
-                <a:tc>
-                  <a:txBody>
-                    <a:bodyPr/>
-                    <a:lstStyle/>
-                    <a:p>
-                      <a:pPr>
-                        <a:defRPr sz="1100">
-                          <a:solidFill>
-                            <a:srgbClr val="333333"/>
-                          </a:solidFill>
-                        </a:defRPr>
-                      </a:pPr>
-                      <a:r>
-                        <a:t>ZSFTP_JPM</a:t>
-                      </a:r>
-                    </a:p>
-                  </a:txBody>
-                  <a:tcPr>
-                    <a:solidFill>
-                      <a:srgbClr val="FFFFFF"/>
-                    </a:solidFill>
-                  </a:tcPr>
-                </a:tc>
-                <a:tc>
-                  <a:txBody>
-                    <a:bodyPr/>
-                    <a:lstStyle/>
-                    <a:p>
-                      <a:pPr>
-                        <a:defRPr sz="1100">
-                          <a:solidFill>
-                            <a:srgbClr val="333333"/>
-                          </a:solidFill>
-                        </a:defRPr>
-                      </a:pPr>
-                      <a:r>
-                        <a:t>PROG</a:t>
-                      </a:r>
-                    </a:p>
-                  </a:txBody>
-                  <a:tcPr>
-                    <a:solidFill>
-                      <a:srgbClr val="FFFFFF"/>
-                    </a:solidFill>
-                  </a:tcPr>
-                </a:tc>
-                <a:tc>
-                  <a:txBody>
-                    <a:bodyPr/>
-                    <a:lstStyle/>
-                    <a:p>
-                      <a:pPr>
-                        <a:defRPr sz="1100">
-                          <a:solidFill>
-                            <a:srgbClr val="333333"/>
-                          </a:solidFill>
-                        </a:defRPr>
-                      </a:pPr>
-                      <a:r>
-                        <a:t>Entire JPMorgan integration not in seeds</a:t>
-                      </a:r>
-                    </a:p>
-                  </a:txBody>
-                  <a:tcPr>
-                    <a:solidFill>
-                      <a:srgbClr val="FFFFFF"/>
-                    </a:solidFill>
-                  </a:tcPr>
-                </a:tc>
-              </a:tr>
-              <a:tr h="381000">
-                <a:tc>
-                  <a:txBody>
-                    <a:bodyPr/>
-                    <a:lstStyle/>
-                    <a:p>
-                      <a:pPr>
-                        <a:defRPr sz="1100">
-                          <a:solidFill>
-                            <a:srgbClr val="333333"/>
-                          </a:solidFill>
-                        </a:defRPr>
-                      </a:pPr>
-                      <a:r>
-                        <a:t>ZSFTP_JPM_PULL</a:t>
-                      </a:r>
-                    </a:p>
-                  </a:txBody>
-                  <a:tcPr>
-                    <a:solidFill>
-                      <a:srgbClr val="F0F2F7"/>
-                    </a:solidFill>
-                  </a:tcPr>
-                </a:tc>
-                <a:tc>
-                  <a:txBody>
-                    <a:bodyPr/>
-                    <a:lstStyle/>
-                    <a:p>
-                      <a:pPr>
-                        <a:defRPr sz="1100">
-                          <a:solidFill>
-                            <a:srgbClr val="333333"/>
-                          </a:solidFill>
-                        </a:defRPr>
-                      </a:pPr>
-                      <a:r>
-                        <a:t>PROG</a:t>
-                      </a:r>
-                    </a:p>
-                  </a:txBody>
-                  <a:tcPr>
-                    <a:solidFill>
-                      <a:srgbClr val="F0F2F7"/>
-                    </a:solidFill>
-                  </a:tcPr>
-                </a:tc>
-                <a:tc>
-                  <a:txBody>
-                    <a:bodyPr/>
-                    <a:lstStyle/>
-                    <a:p>
-                      <a:pPr>
-                        <a:defRPr sz="1100">
-                          <a:solidFill>
-                            <a:srgbClr val="333333"/>
-                          </a:solidFill>
-                        </a:defRPr>
-                      </a:pPr>
-                      <a:r>
-                        <a:t>Entire JPMorgan integration not in seeds</a:t>
-                      </a:r>
-                    </a:p>
-                  </a:txBody>
-                  <a:tcPr>
-                    <a:solidFill>
-                      <a:srgbClr val="F0F2F7"/>
-                    </a:solidFill>
-                  </a:tcPr>
-                </a:tc>
-              </a:tr>
-              <a:tr h="381000">
-                <a:tc>
-                  <a:txBody>
-                    <a:bodyPr/>
-                    <a:lstStyle/>
-                    <a:p>
-                      <a:pPr>
-                        <a:defRPr sz="1100">
-                          <a:solidFill>
-                            <a:srgbClr val="333333"/>
-                          </a:solidFill>
-                        </a:defRPr>
-                      </a:pPr>
-                      <a:r>
-                        <a:t>ZDMS_REPLACE_FILES</a:t>
-                      </a:r>
-                    </a:p>
-                  </a:txBody>
-                  <a:tcPr>
-                    <a:solidFill>
-                      <a:srgbClr val="FFFFFF"/>
-                    </a:solidFill>
-                  </a:tcPr>
-                </a:tc>
-                <a:tc>
-                  <a:txBody>
-                    <a:bodyPr/>
-                    <a:lstStyle/>
-                    <a:p>
-                      <a:pPr>
-                        <a:defRPr sz="1100">
-                          <a:solidFill>
-                            <a:srgbClr val="333333"/>
-                          </a:solidFill>
-                        </a:defRPr>
-                      </a:pPr>
-                      <a:r>
-                        <a:t>PROG</a:t>
-                      </a:r>
-                    </a:p>
-                  </a:txBody>
-                  <a:tcPr>
-                    <a:solidFill>
-                      <a:srgbClr val="FFFFFF"/>
-                    </a:solidFill>
-                  </a:tcPr>
-                </a:tc>
-                <a:tc>
-                  <a:txBody>
-                    <a:bodyPr/>
-                    <a:lstStyle/>
-                    <a:p>
-                      <a:pPr>
-                        <a:defRPr sz="1100">
-                          <a:solidFill>
-                            <a:srgbClr val="333333"/>
-                          </a:solidFill>
-                        </a:defRPr>
-                      </a:pPr>
-                      <a:r>
-                        <a:t>Adjacent DMS report sharing SM69 commands</a:t>
-                      </a:r>
-                    </a:p>
-                  </a:txBody>
-                  <a:tcPr>
-                    <a:solidFill>
-                      <a:srgbClr val="FFFFFF"/>
-                    </a:solidFill>
-                  </a:tcPr>
-                </a:tc>
-              </a:tr>
-              <a:tr h="381000">
-                <a:tc>
-                  <a:txBody>
-                    <a:bodyPr/>
-                    <a:lstStyle/>
-                    <a:p>
-                      <a:pPr>
-                        <a:defRPr sz="1100">
-                          <a:solidFill>
-                            <a:srgbClr val="333333"/>
-                          </a:solidFill>
-                        </a:defRPr>
-                      </a:pPr>
-                      <a:r>
-                        <a:t>ZSD_ERX_DMS_FILE_PROCESS</a:t>
-                      </a:r>
-                    </a:p>
-                  </a:txBody>
-                  <a:tcPr>
-                    <a:solidFill>
-                      <a:srgbClr val="F0F2F7"/>
-                    </a:solidFill>
-                  </a:tcPr>
-                </a:tc>
-                <a:tc>
-                  <a:txBody>
-                    <a:bodyPr/>
-                    <a:lstStyle/>
-                    <a:p>
-                      <a:pPr>
-                        <a:defRPr sz="1100">
-                          <a:solidFill>
-                            <a:srgbClr val="333333"/>
-                          </a:solidFill>
-                        </a:defRPr>
-                      </a:pPr>
-                      <a:r>
-                        <a:t>PROG</a:t>
-                      </a:r>
-                    </a:p>
-                  </a:txBody>
-                  <a:tcPr>
-                    <a:solidFill>
-                      <a:srgbClr val="F0F2F7"/>
-                    </a:solidFill>
-                  </a:tcPr>
-                </a:tc>
-                <a:tc>
-                  <a:txBody>
-                    <a:bodyPr/>
-                    <a:lstStyle/>
-                    <a:p>
-                      <a:pPr>
-                        <a:defRPr sz="1100">
-                          <a:solidFill>
-                            <a:srgbClr val="333333"/>
-                          </a:solidFill>
-                        </a:defRPr>
-                      </a:pPr>
-                      <a:r>
-                        <a:t>Indirect SFTP via ZERX wrapper FUGR</a:t>
-                      </a:r>
-                    </a:p>
-                  </a:txBody>
-                  <a:tcPr>
-                    <a:solidFill>
-                      <a:srgbClr val="F0F2F7"/>
-                    </a:solidFill>
-                  </a:tcPr>
-                </a:tc>
-              </a:tr>
-              <a:tr h="381000">
-                <a:tc>
-                  <a:txBody>
-                    <a:bodyPr/>
-                    <a:lstStyle/>
-                    <a:p>
-                      <a:pPr>
-                        <a:defRPr sz="1100">
-                          <a:solidFill>
-                            <a:srgbClr val="333333"/>
-                          </a:solidFill>
-                        </a:defRPr>
-                      </a:pPr>
-                      <a:r>
-                        <a:t>ZMEDICARE</a:t>
-                      </a:r>
-                    </a:p>
-                  </a:txBody>
-                  <a:tcPr>
-                    <a:solidFill>
-                      <a:srgbClr val="FFFFFF"/>
-                    </a:solidFill>
-                  </a:tcPr>
-                </a:tc>
-                <a:tc>
-                  <a:txBody>
-                    <a:bodyPr/>
-                    <a:lstStyle/>
-                    <a:p>
-                      <a:pPr>
-                        <a:defRPr sz="1100">
-                          <a:solidFill>
-                            <a:srgbClr val="333333"/>
-                          </a:solidFill>
-                        </a:defRPr>
-                      </a:pPr>
-                      <a:r>
-                        <a:t>FUGR</a:t>
-                      </a:r>
-                    </a:p>
-                  </a:txBody>
-                  <a:tcPr>
-                    <a:solidFill>
-                      <a:srgbClr val="FFFFFF"/>
-                    </a:solidFill>
-                  </a:tcPr>
-                </a:tc>
-                <a:tc>
-                  <a:txBody>
-                    <a:bodyPr/>
-                    <a:lstStyle/>
-                    <a:p>
-                      <a:pPr>
-                        <a:defRPr sz="1100">
-                          <a:solidFill>
-                            <a:srgbClr val="333333"/>
-                          </a:solidFill>
-                        </a:defRPr>
-                      </a:pPr>
-                      <a:r>
-                        <a:t>Wrapper FUGR — never in a 'report list'</a:t>
-                      </a:r>
-                    </a:p>
-                  </a:txBody>
-                  <a:tcPr>
-                    <a:solidFill>
-                      <a:srgbClr val="FFFFFF"/>
-                    </a:solidFill>
-                  </a:tcPr>
-                </a:tc>
-              </a:tr>
-              <a:tr h="381000">
-                <a:tc>
-                  <a:txBody>
-                    <a:bodyPr/>
-                    <a:lstStyle/>
-                    <a:p>
-                      <a:pPr>
-                        <a:defRPr sz="1100">
-                          <a:solidFill>
-                            <a:srgbClr val="333333"/>
-                          </a:solidFill>
-                        </a:defRPr>
-                      </a:pPr>
-                      <a:r>
-                        <a:t>ZERX</a:t>
-                      </a:r>
-                    </a:p>
-                  </a:txBody>
-                  <a:tcPr>
-                    <a:solidFill>
-                      <a:srgbClr val="F0F2F7"/>
-                    </a:solidFill>
-                  </a:tcPr>
-                </a:tc>
-                <a:tc>
-                  <a:txBody>
-                    <a:bodyPr/>
-                    <a:lstStyle/>
-                    <a:p>
-                      <a:pPr>
-                        <a:defRPr sz="1100">
-                          <a:solidFill>
-                            <a:srgbClr val="333333"/>
-                          </a:solidFill>
-                        </a:defRPr>
-                      </a:pPr>
-                      <a:r>
-                        <a:t>FUGR</a:t>
-                      </a:r>
-                    </a:p>
-                  </a:txBody>
-                  <a:tcPr>
-                    <a:solidFill>
-                      <a:srgbClr val="F0F2F7"/>
-                    </a:solidFill>
-                  </a:tcPr>
-                </a:tc>
-                <a:tc>
-                  <a:txBody>
-                    <a:bodyPr/>
-                    <a:lstStyle/>
-                    <a:p>
-                      <a:pPr>
-                        <a:defRPr sz="1100">
-                          <a:solidFill>
-                            <a:srgbClr val="333333"/>
-                          </a:solidFill>
-                        </a:defRPr>
-                      </a:pPr>
-                      <a:r>
-                        <a:t>Same — wrapper FUGR for eRx/DMS path</a:t>
-                      </a:r>
-                    </a:p>
-                  </a:txBody>
-                  <a:tcPr>
-                    <a:solidFill>
-                      <a:srgbClr val="F0F2F7"/>
-                    </a:solidFill>
-                  </a:tcPr>
-                </a:tc>
-              </a:tr>
-              <a:tr h="381000">
-                <a:tc>
-                  <a:txBody>
-                    <a:bodyPr/>
-                    <a:lstStyle/>
-                    <a:p>
-                      <a:pPr>
-                        <a:defRPr sz="1100">
+              <a:tr h="800100">
+                <a:tc>
+                  <a:txBody>
+                    <a:bodyPr/>
+                    <a:lstStyle/>
+                    <a:p>
+                      <a:pPr>
+                        <a:defRPr sz="1200">
                           <a:solidFill>
                             <a:srgbClr val="333333"/>
                           </a:solidFill>
@@ -7848,37 +10299,60 @@
                     <a:lstStyle/>
                     <a:p>
                       <a:pPr>
-                        <a:defRPr sz="1100">
-                          <a:solidFill>
-                            <a:srgbClr val="333333"/>
-                          </a:solidFill>
-                        </a:defRPr>
-                      </a:pPr>
-                      <a:r>
-                        <a:t>FUGR</a:t>
-                      </a:r>
-                    </a:p>
-                  </a:txBody>
-                  <a:tcPr>
-                    <a:solidFill>
-                      <a:srgbClr val="FFFFFF"/>
-                    </a:solidFill>
-                  </a:tcPr>
-                </a:tc>
-                <a:tc>
-                  <a:txBody>
-                    <a:bodyPr/>
-                    <a:lstStyle/>
-                    <a:p>
-                      <a:pPr>
-                        <a:defRPr sz="1100">
-                          <a:solidFill>
-                            <a:srgbClr val="333333"/>
-                          </a:solidFill>
-                        </a:defRPr>
-                      </a:pPr>
-                      <a:r>
-                        <a:t>Wrapper FUGR with _TO_SFTP naming — initial substring scan looked for _FROM_SFTP only</a:t>
+                        <a:defRPr sz="1200">
+                          <a:solidFill>
+                            <a:srgbClr val="333333"/>
+                          </a:solidFill>
+                        </a:defRPr>
+                      </a:pPr>
+                      <a:r>
+                        <a:t>DMS document extract FG</a:t>
+                      </a:r>
+                    </a:p>
+                  </a:txBody>
+                  <a:tcPr>
+                    <a:solidFill>
+                      <a:srgbClr val="FFFFFF"/>
+                    </a:solidFill>
+                  </a:tcPr>
+                </a:tc>
+                <a:tc>
+                  <a:txBody>
+                    <a:bodyPr/>
+                    <a:lstStyle/>
+                    <a:p>
+                      <a:pPr>
+                        <a:defRPr sz="1200">
+                          <a:solidFill>
+                            <a:srgbClr val="333333"/>
+                          </a:solidFill>
+                        </a:defRPr>
+                      </a:pPr>
+                      <a:r>
+                        <a:t>ZDMS_EXTRACT_DOCS_TO_SFTP</a:t>
+                      </a:r>
+                    </a:p>
+                  </a:txBody>
+                  <a:tcPr>
+                    <a:solidFill>
+                      <a:srgbClr val="FFFFFF"/>
+                    </a:solidFill>
+                  </a:tcPr>
+                </a:tc>
+                <a:tc>
+                  <a:txBody>
+                    <a:bodyPr/>
+                    <a:lstStyle/>
+                    <a:p>
+                      <a:pPr>
+                        <a:defRPr sz="1200">
+                          <a:solidFill>
+                            <a:srgbClr val="333333"/>
+                          </a:solidFill>
+                        </a:defRPr>
+                      </a:pPr>
+                      <a:r>
+                        <a:t>0 callers in Z001 (dynamic / cross-package / dead?)</a:t>
                       </a:r>
                     </a:p>
                   </a:txBody>
@@ -7893,6 +10367,65 @@
           </a:graphicData>
         </a:graphic>
       </p:graphicFrame>
+      <p:sp>
+        <p:nvSpPr>
+          <p:cNvPr id="5" name="TextBox 4"/>
+          <p:cNvSpPr txBox="1"/>
+          <p:nvPr/>
+        </p:nvSpPr>
+        <p:spPr>
+          <a:xfrm>
+            <a:off x="457200" y="5760720"/>
+            <a:ext cx="11247120" cy="822960"/>
+          </a:xfrm>
+          <a:prstGeom prst="rect">
+            <a:avLst/>
+          </a:prstGeom>
+          <a:noFill/>
+        </p:spPr>
+        <p:txBody>
+          <a:bodyPr wrap="square">
+            <a:spAutoFit/>
+          </a:bodyPr>
+          <a:lstStyle/>
+          <a:p>
+            <a:pPr>
+              <a:defRPr sz="1200" b="0">
+                <a:solidFill>
+                  <a:srgbClr val="333333"/>
+                </a:solidFill>
+              </a:defRPr>
+            </a:pPr>
+            <a:r>
+              <a:t>Each wrapper FM reads zfi_constants, assembles the same FTP_USER/HOST_KEY/PRIVATE_KEY_PATH parameter bundle,</a:t>
+            </a:r>
+          </a:p>
+          <a:p>
+            <a:pPr>
+              <a:defRPr sz="1200" b="0">
+                <a:solidFill>
+                  <a:srgbClr val="333333"/>
+                </a:solidFill>
+              </a:defRPr>
+            </a:pPr>
+            <a:r>
+              <a:t>and calls CALL FUNCTION 'SXPG_COMMAND_EXECUTE' — exactly like the 14 direct callers.</a:t>
+            </a:r>
+          </a:p>
+          <a:p>
+            <a:pPr>
+              <a:defRPr sz="1200" b="0">
+                <a:solidFill>
+                  <a:srgbClr val="333333"/>
+                </a:solidFill>
+              </a:defRPr>
+            </a:pPr>
+            <a:r>
+              <a:t>ZDMS_SEND_FILE was discovered late, via the ZSFTP_ SM69-prefix sanity scan — not the initial wrapper-substring search.</a:t>
+            </a:r>
+          </a:p>
+        </p:txBody>
+      </p:sp>
     </p:spTree>
   </p:cSld>
   <p:clrMapOvr>
@@ -7941,7 +10474,7 @@
               </a:defRPr>
             </a:pPr>
             <a:r>
-              <a:t>Code example #1 — direct SXPG call (ZSFTP_CITI_PULL)</a:t>
+              <a:t>11 objects discovered beyond the stakeholder seed list</a:t>
             </a:r>
           </a:p>
         </p:txBody>
@@ -7955,7 +10488,7 @@
         <p:spPr>
           <a:xfrm>
             <a:off x="457200" y="1005840"/>
-            <a:ext cx="11247120" cy="457200"/>
+            <a:ext cx="11247120" cy="548640"/>
           </a:xfrm>
           <a:prstGeom prst="rect">
             <a:avLst/>
@@ -7969,281 +10502,897 @@
           <a:lstStyle/>
           <a:p>
             <a:pPr>
-              <a:defRPr sz="1200" b="0">
+              <a:defRPr sz="1400" b="0">
                 <a:solidFill>
-                  <a:srgbClr val="333333"/>
+                  <a:srgbClr val="C83636"/>
                 </a:solidFill>
               </a:defRPr>
             </a:pPr>
             <a:r>
-              <a:t>Pattern shared by 14 of 16 reports: read credentials from zfi_constants, assemble shell parameters, call SXPG.</a:t>
+              <a:t>The 13-seed list found 8 confirmed SFTP reports. Stage-3 sweep found 11 more (+46%).</a:t>
             </a:r>
           </a:p>
         </p:txBody>
       </p:sp>
-      <p:sp>
-        <p:nvSpPr>
-          <p:cNvPr id="4" name="TextBox 3"/>
-          <p:cNvSpPr txBox="1"/>
+      <p:graphicFrame>
+        <p:nvGraphicFramePr>
+          <p:cNvPr id="4" name="Table 3"/>
+          <p:cNvGraphicFramePr>
+            <a:graphicFrameLocks noGrp="1"/>
+          </p:cNvGraphicFramePr>
           <p:nvPr/>
-        </p:nvSpPr>
-        <p:spPr>
-          <a:xfrm>
-            <a:off x="457200" y="1554480"/>
-            <a:ext cx="11247120" cy="5029200"/>
-          </a:xfrm>
-          <a:prstGeom prst="rect">
-            <a:avLst/>
-          </a:prstGeom>
-          <a:solidFill>
-            <a:srgbClr val="F0F2F7"/>
-          </a:solidFill>
-        </p:spPr>
-        <p:txBody>
-          <a:bodyPr wrap="square">
-            <a:spAutoFit/>
-          </a:bodyPr>
-          <a:lstStyle/>
-          <a:p>
-            <a:pPr>
-              <a:defRPr sz="1200" b="0">
-                <a:solidFill>
-                  <a:srgbClr val="333333"/>
-                </a:solidFill>
-                <a:latin typeface="Consolas"/>
-              </a:defRPr>
-            </a:pPr>
-            <a:r>
-              <a:t>PARAMETERS: p_comm TYPE sxpgcolist-name OBLIGATORY DEFAULT 'ZSFTP_CITI_PULL'.</a:t>
-            </a:r>
-          </a:p>
-          <a:p>
-            <a:pPr>
-              <a:defRPr sz="1200" b="0">
-                <a:solidFill>
-                  <a:srgbClr val="333333"/>
-                </a:solidFill>
-                <a:latin typeface="Consolas"/>
-              </a:defRPr>
-            </a:pPr>
-          </a:p>
-          <a:p>
-            <a:pPr>
-              <a:defRPr sz="1200" b="0">
-                <a:solidFill>
-                  <a:srgbClr val="333333"/>
-                </a:solidFill>
-                <a:latin typeface="Consolas"/>
-              </a:defRPr>
-            </a:pPr>
-            <a:r>
-              <a:t>SELECT * FROM zfi_constants INTO TABLE i_constants WHERE pname = 'ZSFTP_CITI'.</a:t>
-            </a:r>
-          </a:p>
-          <a:p>
-            <a:pPr>
-              <a:defRPr sz="1200" b="0">
-                <a:solidFill>
-                  <a:srgbClr val="333333"/>
-                </a:solidFill>
-                <a:latin typeface="Consolas"/>
-              </a:defRPr>
-            </a:pPr>
-          </a:p>
-          <a:p>
-            <a:pPr>
-              <a:defRPr sz="1200" b="0">
-                <a:solidFill>
-                  <a:srgbClr val="333333"/>
-                </a:solidFill>
-                <a:latin typeface="Consolas"/>
-              </a:defRPr>
-            </a:pPr>
-            <a:r>
-              <a:t>PERFORM f_set_parameter USING 'SOURCE_FOLDER'    'M' ''.</a:t>
-            </a:r>
-          </a:p>
-          <a:p>
-            <a:pPr>
-              <a:defRPr sz="1200" b="0">
-                <a:solidFill>
-                  <a:srgbClr val="333333"/>
-                </a:solidFill>
-                <a:latin typeface="Consolas"/>
-              </a:defRPr>
-            </a:pPr>
-            <a:r>
-              <a:t>PERFORM f_set_parameter USING 'PASSPHRASE'       'M' ' '.</a:t>
-            </a:r>
-          </a:p>
-          <a:p>
-            <a:pPr>
-              <a:defRPr sz="1200" b="0">
-                <a:solidFill>
-                  <a:srgbClr val="333333"/>
-                </a:solidFill>
-                <a:latin typeface="Consolas"/>
-              </a:defRPr>
-            </a:pPr>
-            <a:r>
-              <a:t>PERFORM f_set_parameter USING 'FTP_USER'         'M' ' '.</a:t>
-            </a:r>
-          </a:p>
-          <a:p>
-            <a:pPr>
-              <a:defRPr sz="1200" b="0">
-                <a:solidFill>
-                  <a:srgbClr val="333333"/>
-                </a:solidFill>
-                <a:latin typeface="Consolas"/>
-              </a:defRPr>
-            </a:pPr>
-            <a:r>
-              <a:t>PERFORM f_set_parameter USING 'FTP_DOMAIN'       'M' '@'.</a:t>
-            </a:r>
-          </a:p>
-          <a:p>
-            <a:pPr>
-              <a:defRPr sz="1200" b="0">
-                <a:solidFill>
-                  <a:srgbClr val="333333"/>
-                </a:solidFill>
-                <a:latin typeface="Consolas"/>
-              </a:defRPr>
-            </a:pPr>
-            <a:r>
-              <a:t>PERFORM f_set_parameter USING 'HOST_KEY'         'M' ' '.</a:t>
-            </a:r>
-          </a:p>
-          <a:p>
-            <a:pPr>
-              <a:defRPr sz="1200" b="0">
-                <a:solidFill>
-                  <a:srgbClr val="333333"/>
-                </a:solidFill>
-                <a:latin typeface="Consolas"/>
-              </a:defRPr>
-            </a:pPr>
-            <a:r>
-              <a:t>PERFORM f_set_parameter USING 'PRIVATE_KEY_PATH' 'M' ' '.</a:t>
-            </a:r>
-          </a:p>
-          <a:p>
-            <a:pPr>
-              <a:defRPr sz="1200" b="0">
-                <a:solidFill>
-                  <a:srgbClr val="333333"/>
-                </a:solidFill>
-                <a:latin typeface="Consolas"/>
-              </a:defRPr>
-            </a:pPr>
-          </a:p>
-          <a:p>
-            <a:pPr>
-              <a:defRPr sz="1200" b="0">
-                <a:solidFill>
-                  <a:srgbClr val="333333"/>
-                </a:solidFill>
-                <a:latin typeface="Consolas"/>
-              </a:defRPr>
-            </a:pPr>
-            <a:r>
-              <a:t>CALL FUNCTION 'SXPG_COMMAND_EXECUTE'</a:t>
-            </a:r>
-          </a:p>
-          <a:p>
-            <a:pPr>
-              <a:defRPr sz="1200" b="0">
-                <a:solidFill>
-                  <a:srgbClr val="333333"/>
-                </a:solidFill>
-                <a:latin typeface="Consolas"/>
-              </a:defRPr>
-            </a:pPr>
-            <a:r>
-              <a:t>  EXPORTING</a:t>
-            </a:r>
-          </a:p>
-          <a:p>
-            <a:pPr>
-              <a:defRPr sz="1200" b="0">
-                <a:solidFill>
-                  <a:srgbClr val="333333"/>
-                </a:solidFill>
-                <a:latin typeface="Consolas"/>
-              </a:defRPr>
-            </a:pPr>
-            <a:r>
-              <a:t>    commandname           = p_comm</a:t>
-            </a:r>
-          </a:p>
-          <a:p>
-            <a:pPr>
-              <a:defRPr sz="1200" b="0">
-                <a:solidFill>
-                  <a:srgbClr val="333333"/>
-                </a:solidFill>
-                <a:latin typeface="Consolas"/>
-              </a:defRPr>
-            </a:pPr>
-            <a:r>
-              <a:t>    additional_parameters = g_path</a:t>
-            </a:r>
-          </a:p>
-          <a:p>
-            <a:pPr>
-              <a:defRPr sz="1200" b="0">
-                <a:solidFill>
-                  <a:srgbClr val="333333"/>
-                </a:solidFill>
-                <a:latin typeface="Consolas"/>
-              </a:defRPr>
-            </a:pPr>
-            <a:r>
-              <a:t>  IMPORTING</a:t>
-            </a:r>
-          </a:p>
-          <a:p>
-            <a:pPr>
-              <a:defRPr sz="1200" b="0">
-                <a:solidFill>
-                  <a:srgbClr val="333333"/>
-                </a:solidFill>
-                <a:latin typeface="Consolas"/>
-              </a:defRPr>
-            </a:pPr>
-            <a:r>
-              <a:t>    exitcode              = g_ret_code</a:t>
-            </a:r>
-          </a:p>
-          <a:p>
-            <a:pPr>
-              <a:defRPr sz="1200" b="0">
-                <a:solidFill>
-                  <a:srgbClr val="333333"/>
-                </a:solidFill>
-                <a:latin typeface="Consolas"/>
-              </a:defRPr>
-            </a:pPr>
-            <a:r>
-              <a:t>  TABLES</a:t>
-            </a:r>
-          </a:p>
-          <a:p>
-            <a:pPr>
-              <a:defRPr sz="1200" b="0">
-                <a:solidFill>
-                  <a:srgbClr val="333333"/>
-                </a:solidFill>
-                <a:latin typeface="Consolas"/>
-              </a:defRPr>
-            </a:pPr>
-            <a:r>
-              <a:t>    exec_protocol         = i_return[].</a:t>
-            </a:r>
-          </a:p>
-        </p:txBody>
-      </p:sp>
+        </p:nvGraphicFramePr>
+        <p:xfrm>
+          <a:off x="457200" y="1828800"/>
+          <a:ext cx="11247120" cy="4572000"/>
+        </p:xfrm>
+        <a:graphic>
+          <a:graphicData uri="http://schemas.openxmlformats.org/drawingml/2006/table">
+            <a:tbl>
+              <a:tblPr firstRow="1" bandRow="1">
+                <a:tableStyleId>{5C22544A-7EE6-4342-B048-85BDC9FD1C3A}</a:tableStyleId>
+              </a:tblPr>
+              <a:tblGrid>
+                <a:gridCol w="3200400"/>
+                <a:gridCol w="914400"/>
+                <a:gridCol w="7132320"/>
+              </a:tblGrid>
+              <a:tr h="381000">
+                <a:tc>
+                  <a:txBody>
+                    <a:bodyPr/>
+                    <a:lstStyle/>
+                    <a:p>
+                      <a:pPr>
+                        <a:defRPr sz="1300" b="1">
+                          <a:solidFill>
+                            <a:srgbClr val="FFFFFF"/>
+                          </a:solidFill>
+                        </a:defRPr>
+                      </a:pPr>
+                      <a:r>
+                        <a:t>Object</a:t>
+                      </a:r>
+                    </a:p>
+                  </a:txBody>
+                  <a:tcPr>
+                    <a:solidFill>
+                      <a:srgbClr val="1F3A68"/>
+                    </a:solidFill>
+                  </a:tcPr>
+                </a:tc>
+                <a:tc>
+                  <a:txBody>
+                    <a:bodyPr/>
+                    <a:lstStyle/>
+                    <a:p>
+                      <a:pPr>
+                        <a:defRPr sz="1300" b="1">
+                          <a:solidFill>
+                            <a:srgbClr val="FFFFFF"/>
+                          </a:solidFill>
+                        </a:defRPr>
+                      </a:pPr>
+                      <a:r>
+                        <a:t>Type</a:t>
+                      </a:r>
+                    </a:p>
+                  </a:txBody>
+                  <a:tcPr>
+                    <a:solidFill>
+                      <a:srgbClr val="1F3A68"/>
+                    </a:solidFill>
+                  </a:tcPr>
+                </a:tc>
+                <a:tc>
+                  <a:txBody>
+                    <a:bodyPr/>
+                    <a:lstStyle/>
+                    <a:p>
+                      <a:pPr>
+                        <a:defRPr sz="1300" b="1">
+                          <a:solidFill>
+                            <a:srgbClr val="FFFFFF"/>
+                          </a:solidFill>
+                        </a:defRPr>
+                      </a:pPr>
+                      <a:r>
+                        <a:t>Why missed in seed list</a:t>
+                      </a:r>
+                    </a:p>
+                  </a:txBody>
+                  <a:tcPr>
+                    <a:solidFill>
+                      <a:srgbClr val="1F3A68"/>
+                    </a:solidFill>
+                  </a:tcPr>
+                </a:tc>
+              </a:tr>
+              <a:tr h="381000">
+                <a:tc>
+                  <a:txBody>
+                    <a:bodyPr/>
+                    <a:lstStyle/>
+                    <a:p>
+                      <a:pPr>
+                        <a:defRPr sz="1100">
+                          <a:solidFill>
+                            <a:srgbClr val="333333"/>
+                          </a:solidFill>
+                        </a:defRPr>
+                      </a:pPr>
+                      <a:r>
+                        <a:t>ZSFTP_BNP_PARIBAS</a:t>
+                      </a:r>
+                    </a:p>
+                  </a:txBody>
+                  <a:tcPr>
+                    <a:solidFill>
+                      <a:srgbClr val="FFFFFF"/>
+                    </a:solidFill>
+                  </a:tcPr>
+                </a:tc>
+                <a:tc>
+                  <a:txBody>
+                    <a:bodyPr/>
+                    <a:lstStyle/>
+                    <a:p>
+                      <a:pPr>
+                        <a:defRPr sz="1100">
+                          <a:solidFill>
+                            <a:srgbClr val="333333"/>
+                          </a:solidFill>
+                        </a:defRPr>
+                      </a:pPr>
+                      <a:r>
+                        <a:t>PROG</a:t>
+                      </a:r>
+                    </a:p>
+                  </a:txBody>
+                  <a:tcPr>
+                    <a:solidFill>
+                      <a:srgbClr val="FFFFFF"/>
+                    </a:solidFill>
+                  </a:tcPr>
+                </a:tc>
+                <a:tc>
+                  <a:txBody>
+                    <a:bodyPr/>
+                    <a:lstStyle/>
+                    <a:p>
+                      <a:pPr>
+                        <a:defRPr sz="1100">
+                          <a:solidFill>
+                            <a:srgbClr val="333333"/>
+                          </a:solidFill>
+                        </a:defRPr>
+                      </a:pPr>
+                      <a:r>
+                        <a:t>Password-only auth — no PRIVATE_KEY_PATH marker</a:t>
+                      </a:r>
+                    </a:p>
+                  </a:txBody>
+                  <a:tcPr>
+                    <a:solidFill>
+                      <a:srgbClr val="FFFFFF"/>
+                    </a:solidFill>
+                  </a:tcPr>
+                </a:tc>
+              </a:tr>
+              <a:tr h="381000">
+                <a:tc>
+                  <a:txBody>
+                    <a:bodyPr/>
+                    <a:lstStyle/>
+                    <a:p>
+                      <a:pPr>
+                        <a:defRPr sz="1100">
+                          <a:solidFill>
+                            <a:srgbClr val="333333"/>
+                          </a:solidFill>
+                        </a:defRPr>
+                      </a:pPr>
+                      <a:r>
+                        <a:t>ZSFTP_BNP_PARIBAS_WITH_PGP</a:t>
+                      </a:r>
+                    </a:p>
+                  </a:txBody>
+                  <a:tcPr>
+                    <a:solidFill>
+                      <a:srgbClr val="F0F2F7"/>
+                    </a:solidFill>
+                  </a:tcPr>
+                </a:tc>
+                <a:tc>
+                  <a:txBody>
+                    <a:bodyPr/>
+                    <a:lstStyle/>
+                    <a:p>
+                      <a:pPr>
+                        <a:defRPr sz="1100">
+                          <a:solidFill>
+                            <a:srgbClr val="333333"/>
+                          </a:solidFill>
+                        </a:defRPr>
+                      </a:pPr>
+                      <a:r>
+                        <a:t>PROG</a:t>
+                      </a:r>
+                    </a:p>
+                  </a:txBody>
+                  <a:tcPr>
+                    <a:solidFill>
+                      <a:srgbClr val="F0F2F7"/>
+                    </a:solidFill>
+                  </a:tcPr>
+                </a:tc>
+                <a:tc>
+                  <a:txBody>
+                    <a:bodyPr/>
+                    <a:lstStyle/>
+                    <a:p>
+                      <a:pPr>
+                        <a:defRPr sz="1100">
+                          <a:solidFill>
+                            <a:srgbClr val="333333"/>
+                          </a:solidFill>
+                        </a:defRPr>
+                      </a:pPr>
+                      <a:r>
+                        <a:t>Newer PGP variant of existing BNP report</a:t>
+                      </a:r>
+                    </a:p>
+                  </a:txBody>
+                  <a:tcPr>
+                    <a:solidFill>
+                      <a:srgbClr val="F0F2F7"/>
+                    </a:solidFill>
+                  </a:tcPr>
+                </a:tc>
+              </a:tr>
+              <a:tr h="381000">
+                <a:tc>
+                  <a:txBody>
+                    <a:bodyPr/>
+                    <a:lstStyle/>
+                    <a:p>
+                      <a:pPr>
+                        <a:defRPr sz="1100">
+                          <a:solidFill>
+                            <a:srgbClr val="333333"/>
+                          </a:solidFill>
+                        </a:defRPr>
+                      </a:pPr>
+                      <a:r>
+                        <a:t>ZSFTP_CERIDIAN_PULL</a:t>
+                      </a:r>
+                    </a:p>
+                  </a:txBody>
+                  <a:tcPr>
+                    <a:solidFill>
+                      <a:srgbClr val="FFFFFF"/>
+                    </a:solidFill>
+                  </a:tcPr>
+                </a:tc>
+                <a:tc>
+                  <a:txBody>
+                    <a:bodyPr/>
+                    <a:lstStyle/>
+                    <a:p>
+                      <a:pPr>
+                        <a:defRPr sz="1100">
+                          <a:solidFill>
+                            <a:srgbClr val="333333"/>
+                          </a:solidFill>
+                        </a:defRPr>
+                      </a:pPr>
+                      <a:r>
+                        <a:t>PROG</a:t>
+                      </a:r>
+                    </a:p>
+                  </a:txBody>
+                  <a:tcPr>
+                    <a:solidFill>
+                      <a:srgbClr val="FFFFFF"/>
+                    </a:solidFill>
+                  </a:tcPr>
+                </a:tc>
+                <a:tc>
+                  <a:txBody>
+                    <a:bodyPr/>
+                    <a:lstStyle/>
+                    <a:p>
+                      <a:pPr>
+                        <a:defRPr sz="1100">
+                          <a:solidFill>
+                            <a:srgbClr val="333333"/>
+                          </a:solidFill>
+                        </a:defRPr>
+                      </a:pPr>
+                      <a:r>
+                        <a:t>Operator-facing duplicate of ZFFIU_ACC_POST flow</a:t>
+                      </a:r>
+                    </a:p>
+                  </a:txBody>
+                  <a:tcPr>
+                    <a:solidFill>
+                      <a:srgbClr val="FFFFFF"/>
+                    </a:solidFill>
+                  </a:tcPr>
+                </a:tc>
+              </a:tr>
+              <a:tr h="381000">
+                <a:tc>
+                  <a:txBody>
+                    <a:bodyPr/>
+                    <a:lstStyle/>
+                    <a:p>
+                      <a:pPr>
+                        <a:defRPr sz="1100">
+                          <a:solidFill>
+                            <a:srgbClr val="333333"/>
+                          </a:solidFill>
+                        </a:defRPr>
+                      </a:pPr>
+                      <a:r>
+                        <a:t>ZSFTP_CITI_SEND</a:t>
+                      </a:r>
+                    </a:p>
+                  </a:txBody>
+                  <a:tcPr>
+                    <a:solidFill>
+                      <a:srgbClr val="F0F2F7"/>
+                    </a:solidFill>
+                  </a:tcPr>
+                </a:tc>
+                <a:tc>
+                  <a:txBody>
+                    <a:bodyPr/>
+                    <a:lstStyle/>
+                    <a:p>
+                      <a:pPr>
+                        <a:defRPr sz="1100">
+                          <a:solidFill>
+                            <a:srgbClr val="333333"/>
+                          </a:solidFill>
+                        </a:defRPr>
+                      </a:pPr>
+                      <a:r>
+                        <a:t>PROG</a:t>
+                      </a:r>
+                    </a:p>
+                  </a:txBody>
+                  <a:tcPr>
+                    <a:solidFill>
+                      <a:srgbClr val="F0F2F7"/>
+                    </a:solidFill>
+                  </a:tcPr>
+                </a:tc>
+                <a:tc>
+                  <a:txBody>
+                    <a:bodyPr/>
+                    <a:lstStyle/>
+                    <a:p>
+                      <a:pPr>
+                        <a:defRPr sz="1100">
+                          <a:solidFill>
+                            <a:srgbClr val="333333"/>
+                          </a:solidFill>
+                        </a:defRPr>
+                      </a:pPr>
+                      <a:r>
+                        <a:t>Outbound counterpart of ZSFTP_CITI_PULL</a:t>
+                      </a:r>
+                    </a:p>
+                  </a:txBody>
+                  <a:tcPr>
+                    <a:solidFill>
+                      <a:srgbClr val="F0F2F7"/>
+                    </a:solidFill>
+                  </a:tcPr>
+                </a:tc>
+              </a:tr>
+              <a:tr h="381000">
+                <a:tc>
+                  <a:txBody>
+                    <a:bodyPr/>
+                    <a:lstStyle/>
+                    <a:p>
+                      <a:pPr>
+                        <a:defRPr sz="1100">
+                          <a:solidFill>
+                            <a:srgbClr val="333333"/>
+                          </a:solidFill>
+                        </a:defRPr>
+                      </a:pPr>
+                      <a:r>
+                        <a:t>ZSFTP_JPM</a:t>
+                      </a:r>
+                    </a:p>
+                  </a:txBody>
+                  <a:tcPr>
+                    <a:solidFill>
+                      <a:srgbClr val="FFFFFF"/>
+                    </a:solidFill>
+                  </a:tcPr>
+                </a:tc>
+                <a:tc>
+                  <a:txBody>
+                    <a:bodyPr/>
+                    <a:lstStyle/>
+                    <a:p>
+                      <a:pPr>
+                        <a:defRPr sz="1100">
+                          <a:solidFill>
+                            <a:srgbClr val="333333"/>
+                          </a:solidFill>
+                        </a:defRPr>
+                      </a:pPr>
+                      <a:r>
+                        <a:t>PROG</a:t>
+                      </a:r>
+                    </a:p>
+                  </a:txBody>
+                  <a:tcPr>
+                    <a:solidFill>
+                      <a:srgbClr val="FFFFFF"/>
+                    </a:solidFill>
+                  </a:tcPr>
+                </a:tc>
+                <a:tc>
+                  <a:txBody>
+                    <a:bodyPr/>
+                    <a:lstStyle/>
+                    <a:p>
+                      <a:pPr>
+                        <a:defRPr sz="1100">
+                          <a:solidFill>
+                            <a:srgbClr val="333333"/>
+                          </a:solidFill>
+                        </a:defRPr>
+                      </a:pPr>
+                      <a:r>
+                        <a:t>Entire JPMorgan integration not in seeds</a:t>
+                      </a:r>
+                    </a:p>
+                  </a:txBody>
+                  <a:tcPr>
+                    <a:solidFill>
+                      <a:srgbClr val="FFFFFF"/>
+                    </a:solidFill>
+                  </a:tcPr>
+                </a:tc>
+              </a:tr>
+              <a:tr h="381000">
+                <a:tc>
+                  <a:txBody>
+                    <a:bodyPr/>
+                    <a:lstStyle/>
+                    <a:p>
+                      <a:pPr>
+                        <a:defRPr sz="1100">
+                          <a:solidFill>
+                            <a:srgbClr val="333333"/>
+                          </a:solidFill>
+                        </a:defRPr>
+                      </a:pPr>
+                      <a:r>
+                        <a:t>ZSFTP_JPM_PULL</a:t>
+                      </a:r>
+                    </a:p>
+                  </a:txBody>
+                  <a:tcPr>
+                    <a:solidFill>
+                      <a:srgbClr val="F0F2F7"/>
+                    </a:solidFill>
+                  </a:tcPr>
+                </a:tc>
+                <a:tc>
+                  <a:txBody>
+                    <a:bodyPr/>
+                    <a:lstStyle/>
+                    <a:p>
+                      <a:pPr>
+                        <a:defRPr sz="1100">
+                          <a:solidFill>
+                            <a:srgbClr val="333333"/>
+                          </a:solidFill>
+                        </a:defRPr>
+                      </a:pPr>
+                      <a:r>
+                        <a:t>PROG</a:t>
+                      </a:r>
+                    </a:p>
+                  </a:txBody>
+                  <a:tcPr>
+                    <a:solidFill>
+                      <a:srgbClr val="F0F2F7"/>
+                    </a:solidFill>
+                  </a:tcPr>
+                </a:tc>
+                <a:tc>
+                  <a:txBody>
+                    <a:bodyPr/>
+                    <a:lstStyle/>
+                    <a:p>
+                      <a:pPr>
+                        <a:defRPr sz="1100">
+                          <a:solidFill>
+                            <a:srgbClr val="333333"/>
+                          </a:solidFill>
+                        </a:defRPr>
+                      </a:pPr>
+                      <a:r>
+                        <a:t>Entire JPMorgan integration not in seeds</a:t>
+                      </a:r>
+                    </a:p>
+                  </a:txBody>
+                  <a:tcPr>
+                    <a:solidFill>
+                      <a:srgbClr val="F0F2F7"/>
+                    </a:solidFill>
+                  </a:tcPr>
+                </a:tc>
+              </a:tr>
+              <a:tr h="381000">
+                <a:tc>
+                  <a:txBody>
+                    <a:bodyPr/>
+                    <a:lstStyle/>
+                    <a:p>
+                      <a:pPr>
+                        <a:defRPr sz="1100">
+                          <a:solidFill>
+                            <a:srgbClr val="333333"/>
+                          </a:solidFill>
+                        </a:defRPr>
+                      </a:pPr>
+                      <a:r>
+                        <a:t>ZDMS_REPLACE_FILES</a:t>
+                      </a:r>
+                    </a:p>
+                  </a:txBody>
+                  <a:tcPr>
+                    <a:solidFill>
+                      <a:srgbClr val="FFFFFF"/>
+                    </a:solidFill>
+                  </a:tcPr>
+                </a:tc>
+                <a:tc>
+                  <a:txBody>
+                    <a:bodyPr/>
+                    <a:lstStyle/>
+                    <a:p>
+                      <a:pPr>
+                        <a:defRPr sz="1100">
+                          <a:solidFill>
+                            <a:srgbClr val="333333"/>
+                          </a:solidFill>
+                        </a:defRPr>
+                      </a:pPr>
+                      <a:r>
+                        <a:t>PROG</a:t>
+                      </a:r>
+                    </a:p>
+                  </a:txBody>
+                  <a:tcPr>
+                    <a:solidFill>
+                      <a:srgbClr val="FFFFFF"/>
+                    </a:solidFill>
+                  </a:tcPr>
+                </a:tc>
+                <a:tc>
+                  <a:txBody>
+                    <a:bodyPr/>
+                    <a:lstStyle/>
+                    <a:p>
+                      <a:pPr>
+                        <a:defRPr sz="1100">
+                          <a:solidFill>
+                            <a:srgbClr val="333333"/>
+                          </a:solidFill>
+                        </a:defRPr>
+                      </a:pPr>
+                      <a:r>
+                        <a:t>Adjacent DMS report sharing SM69 commands</a:t>
+                      </a:r>
+                    </a:p>
+                  </a:txBody>
+                  <a:tcPr>
+                    <a:solidFill>
+                      <a:srgbClr val="FFFFFF"/>
+                    </a:solidFill>
+                  </a:tcPr>
+                </a:tc>
+              </a:tr>
+              <a:tr h="381000">
+                <a:tc>
+                  <a:txBody>
+                    <a:bodyPr/>
+                    <a:lstStyle/>
+                    <a:p>
+                      <a:pPr>
+                        <a:defRPr sz="1100">
+                          <a:solidFill>
+                            <a:srgbClr val="333333"/>
+                          </a:solidFill>
+                        </a:defRPr>
+                      </a:pPr>
+                      <a:r>
+                        <a:t>ZSD_ERX_DMS_FILE_PROCESS</a:t>
+                      </a:r>
+                    </a:p>
+                  </a:txBody>
+                  <a:tcPr>
+                    <a:solidFill>
+                      <a:srgbClr val="F0F2F7"/>
+                    </a:solidFill>
+                  </a:tcPr>
+                </a:tc>
+                <a:tc>
+                  <a:txBody>
+                    <a:bodyPr/>
+                    <a:lstStyle/>
+                    <a:p>
+                      <a:pPr>
+                        <a:defRPr sz="1100">
+                          <a:solidFill>
+                            <a:srgbClr val="333333"/>
+                          </a:solidFill>
+                        </a:defRPr>
+                      </a:pPr>
+                      <a:r>
+                        <a:t>PROG</a:t>
+                      </a:r>
+                    </a:p>
+                  </a:txBody>
+                  <a:tcPr>
+                    <a:solidFill>
+                      <a:srgbClr val="F0F2F7"/>
+                    </a:solidFill>
+                  </a:tcPr>
+                </a:tc>
+                <a:tc>
+                  <a:txBody>
+                    <a:bodyPr/>
+                    <a:lstStyle/>
+                    <a:p>
+                      <a:pPr>
+                        <a:defRPr sz="1100">
+                          <a:solidFill>
+                            <a:srgbClr val="333333"/>
+                          </a:solidFill>
+                        </a:defRPr>
+                      </a:pPr>
+                      <a:r>
+                        <a:t>Indirect SFTP via ZERX wrapper FUGR</a:t>
+                      </a:r>
+                    </a:p>
+                  </a:txBody>
+                  <a:tcPr>
+                    <a:solidFill>
+                      <a:srgbClr val="F0F2F7"/>
+                    </a:solidFill>
+                  </a:tcPr>
+                </a:tc>
+              </a:tr>
+              <a:tr h="381000">
+                <a:tc>
+                  <a:txBody>
+                    <a:bodyPr/>
+                    <a:lstStyle/>
+                    <a:p>
+                      <a:pPr>
+                        <a:defRPr sz="1100">
+                          <a:solidFill>
+                            <a:srgbClr val="333333"/>
+                          </a:solidFill>
+                        </a:defRPr>
+                      </a:pPr>
+                      <a:r>
+                        <a:t>ZMEDICARE</a:t>
+                      </a:r>
+                    </a:p>
+                  </a:txBody>
+                  <a:tcPr>
+                    <a:solidFill>
+                      <a:srgbClr val="FFFFFF"/>
+                    </a:solidFill>
+                  </a:tcPr>
+                </a:tc>
+                <a:tc>
+                  <a:txBody>
+                    <a:bodyPr/>
+                    <a:lstStyle/>
+                    <a:p>
+                      <a:pPr>
+                        <a:defRPr sz="1100">
+                          <a:solidFill>
+                            <a:srgbClr val="333333"/>
+                          </a:solidFill>
+                        </a:defRPr>
+                      </a:pPr>
+                      <a:r>
+                        <a:t>FUGR</a:t>
+                      </a:r>
+                    </a:p>
+                  </a:txBody>
+                  <a:tcPr>
+                    <a:solidFill>
+                      <a:srgbClr val="FFFFFF"/>
+                    </a:solidFill>
+                  </a:tcPr>
+                </a:tc>
+                <a:tc>
+                  <a:txBody>
+                    <a:bodyPr/>
+                    <a:lstStyle/>
+                    <a:p>
+                      <a:pPr>
+                        <a:defRPr sz="1100">
+                          <a:solidFill>
+                            <a:srgbClr val="333333"/>
+                          </a:solidFill>
+                        </a:defRPr>
+                      </a:pPr>
+                      <a:r>
+                        <a:t>Wrapper FUGR — never in a 'report list'</a:t>
+                      </a:r>
+                    </a:p>
+                  </a:txBody>
+                  <a:tcPr>
+                    <a:solidFill>
+                      <a:srgbClr val="FFFFFF"/>
+                    </a:solidFill>
+                  </a:tcPr>
+                </a:tc>
+              </a:tr>
+              <a:tr h="381000">
+                <a:tc>
+                  <a:txBody>
+                    <a:bodyPr/>
+                    <a:lstStyle/>
+                    <a:p>
+                      <a:pPr>
+                        <a:defRPr sz="1100">
+                          <a:solidFill>
+                            <a:srgbClr val="333333"/>
+                          </a:solidFill>
+                        </a:defRPr>
+                      </a:pPr>
+                      <a:r>
+                        <a:t>ZERX</a:t>
+                      </a:r>
+                    </a:p>
+                  </a:txBody>
+                  <a:tcPr>
+                    <a:solidFill>
+                      <a:srgbClr val="F0F2F7"/>
+                    </a:solidFill>
+                  </a:tcPr>
+                </a:tc>
+                <a:tc>
+                  <a:txBody>
+                    <a:bodyPr/>
+                    <a:lstStyle/>
+                    <a:p>
+                      <a:pPr>
+                        <a:defRPr sz="1100">
+                          <a:solidFill>
+                            <a:srgbClr val="333333"/>
+                          </a:solidFill>
+                        </a:defRPr>
+                      </a:pPr>
+                      <a:r>
+                        <a:t>FUGR</a:t>
+                      </a:r>
+                    </a:p>
+                  </a:txBody>
+                  <a:tcPr>
+                    <a:solidFill>
+                      <a:srgbClr val="F0F2F7"/>
+                    </a:solidFill>
+                  </a:tcPr>
+                </a:tc>
+                <a:tc>
+                  <a:txBody>
+                    <a:bodyPr/>
+                    <a:lstStyle/>
+                    <a:p>
+                      <a:pPr>
+                        <a:defRPr sz="1100">
+                          <a:solidFill>
+                            <a:srgbClr val="333333"/>
+                          </a:solidFill>
+                        </a:defRPr>
+                      </a:pPr>
+                      <a:r>
+                        <a:t>Same — wrapper FUGR for eRx/DMS path</a:t>
+                      </a:r>
+                    </a:p>
+                  </a:txBody>
+                  <a:tcPr>
+                    <a:solidFill>
+                      <a:srgbClr val="F0F2F7"/>
+                    </a:solidFill>
+                  </a:tcPr>
+                </a:tc>
+              </a:tr>
+              <a:tr h="381000">
+                <a:tc>
+                  <a:txBody>
+                    <a:bodyPr/>
+                    <a:lstStyle/>
+                    <a:p>
+                      <a:pPr>
+                        <a:defRPr sz="1100">
+                          <a:solidFill>
+                            <a:srgbClr val="333333"/>
+                          </a:solidFill>
+                        </a:defRPr>
+                      </a:pPr>
+                      <a:r>
+                        <a:t>ZDMS_SEND_FILE</a:t>
+                      </a:r>
+                    </a:p>
+                  </a:txBody>
+                  <a:tcPr>
+                    <a:solidFill>
+                      <a:srgbClr val="FFFFFF"/>
+                    </a:solidFill>
+                  </a:tcPr>
+                </a:tc>
+                <a:tc>
+                  <a:txBody>
+                    <a:bodyPr/>
+                    <a:lstStyle/>
+                    <a:p>
+                      <a:pPr>
+                        <a:defRPr sz="1100">
+                          <a:solidFill>
+                            <a:srgbClr val="333333"/>
+                          </a:solidFill>
+                        </a:defRPr>
+                      </a:pPr>
+                      <a:r>
+                        <a:t>FUGR</a:t>
+                      </a:r>
+                    </a:p>
+                  </a:txBody>
+                  <a:tcPr>
+                    <a:solidFill>
+                      <a:srgbClr val="FFFFFF"/>
+                    </a:solidFill>
+                  </a:tcPr>
+                </a:tc>
+                <a:tc>
+                  <a:txBody>
+                    <a:bodyPr/>
+                    <a:lstStyle/>
+                    <a:p>
+                      <a:pPr>
+                        <a:defRPr sz="1100">
+                          <a:solidFill>
+                            <a:srgbClr val="333333"/>
+                          </a:solidFill>
+                        </a:defRPr>
+                      </a:pPr>
+                      <a:r>
+                        <a:t>Wrapper FUGR with _TO_SFTP naming — initial substring scan looked for _FROM_SFTP only</a:t>
+                      </a:r>
+                    </a:p>
+                  </a:txBody>
+                  <a:tcPr>
+                    <a:solidFill>
+                      <a:srgbClr val="FFFFFF"/>
+                    </a:solidFill>
+                  </a:tcPr>
+                </a:tc>
+              </a:tr>
+            </a:tbl>
+          </a:graphicData>
+        </a:graphic>
+      </p:graphicFrame>
     </p:spTree>
   </p:cSld>
   <p:clrMapOvr>
@@ -8292,7 +11441,7 @@
               </a:defRPr>
             </a:pPr>
             <a:r>
-              <a:t>Code example #2 — wrapper FM (ZMEDI_GET_FROM_SFTP)</a:t>
+              <a:t>Code example #1 — direct SXPG call (ZSFTP_CITI_PULL)</a:t>
             </a:r>
           </a:p>
         </p:txBody>
@@ -8327,7 +11476,7 @@
               </a:defRPr>
             </a:pPr>
             <a:r>
-              <a:t>Same SXPG-shell pattern inside a function module — 2 reports invoke this instead of duplicating the plumbing.</a:t>
+              <a:t>Pattern shared by 14 of 16 reports: read credentials from zfi_constants, assemble shell parameters, call SXPG.</a:t>
             </a:r>
           </a:p>
         </p:txBody>
@@ -8365,7 +11514,7 @@
               </a:defRPr>
             </a:pPr>
             <a:r>
-              <a:t>FUNCTION zmedi_get_from_sftp</a:t>
+              <a:t>PARAMETERS: p_comm TYPE sxpgcolist-name OBLIGATORY DEFAULT 'ZSFTP_CITI_PULL'.</a:t>
             </a:r>
           </a:p>
           <a:p>
@@ -8377,9 +11526,6 @@
                 <a:latin typeface="Consolas"/>
               </a:defRPr>
             </a:pPr>
-            <a:r>
-              <a:t>  IMPORTING command   TYPE sxpgcolist-name</a:t>
-            </a:r>
           </a:p>
           <a:p>
             <a:pPr>
@@ -8391,7 +11537,7 @@
               </a:defRPr>
             </a:pPr>
             <a:r>
-              <a:t>            constants TYPE bdc_prog</a:t>
+              <a:t>SELECT * FROM zfi_constants INTO TABLE i_constants WHERE pname = 'ZSFTP_CITI'.</a:t>
             </a:r>
           </a:p>
           <a:p>
@@ -8403,9 +11549,6 @@
                 <a:latin typeface="Consolas"/>
               </a:defRPr>
             </a:pPr>
-            <a:r>
-              <a:t>  TABLES    return    LIKE bapiret2 OPTIONAL.</a:t>
-            </a:r>
           </a:p>
           <a:p>
             <a:pPr>
@@ -8416,6 +11559,9 @@
                 <a:latin typeface="Consolas"/>
               </a:defRPr>
             </a:pPr>
+            <a:r>
+              <a:t>PERFORM f_set_parameter USING 'SOURCE_FOLDER'    'M' ''.</a:t>
+            </a:r>
           </a:p>
           <a:p>
             <a:pPr>
@@ -8427,7 +11573,7 @@
               </a:defRPr>
             </a:pPr>
             <a:r>
-              <a:t>  SELECT * FROM zfi_constants INTO TABLE gt_constants WHERE pname = constants.</a:t>
+              <a:t>PERFORM f_set_parameter USING 'PASSPHRASE'       'M' ' '.</a:t>
             </a:r>
           </a:p>
           <a:p>
@@ -8439,6 +11585,9 @@
                 <a:latin typeface="Consolas"/>
               </a:defRPr>
             </a:pPr>
+            <a:r>
+              <a:t>PERFORM f_set_parameter USING 'FTP_USER'         'M' ' '.</a:t>
+            </a:r>
           </a:p>
           <a:p>
             <a:pPr>
@@ -8450,7 +11599,7 @@
               </a:defRPr>
             </a:pPr>
             <a:r>
-              <a:t>  PERFORM f_set_parameter USING 'FTP_USER'         'M' ''.</a:t>
+              <a:t>PERFORM f_set_parameter USING 'FTP_DOMAIN'       'M' '@'.</a:t>
             </a:r>
           </a:p>
           <a:p>
@@ -8463,7 +11612,7 @@
               </a:defRPr>
             </a:pPr>
             <a:r>
-              <a:t>  PERFORM f_set_parameter USING 'PASSPHRASE'       'M' ':'.</a:t>
+              <a:t>PERFORM f_set_parameter USING 'HOST_KEY'         'M' ' '.</a:t>
             </a:r>
           </a:p>
           <a:p>
@@ -8476,7 +11625,7 @@
               </a:defRPr>
             </a:pPr>
             <a:r>
-              <a:t>  PERFORM f_set_parameter USING 'HOST_KEY'         'M' ';'.</a:t>
+              <a:t>PERFORM f_set_parameter USING 'PRIVATE_KEY_PATH' 'M' ' '.</a:t>
             </a:r>
           </a:p>
           <a:p>
@@ -8488,9 +11637,6 @@
                 <a:latin typeface="Consolas"/>
               </a:defRPr>
             </a:pPr>
-            <a:r>
-              <a:t>  PERFORM f_set_parameter USING 'FTP_DOMAIN'       'M' ';'.</a:t>
-            </a:r>
           </a:p>
           <a:p>
             <a:pPr>
@@ -8502,7 +11648,7 @@
               </a:defRPr>
             </a:pPr>
             <a:r>
-              <a:t>  PERFORM f_set_parameter USING 'PRIVATE_KEY_PATH' 'M' ';'.</a:t>
+              <a:t>CALL FUNCTION 'SXPG_COMMAND_EXECUTE'</a:t>
             </a:r>
           </a:p>
           <a:p>
@@ -8515,7 +11661,7 @@
               </a:defRPr>
             </a:pPr>
             <a:r>
-              <a:t>  PERFORM f_set_parameter USING 'SOURCE_PATH'      'M' ';'.</a:t>
+              <a:t>  EXPORTING</a:t>
             </a:r>
           </a:p>
           <a:p>
@@ -8527,6 +11673,9 @@
                 <a:latin typeface="Consolas"/>
               </a:defRPr>
             </a:pPr>
+            <a:r>
+              <a:t>    commandname           = p_comm</a:t>
+            </a:r>
           </a:p>
           <a:p>
             <a:pPr>
@@ -8538,7 +11687,7 @@
               </a:defRPr>
             </a:pPr>
             <a:r>
-              <a:t>  CALL FUNCTION 'SXPG_COMMAND_EXECUTE'</a:t>
+              <a:t>    additional_parameters = g_path</a:t>
             </a:r>
           </a:p>
           <a:p>
@@ -8551,7 +11700,7 @@
               </a:defRPr>
             </a:pPr>
             <a:r>
-              <a:t>    EXPORTING commandname           = command</a:t>
+              <a:t>  IMPORTING</a:t>
             </a:r>
           </a:p>
           <a:p>
@@ -8564,7 +11713,7 @@
               </a:defRPr>
             </a:pPr>
             <a:r>
-              <a:t>              additional_parameters = gv_param</a:t>
+              <a:t>    exitcode              = g_ret_code</a:t>
             </a:r>
           </a:p>
           <a:p>
@@ -8577,7 +11726,7 @@
               </a:defRPr>
             </a:pPr>
             <a:r>
-              <a:t>    IMPORTING exitcode              = lv_ret_code</a:t>
+              <a:t>  TABLES</a:t>
             </a:r>
           </a:p>
           <a:p>
@@ -8590,20 +11739,7 @@
               </a:defRPr>
             </a:pPr>
             <a:r>
-              <a:t>    TABLES    exec_protocol         = lt_return[].</a:t>
-            </a:r>
-          </a:p>
-          <a:p>
-            <a:pPr>
-              <a:defRPr sz="1200" b="0">
-                <a:solidFill>
-                  <a:srgbClr val="333333"/>
-                </a:solidFill>
-                <a:latin typeface="Consolas"/>
-              </a:defRPr>
-            </a:pPr>
-            <a:r>
-              <a:t>ENDFUNCTION.</a:t>
+              <a:t>    exec_protocol         = i_return[].</a:t>
             </a:r>
           </a:p>
         </p:txBody>
@@ -8656,7 +11792,7 @@
               </a:defRPr>
             </a:pPr>
             <a:r>
-              <a:t>Migration proposal — one ABAP-level change point</a:t>
+              <a:t>Code example #2 — wrapper FM (ZMEDI_GET_FROM_SFTP)</a:t>
             </a:r>
           </a:p>
         </p:txBody>
@@ -8670,7 +11806,7 @@
         <p:spPr>
           <a:xfrm>
             <a:off x="457200" y="1005840"/>
-            <a:ext cx="11247120" cy="640080"/>
+            <a:ext cx="11247120" cy="457200"/>
           </a:xfrm>
           <a:prstGeom prst="rect">
             <a:avLst/>
@@ -8684,437 +11820,35 @@
           <a:lstStyle/>
           <a:p>
             <a:pPr>
-              <a:defRPr sz="1400" b="0">
+              <a:defRPr sz="1200" b="0">
                 <a:solidFill>
-                  <a:srgbClr val="C83636"/>
+                  <a:srgbClr val="333333"/>
                 </a:solidFill>
               </a:defRPr>
             </a:pPr>
             <a:r>
-              <a:t>Replace CALL FUNCTION 'SXPG_COMMAND_EXECUTE' (with SM69 entries that shell out to OS sftp/scp) with a native ABAP SFTP layer.</a:t>
+              <a:t>Same SXPG-shell pattern inside a function module — 2 reports invoke this instead of duplicating the plumbing.</a:t>
             </a:r>
           </a:p>
         </p:txBody>
       </p:sp>
-      <p:graphicFrame>
-        <p:nvGraphicFramePr>
-          <p:cNvPr id="4" name="Table 3"/>
-          <p:cNvGraphicFramePr>
-            <a:graphicFrameLocks noGrp="1"/>
-          </p:cNvGraphicFramePr>
-          <p:nvPr/>
-        </p:nvGraphicFramePr>
-        <p:xfrm>
-          <a:off x="457200" y="2011680"/>
-          <a:ext cx="11247120" cy="4114800"/>
-        </p:xfrm>
-        <a:graphic>
-          <a:graphicData uri="http://schemas.openxmlformats.org/drawingml/2006/table">
-            <a:tbl>
-              <a:tblPr firstRow="1" bandRow="1">
-                <a:tableStyleId>{5C22544A-7EE6-4342-B048-85BDC9FD1C3A}</a:tableStyleId>
-              </a:tblPr>
-              <a:tblGrid>
-                <a:gridCol w="457200"/>
-                <a:gridCol w="3657600"/>
-                <a:gridCol w="3931920"/>
-                <a:gridCol w="3200400"/>
-              </a:tblGrid>
-              <a:tr h="1028700">
-                <a:tc>
-                  <a:txBody>
-                    <a:bodyPr/>
-                    <a:lstStyle/>
-                    <a:p>
-                      <a:pPr>
-                        <a:defRPr sz="1300" b="1">
-                          <a:solidFill>
-                            <a:srgbClr val="FFFFFF"/>
-                          </a:solidFill>
-                        </a:defRPr>
-                      </a:pPr>
-                      <a:r>
-                        <a:t>#</a:t>
-                      </a:r>
-                    </a:p>
-                  </a:txBody>
-                  <a:tcPr>
-                    <a:solidFill>
-                      <a:srgbClr val="1F3A68"/>
-                    </a:solidFill>
-                  </a:tcPr>
-                </a:tc>
-                <a:tc>
-                  <a:txBody>
-                    <a:bodyPr/>
-                    <a:lstStyle/>
-                    <a:p>
-                      <a:pPr>
-                        <a:defRPr sz="1300" b="1">
-                          <a:solidFill>
-                            <a:srgbClr val="FFFFFF"/>
-                          </a:solidFill>
-                        </a:defRPr>
-                      </a:pPr>
-                      <a:r>
-                        <a:t>Target replacement</a:t>
-                      </a:r>
-                    </a:p>
-                  </a:txBody>
-                  <a:tcPr>
-                    <a:solidFill>
-                      <a:srgbClr val="1F3A68"/>
-                    </a:solidFill>
-                  </a:tcPr>
-                </a:tc>
-                <a:tc>
-                  <a:txBody>
-                    <a:bodyPr/>
-                    <a:lstStyle/>
-                    <a:p>
-                      <a:pPr>
-                        <a:defRPr sz="1300" b="1">
-                          <a:solidFill>
-                            <a:srgbClr val="FFFFFF"/>
-                          </a:solidFill>
-                        </a:defRPr>
-                      </a:pPr>
-                      <a:r>
-                        <a:t>Why</a:t>
-                      </a:r>
-                    </a:p>
-                  </a:txBody>
-                  <a:tcPr>
-                    <a:solidFill>
-                      <a:srgbClr val="1F3A68"/>
-                    </a:solidFill>
-                  </a:tcPr>
-                </a:tc>
-                <a:tc>
-                  <a:txBody>
-                    <a:bodyPr/>
-                    <a:lstStyle/>
-                    <a:p>
-                      <a:pPr>
-                        <a:defRPr sz="1300" b="1">
-                          <a:solidFill>
-                            <a:srgbClr val="FFFFFF"/>
-                          </a:solidFill>
-                        </a:defRPr>
-                      </a:pPr>
-                      <a:r>
-                        <a:t>Coverage</a:t>
-                      </a:r>
-                    </a:p>
-                  </a:txBody>
-                  <a:tcPr>
-                    <a:solidFill>
-                      <a:srgbClr val="1F3A68"/>
-                    </a:solidFill>
-                  </a:tcPr>
-                </a:tc>
-              </a:tr>
-              <a:tr h="1028700">
-                <a:tc>
-                  <a:txBody>
-                    <a:bodyPr/>
-                    <a:lstStyle/>
-                    <a:p>
-                      <a:pPr>
-                        <a:defRPr sz="1200">
-                          <a:solidFill>
-                            <a:srgbClr val="333333"/>
-                          </a:solidFill>
-                        </a:defRPr>
-                      </a:pPr>
-                      <a:r>
-                        <a:t>A</a:t>
-                      </a:r>
-                    </a:p>
-                  </a:txBody>
-                  <a:tcPr>
-                    <a:solidFill>
-                      <a:srgbClr val="FFFFFF"/>
-                    </a:solidFill>
-                  </a:tcPr>
-                </a:tc>
-                <a:tc>
-                  <a:txBody>
-                    <a:bodyPr/>
-                    <a:lstStyle/>
-                    <a:p>
-                      <a:pPr>
-                        <a:defRPr sz="1200">
-                          <a:solidFill>
-                            <a:srgbClr val="333333"/>
-                          </a:solidFill>
-                        </a:defRPr>
-                      </a:pPr>
-                      <a:r>
-                        <a:t>Native ABAP SSH/SFTP client class</a:t>
-                      </a:r>
-                    </a:p>
-                  </a:txBody>
-                  <a:tcPr>
-                    <a:solidFill>
-                      <a:srgbClr val="FFFFFF"/>
-                    </a:solidFill>
-                  </a:tcPr>
-                </a:tc>
-                <a:tc>
-                  <a:txBody>
-                    <a:bodyPr/>
-                    <a:lstStyle/>
-                    <a:p>
-                      <a:pPr>
-                        <a:defRPr sz="1200">
-                          <a:solidFill>
-                            <a:srgbClr val="333333"/>
-                          </a:solidFill>
-                        </a:defRPr>
-                      </a:pPr>
-                      <a:r>
-                        <a:t>Removes OS-script dependency; runs in-ABAP</a:t>
-                      </a:r>
-                    </a:p>
-                  </a:txBody>
-                  <a:tcPr>
-                    <a:solidFill>
-                      <a:srgbClr val="FFFFFF"/>
-                    </a:solidFill>
-                  </a:tcPr>
-                </a:tc>
-                <a:tc>
-                  <a:txBody>
-                    <a:bodyPr/>
-                    <a:lstStyle/>
-                    <a:p>
-                      <a:pPr>
-                        <a:defRPr sz="1200">
-                          <a:solidFill>
-                            <a:srgbClr val="333333"/>
-                          </a:solidFill>
-                        </a:defRPr>
-                      </a:pPr>
-                      <a:r>
-                        <a:t>All 16 reports + 3 wrappers in one swap</a:t>
-                      </a:r>
-                    </a:p>
-                  </a:txBody>
-                  <a:tcPr>
-                    <a:solidFill>
-                      <a:srgbClr val="FFFFFF"/>
-                    </a:solidFill>
-                  </a:tcPr>
-                </a:tc>
-              </a:tr>
-              <a:tr h="1028700">
-                <a:tc>
-                  <a:txBody>
-                    <a:bodyPr/>
-                    <a:lstStyle/>
-                    <a:p>
-                      <a:pPr>
-                        <a:defRPr sz="1200">
-                          <a:solidFill>
-                            <a:srgbClr val="333333"/>
-                          </a:solidFill>
-                        </a:defRPr>
-                      </a:pPr>
-                      <a:r>
-                        <a:t>B</a:t>
-                      </a:r>
-                    </a:p>
-                  </a:txBody>
-                  <a:tcPr>
-                    <a:solidFill>
-                      <a:srgbClr val="F0F2F7"/>
-                    </a:solidFill>
-                  </a:tcPr>
-                </a:tc>
-                <a:tc>
-                  <a:txBody>
-                    <a:bodyPr/>
-                    <a:lstStyle/>
-                    <a:p>
-                      <a:pPr>
-                        <a:defRPr sz="1200">
-                          <a:solidFill>
-                            <a:srgbClr val="333333"/>
-                          </a:solidFill>
-                        </a:defRPr>
-                      </a:pPr>
-                      <a:r>
-                        <a:t>BTP Integration Suite SFTP adapter (via destination)</a:t>
-                      </a:r>
-                    </a:p>
-                  </a:txBody>
-                  <a:tcPr>
-                    <a:solidFill>
-                      <a:srgbClr val="F0F2F7"/>
-                    </a:solidFill>
-                  </a:tcPr>
-                </a:tc>
-                <a:tc>
-                  <a:txBody>
-                    <a:bodyPr/>
-                    <a:lstStyle/>
-                    <a:p>
-                      <a:pPr>
-                        <a:defRPr sz="1200">
-                          <a:solidFill>
-                            <a:srgbClr val="333333"/>
-                          </a:solidFill>
-                        </a:defRPr>
-                      </a:pPr>
-                      <a:r>
-                        <a:t>Cleanest separation; aligns with SAP BTP roadmap</a:t>
-                      </a:r>
-                    </a:p>
-                  </a:txBody>
-                  <a:tcPr>
-                    <a:solidFill>
-                      <a:srgbClr val="F0F2F7"/>
-                    </a:solidFill>
-                  </a:tcPr>
-                </a:tc>
-                <a:tc>
-                  <a:txBody>
-                    <a:bodyPr/>
-                    <a:lstStyle/>
-                    <a:p>
-                      <a:pPr>
-                        <a:defRPr sz="1200">
-                          <a:solidFill>
-                            <a:srgbClr val="333333"/>
-                          </a:solidFill>
-                        </a:defRPr>
-                      </a:pPr>
-                      <a:r>
-                        <a:t>Same; needs BTP connectivity from on-prem</a:t>
-                      </a:r>
-                    </a:p>
-                  </a:txBody>
-                  <a:tcPr>
-                    <a:solidFill>
-                      <a:srgbClr val="F0F2F7"/>
-                    </a:solidFill>
-                  </a:tcPr>
-                </a:tc>
-              </a:tr>
-              <a:tr h="1028700">
-                <a:tc>
-                  <a:txBody>
-                    <a:bodyPr/>
-                    <a:lstStyle/>
-                    <a:p>
-                      <a:pPr>
-                        <a:defRPr sz="1200">
-                          <a:solidFill>
-                            <a:srgbClr val="333333"/>
-                          </a:solidFill>
-                        </a:defRPr>
-                      </a:pPr>
-                      <a:r>
-                        <a:t>C</a:t>
-                      </a:r>
-                    </a:p>
-                  </a:txBody>
-                  <a:tcPr>
-                    <a:solidFill>
-                      <a:srgbClr val="FFFFFF"/>
-                    </a:solidFill>
-                  </a:tcPr>
-                </a:tc>
-                <a:tc>
-                  <a:txBody>
-                    <a:bodyPr/>
-                    <a:lstStyle/>
-                    <a:p>
-                      <a:pPr>
-                        <a:defRPr sz="1200">
-                          <a:solidFill>
-                            <a:srgbClr val="333333"/>
-                          </a:solidFill>
-                        </a:defRPr>
-                      </a:pPr>
-                      <a:r>
-                        <a:t>Keep SXPG but rewrite the OS-side script</a:t>
-                      </a:r>
-                    </a:p>
-                  </a:txBody>
-                  <a:tcPr>
-                    <a:solidFill>
-                      <a:srgbClr val="FFFFFF"/>
-                    </a:solidFill>
-                  </a:tcPr>
-                </a:tc>
-                <a:tc>
-                  <a:txBody>
-                    <a:bodyPr/>
-                    <a:lstStyle/>
-                    <a:p>
-                      <a:pPr>
-                        <a:defRPr sz="1200">
-                          <a:solidFill>
-                            <a:srgbClr val="333333"/>
-                          </a:solidFill>
-                        </a:defRPr>
-                      </a:pPr>
-                      <a:r>
-                        <a:t>Minimal ABAP change; controls credentials in one script</a:t>
-                      </a:r>
-                    </a:p>
-                  </a:txBody>
-                  <a:tcPr>
-                    <a:solidFill>
-                      <a:srgbClr val="FFFFFF"/>
-                    </a:solidFill>
-                  </a:tcPr>
-                </a:tc>
-                <a:tc>
-                  <a:txBody>
-                    <a:bodyPr/>
-                    <a:lstStyle/>
-                    <a:p>
-                      <a:pPr>
-                        <a:defRPr sz="1200">
-                          <a:solidFill>
-                            <a:srgbClr val="333333"/>
-                          </a:solidFill>
-                        </a:defRPr>
-                      </a:pPr>
-                      <a:r>
-                        <a:t>All callers; doesn't remove technical debt</a:t>
-                      </a:r>
-                    </a:p>
-                  </a:txBody>
-                  <a:tcPr>
-                    <a:solidFill>
-                      <a:srgbClr val="FFFFFF"/>
-                    </a:solidFill>
-                  </a:tcPr>
-                </a:tc>
-              </a:tr>
-            </a:tbl>
-          </a:graphicData>
-        </a:graphic>
-      </p:graphicFrame>
       <p:sp>
         <p:nvSpPr>
-          <p:cNvPr id="5" name="TextBox 4"/>
+          <p:cNvPr id="4" name="TextBox 3"/>
           <p:cNvSpPr txBox="1"/>
           <p:nvPr/>
         </p:nvSpPr>
         <p:spPr>
           <a:xfrm>
-            <a:off x="457200" y="6126480"/>
-            <a:ext cx="11247120" cy="640080"/>
+            <a:off x="457200" y="1554480"/>
+            <a:ext cx="11247120" cy="5029200"/>
           </a:xfrm>
           <a:prstGeom prst="rect">
             <a:avLst/>
           </a:prstGeom>
-          <a:noFill/>
+          <a:solidFill>
+            <a:srgbClr val="F0F2F7"/>
+          </a:solidFill>
         </p:spPr>
         <p:txBody>
           <a:bodyPr wrap="square">
@@ -9123,14 +11857,253 @@
           <a:lstStyle/>
           <a:p>
             <a:pPr>
-              <a:defRPr sz="1200" b="1">
+              <a:defRPr sz="1200" b="0">
                 <a:solidFill>
-                  <a:srgbClr val="1F3A68"/>
+                  <a:srgbClr val="333333"/>
                 </a:solidFill>
+                <a:latin typeface="Consolas"/>
               </a:defRPr>
             </a:pPr>
             <a:r>
-              <a:t>Recommended: A or B. Both replace the SXPG_COMMAND_EXECUTE call site uniformly — same FORM scaffolding, same zfi_constants reads.</a:t>
+              <a:t>FUNCTION zmedi_get_from_sftp</a:t>
+            </a:r>
+          </a:p>
+          <a:p>
+            <a:pPr>
+              <a:defRPr sz="1200" b="0">
+                <a:solidFill>
+                  <a:srgbClr val="333333"/>
+                </a:solidFill>
+                <a:latin typeface="Consolas"/>
+              </a:defRPr>
+            </a:pPr>
+            <a:r>
+              <a:t>  IMPORTING command   TYPE sxpgcolist-name</a:t>
+            </a:r>
+          </a:p>
+          <a:p>
+            <a:pPr>
+              <a:defRPr sz="1200" b="0">
+                <a:solidFill>
+                  <a:srgbClr val="333333"/>
+                </a:solidFill>
+                <a:latin typeface="Consolas"/>
+              </a:defRPr>
+            </a:pPr>
+            <a:r>
+              <a:t>            constants TYPE bdc_prog</a:t>
+            </a:r>
+          </a:p>
+          <a:p>
+            <a:pPr>
+              <a:defRPr sz="1200" b="0">
+                <a:solidFill>
+                  <a:srgbClr val="333333"/>
+                </a:solidFill>
+                <a:latin typeface="Consolas"/>
+              </a:defRPr>
+            </a:pPr>
+            <a:r>
+              <a:t>  TABLES    return    LIKE bapiret2 OPTIONAL.</a:t>
+            </a:r>
+          </a:p>
+          <a:p>
+            <a:pPr>
+              <a:defRPr sz="1200" b="0">
+                <a:solidFill>
+                  <a:srgbClr val="333333"/>
+                </a:solidFill>
+                <a:latin typeface="Consolas"/>
+              </a:defRPr>
+            </a:pPr>
+          </a:p>
+          <a:p>
+            <a:pPr>
+              <a:defRPr sz="1200" b="0">
+                <a:solidFill>
+                  <a:srgbClr val="333333"/>
+                </a:solidFill>
+                <a:latin typeface="Consolas"/>
+              </a:defRPr>
+            </a:pPr>
+            <a:r>
+              <a:t>  SELECT * FROM zfi_constants INTO TABLE gt_constants WHERE pname = constants.</a:t>
+            </a:r>
+          </a:p>
+          <a:p>
+            <a:pPr>
+              <a:defRPr sz="1200" b="0">
+                <a:solidFill>
+                  <a:srgbClr val="333333"/>
+                </a:solidFill>
+                <a:latin typeface="Consolas"/>
+              </a:defRPr>
+            </a:pPr>
+          </a:p>
+          <a:p>
+            <a:pPr>
+              <a:defRPr sz="1200" b="0">
+                <a:solidFill>
+                  <a:srgbClr val="333333"/>
+                </a:solidFill>
+                <a:latin typeface="Consolas"/>
+              </a:defRPr>
+            </a:pPr>
+            <a:r>
+              <a:t>  PERFORM f_set_parameter USING 'FTP_USER'         'M' ''.</a:t>
+            </a:r>
+          </a:p>
+          <a:p>
+            <a:pPr>
+              <a:defRPr sz="1200" b="0">
+                <a:solidFill>
+                  <a:srgbClr val="333333"/>
+                </a:solidFill>
+                <a:latin typeface="Consolas"/>
+              </a:defRPr>
+            </a:pPr>
+            <a:r>
+              <a:t>  PERFORM f_set_parameter USING 'PASSPHRASE'       'M' ':'.</a:t>
+            </a:r>
+          </a:p>
+          <a:p>
+            <a:pPr>
+              <a:defRPr sz="1200" b="0">
+                <a:solidFill>
+                  <a:srgbClr val="333333"/>
+                </a:solidFill>
+                <a:latin typeface="Consolas"/>
+              </a:defRPr>
+            </a:pPr>
+            <a:r>
+              <a:t>  PERFORM f_set_parameter USING 'HOST_KEY'         'M' ';'.</a:t>
+            </a:r>
+          </a:p>
+          <a:p>
+            <a:pPr>
+              <a:defRPr sz="1200" b="0">
+                <a:solidFill>
+                  <a:srgbClr val="333333"/>
+                </a:solidFill>
+                <a:latin typeface="Consolas"/>
+              </a:defRPr>
+            </a:pPr>
+            <a:r>
+              <a:t>  PERFORM f_set_parameter USING 'FTP_DOMAIN'       'M' ';'.</a:t>
+            </a:r>
+          </a:p>
+          <a:p>
+            <a:pPr>
+              <a:defRPr sz="1200" b="0">
+                <a:solidFill>
+                  <a:srgbClr val="333333"/>
+                </a:solidFill>
+                <a:latin typeface="Consolas"/>
+              </a:defRPr>
+            </a:pPr>
+            <a:r>
+              <a:t>  PERFORM f_set_parameter USING 'PRIVATE_KEY_PATH' 'M' ';'.</a:t>
+            </a:r>
+          </a:p>
+          <a:p>
+            <a:pPr>
+              <a:defRPr sz="1200" b="0">
+                <a:solidFill>
+                  <a:srgbClr val="333333"/>
+                </a:solidFill>
+                <a:latin typeface="Consolas"/>
+              </a:defRPr>
+            </a:pPr>
+            <a:r>
+              <a:t>  PERFORM f_set_parameter USING 'SOURCE_PATH'      'M' ';'.</a:t>
+            </a:r>
+          </a:p>
+          <a:p>
+            <a:pPr>
+              <a:defRPr sz="1200" b="0">
+                <a:solidFill>
+                  <a:srgbClr val="333333"/>
+                </a:solidFill>
+                <a:latin typeface="Consolas"/>
+              </a:defRPr>
+            </a:pPr>
+          </a:p>
+          <a:p>
+            <a:pPr>
+              <a:defRPr sz="1200" b="0">
+                <a:solidFill>
+                  <a:srgbClr val="333333"/>
+                </a:solidFill>
+                <a:latin typeface="Consolas"/>
+              </a:defRPr>
+            </a:pPr>
+            <a:r>
+              <a:t>  CALL FUNCTION 'SXPG_COMMAND_EXECUTE'</a:t>
+            </a:r>
+          </a:p>
+          <a:p>
+            <a:pPr>
+              <a:defRPr sz="1200" b="0">
+                <a:solidFill>
+                  <a:srgbClr val="333333"/>
+                </a:solidFill>
+                <a:latin typeface="Consolas"/>
+              </a:defRPr>
+            </a:pPr>
+            <a:r>
+              <a:t>    EXPORTING commandname           = command</a:t>
+            </a:r>
+          </a:p>
+          <a:p>
+            <a:pPr>
+              <a:defRPr sz="1200" b="0">
+                <a:solidFill>
+                  <a:srgbClr val="333333"/>
+                </a:solidFill>
+                <a:latin typeface="Consolas"/>
+              </a:defRPr>
+            </a:pPr>
+            <a:r>
+              <a:t>              additional_parameters = gv_param</a:t>
+            </a:r>
+          </a:p>
+          <a:p>
+            <a:pPr>
+              <a:defRPr sz="1200" b="0">
+                <a:solidFill>
+                  <a:srgbClr val="333333"/>
+                </a:solidFill>
+                <a:latin typeface="Consolas"/>
+              </a:defRPr>
+            </a:pPr>
+            <a:r>
+              <a:t>    IMPORTING exitcode              = lv_ret_code</a:t>
+            </a:r>
+          </a:p>
+          <a:p>
+            <a:pPr>
+              <a:defRPr sz="1200" b="0">
+                <a:solidFill>
+                  <a:srgbClr val="333333"/>
+                </a:solidFill>
+                <a:latin typeface="Consolas"/>
+              </a:defRPr>
+            </a:pPr>
+            <a:r>
+              <a:t>    TABLES    exec_protocol         = lt_return[].</a:t>
+            </a:r>
+          </a:p>
+          <a:p>
+            <a:pPr>
+              <a:defRPr sz="1200" b="0">
+                <a:solidFill>
+                  <a:srgbClr val="333333"/>
+                </a:solidFill>
+                <a:latin typeface="Consolas"/>
+              </a:defRPr>
+            </a:pPr>
+            <a:r>
+              <a:t>ENDFUNCTION.</a:t>
             </a:r>
           </a:p>
         </p:txBody>
@@ -9183,7 +12156,7 @@
               </a:defRPr>
             </a:pPr>
             <a:r>
-              <a:t>Acceptance criteria — what 'migrated' means per consumer</a:t>
+              <a:t>Migration proposal — one ABAP-level change point</a:t>
             </a:r>
           </a:p>
         </p:txBody>
@@ -9196,8 +12169,8 @@
         </p:nvSpPr>
         <p:spPr>
           <a:xfrm>
-            <a:off x="457200" y="1097280"/>
-            <a:ext cx="11247120" cy="5486400"/>
+            <a:off x="457200" y="1005840"/>
+            <a:ext cx="11247120" cy="640080"/>
           </a:xfrm>
           <a:prstGeom prst="rect">
             <a:avLst/>
@@ -9211,218 +12184,453 @@
           <a:lstStyle/>
           <a:p>
             <a:pPr>
-              <a:defRPr sz="1300" b="0">
+              <a:defRPr sz="1400" b="0">
                 <a:solidFill>
-                  <a:srgbClr val="333333"/>
+                  <a:srgbClr val="C83636"/>
                 </a:solidFill>
               </a:defRPr>
             </a:pPr>
             <a:r>
-              <a:t>For each of the 16 reports + 3 wrapper FUGRs, the replacement must:</a:t>
-            </a:r>
-          </a:p>
+              <a:t>Replace CALL FUNCTION 'SXPG_COMMAND_EXECUTE' (with SM69 entries that shell out to OS sftp/scp) with a native ABAP SFTP layer.</a:t>
+            </a:r>
+          </a:p>
+        </p:txBody>
+      </p:sp>
+      <p:graphicFrame>
+        <p:nvGraphicFramePr>
+          <p:cNvPr id="4" name="Table 3"/>
+          <p:cNvGraphicFramePr>
+            <a:graphicFrameLocks noGrp="1"/>
+          </p:cNvGraphicFramePr>
+          <p:nvPr/>
+        </p:nvGraphicFramePr>
+        <p:xfrm>
+          <a:off x="457200" y="2011680"/>
+          <a:ext cx="11247120" cy="4114800"/>
+        </p:xfrm>
+        <a:graphic>
+          <a:graphicData uri="http://schemas.openxmlformats.org/drawingml/2006/table">
+            <a:tbl>
+              <a:tblPr firstRow="1" bandRow="1">
+                <a:tableStyleId>{5C22544A-7EE6-4342-B048-85BDC9FD1C3A}</a:tableStyleId>
+              </a:tblPr>
+              <a:tblGrid>
+                <a:gridCol w="457200"/>
+                <a:gridCol w="3657600"/>
+                <a:gridCol w="3931920"/>
+                <a:gridCol w="3200400"/>
+              </a:tblGrid>
+              <a:tr h="1028700">
+                <a:tc>
+                  <a:txBody>
+                    <a:bodyPr/>
+                    <a:lstStyle/>
+                    <a:p>
+                      <a:pPr>
+                        <a:defRPr sz="1300" b="1">
+                          <a:solidFill>
+                            <a:srgbClr val="FFFFFF"/>
+                          </a:solidFill>
+                        </a:defRPr>
+                      </a:pPr>
+                      <a:r>
+                        <a:t>#</a:t>
+                      </a:r>
+                    </a:p>
+                  </a:txBody>
+                  <a:tcPr>
+                    <a:solidFill>
+                      <a:srgbClr val="1F3A68"/>
+                    </a:solidFill>
+                  </a:tcPr>
+                </a:tc>
+                <a:tc>
+                  <a:txBody>
+                    <a:bodyPr/>
+                    <a:lstStyle/>
+                    <a:p>
+                      <a:pPr>
+                        <a:defRPr sz="1300" b="1">
+                          <a:solidFill>
+                            <a:srgbClr val="FFFFFF"/>
+                          </a:solidFill>
+                        </a:defRPr>
+                      </a:pPr>
+                      <a:r>
+                        <a:t>Target replacement</a:t>
+                      </a:r>
+                    </a:p>
+                  </a:txBody>
+                  <a:tcPr>
+                    <a:solidFill>
+                      <a:srgbClr val="1F3A68"/>
+                    </a:solidFill>
+                  </a:tcPr>
+                </a:tc>
+                <a:tc>
+                  <a:txBody>
+                    <a:bodyPr/>
+                    <a:lstStyle/>
+                    <a:p>
+                      <a:pPr>
+                        <a:defRPr sz="1300" b="1">
+                          <a:solidFill>
+                            <a:srgbClr val="FFFFFF"/>
+                          </a:solidFill>
+                        </a:defRPr>
+                      </a:pPr>
+                      <a:r>
+                        <a:t>Why</a:t>
+                      </a:r>
+                    </a:p>
+                  </a:txBody>
+                  <a:tcPr>
+                    <a:solidFill>
+                      <a:srgbClr val="1F3A68"/>
+                    </a:solidFill>
+                  </a:tcPr>
+                </a:tc>
+                <a:tc>
+                  <a:txBody>
+                    <a:bodyPr/>
+                    <a:lstStyle/>
+                    <a:p>
+                      <a:pPr>
+                        <a:defRPr sz="1300" b="1">
+                          <a:solidFill>
+                            <a:srgbClr val="FFFFFF"/>
+                          </a:solidFill>
+                        </a:defRPr>
+                      </a:pPr>
+                      <a:r>
+                        <a:t>Coverage</a:t>
+                      </a:r>
+                    </a:p>
+                  </a:txBody>
+                  <a:tcPr>
+                    <a:solidFill>
+                      <a:srgbClr val="1F3A68"/>
+                    </a:solidFill>
+                  </a:tcPr>
+                </a:tc>
+              </a:tr>
+              <a:tr h="1028700">
+                <a:tc>
+                  <a:txBody>
+                    <a:bodyPr/>
+                    <a:lstStyle/>
+                    <a:p>
+                      <a:pPr>
+                        <a:defRPr sz="1200">
+                          <a:solidFill>
+                            <a:srgbClr val="333333"/>
+                          </a:solidFill>
+                        </a:defRPr>
+                      </a:pPr>
+                      <a:r>
+                        <a:t>A</a:t>
+                      </a:r>
+                    </a:p>
+                  </a:txBody>
+                  <a:tcPr>
+                    <a:solidFill>
+                      <a:srgbClr val="FFFFFF"/>
+                    </a:solidFill>
+                  </a:tcPr>
+                </a:tc>
+                <a:tc>
+                  <a:txBody>
+                    <a:bodyPr/>
+                    <a:lstStyle/>
+                    <a:p>
+                      <a:pPr>
+                        <a:defRPr sz="1200">
+                          <a:solidFill>
+                            <a:srgbClr val="333333"/>
+                          </a:solidFill>
+                        </a:defRPr>
+                      </a:pPr>
+                      <a:r>
+                        <a:t>Native ABAP SSH/SFTP client class</a:t>
+                      </a:r>
+                    </a:p>
+                  </a:txBody>
+                  <a:tcPr>
+                    <a:solidFill>
+                      <a:srgbClr val="FFFFFF"/>
+                    </a:solidFill>
+                  </a:tcPr>
+                </a:tc>
+                <a:tc>
+                  <a:txBody>
+                    <a:bodyPr/>
+                    <a:lstStyle/>
+                    <a:p>
+                      <a:pPr>
+                        <a:defRPr sz="1200">
+                          <a:solidFill>
+                            <a:srgbClr val="333333"/>
+                          </a:solidFill>
+                        </a:defRPr>
+                      </a:pPr>
+                      <a:r>
+                        <a:t>Removes OS-script dependency; runs in-ABAP</a:t>
+                      </a:r>
+                    </a:p>
+                  </a:txBody>
+                  <a:tcPr>
+                    <a:solidFill>
+                      <a:srgbClr val="FFFFFF"/>
+                    </a:solidFill>
+                  </a:tcPr>
+                </a:tc>
+                <a:tc>
+                  <a:txBody>
+                    <a:bodyPr/>
+                    <a:lstStyle/>
+                    <a:p>
+                      <a:pPr>
+                        <a:defRPr sz="1200">
+                          <a:solidFill>
+                            <a:srgbClr val="333333"/>
+                          </a:solidFill>
+                        </a:defRPr>
+                      </a:pPr>
+                      <a:r>
+                        <a:t>All 16 reports + 3 wrappers in one swap</a:t>
+                      </a:r>
+                    </a:p>
+                  </a:txBody>
+                  <a:tcPr>
+                    <a:solidFill>
+                      <a:srgbClr val="FFFFFF"/>
+                    </a:solidFill>
+                  </a:tcPr>
+                </a:tc>
+              </a:tr>
+              <a:tr h="1028700">
+                <a:tc>
+                  <a:txBody>
+                    <a:bodyPr/>
+                    <a:lstStyle/>
+                    <a:p>
+                      <a:pPr>
+                        <a:defRPr sz="1200">
+                          <a:solidFill>
+                            <a:srgbClr val="333333"/>
+                          </a:solidFill>
+                        </a:defRPr>
+                      </a:pPr>
+                      <a:r>
+                        <a:t>B</a:t>
+                      </a:r>
+                    </a:p>
+                  </a:txBody>
+                  <a:tcPr>
+                    <a:solidFill>
+                      <a:srgbClr val="F0F2F7"/>
+                    </a:solidFill>
+                  </a:tcPr>
+                </a:tc>
+                <a:tc>
+                  <a:txBody>
+                    <a:bodyPr/>
+                    <a:lstStyle/>
+                    <a:p>
+                      <a:pPr>
+                        <a:defRPr sz="1200">
+                          <a:solidFill>
+                            <a:srgbClr val="333333"/>
+                          </a:solidFill>
+                        </a:defRPr>
+                      </a:pPr>
+                      <a:r>
+                        <a:t>BTP Integration Suite SFTP adapter (via destination)</a:t>
+                      </a:r>
+                    </a:p>
+                  </a:txBody>
+                  <a:tcPr>
+                    <a:solidFill>
+                      <a:srgbClr val="F0F2F7"/>
+                    </a:solidFill>
+                  </a:tcPr>
+                </a:tc>
+                <a:tc>
+                  <a:txBody>
+                    <a:bodyPr/>
+                    <a:lstStyle/>
+                    <a:p>
+                      <a:pPr>
+                        <a:defRPr sz="1200">
+                          <a:solidFill>
+                            <a:srgbClr val="333333"/>
+                          </a:solidFill>
+                        </a:defRPr>
+                      </a:pPr>
+                      <a:r>
+                        <a:t>Cleanest separation; aligns with SAP BTP roadmap</a:t>
+                      </a:r>
+                    </a:p>
+                  </a:txBody>
+                  <a:tcPr>
+                    <a:solidFill>
+                      <a:srgbClr val="F0F2F7"/>
+                    </a:solidFill>
+                  </a:tcPr>
+                </a:tc>
+                <a:tc>
+                  <a:txBody>
+                    <a:bodyPr/>
+                    <a:lstStyle/>
+                    <a:p>
+                      <a:pPr>
+                        <a:defRPr sz="1200">
+                          <a:solidFill>
+                            <a:srgbClr val="333333"/>
+                          </a:solidFill>
+                        </a:defRPr>
+                      </a:pPr>
+                      <a:r>
+                        <a:t>Same; needs BTP connectivity from on-prem</a:t>
+                      </a:r>
+                    </a:p>
+                  </a:txBody>
+                  <a:tcPr>
+                    <a:solidFill>
+                      <a:srgbClr val="F0F2F7"/>
+                    </a:solidFill>
+                  </a:tcPr>
+                </a:tc>
+              </a:tr>
+              <a:tr h="1028700">
+                <a:tc>
+                  <a:txBody>
+                    <a:bodyPr/>
+                    <a:lstStyle/>
+                    <a:p>
+                      <a:pPr>
+                        <a:defRPr sz="1200">
+                          <a:solidFill>
+                            <a:srgbClr val="333333"/>
+                          </a:solidFill>
+                        </a:defRPr>
+                      </a:pPr>
+                      <a:r>
+                        <a:t>C</a:t>
+                      </a:r>
+                    </a:p>
+                  </a:txBody>
+                  <a:tcPr>
+                    <a:solidFill>
+                      <a:srgbClr val="FFFFFF"/>
+                    </a:solidFill>
+                  </a:tcPr>
+                </a:tc>
+                <a:tc>
+                  <a:txBody>
+                    <a:bodyPr/>
+                    <a:lstStyle/>
+                    <a:p>
+                      <a:pPr>
+                        <a:defRPr sz="1200">
+                          <a:solidFill>
+                            <a:srgbClr val="333333"/>
+                          </a:solidFill>
+                        </a:defRPr>
+                      </a:pPr>
+                      <a:r>
+                        <a:t>Keep SXPG but rewrite the OS-side script</a:t>
+                      </a:r>
+                    </a:p>
+                  </a:txBody>
+                  <a:tcPr>
+                    <a:solidFill>
+                      <a:srgbClr val="FFFFFF"/>
+                    </a:solidFill>
+                  </a:tcPr>
+                </a:tc>
+                <a:tc>
+                  <a:txBody>
+                    <a:bodyPr/>
+                    <a:lstStyle/>
+                    <a:p>
+                      <a:pPr>
+                        <a:defRPr sz="1200">
+                          <a:solidFill>
+                            <a:srgbClr val="333333"/>
+                          </a:solidFill>
+                        </a:defRPr>
+                      </a:pPr>
+                      <a:r>
+                        <a:t>Minimal ABAP change; controls credentials in one script</a:t>
+                      </a:r>
+                    </a:p>
+                  </a:txBody>
+                  <a:tcPr>
+                    <a:solidFill>
+                      <a:srgbClr val="FFFFFF"/>
+                    </a:solidFill>
+                  </a:tcPr>
+                </a:tc>
+                <a:tc>
+                  <a:txBody>
+                    <a:bodyPr/>
+                    <a:lstStyle/>
+                    <a:p>
+                      <a:pPr>
+                        <a:defRPr sz="1200">
+                          <a:solidFill>
+                            <a:srgbClr val="333333"/>
+                          </a:solidFill>
+                        </a:defRPr>
+                      </a:pPr>
+                      <a:r>
+                        <a:t>All callers; doesn't remove technical debt</a:t>
+                      </a:r>
+                    </a:p>
+                  </a:txBody>
+                  <a:tcPr>
+                    <a:solidFill>
+                      <a:srgbClr val="FFFFFF"/>
+                    </a:solidFill>
+                  </a:tcPr>
+                </a:tc>
+              </a:tr>
+            </a:tbl>
+          </a:graphicData>
+        </a:graphic>
+      </p:graphicFrame>
+      <p:sp>
+        <p:nvSpPr>
+          <p:cNvPr id="5" name="TextBox 4"/>
+          <p:cNvSpPr txBox="1"/>
+          <p:nvPr/>
+        </p:nvSpPr>
+        <p:spPr>
+          <a:xfrm>
+            <a:off x="457200" y="6126480"/>
+            <a:ext cx="11247120" cy="640080"/>
+          </a:xfrm>
+          <a:prstGeom prst="rect">
+            <a:avLst/>
+          </a:prstGeom>
+          <a:noFill/>
+        </p:spPr>
+        <p:txBody>
+          <a:bodyPr wrap="square">
+            <a:spAutoFit/>
+          </a:bodyPr>
+          <a:lstStyle/>
           <a:p>
             <a:pPr>
-              <a:defRPr sz="1300" b="0">
+              <a:defRPr sz="1200" b="1">
                 <a:solidFill>
-                  <a:srgbClr val="333333"/>
+                  <a:srgbClr val="1F3A68"/>
                 </a:solidFill>
               </a:defRPr>
             </a:pPr>
-          </a:p>
-          <a:p>
-            <a:pPr>
-              <a:defRPr sz="1300" b="0">
-                <a:solidFill>
-                  <a:srgbClr val="333333"/>
-                </a:solidFill>
-              </a:defRPr>
-            </a:pPr>
-            <a:r>
-              <a:t>1. Read the same zfi_constants rows (same pname, same fnam keys) — or provide a 1:1 shim.</a:t>
-            </a:r>
-          </a:p>
-          <a:p>
-            <a:pPr>
-              <a:defRPr sz="1300" b="0">
-                <a:solidFill>
-                  <a:srgbClr val="333333"/>
-                </a:solidFill>
-              </a:defRPr>
-            </a:pPr>
-          </a:p>
-          <a:p>
-            <a:pPr>
-              <a:defRPr sz="1300" b="0">
-                <a:solidFill>
-                  <a:srgbClr val="333333"/>
-                </a:solidFill>
-              </a:defRPr>
-            </a:pPr>
-            <a:r>
-              <a:t>2. Reach the same remote host with the same credentials.</a:t>
-            </a:r>
-          </a:p>
-          <a:p>
-            <a:pPr>
-              <a:defRPr sz="1300" b="0">
-                <a:solidFill>
-                  <a:srgbClr val="333333"/>
-                </a:solidFill>
-              </a:defRPr>
-            </a:pPr>
-          </a:p>
-          <a:p>
-            <a:pPr>
-              <a:defRPr sz="1300" b="0">
-                <a:solidFill>
-                  <a:srgbClr val="333333"/>
-                </a:solidFill>
-              </a:defRPr>
-            </a:pPr>
-            <a:r>
-              <a:t>3. Support both auth modes — key-based (PRIVATE_KEY_PATH + HOST_KEY + PASSPHRASE) AND password-based (FTP_PSWD).</a:t>
-            </a:r>
-          </a:p>
-          <a:p>
-            <a:pPr>
-              <a:defRPr sz="1300" b="0">
-                <a:solidFill>
-                  <a:srgbClr val="333333"/>
-                </a:solidFill>
-              </a:defRPr>
-            </a:pPr>
-          </a:p>
-          <a:p>
-            <a:pPr>
-              <a:defRPr sz="1300" b="0">
-                <a:solidFill>
-                  <a:srgbClr val="333333"/>
-                </a:solidFill>
-              </a:defRPr>
-            </a:pPr>
-            <a:r>
-              <a:t>4. Preserve PGP encryption wrap for ZSFTP_BNP_PARIBAS_WITH_PGP.</a:t>
-            </a:r>
-          </a:p>
-          <a:p>
-            <a:pPr>
-              <a:defRPr sz="1300" b="0">
-                <a:solidFill>
-                  <a:srgbClr val="333333"/>
-                </a:solidFill>
-              </a:defRPr>
-            </a:pPr>
-          </a:p>
-          <a:p>
-            <a:pPr>
-              <a:defRPr sz="1300" b="0">
-                <a:solidFill>
-                  <a:srgbClr val="333333"/>
-                </a:solidFill>
-              </a:defRPr>
-            </a:pPr>
-            <a:r>
-              <a:t>5. Return success/failure semantics compatible with caller code (exitcode, exec_protocol log).</a:t>
-            </a:r>
-          </a:p>
-          <a:p>
-            <a:pPr>
-              <a:defRPr sz="1300" b="0">
-                <a:solidFill>
-                  <a:srgbClr val="333333"/>
-                </a:solidFill>
-              </a:defRPr>
-            </a:pPr>
-          </a:p>
-          <a:p>
-            <a:pPr>
-              <a:defRPr sz="1300" b="0">
-                <a:solidFill>
-                  <a:srgbClr val="333333"/>
-                </a:solidFill>
-              </a:defRPr>
-            </a:pPr>
-            <a:r>
-              <a:t>6. Coordinate cutover for the 3 SHARED SM69 entries — both callers migrate atomically:</a:t>
-            </a:r>
-          </a:p>
-          <a:p>
-            <a:pPr>
-              <a:defRPr sz="1300" b="0">
-                <a:solidFill>
-                  <a:srgbClr val="333333"/>
-                </a:solidFill>
-              </a:defRPr>
-            </a:pPr>
-            <a:r>
-              <a:t>       • ZFTP_BNPP            ← ZSFTP_BNP_PARIBAS + ZSFTP_BNP_PARIBAS_WITH_PGP</a:t>
-            </a:r>
-          </a:p>
-          <a:p>
-            <a:pPr>
-              <a:defRPr sz="1300" b="0">
-                <a:solidFill>
-                  <a:srgbClr val="333333"/>
-                </a:solidFill>
-              </a:defRPr>
-            </a:pPr>
-            <a:r>
-              <a:t>       • ZSFTP_CERIDIAN_GET   ← ZFFIU_ACC_POST + ZSFTP_CERIDIAN_PULL</a:t>
-            </a:r>
-          </a:p>
-          <a:p>
-            <a:pPr>
-              <a:defRPr sz="1300" b="0">
-                <a:solidFill>
-                  <a:srgbClr val="333333"/>
-                </a:solidFill>
-              </a:defRPr>
-            </a:pPr>
-            <a:r>
-              <a:t>       • ZSFTP_DMS_GET / PUT  ← ZDMS_UPLOAD_FILES + ZDMS_REPLACE_FILES</a:t>
-            </a:r>
-          </a:p>
-          <a:p>
-            <a:pPr>
-              <a:defRPr sz="1300" b="0">
-                <a:solidFill>
-                  <a:srgbClr val="333333"/>
-                </a:solidFill>
-              </a:defRPr>
-            </a:pPr>
-          </a:p>
-          <a:p>
-            <a:pPr>
-              <a:defRPr sz="1300" b="0">
-                <a:solidFill>
-                  <a:srgbClr val="333333"/>
-                </a:solidFill>
-              </a:defRPr>
-            </a:pPr>
-            <a:r>
-              <a:t>7. Per-report end-to-end test: trigger the report; assert file landed (pull) or was delivered (push).</a:t>
-            </a:r>
-          </a:p>
-          <a:p>
-            <a:pPr>
-              <a:defRPr sz="1300" b="0">
-                <a:solidFill>
-                  <a:srgbClr val="333333"/>
-                </a:solidFill>
-              </a:defRPr>
-            </a:pPr>
-          </a:p>
-          <a:p>
-            <a:pPr>
-              <a:defRPr sz="1300" b="0">
-                <a:solidFill>
-                  <a:srgbClr val="333333"/>
-                </a:solidFill>
-              </a:defRPr>
-            </a:pPr>
-            <a:r>
-              <a:t>8. ZDMS_SEND_FILE / ZDMS_EXTRACT_DOCS_TO_SFTP — investigate dynamic/cross-package callers before declaring it dead.</a:t>
+            <a:r>
+              <a:t>Recommended: A or B. Both replace the SXPG_COMMAND_EXECUTE call site uniformly — same FORM scaffolding, same zfi_constants reads.</a:t>
             </a:r>
           </a:p>
         </p:txBody>

--- a/docs/tutorials/codebase-analysis/examples/report.pptx
+++ b/docs/tutorials/codebase-analysis/examples/report.pptx
@@ -9,6 +9,7 @@
     <p:sldId id="257" r:id="rId8"/>
     <p:sldId id="258" r:id="rId9"/>
     <p:sldId id="266" r:id="rId17"/>
+    <p:sldId id="267" r:id="rId18"/>
     <p:sldId id="259" r:id="rId10"/>
     <p:sldId id="260" r:id="rId11"/>
     <p:sldId id="261" r:id="rId12"/>
@@ -4233,6 +4234,1174 @@
             </a:pPr>
             <a:r>
               <a:t>Rises to ≈ 99% if customer confirms: 'all SFTP code lives in Z001 and reads zfi_constants'.</a:t>
+            </a:r>
+          </a:p>
+        </p:txBody>
+      </p:sp>
+    </p:spTree>
+  </p:cSld>
+  <p:clrMapOvr>
+    <a:masterClrMapping/>
+  </p:clrMapOvr>
+</p:sld>
+</file>
+
+<file path=ppt/slides/slide12.xml><?xml version="1.0" encoding="utf-8"?>
+<p:sld xmlns:a="http://schemas.openxmlformats.org/drawingml/2006/main" xmlns:p="http://schemas.openxmlformats.org/presentationml/2006/main" xmlns:r="http://schemas.openxmlformats.org/officeDocument/2006/relationships">
+  <p:cSld>
+    <p:spTree>
+      <p:nvGrpSpPr>
+        <p:cNvPr id="1" name=""/>
+        <p:cNvGrpSpPr/>
+        <p:nvPr/>
+      </p:nvGrpSpPr>
+      <p:grpSpPr/>
+      <p:sp>
+        <p:nvSpPr>
+          <p:cNvPr id="2" name="TextBox 1"/>
+          <p:cNvSpPr txBox="1"/>
+          <p:nvPr/>
+        </p:nvSpPr>
+        <p:spPr>
+          <a:xfrm>
+            <a:off x="457200" y="274320"/>
+            <a:ext cx="11247120" cy="822960"/>
+          </a:xfrm>
+          <a:prstGeom prst="rect">
+            <a:avLst/>
+          </a:prstGeom>
+          <a:noFill/>
+        </p:spPr>
+        <p:txBody>
+          <a:bodyPr wrap="none">
+            <a:spAutoFit/>
+          </a:bodyPr>
+          <a:lstStyle/>
+          <a:p>
+            <a:pPr>
+              <a:defRPr sz="2600" b="1">
+                <a:solidFill>
+                  <a:srgbClr val="1F3A68"/>
+                </a:solidFill>
+              </a:defRPr>
+            </a:pPr>
+            <a:r>
+              <a:t>Where SFTP parameter values come from</a:t>
+            </a:r>
+          </a:p>
+        </p:txBody>
+      </p:sp>
+      <p:sp>
+        <p:nvSpPr>
+          <p:cNvPr id="3" name="TextBox 2"/>
+          <p:cNvSpPr txBox="1"/>
+          <p:nvPr/>
+        </p:nvSpPr>
+        <p:spPr>
+          <a:xfrm>
+            <a:off x="457200" y="1005840"/>
+            <a:ext cx="11247120" cy="914400"/>
+          </a:xfrm>
+          <a:prstGeom prst="rect">
+            <a:avLst/>
+          </a:prstGeom>
+          <a:noFill/>
+        </p:spPr>
+        <p:txBody>
+          <a:bodyPr wrap="square">
+            <a:spAutoFit/>
+          </a:bodyPr>
+          <a:lstStyle/>
+          <a:p>
+            <a:pPr>
+              <a:defRPr sz="1400" b="0">
+                <a:solidFill>
+                  <a:srgbClr val="C83636"/>
+                </a:solidFill>
+              </a:defRPr>
+            </a:pPr>
+            <a:r>
+              <a:t>All parameter values (credentials, hosts, ports, paths) live in table `zfi_constants`.</a:t>
+            </a:r>
+          </a:p>
+          <a:p>
+            <a:pPr>
+              <a:defRPr sz="1400" b="0">
+                <a:solidFill>
+                  <a:srgbClr val="C83636"/>
+                </a:solidFill>
+              </a:defRPr>
+            </a:pPr>
+            <a:r>
+              <a:t>Each consumer reads a specific `pname` and pulls its fnam → fval pairs at runtime.</a:t>
+            </a:r>
+          </a:p>
+          <a:p>
+            <a:pPr>
+              <a:defRPr sz="1400" b="0">
+                <a:solidFill>
+                  <a:srgbClr val="C83636"/>
+                </a:solidFill>
+              </a:defRPr>
+            </a:pPr>
+            <a:r>
+              <a:t>Values are NOT shown here — fetch from SE16 / SecureStorage via the Basis team for migration handoff.</a:t>
+            </a:r>
+          </a:p>
+        </p:txBody>
+      </p:sp>
+      <p:graphicFrame>
+        <p:nvGraphicFramePr>
+          <p:cNvPr id="4" name="Table 3"/>
+          <p:cNvGraphicFramePr>
+            <a:graphicFrameLocks noGrp="1"/>
+          </p:cNvGraphicFramePr>
+          <p:nvPr/>
+        </p:nvGraphicFramePr>
+        <p:xfrm>
+          <a:off x="365760" y="2194560"/>
+          <a:ext cx="11430000" cy="4389120"/>
+        </p:xfrm>
+        <a:graphic>
+          <a:graphicData uri="http://schemas.openxmlformats.org/drawingml/2006/table">
+            <a:tbl>
+              <a:tblPr firstRow="1" bandRow="1">
+                <a:tableStyleId>{5C22544A-7EE6-4342-B048-85BDC9FD1C3A}</a:tableStyleId>
+              </a:tblPr>
+              <a:tblGrid>
+                <a:gridCol w="3200400"/>
+                <a:gridCol w="2926080"/>
+                <a:gridCol w="5303520"/>
+              </a:tblGrid>
+              <a:tr h="313508">
+                <a:tc>
+                  <a:txBody>
+                    <a:bodyPr/>
+                    <a:lstStyle/>
+                    <a:p>
+                      <a:pPr>
+                        <a:defRPr sz="1100" b="1">
+                          <a:solidFill>
+                            <a:srgbClr val="FFFFFF"/>
+                          </a:solidFill>
+                        </a:defRPr>
+                      </a:pPr>
+                      <a:r>
+                        <a:t>Consumer (PROG / FUGR)</a:t>
+                      </a:r>
+                    </a:p>
+                  </a:txBody>
+                  <a:tcPr>
+                    <a:solidFill>
+                      <a:srgbClr val="1F3A68"/>
+                    </a:solidFill>
+                  </a:tcPr>
+                </a:tc>
+                <a:tc>
+                  <a:txBody>
+                    <a:bodyPr/>
+                    <a:lstStyle/>
+                    <a:p>
+                      <a:pPr>
+                        <a:defRPr sz="1100" b="1">
+                          <a:solidFill>
+                            <a:srgbClr val="FFFFFF"/>
+                          </a:solidFill>
+                        </a:defRPr>
+                      </a:pPr>
+                      <a:r>
+                        <a:t>pname filter used</a:t>
+                      </a:r>
+                    </a:p>
+                  </a:txBody>
+                  <a:tcPr>
+                    <a:solidFill>
+                      <a:srgbClr val="1F3A68"/>
+                    </a:solidFill>
+                  </a:tcPr>
+                </a:tc>
+                <a:tc>
+                  <a:txBody>
+                    <a:bodyPr/>
+                    <a:lstStyle/>
+                    <a:p>
+                      <a:pPr>
+                        <a:defRPr sz="1100" b="1">
+                          <a:solidFill>
+                            <a:srgbClr val="FFFFFF"/>
+                          </a:solidFill>
+                        </a:defRPr>
+                      </a:pPr>
+                      <a:r>
+                        <a:t>Key fnam fields read</a:t>
+                      </a:r>
+                    </a:p>
+                  </a:txBody>
+                  <a:tcPr>
+                    <a:solidFill>
+                      <a:srgbClr val="1F3A68"/>
+                    </a:solidFill>
+                  </a:tcPr>
+                </a:tc>
+              </a:tr>
+              <a:tr h="313508">
+                <a:tc>
+                  <a:txBody>
+                    <a:bodyPr/>
+                    <a:lstStyle/>
+                    <a:p>
+                      <a:pPr>
+                        <a:defRPr sz="1000">
+                          <a:solidFill>
+                            <a:srgbClr val="333333"/>
+                          </a:solidFill>
+                        </a:defRPr>
+                      </a:pPr>
+                      <a:r>
+                        <a:t>ZSFTP_CITI_PULL</a:t>
+                      </a:r>
+                    </a:p>
+                  </a:txBody>
+                  <a:tcPr>
+                    <a:solidFill>
+                      <a:srgbClr val="FFFFFF"/>
+                    </a:solidFill>
+                  </a:tcPr>
+                </a:tc>
+                <a:tc>
+                  <a:txBody>
+                    <a:bodyPr/>
+                    <a:lstStyle/>
+                    <a:p>
+                      <a:pPr>
+                        <a:defRPr sz="1000">
+                          <a:solidFill>
+                            <a:srgbClr val="333333"/>
+                          </a:solidFill>
+                        </a:defRPr>
+                      </a:pPr>
+                      <a:r>
+                        <a:t>'ZSFTP_CITI'</a:t>
+                      </a:r>
+                    </a:p>
+                  </a:txBody>
+                  <a:tcPr>
+                    <a:solidFill>
+                      <a:srgbClr val="FFFFFF"/>
+                    </a:solidFill>
+                  </a:tcPr>
+                </a:tc>
+                <a:tc>
+                  <a:txBody>
+                    <a:bodyPr/>
+                    <a:lstStyle/>
+                    <a:p>
+                      <a:pPr>
+                        <a:defRPr sz="1000">
+                          <a:solidFill>
+                            <a:srgbClr val="333333"/>
+                          </a:solidFill>
+                        </a:defRPr>
+                      </a:pPr>
+                      <a:r>
+                        <a:t>FTP_USER, FTP_DOMAIN, HOST_KEY, PRIVATE_KEY_PATH, PASSPHRASE, SOURCE_FOLDER</a:t>
+                      </a:r>
+                    </a:p>
+                  </a:txBody>
+                  <a:tcPr>
+                    <a:solidFill>
+                      <a:srgbClr val="FFFFFF"/>
+                    </a:solidFill>
+                  </a:tcPr>
+                </a:tc>
+              </a:tr>
+              <a:tr h="313508">
+                <a:tc>
+                  <a:txBody>
+                    <a:bodyPr/>
+                    <a:lstStyle/>
+                    <a:p>
+                      <a:pPr>
+                        <a:defRPr sz="1000">
+                          <a:solidFill>
+                            <a:srgbClr val="333333"/>
+                          </a:solidFill>
+                        </a:defRPr>
+                      </a:pPr>
+                      <a:r>
+                        <a:t>ZSFTP_CITI_SEND</a:t>
+                      </a:r>
+                    </a:p>
+                  </a:txBody>
+                  <a:tcPr>
+                    <a:solidFill>
+                      <a:srgbClr val="F0F2F7"/>
+                    </a:solidFill>
+                  </a:tcPr>
+                </a:tc>
+                <a:tc>
+                  <a:txBody>
+                    <a:bodyPr/>
+                    <a:lstStyle/>
+                    <a:p>
+                      <a:pPr>
+                        <a:defRPr sz="1000">
+                          <a:solidFill>
+                            <a:srgbClr val="333333"/>
+                          </a:solidFill>
+                        </a:defRPr>
+                      </a:pPr>
+                      <a:r>
+                        <a:t>'ZSFTP_CITI_SEND'</a:t>
+                      </a:r>
+                    </a:p>
+                  </a:txBody>
+                  <a:tcPr>
+                    <a:solidFill>
+                      <a:srgbClr val="F0F2F7"/>
+                    </a:solidFill>
+                  </a:tcPr>
+                </a:tc>
+                <a:tc>
+                  <a:txBody>
+                    <a:bodyPr/>
+                    <a:lstStyle/>
+                    <a:p>
+                      <a:pPr>
+                        <a:defRPr sz="1000">
+                          <a:solidFill>
+                            <a:srgbClr val="333333"/>
+                          </a:solidFill>
+                        </a:defRPr>
+                      </a:pPr>
+                      <a:r>
+                        <a:t>(same shape as ZSFTP_CITI)</a:t>
+                      </a:r>
+                    </a:p>
+                  </a:txBody>
+                  <a:tcPr>
+                    <a:solidFill>
+                      <a:srgbClr val="F0F2F7"/>
+                    </a:solidFill>
+                  </a:tcPr>
+                </a:tc>
+              </a:tr>
+              <a:tr h="313508">
+                <a:tc>
+                  <a:txBody>
+                    <a:bodyPr/>
+                    <a:lstStyle/>
+                    <a:p>
+                      <a:pPr>
+                        <a:defRPr sz="1000">
+                          <a:solidFill>
+                            <a:srgbClr val="333333"/>
+                          </a:solidFill>
+                        </a:defRPr>
+                      </a:pPr>
+                      <a:r>
+                        <a:t>ZSFTP_BNP_PARIBAS_PULL</a:t>
+                      </a:r>
+                    </a:p>
+                  </a:txBody>
+                  <a:tcPr>
+                    <a:solidFill>
+                      <a:srgbClr val="FFFFFF"/>
+                    </a:solidFill>
+                  </a:tcPr>
+                </a:tc>
+                <a:tc>
+                  <a:txBody>
+                    <a:bodyPr/>
+                    <a:lstStyle/>
+                    <a:p>
+                      <a:pPr>
+                        <a:defRPr sz="1000">
+                          <a:solidFill>
+                            <a:srgbClr val="333333"/>
+                          </a:solidFill>
+                        </a:defRPr>
+                      </a:pPr>
+                      <a:r>
+                        <a:t>'ZSFTP_BNP_PARIBAS'</a:t>
+                      </a:r>
+                    </a:p>
+                  </a:txBody>
+                  <a:tcPr>
+                    <a:solidFill>
+                      <a:srgbClr val="FFFFFF"/>
+                    </a:solidFill>
+                  </a:tcPr>
+                </a:tc>
+                <a:tc>
+                  <a:txBody>
+                    <a:bodyPr/>
+                    <a:lstStyle/>
+                    <a:p>
+                      <a:pPr>
+                        <a:defRPr sz="1000">
+                          <a:solidFill>
+                            <a:srgbClr val="333333"/>
+                          </a:solidFill>
+                        </a:defRPr>
+                      </a:pPr>
+                      <a:r>
+                        <a:t>FTP_USER, FTP_PSWD, FTP_DOMAIN, FTP_PORT, FOLDER_PATH, FILE_EXT, HOST_KEY</a:t>
+                      </a:r>
+                    </a:p>
+                  </a:txBody>
+                  <a:tcPr>
+                    <a:solidFill>
+                      <a:srgbClr val="FFFFFF"/>
+                    </a:solidFill>
+                  </a:tcPr>
+                </a:tc>
+              </a:tr>
+              <a:tr h="313508">
+                <a:tc>
+                  <a:txBody>
+                    <a:bodyPr/>
+                    <a:lstStyle/>
+                    <a:p>
+                      <a:pPr>
+                        <a:defRPr sz="1000">
+                          <a:solidFill>
+                            <a:srgbClr val="333333"/>
+                          </a:solidFill>
+                        </a:defRPr>
+                      </a:pPr>
+                      <a:r>
+                        <a:t>ZSFTP_BNP_PARIBAS (push, password)</a:t>
+                      </a:r>
+                    </a:p>
+                  </a:txBody>
+                  <a:tcPr>
+                    <a:solidFill>
+                      <a:srgbClr val="F0F2F7"/>
+                    </a:solidFill>
+                  </a:tcPr>
+                </a:tc>
+                <a:tc>
+                  <a:txBody>
+                    <a:bodyPr/>
+                    <a:lstStyle/>
+                    <a:p>
+                      <a:pPr>
+                        <a:defRPr sz="1000">
+                          <a:solidFill>
+                            <a:srgbClr val="333333"/>
+                          </a:solidFill>
+                        </a:defRPr>
+                      </a:pPr>
+                      <a:r>
+                        <a:t>'ZSFTP_BNP_PARIBAS'</a:t>
+                      </a:r>
+                    </a:p>
+                  </a:txBody>
+                  <a:tcPr>
+                    <a:solidFill>
+                      <a:srgbClr val="F0F2F7"/>
+                    </a:solidFill>
+                  </a:tcPr>
+                </a:tc>
+                <a:tc>
+                  <a:txBody>
+                    <a:bodyPr/>
+                    <a:lstStyle/>
+                    <a:p>
+                      <a:pPr>
+                        <a:defRPr sz="1000">
+                          <a:solidFill>
+                            <a:srgbClr val="333333"/>
+                          </a:solidFill>
+                        </a:defRPr>
+                      </a:pPr>
+                      <a:r>
+                        <a:t>Same set as above (password auth)</a:t>
+                      </a:r>
+                    </a:p>
+                  </a:txBody>
+                  <a:tcPr>
+                    <a:solidFill>
+                      <a:srgbClr val="F0F2F7"/>
+                    </a:solidFill>
+                  </a:tcPr>
+                </a:tc>
+              </a:tr>
+              <a:tr h="313508">
+                <a:tc>
+                  <a:txBody>
+                    <a:bodyPr/>
+                    <a:lstStyle/>
+                    <a:p>
+                      <a:pPr>
+                        <a:defRPr sz="1000">
+                          <a:solidFill>
+                            <a:srgbClr val="333333"/>
+                          </a:solidFill>
+                        </a:defRPr>
+                      </a:pPr>
+                      <a:r>
+                        <a:t>ZSFTP_BNP_PARIBAS_WITH_PGP</a:t>
+                      </a:r>
+                    </a:p>
+                  </a:txBody>
+                  <a:tcPr>
+                    <a:solidFill>
+                      <a:srgbClr val="FFFFFF"/>
+                    </a:solidFill>
+                  </a:tcPr>
+                </a:tc>
+                <a:tc>
+                  <a:txBody>
+                    <a:bodyPr/>
+                    <a:lstStyle/>
+                    <a:p>
+                      <a:pPr>
+                        <a:defRPr sz="1000">
+                          <a:solidFill>
+                            <a:srgbClr val="333333"/>
+                          </a:solidFill>
+                        </a:defRPr>
+                      </a:pPr>
+                      <a:r>
+                        <a:t>'ZSFTP_BNP_PARIBAS'</a:t>
+                      </a:r>
+                    </a:p>
+                  </a:txBody>
+                  <a:tcPr>
+                    <a:solidFill>
+                      <a:srgbClr val="FFFFFF"/>
+                    </a:solidFill>
+                  </a:tcPr>
+                </a:tc>
+                <a:tc>
+                  <a:txBody>
+                    <a:bodyPr/>
+                    <a:lstStyle/>
+                    <a:p>
+                      <a:pPr>
+                        <a:defRPr sz="1000">
+                          <a:solidFill>
+                            <a:srgbClr val="333333"/>
+                          </a:solidFill>
+                        </a:defRPr>
+                      </a:pPr>
+                      <a:r>
+                        <a:t>FTP_USER, FTP_DOMAIN, HOST_KEY, PRIVATE_KEY_PATH, PASSPHRASE, FOLDER_PATH (PGP layer added)</a:t>
+                      </a:r>
+                    </a:p>
+                  </a:txBody>
+                  <a:tcPr>
+                    <a:solidFill>
+                      <a:srgbClr val="FFFFFF"/>
+                    </a:solidFill>
+                  </a:tcPr>
+                </a:tc>
+              </a:tr>
+              <a:tr h="313508">
+                <a:tc>
+                  <a:txBody>
+                    <a:bodyPr/>
+                    <a:lstStyle/>
+                    <a:p>
+                      <a:pPr>
+                        <a:defRPr sz="1000">
+                          <a:solidFill>
+                            <a:srgbClr val="333333"/>
+                          </a:solidFill>
+                        </a:defRPr>
+                      </a:pPr>
+                      <a:r>
+                        <a:t>ZSFTP_CAPARIO_PULL</a:t>
+                      </a:r>
+                    </a:p>
+                  </a:txBody>
+                  <a:tcPr>
+                    <a:solidFill>
+                      <a:srgbClr val="F0F2F7"/>
+                    </a:solidFill>
+                  </a:tcPr>
+                </a:tc>
+                <a:tc>
+                  <a:txBody>
+                    <a:bodyPr/>
+                    <a:lstStyle/>
+                    <a:p>
+                      <a:pPr>
+                        <a:defRPr sz="1000">
+                          <a:solidFill>
+                            <a:srgbClr val="333333"/>
+                          </a:solidFill>
+                        </a:defRPr>
+                      </a:pPr>
+                      <a:r>
+                        <a:t>'ZSFTP_835_PULL'</a:t>
+                      </a:r>
+                    </a:p>
+                  </a:txBody>
+                  <a:tcPr>
+                    <a:solidFill>
+                      <a:srgbClr val="F0F2F7"/>
+                    </a:solidFill>
+                  </a:tcPr>
+                </a:tc>
+                <a:tc>
+                  <a:txBody>
+                    <a:bodyPr/>
+                    <a:lstStyle/>
+                    <a:p>
+                      <a:pPr>
+                        <a:defRPr sz="1000">
+                          <a:solidFill>
+                            <a:srgbClr val="333333"/>
+                          </a:solidFill>
+                        </a:defRPr>
+                      </a:pPr>
+                      <a:r>
+                        <a:t>Standard key-auth bundle + FOLDER_PATH + FILE_EXT</a:t>
+                      </a:r>
+                    </a:p>
+                  </a:txBody>
+                  <a:tcPr>
+                    <a:solidFill>
+                      <a:srgbClr val="F0F2F7"/>
+                    </a:solidFill>
+                  </a:tcPr>
+                </a:tc>
+              </a:tr>
+              <a:tr h="313508">
+                <a:tc>
+                  <a:txBody>
+                    <a:bodyPr/>
+                    <a:lstStyle/>
+                    <a:p>
+                      <a:pPr>
+                        <a:defRPr sz="1000">
+                          <a:solidFill>
+                            <a:srgbClr val="333333"/>
+                          </a:solidFill>
+                        </a:defRPr>
+                      </a:pPr>
+                      <a:r>
+                        <a:t>ZSFTP_CAPARIO</a:t>
+                      </a:r>
+                    </a:p>
+                  </a:txBody>
+                  <a:tcPr>
+                    <a:solidFill>
+                      <a:srgbClr val="FFFFFF"/>
+                    </a:solidFill>
+                  </a:tcPr>
+                </a:tc>
+                <a:tc>
+                  <a:txBody>
+                    <a:bodyPr/>
+                    <a:lstStyle/>
+                    <a:p>
+                      <a:pPr>
+                        <a:defRPr sz="1000">
+                          <a:solidFill>
+                            <a:srgbClr val="333333"/>
+                          </a:solidFill>
+                        </a:defRPr>
+                      </a:pPr>
+                      <a:r>
+                        <a:t>'ZSFTP_837'</a:t>
+                      </a:r>
+                    </a:p>
+                  </a:txBody>
+                  <a:tcPr>
+                    <a:solidFill>
+                      <a:srgbClr val="FFFFFF"/>
+                    </a:solidFill>
+                  </a:tcPr>
+                </a:tc>
+                <a:tc>
+                  <a:txBody>
+                    <a:bodyPr/>
+                    <a:lstStyle/>
+                    <a:p>
+                      <a:pPr>
+                        <a:defRPr sz="1000">
+                          <a:solidFill>
+                            <a:srgbClr val="333333"/>
+                          </a:solidFill>
+                        </a:defRPr>
+                      </a:pPr>
+                      <a:r>
+                        <a:t>Standard key-auth bundle (push)</a:t>
+                      </a:r>
+                    </a:p>
+                  </a:txBody>
+                  <a:tcPr>
+                    <a:solidFill>
+                      <a:srgbClr val="FFFFFF"/>
+                    </a:solidFill>
+                  </a:tcPr>
+                </a:tc>
+              </a:tr>
+              <a:tr h="313508">
+                <a:tc>
+                  <a:txBody>
+                    <a:bodyPr/>
+                    <a:lstStyle/>
+                    <a:p>
+                      <a:pPr>
+                        <a:defRPr sz="1000">
+                          <a:solidFill>
+                            <a:srgbClr val="333333"/>
+                          </a:solidFill>
+                        </a:defRPr>
+                      </a:pPr>
+                      <a:r>
+                        <a:t>ZSFTP_PATIENTCO_PULL</a:t>
+                      </a:r>
+                    </a:p>
+                  </a:txBody>
+                  <a:tcPr>
+                    <a:solidFill>
+                      <a:srgbClr val="F0F2F7"/>
+                    </a:solidFill>
+                  </a:tcPr>
+                </a:tc>
+                <a:tc>
+                  <a:txBody>
+                    <a:bodyPr/>
+                    <a:lstStyle/>
+                    <a:p>
+                      <a:pPr>
+                        <a:defRPr sz="1000">
+                          <a:solidFill>
+                            <a:srgbClr val="333333"/>
+                          </a:solidFill>
+                        </a:defRPr>
+                      </a:pPr>
+                      <a:r>
+                        <a:t>'ZSFTP_835_PATIENTCO'</a:t>
+                      </a:r>
+                    </a:p>
+                  </a:txBody>
+                  <a:tcPr>
+                    <a:solidFill>
+                      <a:srgbClr val="F0F2F7"/>
+                    </a:solidFill>
+                  </a:tcPr>
+                </a:tc>
+                <a:tc>
+                  <a:txBody>
+                    <a:bodyPr/>
+                    <a:lstStyle/>
+                    <a:p>
+                      <a:pPr>
+                        <a:defRPr sz="1000">
+                          <a:solidFill>
+                            <a:srgbClr val="333333"/>
+                          </a:solidFill>
+                        </a:defRPr>
+                      </a:pPr>
+                      <a:r>
+                        <a:t>FTP_USER, FTP_DOMAIN, HOST_KEY, FTP_PSWD (fallback), FOLDER_PATH, FILE_EXT</a:t>
+                      </a:r>
+                    </a:p>
+                  </a:txBody>
+                  <a:tcPr>
+                    <a:solidFill>
+                      <a:srgbClr val="F0F2F7"/>
+                    </a:solidFill>
+                  </a:tcPr>
+                </a:tc>
+              </a:tr>
+              <a:tr h="313508">
+                <a:tc>
+                  <a:txBody>
+                    <a:bodyPr/>
+                    <a:lstStyle/>
+                    <a:p>
+                      <a:pPr>
+                        <a:defRPr sz="1000">
+                          <a:solidFill>
+                            <a:srgbClr val="333333"/>
+                          </a:solidFill>
+                        </a:defRPr>
+                      </a:pPr>
+                      <a:r>
+                        <a:t>ZSFTP_JPM / ZSFTP_JPM_PULL</a:t>
+                      </a:r>
+                    </a:p>
+                  </a:txBody>
+                  <a:tcPr>
+                    <a:solidFill>
+                      <a:srgbClr val="FFFFFF"/>
+                    </a:solidFill>
+                  </a:tcPr>
+                </a:tc>
+                <a:tc>
+                  <a:txBody>
+                    <a:bodyPr/>
+                    <a:lstStyle/>
+                    <a:p>
+                      <a:pPr>
+                        <a:defRPr sz="1000">
+                          <a:solidFill>
+                            <a:srgbClr val="333333"/>
+                          </a:solidFill>
+                        </a:defRPr>
+                      </a:pPr>
+                      <a:r>
+                        <a:t>'ZSFTP_JPM'</a:t>
+                      </a:r>
+                    </a:p>
+                  </a:txBody>
+                  <a:tcPr>
+                    <a:solidFill>
+                      <a:srgbClr val="FFFFFF"/>
+                    </a:solidFill>
+                  </a:tcPr>
+                </a:tc>
+                <a:tc>
+                  <a:txBody>
+                    <a:bodyPr/>
+                    <a:lstStyle/>
+                    <a:p>
+                      <a:pPr>
+                        <a:defRPr sz="1000">
+                          <a:solidFill>
+                            <a:srgbClr val="333333"/>
+                          </a:solidFill>
+                        </a:defRPr>
+                      </a:pPr>
+                      <a:r>
+                        <a:t>Standard key-auth bundle</a:t>
+                      </a:r>
+                    </a:p>
+                  </a:txBody>
+                  <a:tcPr>
+                    <a:solidFill>
+                      <a:srgbClr val="FFFFFF"/>
+                    </a:solidFill>
+                  </a:tcPr>
+                </a:tc>
+              </a:tr>
+              <a:tr h="313508">
+                <a:tc>
+                  <a:txBody>
+                    <a:bodyPr/>
+                    <a:lstStyle/>
+                    <a:p>
+                      <a:pPr>
+                        <a:defRPr sz="1000">
+                          <a:solidFill>
+                            <a:srgbClr val="333333"/>
+                          </a:solidFill>
+                        </a:defRPr>
+                      </a:pPr>
+                      <a:r>
+                        <a:t>ZFFIU_ACC_POST / ZSFTP_CERIDIAN_PULL</a:t>
+                      </a:r>
+                    </a:p>
+                  </a:txBody>
+                  <a:tcPr>
+                    <a:solidFill>
+                      <a:srgbClr val="F0F2F7"/>
+                    </a:solidFill>
+                  </a:tcPr>
+                </a:tc>
+                <a:tc>
+                  <a:txBody>
+                    <a:bodyPr/>
+                    <a:lstStyle/>
+                    <a:p>
+                      <a:pPr>
+                        <a:defRPr sz="1000">
+                          <a:solidFill>
+                            <a:srgbClr val="333333"/>
+                          </a:solidFill>
+                        </a:defRPr>
+                      </a:pPr>
+                      <a:r>
+                        <a:t>'ZSFTP_CERIDIAN'</a:t>
+                      </a:r>
+                    </a:p>
+                  </a:txBody>
+                  <a:tcPr>
+                    <a:solidFill>
+                      <a:srgbClr val="F0F2F7"/>
+                    </a:solidFill>
+                  </a:tcPr>
+                </a:tc>
+                <a:tc>
+                  <a:txBody>
+                    <a:bodyPr/>
+                    <a:lstStyle/>
+                    <a:p>
+                      <a:pPr>
+                        <a:defRPr sz="1000">
+                          <a:solidFill>
+                            <a:srgbClr val="333333"/>
+                          </a:solidFill>
+                        </a:defRPr>
+                      </a:pPr>
+                      <a:r>
+                        <a:t>FTP_USER, FTP_DOMAIN, HOST_KEY, PASSPHRASE, SFTP_FILE_EXT, SOURCE_FOLDER</a:t>
+                      </a:r>
+                    </a:p>
+                  </a:txBody>
+                  <a:tcPr>
+                    <a:solidFill>
+                      <a:srgbClr val="F0F2F7"/>
+                    </a:solidFill>
+                  </a:tcPr>
+                </a:tc>
+              </a:tr>
+              <a:tr h="313508">
+                <a:tc>
+                  <a:txBody>
+                    <a:bodyPr/>
+                    <a:lstStyle/>
+                    <a:p>
+                      <a:pPr>
+                        <a:defRPr sz="1000">
+                          <a:solidFill>
+                            <a:srgbClr val="333333"/>
+                          </a:solidFill>
+                        </a:defRPr>
+                      </a:pPr>
+                      <a:r>
+                        <a:t>ZDMS_UPLOAD_FILES / ZDMS_REPLACE_FILES</a:t>
+                      </a:r>
+                    </a:p>
+                  </a:txBody>
+                  <a:tcPr>
+                    <a:solidFill>
+                      <a:srgbClr val="FFFFFF"/>
+                    </a:solidFill>
+                  </a:tcPr>
+                </a:tc>
+                <a:tc>
+                  <a:txBody>
+                    <a:bodyPr/>
+                    <a:lstStyle/>
+                    <a:p>
+                      <a:pPr>
+                        <a:defRPr sz="1000">
+                          <a:solidFill>
+                            <a:srgbClr val="333333"/>
+                          </a:solidFill>
+                        </a:defRPr>
+                      </a:pPr>
+                      <a:r>
+                        <a:t>(GET) 'ZSFTP_DMS_IN' + (PUT) 'ZSFTP_DMS_OUT'</a:t>
+                      </a:r>
+                    </a:p>
+                  </a:txBody>
+                  <a:tcPr>
+                    <a:solidFill>
+                      <a:srgbClr val="FFFFFF"/>
+                    </a:solidFill>
+                  </a:tcPr>
+                </a:tc>
+                <a:tc>
+                  <a:txBody>
+                    <a:bodyPr/>
+                    <a:lstStyle/>
+                    <a:p>
+                      <a:pPr>
+                        <a:defRPr sz="1000">
+                          <a:solidFill>
+                            <a:srgbClr val="333333"/>
+                          </a:solidFill>
+                        </a:defRPr>
+                      </a:pPr>
+                      <a:r>
+                        <a:t>Standard key-auth bundle + SOURCE_FOLDER + ZDEST_FOLD</a:t>
+                      </a:r>
+                    </a:p>
+                  </a:txBody>
+                  <a:tcPr>
+                    <a:solidFill>
+                      <a:srgbClr val="FFFFFF"/>
+                    </a:solidFill>
+                  </a:tcPr>
+                </a:tc>
+              </a:tr>
+              <a:tr h="313508">
+                <a:tc>
+                  <a:txBody>
+                    <a:bodyPr/>
+                    <a:lstStyle/>
+                    <a:p>
+                      <a:pPr>
+                        <a:defRPr sz="1000">
+                          <a:solidFill>
+                            <a:srgbClr val="333333"/>
+                          </a:solidFill>
+                        </a:defRPr>
+                      </a:pPr>
+                      <a:r>
+                        <a:t>ZSD_MEDICARE_PDF_PROCESS (via ZMEDI)</a:t>
+                      </a:r>
+                    </a:p>
+                  </a:txBody>
+                  <a:tcPr>
+                    <a:solidFill>
+                      <a:srgbClr val="F0F2F7"/>
+                    </a:solidFill>
+                  </a:tcPr>
+                </a:tc>
+                <a:tc>
+                  <a:txBody>
+                    <a:bodyPr/>
+                    <a:lstStyle/>
+                    <a:p>
+                      <a:pPr>
+                        <a:defRPr sz="1000">
+                          <a:solidFill>
+                            <a:srgbClr val="333333"/>
+                          </a:solidFill>
+                        </a:defRPr>
+                      </a:pPr>
+                      <a:r>
+                        <a:t>'ZSFTP_MEDICARE_IN' + 'ZSFTP_MEDICARE_OUT'</a:t>
+                      </a:r>
+                    </a:p>
+                  </a:txBody>
+                  <a:tcPr>
+                    <a:solidFill>
+                      <a:srgbClr val="F0F2F7"/>
+                    </a:solidFill>
+                  </a:tcPr>
+                </a:tc>
+                <a:tc>
+                  <a:txBody>
+                    <a:bodyPr/>
+                    <a:lstStyle/>
+                    <a:p>
+                      <a:pPr>
+                        <a:defRPr sz="1000">
+                          <a:solidFill>
+                            <a:srgbClr val="333333"/>
+                          </a:solidFill>
+                        </a:defRPr>
+                      </a:pPr>
+                      <a:r>
+                        <a:t>FTP_USER, PASSPHRASE, HOST_KEY, FTP_DOMAIN, PRIVATE_KEY_PATH, SOURCE_PATH, ZDEST_FOLD</a:t>
+                      </a:r>
+                    </a:p>
+                  </a:txBody>
+                  <a:tcPr>
+                    <a:solidFill>
+                      <a:srgbClr val="F0F2F7"/>
+                    </a:solidFill>
+                  </a:tcPr>
+                </a:tc>
+              </a:tr>
+              <a:tr h="313516">
+                <a:tc>
+                  <a:txBody>
+                    <a:bodyPr/>
+                    <a:lstStyle/>
+                    <a:p>
+                      <a:pPr>
+                        <a:defRPr sz="1000">
+                          <a:solidFill>
+                            <a:srgbClr val="333333"/>
+                          </a:solidFill>
+                        </a:defRPr>
+                      </a:pPr>
+                      <a:r>
+                        <a:t>ZSD_ERX_DMS_FILE_PROCESS (via ZERX)</a:t>
+                      </a:r>
+                    </a:p>
+                  </a:txBody>
+                  <a:tcPr>
+                    <a:solidFill>
+                      <a:srgbClr val="FFFFFF"/>
+                    </a:solidFill>
+                  </a:tcPr>
+                </a:tc>
+                <a:tc>
+                  <a:txBody>
+                    <a:bodyPr/>
+                    <a:lstStyle/>
+                    <a:p>
+                      <a:pPr>
+                        <a:defRPr sz="1000">
+                          <a:solidFill>
+                            <a:srgbClr val="333333"/>
+                          </a:solidFill>
+                        </a:defRPr>
+                      </a:pPr>
+                      <a:r>
+                        <a:t>(via ZERX wrapper FUGR)</a:t>
+                      </a:r>
+                    </a:p>
+                  </a:txBody>
+                  <a:tcPr>
+                    <a:solidFill>
+                      <a:srgbClr val="FFFFFF"/>
+                    </a:solidFill>
+                  </a:tcPr>
+                </a:tc>
+                <a:tc>
+                  <a:txBody>
+                    <a:bodyPr/>
+                    <a:lstStyle/>
+                    <a:p>
+                      <a:pPr>
+                        <a:defRPr sz="1000">
+                          <a:solidFill>
+                            <a:srgbClr val="333333"/>
+                          </a:solidFill>
+                        </a:defRPr>
+                      </a:pPr>
+                      <a:r>
+                        <a:t>Standard key-auth bundle</a:t>
+                      </a:r>
+                    </a:p>
+                  </a:txBody>
+                  <a:tcPr>
+                    <a:solidFill>
+                      <a:srgbClr val="FFFFFF"/>
+                    </a:solidFill>
+                  </a:tcPr>
+                </a:tc>
+              </a:tr>
+            </a:tbl>
+          </a:graphicData>
+        </a:graphic>
+      </p:graphicFrame>
+      <p:sp>
+        <p:nvSpPr>
+          <p:cNvPr id="5" name="TextBox 4"/>
+          <p:cNvSpPr txBox="1"/>
+          <p:nvPr/>
+        </p:nvSpPr>
+        <p:spPr>
+          <a:xfrm>
+            <a:off x="457200" y="6675120"/>
+            <a:ext cx="11247120" cy="182880"/>
+          </a:xfrm>
+          <a:prstGeom prst="rect">
+            <a:avLst/>
+          </a:prstGeom>
+          <a:noFill/>
+        </p:spPr>
+        <p:txBody>
+          <a:bodyPr wrap="square">
+            <a:spAutoFit/>
+          </a:bodyPr>
+          <a:lstStyle/>
+          <a:p>
+            <a:pPr>
+              <a:defRPr sz="1000" b="1">
+                <a:solidFill>
+                  <a:srgbClr val="1F3A68"/>
+                </a:solidFill>
+              </a:defRPr>
+            </a:pPr>
+            <a:r>
+              <a:t>Migration handoff: extract zfi_constants rows for these pnames into the new credential store; do not include the values in any code-review / analysis artifact.</a:t>
             </a:r>
           </a:p>
         </p:txBody>

--- a/docs/tutorials/codebase-analysis/examples/report.pptx
+++ b/docs/tutorials/codebase-analysis/examples/report.pptx
@@ -10,6 +10,7 @@
     <p:sldId id="258" r:id="rId9"/>
     <p:sldId id="266" r:id="rId17"/>
     <p:sldId id="267" r:id="rId18"/>
+    <p:sldId id="268" r:id="rId19"/>
     <p:sldId id="259" r:id="rId10"/>
     <p:sldId id="260" r:id="rId11"/>
     <p:sldId id="261" r:id="rId12"/>
@@ -3252,7 +3253,7 @@
               </a:defRPr>
             </a:pPr>
             <a:r>
-              <a:t>Acceptance criteria — what 'migrated' means per consumer</a:t>
+              <a:t>Migration proposal — one ABAP-level change point</a:t>
             </a:r>
           </a:p>
         </p:txBody>
@@ -3265,8 +3266,8 @@
         </p:nvSpPr>
         <p:spPr>
           <a:xfrm>
-            <a:off x="457200" y="1097280"/>
-            <a:ext cx="11247120" cy="5486400"/>
+            <a:off x="457200" y="1005840"/>
+            <a:ext cx="11247120" cy="640080"/>
           </a:xfrm>
           <a:prstGeom prst="rect">
             <a:avLst/>
@@ -3280,218 +3281,453 @@
           <a:lstStyle/>
           <a:p>
             <a:pPr>
-              <a:defRPr sz="1300" b="0">
+              <a:defRPr sz="1400" b="0">
                 <a:solidFill>
-                  <a:srgbClr val="333333"/>
+                  <a:srgbClr val="C83636"/>
                 </a:solidFill>
               </a:defRPr>
             </a:pPr>
             <a:r>
-              <a:t>For each of the 16 reports + 3 wrapper FUGRs, the replacement must:</a:t>
-            </a:r>
-          </a:p>
+              <a:t>Replace CALL FUNCTION 'SXPG_COMMAND_EXECUTE' (with SM69 entries that shell out to OS sftp/scp) with a native ABAP SFTP layer.</a:t>
+            </a:r>
+          </a:p>
+        </p:txBody>
+      </p:sp>
+      <p:graphicFrame>
+        <p:nvGraphicFramePr>
+          <p:cNvPr id="4" name="Table 3"/>
+          <p:cNvGraphicFramePr>
+            <a:graphicFrameLocks noGrp="1"/>
+          </p:cNvGraphicFramePr>
+          <p:nvPr/>
+        </p:nvGraphicFramePr>
+        <p:xfrm>
+          <a:off x="457200" y="2011680"/>
+          <a:ext cx="11247120" cy="4114800"/>
+        </p:xfrm>
+        <a:graphic>
+          <a:graphicData uri="http://schemas.openxmlformats.org/drawingml/2006/table">
+            <a:tbl>
+              <a:tblPr firstRow="1" bandRow="1">
+                <a:tableStyleId>{5C22544A-7EE6-4342-B048-85BDC9FD1C3A}</a:tableStyleId>
+              </a:tblPr>
+              <a:tblGrid>
+                <a:gridCol w="457200"/>
+                <a:gridCol w="3657600"/>
+                <a:gridCol w="3931920"/>
+                <a:gridCol w="3200400"/>
+              </a:tblGrid>
+              <a:tr h="1028700">
+                <a:tc>
+                  <a:txBody>
+                    <a:bodyPr/>
+                    <a:lstStyle/>
+                    <a:p>
+                      <a:pPr>
+                        <a:defRPr sz="1300" b="1">
+                          <a:solidFill>
+                            <a:srgbClr val="FFFFFF"/>
+                          </a:solidFill>
+                        </a:defRPr>
+                      </a:pPr>
+                      <a:r>
+                        <a:t>#</a:t>
+                      </a:r>
+                    </a:p>
+                  </a:txBody>
+                  <a:tcPr>
+                    <a:solidFill>
+                      <a:srgbClr val="1F3A68"/>
+                    </a:solidFill>
+                  </a:tcPr>
+                </a:tc>
+                <a:tc>
+                  <a:txBody>
+                    <a:bodyPr/>
+                    <a:lstStyle/>
+                    <a:p>
+                      <a:pPr>
+                        <a:defRPr sz="1300" b="1">
+                          <a:solidFill>
+                            <a:srgbClr val="FFFFFF"/>
+                          </a:solidFill>
+                        </a:defRPr>
+                      </a:pPr>
+                      <a:r>
+                        <a:t>Target replacement</a:t>
+                      </a:r>
+                    </a:p>
+                  </a:txBody>
+                  <a:tcPr>
+                    <a:solidFill>
+                      <a:srgbClr val="1F3A68"/>
+                    </a:solidFill>
+                  </a:tcPr>
+                </a:tc>
+                <a:tc>
+                  <a:txBody>
+                    <a:bodyPr/>
+                    <a:lstStyle/>
+                    <a:p>
+                      <a:pPr>
+                        <a:defRPr sz="1300" b="1">
+                          <a:solidFill>
+                            <a:srgbClr val="FFFFFF"/>
+                          </a:solidFill>
+                        </a:defRPr>
+                      </a:pPr>
+                      <a:r>
+                        <a:t>Why</a:t>
+                      </a:r>
+                    </a:p>
+                  </a:txBody>
+                  <a:tcPr>
+                    <a:solidFill>
+                      <a:srgbClr val="1F3A68"/>
+                    </a:solidFill>
+                  </a:tcPr>
+                </a:tc>
+                <a:tc>
+                  <a:txBody>
+                    <a:bodyPr/>
+                    <a:lstStyle/>
+                    <a:p>
+                      <a:pPr>
+                        <a:defRPr sz="1300" b="1">
+                          <a:solidFill>
+                            <a:srgbClr val="FFFFFF"/>
+                          </a:solidFill>
+                        </a:defRPr>
+                      </a:pPr>
+                      <a:r>
+                        <a:t>Coverage</a:t>
+                      </a:r>
+                    </a:p>
+                  </a:txBody>
+                  <a:tcPr>
+                    <a:solidFill>
+                      <a:srgbClr val="1F3A68"/>
+                    </a:solidFill>
+                  </a:tcPr>
+                </a:tc>
+              </a:tr>
+              <a:tr h="1028700">
+                <a:tc>
+                  <a:txBody>
+                    <a:bodyPr/>
+                    <a:lstStyle/>
+                    <a:p>
+                      <a:pPr>
+                        <a:defRPr sz="1200">
+                          <a:solidFill>
+                            <a:srgbClr val="333333"/>
+                          </a:solidFill>
+                        </a:defRPr>
+                      </a:pPr>
+                      <a:r>
+                        <a:t>A</a:t>
+                      </a:r>
+                    </a:p>
+                  </a:txBody>
+                  <a:tcPr>
+                    <a:solidFill>
+                      <a:srgbClr val="FFFFFF"/>
+                    </a:solidFill>
+                  </a:tcPr>
+                </a:tc>
+                <a:tc>
+                  <a:txBody>
+                    <a:bodyPr/>
+                    <a:lstStyle/>
+                    <a:p>
+                      <a:pPr>
+                        <a:defRPr sz="1200">
+                          <a:solidFill>
+                            <a:srgbClr val="333333"/>
+                          </a:solidFill>
+                        </a:defRPr>
+                      </a:pPr>
+                      <a:r>
+                        <a:t>Native ABAP SSH/SFTP client class</a:t>
+                      </a:r>
+                    </a:p>
+                  </a:txBody>
+                  <a:tcPr>
+                    <a:solidFill>
+                      <a:srgbClr val="FFFFFF"/>
+                    </a:solidFill>
+                  </a:tcPr>
+                </a:tc>
+                <a:tc>
+                  <a:txBody>
+                    <a:bodyPr/>
+                    <a:lstStyle/>
+                    <a:p>
+                      <a:pPr>
+                        <a:defRPr sz="1200">
+                          <a:solidFill>
+                            <a:srgbClr val="333333"/>
+                          </a:solidFill>
+                        </a:defRPr>
+                      </a:pPr>
+                      <a:r>
+                        <a:t>Removes OS-script dependency; runs in-ABAP</a:t>
+                      </a:r>
+                    </a:p>
+                  </a:txBody>
+                  <a:tcPr>
+                    <a:solidFill>
+                      <a:srgbClr val="FFFFFF"/>
+                    </a:solidFill>
+                  </a:tcPr>
+                </a:tc>
+                <a:tc>
+                  <a:txBody>
+                    <a:bodyPr/>
+                    <a:lstStyle/>
+                    <a:p>
+                      <a:pPr>
+                        <a:defRPr sz="1200">
+                          <a:solidFill>
+                            <a:srgbClr val="333333"/>
+                          </a:solidFill>
+                        </a:defRPr>
+                      </a:pPr>
+                      <a:r>
+                        <a:t>All 16 reports + 3 wrappers in one swap</a:t>
+                      </a:r>
+                    </a:p>
+                  </a:txBody>
+                  <a:tcPr>
+                    <a:solidFill>
+                      <a:srgbClr val="FFFFFF"/>
+                    </a:solidFill>
+                  </a:tcPr>
+                </a:tc>
+              </a:tr>
+              <a:tr h="1028700">
+                <a:tc>
+                  <a:txBody>
+                    <a:bodyPr/>
+                    <a:lstStyle/>
+                    <a:p>
+                      <a:pPr>
+                        <a:defRPr sz="1200">
+                          <a:solidFill>
+                            <a:srgbClr val="333333"/>
+                          </a:solidFill>
+                        </a:defRPr>
+                      </a:pPr>
+                      <a:r>
+                        <a:t>B</a:t>
+                      </a:r>
+                    </a:p>
+                  </a:txBody>
+                  <a:tcPr>
+                    <a:solidFill>
+                      <a:srgbClr val="F0F2F7"/>
+                    </a:solidFill>
+                  </a:tcPr>
+                </a:tc>
+                <a:tc>
+                  <a:txBody>
+                    <a:bodyPr/>
+                    <a:lstStyle/>
+                    <a:p>
+                      <a:pPr>
+                        <a:defRPr sz="1200">
+                          <a:solidFill>
+                            <a:srgbClr val="333333"/>
+                          </a:solidFill>
+                        </a:defRPr>
+                      </a:pPr>
+                      <a:r>
+                        <a:t>BTP Integration Suite SFTP adapter (via destination)</a:t>
+                      </a:r>
+                    </a:p>
+                  </a:txBody>
+                  <a:tcPr>
+                    <a:solidFill>
+                      <a:srgbClr val="F0F2F7"/>
+                    </a:solidFill>
+                  </a:tcPr>
+                </a:tc>
+                <a:tc>
+                  <a:txBody>
+                    <a:bodyPr/>
+                    <a:lstStyle/>
+                    <a:p>
+                      <a:pPr>
+                        <a:defRPr sz="1200">
+                          <a:solidFill>
+                            <a:srgbClr val="333333"/>
+                          </a:solidFill>
+                        </a:defRPr>
+                      </a:pPr>
+                      <a:r>
+                        <a:t>Cleanest separation; aligns with SAP BTP roadmap</a:t>
+                      </a:r>
+                    </a:p>
+                  </a:txBody>
+                  <a:tcPr>
+                    <a:solidFill>
+                      <a:srgbClr val="F0F2F7"/>
+                    </a:solidFill>
+                  </a:tcPr>
+                </a:tc>
+                <a:tc>
+                  <a:txBody>
+                    <a:bodyPr/>
+                    <a:lstStyle/>
+                    <a:p>
+                      <a:pPr>
+                        <a:defRPr sz="1200">
+                          <a:solidFill>
+                            <a:srgbClr val="333333"/>
+                          </a:solidFill>
+                        </a:defRPr>
+                      </a:pPr>
+                      <a:r>
+                        <a:t>Same; needs BTP connectivity from on-prem</a:t>
+                      </a:r>
+                    </a:p>
+                  </a:txBody>
+                  <a:tcPr>
+                    <a:solidFill>
+                      <a:srgbClr val="F0F2F7"/>
+                    </a:solidFill>
+                  </a:tcPr>
+                </a:tc>
+              </a:tr>
+              <a:tr h="1028700">
+                <a:tc>
+                  <a:txBody>
+                    <a:bodyPr/>
+                    <a:lstStyle/>
+                    <a:p>
+                      <a:pPr>
+                        <a:defRPr sz="1200">
+                          <a:solidFill>
+                            <a:srgbClr val="333333"/>
+                          </a:solidFill>
+                        </a:defRPr>
+                      </a:pPr>
+                      <a:r>
+                        <a:t>C</a:t>
+                      </a:r>
+                    </a:p>
+                  </a:txBody>
+                  <a:tcPr>
+                    <a:solidFill>
+                      <a:srgbClr val="FFFFFF"/>
+                    </a:solidFill>
+                  </a:tcPr>
+                </a:tc>
+                <a:tc>
+                  <a:txBody>
+                    <a:bodyPr/>
+                    <a:lstStyle/>
+                    <a:p>
+                      <a:pPr>
+                        <a:defRPr sz="1200">
+                          <a:solidFill>
+                            <a:srgbClr val="333333"/>
+                          </a:solidFill>
+                        </a:defRPr>
+                      </a:pPr>
+                      <a:r>
+                        <a:t>Keep SXPG but rewrite the OS-side script</a:t>
+                      </a:r>
+                    </a:p>
+                  </a:txBody>
+                  <a:tcPr>
+                    <a:solidFill>
+                      <a:srgbClr val="FFFFFF"/>
+                    </a:solidFill>
+                  </a:tcPr>
+                </a:tc>
+                <a:tc>
+                  <a:txBody>
+                    <a:bodyPr/>
+                    <a:lstStyle/>
+                    <a:p>
+                      <a:pPr>
+                        <a:defRPr sz="1200">
+                          <a:solidFill>
+                            <a:srgbClr val="333333"/>
+                          </a:solidFill>
+                        </a:defRPr>
+                      </a:pPr>
+                      <a:r>
+                        <a:t>Minimal ABAP change; controls credentials in one script</a:t>
+                      </a:r>
+                    </a:p>
+                  </a:txBody>
+                  <a:tcPr>
+                    <a:solidFill>
+                      <a:srgbClr val="FFFFFF"/>
+                    </a:solidFill>
+                  </a:tcPr>
+                </a:tc>
+                <a:tc>
+                  <a:txBody>
+                    <a:bodyPr/>
+                    <a:lstStyle/>
+                    <a:p>
+                      <a:pPr>
+                        <a:defRPr sz="1200">
+                          <a:solidFill>
+                            <a:srgbClr val="333333"/>
+                          </a:solidFill>
+                        </a:defRPr>
+                      </a:pPr>
+                      <a:r>
+                        <a:t>All callers; doesn't remove technical debt</a:t>
+                      </a:r>
+                    </a:p>
+                  </a:txBody>
+                  <a:tcPr>
+                    <a:solidFill>
+                      <a:srgbClr val="FFFFFF"/>
+                    </a:solidFill>
+                  </a:tcPr>
+                </a:tc>
+              </a:tr>
+            </a:tbl>
+          </a:graphicData>
+        </a:graphic>
+      </p:graphicFrame>
+      <p:sp>
+        <p:nvSpPr>
+          <p:cNvPr id="5" name="TextBox 4"/>
+          <p:cNvSpPr txBox="1"/>
+          <p:nvPr/>
+        </p:nvSpPr>
+        <p:spPr>
+          <a:xfrm>
+            <a:off x="457200" y="6126480"/>
+            <a:ext cx="11247120" cy="640080"/>
+          </a:xfrm>
+          <a:prstGeom prst="rect">
+            <a:avLst/>
+          </a:prstGeom>
+          <a:noFill/>
+        </p:spPr>
+        <p:txBody>
+          <a:bodyPr wrap="square">
+            <a:spAutoFit/>
+          </a:bodyPr>
+          <a:lstStyle/>
           <a:p>
             <a:pPr>
-              <a:defRPr sz="1300" b="0">
+              <a:defRPr sz="1200" b="1">
                 <a:solidFill>
-                  <a:srgbClr val="333333"/>
+                  <a:srgbClr val="1F3A68"/>
                 </a:solidFill>
               </a:defRPr>
             </a:pPr>
-          </a:p>
-          <a:p>
-            <a:pPr>
-              <a:defRPr sz="1300" b="0">
-                <a:solidFill>
-                  <a:srgbClr val="333333"/>
-                </a:solidFill>
-              </a:defRPr>
-            </a:pPr>
-            <a:r>
-              <a:t>1. Read the same zfi_constants rows (same pname, same fnam keys) — or provide a 1:1 shim.</a:t>
-            </a:r>
-          </a:p>
-          <a:p>
-            <a:pPr>
-              <a:defRPr sz="1300" b="0">
-                <a:solidFill>
-                  <a:srgbClr val="333333"/>
-                </a:solidFill>
-              </a:defRPr>
-            </a:pPr>
-          </a:p>
-          <a:p>
-            <a:pPr>
-              <a:defRPr sz="1300" b="0">
-                <a:solidFill>
-                  <a:srgbClr val="333333"/>
-                </a:solidFill>
-              </a:defRPr>
-            </a:pPr>
-            <a:r>
-              <a:t>2. Reach the same remote host with the same credentials.</a:t>
-            </a:r>
-          </a:p>
-          <a:p>
-            <a:pPr>
-              <a:defRPr sz="1300" b="0">
-                <a:solidFill>
-                  <a:srgbClr val="333333"/>
-                </a:solidFill>
-              </a:defRPr>
-            </a:pPr>
-          </a:p>
-          <a:p>
-            <a:pPr>
-              <a:defRPr sz="1300" b="0">
-                <a:solidFill>
-                  <a:srgbClr val="333333"/>
-                </a:solidFill>
-              </a:defRPr>
-            </a:pPr>
-            <a:r>
-              <a:t>3. Support both auth modes — key-based (PRIVATE_KEY_PATH + HOST_KEY + PASSPHRASE) AND password-based (FTP_PSWD).</a:t>
-            </a:r>
-          </a:p>
-          <a:p>
-            <a:pPr>
-              <a:defRPr sz="1300" b="0">
-                <a:solidFill>
-                  <a:srgbClr val="333333"/>
-                </a:solidFill>
-              </a:defRPr>
-            </a:pPr>
-          </a:p>
-          <a:p>
-            <a:pPr>
-              <a:defRPr sz="1300" b="0">
-                <a:solidFill>
-                  <a:srgbClr val="333333"/>
-                </a:solidFill>
-              </a:defRPr>
-            </a:pPr>
-            <a:r>
-              <a:t>4. Preserve PGP encryption wrap for ZSFTP_BNP_PARIBAS_WITH_PGP.</a:t>
-            </a:r>
-          </a:p>
-          <a:p>
-            <a:pPr>
-              <a:defRPr sz="1300" b="0">
-                <a:solidFill>
-                  <a:srgbClr val="333333"/>
-                </a:solidFill>
-              </a:defRPr>
-            </a:pPr>
-          </a:p>
-          <a:p>
-            <a:pPr>
-              <a:defRPr sz="1300" b="0">
-                <a:solidFill>
-                  <a:srgbClr val="333333"/>
-                </a:solidFill>
-              </a:defRPr>
-            </a:pPr>
-            <a:r>
-              <a:t>5. Return success/failure semantics compatible with caller code (exitcode, exec_protocol log).</a:t>
-            </a:r>
-          </a:p>
-          <a:p>
-            <a:pPr>
-              <a:defRPr sz="1300" b="0">
-                <a:solidFill>
-                  <a:srgbClr val="333333"/>
-                </a:solidFill>
-              </a:defRPr>
-            </a:pPr>
-          </a:p>
-          <a:p>
-            <a:pPr>
-              <a:defRPr sz="1300" b="0">
-                <a:solidFill>
-                  <a:srgbClr val="333333"/>
-                </a:solidFill>
-              </a:defRPr>
-            </a:pPr>
-            <a:r>
-              <a:t>6. Coordinate cutover for the 3 SHARED SM69 entries — both callers migrate atomically:</a:t>
-            </a:r>
-          </a:p>
-          <a:p>
-            <a:pPr>
-              <a:defRPr sz="1300" b="0">
-                <a:solidFill>
-                  <a:srgbClr val="333333"/>
-                </a:solidFill>
-              </a:defRPr>
-            </a:pPr>
-            <a:r>
-              <a:t>       • ZFTP_BNPP            ← ZSFTP_BNP_PARIBAS + ZSFTP_BNP_PARIBAS_WITH_PGP</a:t>
-            </a:r>
-          </a:p>
-          <a:p>
-            <a:pPr>
-              <a:defRPr sz="1300" b="0">
-                <a:solidFill>
-                  <a:srgbClr val="333333"/>
-                </a:solidFill>
-              </a:defRPr>
-            </a:pPr>
-            <a:r>
-              <a:t>       • ZSFTP_CERIDIAN_GET   ← ZFFIU_ACC_POST + ZSFTP_CERIDIAN_PULL</a:t>
-            </a:r>
-          </a:p>
-          <a:p>
-            <a:pPr>
-              <a:defRPr sz="1300" b="0">
-                <a:solidFill>
-                  <a:srgbClr val="333333"/>
-                </a:solidFill>
-              </a:defRPr>
-            </a:pPr>
-            <a:r>
-              <a:t>       • ZSFTP_DMS_GET / PUT  ← ZDMS_UPLOAD_FILES + ZDMS_REPLACE_FILES</a:t>
-            </a:r>
-          </a:p>
-          <a:p>
-            <a:pPr>
-              <a:defRPr sz="1300" b="0">
-                <a:solidFill>
-                  <a:srgbClr val="333333"/>
-                </a:solidFill>
-              </a:defRPr>
-            </a:pPr>
-          </a:p>
-          <a:p>
-            <a:pPr>
-              <a:defRPr sz="1300" b="0">
-                <a:solidFill>
-                  <a:srgbClr val="333333"/>
-                </a:solidFill>
-              </a:defRPr>
-            </a:pPr>
-            <a:r>
-              <a:t>7. Per-report end-to-end test: trigger the report; assert file landed (pull) or was delivered (push).</a:t>
-            </a:r>
-          </a:p>
-          <a:p>
-            <a:pPr>
-              <a:defRPr sz="1300" b="0">
-                <a:solidFill>
-                  <a:srgbClr val="333333"/>
-                </a:solidFill>
-              </a:defRPr>
-            </a:pPr>
-          </a:p>
-          <a:p>
-            <a:pPr>
-              <a:defRPr sz="1300" b="0">
-                <a:solidFill>
-                  <a:srgbClr val="333333"/>
-                </a:solidFill>
-              </a:defRPr>
-            </a:pPr>
-            <a:r>
-              <a:t>8. ZDMS_SEND_FILE / ZDMS_EXTRACT_DOCS_TO_SFTP — investigate dynamic/cross-package callers before declaring it dead.</a:t>
+            <a:r>
+              <a:t>Recommended: A or B. Both replace the SXPG_COMMAND_EXECUTE call site uniformly — same FORM scaffolding, same zfi_constants reads.</a:t>
             </a:r>
           </a:p>
         </p:txBody>
@@ -3544,7 +3780,7 @@
               </a:defRPr>
             </a:pPr>
             <a:r>
-              <a:t>Completeness — 7 independent scans, no truncation</a:t>
+              <a:t>Acceptance criteria — what 'migrated' means per consumer</a:t>
             </a:r>
           </a:p>
         </p:txBody>
@@ -3558,7 +3794,7 @@
         <p:spPr>
           <a:xfrm>
             <a:off x="457200" y="1097280"/>
-            <a:ext cx="11247120" cy="640080"/>
+            <a:ext cx="11247120" cy="5486400"/>
           </a:xfrm>
           <a:prstGeom prst="rect">
             <a:avLst/>
@@ -3572,646 +3808,16 @@
           <a:lstStyle/>
           <a:p>
             <a:pPr>
-              <a:defRPr sz="1400" b="0">
+              <a:defRPr sz="1300" b="0">
                 <a:solidFill>
                   <a:srgbClr val="333333"/>
                 </a:solidFill>
               </a:defRPr>
             </a:pPr>
             <a:r>
-              <a:t>Seven SearchSource scans across Z001 + sub-packages, none truncated.</a:t>
-            </a:r>
-          </a:p>
-          <a:p>
-            <a:pPr>
-              <a:defRPr sz="1400" b="0">
-                <a:solidFill>
-                  <a:srgbClr val="333333"/>
-                </a:solidFill>
-              </a:defRPr>
-            </a:pPr>
-            <a:r>
-              <a:t>The 7th scan (`ZSFTP_` SM69-prefix) caught a missed wrapper FUGR — names don't always tell the truth.</a:t>
-            </a:r>
-          </a:p>
-        </p:txBody>
-      </p:sp>
-      <p:graphicFrame>
-        <p:nvGraphicFramePr>
-          <p:cNvPr id="4" name="Table 3"/>
-          <p:cNvGraphicFramePr>
-            <a:graphicFrameLocks noGrp="1"/>
-          </p:cNvGraphicFramePr>
-          <p:nvPr/>
-        </p:nvGraphicFramePr>
-        <p:xfrm>
-          <a:off x="457200" y="2103120"/>
-          <a:ext cx="11247120" cy="3291840"/>
-        </p:xfrm>
-        <a:graphic>
-          <a:graphicData uri="http://schemas.openxmlformats.org/drawingml/2006/table">
-            <a:tbl>
-              <a:tblPr firstRow="1" bandRow="1">
-                <a:tableStyleId>{5C22544A-7EE6-4342-B048-85BDC9FD1C3A}</a:tableStyleId>
-              </a:tblPr>
-              <a:tblGrid>
-                <a:gridCol w="2743200"/>
-                <a:gridCol w="6217920"/>
-                <a:gridCol w="2286000"/>
-              </a:tblGrid>
-              <a:tr h="411480">
-                <a:tc>
-                  <a:txBody>
-                    <a:bodyPr/>
-                    <a:lstStyle/>
-                    <a:p>
-                      <a:pPr>
-                        <a:defRPr sz="1300" b="1">
-                          <a:solidFill>
-                            <a:srgbClr val="FFFFFF"/>
-                          </a:solidFill>
-                        </a:defRPr>
-                      </a:pPr>
-                      <a:r>
-                        <a:t>Scan keyword</a:t>
-                      </a:r>
-                    </a:p>
-                  </a:txBody>
-                  <a:tcPr>
-                    <a:solidFill>
-                      <a:srgbClr val="1F3A68"/>
-                    </a:solidFill>
-                  </a:tcPr>
-                </a:tc>
-                <a:tc>
-                  <a:txBody>
-                    <a:bodyPr/>
-                    <a:lstStyle/>
-                    <a:p>
-                      <a:pPr>
-                        <a:defRPr sz="1300" b="1">
-                          <a:solidFill>
-                            <a:srgbClr val="FFFFFF"/>
-                          </a:solidFill>
-                        </a:defRPr>
-                      </a:pPr>
-                      <a:r>
-                        <a:t>Catches</a:t>
-                      </a:r>
-                    </a:p>
-                  </a:txBody>
-                  <a:tcPr>
-                    <a:solidFill>
-                      <a:srgbClr val="1F3A68"/>
-                    </a:solidFill>
-                  </a:tcPr>
-                </a:tc>
-                <a:tc>
-                  <a:txBody>
-                    <a:bodyPr/>
-                    <a:lstStyle/>
-                    <a:p>
-                      <a:pPr>
-                        <a:defRPr sz="1300" b="1">
-                          <a:solidFill>
-                            <a:srgbClr val="FFFFFF"/>
-                          </a:solidFill>
-                        </a:defRPr>
-                      </a:pPr>
-                      <a:r>
-                        <a:t>Hits / objects</a:t>
-                      </a:r>
-                    </a:p>
-                  </a:txBody>
-                  <a:tcPr>
-                    <a:solidFill>
-                      <a:srgbClr val="1F3A68"/>
-                    </a:solidFill>
-                  </a:tcPr>
-                </a:tc>
-              </a:tr>
-              <a:tr h="411480">
-                <a:tc>
-                  <a:txBody>
-                    <a:bodyPr/>
-                    <a:lstStyle/>
-                    <a:p>
-                      <a:pPr>
-                        <a:defRPr sz="1200">
-                          <a:solidFill>
-                            <a:srgbClr val="333333"/>
-                          </a:solidFill>
-                        </a:defRPr>
-                      </a:pPr>
-                      <a:r>
-                        <a:t>PRIVATE_KEY_PATH</a:t>
-                      </a:r>
-                    </a:p>
-                  </a:txBody>
-                  <a:tcPr>
-                    <a:solidFill>
-                      <a:srgbClr val="FFFFFF"/>
-                    </a:solidFill>
-                  </a:tcPr>
-                </a:tc>
-                <a:tc>
-                  <a:txBody>
-                    <a:bodyPr/>
-                    <a:lstStyle/>
-                    <a:p>
-                      <a:pPr>
-                        <a:defRPr sz="1200">
-                          <a:solidFill>
-                            <a:srgbClr val="333333"/>
-                          </a:solidFill>
-                        </a:defRPr>
-                      </a:pPr>
-                      <a:r>
-                        <a:t>Every key-auth SFTP call site (modern pattern)</a:t>
-                      </a:r>
-                    </a:p>
-                  </a:txBody>
-                  <a:tcPr>
-                    <a:solidFill>
-                      <a:srgbClr val="FFFFFF"/>
-                    </a:solidFill>
-                  </a:tcPr>
-                </a:tc>
-                <a:tc>
-                  <a:txBody>
-                    <a:bodyPr/>
-                    <a:lstStyle/>
-                    <a:p>
-                      <a:pPr>
-                        <a:defRPr sz="1200">
-                          <a:solidFill>
-                            <a:srgbClr val="333333"/>
-                          </a:solidFill>
-                        </a:defRPr>
-                      </a:pPr>
-                      <a:r>
-                        <a:t>9 / 6</a:t>
-                      </a:r>
-                    </a:p>
-                  </a:txBody>
-                  <a:tcPr>
-                    <a:solidFill>
-                      <a:srgbClr val="FFFFFF"/>
-                    </a:solidFill>
-                  </a:tcPr>
-                </a:tc>
-              </a:tr>
-              <a:tr h="411480">
-                <a:tc>
-                  <a:txBody>
-                    <a:bodyPr/>
-                    <a:lstStyle/>
-                    <a:p>
-                      <a:pPr>
-                        <a:defRPr sz="1200">
-                          <a:solidFill>
-                            <a:srgbClr val="333333"/>
-                          </a:solidFill>
-                        </a:defRPr>
-                      </a:pPr>
-                      <a:r>
-                        <a:t>FTP_PSWD</a:t>
-                      </a:r>
-                    </a:p>
-                  </a:txBody>
-                  <a:tcPr>
-                    <a:solidFill>
-                      <a:srgbClr val="F0F2F7"/>
-                    </a:solidFill>
-                  </a:tcPr>
-                </a:tc>
-                <a:tc>
-                  <a:txBody>
-                    <a:bodyPr/>
-                    <a:lstStyle/>
-                    <a:p>
-                      <a:pPr>
-                        <a:defRPr sz="1200">
-                          <a:solidFill>
-                            <a:srgbClr val="333333"/>
-                          </a:solidFill>
-                        </a:defRPr>
-                      </a:pPr>
-                      <a:r>
-                        <a:t>Every password-auth SFTP call site (legacy)</a:t>
-                      </a:r>
-                    </a:p>
-                  </a:txBody>
-                  <a:tcPr>
-                    <a:solidFill>
-                      <a:srgbClr val="F0F2F7"/>
-                    </a:solidFill>
-                  </a:tcPr>
-                </a:tc>
-                <a:tc>
-                  <a:txBody>
-                    <a:bodyPr/>
-                    <a:lstStyle/>
-                    <a:p>
-                      <a:pPr>
-                        <a:defRPr sz="1200">
-                          <a:solidFill>
-                            <a:srgbClr val="333333"/>
-                          </a:solidFill>
-                        </a:defRPr>
-                      </a:pPr>
-                      <a:r>
-                        <a:t>11 / 5</a:t>
-                      </a:r>
-                    </a:p>
-                  </a:txBody>
-                  <a:tcPr>
-                    <a:solidFill>
-                      <a:srgbClr val="F0F2F7"/>
-                    </a:solidFill>
-                  </a:tcPr>
-                </a:tc>
-              </a:tr>
-              <a:tr h="411480">
-                <a:tc>
-                  <a:txBody>
-                    <a:bodyPr/>
-                    <a:lstStyle/>
-                    <a:p>
-                      <a:pPr>
-                        <a:defRPr sz="1200">
-                          <a:solidFill>
-                            <a:srgbClr val="333333"/>
-                          </a:solidFill>
-                        </a:defRPr>
-                      </a:pPr>
-                      <a:r>
-                        <a:t>_FROM_SFTP</a:t>
-                      </a:r>
-                    </a:p>
-                  </a:txBody>
-                  <a:tcPr>
-                    <a:solidFill>
-                      <a:srgbClr val="FFFFFF"/>
-                    </a:solidFill>
-                  </a:tcPr>
-                </a:tc>
-                <a:tc>
-                  <a:txBody>
-                    <a:bodyPr/>
-                    <a:lstStyle/>
-                    <a:p>
-                      <a:pPr>
-                        <a:defRPr sz="1200">
-                          <a:solidFill>
-                            <a:srgbClr val="333333"/>
-                          </a:solidFill>
-                        </a:defRPr>
-                      </a:pPr>
-                      <a:r>
-                        <a:t>Wrapper FMs / forms with FROM naming</a:t>
-                      </a:r>
-                    </a:p>
-                  </a:txBody>
-                  <a:tcPr>
-                    <a:solidFill>
-                      <a:srgbClr val="FFFFFF"/>
-                    </a:solidFill>
-                  </a:tcPr>
-                </a:tc>
-                <a:tc>
-                  <a:txBody>
-                    <a:bodyPr/>
-                    <a:lstStyle/>
-                    <a:p>
-                      <a:pPr>
-                        <a:defRPr sz="1200">
-                          <a:solidFill>
-                            <a:srgbClr val="333333"/>
-                          </a:solidFill>
-                        </a:defRPr>
-                      </a:pPr>
-                      <a:r>
-                        <a:t>10 / 6</a:t>
-                      </a:r>
-                    </a:p>
-                  </a:txBody>
-                  <a:tcPr>
-                    <a:solidFill>
-                      <a:srgbClr val="FFFFFF"/>
-                    </a:solidFill>
-                  </a:tcPr>
-                </a:tc>
-              </a:tr>
-              <a:tr h="411480">
-                <a:tc>
-                  <a:txBody>
-                    <a:bodyPr/>
-                    <a:lstStyle/>
-                    <a:p>
-                      <a:pPr>
-                        <a:defRPr sz="1200">
-                          <a:solidFill>
-                            <a:srgbClr val="333333"/>
-                          </a:solidFill>
-                        </a:defRPr>
-                      </a:pPr>
-                      <a:r>
-                        <a:t>_TO_SFTP</a:t>
-                      </a:r>
-                    </a:p>
-                  </a:txBody>
-                  <a:tcPr>
-                    <a:solidFill>
-                      <a:srgbClr val="F0F2F7"/>
-                    </a:solidFill>
-                  </a:tcPr>
-                </a:tc>
-                <a:tc>
-                  <a:txBody>
-                    <a:bodyPr/>
-                    <a:lstStyle/>
-                    <a:p>
-                      <a:pPr>
-                        <a:defRPr sz="1200">
-                          <a:solidFill>
-                            <a:srgbClr val="333333"/>
-                          </a:solidFill>
-                        </a:defRPr>
-                      </a:pPr>
-                      <a:r>
-                        <a:t>Wrapper FMs / forms with TO naming (catches ZDMS_SEND_FILE)</a:t>
-                      </a:r>
-                    </a:p>
-                  </a:txBody>
-                  <a:tcPr>
-                    <a:solidFill>
-                      <a:srgbClr val="F0F2F7"/>
-                    </a:solidFill>
-                  </a:tcPr>
-                </a:tc>
-                <a:tc>
-                  <a:txBody>
-                    <a:bodyPr/>
-                    <a:lstStyle/>
-                    <a:p>
-                      <a:pPr>
-                        <a:defRPr sz="1200">
-                          <a:solidFill>
-                            <a:srgbClr val="333333"/>
-                          </a:solidFill>
-                        </a:defRPr>
-                      </a:pPr>
-                      <a:r>
-                        <a:t>8 / 5</a:t>
-                      </a:r>
-                    </a:p>
-                  </a:txBody>
-                  <a:tcPr>
-                    <a:solidFill>
-                      <a:srgbClr val="F0F2F7"/>
-                    </a:solidFill>
-                  </a:tcPr>
-                </a:tc>
-              </a:tr>
-              <a:tr h="411480">
-                <a:tc>
-                  <a:txBody>
-                    <a:bodyPr/>
-                    <a:lstStyle/>
-                    <a:p>
-                      <a:pPr>
-                        <a:defRPr sz="1200">
-                          <a:solidFill>
-                            <a:srgbClr val="333333"/>
-                          </a:solidFill>
-                        </a:defRPr>
-                      </a:pPr>
-                      <a:r>
-                        <a:t>ZSFTP_</a:t>
-                      </a:r>
-                    </a:p>
-                  </a:txBody>
-                  <a:tcPr>
-                    <a:solidFill>
-                      <a:srgbClr val="FFFFFF"/>
-                    </a:solidFill>
-                  </a:tcPr>
-                </a:tc>
-                <a:tc>
-                  <a:txBody>
-                    <a:bodyPr/>
-                    <a:lstStyle/>
-                    <a:p>
-                      <a:pPr>
-                        <a:defRPr sz="1200">
-                          <a:solidFill>
-                            <a:srgbClr val="333333"/>
-                          </a:solidFill>
-                        </a:defRPr>
-                      </a:pPr>
-                      <a:r>
-                        <a:t>Every SM69-command-literal in code (gold sanity)</a:t>
-                      </a:r>
-                    </a:p>
-                  </a:txBody>
-                  <a:tcPr>
-                    <a:solidFill>
-                      <a:srgbClr val="FFFFFF"/>
-                    </a:solidFill>
-                  </a:tcPr>
-                </a:tc>
-                <a:tc>
-                  <a:txBody>
-                    <a:bodyPr/>
-                    <a:lstStyle/>
-                    <a:p>
-                      <a:pPr>
-                        <a:defRPr sz="1200">
-                          <a:solidFill>
-                            <a:srgbClr val="333333"/>
-                          </a:solidFill>
-                        </a:defRPr>
-                      </a:pPr>
-                      <a:r>
-                        <a:t>36 / 13</a:t>
-                      </a:r>
-                    </a:p>
-                  </a:txBody>
-                  <a:tcPr>
-                    <a:solidFill>
-                      <a:srgbClr val="FFFFFF"/>
-                    </a:solidFill>
-                  </a:tcPr>
-                </a:tc>
-              </a:tr>
-              <a:tr h="411480">
-                <a:tc>
-                  <a:txBody>
-                    <a:bodyPr/>
-                    <a:lstStyle/>
-                    <a:p>
-                      <a:pPr>
-                        <a:defRPr sz="1200">
-                          <a:solidFill>
-                            <a:srgbClr val="333333"/>
-                          </a:solidFill>
-                        </a:defRPr>
-                      </a:pPr>
-                      <a:r>
-                        <a:t>ZFTP_</a:t>
-                      </a:r>
-                    </a:p>
-                  </a:txBody>
-                  <a:tcPr>
-                    <a:solidFill>
-                      <a:srgbClr val="F0F2F7"/>
-                    </a:solidFill>
-                  </a:tcPr>
-                </a:tc>
-                <a:tc>
-                  <a:txBody>
-                    <a:bodyPr/>
-                    <a:lstStyle/>
-                    <a:p>
-                      <a:pPr>
-                        <a:defRPr sz="1200">
-                          <a:solidFill>
-                            <a:srgbClr val="333333"/>
-                          </a:solidFill>
-                        </a:defRPr>
-                      </a:pPr>
-                      <a:r>
-                        <a:t>Alternate SM69 prefix (catches BNP / EOB / 837 / JPM literals)</a:t>
-                      </a:r>
-                    </a:p>
-                  </a:txBody>
-                  <a:tcPr>
-                    <a:solidFill>
-                      <a:srgbClr val="F0F2F7"/>
-                    </a:solidFill>
-                  </a:tcPr>
-                </a:tc>
-                <a:tc>
-                  <a:txBody>
-                    <a:bodyPr/>
-                    <a:lstStyle/>
-                    <a:p>
-                      <a:pPr>
-                        <a:defRPr sz="1200">
-                          <a:solidFill>
-                            <a:srgbClr val="333333"/>
-                          </a:solidFill>
-                        </a:defRPr>
-                      </a:pPr>
-                      <a:r>
-                        <a:t>7 / 7</a:t>
-                      </a:r>
-                    </a:p>
-                  </a:txBody>
-                  <a:tcPr>
-                    <a:solidFill>
-                      <a:srgbClr val="F0F2F7"/>
-                    </a:solidFill>
-                  </a:tcPr>
-                </a:tc>
-              </a:tr>
-              <a:tr h="411480">
-                <a:tc>
-                  <a:txBody>
-                    <a:bodyPr/>
-                    <a:lstStyle/>
-                    <a:p>
-                      <a:pPr>
-                        <a:defRPr sz="1200">
-                          <a:solidFill>
-                            <a:srgbClr val="333333"/>
-                          </a:solidFill>
-                        </a:defRPr>
-                      </a:pPr>
-                      <a:r>
-                        <a:t>FUNCTION zerx_</a:t>
-                      </a:r>
-                    </a:p>
-                  </a:txBody>
-                  <a:tcPr>
-                    <a:solidFill>
-                      <a:srgbClr val="FFFFFF"/>
-                    </a:solidFill>
-                  </a:tcPr>
-                </a:tc>
-                <a:tc>
-                  <a:txBody>
-                    <a:bodyPr/>
-                    <a:lstStyle/>
-                    <a:p>
-                      <a:pPr>
-                        <a:defRPr sz="1200">
-                          <a:solidFill>
-                            <a:srgbClr val="333333"/>
-                          </a:solidFill>
-                        </a:defRPr>
-                      </a:pPr>
-                      <a:r>
-                        <a:t>ZERX FUGR FM enumeration</a:t>
-                      </a:r>
-                    </a:p>
-                  </a:txBody>
-                  <a:tcPr>
-                    <a:solidFill>
-                      <a:srgbClr val="FFFFFF"/>
-                    </a:solidFill>
-                  </a:tcPr>
-                </a:tc>
-                <a:tc>
-                  <a:txBody>
-                    <a:bodyPr/>
-                    <a:lstStyle/>
-                    <a:p>
-                      <a:pPr>
-                        <a:defRPr sz="1200">
-                          <a:solidFill>
-                            <a:srgbClr val="333333"/>
-                          </a:solidFill>
-                        </a:defRPr>
-                      </a:pPr>
-                      <a:r>
-                        <a:t>2 / 1</a:t>
-                      </a:r>
-                    </a:p>
-                  </a:txBody>
-                  <a:tcPr>
-                    <a:solidFill>
-                      <a:srgbClr val="FFFFFF"/>
-                    </a:solidFill>
-                  </a:tcPr>
-                </a:tc>
-              </a:tr>
-            </a:tbl>
-          </a:graphicData>
-        </a:graphic>
-      </p:graphicFrame>
-      <p:sp>
-        <p:nvSpPr>
-          <p:cNvPr id="5" name="TextBox 4"/>
-          <p:cNvSpPr txBox="1"/>
-          <p:nvPr/>
-        </p:nvSpPr>
-        <p:spPr>
-          <a:xfrm>
-            <a:off x="457200" y="5577840"/>
-            <a:ext cx="11247120" cy="1097280"/>
-          </a:xfrm>
-          <a:prstGeom prst="rect">
-            <a:avLst/>
-          </a:prstGeom>
-          <a:noFill/>
-        </p:spPr>
-        <p:txBody>
-          <a:bodyPr wrap="square">
-            <a:spAutoFit/>
-          </a:bodyPr>
-          <a:lstStyle/>
+              <a:t>For each of the 16 reports + 3 wrapper FUGRs, the replacement must:</a:t>
+            </a:r>
+          </a:p>
           <a:p>
             <a:pPr>
               <a:defRPr sz="1300" b="0">
@@ -4220,9 +3826,6 @@
                 </a:solidFill>
               </a:defRPr>
             </a:pPr>
-            <a:r>
-              <a:t>Confidence: ≈ 97% within Z001 + PROG/FUGR/CLAS. Residual 3%: dynamic CALL FUNCTION lv_fm, hardcoded SFTP without zfi_constants lookup, or code outside Z001.</a:t>
-            </a:r>
           </a:p>
           <a:p>
             <a:pPr>
@@ -4233,7 +3836,190 @@
               </a:defRPr>
             </a:pPr>
             <a:r>
-              <a:t>Rises to ≈ 99% if customer confirms: 'all SFTP code lives in Z001 and reads zfi_constants'.</a:t>
+              <a:t>1. Read the same zfi_constants rows (same pname, same fnam keys) — or provide a 1:1 shim.</a:t>
+            </a:r>
+          </a:p>
+          <a:p>
+            <a:pPr>
+              <a:defRPr sz="1300" b="0">
+                <a:solidFill>
+                  <a:srgbClr val="333333"/>
+                </a:solidFill>
+              </a:defRPr>
+            </a:pPr>
+          </a:p>
+          <a:p>
+            <a:pPr>
+              <a:defRPr sz="1300" b="0">
+                <a:solidFill>
+                  <a:srgbClr val="333333"/>
+                </a:solidFill>
+              </a:defRPr>
+            </a:pPr>
+            <a:r>
+              <a:t>2. Reach the same remote host with the same credentials.</a:t>
+            </a:r>
+          </a:p>
+          <a:p>
+            <a:pPr>
+              <a:defRPr sz="1300" b="0">
+                <a:solidFill>
+                  <a:srgbClr val="333333"/>
+                </a:solidFill>
+              </a:defRPr>
+            </a:pPr>
+          </a:p>
+          <a:p>
+            <a:pPr>
+              <a:defRPr sz="1300" b="0">
+                <a:solidFill>
+                  <a:srgbClr val="333333"/>
+                </a:solidFill>
+              </a:defRPr>
+            </a:pPr>
+            <a:r>
+              <a:t>3. Support both auth modes — key-based (PRIVATE_KEY_PATH + HOST_KEY + PASSPHRASE) AND password-based (FTP_PSWD).</a:t>
+            </a:r>
+          </a:p>
+          <a:p>
+            <a:pPr>
+              <a:defRPr sz="1300" b="0">
+                <a:solidFill>
+                  <a:srgbClr val="333333"/>
+                </a:solidFill>
+              </a:defRPr>
+            </a:pPr>
+          </a:p>
+          <a:p>
+            <a:pPr>
+              <a:defRPr sz="1300" b="0">
+                <a:solidFill>
+                  <a:srgbClr val="333333"/>
+                </a:solidFill>
+              </a:defRPr>
+            </a:pPr>
+            <a:r>
+              <a:t>4. Preserve PGP encryption wrap for ZSFTP_BNP_PARIBAS_WITH_PGP.</a:t>
+            </a:r>
+          </a:p>
+          <a:p>
+            <a:pPr>
+              <a:defRPr sz="1300" b="0">
+                <a:solidFill>
+                  <a:srgbClr val="333333"/>
+                </a:solidFill>
+              </a:defRPr>
+            </a:pPr>
+          </a:p>
+          <a:p>
+            <a:pPr>
+              <a:defRPr sz="1300" b="0">
+                <a:solidFill>
+                  <a:srgbClr val="333333"/>
+                </a:solidFill>
+              </a:defRPr>
+            </a:pPr>
+            <a:r>
+              <a:t>5. Return success/failure semantics compatible with caller code (exitcode, exec_protocol log).</a:t>
+            </a:r>
+          </a:p>
+          <a:p>
+            <a:pPr>
+              <a:defRPr sz="1300" b="0">
+                <a:solidFill>
+                  <a:srgbClr val="333333"/>
+                </a:solidFill>
+              </a:defRPr>
+            </a:pPr>
+          </a:p>
+          <a:p>
+            <a:pPr>
+              <a:defRPr sz="1300" b="0">
+                <a:solidFill>
+                  <a:srgbClr val="333333"/>
+                </a:solidFill>
+              </a:defRPr>
+            </a:pPr>
+            <a:r>
+              <a:t>6. Coordinate cutover for the 3 SHARED SM69 entries — both callers migrate atomically:</a:t>
+            </a:r>
+          </a:p>
+          <a:p>
+            <a:pPr>
+              <a:defRPr sz="1300" b="0">
+                <a:solidFill>
+                  <a:srgbClr val="333333"/>
+                </a:solidFill>
+              </a:defRPr>
+            </a:pPr>
+            <a:r>
+              <a:t>       • ZFTP_BNPP            ← ZSFTP_BNP_PARIBAS + ZSFTP_BNP_PARIBAS_WITH_PGP</a:t>
+            </a:r>
+          </a:p>
+          <a:p>
+            <a:pPr>
+              <a:defRPr sz="1300" b="0">
+                <a:solidFill>
+                  <a:srgbClr val="333333"/>
+                </a:solidFill>
+              </a:defRPr>
+            </a:pPr>
+            <a:r>
+              <a:t>       • ZSFTP_CERIDIAN_GET   ← ZFFIU_ACC_POST + ZSFTP_CERIDIAN_PULL</a:t>
+            </a:r>
+          </a:p>
+          <a:p>
+            <a:pPr>
+              <a:defRPr sz="1300" b="0">
+                <a:solidFill>
+                  <a:srgbClr val="333333"/>
+                </a:solidFill>
+              </a:defRPr>
+            </a:pPr>
+            <a:r>
+              <a:t>       • ZSFTP_DMS_GET / PUT  ← ZDMS_UPLOAD_FILES + ZDMS_REPLACE_FILES</a:t>
+            </a:r>
+          </a:p>
+          <a:p>
+            <a:pPr>
+              <a:defRPr sz="1300" b="0">
+                <a:solidFill>
+                  <a:srgbClr val="333333"/>
+                </a:solidFill>
+              </a:defRPr>
+            </a:pPr>
+          </a:p>
+          <a:p>
+            <a:pPr>
+              <a:defRPr sz="1300" b="0">
+                <a:solidFill>
+                  <a:srgbClr val="333333"/>
+                </a:solidFill>
+              </a:defRPr>
+            </a:pPr>
+            <a:r>
+              <a:t>7. Per-report end-to-end test: trigger the report; assert file landed (pull) or was delivered (push).</a:t>
+            </a:r>
+          </a:p>
+          <a:p>
+            <a:pPr>
+              <a:defRPr sz="1300" b="0">
+                <a:solidFill>
+                  <a:srgbClr val="333333"/>
+                </a:solidFill>
+              </a:defRPr>
+            </a:pPr>
+          </a:p>
+          <a:p>
+            <a:pPr>
+              <a:defRPr sz="1300" b="0">
+                <a:solidFill>
+                  <a:srgbClr val="333333"/>
+                </a:solidFill>
+              </a:defRPr>
+            </a:pPr>
+            <a:r>
+              <a:t>8. ZDMS_SEND_FILE / ZDMS_EXTRACT_DOCS_TO_SFTP — investigate dynamic/cross-package callers before declaring it dead.</a:t>
             </a:r>
           </a:p>
         </p:txBody>
@@ -4279,14 +4065,14 @@
           <a:lstStyle/>
           <a:p>
             <a:pPr>
-              <a:defRPr sz="2600" b="1">
+              <a:defRPr sz="2800" b="1">
                 <a:solidFill>
                   <a:srgbClr val="1F3A68"/>
                 </a:solidFill>
               </a:defRPr>
             </a:pPr>
             <a:r>
-              <a:t>Where SFTP parameter values come from</a:t>
+              <a:t>Completeness — 7 independent scans, no truncation</a:t>
             </a:r>
           </a:p>
         </p:txBody>
@@ -4299,8 +4085,8 @@
         </p:nvSpPr>
         <p:spPr>
           <a:xfrm>
-            <a:off x="457200" y="1005840"/>
-            <a:ext cx="11247120" cy="914400"/>
+            <a:off x="457200" y="1097280"/>
+            <a:ext cx="11247120" cy="640080"/>
           </a:xfrm>
           <a:prstGeom prst="rect">
             <a:avLst/>
@@ -4316,36 +4102,24 @@
             <a:pPr>
               <a:defRPr sz="1400" b="0">
                 <a:solidFill>
-                  <a:srgbClr val="C83636"/>
+                  <a:srgbClr val="333333"/>
                 </a:solidFill>
               </a:defRPr>
             </a:pPr>
             <a:r>
-              <a:t>All parameter values (credentials, hosts, ports, paths) live in table `zfi_constants`.</a:t>
+              <a:t>Seven SearchSource scans across Z001 + sub-packages, none truncated.</a:t>
             </a:r>
           </a:p>
           <a:p>
             <a:pPr>
               <a:defRPr sz="1400" b="0">
                 <a:solidFill>
-                  <a:srgbClr val="C83636"/>
+                  <a:srgbClr val="333333"/>
                 </a:solidFill>
               </a:defRPr>
             </a:pPr>
             <a:r>
-              <a:t>Each consumer reads a specific `pname` and pulls its fnam → fval pairs at runtime.</a:t>
-            </a:r>
-          </a:p>
-          <a:p>
-            <a:pPr>
-              <a:defRPr sz="1400" b="0">
-                <a:solidFill>
-                  <a:srgbClr val="C83636"/>
-                </a:solidFill>
-              </a:defRPr>
-            </a:pPr>
-            <a:r>
-              <a:t>Values are NOT shown here — fetch from SE16 / SecureStorage via the Basis team for migration handoff.</a:t>
+              <a:t>The 7th scan (`ZSFTP_` SM69-prefix) caught a missed wrapper FUGR — names don't always tell the truth.</a:t>
             </a:r>
           </a:p>
         </p:txBody>
@@ -4359,8 +4133,8 @@
           <p:nvPr/>
         </p:nvGraphicFramePr>
         <p:xfrm>
-          <a:off x="365760" y="2194560"/>
-          <a:ext cx="11430000" cy="4389120"/>
+          <a:off x="457200" y="2103120"/>
+          <a:ext cx="11247120" cy="3291840"/>
         </p:xfrm>
         <a:graphic>
           <a:graphicData uri="http://schemas.openxmlformats.org/drawingml/2006/table">
@@ -4369,25 +4143,25 @@
                 <a:tableStyleId>{5C22544A-7EE6-4342-B048-85BDC9FD1C3A}</a:tableStyleId>
               </a:tblPr>
               <a:tblGrid>
-                <a:gridCol w="3200400"/>
-                <a:gridCol w="2926080"/>
-                <a:gridCol w="5303520"/>
+                <a:gridCol w="2743200"/>
+                <a:gridCol w="6217920"/>
+                <a:gridCol w="2286000"/>
               </a:tblGrid>
-              <a:tr h="313508">
-                <a:tc>
-                  <a:txBody>
-                    <a:bodyPr/>
-                    <a:lstStyle/>
-                    <a:p>
-                      <a:pPr>
-                        <a:defRPr sz="1100" b="1">
+              <a:tr h="411480">
+                <a:tc>
+                  <a:txBody>
+                    <a:bodyPr/>
+                    <a:lstStyle/>
+                    <a:p>
+                      <a:pPr>
+                        <a:defRPr sz="1300" b="1">
                           <a:solidFill>
                             <a:srgbClr val="FFFFFF"/>
                           </a:solidFill>
                         </a:defRPr>
                       </a:pPr>
                       <a:r>
-                        <a:t>Consumer (PROG / FUGR)</a:t>
+                        <a:t>Scan keyword</a:t>
                       </a:r>
                     </a:p>
                   </a:txBody>
@@ -4403,14 +4177,14 @@
                     <a:lstStyle/>
                     <a:p>
                       <a:pPr>
-                        <a:defRPr sz="1100" b="1">
+                        <a:defRPr sz="1300" b="1">
                           <a:solidFill>
                             <a:srgbClr val="FFFFFF"/>
                           </a:solidFill>
                         </a:defRPr>
                       </a:pPr>
                       <a:r>
-                        <a:t>pname filter used</a:t>
+                        <a:t>Catches</a:t>
                       </a:r>
                     </a:p>
                   </a:txBody>
@@ -4426,14 +4200,14 @@
                     <a:lstStyle/>
                     <a:p>
                       <a:pPr>
-                        <a:defRPr sz="1100" b="1">
+                        <a:defRPr sz="1300" b="1">
                           <a:solidFill>
                             <a:srgbClr val="FFFFFF"/>
                           </a:solidFill>
                         </a:defRPr>
                       </a:pPr>
                       <a:r>
-                        <a:t>Key fnam fields read</a:t>
+                        <a:t>Hits / objects</a:t>
                       </a:r>
                     </a:p>
                   </a:txBody>
@@ -4444,67 +4218,67 @@
                   </a:tcPr>
                 </a:tc>
               </a:tr>
-              <a:tr h="313508">
-                <a:tc>
-                  <a:txBody>
-                    <a:bodyPr/>
-                    <a:lstStyle/>
-                    <a:p>
-                      <a:pPr>
-                        <a:defRPr sz="1000">
-                          <a:solidFill>
-                            <a:srgbClr val="333333"/>
-                          </a:solidFill>
-                        </a:defRPr>
-                      </a:pPr>
-                      <a:r>
-                        <a:t>ZSFTP_CITI_PULL</a:t>
-                      </a:r>
-                    </a:p>
-                  </a:txBody>
-                  <a:tcPr>
-                    <a:solidFill>
-                      <a:srgbClr val="FFFFFF"/>
-                    </a:solidFill>
-                  </a:tcPr>
-                </a:tc>
-                <a:tc>
-                  <a:txBody>
-                    <a:bodyPr/>
-                    <a:lstStyle/>
-                    <a:p>
-                      <a:pPr>
-                        <a:defRPr sz="1000">
-                          <a:solidFill>
-                            <a:srgbClr val="333333"/>
-                          </a:solidFill>
-                        </a:defRPr>
-                      </a:pPr>
-                      <a:r>
-                        <a:t>'ZSFTP_CITI'</a:t>
-                      </a:r>
-                    </a:p>
-                  </a:txBody>
-                  <a:tcPr>
-                    <a:solidFill>
-                      <a:srgbClr val="FFFFFF"/>
-                    </a:solidFill>
-                  </a:tcPr>
-                </a:tc>
-                <a:tc>
-                  <a:txBody>
-                    <a:bodyPr/>
-                    <a:lstStyle/>
-                    <a:p>
-                      <a:pPr>
-                        <a:defRPr sz="1000">
-                          <a:solidFill>
-                            <a:srgbClr val="333333"/>
-                          </a:solidFill>
-                        </a:defRPr>
-                      </a:pPr>
-                      <a:r>
-                        <a:t>FTP_USER, FTP_DOMAIN, HOST_KEY, PRIVATE_KEY_PATH, PASSPHRASE, SOURCE_FOLDER</a:t>
+              <a:tr h="411480">
+                <a:tc>
+                  <a:txBody>
+                    <a:bodyPr/>
+                    <a:lstStyle/>
+                    <a:p>
+                      <a:pPr>
+                        <a:defRPr sz="1200">
+                          <a:solidFill>
+                            <a:srgbClr val="333333"/>
+                          </a:solidFill>
+                        </a:defRPr>
+                      </a:pPr>
+                      <a:r>
+                        <a:t>PRIVATE_KEY_PATH</a:t>
+                      </a:r>
+                    </a:p>
+                  </a:txBody>
+                  <a:tcPr>
+                    <a:solidFill>
+                      <a:srgbClr val="FFFFFF"/>
+                    </a:solidFill>
+                  </a:tcPr>
+                </a:tc>
+                <a:tc>
+                  <a:txBody>
+                    <a:bodyPr/>
+                    <a:lstStyle/>
+                    <a:p>
+                      <a:pPr>
+                        <a:defRPr sz="1200">
+                          <a:solidFill>
+                            <a:srgbClr val="333333"/>
+                          </a:solidFill>
+                        </a:defRPr>
+                      </a:pPr>
+                      <a:r>
+                        <a:t>Every key-auth SFTP call site (modern pattern)</a:t>
+                      </a:r>
+                    </a:p>
+                  </a:txBody>
+                  <a:tcPr>
+                    <a:solidFill>
+                      <a:srgbClr val="FFFFFF"/>
+                    </a:solidFill>
+                  </a:tcPr>
+                </a:tc>
+                <a:tc>
+                  <a:txBody>
+                    <a:bodyPr/>
+                    <a:lstStyle/>
+                    <a:p>
+                      <a:pPr>
+                        <a:defRPr sz="1200">
+                          <a:solidFill>
+                            <a:srgbClr val="333333"/>
+                          </a:solidFill>
+                        </a:defRPr>
+                      </a:pPr>
+                      <a:r>
+                        <a:t>9 / 6</a:t>
                       </a:r>
                     </a:p>
                   </a:txBody>
@@ -4515,67 +4289,67 @@
                   </a:tcPr>
                 </a:tc>
               </a:tr>
-              <a:tr h="313508">
-                <a:tc>
-                  <a:txBody>
-                    <a:bodyPr/>
-                    <a:lstStyle/>
-                    <a:p>
-                      <a:pPr>
-                        <a:defRPr sz="1000">
-                          <a:solidFill>
-                            <a:srgbClr val="333333"/>
-                          </a:solidFill>
-                        </a:defRPr>
-                      </a:pPr>
-                      <a:r>
-                        <a:t>ZSFTP_CITI_SEND</a:t>
-                      </a:r>
-                    </a:p>
-                  </a:txBody>
-                  <a:tcPr>
-                    <a:solidFill>
-                      <a:srgbClr val="F0F2F7"/>
-                    </a:solidFill>
-                  </a:tcPr>
-                </a:tc>
-                <a:tc>
-                  <a:txBody>
-                    <a:bodyPr/>
-                    <a:lstStyle/>
-                    <a:p>
-                      <a:pPr>
-                        <a:defRPr sz="1000">
-                          <a:solidFill>
-                            <a:srgbClr val="333333"/>
-                          </a:solidFill>
-                        </a:defRPr>
-                      </a:pPr>
-                      <a:r>
-                        <a:t>'ZSFTP_CITI_SEND'</a:t>
-                      </a:r>
-                    </a:p>
-                  </a:txBody>
-                  <a:tcPr>
-                    <a:solidFill>
-                      <a:srgbClr val="F0F2F7"/>
-                    </a:solidFill>
-                  </a:tcPr>
-                </a:tc>
-                <a:tc>
-                  <a:txBody>
-                    <a:bodyPr/>
-                    <a:lstStyle/>
-                    <a:p>
-                      <a:pPr>
-                        <a:defRPr sz="1000">
-                          <a:solidFill>
-                            <a:srgbClr val="333333"/>
-                          </a:solidFill>
-                        </a:defRPr>
-                      </a:pPr>
-                      <a:r>
-                        <a:t>(same shape as ZSFTP_CITI)</a:t>
+              <a:tr h="411480">
+                <a:tc>
+                  <a:txBody>
+                    <a:bodyPr/>
+                    <a:lstStyle/>
+                    <a:p>
+                      <a:pPr>
+                        <a:defRPr sz="1200">
+                          <a:solidFill>
+                            <a:srgbClr val="333333"/>
+                          </a:solidFill>
+                        </a:defRPr>
+                      </a:pPr>
+                      <a:r>
+                        <a:t>FTP_PSWD</a:t>
+                      </a:r>
+                    </a:p>
+                  </a:txBody>
+                  <a:tcPr>
+                    <a:solidFill>
+                      <a:srgbClr val="F0F2F7"/>
+                    </a:solidFill>
+                  </a:tcPr>
+                </a:tc>
+                <a:tc>
+                  <a:txBody>
+                    <a:bodyPr/>
+                    <a:lstStyle/>
+                    <a:p>
+                      <a:pPr>
+                        <a:defRPr sz="1200">
+                          <a:solidFill>
+                            <a:srgbClr val="333333"/>
+                          </a:solidFill>
+                        </a:defRPr>
+                      </a:pPr>
+                      <a:r>
+                        <a:t>Every password-auth SFTP call site (legacy)</a:t>
+                      </a:r>
+                    </a:p>
+                  </a:txBody>
+                  <a:tcPr>
+                    <a:solidFill>
+                      <a:srgbClr val="F0F2F7"/>
+                    </a:solidFill>
+                  </a:tcPr>
+                </a:tc>
+                <a:tc>
+                  <a:txBody>
+                    <a:bodyPr/>
+                    <a:lstStyle/>
+                    <a:p>
+                      <a:pPr>
+                        <a:defRPr sz="1200">
+                          <a:solidFill>
+                            <a:srgbClr val="333333"/>
+                          </a:solidFill>
+                        </a:defRPr>
+                      </a:pPr>
+                      <a:r>
+                        <a:t>11 / 5</a:t>
                       </a:r>
                     </a:p>
                   </a:txBody>
@@ -4586,67 +4360,67 @@
                   </a:tcPr>
                 </a:tc>
               </a:tr>
-              <a:tr h="313508">
-                <a:tc>
-                  <a:txBody>
-                    <a:bodyPr/>
-                    <a:lstStyle/>
-                    <a:p>
-                      <a:pPr>
-                        <a:defRPr sz="1000">
-                          <a:solidFill>
-                            <a:srgbClr val="333333"/>
-                          </a:solidFill>
-                        </a:defRPr>
-                      </a:pPr>
-                      <a:r>
-                        <a:t>ZSFTP_BNP_PARIBAS_PULL</a:t>
-                      </a:r>
-                    </a:p>
-                  </a:txBody>
-                  <a:tcPr>
-                    <a:solidFill>
-                      <a:srgbClr val="FFFFFF"/>
-                    </a:solidFill>
-                  </a:tcPr>
-                </a:tc>
-                <a:tc>
-                  <a:txBody>
-                    <a:bodyPr/>
-                    <a:lstStyle/>
-                    <a:p>
-                      <a:pPr>
-                        <a:defRPr sz="1000">
-                          <a:solidFill>
-                            <a:srgbClr val="333333"/>
-                          </a:solidFill>
-                        </a:defRPr>
-                      </a:pPr>
-                      <a:r>
-                        <a:t>'ZSFTP_BNP_PARIBAS'</a:t>
-                      </a:r>
-                    </a:p>
-                  </a:txBody>
-                  <a:tcPr>
-                    <a:solidFill>
-                      <a:srgbClr val="FFFFFF"/>
-                    </a:solidFill>
-                  </a:tcPr>
-                </a:tc>
-                <a:tc>
-                  <a:txBody>
-                    <a:bodyPr/>
-                    <a:lstStyle/>
-                    <a:p>
-                      <a:pPr>
-                        <a:defRPr sz="1000">
-                          <a:solidFill>
-                            <a:srgbClr val="333333"/>
-                          </a:solidFill>
-                        </a:defRPr>
-                      </a:pPr>
-                      <a:r>
-                        <a:t>FTP_USER, FTP_PSWD, FTP_DOMAIN, FTP_PORT, FOLDER_PATH, FILE_EXT, HOST_KEY</a:t>
+              <a:tr h="411480">
+                <a:tc>
+                  <a:txBody>
+                    <a:bodyPr/>
+                    <a:lstStyle/>
+                    <a:p>
+                      <a:pPr>
+                        <a:defRPr sz="1200">
+                          <a:solidFill>
+                            <a:srgbClr val="333333"/>
+                          </a:solidFill>
+                        </a:defRPr>
+                      </a:pPr>
+                      <a:r>
+                        <a:t>_FROM_SFTP</a:t>
+                      </a:r>
+                    </a:p>
+                  </a:txBody>
+                  <a:tcPr>
+                    <a:solidFill>
+                      <a:srgbClr val="FFFFFF"/>
+                    </a:solidFill>
+                  </a:tcPr>
+                </a:tc>
+                <a:tc>
+                  <a:txBody>
+                    <a:bodyPr/>
+                    <a:lstStyle/>
+                    <a:p>
+                      <a:pPr>
+                        <a:defRPr sz="1200">
+                          <a:solidFill>
+                            <a:srgbClr val="333333"/>
+                          </a:solidFill>
+                        </a:defRPr>
+                      </a:pPr>
+                      <a:r>
+                        <a:t>Wrapper FMs / forms with FROM naming</a:t>
+                      </a:r>
+                    </a:p>
+                  </a:txBody>
+                  <a:tcPr>
+                    <a:solidFill>
+                      <a:srgbClr val="FFFFFF"/>
+                    </a:solidFill>
+                  </a:tcPr>
+                </a:tc>
+                <a:tc>
+                  <a:txBody>
+                    <a:bodyPr/>
+                    <a:lstStyle/>
+                    <a:p>
+                      <a:pPr>
+                        <a:defRPr sz="1200">
+                          <a:solidFill>
+                            <a:srgbClr val="333333"/>
+                          </a:solidFill>
+                        </a:defRPr>
+                      </a:pPr>
+                      <a:r>
+                        <a:t>10 / 6</a:t>
                       </a:r>
                     </a:p>
                   </a:txBody>
@@ -4657,67 +4431,67 @@
                   </a:tcPr>
                 </a:tc>
               </a:tr>
-              <a:tr h="313508">
-                <a:tc>
-                  <a:txBody>
-                    <a:bodyPr/>
-                    <a:lstStyle/>
-                    <a:p>
-                      <a:pPr>
-                        <a:defRPr sz="1000">
-                          <a:solidFill>
-                            <a:srgbClr val="333333"/>
-                          </a:solidFill>
-                        </a:defRPr>
-                      </a:pPr>
-                      <a:r>
-                        <a:t>ZSFTP_BNP_PARIBAS (push, password)</a:t>
-                      </a:r>
-                    </a:p>
-                  </a:txBody>
-                  <a:tcPr>
-                    <a:solidFill>
-                      <a:srgbClr val="F0F2F7"/>
-                    </a:solidFill>
-                  </a:tcPr>
-                </a:tc>
-                <a:tc>
-                  <a:txBody>
-                    <a:bodyPr/>
-                    <a:lstStyle/>
-                    <a:p>
-                      <a:pPr>
-                        <a:defRPr sz="1000">
-                          <a:solidFill>
-                            <a:srgbClr val="333333"/>
-                          </a:solidFill>
-                        </a:defRPr>
-                      </a:pPr>
-                      <a:r>
-                        <a:t>'ZSFTP_BNP_PARIBAS'</a:t>
-                      </a:r>
-                    </a:p>
-                  </a:txBody>
-                  <a:tcPr>
-                    <a:solidFill>
-                      <a:srgbClr val="F0F2F7"/>
-                    </a:solidFill>
-                  </a:tcPr>
-                </a:tc>
-                <a:tc>
-                  <a:txBody>
-                    <a:bodyPr/>
-                    <a:lstStyle/>
-                    <a:p>
-                      <a:pPr>
-                        <a:defRPr sz="1000">
-                          <a:solidFill>
-                            <a:srgbClr val="333333"/>
-                          </a:solidFill>
-                        </a:defRPr>
-                      </a:pPr>
-                      <a:r>
-                        <a:t>Same set as above (password auth)</a:t>
+              <a:tr h="411480">
+                <a:tc>
+                  <a:txBody>
+                    <a:bodyPr/>
+                    <a:lstStyle/>
+                    <a:p>
+                      <a:pPr>
+                        <a:defRPr sz="1200">
+                          <a:solidFill>
+                            <a:srgbClr val="333333"/>
+                          </a:solidFill>
+                        </a:defRPr>
+                      </a:pPr>
+                      <a:r>
+                        <a:t>_TO_SFTP</a:t>
+                      </a:r>
+                    </a:p>
+                  </a:txBody>
+                  <a:tcPr>
+                    <a:solidFill>
+                      <a:srgbClr val="F0F2F7"/>
+                    </a:solidFill>
+                  </a:tcPr>
+                </a:tc>
+                <a:tc>
+                  <a:txBody>
+                    <a:bodyPr/>
+                    <a:lstStyle/>
+                    <a:p>
+                      <a:pPr>
+                        <a:defRPr sz="1200">
+                          <a:solidFill>
+                            <a:srgbClr val="333333"/>
+                          </a:solidFill>
+                        </a:defRPr>
+                      </a:pPr>
+                      <a:r>
+                        <a:t>Wrapper FMs / forms with TO naming (catches ZDMS_SEND_FILE)</a:t>
+                      </a:r>
+                    </a:p>
+                  </a:txBody>
+                  <a:tcPr>
+                    <a:solidFill>
+                      <a:srgbClr val="F0F2F7"/>
+                    </a:solidFill>
+                  </a:tcPr>
+                </a:tc>
+                <a:tc>
+                  <a:txBody>
+                    <a:bodyPr/>
+                    <a:lstStyle/>
+                    <a:p>
+                      <a:pPr>
+                        <a:defRPr sz="1200">
+                          <a:solidFill>
+                            <a:srgbClr val="333333"/>
+                          </a:solidFill>
+                        </a:defRPr>
+                      </a:pPr>
+                      <a:r>
+                        <a:t>8 / 5</a:t>
                       </a:r>
                     </a:p>
                   </a:txBody>
@@ -4728,67 +4502,67 @@
                   </a:tcPr>
                 </a:tc>
               </a:tr>
-              <a:tr h="313508">
-                <a:tc>
-                  <a:txBody>
-                    <a:bodyPr/>
-                    <a:lstStyle/>
-                    <a:p>
-                      <a:pPr>
-                        <a:defRPr sz="1000">
-                          <a:solidFill>
-                            <a:srgbClr val="333333"/>
-                          </a:solidFill>
-                        </a:defRPr>
-                      </a:pPr>
-                      <a:r>
-                        <a:t>ZSFTP_BNP_PARIBAS_WITH_PGP</a:t>
-                      </a:r>
-                    </a:p>
-                  </a:txBody>
-                  <a:tcPr>
-                    <a:solidFill>
-                      <a:srgbClr val="FFFFFF"/>
-                    </a:solidFill>
-                  </a:tcPr>
-                </a:tc>
-                <a:tc>
-                  <a:txBody>
-                    <a:bodyPr/>
-                    <a:lstStyle/>
-                    <a:p>
-                      <a:pPr>
-                        <a:defRPr sz="1000">
-                          <a:solidFill>
-                            <a:srgbClr val="333333"/>
-                          </a:solidFill>
-                        </a:defRPr>
-                      </a:pPr>
-                      <a:r>
-                        <a:t>'ZSFTP_BNP_PARIBAS'</a:t>
-                      </a:r>
-                    </a:p>
-                  </a:txBody>
-                  <a:tcPr>
-                    <a:solidFill>
-                      <a:srgbClr val="FFFFFF"/>
-                    </a:solidFill>
-                  </a:tcPr>
-                </a:tc>
-                <a:tc>
-                  <a:txBody>
-                    <a:bodyPr/>
-                    <a:lstStyle/>
-                    <a:p>
-                      <a:pPr>
-                        <a:defRPr sz="1000">
-                          <a:solidFill>
-                            <a:srgbClr val="333333"/>
-                          </a:solidFill>
-                        </a:defRPr>
-                      </a:pPr>
-                      <a:r>
-                        <a:t>FTP_USER, FTP_DOMAIN, HOST_KEY, PRIVATE_KEY_PATH, PASSPHRASE, FOLDER_PATH (PGP layer added)</a:t>
+              <a:tr h="411480">
+                <a:tc>
+                  <a:txBody>
+                    <a:bodyPr/>
+                    <a:lstStyle/>
+                    <a:p>
+                      <a:pPr>
+                        <a:defRPr sz="1200">
+                          <a:solidFill>
+                            <a:srgbClr val="333333"/>
+                          </a:solidFill>
+                        </a:defRPr>
+                      </a:pPr>
+                      <a:r>
+                        <a:t>ZSFTP_</a:t>
+                      </a:r>
+                    </a:p>
+                  </a:txBody>
+                  <a:tcPr>
+                    <a:solidFill>
+                      <a:srgbClr val="FFFFFF"/>
+                    </a:solidFill>
+                  </a:tcPr>
+                </a:tc>
+                <a:tc>
+                  <a:txBody>
+                    <a:bodyPr/>
+                    <a:lstStyle/>
+                    <a:p>
+                      <a:pPr>
+                        <a:defRPr sz="1200">
+                          <a:solidFill>
+                            <a:srgbClr val="333333"/>
+                          </a:solidFill>
+                        </a:defRPr>
+                      </a:pPr>
+                      <a:r>
+                        <a:t>Every SM69-command-literal in code (gold sanity)</a:t>
+                      </a:r>
+                    </a:p>
+                  </a:txBody>
+                  <a:tcPr>
+                    <a:solidFill>
+                      <a:srgbClr val="FFFFFF"/>
+                    </a:solidFill>
+                  </a:tcPr>
+                </a:tc>
+                <a:tc>
+                  <a:txBody>
+                    <a:bodyPr/>
+                    <a:lstStyle/>
+                    <a:p>
+                      <a:pPr>
+                        <a:defRPr sz="1200">
+                          <a:solidFill>
+                            <a:srgbClr val="333333"/>
+                          </a:solidFill>
+                        </a:defRPr>
+                      </a:pPr>
+                      <a:r>
+                        <a:t>36 / 13</a:t>
                       </a:r>
                     </a:p>
                   </a:txBody>
@@ -4799,67 +4573,67 @@
                   </a:tcPr>
                 </a:tc>
               </a:tr>
-              <a:tr h="313508">
-                <a:tc>
-                  <a:txBody>
-                    <a:bodyPr/>
-                    <a:lstStyle/>
-                    <a:p>
-                      <a:pPr>
-                        <a:defRPr sz="1000">
-                          <a:solidFill>
-                            <a:srgbClr val="333333"/>
-                          </a:solidFill>
-                        </a:defRPr>
-                      </a:pPr>
-                      <a:r>
-                        <a:t>ZSFTP_CAPARIO_PULL</a:t>
-                      </a:r>
-                    </a:p>
-                  </a:txBody>
-                  <a:tcPr>
-                    <a:solidFill>
-                      <a:srgbClr val="F0F2F7"/>
-                    </a:solidFill>
-                  </a:tcPr>
-                </a:tc>
-                <a:tc>
-                  <a:txBody>
-                    <a:bodyPr/>
-                    <a:lstStyle/>
-                    <a:p>
-                      <a:pPr>
-                        <a:defRPr sz="1000">
-                          <a:solidFill>
-                            <a:srgbClr val="333333"/>
-                          </a:solidFill>
-                        </a:defRPr>
-                      </a:pPr>
-                      <a:r>
-                        <a:t>'ZSFTP_835_PULL'</a:t>
-                      </a:r>
-                    </a:p>
-                  </a:txBody>
-                  <a:tcPr>
-                    <a:solidFill>
-                      <a:srgbClr val="F0F2F7"/>
-                    </a:solidFill>
-                  </a:tcPr>
-                </a:tc>
-                <a:tc>
-                  <a:txBody>
-                    <a:bodyPr/>
-                    <a:lstStyle/>
-                    <a:p>
-                      <a:pPr>
-                        <a:defRPr sz="1000">
-                          <a:solidFill>
-                            <a:srgbClr val="333333"/>
-                          </a:solidFill>
-                        </a:defRPr>
-                      </a:pPr>
-                      <a:r>
-                        <a:t>Standard key-auth bundle + FOLDER_PATH + FILE_EXT</a:t>
+              <a:tr h="411480">
+                <a:tc>
+                  <a:txBody>
+                    <a:bodyPr/>
+                    <a:lstStyle/>
+                    <a:p>
+                      <a:pPr>
+                        <a:defRPr sz="1200">
+                          <a:solidFill>
+                            <a:srgbClr val="333333"/>
+                          </a:solidFill>
+                        </a:defRPr>
+                      </a:pPr>
+                      <a:r>
+                        <a:t>ZFTP_</a:t>
+                      </a:r>
+                    </a:p>
+                  </a:txBody>
+                  <a:tcPr>
+                    <a:solidFill>
+                      <a:srgbClr val="F0F2F7"/>
+                    </a:solidFill>
+                  </a:tcPr>
+                </a:tc>
+                <a:tc>
+                  <a:txBody>
+                    <a:bodyPr/>
+                    <a:lstStyle/>
+                    <a:p>
+                      <a:pPr>
+                        <a:defRPr sz="1200">
+                          <a:solidFill>
+                            <a:srgbClr val="333333"/>
+                          </a:solidFill>
+                        </a:defRPr>
+                      </a:pPr>
+                      <a:r>
+                        <a:t>Alternate SM69 prefix (catches BNP / EOB / 837 / JPM literals)</a:t>
+                      </a:r>
+                    </a:p>
+                  </a:txBody>
+                  <a:tcPr>
+                    <a:solidFill>
+                      <a:srgbClr val="F0F2F7"/>
+                    </a:solidFill>
+                  </a:tcPr>
+                </a:tc>
+                <a:tc>
+                  <a:txBody>
+                    <a:bodyPr/>
+                    <a:lstStyle/>
+                    <a:p>
+                      <a:pPr>
+                        <a:defRPr sz="1200">
+                          <a:solidFill>
+                            <a:srgbClr val="333333"/>
+                          </a:solidFill>
+                        </a:defRPr>
+                      </a:pPr>
+                      <a:r>
+                        <a:t>7 / 7</a:t>
                       </a:r>
                     </a:p>
                   </a:txBody>
@@ -4870,493 +4644,67 @@
                   </a:tcPr>
                 </a:tc>
               </a:tr>
-              <a:tr h="313508">
-                <a:tc>
-                  <a:txBody>
-                    <a:bodyPr/>
-                    <a:lstStyle/>
-                    <a:p>
-                      <a:pPr>
-                        <a:defRPr sz="1000">
-                          <a:solidFill>
-                            <a:srgbClr val="333333"/>
-                          </a:solidFill>
-                        </a:defRPr>
-                      </a:pPr>
-                      <a:r>
-                        <a:t>ZSFTP_CAPARIO</a:t>
-                      </a:r>
-                    </a:p>
-                  </a:txBody>
-                  <a:tcPr>
-                    <a:solidFill>
-                      <a:srgbClr val="FFFFFF"/>
-                    </a:solidFill>
-                  </a:tcPr>
-                </a:tc>
-                <a:tc>
-                  <a:txBody>
-                    <a:bodyPr/>
-                    <a:lstStyle/>
-                    <a:p>
-                      <a:pPr>
-                        <a:defRPr sz="1000">
-                          <a:solidFill>
-                            <a:srgbClr val="333333"/>
-                          </a:solidFill>
-                        </a:defRPr>
-                      </a:pPr>
-                      <a:r>
-                        <a:t>'ZSFTP_837'</a:t>
-                      </a:r>
-                    </a:p>
-                  </a:txBody>
-                  <a:tcPr>
-                    <a:solidFill>
-                      <a:srgbClr val="FFFFFF"/>
-                    </a:solidFill>
-                  </a:tcPr>
-                </a:tc>
-                <a:tc>
-                  <a:txBody>
-                    <a:bodyPr/>
-                    <a:lstStyle/>
-                    <a:p>
-                      <a:pPr>
-                        <a:defRPr sz="1000">
-                          <a:solidFill>
-                            <a:srgbClr val="333333"/>
-                          </a:solidFill>
-                        </a:defRPr>
-                      </a:pPr>
-                      <a:r>
-                        <a:t>Standard key-auth bundle (push)</a:t>
-                      </a:r>
-                    </a:p>
-                  </a:txBody>
-                  <a:tcPr>
-                    <a:solidFill>
-                      <a:srgbClr val="FFFFFF"/>
-                    </a:solidFill>
-                  </a:tcPr>
-                </a:tc>
-              </a:tr>
-              <a:tr h="313508">
-                <a:tc>
-                  <a:txBody>
-                    <a:bodyPr/>
-                    <a:lstStyle/>
-                    <a:p>
-                      <a:pPr>
-                        <a:defRPr sz="1000">
-                          <a:solidFill>
-                            <a:srgbClr val="333333"/>
-                          </a:solidFill>
-                        </a:defRPr>
-                      </a:pPr>
-                      <a:r>
-                        <a:t>ZSFTP_PATIENTCO_PULL</a:t>
-                      </a:r>
-                    </a:p>
-                  </a:txBody>
-                  <a:tcPr>
-                    <a:solidFill>
-                      <a:srgbClr val="F0F2F7"/>
-                    </a:solidFill>
-                  </a:tcPr>
-                </a:tc>
-                <a:tc>
-                  <a:txBody>
-                    <a:bodyPr/>
-                    <a:lstStyle/>
-                    <a:p>
-                      <a:pPr>
-                        <a:defRPr sz="1000">
-                          <a:solidFill>
-                            <a:srgbClr val="333333"/>
-                          </a:solidFill>
-                        </a:defRPr>
-                      </a:pPr>
-                      <a:r>
-                        <a:t>'ZSFTP_835_PATIENTCO'</a:t>
-                      </a:r>
-                    </a:p>
-                  </a:txBody>
-                  <a:tcPr>
-                    <a:solidFill>
-                      <a:srgbClr val="F0F2F7"/>
-                    </a:solidFill>
-                  </a:tcPr>
-                </a:tc>
-                <a:tc>
-                  <a:txBody>
-                    <a:bodyPr/>
-                    <a:lstStyle/>
-                    <a:p>
-                      <a:pPr>
-                        <a:defRPr sz="1000">
-                          <a:solidFill>
-                            <a:srgbClr val="333333"/>
-                          </a:solidFill>
-                        </a:defRPr>
-                      </a:pPr>
-                      <a:r>
-                        <a:t>FTP_USER, FTP_DOMAIN, HOST_KEY, FTP_PSWD (fallback), FOLDER_PATH, FILE_EXT</a:t>
-                      </a:r>
-                    </a:p>
-                  </a:txBody>
-                  <a:tcPr>
-                    <a:solidFill>
-                      <a:srgbClr val="F0F2F7"/>
-                    </a:solidFill>
-                  </a:tcPr>
-                </a:tc>
-              </a:tr>
-              <a:tr h="313508">
-                <a:tc>
-                  <a:txBody>
-                    <a:bodyPr/>
-                    <a:lstStyle/>
-                    <a:p>
-                      <a:pPr>
-                        <a:defRPr sz="1000">
-                          <a:solidFill>
-                            <a:srgbClr val="333333"/>
-                          </a:solidFill>
-                        </a:defRPr>
-                      </a:pPr>
-                      <a:r>
-                        <a:t>ZSFTP_JPM / ZSFTP_JPM_PULL</a:t>
-                      </a:r>
-                    </a:p>
-                  </a:txBody>
-                  <a:tcPr>
-                    <a:solidFill>
-                      <a:srgbClr val="FFFFFF"/>
-                    </a:solidFill>
-                  </a:tcPr>
-                </a:tc>
-                <a:tc>
-                  <a:txBody>
-                    <a:bodyPr/>
-                    <a:lstStyle/>
-                    <a:p>
-                      <a:pPr>
-                        <a:defRPr sz="1000">
-                          <a:solidFill>
-                            <a:srgbClr val="333333"/>
-                          </a:solidFill>
-                        </a:defRPr>
-                      </a:pPr>
-                      <a:r>
-                        <a:t>'ZSFTP_JPM'</a:t>
-                      </a:r>
-                    </a:p>
-                  </a:txBody>
-                  <a:tcPr>
-                    <a:solidFill>
-                      <a:srgbClr val="FFFFFF"/>
-                    </a:solidFill>
-                  </a:tcPr>
-                </a:tc>
-                <a:tc>
-                  <a:txBody>
-                    <a:bodyPr/>
-                    <a:lstStyle/>
-                    <a:p>
-                      <a:pPr>
-                        <a:defRPr sz="1000">
-                          <a:solidFill>
-                            <a:srgbClr val="333333"/>
-                          </a:solidFill>
-                        </a:defRPr>
-                      </a:pPr>
-                      <a:r>
-                        <a:t>Standard key-auth bundle</a:t>
-                      </a:r>
-                    </a:p>
-                  </a:txBody>
-                  <a:tcPr>
-                    <a:solidFill>
-                      <a:srgbClr val="FFFFFF"/>
-                    </a:solidFill>
-                  </a:tcPr>
-                </a:tc>
-              </a:tr>
-              <a:tr h="313508">
-                <a:tc>
-                  <a:txBody>
-                    <a:bodyPr/>
-                    <a:lstStyle/>
-                    <a:p>
-                      <a:pPr>
-                        <a:defRPr sz="1000">
-                          <a:solidFill>
-                            <a:srgbClr val="333333"/>
-                          </a:solidFill>
-                        </a:defRPr>
-                      </a:pPr>
-                      <a:r>
-                        <a:t>ZFFIU_ACC_POST / ZSFTP_CERIDIAN_PULL</a:t>
-                      </a:r>
-                    </a:p>
-                  </a:txBody>
-                  <a:tcPr>
-                    <a:solidFill>
-                      <a:srgbClr val="F0F2F7"/>
-                    </a:solidFill>
-                  </a:tcPr>
-                </a:tc>
-                <a:tc>
-                  <a:txBody>
-                    <a:bodyPr/>
-                    <a:lstStyle/>
-                    <a:p>
-                      <a:pPr>
-                        <a:defRPr sz="1000">
-                          <a:solidFill>
-                            <a:srgbClr val="333333"/>
-                          </a:solidFill>
-                        </a:defRPr>
-                      </a:pPr>
-                      <a:r>
-                        <a:t>'ZSFTP_CERIDIAN'</a:t>
-                      </a:r>
-                    </a:p>
-                  </a:txBody>
-                  <a:tcPr>
-                    <a:solidFill>
-                      <a:srgbClr val="F0F2F7"/>
-                    </a:solidFill>
-                  </a:tcPr>
-                </a:tc>
-                <a:tc>
-                  <a:txBody>
-                    <a:bodyPr/>
-                    <a:lstStyle/>
-                    <a:p>
-                      <a:pPr>
-                        <a:defRPr sz="1000">
-                          <a:solidFill>
-                            <a:srgbClr val="333333"/>
-                          </a:solidFill>
-                        </a:defRPr>
-                      </a:pPr>
-                      <a:r>
-                        <a:t>FTP_USER, FTP_DOMAIN, HOST_KEY, PASSPHRASE, SFTP_FILE_EXT, SOURCE_FOLDER</a:t>
-                      </a:r>
-                    </a:p>
-                  </a:txBody>
-                  <a:tcPr>
-                    <a:solidFill>
-                      <a:srgbClr val="F0F2F7"/>
-                    </a:solidFill>
-                  </a:tcPr>
-                </a:tc>
-              </a:tr>
-              <a:tr h="313508">
-                <a:tc>
-                  <a:txBody>
-                    <a:bodyPr/>
-                    <a:lstStyle/>
-                    <a:p>
-                      <a:pPr>
-                        <a:defRPr sz="1000">
-                          <a:solidFill>
-                            <a:srgbClr val="333333"/>
-                          </a:solidFill>
-                        </a:defRPr>
-                      </a:pPr>
-                      <a:r>
-                        <a:t>ZDMS_UPLOAD_FILES / ZDMS_REPLACE_FILES</a:t>
-                      </a:r>
-                    </a:p>
-                  </a:txBody>
-                  <a:tcPr>
-                    <a:solidFill>
-                      <a:srgbClr val="FFFFFF"/>
-                    </a:solidFill>
-                  </a:tcPr>
-                </a:tc>
-                <a:tc>
-                  <a:txBody>
-                    <a:bodyPr/>
-                    <a:lstStyle/>
-                    <a:p>
-                      <a:pPr>
-                        <a:defRPr sz="1000">
-                          <a:solidFill>
-                            <a:srgbClr val="333333"/>
-                          </a:solidFill>
-                        </a:defRPr>
-                      </a:pPr>
-                      <a:r>
-                        <a:t>(GET) 'ZSFTP_DMS_IN' + (PUT) 'ZSFTP_DMS_OUT'</a:t>
-                      </a:r>
-                    </a:p>
-                  </a:txBody>
-                  <a:tcPr>
-                    <a:solidFill>
-                      <a:srgbClr val="FFFFFF"/>
-                    </a:solidFill>
-                  </a:tcPr>
-                </a:tc>
-                <a:tc>
-                  <a:txBody>
-                    <a:bodyPr/>
-                    <a:lstStyle/>
-                    <a:p>
-                      <a:pPr>
-                        <a:defRPr sz="1000">
-                          <a:solidFill>
-                            <a:srgbClr val="333333"/>
-                          </a:solidFill>
-                        </a:defRPr>
-                      </a:pPr>
-                      <a:r>
-                        <a:t>Standard key-auth bundle + SOURCE_FOLDER + ZDEST_FOLD</a:t>
-                      </a:r>
-                    </a:p>
-                  </a:txBody>
-                  <a:tcPr>
-                    <a:solidFill>
-                      <a:srgbClr val="FFFFFF"/>
-                    </a:solidFill>
-                  </a:tcPr>
-                </a:tc>
-              </a:tr>
-              <a:tr h="313508">
-                <a:tc>
-                  <a:txBody>
-                    <a:bodyPr/>
-                    <a:lstStyle/>
-                    <a:p>
-                      <a:pPr>
-                        <a:defRPr sz="1000">
-                          <a:solidFill>
-                            <a:srgbClr val="333333"/>
-                          </a:solidFill>
-                        </a:defRPr>
-                      </a:pPr>
-                      <a:r>
-                        <a:t>ZSD_MEDICARE_PDF_PROCESS (via ZMEDI)</a:t>
-                      </a:r>
-                    </a:p>
-                  </a:txBody>
-                  <a:tcPr>
-                    <a:solidFill>
-                      <a:srgbClr val="F0F2F7"/>
-                    </a:solidFill>
-                  </a:tcPr>
-                </a:tc>
-                <a:tc>
-                  <a:txBody>
-                    <a:bodyPr/>
-                    <a:lstStyle/>
-                    <a:p>
-                      <a:pPr>
-                        <a:defRPr sz="1000">
-                          <a:solidFill>
-                            <a:srgbClr val="333333"/>
-                          </a:solidFill>
-                        </a:defRPr>
-                      </a:pPr>
-                      <a:r>
-                        <a:t>'ZSFTP_MEDICARE_IN' + 'ZSFTP_MEDICARE_OUT'</a:t>
-                      </a:r>
-                    </a:p>
-                  </a:txBody>
-                  <a:tcPr>
-                    <a:solidFill>
-                      <a:srgbClr val="F0F2F7"/>
-                    </a:solidFill>
-                  </a:tcPr>
-                </a:tc>
-                <a:tc>
-                  <a:txBody>
-                    <a:bodyPr/>
-                    <a:lstStyle/>
-                    <a:p>
-                      <a:pPr>
-                        <a:defRPr sz="1000">
-                          <a:solidFill>
-                            <a:srgbClr val="333333"/>
-                          </a:solidFill>
-                        </a:defRPr>
-                      </a:pPr>
-                      <a:r>
-                        <a:t>FTP_USER, PASSPHRASE, HOST_KEY, FTP_DOMAIN, PRIVATE_KEY_PATH, SOURCE_PATH, ZDEST_FOLD</a:t>
-                      </a:r>
-                    </a:p>
-                  </a:txBody>
-                  <a:tcPr>
-                    <a:solidFill>
-                      <a:srgbClr val="F0F2F7"/>
-                    </a:solidFill>
-                  </a:tcPr>
-                </a:tc>
-              </a:tr>
-              <a:tr h="313516">
-                <a:tc>
-                  <a:txBody>
-                    <a:bodyPr/>
-                    <a:lstStyle/>
-                    <a:p>
-                      <a:pPr>
-                        <a:defRPr sz="1000">
-                          <a:solidFill>
-                            <a:srgbClr val="333333"/>
-                          </a:solidFill>
-                        </a:defRPr>
-                      </a:pPr>
-                      <a:r>
-                        <a:t>ZSD_ERX_DMS_FILE_PROCESS (via ZERX)</a:t>
-                      </a:r>
-                    </a:p>
-                  </a:txBody>
-                  <a:tcPr>
-                    <a:solidFill>
-                      <a:srgbClr val="FFFFFF"/>
-                    </a:solidFill>
-                  </a:tcPr>
-                </a:tc>
-                <a:tc>
-                  <a:txBody>
-                    <a:bodyPr/>
-                    <a:lstStyle/>
-                    <a:p>
-                      <a:pPr>
-                        <a:defRPr sz="1000">
-                          <a:solidFill>
-                            <a:srgbClr val="333333"/>
-                          </a:solidFill>
-                        </a:defRPr>
-                      </a:pPr>
-                      <a:r>
-                        <a:t>(via ZERX wrapper FUGR)</a:t>
-                      </a:r>
-                    </a:p>
-                  </a:txBody>
-                  <a:tcPr>
-                    <a:solidFill>
-                      <a:srgbClr val="FFFFFF"/>
-                    </a:solidFill>
-                  </a:tcPr>
-                </a:tc>
-                <a:tc>
-                  <a:txBody>
-                    <a:bodyPr/>
-                    <a:lstStyle/>
-                    <a:p>
-                      <a:pPr>
-                        <a:defRPr sz="1000">
-                          <a:solidFill>
-                            <a:srgbClr val="333333"/>
-                          </a:solidFill>
-                        </a:defRPr>
-                      </a:pPr>
-                      <a:r>
-                        <a:t>Standard key-auth bundle</a:t>
+              <a:tr h="411480">
+                <a:tc>
+                  <a:txBody>
+                    <a:bodyPr/>
+                    <a:lstStyle/>
+                    <a:p>
+                      <a:pPr>
+                        <a:defRPr sz="1200">
+                          <a:solidFill>
+                            <a:srgbClr val="333333"/>
+                          </a:solidFill>
+                        </a:defRPr>
+                      </a:pPr>
+                      <a:r>
+                        <a:t>FUNCTION zerx_</a:t>
+                      </a:r>
+                    </a:p>
+                  </a:txBody>
+                  <a:tcPr>
+                    <a:solidFill>
+                      <a:srgbClr val="FFFFFF"/>
+                    </a:solidFill>
+                  </a:tcPr>
+                </a:tc>
+                <a:tc>
+                  <a:txBody>
+                    <a:bodyPr/>
+                    <a:lstStyle/>
+                    <a:p>
+                      <a:pPr>
+                        <a:defRPr sz="1200">
+                          <a:solidFill>
+                            <a:srgbClr val="333333"/>
+                          </a:solidFill>
+                        </a:defRPr>
+                      </a:pPr>
+                      <a:r>
+                        <a:t>ZERX FUGR FM enumeration</a:t>
+                      </a:r>
+                    </a:p>
+                  </a:txBody>
+                  <a:tcPr>
+                    <a:solidFill>
+                      <a:srgbClr val="FFFFFF"/>
+                    </a:solidFill>
+                  </a:tcPr>
+                </a:tc>
+                <a:tc>
+                  <a:txBody>
+                    <a:bodyPr/>
+                    <a:lstStyle/>
+                    <a:p>
+                      <a:pPr>
+                        <a:defRPr sz="1200">
+                          <a:solidFill>
+                            <a:srgbClr val="333333"/>
+                          </a:solidFill>
+                        </a:defRPr>
+                      </a:pPr>
+                      <a:r>
+                        <a:t>2 / 1</a:t>
                       </a:r>
                     </a:p>
                   </a:txBody>
@@ -5379,8 +4727,8 @@
         </p:nvSpPr>
         <p:spPr>
           <a:xfrm>
-            <a:off x="457200" y="6675120"/>
-            <a:ext cx="11247120" cy="182880"/>
+            <a:off x="457200" y="5577840"/>
+            <a:ext cx="11247120" cy="1097280"/>
           </a:xfrm>
           <a:prstGeom prst="rect">
             <a:avLst/>
@@ -5394,18 +4742,1080 @@
           <a:lstStyle/>
           <a:p>
             <a:pPr>
-              <a:defRPr sz="1000" b="1">
+              <a:defRPr sz="1300" b="0">
+                <a:solidFill>
+                  <a:srgbClr val="333333"/>
+                </a:solidFill>
+              </a:defRPr>
+            </a:pPr>
+            <a:r>
+              <a:t>Confidence: ≈ 97% within Z001 + PROG/FUGR/CLAS. Residual 3%: dynamic CALL FUNCTION lv_fm, hardcoded SFTP without zfi_constants lookup, or code outside Z001.</a:t>
+            </a:r>
+          </a:p>
+          <a:p>
+            <a:pPr>
+              <a:defRPr sz="1300" b="0">
+                <a:solidFill>
+                  <a:srgbClr val="333333"/>
+                </a:solidFill>
+              </a:defRPr>
+            </a:pPr>
+            <a:r>
+              <a:t>Rises to ≈ 99% if customer confirms: 'all SFTP code lives in Z001 and reads zfi_constants'.</a:t>
+            </a:r>
+          </a:p>
+        </p:txBody>
+      </p:sp>
+    </p:spTree>
+  </p:cSld>
+  <p:clrMapOvr>
+    <a:masterClrMapping/>
+  </p:clrMapOvr>
+</p:sld>
+</file>
+
+<file path=ppt/slides/slide13.xml><?xml version="1.0" encoding="utf-8"?>
+<p:sld xmlns:a="http://schemas.openxmlformats.org/drawingml/2006/main" xmlns:p="http://schemas.openxmlformats.org/presentationml/2006/main" xmlns:r="http://schemas.openxmlformats.org/officeDocument/2006/relationships">
+  <p:cSld>
+    <p:spTree>
+      <p:nvGrpSpPr>
+        <p:cNvPr id="1" name=""/>
+        <p:cNvGrpSpPr/>
+        <p:nvPr/>
+      </p:nvGrpSpPr>
+      <p:grpSpPr/>
+      <p:sp>
+        <p:nvSpPr>
+          <p:cNvPr id="2" name="TextBox 1"/>
+          <p:cNvSpPr txBox="1"/>
+          <p:nvPr/>
+        </p:nvSpPr>
+        <p:spPr>
+          <a:xfrm>
+            <a:off x="457200" y="274320"/>
+            <a:ext cx="11247120" cy="822960"/>
+          </a:xfrm>
+          <a:prstGeom prst="rect">
+            <a:avLst/>
+          </a:prstGeom>
+          <a:noFill/>
+        </p:spPr>
+        <p:txBody>
+          <a:bodyPr wrap="none">
+            <a:spAutoFit/>
+          </a:bodyPr>
+          <a:lstStyle/>
+          <a:p>
+            <a:pPr>
+              <a:defRPr sz="2600" b="1">
                 <a:solidFill>
                   <a:srgbClr val="1F3A68"/>
                 </a:solidFill>
               </a:defRPr>
             </a:pPr>
             <a:r>
-              <a:t>Migration handoff: extract zfi_constants rows for these pnames into the new credential store; do not include the values in any code-review / analysis artifact.</a:t>
+              <a:t>SFTP credential schema — what each fnam means</a:t>
             </a:r>
           </a:p>
         </p:txBody>
       </p:sp>
+      <p:sp>
+        <p:nvSpPr>
+          <p:cNvPr id="3" name="TextBox 2"/>
+          <p:cNvSpPr txBox="1"/>
+          <p:nvPr/>
+        </p:nvSpPr>
+        <p:spPr>
+          <a:xfrm>
+            <a:off x="457200" y="1005840"/>
+            <a:ext cx="11247120" cy="640080"/>
+          </a:xfrm>
+          <a:prstGeom prst="rect">
+            <a:avLst/>
+          </a:prstGeom>
+          <a:noFill/>
+        </p:spPr>
+        <p:txBody>
+          <a:bodyPr wrap="square">
+            <a:spAutoFit/>
+          </a:bodyPr>
+          <a:lstStyle/>
+          <a:p>
+            <a:pPr>
+              <a:defRPr sz="1200" b="0">
+                <a:solidFill>
+                  <a:srgbClr val="333333"/>
+                </a:solidFill>
+              </a:defRPr>
+            </a:pPr>
+            <a:r>
+              <a:t>Each fnam below is a literal key in `READ TABLE i_constants WITH KEY fnam = '...'`. Below: what value it holds and how it's used in the SFTP shell command.</a:t>
+            </a:r>
+          </a:p>
+        </p:txBody>
+      </p:sp>
+      <p:graphicFrame>
+        <p:nvGraphicFramePr>
+          <p:cNvPr id="4" name="Table 3"/>
+          <p:cNvGraphicFramePr>
+            <a:graphicFrameLocks noGrp="1"/>
+          </p:cNvGraphicFramePr>
+          <p:nvPr/>
+        </p:nvGraphicFramePr>
+        <p:xfrm>
+          <a:off x="365760" y="1828800"/>
+          <a:ext cx="11430000" cy="4754880"/>
+        </p:xfrm>
+        <a:graphic>
+          <a:graphicData uri="http://schemas.openxmlformats.org/drawingml/2006/table">
+            <a:tbl>
+              <a:tblPr firstRow="1" bandRow="1">
+                <a:tableStyleId>{5C22544A-7EE6-4342-B048-85BDC9FD1C3A}</a:tableStyleId>
+              </a:tblPr>
+              <a:tblGrid>
+                <a:gridCol w="3017520"/>
+                <a:gridCol w="3931920"/>
+                <a:gridCol w="4480560"/>
+              </a:tblGrid>
+              <a:tr h="365760">
+                <a:tc>
+                  <a:txBody>
+                    <a:bodyPr/>
+                    <a:lstStyle/>
+                    <a:p>
+                      <a:pPr>
+                        <a:defRPr sz="1200" b="1">
+                          <a:solidFill>
+                            <a:srgbClr val="FFFFFF"/>
+                          </a:solidFill>
+                        </a:defRPr>
+                      </a:pPr>
+                      <a:r>
+                        <a:t>fnam (literal key)</a:t>
+                      </a:r>
+                    </a:p>
+                  </a:txBody>
+                  <a:tcPr>
+                    <a:solidFill>
+                      <a:srgbClr val="1F3A68"/>
+                    </a:solidFill>
+                  </a:tcPr>
+                </a:tc>
+                <a:tc>
+                  <a:txBody>
+                    <a:bodyPr/>
+                    <a:lstStyle/>
+                    <a:p>
+                      <a:pPr>
+                        <a:defRPr sz="1200" b="1">
+                          <a:solidFill>
+                            <a:srgbClr val="FFFFFF"/>
+                          </a:solidFill>
+                        </a:defRPr>
+                      </a:pPr>
+                      <a:r>
+                        <a:t>Holds</a:t>
+                      </a:r>
+                    </a:p>
+                  </a:txBody>
+                  <a:tcPr>
+                    <a:solidFill>
+                      <a:srgbClr val="1F3A68"/>
+                    </a:solidFill>
+                  </a:tcPr>
+                </a:tc>
+                <a:tc>
+                  <a:txBody>
+                    <a:bodyPr/>
+                    <a:lstStyle/>
+                    <a:p>
+                      <a:pPr>
+                        <a:defRPr sz="1200" b="1">
+                          <a:solidFill>
+                            <a:srgbClr val="FFFFFF"/>
+                          </a:solidFill>
+                        </a:defRPr>
+                      </a:pPr>
+                      <a:r>
+                        <a:t>Used as</a:t>
+                      </a:r>
+                    </a:p>
+                  </a:txBody>
+                  <a:tcPr>
+                    <a:solidFill>
+                      <a:srgbClr val="1F3A68"/>
+                    </a:solidFill>
+                  </a:tcPr>
+                </a:tc>
+              </a:tr>
+              <a:tr h="365760">
+                <a:tc>
+                  <a:txBody>
+                    <a:bodyPr/>
+                    <a:lstStyle/>
+                    <a:p>
+                      <a:pPr>
+                        <a:defRPr sz="1100">
+                          <a:solidFill>
+                            <a:srgbClr val="333333"/>
+                          </a:solidFill>
+                          <a:latin typeface="Consolas"/>
+                        </a:defRPr>
+                      </a:pPr>
+                      <a:r>
+                        <a:t>'FTP_USER'</a:t>
+                      </a:r>
+                    </a:p>
+                  </a:txBody>
+                  <a:tcPr>
+                    <a:solidFill>
+                      <a:srgbClr val="FFFFFF"/>
+                    </a:solidFill>
+                  </a:tcPr>
+                </a:tc>
+                <a:tc>
+                  <a:txBody>
+                    <a:bodyPr/>
+                    <a:lstStyle/>
+                    <a:p>
+                      <a:pPr>
+                        <a:defRPr sz="1100">
+                          <a:solidFill>
+                            <a:srgbClr val="333333"/>
+                          </a:solidFill>
+                        </a:defRPr>
+                      </a:pPr>
+                      <a:r>
+                        <a:t>SFTP username for the remote endpoint</a:t>
+                      </a:r>
+                    </a:p>
+                  </a:txBody>
+                  <a:tcPr>
+                    <a:solidFill>
+                      <a:srgbClr val="FFFFFF"/>
+                    </a:solidFill>
+                  </a:tcPr>
+                </a:tc>
+                <a:tc>
+                  <a:txBody>
+                    <a:bodyPr/>
+                    <a:lstStyle/>
+                    <a:p>
+                      <a:pPr>
+                        <a:defRPr sz="1100">
+                          <a:solidFill>
+                            <a:srgbClr val="333333"/>
+                          </a:solidFill>
+                        </a:defRPr>
+                      </a:pPr>
+                      <a:r>
+                        <a:t>Login user in the sftp/scp command</a:t>
+                      </a:r>
+                    </a:p>
+                  </a:txBody>
+                  <a:tcPr>
+                    <a:solidFill>
+                      <a:srgbClr val="FFFFFF"/>
+                    </a:solidFill>
+                  </a:tcPr>
+                </a:tc>
+              </a:tr>
+              <a:tr h="365760">
+                <a:tc>
+                  <a:txBody>
+                    <a:bodyPr/>
+                    <a:lstStyle/>
+                    <a:p>
+                      <a:pPr>
+                        <a:defRPr sz="1100">
+                          <a:solidFill>
+                            <a:srgbClr val="333333"/>
+                          </a:solidFill>
+                          <a:latin typeface="Consolas"/>
+                        </a:defRPr>
+                      </a:pPr>
+                      <a:r>
+                        <a:t>'FTP_PSWD'</a:t>
+                      </a:r>
+                    </a:p>
+                  </a:txBody>
+                  <a:tcPr>
+                    <a:solidFill>
+                      <a:srgbClr val="F0F2F7"/>
+                    </a:solidFill>
+                  </a:tcPr>
+                </a:tc>
+                <a:tc>
+                  <a:txBody>
+                    <a:bodyPr/>
+                    <a:lstStyle/>
+                    <a:p>
+                      <a:pPr>
+                        <a:defRPr sz="1100">
+                          <a:solidFill>
+                            <a:srgbClr val="333333"/>
+                          </a:solidFill>
+                        </a:defRPr>
+                      </a:pPr>
+                      <a:r>
+                        <a:t>Password (legacy/fallback auth)</a:t>
+                      </a:r>
+                    </a:p>
+                  </a:txBody>
+                  <a:tcPr>
+                    <a:solidFill>
+                      <a:srgbClr val="F0F2F7"/>
+                    </a:solidFill>
+                  </a:tcPr>
+                </a:tc>
+                <a:tc>
+                  <a:txBody>
+                    <a:bodyPr/>
+                    <a:lstStyle/>
+                    <a:p>
+                      <a:pPr>
+                        <a:defRPr sz="1100">
+                          <a:solidFill>
+                            <a:srgbClr val="333333"/>
+                          </a:solidFill>
+                        </a:defRPr>
+                      </a:pPr>
+                      <a:r>
+                        <a:t>Password component when key auth is not used</a:t>
+                      </a:r>
+                    </a:p>
+                  </a:txBody>
+                  <a:tcPr>
+                    <a:solidFill>
+                      <a:srgbClr val="F0F2F7"/>
+                    </a:solidFill>
+                  </a:tcPr>
+                </a:tc>
+              </a:tr>
+              <a:tr h="365760">
+                <a:tc>
+                  <a:txBody>
+                    <a:bodyPr/>
+                    <a:lstStyle/>
+                    <a:p>
+                      <a:pPr>
+                        <a:defRPr sz="1100">
+                          <a:solidFill>
+                            <a:srgbClr val="333333"/>
+                          </a:solidFill>
+                          <a:latin typeface="Consolas"/>
+                        </a:defRPr>
+                      </a:pPr>
+                      <a:r>
+                        <a:t>'FTP_DOMAIN'</a:t>
+                      </a:r>
+                    </a:p>
+                  </a:txBody>
+                  <a:tcPr>
+                    <a:solidFill>
+                      <a:srgbClr val="FFFFFF"/>
+                    </a:solidFill>
+                  </a:tcPr>
+                </a:tc>
+                <a:tc>
+                  <a:txBody>
+                    <a:bodyPr/>
+                    <a:lstStyle/>
+                    <a:p>
+                      <a:pPr>
+                        <a:defRPr sz="1100">
+                          <a:solidFill>
+                            <a:srgbClr val="333333"/>
+                          </a:solidFill>
+                        </a:defRPr>
+                      </a:pPr>
+                      <a:r>
+                        <a:t>Remote SFTP server hostname (FQDN)</a:t>
+                      </a:r>
+                    </a:p>
+                  </a:txBody>
+                  <a:tcPr>
+                    <a:solidFill>
+                      <a:srgbClr val="FFFFFF"/>
+                    </a:solidFill>
+                  </a:tcPr>
+                </a:tc>
+                <a:tc>
+                  <a:txBody>
+                    <a:bodyPr/>
+                    <a:lstStyle/>
+                    <a:p>
+                      <a:pPr>
+                        <a:defRPr sz="1100">
+                          <a:solidFill>
+                            <a:srgbClr val="333333"/>
+                          </a:solidFill>
+                        </a:defRPr>
+                      </a:pPr>
+                      <a:r>
+                        <a:t>Host portion of `user@host[:port]`</a:t>
+                      </a:r>
+                    </a:p>
+                  </a:txBody>
+                  <a:tcPr>
+                    <a:solidFill>
+                      <a:srgbClr val="FFFFFF"/>
+                    </a:solidFill>
+                  </a:tcPr>
+                </a:tc>
+              </a:tr>
+              <a:tr h="365760">
+                <a:tc>
+                  <a:txBody>
+                    <a:bodyPr/>
+                    <a:lstStyle/>
+                    <a:p>
+                      <a:pPr>
+                        <a:defRPr sz="1100">
+                          <a:solidFill>
+                            <a:srgbClr val="333333"/>
+                          </a:solidFill>
+                          <a:latin typeface="Consolas"/>
+                        </a:defRPr>
+                      </a:pPr>
+                      <a:r>
+                        <a:t>'FTP_PORT'</a:t>
+                      </a:r>
+                    </a:p>
+                  </a:txBody>
+                  <a:tcPr>
+                    <a:solidFill>
+                      <a:srgbClr val="F0F2F7"/>
+                    </a:solidFill>
+                  </a:tcPr>
+                </a:tc>
+                <a:tc>
+                  <a:txBody>
+                    <a:bodyPr/>
+                    <a:lstStyle/>
+                    <a:p>
+                      <a:pPr>
+                        <a:defRPr sz="1100">
+                          <a:solidFill>
+                            <a:srgbClr val="333333"/>
+                          </a:solidFill>
+                        </a:defRPr>
+                      </a:pPr>
+                      <a:r>
+                        <a:t>TCP port (default 22 if not set)</a:t>
+                      </a:r>
+                    </a:p>
+                  </a:txBody>
+                  <a:tcPr>
+                    <a:solidFill>
+                      <a:srgbClr val="F0F2F7"/>
+                    </a:solidFill>
+                  </a:tcPr>
+                </a:tc>
+                <a:tc>
+                  <a:txBody>
+                    <a:bodyPr/>
+                    <a:lstStyle/>
+                    <a:p>
+                      <a:pPr>
+                        <a:defRPr sz="1100">
+                          <a:solidFill>
+                            <a:srgbClr val="333333"/>
+                          </a:solidFill>
+                        </a:defRPr>
+                      </a:pPr>
+                      <a:r>
+                        <a:t>`:port` suffix after host</a:t>
+                      </a:r>
+                    </a:p>
+                  </a:txBody>
+                  <a:tcPr>
+                    <a:solidFill>
+                      <a:srgbClr val="F0F2F7"/>
+                    </a:solidFill>
+                  </a:tcPr>
+                </a:tc>
+              </a:tr>
+              <a:tr h="365760">
+                <a:tc>
+                  <a:txBody>
+                    <a:bodyPr/>
+                    <a:lstStyle/>
+                    <a:p>
+                      <a:pPr>
+                        <a:defRPr sz="1100">
+                          <a:solidFill>
+                            <a:srgbClr val="333333"/>
+                          </a:solidFill>
+                          <a:latin typeface="Consolas"/>
+                        </a:defRPr>
+                      </a:pPr>
+                      <a:r>
+                        <a:t>'HOST_KEY'</a:t>
+                      </a:r>
+                    </a:p>
+                  </a:txBody>
+                  <a:tcPr>
+                    <a:solidFill>
+                      <a:srgbClr val="FFFFFF"/>
+                    </a:solidFill>
+                  </a:tcPr>
+                </a:tc>
+                <a:tc>
+                  <a:txBody>
+                    <a:bodyPr/>
+                    <a:lstStyle/>
+                    <a:p>
+                      <a:pPr>
+                        <a:defRPr sz="1100">
+                          <a:solidFill>
+                            <a:srgbClr val="333333"/>
+                          </a:solidFill>
+                        </a:defRPr>
+                      </a:pPr>
+                      <a:r>
+                        <a:t>Server's host-key fingerprint (md5/sha)</a:t>
+                      </a:r>
+                    </a:p>
+                  </a:txBody>
+                  <a:tcPr>
+                    <a:solidFill>
+                      <a:srgbClr val="FFFFFF"/>
+                    </a:solidFill>
+                  </a:tcPr>
+                </a:tc>
+                <a:tc>
+                  <a:txBody>
+                    <a:bodyPr/>
+                    <a:lstStyle/>
+                    <a:p>
+                      <a:pPr>
+                        <a:defRPr sz="1100">
+                          <a:solidFill>
+                            <a:srgbClr val="333333"/>
+                          </a:solidFill>
+                        </a:defRPr>
+                      </a:pPr>
+                      <a:r>
+                        <a:t>Server identity verification flag for sftp client</a:t>
+                      </a:r>
+                    </a:p>
+                  </a:txBody>
+                  <a:tcPr>
+                    <a:solidFill>
+                      <a:srgbClr val="FFFFFF"/>
+                    </a:solidFill>
+                  </a:tcPr>
+                </a:tc>
+              </a:tr>
+              <a:tr h="365760">
+                <a:tc>
+                  <a:txBody>
+                    <a:bodyPr/>
+                    <a:lstStyle/>
+                    <a:p>
+                      <a:pPr>
+                        <a:defRPr sz="1100">
+                          <a:solidFill>
+                            <a:srgbClr val="333333"/>
+                          </a:solidFill>
+                          <a:latin typeface="Consolas"/>
+                        </a:defRPr>
+                      </a:pPr>
+                      <a:r>
+                        <a:t>'PRIVATE_KEY_PATH'</a:t>
+                      </a:r>
+                    </a:p>
+                  </a:txBody>
+                  <a:tcPr>
+                    <a:solidFill>
+                      <a:srgbClr val="F0F2F7"/>
+                    </a:solidFill>
+                  </a:tcPr>
+                </a:tc>
+                <a:tc>
+                  <a:txBody>
+                    <a:bodyPr/>
+                    <a:lstStyle/>
+                    <a:p>
+                      <a:pPr>
+                        <a:defRPr sz="1100">
+                          <a:solidFill>
+                            <a:srgbClr val="333333"/>
+                          </a:solidFill>
+                        </a:defRPr>
+                      </a:pPr>
+                      <a:r>
+                        <a:t>Path on SAP app server to the private key file</a:t>
+                      </a:r>
+                    </a:p>
+                  </a:txBody>
+                  <a:tcPr>
+                    <a:solidFill>
+                      <a:srgbClr val="F0F2F7"/>
+                    </a:solidFill>
+                  </a:tcPr>
+                </a:tc>
+                <a:tc>
+                  <a:txBody>
+                    <a:bodyPr/>
+                    <a:lstStyle/>
+                    <a:p>
+                      <a:pPr>
+                        <a:defRPr sz="1100">
+                          <a:solidFill>
+                            <a:srgbClr val="333333"/>
+                          </a:solidFill>
+                        </a:defRPr>
+                      </a:pPr>
+                      <a:r>
+                        <a:t>`-i &lt;path&gt;` to sftp / passed to the OS command</a:t>
+                      </a:r>
+                    </a:p>
+                  </a:txBody>
+                  <a:tcPr>
+                    <a:solidFill>
+                      <a:srgbClr val="F0F2F7"/>
+                    </a:solidFill>
+                  </a:tcPr>
+                </a:tc>
+              </a:tr>
+              <a:tr h="365760">
+                <a:tc>
+                  <a:txBody>
+                    <a:bodyPr/>
+                    <a:lstStyle/>
+                    <a:p>
+                      <a:pPr>
+                        <a:defRPr sz="1100">
+                          <a:solidFill>
+                            <a:srgbClr val="333333"/>
+                          </a:solidFill>
+                          <a:latin typeface="Consolas"/>
+                        </a:defRPr>
+                      </a:pPr>
+                      <a:r>
+                        <a:t>'PASSPHRASE'</a:t>
+                      </a:r>
+                    </a:p>
+                  </a:txBody>
+                  <a:tcPr>
+                    <a:solidFill>
+                      <a:srgbClr val="FFFFFF"/>
+                    </a:solidFill>
+                  </a:tcPr>
+                </a:tc>
+                <a:tc>
+                  <a:txBody>
+                    <a:bodyPr/>
+                    <a:lstStyle/>
+                    <a:p>
+                      <a:pPr>
+                        <a:defRPr sz="1100">
+                          <a:solidFill>
+                            <a:srgbClr val="333333"/>
+                          </a:solidFill>
+                        </a:defRPr>
+                      </a:pPr>
+                      <a:r>
+                        <a:t>Passphrase that unlocks PRIVATE_KEY_PATH</a:t>
+                      </a:r>
+                    </a:p>
+                  </a:txBody>
+                  <a:tcPr>
+                    <a:solidFill>
+                      <a:srgbClr val="FFFFFF"/>
+                    </a:solidFill>
+                  </a:tcPr>
+                </a:tc>
+                <a:tc>
+                  <a:txBody>
+                    <a:bodyPr/>
+                    <a:lstStyle/>
+                    <a:p>
+                      <a:pPr>
+                        <a:defRPr sz="1100">
+                          <a:solidFill>
+                            <a:srgbClr val="333333"/>
+                          </a:solidFill>
+                        </a:defRPr>
+                      </a:pPr>
+                      <a:r>
+                        <a:t>Decrypts the private key at runtime</a:t>
+                      </a:r>
+                    </a:p>
+                  </a:txBody>
+                  <a:tcPr>
+                    <a:solidFill>
+                      <a:srgbClr val="FFFFFF"/>
+                    </a:solidFill>
+                  </a:tcPr>
+                </a:tc>
+              </a:tr>
+              <a:tr h="365760">
+                <a:tc>
+                  <a:txBody>
+                    <a:bodyPr/>
+                    <a:lstStyle/>
+                    <a:p>
+                      <a:pPr>
+                        <a:defRPr sz="1100">
+                          <a:solidFill>
+                            <a:srgbClr val="333333"/>
+                          </a:solidFill>
+                          <a:latin typeface="Consolas"/>
+                        </a:defRPr>
+                      </a:pPr>
+                      <a:r>
+                        <a:t>'SOURCE_FOLDER' / 'SOURCE_PATH'</a:t>
+                      </a:r>
+                    </a:p>
+                  </a:txBody>
+                  <a:tcPr>
+                    <a:solidFill>
+                      <a:srgbClr val="F0F2F7"/>
+                    </a:solidFill>
+                  </a:tcPr>
+                </a:tc>
+                <a:tc>
+                  <a:txBody>
+                    <a:bodyPr/>
+                    <a:lstStyle/>
+                    <a:p>
+                      <a:pPr>
+                        <a:defRPr sz="1100">
+                          <a:solidFill>
+                            <a:srgbClr val="333333"/>
+                          </a:solidFill>
+                        </a:defRPr>
+                      </a:pPr>
+                      <a:r>
+                        <a:t>Remote folder on the SFTP server to read from</a:t>
+                      </a:r>
+                    </a:p>
+                  </a:txBody>
+                  <a:tcPr>
+                    <a:solidFill>
+                      <a:srgbClr val="F0F2F7"/>
+                    </a:solidFill>
+                  </a:tcPr>
+                </a:tc>
+                <a:tc>
+                  <a:txBody>
+                    <a:bodyPr/>
+                    <a:lstStyle/>
+                    <a:p>
+                      <a:pPr>
+                        <a:defRPr sz="1100">
+                          <a:solidFill>
+                            <a:srgbClr val="333333"/>
+                          </a:solidFill>
+                        </a:defRPr>
+                      </a:pPr>
+                      <a:r>
+                        <a:t>Source path argument in the sftp command</a:t>
+                      </a:r>
+                    </a:p>
+                  </a:txBody>
+                  <a:tcPr>
+                    <a:solidFill>
+                      <a:srgbClr val="F0F2F7"/>
+                    </a:solidFill>
+                  </a:tcPr>
+                </a:tc>
+              </a:tr>
+              <a:tr h="365760">
+                <a:tc>
+                  <a:txBody>
+                    <a:bodyPr/>
+                    <a:lstStyle/>
+                    <a:p>
+                      <a:pPr>
+                        <a:defRPr sz="1100">
+                          <a:solidFill>
+                            <a:srgbClr val="333333"/>
+                          </a:solidFill>
+                          <a:latin typeface="Consolas"/>
+                        </a:defRPr>
+                      </a:pPr>
+                      <a:r>
+                        <a:t>'FOLDER_PATH'</a:t>
+                      </a:r>
+                    </a:p>
+                  </a:txBody>
+                  <a:tcPr>
+                    <a:solidFill>
+                      <a:srgbClr val="FFFFFF"/>
+                    </a:solidFill>
+                  </a:tcPr>
+                </a:tc>
+                <a:tc>
+                  <a:txBody>
+                    <a:bodyPr/>
+                    <a:lstStyle/>
+                    <a:p>
+                      <a:pPr>
+                        <a:defRPr sz="1100">
+                          <a:solidFill>
+                            <a:srgbClr val="333333"/>
+                          </a:solidFill>
+                        </a:defRPr>
+                      </a:pPr>
+                      <a:r>
+                        <a:t>Local folder on SAP app server (AL11 path)</a:t>
+                      </a:r>
+                    </a:p>
+                  </a:txBody>
+                  <a:tcPr>
+                    <a:solidFill>
+                      <a:srgbClr val="FFFFFF"/>
+                    </a:solidFill>
+                  </a:tcPr>
+                </a:tc>
+                <a:tc>
+                  <a:txBody>
+                    <a:bodyPr/>
+                    <a:lstStyle/>
+                    <a:p>
+                      <a:pPr>
+                        <a:defRPr sz="1100">
+                          <a:solidFill>
+                            <a:srgbClr val="333333"/>
+                          </a:solidFill>
+                        </a:defRPr>
+                      </a:pPr>
+                      <a:r>
+                        <a:t>Destination for pull / source for push</a:t>
+                      </a:r>
+                    </a:p>
+                  </a:txBody>
+                  <a:tcPr>
+                    <a:solidFill>
+                      <a:srgbClr val="FFFFFF"/>
+                    </a:solidFill>
+                  </a:tcPr>
+                </a:tc>
+              </a:tr>
+              <a:tr h="365760">
+                <a:tc>
+                  <a:txBody>
+                    <a:bodyPr/>
+                    <a:lstStyle/>
+                    <a:p>
+                      <a:pPr>
+                        <a:defRPr sz="1100">
+                          <a:solidFill>
+                            <a:srgbClr val="333333"/>
+                          </a:solidFill>
+                          <a:latin typeface="Consolas"/>
+                        </a:defRPr>
+                      </a:pPr>
+                      <a:r>
+                        <a:t>'FILE_EXT' / 'SFTP_FILE_EXT' / 'ECS_FILE_EXT'</a:t>
+                      </a:r>
+                    </a:p>
+                  </a:txBody>
+                  <a:tcPr>
+                    <a:solidFill>
+                      <a:srgbClr val="F0F2F7"/>
+                    </a:solidFill>
+                  </a:tcPr>
+                </a:tc>
+                <a:tc>
+                  <a:txBody>
+                    <a:bodyPr/>
+                    <a:lstStyle/>
+                    <a:p>
+                      <a:pPr>
+                        <a:defRPr sz="1100">
+                          <a:solidFill>
+                            <a:srgbClr val="333333"/>
+                          </a:solidFill>
+                        </a:defRPr>
+                      </a:pPr>
+                      <a:r>
+                        <a:t>File-name pattern (e.g. *.csv, *.EDI)</a:t>
+                      </a:r>
+                    </a:p>
+                  </a:txBody>
+                  <a:tcPr>
+                    <a:solidFill>
+                      <a:srgbClr val="F0F2F7"/>
+                    </a:solidFill>
+                  </a:tcPr>
+                </a:tc>
+                <a:tc>
+                  <a:txBody>
+                    <a:bodyPr/>
+                    <a:lstStyle/>
+                    <a:p>
+                      <a:pPr>
+                        <a:defRPr sz="1100">
+                          <a:solidFill>
+                            <a:srgbClr val="333333"/>
+                          </a:solidFill>
+                        </a:defRPr>
+                      </a:pPr>
+                      <a:r>
+                        <a:t>Filter for which files to move</a:t>
+                      </a:r>
+                    </a:p>
+                  </a:txBody>
+                  <a:tcPr>
+                    <a:solidFill>
+                      <a:srgbClr val="F0F2F7"/>
+                    </a:solidFill>
+                  </a:tcPr>
+                </a:tc>
+              </a:tr>
+              <a:tr h="365760">
+                <a:tc>
+                  <a:txBody>
+                    <a:bodyPr/>
+                    <a:lstStyle/>
+                    <a:p>
+                      <a:pPr>
+                        <a:defRPr sz="1100">
+                          <a:solidFill>
+                            <a:srgbClr val="333333"/>
+                          </a:solidFill>
+                          <a:latin typeface="Consolas"/>
+                        </a:defRPr>
+                      </a:pPr>
+                      <a:r>
+                        <a:t>'ZDEST_FOLD' / 'DESTINATION_FOLDER'</a:t>
+                      </a:r>
+                    </a:p>
+                  </a:txBody>
+                  <a:tcPr>
+                    <a:solidFill>
+                      <a:srgbClr val="FFFFFF"/>
+                    </a:solidFill>
+                  </a:tcPr>
+                </a:tc>
+                <a:tc>
+                  <a:txBody>
+                    <a:bodyPr/>
+                    <a:lstStyle/>
+                    <a:p>
+                      <a:pPr>
+                        <a:defRPr sz="1100">
+                          <a:solidFill>
+                            <a:srgbClr val="333333"/>
+                          </a:solidFill>
+                        </a:defRPr>
+                      </a:pPr>
+                      <a:r>
+                        <a:t>Remote target folder for push operations</a:t>
+                      </a:r>
+                    </a:p>
+                  </a:txBody>
+                  <a:tcPr>
+                    <a:solidFill>
+                      <a:srgbClr val="FFFFFF"/>
+                    </a:solidFill>
+                  </a:tcPr>
+                </a:tc>
+                <a:tc>
+                  <a:txBody>
+                    <a:bodyPr/>
+                    <a:lstStyle/>
+                    <a:p>
+                      <a:pPr>
+                        <a:defRPr sz="1100">
+                          <a:solidFill>
+                            <a:srgbClr val="333333"/>
+                          </a:solidFill>
+                        </a:defRPr>
+                      </a:pPr>
+                      <a:r>
+                        <a:t>Destination path argument in the sftp command</a:t>
+                      </a:r>
+                    </a:p>
+                  </a:txBody>
+                  <a:tcPr>
+                    <a:solidFill>
+                      <a:srgbClr val="FFFFFF"/>
+                    </a:solidFill>
+                  </a:tcPr>
+                </a:tc>
+              </a:tr>
+              <a:tr h="365760">
+                <a:tc>
+                  <a:txBody>
+                    <a:bodyPr/>
+                    <a:lstStyle/>
+                    <a:p>
+                      <a:pPr>
+                        <a:defRPr sz="1100">
+                          <a:solidFill>
+                            <a:srgbClr val="333333"/>
+                          </a:solidFill>
+                          <a:latin typeface="Consolas"/>
+                        </a:defRPr>
+                      </a:pPr>
+                      <a:r>
+                        <a:t>'PUBLIC_KEY_ID' / 'PRIVATE_KEY_US' / 'PRIVATE_KEY_NONUS'</a:t>
+                      </a:r>
+                    </a:p>
+                  </a:txBody>
+                  <a:tcPr>
+                    <a:solidFill>
+                      <a:srgbClr val="F0F2F7"/>
+                    </a:solidFill>
+                  </a:tcPr>
+                </a:tc>
+                <a:tc>
+                  <a:txBody>
+                    <a:bodyPr/>
+                    <a:lstStyle/>
+                    <a:p>
+                      <a:pPr>
+                        <a:defRPr sz="1100">
+                          <a:solidFill>
+                            <a:srgbClr val="333333"/>
+                          </a:solidFill>
+                        </a:defRPr>
+                      </a:pPr>
+                      <a:r>
+                        <a:t>PGP key identifiers (BNP-PGP variant only)</a:t>
+                      </a:r>
+                    </a:p>
+                  </a:txBody>
+                  <a:tcPr>
+                    <a:solidFill>
+                      <a:srgbClr val="F0F2F7"/>
+                    </a:solidFill>
+                  </a:tcPr>
+                </a:tc>
+                <a:tc>
+                  <a:txBody>
+                    <a:bodyPr/>
+                    <a:lstStyle/>
+                    <a:p>
+                      <a:pPr>
+                        <a:defRPr sz="1100">
+                          <a:solidFill>
+                            <a:srgbClr val="333333"/>
+                          </a:solidFill>
+                        </a:defRPr>
+                      </a:pPr>
+                      <a:r>
+                        <a:t>PGP encryption layer added on top of SFTP</a:t>
+                      </a:r>
+                    </a:p>
+                  </a:txBody>
+                  <a:tcPr>
+                    <a:solidFill>
+                      <a:srgbClr val="F0F2F7"/>
+                    </a:solidFill>
+                  </a:tcPr>
+                </a:tc>
+              </a:tr>
+            </a:tbl>
+          </a:graphicData>
+        </a:graphic>
+      </p:graphicFrame>
     </p:spTree>
   </p:cSld>
   <p:clrMapOvr>
@@ -11073,14 +11483,14 @@
           <a:lstStyle/>
           <a:p>
             <a:pPr>
-              <a:defRPr sz="2800" b="1">
+              <a:defRPr sz="2600" b="1">
                 <a:solidFill>
                   <a:srgbClr val="1F3A68"/>
                 </a:solidFill>
               </a:defRPr>
             </a:pPr>
             <a:r>
-              <a:t>3 wrapper function groups — single point of credential binding</a:t>
+              <a:t>Where SFTP parameter values come from — literal SQL</a:t>
             </a:r>
           </a:p>
         </p:txBody>
@@ -11093,8 +11503,8 @@
         </p:nvSpPr>
         <p:spPr>
           <a:xfrm>
-            <a:off x="457200" y="1097280"/>
-            <a:ext cx="11247120" cy="731520"/>
+            <a:off x="457200" y="1005840"/>
+            <a:ext cx="11247120" cy="640080"/>
           </a:xfrm>
           <a:prstGeom prst="rect">
             <a:avLst/>
@@ -11108,41 +11518,103 @@
           <a:lstStyle/>
           <a:p>
             <a:pPr>
-              <a:defRPr sz="1400" b="0">
+              <a:defRPr sz="1200" b="0">
+                <a:solidFill>
+                  <a:srgbClr val="C83636"/>
+                </a:solidFill>
+              </a:defRPr>
+            </a:pPr>
+            <a:r>
+              <a:t>Each consumer runs essentially this shape, with `pname` filter changed per endpoint. Values live in `zfi_constants` rows on the SAP system.</a:t>
+            </a:r>
+          </a:p>
+        </p:txBody>
+      </p:sp>
+      <p:sp>
+        <p:nvSpPr>
+          <p:cNvPr id="4" name="TextBox 3"/>
+          <p:cNvSpPr txBox="1"/>
+          <p:nvPr/>
+        </p:nvSpPr>
+        <p:spPr>
+          <a:xfrm>
+            <a:off x="457200" y="1737360"/>
+            <a:ext cx="11247120" cy="1463040"/>
+          </a:xfrm>
+          <a:prstGeom prst="rect">
+            <a:avLst/>
+          </a:prstGeom>
+          <a:solidFill>
+            <a:srgbClr val="F0F2F7"/>
+          </a:solidFill>
+        </p:spPr>
+        <p:txBody>
+          <a:bodyPr wrap="square">
+            <a:spAutoFit/>
+          </a:bodyPr>
+          <a:lstStyle/>
+          <a:p>
+            <a:pPr>
+              <a:defRPr sz="1300" b="0">
                 <a:solidFill>
                   <a:srgbClr val="333333"/>
                 </a:solidFill>
+                <a:latin typeface="Consolas"/>
               </a:defRPr>
             </a:pPr>
             <a:r>
-              <a:t>Three FUGRs wrap SXPG_COMMAND_EXECUTE so callers stay clean of SFTP plumbing.</a:t>
+              <a:t>SELECT * FROM zfi_constants INTO TABLE i_constants</a:t>
             </a:r>
           </a:p>
           <a:p>
             <a:pPr>
-              <a:defRPr sz="1400" b="0">
+              <a:defRPr sz="1300" b="0">
                 <a:solidFill>
                   <a:srgbClr val="333333"/>
                 </a:solidFill>
+                <a:latin typeface="Consolas"/>
               </a:defRPr>
             </a:pPr>
             <a:r>
-              <a:t>Replace the wrapper internals once → every caller migrates as a side effect.</a:t>
+              <a:t>  WHERE pname = '&lt;consumer-specific pname&gt;'.</a:t>
+            </a:r>
+          </a:p>
+          <a:p>
+            <a:pPr>
+              <a:defRPr sz="1300" b="0">
+                <a:solidFill>
+                  <a:srgbClr val="333333"/>
+                </a:solidFill>
+                <a:latin typeface="Consolas"/>
+              </a:defRPr>
+            </a:pPr>
+          </a:p>
+          <a:p>
+            <a:pPr>
+              <a:defRPr sz="1300" b="0">
+                <a:solidFill>
+                  <a:srgbClr val="333333"/>
+                </a:solidFill>
+                <a:latin typeface="Consolas"/>
+              </a:defRPr>
+            </a:pPr>
+            <a:r>
+              <a:t>READ TABLE i_constants WITH KEY fnam = 'FTP_USER'.       " then 'FTP_DOMAIN', 'HOST_KEY', 'PRIVATE_KEY_PATH', ...</a:t>
             </a:r>
           </a:p>
         </p:txBody>
       </p:sp>
       <p:graphicFrame>
         <p:nvGraphicFramePr>
-          <p:cNvPr id="4" name="Table 3"/>
+          <p:cNvPr id="5" name="Table 4"/>
           <p:cNvGraphicFramePr>
             <a:graphicFrameLocks noGrp="1"/>
           </p:cNvGraphicFramePr>
           <p:nvPr/>
         </p:nvGraphicFramePr>
         <p:xfrm>
-          <a:off x="457200" y="2286000"/>
-          <a:ext cx="11247120" cy="3200400"/>
+          <a:off x="365760" y="3383280"/>
+          <a:ext cx="11430000" cy="3291840"/>
         </p:xfrm>
         <a:graphic>
           <a:graphicData uri="http://schemas.openxmlformats.org/drawingml/2006/table">
@@ -11151,26 +11623,25 @@
                 <a:tableStyleId>{5C22544A-7EE6-4342-B048-85BDC9FD1C3A}</a:tableStyleId>
               </a:tblPr>
               <a:tblGrid>
-                <a:gridCol w="1645920"/>
-                <a:gridCol w="2743200"/>
-                <a:gridCol w="3657600"/>
+                <a:gridCol w="3017520"/>
                 <a:gridCol w="3200400"/>
+                <a:gridCol w="5212080"/>
               </a:tblGrid>
-              <a:tr h="800100">
-                <a:tc>
-                  <a:txBody>
-                    <a:bodyPr/>
-                    <a:lstStyle/>
-                    <a:p>
-                      <a:pPr>
-                        <a:defRPr sz="1200" b="1">
+              <a:tr h="329184">
+                <a:tc>
+                  <a:txBody>
+                    <a:bodyPr/>
+                    <a:lstStyle/>
+                    <a:p>
+                      <a:pPr>
+                        <a:defRPr sz="1100" b="1">
                           <a:solidFill>
                             <a:srgbClr val="FFFFFF"/>
                           </a:solidFill>
                         </a:defRPr>
                       </a:pPr>
                       <a:r>
-                        <a:t>FUGR</a:t>
+                        <a:t>Consumer</a:t>
                       </a:r>
                     </a:p>
                   </a:txBody>
@@ -11186,14 +11657,14 @@
                     <a:lstStyle/>
                     <a:p>
                       <a:pPr>
-                        <a:defRPr sz="1200" b="1">
+                        <a:defRPr sz="1100" b="1">
                           <a:solidFill>
                             <a:srgbClr val="FFFFFF"/>
                           </a:solidFill>
                         </a:defRPr>
                       </a:pPr>
                       <a:r>
-                        <a:t>Description</a:t>
+                        <a:t>pname filter (literal)</a:t>
                       </a:r>
                     </a:p>
                   </a:txBody>
@@ -11209,14 +11680,14 @@
                     <a:lstStyle/>
                     <a:p>
                       <a:pPr>
-                        <a:defRPr sz="1200" b="1">
+                        <a:defRPr sz="1100" b="1">
                           <a:solidFill>
                             <a:srgbClr val="FFFFFF"/>
                           </a:solidFill>
                         </a:defRPr>
                       </a:pPr>
                       <a:r>
-                        <a:t>Wrapper function modules</a:t>
+                        <a:t>fnam keys read (subset shown)</a:t>
                       </a:r>
                     </a:p>
                   </a:txBody>
@@ -11226,114 +11697,70 @@
                     </a:solidFill>
                   </a:tcPr>
                 </a:tc>
-                <a:tc>
-                  <a:txBody>
-                    <a:bodyPr/>
-                    <a:lstStyle/>
-                    <a:p>
-                      <a:pPr>
-                        <a:defRPr sz="1200" b="1">
-                          <a:solidFill>
-                            <a:srgbClr val="FFFFFF"/>
-                          </a:solidFill>
-                        </a:defRPr>
-                      </a:pPr>
-                      <a:r>
-                        <a:t>Used by</a:t>
-                      </a:r>
-                    </a:p>
-                  </a:txBody>
-                  <a:tcPr>
-                    <a:solidFill>
-                      <a:srgbClr val="1F3A68"/>
-                    </a:solidFill>
-                  </a:tcPr>
-                </a:tc>
               </a:tr>
-              <a:tr h="800100">
-                <a:tc>
-                  <a:txBody>
-                    <a:bodyPr/>
-                    <a:lstStyle/>
-                    <a:p>
-                      <a:pPr>
-                        <a:defRPr sz="1200">
-                          <a:solidFill>
-                            <a:srgbClr val="333333"/>
-                          </a:solidFill>
-                        </a:defRPr>
-                      </a:pPr>
-                      <a:r>
-                        <a:t>ZMEDICARE</a:t>
-                      </a:r>
-                    </a:p>
-                  </a:txBody>
-                  <a:tcPr>
-                    <a:solidFill>
-                      <a:srgbClr val="FFFFFF"/>
-                    </a:solidFill>
-                  </a:tcPr>
-                </a:tc>
-                <a:tc>
-                  <a:txBody>
-                    <a:bodyPr/>
-                    <a:lstStyle/>
-                    <a:p>
-                      <a:pPr>
-                        <a:defRPr sz="1200">
-                          <a:solidFill>
-                            <a:srgbClr val="333333"/>
-                          </a:solidFill>
-                        </a:defRPr>
-                      </a:pPr>
-                      <a:r>
-                        <a:t>Medicare Project FG</a:t>
-                      </a:r>
-                    </a:p>
-                  </a:txBody>
-                  <a:tcPr>
-                    <a:solidFill>
-                      <a:srgbClr val="FFFFFF"/>
-                    </a:solidFill>
-                  </a:tcPr>
-                </a:tc>
-                <a:tc>
-                  <a:txBody>
-                    <a:bodyPr/>
-                    <a:lstStyle/>
-                    <a:p>
-                      <a:pPr>
-                        <a:defRPr sz="1200">
-                          <a:solidFill>
-                            <a:srgbClr val="333333"/>
-                          </a:solidFill>
-                        </a:defRPr>
-                      </a:pPr>
-                      <a:r>
-                        <a:t>ZMEDI_GET_FROM_SFTP, ZMEDI_PUT_FROM_SFTP</a:t>
-                      </a:r>
-                    </a:p>
-                  </a:txBody>
-                  <a:tcPr>
-                    <a:solidFill>
-                      <a:srgbClr val="FFFFFF"/>
-                    </a:solidFill>
-                  </a:tcPr>
-                </a:tc>
-                <a:tc>
-                  <a:txBody>
-                    <a:bodyPr/>
-                    <a:lstStyle/>
-                    <a:p>
-                      <a:pPr>
-                        <a:defRPr sz="1200">
-                          <a:solidFill>
-                            <a:srgbClr val="333333"/>
-                          </a:solidFill>
-                        </a:defRPr>
-                      </a:pPr>
-                      <a:r>
-                        <a:t>ZSD_MEDICARE_PDF_PROCESS</a:t>
+              <a:tr h="329184">
+                <a:tc>
+                  <a:txBody>
+                    <a:bodyPr/>
+                    <a:lstStyle/>
+                    <a:p>
+                      <a:pPr>
+                        <a:defRPr sz="1000">
+                          <a:solidFill>
+                            <a:srgbClr val="333333"/>
+                          </a:solidFill>
+                        </a:defRPr>
+                      </a:pPr>
+                      <a:r>
+                        <a:t>ZSFTP_CITI_PULL / SEND</a:t>
+                      </a:r>
+                    </a:p>
+                  </a:txBody>
+                  <a:tcPr>
+                    <a:solidFill>
+                      <a:srgbClr val="FFFFFF"/>
+                    </a:solidFill>
+                  </a:tcPr>
+                </a:tc>
+                <a:tc>
+                  <a:txBody>
+                    <a:bodyPr/>
+                    <a:lstStyle/>
+                    <a:p>
+                      <a:pPr>
+                        <a:defRPr sz="1000">
+                          <a:solidFill>
+                            <a:srgbClr val="333333"/>
+                          </a:solidFill>
+                          <a:latin typeface="Consolas"/>
+                        </a:defRPr>
+                      </a:pPr>
+                      <a:r>
+                        <a:t>'ZSFTP_CITI' / 'ZSFTP_CITI_SEND'</a:t>
+                      </a:r>
+                    </a:p>
+                  </a:txBody>
+                  <a:tcPr>
+                    <a:solidFill>
+                      <a:srgbClr val="FFFFFF"/>
+                    </a:solidFill>
+                  </a:tcPr>
+                </a:tc>
+                <a:tc>
+                  <a:txBody>
+                    <a:bodyPr/>
+                    <a:lstStyle/>
+                    <a:p>
+                      <a:pPr>
+                        <a:defRPr sz="1000">
+                          <a:solidFill>
+                            <a:srgbClr val="333333"/>
+                          </a:solidFill>
+                          <a:latin typeface="Consolas"/>
+                        </a:defRPr>
+                      </a:pPr>
+                      <a:r>
+                        <a:t>'FTP_USER', 'FTP_DOMAIN', 'HOST_KEY', 'PRIVATE_KEY_PATH', 'PASSPHRASE', 'SOURCE_FOLDER'</a:t>
                       </a:r>
                     </a:p>
                   </a:txBody>
@@ -11344,90 +11771,69 @@
                   </a:tcPr>
                 </a:tc>
               </a:tr>
-              <a:tr h="800100">
-                <a:tc>
-                  <a:txBody>
-                    <a:bodyPr/>
-                    <a:lstStyle/>
-                    <a:p>
-                      <a:pPr>
-                        <a:defRPr sz="1200">
-                          <a:solidFill>
-                            <a:srgbClr val="333333"/>
-                          </a:solidFill>
-                        </a:defRPr>
-                      </a:pPr>
-                      <a:r>
-                        <a:t>ZERX</a:t>
-                      </a:r>
-                    </a:p>
-                  </a:txBody>
-                  <a:tcPr>
-                    <a:solidFill>
-                      <a:srgbClr val="F0F2F7"/>
-                    </a:solidFill>
-                  </a:tcPr>
-                </a:tc>
-                <a:tc>
-                  <a:txBody>
-                    <a:bodyPr/>
-                    <a:lstStyle/>
-                    <a:p>
-                      <a:pPr>
-                        <a:defRPr sz="1200">
-                          <a:solidFill>
-                            <a:srgbClr val="333333"/>
-                          </a:solidFill>
-                        </a:defRPr>
-                      </a:pPr>
-                      <a:r>
-                        <a:t>Medicare Project FG (eRx)</a:t>
-                      </a:r>
-                    </a:p>
-                  </a:txBody>
-                  <a:tcPr>
-                    <a:solidFill>
-                      <a:srgbClr val="F0F2F7"/>
-                    </a:solidFill>
-                  </a:tcPr>
-                </a:tc>
-                <a:tc>
-                  <a:txBody>
-                    <a:bodyPr/>
-                    <a:lstStyle/>
-                    <a:p>
-                      <a:pPr>
-                        <a:defRPr sz="1200">
-                          <a:solidFill>
-                            <a:srgbClr val="333333"/>
-                          </a:solidFill>
-                        </a:defRPr>
-                      </a:pPr>
-                      <a:r>
-                        <a:t>ZERX_GET_FROM_SFTP, ZERX_PUT_FROM_SFTP</a:t>
-                      </a:r>
-                    </a:p>
-                  </a:txBody>
-                  <a:tcPr>
-                    <a:solidFill>
-                      <a:srgbClr val="F0F2F7"/>
-                    </a:solidFill>
-                  </a:tcPr>
-                </a:tc>
-                <a:tc>
-                  <a:txBody>
-                    <a:bodyPr/>
-                    <a:lstStyle/>
-                    <a:p>
-                      <a:pPr>
-                        <a:defRPr sz="1200">
-                          <a:solidFill>
-                            <a:srgbClr val="333333"/>
-                          </a:solidFill>
-                        </a:defRPr>
-                      </a:pPr>
-                      <a:r>
-                        <a:t>ZSD_ERX_DMS_FILE_PROCESS</a:t>
+              <a:tr h="329184">
+                <a:tc>
+                  <a:txBody>
+                    <a:bodyPr/>
+                    <a:lstStyle/>
+                    <a:p>
+                      <a:pPr>
+                        <a:defRPr sz="1000">
+                          <a:solidFill>
+                            <a:srgbClr val="333333"/>
+                          </a:solidFill>
+                        </a:defRPr>
+                      </a:pPr>
+                      <a:r>
+                        <a:t>ZSFTP_BNP_PARIBAS_PULL / _PARIBAS / _PGP</a:t>
+                      </a:r>
+                    </a:p>
+                  </a:txBody>
+                  <a:tcPr>
+                    <a:solidFill>
+                      <a:srgbClr val="F0F2F7"/>
+                    </a:solidFill>
+                  </a:tcPr>
+                </a:tc>
+                <a:tc>
+                  <a:txBody>
+                    <a:bodyPr/>
+                    <a:lstStyle/>
+                    <a:p>
+                      <a:pPr>
+                        <a:defRPr sz="1000">
+                          <a:solidFill>
+                            <a:srgbClr val="333333"/>
+                          </a:solidFill>
+                          <a:latin typeface="Consolas"/>
+                        </a:defRPr>
+                      </a:pPr>
+                      <a:r>
+                        <a:t>'ZSFTP_BNP_PARIBAS'</a:t>
+                      </a:r>
+                    </a:p>
+                  </a:txBody>
+                  <a:tcPr>
+                    <a:solidFill>
+                      <a:srgbClr val="F0F2F7"/>
+                    </a:solidFill>
+                  </a:tcPr>
+                </a:tc>
+                <a:tc>
+                  <a:txBody>
+                    <a:bodyPr/>
+                    <a:lstStyle/>
+                    <a:p>
+                      <a:pPr>
+                        <a:defRPr sz="1000">
+                          <a:solidFill>
+                            <a:srgbClr val="333333"/>
+                          </a:solidFill>
+                          <a:latin typeface="Consolas"/>
+                        </a:defRPr>
+                      </a:pPr>
+                      <a:r>
+                        <a:t>'FTP_USER', 'FTP_PSWD'/'PRIVATE_KEY_PATH', 'FTP_DOMAIN', 'FTP_PORT', 'HOST_KEY', 'FOLDER_PATH', 'FILE_EXT'</a:t>
                       </a:r>
                     </a:p>
                   </a:txBody>
@@ -11438,90 +11844,503 @@
                   </a:tcPr>
                 </a:tc>
               </a:tr>
-              <a:tr h="800100">
-                <a:tc>
-                  <a:txBody>
-                    <a:bodyPr/>
-                    <a:lstStyle/>
-                    <a:p>
-                      <a:pPr>
-                        <a:defRPr sz="1200">
-                          <a:solidFill>
-                            <a:srgbClr val="333333"/>
-                          </a:solidFill>
-                        </a:defRPr>
-                      </a:pPr>
-                      <a:r>
-                        <a:t>ZDMS_SEND_FILE</a:t>
-                      </a:r>
-                    </a:p>
-                  </a:txBody>
-                  <a:tcPr>
-                    <a:solidFill>
-                      <a:srgbClr val="FFFFFF"/>
-                    </a:solidFill>
-                  </a:tcPr>
-                </a:tc>
-                <a:tc>
-                  <a:txBody>
-                    <a:bodyPr/>
-                    <a:lstStyle/>
-                    <a:p>
-                      <a:pPr>
-                        <a:defRPr sz="1200">
-                          <a:solidFill>
-                            <a:srgbClr val="333333"/>
-                          </a:solidFill>
-                        </a:defRPr>
-                      </a:pPr>
-                      <a:r>
-                        <a:t>DMS document extract FG</a:t>
-                      </a:r>
-                    </a:p>
-                  </a:txBody>
-                  <a:tcPr>
-                    <a:solidFill>
-                      <a:srgbClr val="FFFFFF"/>
-                    </a:solidFill>
-                  </a:tcPr>
-                </a:tc>
-                <a:tc>
-                  <a:txBody>
-                    <a:bodyPr/>
-                    <a:lstStyle/>
-                    <a:p>
-                      <a:pPr>
-                        <a:defRPr sz="1200">
-                          <a:solidFill>
-                            <a:srgbClr val="333333"/>
-                          </a:solidFill>
-                        </a:defRPr>
-                      </a:pPr>
-                      <a:r>
-                        <a:t>ZDMS_EXTRACT_DOCS_TO_SFTP</a:t>
-                      </a:r>
-                    </a:p>
-                  </a:txBody>
-                  <a:tcPr>
-                    <a:solidFill>
-                      <a:srgbClr val="FFFFFF"/>
-                    </a:solidFill>
-                  </a:tcPr>
-                </a:tc>
-                <a:tc>
-                  <a:txBody>
-                    <a:bodyPr/>
-                    <a:lstStyle/>
-                    <a:p>
-                      <a:pPr>
-                        <a:defRPr sz="1200">
-                          <a:solidFill>
-                            <a:srgbClr val="333333"/>
-                          </a:solidFill>
-                        </a:defRPr>
-                      </a:pPr>
-                      <a:r>
-                        <a:t>0 callers in Z001 (dynamic / cross-package / dead?)</a:t>
+              <a:tr h="329184">
+                <a:tc>
+                  <a:txBody>
+                    <a:bodyPr/>
+                    <a:lstStyle/>
+                    <a:p>
+                      <a:pPr>
+                        <a:defRPr sz="1000">
+                          <a:solidFill>
+                            <a:srgbClr val="333333"/>
+                          </a:solidFill>
+                        </a:defRPr>
+                      </a:pPr>
+                      <a:r>
+                        <a:t>ZSFTP_CAPARIO_PULL / ZSFTP_CAPARIO</a:t>
+                      </a:r>
+                    </a:p>
+                  </a:txBody>
+                  <a:tcPr>
+                    <a:solidFill>
+                      <a:srgbClr val="FFFFFF"/>
+                    </a:solidFill>
+                  </a:tcPr>
+                </a:tc>
+                <a:tc>
+                  <a:txBody>
+                    <a:bodyPr/>
+                    <a:lstStyle/>
+                    <a:p>
+                      <a:pPr>
+                        <a:defRPr sz="1000">
+                          <a:solidFill>
+                            <a:srgbClr val="333333"/>
+                          </a:solidFill>
+                          <a:latin typeface="Consolas"/>
+                        </a:defRPr>
+                      </a:pPr>
+                      <a:r>
+                        <a:t>'ZSFTP_835_PULL' / 'ZSFTP_837'</a:t>
+                      </a:r>
+                    </a:p>
+                  </a:txBody>
+                  <a:tcPr>
+                    <a:solidFill>
+                      <a:srgbClr val="FFFFFF"/>
+                    </a:solidFill>
+                  </a:tcPr>
+                </a:tc>
+                <a:tc>
+                  <a:txBody>
+                    <a:bodyPr/>
+                    <a:lstStyle/>
+                    <a:p>
+                      <a:pPr>
+                        <a:defRPr sz="1000">
+                          <a:solidFill>
+                            <a:srgbClr val="333333"/>
+                          </a:solidFill>
+                          <a:latin typeface="Consolas"/>
+                        </a:defRPr>
+                      </a:pPr>
+                      <a:r>
+                        <a:t>'FTP_USER', 'FTP_DOMAIN', 'HOST_KEY', 'PRIVATE_KEY_PATH', 'PASSPHRASE', 'FOLDER_PATH', 'FILE_EXT'</a:t>
+                      </a:r>
+                    </a:p>
+                  </a:txBody>
+                  <a:tcPr>
+                    <a:solidFill>
+                      <a:srgbClr val="FFFFFF"/>
+                    </a:solidFill>
+                  </a:tcPr>
+                </a:tc>
+              </a:tr>
+              <a:tr h="329184">
+                <a:tc>
+                  <a:txBody>
+                    <a:bodyPr/>
+                    <a:lstStyle/>
+                    <a:p>
+                      <a:pPr>
+                        <a:defRPr sz="1000">
+                          <a:solidFill>
+                            <a:srgbClr val="333333"/>
+                          </a:solidFill>
+                        </a:defRPr>
+                      </a:pPr>
+                      <a:r>
+                        <a:t>ZSFTP_PATIENTCO_PULL</a:t>
+                      </a:r>
+                    </a:p>
+                  </a:txBody>
+                  <a:tcPr>
+                    <a:solidFill>
+                      <a:srgbClr val="F0F2F7"/>
+                    </a:solidFill>
+                  </a:tcPr>
+                </a:tc>
+                <a:tc>
+                  <a:txBody>
+                    <a:bodyPr/>
+                    <a:lstStyle/>
+                    <a:p>
+                      <a:pPr>
+                        <a:defRPr sz="1000">
+                          <a:solidFill>
+                            <a:srgbClr val="333333"/>
+                          </a:solidFill>
+                          <a:latin typeface="Consolas"/>
+                        </a:defRPr>
+                      </a:pPr>
+                      <a:r>
+                        <a:t>'ZSFTP_835_PATIENTCO'</a:t>
+                      </a:r>
+                    </a:p>
+                  </a:txBody>
+                  <a:tcPr>
+                    <a:solidFill>
+                      <a:srgbClr val="F0F2F7"/>
+                    </a:solidFill>
+                  </a:tcPr>
+                </a:tc>
+                <a:tc>
+                  <a:txBody>
+                    <a:bodyPr/>
+                    <a:lstStyle/>
+                    <a:p>
+                      <a:pPr>
+                        <a:defRPr sz="1000">
+                          <a:solidFill>
+                            <a:srgbClr val="333333"/>
+                          </a:solidFill>
+                          <a:latin typeface="Consolas"/>
+                        </a:defRPr>
+                      </a:pPr>
+                      <a:r>
+                        <a:t>'FTP_USER', 'FTP_DOMAIN', 'HOST_KEY', 'FTP_PSWD', 'FOLDER_PATH', 'FILE_EXT'</a:t>
+                      </a:r>
+                    </a:p>
+                  </a:txBody>
+                  <a:tcPr>
+                    <a:solidFill>
+                      <a:srgbClr val="F0F2F7"/>
+                    </a:solidFill>
+                  </a:tcPr>
+                </a:tc>
+              </a:tr>
+              <a:tr h="329184">
+                <a:tc>
+                  <a:txBody>
+                    <a:bodyPr/>
+                    <a:lstStyle/>
+                    <a:p>
+                      <a:pPr>
+                        <a:defRPr sz="1000">
+                          <a:solidFill>
+                            <a:srgbClr val="333333"/>
+                          </a:solidFill>
+                        </a:defRPr>
+                      </a:pPr>
+                      <a:r>
+                        <a:t>ZSFTP_JPM / _PULL</a:t>
+                      </a:r>
+                    </a:p>
+                  </a:txBody>
+                  <a:tcPr>
+                    <a:solidFill>
+                      <a:srgbClr val="FFFFFF"/>
+                    </a:solidFill>
+                  </a:tcPr>
+                </a:tc>
+                <a:tc>
+                  <a:txBody>
+                    <a:bodyPr/>
+                    <a:lstStyle/>
+                    <a:p>
+                      <a:pPr>
+                        <a:defRPr sz="1000">
+                          <a:solidFill>
+                            <a:srgbClr val="333333"/>
+                          </a:solidFill>
+                          <a:latin typeface="Consolas"/>
+                        </a:defRPr>
+                      </a:pPr>
+                      <a:r>
+                        <a:t>'ZSFTP_JPM'</a:t>
+                      </a:r>
+                    </a:p>
+                  </a:txBody>
+                  <a:tcPr>
+                    <a:solidFill>
+                      <a:srgbClr val="FFFFFF"/>
+                    </a:solidFill>
+                  </a:tcPr>
+                </a:tc>
+                <a:tc>
+                  <a:txBody>
+                    <a:bodyPr/>
+                    <a:lstStyle/>
+                    <a:p>
+                      <a:pPr>
+                        <a:defRPr sz="1000">
+                          <a:solidFill>
+                            <a:srgbClr val="333333"/>
+                          </a:solidFill>
+                        </a:defRPr>
+                      </a:pPr>
+                      <a:r>
+                        <a:t>Standard key-auth bundle</a:t>
+                      </a:r>
+                    </a:p>
+                  </a:txBody>
+                  <a:tcPr>
+                    <a:solidFill>
+                      <a:srgbClr val="FFFFFF"/>
+                    </a:solidFill>
+                  </a:tcPr>
+                </a:tc>
+              </a:tr>
+              <a:tr h="329184">
+                <a:tc>
+                  <a:txBody>
+                    <a:bodyPr/>
+                    <a:lstStyle/>
+                    <a:p>
+                      <a:pPr>
+                        <a:defRPr sz="1000">
+                          <a:solidFill>
+                            <a:srgbClr val="333333"/>
+                          </a:solidFill>
+                        </a:defRPr>
+                      </a:pPr>
+                      <a:r>
+                        <a:t>ZFFIU_ACC_POST / ZSFTP_CERIDIAN_PULL</a:t>
+                      </a:r>
+                    </a:p>
+                  </a:txBody>
+                  <a:tcPr>
+                    <a:solidFill>
+                      <a:srgbClr val="F0F2F7"/>
+                    </a:solidFill>
+                  </a:tcPr>
+                </a:tc>
+                <a:tc>
+                  <a:txBody>
+                    <a:bodyPr/>
+                    <a:lstStyle/>
+                    <a:p>
+                      <a:pPr>
+                        <a:defRPr sz="1000">
+                          <a:solidFill>
+                            <a:srgbClr val="333333"/>
+                          </a:solidFill>
+                          <a:latin typeface="Consolas"/>
+                        </a:defRPr>
+                      </a:pPr>
+                      <a:r>
+                        <a:t>'ZSFTP_CERIDIAN'</a:t>
+                      </a:r>
+                    </a:p>
+                  </a:txBody>
+                  <a:tcPr>
+                    <a:solidFill>
+                      <a:srgbClr val="F0F2F7"/>
+                    </a:solidFill>
+                  </a:tcPr>
+                </a:tc>
+                <a:tc>
+                  <a:txBody>
+                    <a:bodyPr/>
+                    <a:lstStyle/>
+                    <a:p>
+                      <a:pPr>
+                        <a:defRPr sz="1000">
+                          <a:solidFill>
+                            <a:srgbClr val="333333"/>
+                          </a:solidFill>
+                          <a:latin typeface="Consolas"/>
+                        </a:defRPr>
+                      </a:pPr>
+                      <a:r>
+                        <a:t>'FTP_USER', 'FTP_DOMAIN', 'HOST_KEY', 'PASSPHRASE', 'SFTP_FILE_EXT', 'SOURCE_FOLDER'</a:t>
+                      </a:r>
+                    </a:p>
+                  </a:txBody>
+                  <a:tcPr>
+                    <a:solidFill>
+                      <a:srgbClr val="F0F2F7"/>
+                    </a:solidFill>
+                  </a:tcPr>
+                </a:tc>
+              </a:tr>
+              <a:tr h="329184">
+                <a:tc>
+                  <a:txBody>
+                    <a:bodyPr/>
+                    <a:lstStyle/>
+                    <a:p>
+                      <a:pPr>
+                        <a:defRPr sz="1000">
+                          <a:solidFill>
+                            <a:srgbClr val="333333"/>
+                          </a:solidFill>
+                        </a:defRPr>
+                      </a:pPr>
+                      <a:r>
+                        <a:t>ZDMS_UPLOAD_FILES / REPLACE</a:t>
+                      </a:r>
+                    </a:p>
+                  </a:txBody>
+                  <a:tcPr>
+                    <a:solidFill>
+                      <a:srgbClr val="FFFFFF"/>
+                    </a:solidFill>
+                  </a:tcPr>
+                </a:tc>
+                <a:tc>
+                  <a:txBody>
+                    <a:bodyPr/>
+                    <a:lstStyle/>
+                    <a:p>
+                      <a:pPr>
+                        <a:defRPr sz="1000">
+                          <a:solidFill>
+                            <a:srgbClr val="333333"/>
+                          </a:solidFill>
+                          <a:latin typeface="Consolas"/>
+                        </a:defRPr>
+                      </a:pPr>
+                      <a:r>
+                        <a:t>'ZSFTP_DMS_IN' (GET) / 'ZSFTP_DMS_OUT' (PUT)</a:t>
+                      </a:r>
+                    </a:p>
+                  </a:txBody>
+                  <a:tcPr>
+                    <a:solidFill>
+                      <a:srgbClr val="FFFFFF"/>
+                    </a:solidFill>
+                  </a:tcPr>
+                </a:tc>
+                <a:tc>
+                  <a:txBody>
+                    <a:bodyPr/>
+                    <a:lstStyle/>
+                    <a:p>
+                      <a:pPr>
+                        <a:defRPr sz="1000">
+                          <a:solidFill>
+                            <a:srgbClr val="333333"/>
+                          </a:solidFill>
+                        </a:defRPr>
+                      </a:pPr>
+                      <a:r>
+                        <a:t>Standard key-auth bundle + 'SOURCE_FOLDER', 'ZDEST_FOLD'</a:t>
+                      </a:r>
+                    </a:p>
+                  </a:txBody>
+                  <a:tcPr>
+                    <a:solidFill>
+                      <a:srgbClr val="FFFFFF"/>
+                    </a:solidFill>
+                  </a:tcPr>
+                </a:tc>
+              </a:tr>
+              <a:tr h="329184">
+                <a:tc>
+                  <a:txBody>
+                    <a:bodyPr/>
+                    <a:lstStyle/>
+                    <a:p>
+                      <a:pPr>
+                        <a:defRPr sz="1000">
+                          <a:solidFill>
+                            <a:srgbClr val="333333"/>
+                          </a:solidFill>
+                        </a:defRPr>
+                      </a:pPr>
+                      <a:r>
+                        <a:t>ZSD_MEDICARE (via ZMEDI FM)</a:t>
+                      </a:r>
+                    </a:p>
+                  </a:txBody>
+                  <a:tcPr>
+                    <a:solidFill>
+                      <a:srgbClr val="F0F2F7"/>
+                    </a:solidFill>
+                  </a:tcPr>
+                </a:tc>
+                <a:tc>
+                  <a:txBody>
+                    <a:bodyPr/>
+                    <a:lstStyle/>
+                    <a:p>
+                      <a:pPr>
+                        <a:defRPr sz="1000">
+                          <a:solidFill>
+                            <a:srgbClr val="333333"/>
+                          </a:solidFill>
+                          <a:latin typeface="Consolas"/>
+                        </a:defRPr>
+                      </a:pPr>
+                      <a:r>
+                        <a:t>'ZSFTP_MEDICARE_IN' / 'ZSFTP_MEDICARE_OUT'</a:t>
+                      </a:r>
+                    </a:p>
+                  </a:txBody>
+                  <a:tcPr>
+                    <a:solidFill>
+                      <a:srgbClr val="F0F2F7"/>
+                    </a:solidFill>
+                  </a:tcPr>
+                </a:tc>
+                <a:tc>
+                  <a:txBody>
+                    <a:bodyPr/>
+                    <a:lstStyle/>
+                    <a:p>
+                      <a:pPr>
+                        <a:defRPr sz="1000">
+                          <a:solidFill>
+                            <a:srgbClr val="333333"/>
+                          </a:solidFill>
+                          <a:latin typeface="Consolas"/>
+                        </a:defRPr>
+                      </a:pPr>
+                      <a:r>
+                        <a:t>'FTP_USER', 'PASSPHRASE', 'HOST_KEY', 'FTP_DOMAIN', 'PRIVATE_KEY_PATH', 'SOURCE_PATH', 'ZDEST_FOLD'</a:t>
+                      </a:r>
+                    </a:p>
+                  </a:txBody>
+                  <a:tcPr>
+                    <a:solidFill>
+                      <a:srgbClr val="F0F2F7"/>
+                    </a:solidFill>
+                  </a:tcPr>
+                </a:tc>
+              </a:tr>
+              <a:tr h="329184">
+                <a:tc>
+                  <a:txBody>
+                    <a:bodyPr/>
+                    <a:lstStyle/>
+                    <a:p>
+                      <a:pPr>
+                        <a:defRPr sz="1000">
+                          <a:solidFill>
+                            <a:srgbClr val="333333"/>
+                          </a:solidFill>
+                        </a:defRPr>
+                      </a:pPr>
+                      <a:r>
+                        <a:t>ZSD_ERX_DMS (via ZERX FM)</a:t>
+                      </a:r>
+                    </a:p>
+                  </a:txBody>
+                  <a:tcPr>
+                    <a:solidFill>
+                      <a:srgbClr val="FFFFFF"/>
+                    </a:solidFill>
+                  </a:tcPr>
+                </a:tc>
+                <a:tc>
+                  <a:txBody>
+                    <a:bodyPr/>
+                    <a:lstStyle/>
+                    <a:p>
+                      <a:pPr>
+                        <a:defRPr sz="1000">
+                          <a:solidFill>
+                            <a:srgbClr val="333333"/>
+                          </a:solidFill>
+                        </a:defRPr>
+                      </a:pPr>
+                      <a:r>
+                        <a:t>(via ZERX wrapper FUGR)</a:t>
+                      </a:r>
+                    </a:p>
+                  </a:txBody>
+                  <a:tcPr>
+                    <a:solidFill>
+                      <a:srgbClr val="FFFFFF"/>
+                    </a:solidFill>
+                  </a:tcPr>
+                </a:tc>
+                <a:tc>
+                  <a:txBody>
+                    <a:bodyPr/>
+                    <a:lstStyle/>
+                    <a:p>
+                      <a:pPr>
+                        <a:defRPr sz="1000">
+                          <a:solidFill>
+                            <a:srgbClr val="333333"/>
+                          </a:solidFill>
+                        </a:defRPr>
+                      </a:pPr>
+                      <a:r>
+                        <a:t>Standard key-auth bundle</a:t>
                       </a:r>
                     </a:p>
                   </a:txBody>
@@ -11538,14 +12357,14 @@
       </p:graphicFrame>
       <p:sp>
         <p:nvSpPr>
-          <p:cNvPr id="5" name="TextBox 4"/>
+          <p:cNvPr id="6" name="TextBox 5"/>
           <p:cNvSpPr txBox="1"/>
           <p:nvPr/>
         </p:nvSpPr>
         <p:spPr>
           <a:xfrm>
-            <a:off x="457200" y="5760720"/>
-            <a:ext cx="11247120" cy="822960"/>
+            <a:off x="457200" y="6675120"/>
+            <a:ext cx="11247120" cy="182880"/>
           </a:xfrm>
           <a:prstGeom prst="rect">
             <a:avLst/>
@@ -11559,38 +12378,14 @@
           <a:lstStyle/>
           <a:p>
             <a:pPr>
-              <a:defRPr sz="1200" b="0">
+              <a:defRPr sz="1000" b="1">
                 <a:solidFill>
-                  <a:srgbClr val="333333"/>
+                  <a:srgbClr val="1F3A68"/>
                 </a:solidFill>
               </a:defRPr>
             </a:pPr>
             <a:r>
-              <a:t>Each wrapper FM reads zfi_constants, assembles the same FTP_USER/HOST_KEY/PRIVATE_KEY_PATH parameter bundle,</a:t>
-            </a:r>
-          </a:p>
-          <a:p>
-            <a:pPr>
-              <a:defRPr sz="1200" b="0">
-                <a:solidFill>
-                  <a:srgbClr val="333333"/>
-                </a:solidFill>
-              </a:defRPr>
-            </a:pPr>
-            <a:r>
-              <a:t>and calls CALL FUNCTION 'SXPG_COMMAND_EXECUTE' — exactly like the 14 direct callers.</a:t>
-            </a:r>
-          </a:p>
-          <a:p>
-            <a:pPr>
-              <a:defRPr sz="1200" b="0">
-                <a:solidFill>
-                  <a:srgbClr val="333333"/>
-                </a:solidFill>
-              </a:defRPr>
-            </a:pPr>
-            <a:r>
-              <a:t>ZDMS_SEND_FILE was discovered late, via the ZSFTP_ SM69-prefix sanity scan — not the initial wrapper-substring search.</a:t>
+              <a:t>Migration handoff: extract zfi_constants rows for these pnames via SE16 / SecureStorage; values not committed to git.</a:t>
             </a:r>
           </a:p>
         </p:txBody>
@@ -11643,7 +12438,7 @@
               </a:defRPr>
             </a:pPr>
             <a:r>
-              <a:t>11 objects discovered beyond the stakeholder seed list</a:t>
+              <a:t>3 wrapper function groups — single point of credential binding</a:t>
             </a:r>
           </a:p>
         </p:txBody>
@@ -11656,8 +12451,8 @@
         </p:nvSpPr>
         <p:spPr>
           <a:xfrm>
-            <a:off x="457200" y="1005840"/>
-            <a:ext cx="11247120" cy="548640"/>
+            <a:off x="457200" y="1097280"/>
+            <a:ext cx="11247120" cy="731520"/>
           </a:xfrm>
           <a:prstGeom prst="rect">
             <a:avLst/>
@@ -11673,12 +12468,24 @@
             <a:pPr>
               <a:defRPr sz="1400" b="0">
                 <a:solidFill>
-                  <a:srgbClr val="C83636"/>
+                  <a:srgbClr val="333333"/>
                 </a:solidFill>
               </a:defRPr>
             </a:pPr>
             <a:r>
-              <a:t>The 13-seed list found 8 confirmed SFTP reports. Stage-3 sweep found 11 more (+46%).</a:t>
+              <a:t>Three FUGRs wrap SXPG_COMMAND_EXECUTE so callers stay clean of SFTP plumbing.</a:t>
+            </a:r>
+          </a:p>
+          <a:p>
+            <a:pPr>
+              <a:defRPr sz="1400" b="0">
+                <a:solidFill>
+                  <a:srgbClr val="333333"/>
+                </a:solidFill>
+              </a:defRPr>
+            </a:pPr>
+            <a:r>
+              <a:t>Replace the wrapper internals once → every caller migrates as a side effect.</a:t>
             </a:r>
           </a:p>
         </p:txBody>
@@ -11692,8 +12499,8 @@
           <p:nvPr/>
         </p:nvGraphicFramePr>
         <p:xfrm>
-          <a:off x="457200" y="1828800"/>
-          <a:ext cx="11247120" cy="4572000"/>
+          <a:off x="457200" y="2286000"/>
+          <a:ext cx="11247120" cy="3200400"/>
         </p:xfrm>
         <a:graphic>
           <a:graphicData uri="http://schemas.openxmlformats.org/drawingml/2006/table">
@@ -11702,25 +12509,26 @@
                 <a:tableStyleId>{5C22544A-7EE6-4342-B048-85BDC9FD1C3A}</a:tableStyleId>
               </a:tblPr>
               <a:tblGrid>
+                <a:gridCol w="1645920"/>
+                <a:gridCol w="2743200"/>
+                <a:gridCol w="3657600"/>
                 <a:gridCol w="3200400"/>
-                <a:gridCol w="914400"/>
-                <a:gridCol w="7132320"/>
               </a:tblGrid>
-              <a:tr h="381000">
-                <a:tc>
-                  <a:txBody>
-                    <a:bodyPr/>
-                    <a:lstStyle/>
-                    <a:p>
-                      <a:pPr>
-                        <a:defRPr sz="1300" b="1">
+              <a:tr h="800100">
+                <a:tc>
+                  <a:txBody>
+                    <a:bodyPr/>
+                    <a:lstStyle/>
+                    <a:p>
+                      <a:pPr>
+                        <a:defRPr sz="1200" b="1">
                           <a:solidFill>
                             <a:srgbClr val="FFFFFF"/>
                           </a:solidFill>
                         </a:defRPr>
                       </a:pPr>
                       <a:r>
-                        <a:t>Object</a:t>
+                        <a:t>FUGR</a:t>
                       </a:r>
                     </a:p>
                   </a:txBody>
@@ -11736,14 +12544,14 @@
                     <a:lstStyle/>
                     <a:p>
                       <a:pPr>
-                        <a:defRPr sz="1300" b="1">
+                        <a:defRPr sz="1200" b="1">
                           <a:solidFill>
                             <a:srgbClr val="FFFFFF"/>
                           </a:solidFill>
                         </a:defRPr>
                       </a:pPr>
                       <a:r>
-                        <a:t>Type</a:t>
+                        <a:t>Description</a:t>
                       </a:r>
                     </a:p>
                   </a:txBody>
@@ -11759,14 +12567,14 @@
                     <a:lstStyle/>
                     <a:p>
                       <a:pPr>
-                        <a:defRPr sz="1300" b="1">
+                        <a:defRPr sz="1200" b="1">
                           <a:solidFill>
                             <a:srgbClr val="FFFFFF"/>
                           </a:solidFill>
                         </a:defRPr>
                       </a:pPr>
                       <a:r>
-                        <a:t>Why missed in seed list</a:t>
+                        <a:t>Wrapper function modules</a:t>
                       </a:r>
                     </a:p>
                   </a:txBody>
@@ -11776,68 +12584,114 @@
                     </a:solidFill>
                   </a:tcPr>
                 </a:tc>
+                <a:tc>
+                  <a:txBody>
+                    <a:bodyPr/>
+                    <a:lstStyle/>
+                    <a:p>
+                      <a:pPr>
+                        <a:defRPr sz="1200" b="1">
+                          <a:solidFill>
+                            <a:srgbClr val="FFFFFF"/>
+                          </a:solidFill>
+                        </a:defRPr>
+                      </a:pPr>
+                      <a:r>
+                        <a:t>Used by</a:t>
+                      </a:r>
+                    </a:p>
+                  </a:txBody>
+                  <a:tcPr>
+                    <a:solidFill>
+                      <a:srgbClr val="1F3A68"/>
+                    </a:solidFill>
+                  </a:tcPr>
+                </a:tc>
               </a:tr>
-              <a:tr h="381000">
-                <a:tc>
-                  <a:txBody>
-                    <a:bodyPr/>
-                    <a:lstStyle/>
-                    <a:p>
-                      <a:pPr>
-                        <a:defRPr sz="1100">
-                          <a:solidFill>
-                            <a:srgbClr val="333333"/>
-                          </a:solidFill>
-                        </a:defRPr>
-                      </a:pPr>
-                      <a:r>
-                        <a:t>ZSFTP_BNP_PARIBAS</a:t>
-                      </a:r>
-                    </a:p>
-                  </a:txBody>
-                  <a:tcPr>
-                    <a:solidFill>
-                      <a:srgbClr val="FFFFFF"/>
-                    </a:solidFill>
-                  </a:tcPr>
-                </a:tc>
-                <a:tc>
-                  <a:txBody>
-                    <a:bodyPr/>
-                    <a:lstStyle/>
-                    <a:p>
-                      <a:pPr>
-                        <a:defRPr sz="1100">
-                          <a:solidFill>
-                            <a:srgbClr val="333333"/>
-                          </a:solidFill>
-                        </a:defRPr>
-                      </a:pPr>
-                      <a:r>
-                        <a:t>PROG</a:t>
-                      </a:r>
-                    </a:p>
-                  </a:txBody>
-                  <a:tcPr>
-                    <a:solidFill>
-                      <a:srgbClr val="FFFFFF"/>
-                    </a:solidFill>
-                  </a:tcPr>
-                </a:tc>
-                <a:tc>
-                  <a:txBody>
-                    <a:bodyPr/>
-                    <a:lstStyle/>
-                    <a:p>
-                      <a:pPr>
-                        <a:defRPr sz="1100">
-                          <a:solidFill>
-                            <a:srgbClr val="333333"/>
-                          </a:solidFill>
-                        </a:defRPr>
-                      </a:pPr>
-                      <a:r>
-                        <a:t>Password-only auth — no PRIVATE_KEY_PATH marker</a:t>
+              <a:tr h="800100">
+                <a:tc>
+                  <a:txBody>
+                    <a:bodyPr/>
+                    <a:lstStyle/>
+                    <a:p>
+                      <a:pPr>
+                        <a:defRPr sz="1200">
+                          <a:solidFill>
+                            <a:srgbClr val="333333"/>
+                          </a:solidFill>
+                        </a:defRPr>
+                      </a:pPr>
+                      <a:r>
+                        <a:t>ZMEDICARE</a:t>
+                      </a:r>
+                    </a:p>
+                  </a:txBody>
+                  <a:tcPr>
+                    <a:solidFill>
+                      <a:srgbClr val="FFFFFF"/>
+                    </a:solidFill>
+                  </a:tcPr>
+                </a:tc>
+                <a:tc>
+                  <a:txBody>
+                    <a:bodyPr/>
+                    <a:lstStyle/>
+                    <a:p>
+                      <a:pPr>
+                        <a:defRPr sz="1200">
+                          <a:solidFill>
+                            <a:srgbClr val="333333"/>
+                          </a:solidFill>
+                        </a:defRPr>
+                      </a:pPr>
+                      <a:r>
+                        <a:t>Medicare Project FG</a:t>
+                      </a:r>
+                    </a:p>
+                  </a:txBody>
+                  <a:tcPr>
+                    <a:solidFill>
+                      <a:srgbClr val="FFFFFF"/>
+                    </a:solidFill>
+                  </a:tcPr>
+                </a:tc>
+                <a:tc>
+                  <a:txBody>
+                    <a:bodyPr/>
+                    <a:lstStyle/>
+                    <a:p>
+                      <a:pPr>
+                        <a:defRPr sz="1200">
+                          <a:solidFill>
+                            <a:srgbClr val="333333"/>
+                          </a:solidFill>
+                        </a:defRPr>
+                      </a:pPr>
+                      <a:r>
+                        <a:t>ZMEDI_GET_FROM_SFTP, ZMEDI_PUT_FROM_SFTP</a:t>
+                      </a:r>
+                    </a:p>
+                  </a:txBody>
+                  <a:tcPr>
+                    <a:solidFill>
+                      <a:srgbClr val="FFFFFF"/>
+                    </a:solidFill>
+                  </a:tcPr>
+                </a:tc>
+                <a:tc>
+                  <a:txBody>
+                    <a:bodyPr/>
+                    <a:lstStyle/>
+                    <a:p>
+                      <a:pPr>
+                        <a:defRPr sz="1200">
+                          <a:solidFill>
+                            <a:srgbClr val="333333"/>
+                          </a:solidFill>
+                        </a:defRPr>
+                      </a:pPr>
+                      <a:r>
+                        <a:t>ZSD_MEDICARE_PDF_PROCESS</a:t>
                       </a:r>
                     </a:p>
                   </a:txBody>
@@ -11848,67 +12702,90 @@
                   </a:tcPr>
                 </a:tc>
               </a:tr>
-              <a:tr h="381000">
-                <a:tc>
-                  <a:txBody>
-                    <a:bodyPr/>
-                    <a:lstStyle/>
-                    <a:p>
-                      <a:pPr>
-                        <a:defRPr sz="1100">
-                          <a:solidFill>
-                            <a:srgbClr val="333333"/>
-                          </a:solidFill>
-                        </a:defRPr>
-                      </a:pPr>
-                      <a:r>
-                        <a:t>ZSFTP_BNP_PARIBAS_WITH_PGP</a:t>
-                      </a:r>
-                    </a:p>
-                  </a:txBody>
-                  <a:tcPr>
-                    <a:solidFill>
-                      <a:srgbClr val="F0F2F7"/>
-                    </a:solidFill>
-                  </a:tcPr>
-                </a:tc>
-                <a:tc>
-                  <a:txBody>
-                    <a:bodyPr/>
-                    <a:lstStyle/>
-                    <a:p>
-                      <a:pPr>
-                        <a:defRPr sz="1100">
-                          <a:solidFill>
-                            <a:srgbClr val="333333"/>
-                          </a:solidFill>
-                        </a:defRPr>
-                      </a:pPr>
-                      <a:r>
-                        <a:t>PROG</a:t>
-                      </a:r>
-                    </a:p>
-                  </a:txBody>
-                  <a:tcPr>
-                    <a:solidFill>
-                      <a:srgbClr val="F0F2F7"/>
-                    </a:solidFill>
-                  </a:tcPr>
-                </a:tc>
-                <a:tc>
-                  <a:txBody>
-                    <a:bodyPr/>
-                    <a:lstStyle/>
-                    <a:p>
-                      <a:pPr>
-                        <a:defRPr sz="1100">
-                          <a:solidFill>
-                            <a:srgbClr val="333333"/>
-                          </a:solidFill>
-                        </a:defRPr>
-                      </a:pPr>
-                      <a:r>
-                        <a:t>Newer PGP variant of existing BNP report</a:t>
+              <a:tr h="800100">
+                <a:tc>
+                  <a:txBody>
+                    <a:bodyPr/>
+                    <a:lstStyle/>
+                    <a:p>
+                      <a:pPr>
+                        <a:defRPr sz="1200">
+                          <a:solidFill>
+                            <a:srgbClr val="333333"/>
+                          </a:solidFill>
+                        </a:defRPr>
+                      </a:pPr>
+                      <a:r>
+                        <a:t>ZERX</a:t>
+                      </a:r>
+                    </a:p>
+                  </a:txBody>
+                  <a:tcPr>
+                    <a:solidFill>
+                      <a:srgbClr val="F0F2F7"/>
+                    </a:solidFill>
+                  </a:tcPr>
+                </a:tc>
+                <a:tc>
+                  <a:txBody>
+                    <a:bodyPr/>
+                    <a:lstStyle/>
+                    <a:p>
+                      <a:pPr>
+                        <a:defRPr sz="1200">
+                          <a:solidFill>
+                            <a:srgbClr val="333333"/>
+                          </a:solidFill>
+                        </a:defRPr>
+                      </a:pPr>
+                      <a:r>
+                        <a:t>Medicare Project FG (eRx)</a:t>
+                      </a:r>
+                    </a:p>
+                  </a:txBody>
+                  <a:tcPr>
+                    <a:solidFill>
+                      <a:srgbClr val="F0F2F7"/>
+                    </a:solidFill>
+                  </a:tcPr>
+                </a:tc>
+                <a:tc>
+                  <a:txBody>
+                    <a:bodyPr/>
+                    <a:lstStyle/>
+                    <a:p>
+                      <a:pPr>
+                        <a:defRPr sz="1200">
+                          <a:solidFill>
+                            <a:srgbClr val="333333"/>
+                          </a:solidFill>
+                        </a:defRPr>
+                      </a:pPr>
+                      <a:r>
+                        <a:t>ZERX_GET_FROM_SFTP, ZERX_PUT_FROM_SFTP</a:t>
+                      </a:r>
+                    </a:p>
+                  </a:txBody>
+                  <a:tcPr>
+                    <a:solidFill>
+                      <a:srgbClr val="F0F2F7"/>
+                    </a:solidFill>
+                  </a:tcPr>
+                </a:tc>
+                <a:tc>
+                  <a:txBody>
+                    <a:bodyPr/>
+                    <a:lstStyle/>
+                    <a:p>
+                      <a:pPr>
+                        <a:defRPr sz="1200">
+                          <a:solidFill>
+                            <a:srgbClr val="333333"/>
+                          </a:solidFill>
+                        </a:defRPr>
+                      </a:pPr>
+                      <a:r>
+                        <a:t>ZSD_ERX_DMS_FILE_PROCESS</a:t>
                       </a:r>
                     </a:p>
                   </a:txBody>
@@ -11919,582 +12796,14 @@
                   </a:tcPr>
                 </a:tc>
               </a:tr>
-              <a:tr h="381000">
-                <a:tc>
-                  <a:txBody>
-                    <a:bodyPr/>
-                    <a:lstStyle/>
-                    <a:p>
-                      <a:pPr>
-                        <a:defRPr sz="1100">
-                          <a:solidFill>
-                            <a:srgbClr val="333333"/>
-                          </a:solidFill>
-                        </a:defRPr>
-                      </a:pPr>
-                      <a:r>
-                        <a:t>ZSFTP_CERIDIAN_PULL</a:t>
-                      </a:r>
-                    </a:p>
-                  </a:txBody>
-                  <a:tcPr>
-                    <a:solidFill>
-                      <a:srgbClr val="FFFFFF"/>
-                    </a:solidFill>
-                  </a:tcPr>
-                </a:tc>
-                <a:tc>
-                  <a:txBody>
-                    <a:bodyPr/>
-                    <a:lstStyle/>
-                    <a:p>
-                      <a:pPr>
-                        <a:defRPr sz="1100">
-                          <a:solidFill>
-                            <a:srgbClr val="333333"/>
-                          </a:solidFill>
-                        </a:defRPr>
-                      </a:pPr>
-                      <a:r>
-                        <a:t>PROG</a:t>
-                      </a:r>
-                    </a:p>
-                  </a:txBody>
-                  <a:tcPr>
-                    <a:solidFill>
-                      <a:srgbClr val="FFFFFF"/>
-                    </a:solidFill>
-                  </a:tcPr>
-                </a:tc>
-                <a:tc>
-                  <a:txBody>
-                    <a:bodyPr/>
-                    <a:lstStyle/>
-                    <a:p>
-                      <a:pPr>
-                        <a:defRPr sz="1100">
-                          <a:solidFill>
-                            <a:srgbClr val="333333"/>
-                          </a:solidFill>
-                        </a:defRPr>
-                      </a:pPr>
-                      <a:r>
-                        <a:t>Operator-facing duplicate of ZFFIU_ACC_POST flow</a:t>
-                      </a:r>
-                    </a:p>
-                  </a:txBody>
-                  <a:tcPr>
-                    <a:solidFill>
-                      <a:srgbClr val="FFFFFF"/>
-                    </a:solidFill>
-                  </a:tcPr>
-                </a:tc>
-              </a:tr>
-              <a:tr h="381000">
-                <a:tc>
-                  <a:txBody>
-                    <a:bodyPr/>
-                    <a:lstStyle/>
-                    <a:p>
-                      <a:pPr>
-                        <a:defRPr sz="1100">
-                          <a:solidFill>
-                            <a:srgbClr val="333333"/>
-                          </a:solidFill>
-                        </a:defRPr>
-                      </a:pPr>
-                      <a:r>
-                        <a:t>ZSFTP_CITI_SEND</a:t>
-                      </a:r>
-                    </a:p>
-                  </a:txBody>
-                  <a:tcPr>
-                    <a:solidFill>
-                      <a:srgbClr val="F0F2F7"/>
-                    </a:solidFill>
-                  </a:tcPr>
-                </a:tc>
-                <a:tc>
-                  <a:txBody>
-                    <a:bodyPr/>
-                    <a:lstStyle/>
-                    <a:p>
-                      <a:pPr>
-                        <a:defRPr sz="1100">
-                          <a:solidFill>
-                            <a:srgbClr val="333333"/>
-                          </a:solidFill>
-                        </a:defRPr>
-                      </a:pPr>
-                      <a:r>
-                        <a:t>PROG</a:t>
-                      </a:r>
-                    </a:p>
-                  </a:txBody>
-                  <a:tcPr>
-                    <a:solidFill>
-                      <a:srgbClr val="F0F2F7"/>
-                    </a:solidFill>
-                  </a:tcPr>
-                </a:tc>
-                <a:tc>
-                  <a:txBody>
-                    <a:bodyPr/>
-                    <a:lstStyle/>
-                    <a:p>
-                      <a:pPr>
-                        <a:defRPr sz="1100">
-                          <a:solidFill>
-                            <a:srgbClr val="333333"/>
-                          </a:solidFill>
-                        </a:defRPr>
-                      </a:pPr>
-                      <a:r>
-                        <a:t>Outbound counterpart of ZSFTP_CITI_PULL</a:t>
-                      </a:r>
-                    </a:p>
-                  </a:txBody>
-                  <a:tcPr>
-                    <a:solidFill>
-                      <a:srgbClr val="F0F2F7"/>
-                    </a:solidFill>
-                  </a:tcPr>
-                </a:tc>
-              </a:tr>
-              <a:tr h="381000">
-                <a:tc>
-                  <a:txBody>
-                    <a:bodyPr/>
-                    <a:lstStyle/>
-                    <a:p>
-                      <a:pPr>
-                        <a:defRPr sz="1100">
-                          <a:solidFill>
-                            <a:srgbClr val="333333"/>
-                          </a:solidFill>
-                        </a:defRPr>
-                      </a:pPr>
-                      <a:r>
-                        <a:t>ZSFTP_JPM</a:t>
-                      </a:r>
-                    </a:p>
-                  </a:txBody>
-                  <a:tcPr>
-                    <a:solidFill>
-                      <a:srgbClr val="FFFFFF"/>
-                    </a:solidFill>
-                  </a:tcPr>
-                </a:tc>
-                <a:tc>
-                  <a:txBody>
-                    <a:bodyPr/>
-                    <a:lstStyle/>
-                    <a:p>
-                      <a:pPr>
-                        <a:defRPr sz="1100">
-                          <a:solidFill>
-                            <a:srgbClr val="333333"/>
-                          </a:solidFill>
-                        </a:defRPr>
-                      </a:pPr>
-                      <a:r>
-                        <a:t>PROG</a:t>
-                      </a:r>
-                    </a:p>
-                  </a:txBody>
-                  <a:tcPr>
-                    <a:solidFill>
-                      <a:srgbClr val="FFFFFF"/>
-                    </a:solidFill>
-                  </a:tcPr>
-                </a:tc>
-                <a:tc>
-                  <a:txBody>
-                    <a:bodyPr/>
-                    <a:lstStyle/>
-                    <a:p>
-                      <a:pPr>
-                        <a:defRPr sz="1100">
-                          <a:solidFill>
-                            <a:srgbClr val="333333"/>
-                          </a:solidFill>
-                        </a:defRPr>
-                      </a:pPr>
-                      <a:r>
-                        <a:t>Entire JPMorgan integration not in seeds</a:t>
-                      </a:r>
-                    </a:p>
-                  </a:txBody>
-                  <a:tcPr>
-                    <a:solidFill>
-                      <a:srgbClr val="FFFFFF"/>
-                    </a:solidFill>
-                  </a:tcPr>
-                </a:tc>
-              </a:tr>
-              <a:tr h="381000">
-                <a:tc>
-                  <a:txBody>
-                    <a:bodyPr/>
-                    <a:lstStyle/>
-                    <a:p>
-                      <a:pPr>
-                        <a:defRPr sz="1100">
-                          <a:solidFill>
-                            <a:srgbClr val="333333"/>
-                          </a:solidFill>
-                        </a:defRPr>
-                      </a:pPr>
-                      <a:r>
-                        <a:t>ZSFTP_JPM_PULL</a:t>
-                      </a:r>
-                    </a:p>
-                  </a:txBody>
-                  <a:tcPr>
-                    <a:solidFill>
-                      <a:srgbClr val="F0F2F7"/>
-                    </a:solidFill>
-                  </a:tcPr>
-                </a:tc>
-                <a:tc>
-                  <a:txBody>
-                    <a:bodyPr/>
-                    <a:lstStyle/>
-                    <a:p>
-                      <a:pPr>
-                        <a:defRPr sz="1100">
-                          <a:solidFill>
-                            <a:srgbClr val="333333"/>
-                          </a:solidFill>
-                        </a:defRPr>
-                      </a:pPr>
-                      <a:r>
-                        <a:t>PROG</a:t>
-                      </a:r>
-                    </a:p>
-                  </a:txBody>
-                  <a:tcPr>
-                    <a:solidFill>
-                      <a:srgbClr val="F0F2F7"/>
-                    </a:solidFill>
-                  </a:tcPr>
-                </a:tc>
-                <a:tc>
-                  <a:txBody>
-                    <a:bodyPr/>
-                    <a:lstStyle/>
-                    <a:p>
-                      <a:pPr>
-                        <a:defRPr sz="1100">
-                          <a:solidFill>
-                            <a:srgbClr val="333333"/>
-                          </a:solidFill>
-                        </a:defRPr>
-                      </a:pPr>
-                      <a:r>
-                        <a:t>Entire JPMorgan integration not in seeds</a:t>
-                      </a:r>
-                    </a:p>
-                  </a:txBody>
-                  <a:tcPr>
-                    <a:solidFill>
-                      <a:srgbClr val="F0F2F7"/>
-                    </a:solidFill>
-                  </a:tcPr>
-                </a:tc>
-              </a:tr>
-              <a:tr h="381000">
-                <a:tc>
-                  <a:txBody>
-                    <a:bodyPr/>
-                    <a:lstStyle/>
-                    <a:p>
-                      <a:pPr>
-                        <a:defRPr sz="1100">
-                          <a:solidFill>
-                            <a:srgbClr val="333333"/>
-                          </a:solidFill>
-                        </a:defRPr>
-                      </a:pPr>
-                      <a:r>
-                        <a:t>ZDMS_REPLACE_FILES</a:t>
-                      </a:r>
-                    </a:p>
-                  </a:txBody>
-                  <a:tcPr>
-                    <a:solidFill>
-                      <a:srgbClr val="FFFFFF"/>
-                    </a:solidFill>
-                  </a:tcPr>
-                </a:tc>
-                <a:tc>
-                  <a:txBody>
-                    <a:bodyPr/>
-                    <a:lstStyle/>
-                    <a:p>
-                      <a:pPr>
-                        <a:defRPr sz="1100">
-                          <a:solidFill>
-                            <a:srgbClr val="333333"/>
-                          </a:solidFill>
-                        </a:defRPr>
-                      </a:pPr>
-                      <a:r>
-                        <a:t>PROG</a:t>
-                      </a:r>
-                    </a:p>
-                  </a:txBody>
-                  <a:tcPr>
-                    <a:solidFill>
-                      <a:srgbClr val="FFFFFF"/>
-                    </a:solidFill>
-                  </a:tcPr>
-                </a:tc>
-                <a:tc>
-                  <a:txBody>
-                    <a:bodyPr/>
-                    <a:lstStyle/>
-                    <a:p>
-                      <a:pPr>
-                        <a:defRPr sz="1100">
-                          <a:solidFill>
-                            <a:srgbClr val="333333"/>
-                          </a:solidFill>
-                        </a:defRPr>
-                      </a:pPr>
-                      <a:r>
-                        <a:t>Adjacent DMS report sharing SM69 commands</a:t>
-                      </a:r>
-                    </a:p>
-                  </a:txBody>
-                  <a:tcPr>
-                    <a:solidFill>
-                      <a:srgbClr val="FFFFFF"/>
-                    </a:solidFill>
-                  </a:tcPr>
-                </a:tc>
-              </a:tr>
-              <a:tr h="381000">
-                <a:tc>
-                  <a:txBody>
-                    <a:bodyPr/>
-                    <a:lstStyle/>
-                    <a:p>
-                      <a:pPr>
-                        <a:defRPr sz="1100">
-                          <a:solidFill>
-                            <a:srgbClr val="333333"/>
-                          </a:solidFill>
-                        </a:defRPr>
-                      </a:pPr>
-                      <a:r>
-                        <a:t>ZSD_ERX_DMS_FILE_PROCESS</a:t>
-                      </a:r>
-                    </a:p>
-                  </a:txBody>
-                  <a:tcPr>
-                    <a:solidFill>
-                      <a:srgbClr val="F0F2F7"/>
-                    </a:solidFill>
-                  </a:tcPr>
-                </a:tc>
-                <a:tc>
-                  <a:txBody>
-                    <a:bodyPr/>
-                    <a:lstStyle/>
-                    <a:p>
-                      <a:pPr>
-                        <a:defRPr sz="1100">
-                          <a:solidFill>
-                            <a:srgbClr val="333333"/>
-                          </a:solidFill>
-                        </a:defRPr>
-                      </a:pPr>
-                      <a:r>
-                        <a:t>PROG</a:t>
-                      </a:r>
-                    </a:p>
-                  </a:txBody>
-                  <a:tcPr>
-                    <a:solidFill>
-                      <a:srgbClr val="F0F2F7"/>
-                    </a:solidFill>
-                  </a:tcPr>
-                </a:tc>
-                <a:tc>
-                  <a:txBody>
-                    <a:bodyPr/>
-                    <a:lstStyle/>
-                    <a:p>
-                      <a:pPr>
-                        <a:defRPr sz="1100">
-                          <a:solidFill>
-                            <a:srgbClr val="333333"/>
-                          </a:solidFill>
-                        </a:defRPr>
-                      </a:pPr>
-                      <a:r>
-                        <a:t>Indirect SFTP via ZERX wrapper FUGR</a:t>
-                      </a:r>
-                    </a:p>
-                  </a:txBody>
-                  <a:tcPr>
-                    <a:solidFill>
-                      <a:srgbClr val="F0F2F7"/>
-                    </a:solidFill>
-                  </a:tcPr>
-                </a:tc>
-              </a:tr>
-              <a:tr h="381000">
-                <a:tc>
-                  <a:txBody>
-                    <a:bodyPr/>
-                    <a:lstStyle/>
-                    <a:p>
-                      <a:pPr>
-                        <a:defRPr sz="1100">
-                          <a:solidFill>
-                            <a:srgbClr val="333333"/>
-                          </a:solidFill>
-                        </a:defRPr>
-                      </a:pPr>
-                      <a:r>
-                        <a:t>ZMEDICARE</a:t>
-                      </a:r>
-                    </a:p>
-                  </a:txBody>
-                  <a:tcPr>
-                    <a:solidFill>
-                      <a:srgbClr val="FFFFFF"/>
-                    </a:solidFill>
-                  </a:tcPr>
-                </a:tc>
-                <a:tc>
-                  <a:txBody>
-                    <a:bodyPr/>
-                    <a:lstStyle/>
-                    <a:p>
-                      <a:pPr>
-                        <a:defRPr sz="1100">
-                          <a:solidFill>
-                            <a:srgbClr val="333333"/>
-                          </a:solidFill>
-                        </a:defRPr>
-                      </a:pPr>
-                      <a:r>
-                        <a:t>FUGR</a:t>
-                      </a:r>
-                    </a:p>
-                  </a:txBody>
-                  <a:tcPr>
-                    <a:solidFill>
-                      <a:srgbClr val="FFFFFF"/>
-                    </a:solidFill>
-                  </a:tcPr>
-                </a:tc>
-                <a:tc>
-                  <a:txBody>
-                    <a:bodyPr/>
-                    <a:lstStyle/>
-                    <a:p>
-                      <a:pPr>
-                        <a:defRPr sz="1100">
-                          <a:solidFill>
-                            <a:srgbClr val="333333"/>
-                          </a:solidFill>
-                        </a:defRPr>
-                      </a:pPr>
-                      <a:r>
-                        <a:t>Wrapper FUGR — never in a 'report list'</a:t>
-                      </a:r>
-                    </a:p>
-                  </a:txBody>
-                  <a:tcPr>
-                    <a:solidFill>
-                      <a:srgbClr val="FFFFFF"/>
-                    </a:solidFill>
-                  </a:tcPr>
-                </a:tc>
-              </a:tr>
-              <a:tr h="381000">
-                <a:tc>
-                  <a:txBody>
-                    <a:bodyPr/>
-                    <a:lstStyle/>
-                    <a:p>
-                      <a:pPr>
-                        <a:defRPr sz="1100">
-                          <a:solidFill>
-                            <a:srgbClr val="333333"/>
-                          </a:solidFill>
-                        </a:defRPr>
-                      </a:pPr>
-                      <a:r>
-                        <a:t>ZERX</a:t>
-                      </a:r>
-                    </a:p>
-                  </a:txBody>
-                  <a:tcPr>
-                    <a:solidFill>
-                      <a:srgbClr val="F0F2F7"/>
-                    </a:solidFill>
-                  </a:tcPr>
-                </a:tc>
-                <a:tc>
-                  <a:txBody>
-                    <a:bodyPr/>
-                    <a:lstStyle/>
-                    <a:p>
-                      <a:pPr>
-                        <a:defRPr sz="1100">
-                          <a:solidFill>
-                            <a:srgbClr val="333333"/>
-                          </a:solidFill>
-                        </a:defRPr>
-                      </a:pPr>
-                      <a:r>
-                        <a:t>FUGR</a:t>
-                      </a:r>
-                    </a:p>
-                  </a:txBody>
-                  <a:tcPr>
-                    <a:solidFill>
-                      <a:srgbClr val="F0F2F7"/>
-                    </a:solidFill>
-                  </a:tcPr>
-                </a:tc>
-                <a:tc>
-                  <a:txBody>
-                    <a:bodyPr/>
-                    <a:lstStyle/>
-                    <a:p>
-                      <a:pPr>
-                        <a:defRPr sz="1100">
-                          <a:solidFill>
-                            <a:srgbClr val="333333"/>
-                          </a:solidFill>
-                        </a:defRPr>
-                      </a:pPr>
-                      <a:r>
-                        <a:t>Same — wrapper FUGR for eRx/DMS path</a:t>
-                      </a:r>
-                    </a:p>
-                  </a:txBody>
-                  <a:tcPr>
-                    <a:solidFill>
-                      <a:srgbClr val="F0F2F7"/>
-                    </a:solidFill>
-                  </a:tcPr>
-                </a:tc>
-              </a:tr>
-              <a:tr h="381000">
-                <a:tc>
-                  <a:txBody>
-                    <a:bodyPr/>
-                    <a:lstStyle/>
-                    <a:p>
-                      <a:pPr>
-                        <a:defRPr sz="1100">
+              <a:tr h="800100">
+                <a:tc>
+                  <a:txBody>
+                    <a:bodyPr/>
+                    <a:lstStyle/>
+                    <a:p>
+                      <a:pPr>
+                        <a:defRPr sz="1200">
                           <a:solidFill>
                             <a:srgbClr val="333333"/>
                           </a:solidFill>
@@ -12517,37 +12826,60 @@
                     <a:lstStyle/>
                     <a:p>
                       <a:pPr>
-                        <a:defRPr sz="1100">
-                          <a:solidFill>
-                            <a:srgbClr val="333333"/>
-                          </a:solidFill>
-                        </a:defRPr>
-                      </a:pPr>
-                      <a:r>
-                        <a:t>FUGR</a:t>
-                      </a:r>
-                    </a:p>
-                  </a:txBody>
-                  <a:tcPr>
-                    <a:solidFill>
-                      <a:srgbClr val="FFFFFF"/>
-                    </a:solidFill>
-                  </a:tcPr>
-                </a:tc>
-                <a:tc>
-                  <a:txBody>
-                    <a:bodyPr/>
-                    <a:lstStyle/>
-                    <a:p>
-                      <a:pPr>
-                        <a:defRPr sz="1100">
-                          <a:solidFill>
-                            <a:srgbClr val="333333"/>
-                          </a:solidFill>
-                        </a:defRPr>
-                      </a:pPr>
-                      <a:r>
-                        <a:t>Wrapper FUGR with _TO_SFTP naming — initial substring scan looked for _FROM_SFTP only</a:t>
+                        <a:defRPr sz="1200">
+                          <a:solidFill>
+                            <a:srgbClr val="333333"/>
+                          </a:solidFill>
+                        </a:defRPr>
+                      </a:pPr>
+                      <a:r>
+                        <a:t>DMS document extract FG</a:t>
+                      </a:r>
+                    </a:p>
+                  </a:txBody>
+                  <a:tcPr>
+                    <a:solidFill>
+                      <a:srgbClr val="FFFFFF"/>
+                    </a:solidFill>
+                  </a:tcPr>
+                </a:tc>
+                <a:tc>
+                  <a:txBody>
+                    <a:bodyPr/>
+                    <a:lstStyle/>
+                    <a:p>
+                      <a:pPr>
+                        <a:defRPr sz="1200">
+                          <a:solidFill>
+                            <a:srgbClr val="333333"/>
+                          </a:solidFill>
+                        </a:defRPr>
+                      </a:pPr>
+                      <a:r>
+                        <a:t>ZDMS_EXTRACT_DOCS_TO_SFTP</a:t>
+                      </a:r>
+                    </a:p>
+                  </a:txBody>
+                  <a:tcPr>
+                    <a:solidFill>
+                      <a:srgbClr val="FFFFFF"/>
+                    </a:solidFill>
+                  </a:tcPr>
+                </a:tc>
+                <a:tc>
+                  <a:txBody>
+                    <a:bodyPr/>
+                    <a:lstStyle/>
+                    <a:p>
+                      <a:pPr>
+                        <a:defRPr sz="1200">
+                          <a:solidFill>
+                            <a:srgbClr val="333333"/>
+                          </a:solidFill>
+                        </a:defRPr>
+                      </a:pPr>
+                      <a:r>
+                        <a:t>0 callers in Z001 (dynamic / cross-package / dead?)</a:t>
                       </a:r>
                     </a:p>
                   </a:txBody>
@@ -12562,6 +12894,65 @@
           </a:graphicData>
         </a:graphic>
       </p:graphicFrame>
+      <p:sp>
+        <p:nvSpPr>
+          <p:cNvPr id="5" name="TextBox 4"/>
+          <p:cNvSpPr txBox="1"/>
+          <p:nvPr/>
+        </p:nvSpPr>
+        <p:spPr>
+          <a:xfrm>
+            <a:off x="457200" y="5760720"/>
+            <a:ext cx="11247120" cy="822960"/>
+          </a:xfrm>
+          <a:prstGeom prst="rect">
+            <a:avLst/>
+          </a:prstGeom>
+          <a:noFill/>
+        </p:spPr>
+        <p:txBody>
+          <a:bodyPr wrap="square">
+            <a:spAutoFit/>
+          </a:bodyPr>
+          <a:lstStyle/>
+          <a:p>
+            <a:pPr>
+              <a:defRPr sz="1200" b="0">
+                <a:solidFill>
+                  <a:srgbClr val="333333"/>
+                </a:solidFill>
+              </a:defRPr>
+            </a:pPr>
+            <a:r>
+              <a:t>Each wrapper FM reads zfi_constants, assembles the same FTP_USER/HOST_KEY/PRIVATE_KEY_PATH parameter bundle,</a:t>
+            </a:r>
+          </a:p>
+          <a:p>
+            <a:pPr>
+              <a:defRPr sz="1200" b="0">
+                <a:solidFill>
+                  <a:srgbClr val="333333"/>
+                </a:solidFill>
+              </a:defRPr>
+            </a:pPr>
+            <a:r>
+              <a:t>and calls CALL FUNCTION 'SXPG_COMMAND_EXECUTE' — exactly like the 14 direct callers.</a:t>
+            </a:r>
+          </a:p>
+          <a:p>
+            <a:pPr>
+              <a:defRPr sz="1200" b="0">
+                <a:solidFill>
+                  <a:srgbClr val="333333"/>
+                </a:solidFill>
+              </a:defRPr>
+            </a:pPr>
+            <a:r>
+              <a:t>ZDMS_SEND_FILE was discovered late, via the ZSFTP_ SM69-prefix sanity scan — not the initial wrapper-substring search.</a:t>
+            </a:r>
+          </a:p>
+        </p:txBody>
+      </p:sp>
     </p:spTree>
   </p:cSld>
   <p:clrMapOvr>
@@ -12610,7 +13001,7 @@
               </a:defRPr>
             </a:pPr>
             <a:r>
-              <a:t>Code example #1 — direct SXPG call (ZSFTP_CITI_PULL)</a:t>
+              <a:t>11 objects discovered beyond the stakeholder seed list</a:t>
             </a:r>
           </a:p>
         </p:txBody>
@@ -12624,7 +13015,7 @@
         <p:spPr>
           <a:xfrm>
             <a:off x="457200" y="1005840"/>
-            <a:ext cx="11247120" cy="457200"/>
+            <a:ext cx="11247120" cy="548640"/>
           </a:xfrm>
           <a:prstGeom prst="rect">
             <a:avLst/>
@@ -12638,281 +13029,897 @@
           <a:lstStyle/>
           <a:p>
             <a:pPr>
-              <a:defRPr sz="1200" b="0">
+              <a:defRPr sz="1400" b="0">
                 <a:solidFill>
-                  <a:srgbClr val="333333"/>
+                  <a:srgbClr val="C83636"/>
                 </a:solidFill>
               </a:defRPr>
             </a:pPr>
             <a:r>
-              <a:t>Pattern shared by 14 of 16 reports: read credentials from zfi_constants, assemble shell parameters, call SXPG.</a:t>
+              <a:t>The 13-seed list found 8 confirmed SFTP reports. Stage-3 sweep found 11 more (+46%).</a:t>
             </a:r>
           </a:p>
         </p:txBody>
       </p:sp>
-      <p:sp>
-        <p:nvSpPr>
-          <p:cNvPr id="4" name="TextBox 3"/>
-          <p:cNvSpPr txBox="1"/>
+      <p:graphicFrame>
+        <p:nvGraphicFramePr>
+          <p:cNvPr id="4" name="Table 3"/>
+          <p:cNvGraphicFramePr>
+            <a:graphicFrameLocks noGrp="1"/>
+          </p:cNvGraphicFramePr>
           <p:nvPr/>
-        </p:nvSpPr>
-        <p:spPr>
-          <a:xfrm>
-            <a:off x="457200" y="1554480"/>
-            <a:ext cx="11247120" cy="5029200"/>
-          </a:xfrm>
-          <a:prstGeom prst="rect">
-            <a:avLst/>
-          </a:prstGeom>
-          <a:solidFill>
-            <a:srgbClr val="F0F2F7"/>
-          </a:solidFill>
-        </p:spPr>
-        <p:txBody>
-          <a:bodyPr wrap="square">
-            <a:spAutoFit/>
-          </a:bodyPr>
-          <a:lstStyle/>
-          <a:p>
-            <a:pPr>
-              <a:defRPr sz="1200" b="0">
-                <a:solidFill>
-                  <a:srgbClr val="333333"/>
-                </a:solidFill>
-                <a:latin typeface="Consolas"/>
-              </a:defRPr>
-            </a:pPr>
-            <a:r>
-              <a:t>PARAMETERS: p_comm TYPE sxpgcolist-name OBLIGATORY DEFAULT 'ZSFTP_CITI_PULL'.</a:t>
-            </a:r>
-          </a:p>
-          <a:p>
-            <a:pPr>
-              <a:defRPr sz="1200" b="0">
-                <a:solidFill>
-                  <a:srgbClr val="333333"/>
-                </a:solidFill>
-                <a:latin typeface="Consolas"/>
-              </a:defRPr>
-            </a:pPr>
-          </a:p>
-          <a:p>
-            <a:pPr>
-              <a:defRPr sz="1200" b="0">
-                <a:solidFill>
-                  <a:srgbClr val="333333"/>
-                </a:solidFill>
-                <a:latin typeface="Consolas"/>
-              </a:defRPr>
-            </a:pPr>
-            <a:r>
-              <a:t>SELECT * FROM zfi_constants INTO TABLE i_constants WHERE pname = 'ZSFTP_CITI'.</a:t>
-            </a:r>
-          </a:p>
-          <a:p>
-            <a:pPr>
-              <a:defRPr sz="1200" b="0">
-                <a:solidFill>
-                  <a:srgbClr val="333333"/>
-                </a:solidFill>
-                <a:latin typeface="Consolas"/>
-              </a:defRPr>
-            </a:pPr>
-          </a:p>
-          <a:p>
-            <a:pPr>
-              <a:defRPr sz="1200" b="0">
-                <a:solidFill>
-                  <a:srgbClr val="333333"/>
-                </a:solidFill>
-                <a:latin typeface="Consolas"/>
-              </a:defRPr>
-            </a:pPr>
-            <a:r>
-              <a:t>PERFORM f_set_parameter USING 'SOURCE_FOLDER'    'M' ''.</a:t>
-            </a:r>
-          </a:p>
-          <a:p>
-            <a:pPr>
-              <a:defRPr sz="1200" b="0">
-                <a:solidFill>
-                  <a:srgbClr val="333333"/>
-                </a:solidFill>
-                <a:latin typeface="Consolas"/>
-              </a:defRPr>
-            </a:pPr>
-            <a:r>
-              <a:t>PERFORM f_set_parameter USING 'PASSPHRASE'       'M' ' '.</a:t>
-            </a:r>
-          </a:p>
-          <a:p>
-            <a:pPr>
-              <a:defRPr sz="1200" b="0">
-                <a:solidFill>
-                  <a:srgbClr val="333333"/>
-                </a:solidFill>
-                <a:latin typeface="Consolas"/>
-              </a:defRPr>
-            </a:pPr>
-            <a:r>
-              <a:t>PERFORM f_set_parameter USING 'FTP_USER'         'M' ' '.</a:t>
-            </a:r>
-          </a:p>
-          <a:p>
-            <a:pPr>
-              <a:defRPr sz="1200" b="0">
-                <a:solidFill>
-                  <a:srgbClr val="333333"/>
-                </a:solidFill>
-                <a:latin typeface="Consolas"/>
-              </a:defRPr>
-            </a:pPr>
-            <a:r>
-              <a:t>PERFORM f_set_parameter USING 'FTP_DOMAIN'       'M' '@'.</a:t>
-            </a:r>
-          </a:p>
-          <a:p>
-            <a:pPr>
-              <a:defRPr sz="1200" b="0">
-                <a:solidFill>
-                  <a:srgbClr val="333333"/>
-                </a:solidFill>
-                <a:latin typeface="Consolas"/>
-              </a:defRPr>
-            </a:pPr>
-            <a:r>
-              <a:t>PERFORM f_set_parameter USING 'HOST_KEY'         'M' ' '.</a:t>
-            </a:r>
-          </a:p>
-          <a:p>
-            <a:pPr>
-              <a:defRPr sz="1200" b="0">
-                <a:solidFill>
-                  <a:srgbClr val="333333"/>
-                </a:solidFill>
-                <a:latin typeface="Consolas"/>
-              </a:defRPr>
-            </a:pPr>
-            <a:r>
-              <a:t>PERFORM f_set_parameter USING 'PRIVATE_KEY_PATH' 'M' ' '.</a:t>
-            </a:r>
-          </a:p>
-          <a:p>
-            <a:pPr>
-              <a:defRPr sz="1200" b="0">
-                <a:solidFill>
-                  <a:srgbClr val="333333"/>
-                </a:solidFill>
-                <a:latin typeface="Consolas"/>
-              </a:defRPr>
-            </a:pPr>
-          </a:p>
-          <a:p>
-            <a:pPr>
-              <a:defRPr sz="1200" b="0">
-                <a:solidFill>
-                  <a:srgbClr val="333333"/>
-                </a:solidFill>
-                <a:latin typeface="Consolas"/>
-              </a:defRPr>
-            </a:pPr>
-            <a:r>
-              <a:t>CALL FUNCTION 'SXPG_COMMAND_EXECUTE'</a:t>
-            </a:r>
-          </a:p>
-          <a:p>
-            <a:pPr>
-              <a:defRPr sz="1200" b="0">
-                <a:solidFill>
-                  <a:srgbClr val="333333"/>
-                </a:solidFill>
-                <a:latin typeface="Consolas"/>
-              </a:defRPr>
-            </a:pPr>
-            <a:r>
-              <a:t>  EXPORTING</a:t>
-            </a:r>
-          </a:p>
-          <a:p>
-            <a:pPr>
-              <a:defRPr sz="1200" b="0">
-                <a:solidFill>
-                  <a:srgbClr val="333333"/>
-                </a:solidFill>
-                <a:latin typeface="Consolas"/>
-              </a:defRPr>
-            </a:pPr>
-            <a:r>
-              <a:t>    commandname           = p_comm</a:t>
-            </a:r>
-          </a:p>
-          <a:p>
-            <a:pPr>
-              <a:defRPr sz="1200" b="0">
-                <a:solidFill>
-                  <a:srgbClr val="333333"/>
-                </a:solidFill>
-                <a:latin typeface="Consolas"/>
-              </a:defRPr>
-            </a:pPr>
-            <a:r>
-              <a:t>    additional_parameters = g_path</a:t>
-            </a:r>
-          </a:p>
-          <a:p>
-            <a:pPr>
-              <a:defRPr sz="1200" b="0">
-                <a:solidFill>
-                  <a:srgbClr val="333333"/>
-                </a:solidFill>
-                <a:latin typeface="Consolas"/>
-              </a:defRPr>
-            </a:pPr>
-            <a:r>
-              <a:t>  IMPORTING</a:t>
-            </a:r>
-          </a:p>
-          <a:p>
-            <a:pPr>
-              <a:defRPr sz="1200" b="0">
-                <a:solidFill>
-                  <a:srgbClr val="333333"/>
-                </a:solidFill>
-                <a:latin typeface="Consolas"/>
-              </a:defRPr>
-            </a:pPr>
-            <a:r>
-              <a:t>    exitcode              = g_ret_code</a:t>
-            </a:r>
-          </a:p>
-          <a:p>
-            <a:pPr>
-              <a:defRPr sz="1200" b="0">
-                <a:solidFill>
-                  <a:srgbClr val="333333"/>
-                </a:solidFill>
-                <a:latin typeface="Consolas"/>
-              </a:defRPr>
-            </a:pPr>
-            <a:r>
-              <a:t>  TABLES</a:t>
-            </a:r>
-          </a:p>
-          <a:p>
-            <a:pPr>
-              <a:defRPr sz="1200" b="0">
-                <a:solidFill>
-                  <a:srgbClr val="333333"/>
-                </a:solidFill>
-                <a:latin typeface="Consolas"/>
-              </a:defRPr>
-            </a:pPr>
-            <a:r>
-              <a:t>    exec_protocol         = i_return[].</a:t>
-            </a:r>
-          </a:p>
-        </p:txBody>
-      </p:sp>
+        </p:nvGraphicFramePr>
+        <p:xfrm>
+          <a:off x="457200" y="1828800"/>
+          <a:ext cx="11247120" cy="4572000"/>
+        </p:xfrm>
+        <a:graphic>
+          <a:graphicData uri="http://schemas.openxmlformats.org/drawingml/2006/table">
+            <a:tbl>
+              <a:tblPr firstRow="1" bandRow="1">
+                <a:tableStyleId>{5C22544A-7EE6-4342-B048-85BDC9FD1C3A}</a:tableStyleId>
+              </a:tblPr>
+              <a:tblGrid>
+                <a:gridCol w="3200400"/>
+                <a:gridCol w="914400"/>
+                <a:gridCol w="7132320"/>
+              </a:tblGrid>
+              <a:tr h="381000">
+                <a:tc>
+                  <a:txBody>
+                    <a:bodyPr/>
+                    <a:lstStyle/>
+                    <a:p>
+                      <a:pPr>
+                        <a:defRPr sz="1300" b="1">
+                          <a:solidFill>
+                            <a:srgbClr val="FFFFFF"/>
+                          </a:solidFill>
+                        </a:defRPr>
+                      </a:pPr>
+                      <a:r>
+                        <a:t>Object</a:t>
+                      </a:r>
+                    </a:p>
+                  </a:txBody>
+                  <a:tcPr>
+                    <a:solidFill>
+                      <a:srgbClr val="1F3A68"/>
+                    </a:solidFill>
+                  </a:tcPr>
+                </a:tc>
+                <a:tc>
+                  <a:txBody>
+                    <a:bodyPr/>
+                    <a:lstStyle/>
+                    <a:p>
+                      <a:pPr>
+                        <a:defRPr sz="1300" b="1">
+                          <a:solidFill>
+                            <a:srgbClr val="FFFFFF"/>
+                          </a:solidFill>
+                        </a:defRPr>
+                      </a:pPr>
+                      <a:r>
+                        <a:t>Type</a:t>
+                      </a:r>
+                    </a:p>
+                  </a:txBody>
+                  <a:tcPr>
+                    <a:solidFill>
+                      <a:srgbClr val="1F3A68"/>
+                    </a:solidFill>
+                  </a:tcPr>
+                </a:tc>
+                <a:tc>
+                  <a:txBody>
+                    <a:bodyPr/>
+                    <a:lstStyle/>
+                    <a:p>
+                      <a:pPr>
+                        <a:defRPr sz="1300" b="1">
+                          <a:solidFill>
+                            <a:srgbClr val="FFFFFF"/>
+                          </a:solidFill>
+                        </a:defRPr>
+                      </a:pPr>
+                      <a:r>
+                        <a:t>Why missed in seed list</a:t>
+                      </a:r>
+                    </a:p>
+                  </a:txBody>
+                  <a:tcPr>
+                    <a:solidFill>
+                      <a:srgbClr val="1F3A68"/>
+                    </a:solidFill>
+                  </a:tcPr>
+                </a:tc>
+              </a:tr>
+              <a:tr h="381000">
+                <a:tc>
+                  <a:txBody>
+                    <a:bodyPr/>
+                    <a:lstStyle/>
+                    <a:p>
+                      <a:pPr>
+                        <a:defRPr sz="1100">
+                          <a:solidFill>
+                            <a:srgbClr val="333333"/>
+                          </a:solidFill>
+                        </a:defRPr>
+                      </a:pPr>
+                      <a:r>
+                        <a:t>ZSFTP_BNP_PARIBAS</a:t>
+                      </a:r>
+                    </a:p>
+                  </a:txBody>
+                  <a:tcPr>
+                    <a:solidFill>
+                      <a:srgbClr val="FFFFFF"/>
+                    </a:solidFill>
+                  </a:tcPr>
+                </a:tc>
+                <a:tc>
+                  <a:txBody>
+                    <a:bodyPr/>
+                    <a:lstStyle/>
+                    <a:p>
+                      <a:pPr>
+                        <a:defRPr sz="1100">
+                          <a:solidFill>
+                            <a:srgbClr val="333333"/>
+                          </a:solidFill>
+                        </a:defRPr>
+                      </a:pPr>
+                      <a:r>
+                        <a:t>PROG</a:t>
+                      </a:r>
+                    </a:p>
+                  </a:txBody>
+                  <a:tcPr>
+                    <a:solidFill>
+                      <a:srgbClr val="FFFFFF"/>
+                    </a:solidFill>
+                  </a:tcPr>
+                </a:tc>
+                <a:tc>
+                  <a:txBody>
+                    <a:bodyPr/>
+                    <a:lstStyle/>
+                    <a:p>
+                      <a:pPr>
+                        <a:defRPr sz="1100">
+                          <a:solidFill>
+                            <a:srgbClr val="333333"/>
+                          </a:solidFill>
+                        </a:defRPr>
+                      </a:pPr>
+                      <a:r>
+                        <a:t>Password-only auth — no PRIVATE_KEY_PATH marker</a:t>
+                      </a:r>
+                    </a:p>
+                  </a:txBody>
+                  <a:tcPr>
+                    <a:solidFill>
+                      <a:srgbClr val="FFFFFF"/>
+                    </a:solidFill>
+                  </a:tcPr>
+                </a:tc>
+              </a:tr>
+              <a:tr h="381000">
+                <a:tc>
+                  <a:txBody>
+                    <a:bodyPr/>
+                    <a:lstStyle/>
+                    <a:p>
+                      <a:pPr>
+                        <a:defRPr sz="1100">
+                          <a:solidFill>
+                            <a:srgbClr val="333333"/>
+                          </a:solidFill>
+                        </a:defRPr>
+                      </a:pPr>
+                      <a:r>
+                        <a:t>ZSFTP_BNP_PARIBAS_WITH_PGP</a:t>
+                      </a:r>
+                    </a:p>
+                  </a:txBody>
+                  <a:tcPr>
+                    <a:solidFill>
+                      <a:srgbClr val="F0F2F7"/>
+                    </a:solidFill>
+                  </a:tcPr>
+                </a:tc>
+                <a:tc>
+                  <a:txBody>
+                    <a:bodyPr/>
+                    <a:lstStyle/>
+                    <a:p>
+                      <a:pPr>
+                        <a:defRPr sz="1100">
+                          <a:solidFill>
+                            <a:srgbClr val="333333"/>
+                          </a:solidFill>
+                        </a:defRPr>
+                      </a:pPr>
+                      <a:r>
+                        <a:t>PROG</a:t>
+                      </a:r>
+                    </a:p>
+                  </a:txBody>
+                  <a:tcPr>
+                    <a:solidFill>
+                      <a:srgbClr val="F0F2F7"/>
+                    </a:solidFill>
+                  </a:tcPr>
+                </a:tc>
+                <a:tc>
+                  <a:txBody>
+                    <a:bodyPr/>
+                    <a:lstStyle/>
+                    <a:p>
+                      <a:pPr>
+                        <a:defRPr sz="1100">
+                          <a:solidFill>
+                            <a:srgbClr val="333333"/>
+                          </a:solidFill>
+                        </a:defRPr>
+                      </a:pPr>
+                      <a:r>
+                        <a:t>Newer PGP variant of existing BNP report</a:t>
+                      </a:r>
+                    </a:p>
+                  </a:txBody>
+                  <a:tcPr>
+                    <a:solidFill>
+                      <a:srgbClr val="F0F2F7"/>
+                    </a:solidFill>
+                  </a:tcPr>
+                </a:tc>
+              </a:tr>
+              <a:tr h="381000">
+                <a:tc>
+                  <a:txBody>
+                    <a:bodyPr/>
+                    <a:lstStyle/>
+                    <a:p>
+                      <a:pPr>
+                        <a:defRPr sz="1100">
+                          <a:solidFill>
+                            <a:srgbClr val="333333"/>
+                          </a:solidFill>
+                        </a:defRPr>
+                      </a:pPr>
+                      <a:r>
+                        <a:t>ZSFTP_CERIDIAN_PULL</a:t>
+                      </a:r>
+                    </a:p>
+                  </a:txBody>
+                  <a:tcPr>
+                    <a:solidFill>
+                      <a:srgbClr val="FFFFFF"/>
+                    </a:solidFill>
+                  </a:tcPr>
+                </a:tc>
+                <a:tc>
+                  <a:txBody>
+                    <a:bodyPr/>
+                    <a:lstStyle/>
+                    <a:p>
+                      <a:pPr>
+                        <a:defRPr sz="1100">
+                          <a:solidFill>
+                            <a:srgbClr val="333333"/>
+                          </a:solidFill>
+                        </a:defRPr>
+                      </a:pPr>
+                      <a:r>
+                        <a:t>PROG</a:t>
+                      </a:r>
+                    </a:p>
+                  </a:txBody>
+                  <a:tcPr>
+                    <a:solidFill>
+                      <a:srgbClr val="FFFFFF"/>
+                    </a:solidFill>
+                  </a:tcPr>
+                </a:tc>
+                <a:tc>
+                  <a:txBody>
+                    <a:bodyPr/>
+                    <a:lstStyle/>
+                    <a:p>
+                      <a:pPr>
+                        <a:defRPr sz="1100">
+                          <a:solidFill>
+                            <a:srgbClr val="333333"/>
+                          </a:solidFill>
+                        </a:defRPr>
+                      </a:pPr>
+                      <a:r>
+                        <a:t>Operator-facing duplicate of ZFFIU_ACC_POST flow</a:t>
+                      </a:r>
+                    </a:p>
+                  </a:txBody>
+                  <a:tcPr>
+                    <a:solidFill>
+                      <a:srgbClr val="FFFFFF"/>
+                    </a:solidFill>
+                  </a:tcPr>
+                </a:tc>
+              </a:tr>
+              <a:tr h="381000">
+                <a:tc>
+                  <a:txBody>
+                    <a:bodyPr/>
+                    <a:lstStyle/>
+                    <a:p>
+                      <a:pPr>
+                        <a:defRPr sz="1100">
+                          <a:solidFill>
+                            <a:srgbClr val="333333"/>
+                          </a:solidFill>
+                        </a:defRPr>
+                      </a:pPr>
+                      <a:r>
+                        <a:t>ZSFTP_CITI_SEND</a:t>
+                      </a:r>
+                    </a:p>
+                  </a:txBody>
+                  <a:tcPr>
+                    <a:solidFill>
+                      <a:srgbClr val="F0F2F7"/>
+                    </a:solidFill>
+                  </a:tcPr>
+                </a:tc>
+                <a:tc>
+                  <a:txBody>
+                    <a:bodyPr/>
+                    <a:lstStyle/>
+                    <a:p>
+                      <a:pPr>
+                        <a:defRPr sz="1100">
+                          <a:solidFill>
+                            <a:srgbClr val="333333"/>
+                          </a:solidFill>
+                        </a:defRPr>
+                      </a:pPr>
+                      <a:r>
+                        <a:t>PROG</a:t>
+                      </a:r>
+                    </a:p>
+                  </a:txBody>
+                  <a:tcPr>
+                    <a:solidFill>
+                      <a:srgbClr val="F0F2F7"/>
+                    </a:solidFill>
+                  </a:tcPr>
+                </a:tc>
+                <a:tc>
+                  <a:txBody>
+                    <a:bodyPr/>
+                    <a:lstStyle/>
+                    <a:p>
+                      <a:pPr>
+                        <a:defRPr sz="1100">
+                          <a:solidFill>
+                            <a:srgbClr val="333333"/>
+                          </a:solidFill>
+                        </a:defRPr>
+                      </a:pPr>
+                      <a:r>
+                        <a:t>Outbound counterpart of ZSFTP_CITI_PULL</a:t>
+                      </a:r>
+                    </a:p>
+                  </a:txBody>
+                  <a:tcPr>
+                    <a:solidFill>
+                      <a:srgbClr val="F0F2F7"/>
+                    </a:solidFill>
+                  </a:tcPr>
+                </a:tc>
+              </a:tr>
+              <a:tr h="381000">
+                <a:tc>
+                  <a:txBody>
+                    <a:bodyPr/>
+                    <a:lstStyle/>
+                    <a:p>
+                      <a:pPr>
+                        <a:defRPr sz="1100">
+                          <a:solidFill>
+                            <a:srgbClr val="333333"/>
+                          </a:solidFill>
+                        </a:defRPr>
+                      </a:pPr>
+                      <a:r>
+                        <a:t>ZSFTP_JPM</a:t>
+                      </a:r>
+                    </a:p>
+                  </a:txBody>
+                  <a:tcPr>
+                    <a:solidFill>
+                      <a:srgbClr val="FFFFFF"/>
+                    </a:solidFill>
+                  </a:tcPr>
+                </a:tc>
+                <a:tc>
+                  <a:txBody>
+                    <a:bodyPr/>
+                    <a:lstStyle/>
+                    <a:p>
+                      <a:pPr>
+                        <a:defRPr sz="1100">
+                          <a:solidFill>
+                            <a:srgbClr val="333333"/>
+                          </a:solidFill>
+                        </a:defRPr>
+                      </a:pPr>
+                      <a:r>
+                        <a:t>PROG</a:t>
+                      </a:r>
+                    </a:p>
+                  </a:txBody>
+                  <a:tcPr>
+                    <a:solidFill>
+                      <a:srgbClr val="FFFFFF"/>
+                    </a:solidFill>
+                  </a:tcPr>
+                </a:tc>
+                <a:tc>
+                  <a:txBody>
+                    <a:bodyPr/>
+                    <a:lstStyle/>
+                    <a:p>
+                      <a:pPr>
+                        <a:defRPr sz="1100">
+                          <a:solidFill>
+                            <a:srgbClr val="333333"/>
+                          </a:solidFill>
+                        </a:defRPr>
+                      </a:pPr>
+                      <a:r>
+                        <a:t>Entire JPMorgan integration not in seeds</a:t>
+                      </a:r>
+                    </a:p>
+                  </a:txBody>
+                  <a:tcPr>
+                    <a:solidFill>
+                      <a:srgbClr val="FFFFFF"/>
+                    </a:solidFill>
+                  </a:tcPr>
+                </a:tc>
+              </a:tr>
+              <a:tr h="381000">
+                <a:tc>
+                  <a:txBody>
+                    <a:bodyPr/>
+                    <a:lstStyle/>
+                    <a:p>
+                      <a:pPr>
+                        <a:defRPr sz="1100">
+                          <a:solidFill>
+                            <a:srgbClr val="333333"/>
+                          </a:solidFill>
+                        </a:defRPr>
+                      </a:pPr>
+                      <a:r>
+                        <a:t>ZSFTP_JPM_PULL</a:t>
+                      </a:r>
+                    </a:p>
+                  </a:txBody>
+                  <a:tcPr>
+                    <a:solidFill>
+                      <a:srgbClr val="F0F2F7"/>
+                    </a:solidFill>
+                  </a:tcPr>
+                </a:tc>
+                <a:tc>
+                  <a:txBody>
+                    <a:bodyPr/>
+                    <a:lstStyle/>
+                    <a:p>
+                      <a:pPr>
+                        <a:defRPr sz="1100">
+                          <a:solidFill>
+                            <a:srgbClr val="333333"/>
+                          </a:solidFill>
+                        </a:defRPr>
+                      </a:pPr>
+                      <a:r>
+                        <a:t>PROG</a:t>
+                      </a:r>
+                    </a:p>
+                  </a:txBody>
+                  <a:tcPr>
+                    <a:solidFill>
+                      <a:srgbClr val="F0F2F7"/>
+                    </a:solidFill>
+                  </a:tcPr>
+                </a:tc>
+                <a:tc>
+                  <a:txBody>
+                    <a:bodyPr/>
+                    <a:lstStyle/>
+                    <a:p>
+                      <a:pPr>
+                        <a:defRPr sz="1100">
+                          <a:solidFill>
+                            <a:srgbClr val="333333"/>
+                          </a:solidFill>
+                        </a:defRPr>
+                      </a:pPr>
+                      <a:r>
+                        <a:t>Entire JPMorgan integration not in seeds</a:t>
+                      </a:r>
+                    </a:p>
+                  </a:txBody>
+                  <a:tcPr>
+                    <a:solidFill>
+                      <a:srgbClr val="F0F2F7"/>
+                    </a:solidFill>
+                  </a:tcPr>
+                </a:tc>
+              </a:tr>
+              <a:tr h="381000">
+                <a:tc>
+                  <a:txBody>
+                    <a:bodyPr/>
+                    <a:lstStyle/>
+                    <a:p>
+                      <a:pPr>
+                        <a:defRPr sz="1100">
+                          <a:solidFill>
+                            <a:srgbClr val="333333"/>
+                          </a:solidFill>
+                        </a:defRPr>
+                      </a:pPr>
+                      <a:r>
+                        <a:t>ZDMS_REPLACE_FILES</a:t>
+                      </a:r>
+                    </a:p>
+                  </a:txBody>
+                  <a:tcPr>
+                    <a:solidFill>
+                      <a:srgbClr val="FFFFFF"/>
+                    </a:solidFill>
+                  </a:tcPr>
+                </a:tc>
+                <a:tc>
+                  <a:txBody>
+                    <a:bodyPr/>
+                    <a:lstStyle/>
+                    <a:p>
+                      <a:pPr>
+                        <a:defRPr sz="1100">
+                          <a:solidFill>
+                            <a:srgbClr val="333333"/>
+                          </a:solidFill>
+                        </a:defRPr>
+                      </a:pPr>
+                      <a:r>
+                        <a:t>PROG</a:t>
+                      </a:r>
+                    </a:p>
+                  </a:txBody>
+                  <a:tcPr>
+                    <a:solidFill>
+                      <a:srgbClr val="FFFFFF"/>
+                    </a:solidFill>
+                  </a:tcPr>
+                </a:tc>
+                <a:tc>
+                  <a:txBody>
+                    <a:bodyPr/>
+                    <a:lstStyle/>
+                    <a:p>
+                      <a:pPr>
+                        <a:defRPr sz="1100">
+                          <a:solidFill>
+                            <a:srgbClr val="333333"/>
+                          </a:solidFill>
+                        </a:defRPr>
+                      </a:pPr>
+                      <a:r>
+                        <a:t>Adjacent DMS report sharing SM69 commands</a:t>
+                      </a:r>
+                    </a:p>
+                  </a:txBody>
+                  <a:tcPr>
+                    <a:solidFill>
+                      <a:srgbClr val="FFFFFF"/>
+                    </a:solidFill>
+                  </a:tcPr>
+                </a:tc>
+              </a:tr>
+              <a:tr h="381000">
+                <a:tc>
+                  <a:txBody>
+                    <a:bodyPr/>
+                    <a:lstStyle/>
+                    <a:p>
+                      <a:pPr>
+                        <a:defRPr sz="1100">
+                          <a:solidFill>
+                            <a:srgbClr val="333333"/>
+                          </a:solidFill>
+                        </a:defRPr>
+                      </a:pPr>
+                      <a:r>
+                        <a:t>ZSD_ERX_DMS_FILE_PROCESS</a:t>
+                      </a:r>
+                    </a:p>
+                  </a:txBody>
+                  <a:tcPr>
+                    <a:solidFill>
+                      <a:srgbClr val="F0F2F7"/>
+                    </a:solidFill>
+                  </a:tcPr>
+                </a:tc>
+                <a:tc>
+                  <a:txBody>
+                    <a:bodyPr/>
+                    <a:lstStyle/>
+                    <a:p>
+                      <a:pPr>
+                        <a:defRPr sz="1100">
+                          <a:solidFill>
+                            <a:srgbClr val="333333"/>
+                          </a:solidFill>
+                        </a:defRPr>
+                      </a:pPr>
+                      <a:r>
+                        <a:t>PROG</a:t>
+                      </a:r>
+                    </a:p>
+                  </a:txBody>
+                  <a:tcPr>
+                    <a:solidFill>
+                      <a:srgbClr val="F0F2F7"/>
+                    </a:solidFill>
+                  </a:tcPr>
+                </a:tc>
+                <a:tc>
+                  <a:txBody>
+                    <a:bodyPr/>
+                    <a:lstStyle/>
+                    <a:p>
+                      <a:pPr>
+                        <a:defRPr sz="1100">
+                          <a:solidFill>
+                            <a:srgbClr val="333333"/>
+                          </a:solidFill>
+                        </a:defRPr>
+                      </a:pPr>
+                      <a:r>
+                        <a:t>Indirect SFTP via ZERX wrapper FUGR</a:t>
+                      </a:r>
+                    </a:p>
+                  </a:txBody>
+                  <a:tcPr>
+                    <a:solidFill>
+                      <a:srgbClr val="F0F2F7"/>
+                    </a:solidFill>
+                  </a:tcPr>
+                </a:tc>
+              </a:tr>
+              <a:tr h="381000">
+                <a:tc>
+                  <a:txBody>
+                    <a:bodyPr/>
+                    <a:lstStyle/>
+                    <a:p>
+                      <a:pPr>
+                        <a:defRPr sz="1100">
+                          <a:solidFill>
+                            <a:srgbClr val="333333"/>
+                          </a:solidFill>
+                        </a:defRPr>
+                      </a:pPr>
+                      <a:r>
+                        <a:t>ZMEDICARE</a:t>
+                      </a:r>
+                    </a:p>
+                  </a:txBody>
+                  <a:tcPr>
+                    <a:solidFill>
+                      <a:srgbClr val="FFFFFF"/>
+                    </a:solidFill>
+                  </a:tcPr>
+                </a:tc>
+                <a:tc>
+                  <a:txBody>
+                    <a:bodyPr/>
+                    <a:lstStyle/>
+                    <a:p>
+                      <a:pPr>
+                        <a:defRPr sz="1100">
+                          <a:solidFill>
+                            <a:srgbClr val="333333"/>
+                          </a:solidFill>
+                        </a:defRPr>
+                      </a:pPr>
+                      <a:r>
+                        <a:t>FUGR</a:t>
+                      </a:r>
+                    </a:p>
+                  </a:txBody>
+                  <a:tcPr>
+                    <a:solidFill>
+                      <a:srgbClr val="FFFFFF"/>
+                    </a:solidFill>
+                  </a:tcPr>
+                </a:tc>
+                <a:tc>
+                  <a:txBody>
+                    <a:bodyPr/>
+                    <a:lstStyle/>
+                    <a:p>
+                      <a:pPr>
+                        <a:defRPr sz="1100">
+                          <a:solidFill>
+                            <a:srgbClr val="333333"/>
+                          </a:solidFill>
+                        </a:defRPr>
+                      </a:pPr>
+                      <a:r>
+                        <a:t>Wrapper FUGR — never in a 'report list'</a:t>
+                      </a:r>
+                    </a:p>
+                  </a:txBody>
+                  <a:tcPr>
+                    <a:solidFill>
+                      <a:srgbClr val="FFFFFF"/>
+                    </a:solidFill>
+                  </a:tcPr>
+                </a:tc>
+              </a:tr>
+              <a:tr h="381000">
+                <a:tc>
+                  <a:txBody>
+                    <a:bodyPr/>
+                    <a:lstStyle/>
+                    <a:p>
+                      <a:pPr>
+                        <a:defRPr sz="1100">
+                          <a:solidFill>
+                            <a:srgbClr val="333333"/>
+                          </a:solidFill>
+                        </a:defRPr>
+                      </a:pPr>
+                      <a:r>
+                        <a:t>ZERX</a:t>
+                      </a:r>
+                    </a:p>
+                  </a:txBody>
+                  <a:tcPr>
+                    <a:solidFill>
+                      <a:srgbClr val="F0F2F7"/>
+                    </a:solidFill>
+                  </a:tcPr>
+                </a:tc>
+                <a:tc>
+                  <a:txBody>
+                    <a:bodyPr/>
+                    <a:lstStyle/>
+                    <a:p>
+                      <a:pPr>
+                        <a:defRPr sz="1100">
+                          <a:solidFill>
+                            <a:srgbClr val="333333"/>
+                          </a:solidFill>
+                        </a:defRPr>
+                      </a:pPr>
+                      <a:r>
+                        <a:t>FUGR</a:t>
+                      </a:r>
+                    </a:p>
+                  </a:txBody>
+                  <a:tcPr>
+                    <a:solidFill>
+                      <a:srgbClr val="F0F2F7"/>
+                    </a:solidFill>
+                  </a:tcPr>
+                </a:tc>
+                <a:tc>
+                  <a:txBody>
+                    <a:bodyPr/>
+                    <a:lstStyle/>
+                    <a:p>
+                      <a:pPr>
+                        <a:defRPr sz="1100">
+                          <a:solidFill>
+                            <a:srgbClr val="333333"/>
+                          </a:solidFill>
+                        </a:defRPr>
+                      </a:pPr>
+                      <a:r>
+                        <a:t>Same — wrapper FUGR for eRx/DMS path</a:t>
+                      </a:r>
+                    </a:p>
+                  </a:txBody>
+                  <a:tcPr>
+                    <a:solidFill>
+                      <a:srgbClr val="F0F2F7"/>
+                    </a:solidFill>
+                  </a:tcPr>
+                </a:tc>
+              </a:tr>
+              <a:tr h="381000">
+                <a:tc>
+                  <a:txBody>
+                    <a:bodyPr/>
+                    <a:lstStyle/>
+                    <a:p>
+                      <a:pPr>
+                        <a:defRPr sz="1100">
+                          <a:solidFill>
+                            <a:srgbClr val="333333"/>
+                          </a:solidFill>
+                        </a:defRPr>
+                      </a:pPr>
+                      <a:r>
+                        <a:t>ZDMS_SEND_FILE</a:t>
+                      </a:r>
+                    </a:p>
+                  </a:txBody>
+                  <a:tcPr>
+                    <a:solidFill>
+                      <a:srgbClr val="FFFFFF"/>
+                    </a:solidFill>
+                  </a:tcPr>
+                </a:tc>
+                <a:tc>
+                  <a:txBody>
+                    <a:bodyPr/>
+                    <a:lstStyle/>
+                    <a:p>
+                      <a:pPr>
+                        <a:defRPr sz="1100">
+                          <a:solidFill>
+                            <a:srgbClr val="333333"/>
+                          </a:solidFill>
+                        </a:defRPr>
+                      </a:pPr>
+                      <a:r>
+                        <a:t>FUGR</a:t>
+                      </a:r>
+                    </a:p>
+                  </a:txBody>
+                  <a:tcPr>
+                    <a:solidFill>
+                      <a:srgbClr val="FFFFFF"/>
+                    </a:solidFill>
+                  </a:tcPr>
+                </a:tc>
+                <a:tc>
+                  <a:txBody>
+                    <a:bodyPr/>
+                    <a:lstStyle/>
+                    <a:p>
+                      <a:pPr>
+                        <a:defRPr sz="1100">
+                          <a:solidFill>
+                            <a:srgbClr val="333333"/>
+                          </a:solidFill>
+                        </a:defRPr>
+                      </a:pPr>
+                      <a:r>
+                        <a:t>Wrapper FUGR with _TO_SFTP naming — initial substring scan looked for _FROM_SFTP only</a:t>
+                      </a:r>
+                    </a:p>
+                  </a:txBody>
+                  <a:tcPr>
+                    <a:solidFill>
+                      <a:srgbClr val="FFFFFF"/>
+                    </a:solidFill>
+                  </a:tcPr>
+                </a:tc>
+              </a:tr>
+            </a:tbl>
+          </a:graphicData>
+        </a:graphic>
+      </p:graphicFrame>
     </p:spTree>
   </p:cSld>
   <p:clrMapOvr>
@@ -12961,7 +13968,7 @@
               </a:defRPr>
             </a:pPr>
             <a:r>
-              <a:t>Code example #2 — wrapper FM (ZMEDI_GET_FROM_SFTP)</a:t>
+              <a:t>Code example #1 — direct SXPG call (ZSFTP_CITI_PULL)</a:t>
             </a:r>
           </a:p>
         </p:txBody>
@@ -12996,7 +14003,7 @@
               </a:defRPr>
             </a:pPr>
             <a:r>
-              <a:t>Same SXPG-shell pattern inside a function module — 2 reports invoke this instead of duplicating the plumbing.</a:t>
+              <a:t>Pattern shared by 14 of 16 reports: read credentials from zfi_constants, assemble shell parameters, call SXPG.</a:t>
             </a:r>
           </a:p>
         </p:txBody>
@@ -13034,7 +14041,7 @@
               </a:defRPr>
             </a:pPr>
             <a:r>
-              <a:t>FUNCTION zmedi_get_from_sftp</a:t>
+              <a:t>PARAMETERS: p_comm TYPE sxpgcolist-name OBLIGATORY DEFAULT 'ZSFTP_CITI_PULL'.</a:t>
             </a:r>
           </a:p>
           <a:p>
@@ -13046,9 +14053,6 @@
                 <a:latin typeface="Consolas"/>
               </a:defRPr>
             </a:pPr>
-            <a:r>
-              <a:t>  IMPORTING command   TYPE sxpgcolist-name</a:t>
-            </a:r>
           </a:p>
           <a:p>
             <a:pPr>
@@ -13060,7 +14064,7 @@
               </a:defRPr>
             </a:pPr>
             <a:r>
-              <a:t>            constants TYPE bdc_prog</a:t>
+              <a:t>SELECT * FROM zfi_constants INTO TABLE i_constants WHERE pname = 'ZSFTP_CITI'.</a:t>
             </a:r>
           </a:p>
           <a:p>
@@ -13072,9 +14076,6 @@
                 <a:latin typeface="Consolas"/>
               </a:defRPr>
             </a:pPr>
-            <a:r>
-              <a:t>  TABLES    return    LIKE bapiret2 OPTIONAL.</a:t>
-            </a:r>
           </a:p>
           <a:p>
             <a:pPr>
@@ -13085,6 +14086,9 @@
                 <a:latin typeface="Consolas"/>
               </a:defRPr>
             </a:pPr>
+            <a:r>
+              <a:t>PERFORM f_set_parameter USING 'SOURCE_FOLDER'    'M' ''.</a:t>
+            </a:r>
           </a:p>
           <a:p>
             <a:pPr>
@@ -13096,7 +14100,7 @@
               </a:defRPr>
             </a:pPr>
             <a:r>
-              <a:t>  SELECT * FROM zfi_constants INTO TABLE gt_constants WHERE pname = constants.</a:t>
+              <a:t>PERFORM f_set_parameter USING 'PASSPHRASE'       'M' ' '.</a:t>
             </a:r>
           </a:p>
           <a:p>
@@ -13108,6 +14112,9 @@
                 <a:latin typeface="Consolas"/>
               </a:defRPr>
             </a:pPr>
+            <a:r>
+              <a:t>PERFORM f_set_parameter USING 'FTP_USER'         'M' ' '.</a:t>
+            </a:r>
           </a:p>
           <a:p>
             <a:pPr>
@@ -13119,7 +14126,7 @@
               </a:defRPr>
             </a:pPr>
             <a:r>
-              <a:t>  PERFORM f_set_parameter USING 'FTP_USER'         'M' ''.</a:t>
+              <a:t>PERFORM f_set_parameter USING 'FTP_DOMAIN'       'M' '@'.</a:t>
             </a:r>
           </a:p>
           <a:p>
@@ -13132,7 +14139,7 @@
               </a:defRPr>
             </a:pPr>
             <a:r>
-              <a:t>  PERFORM f_set_parameter USING 'PASSPHRASE'       'M' ':'.</a:t>
+              <a:t>PERFORM f_set_parameter USING 'HOST_KEY'         'M' ' '.</a:t>
             </a:r>
           </a:p>
           <a:p>
@@ -13145,7 +14152,7 @@
               </a:defRPr>
             </a:pPr>
             <a:r>
-              <a:t>  PERFORM f_set_parameter USING 'HOST_KEY'         'M' ';'.</a:t>
+              <a:t>PERFORM f_set_parameter USING 'PRIVATE_KEY_PATH' 'M' ' '.</a:t>
             </a:r>
           </a:p>
           <a:p>
@@ -13157,9 +14164,6 @@
                 <a:latin typeface="Consolas"/>
               </a:defRPr>
             </a:pPr>
-            <a:r>
-              <a:t>  PERFORM f_set_parameter USING 'FTP_DOMAIN'       'M' ';'.</a:t>
-            </a:r>
           </a:p>
           <a:p>
             <a:pPr>
@@ -13171,7 +14175,7 @@
               </a:defRPr>
             </a:pPr>
             <a:r>
-              <a:t>  PERFORM f_set_parameter USING 'PRIVATE_KEY_PATH' 'M' ';'.</a:t>
+              <a:t>CALL FUNCTION 'SXPG_COMMAND_EXECUTE'</a:t>
             </a:r>
           </a:p>
           <a:p>
@@ -13184,7 +14188,7 @@
               </a:defRPr>
             </a:pPr>
             <a:r>
-              <a:t>  PERFORM f_set_parameter USING 'SOURCE_PATH'      'M' ';'.</a:t>
+              <a:t>  EXPORTING</a:t>
             </a:r>
           </a:p>
           <a:p>
@@ -13196,6 +14200,9 @@
                 <a:latin typeface="Consolas"/>
               </a:defRPr>
             </a:pPr>
+            <a:r>
+              <a:t>    commandname           = p_comm</a:t>
+            </a:r>
           </a:p>
           <a:p>
             <a:pPr>
@@ -13207,7 +14214,7 @@
               </a:defRPr>
             </a:pPr>
             <a:r>
-              <a:t>  CALL FUNCTION 'SXPG_COMMAND_EXECUTE'</a:t>
+              <a:t>    additional_parameters = g_path</a:t>
             </a:r>
           </a:p>
           <a:p>
@@ -13220,7 +14227,7 @@
               </a:defRPr>
             </a:pPr>
             <a:r>
-              <a:t>    EXPORTING commandname           = command</a:t>
+              <a:t>  IMPORTING</a:t>
             </a:r>
           </a:p>
           <a:p>
@@ -13233,7 +14240,7 @@
               </a:defRPr>
             </a:pPr>
             <a:r>
-              <a:t>              additional_parameters = gv_param</a:t>
+              <a:t>    exitcode              = g_ret_code</a:t>
             </a:r>
           </a:p>
           <a:p>
@@ -13246,7 +14253,7 @@
               </a:defRPr>
             </a:pPr>
             <a:r>
-              <a:t>    IMPORTING exitcode              = lv_ret_code</a:t>
+              <a:t>  TABLES</a:t>
             </a:r>
           </a:p>
           <a:p>
@@ -13259,20 +14266,7 @@
               </a:defRPr>
             </a:pPr>
             <a:r>
-              <a:t>    TABLES    exec_protocol         = lt_return[].</a:t>
-            </a:r>
-          </a:p>
-          <a:p>
-            <a:pPr>
-              <a:defRPr sz="1200" b="0">
-                <a:solidFill>
-                  <a:srgbClr val="333333"/>
-                </a:solidFill>
-                <a:latin typeface="Consolas"/>
-              </a:defRPr>
-            </a:pPr>
-            <a:r>
-              <a:t>ENDFUNCTION.</a:t>
+              <a:t>    exec_protocol         = i_return[].</a:t>
             </a:r>
           </a:p>
         </p:txBody>
@@ -13325,7 +14319,7 @@
               </a:defRPr>
             </a:pPr>
             <a:r>
-              <a:t>Migration proposal — one ABAP-level change point</a:t>
+              <a:t>Code example #2 — wrapper FM (ZMEDI_GET_FROM_SFTP)</a:t>
             </a:r>
           </a:p>
         </p:txBody>
@@ -13339,7 +14333,7 @@
         <p:spPr>
           <a:xfrm>
             <a:off x="457200" y="1005840"/>
-            <a:ext cx="11247120" cy="640080"/>
+            <a:ext cx="11247120" cy="457200"/>
           </a:xfrm>
           <a:prstGeom prst="rect">
             <a:avLst/>
@@ -13353,437 +14347,35 @@
           <a:lstStyle/>
           <a:p>
             <a:pPr>
-              <a:defRPr sz="1400" b="0">
+              <a:defRPr sz="1200" b="0">
                 <a:solidFill>
-                  <a:srgbClr val="C83636"/>
+                  <a:srgbClr val="333333"/>
                 </a:solidFill>
               </a:defRPr>
             </a:pPr>
             <a:r>
-              <a:t>Replace CALL FUNCTION 'SXPG_COMMAND_EXECUTE' (with SM69 entries that shell out to OS sftp/scp) with a native ABAP SFTP layer.</a:t>
+              <a:t>Same SXPG-shell pattern inside a function module — 2 reports invoke this instead of duplicating the plumbing.</a:t>
             </a:r>
           </a:p>
         </p:txBody>
       </p:sp>
-      <p:graphicFrame>
-        <p:nvGraphicFramePr>
-          <p:cNvPr id="4" name="Table 3"/>
-          <p:cNvGraphicFramePr>
-            <a:graphicFrameLocks noGrp="1"/>
-          </p:cNvGraphicFramePr>
-          <p:nvPr/>
-        </p:nvGraphicFramePr>
-        <p:xfrm>
-          <a:off x="457200" y="2011680"/>
-          <a:ext cx="11247120" cy="4114800"/>
-        </p:xfrm>
-        <a:graphic>
-          <a:graphicData uri="http://schemas.openxmlformats.org/drawingml/2006/table">
-            <a:tbl>
-              <a:tblPr firstRow="1" bandRow="1">
-                <a:tableStyleId>{5C22544A-7EE6-4342-B048-85BDC9FD1C3A}</a:tableStyleId>
-              </a:tblPr>
-              <a:tblGrid>
-                <a:gridCol w="457200"/>
-                <a:gridCol w="3657600"/>
-                <a:gridCol w="3931920"/>
-                <a:gridCol w="3200400"/>
-              </a:tblGrid>
-              <a:tr h="1028700">
-                <a:tc>
-                  <a:txBody>
-                    <a:bodyPr/>
-                    <a:lstStyle/>
-                    <a:p>
-                      <a:pPr>
-                        <a:defRPr sz="1300" b="1">
-                          <a:solidFill>
-                            <a:srgbClr val="FFFFFF"/>
-                          </a:solidFill>
-                        </a:defRPr>
-                      </a:pPr>
-                      <a:r>
-                        <a:t>#</a:t>
-                      </a:r>
-                    </a:p>
-                  </a:txBody>
-                  <a:tcPr>
-                    <a:solidFill>
-                      <a:srgbClr val="1F3A68"/>
-                    </a:solidFill>
-                  </a:tcPr>
-                </a:tc>
-                <a:tc>
-                  <a:txBody>
-                    <a:bodyPr/>
-                    <a:lstStyle/>
-                    <a:p>
-                      <a:pPr>
-                        <a:defRPr sz="1300" b="1">
-                          <a:solidFill>
-                            <a:srgbClr val="FFFFFF"/>
-                          </a:solidFill>
-                        </a:defRPr>
-                      </a:pPr>
-                      <a:r>
-                        <a:t>Target replacement</a:t>
-                      </a:r>
-                    </a:p>
-                  </a:txBody>
-                  <a:tcPr>
-                    <a:solidFill>
-                      <a:srgbClr val="1F3A68"/>
-                    </a:solidFill>
-                  </a:tcPr>
-                </a:tc>
-                <a:tc>
-                  <a:txBody>
-                    <a:bodyPr/>
-                    <a:lstStyle/>
-                    <a:p>
-                      <a:pPr>
-                        <a:defRPr sz="1300" b="1">
-                          <a:solidFill>
-                            <a:srgbClr val="FFFFFF"/>
-                          </a:solidFill>
-                        </a:defRPr>
-                      </a:pPr>
-                      <a:r>
-                        <a:t>Why</a:t>
-                      </a:r>
-                    </a:p>
-                  </a:txBody>
-                  <a:tcPr>
-                    <a:solidFill>
-                      <a:srgbClr val="1F3A68"/>
-                    </a:solidFill>
-                  </a:tcPr>
-                </a:tc>
-                <a:tc>
-                  <a:txBody>
-                    <a:bodyPr/>
-                    <a:lstStyle/>
-                    <a:p>
-                      <a:pPr>
-                        <a:defRPr sz="1300" b="1">
-                          <a:solidFill>
-                            <a:srgbClr val="FFFFFF"/>
-                          </a:solidFill>
-                        </a:defRPr>
-                      </a:pPr>
-                      <a:r>
-                        <a:t>Coverage</a:t>
-                      </a:r>
-                    </a:p>
-                  </a:txBody>
-                  <a:tcPr>
-                    <a:solidFill>
-                      <a:srgbClr val="1F3A68"/>
-                    </a:solidFill>
-                  </a:tcPr>
-                </a:tc>
-              </a:tr>
-              <a:tr h="1028700">
-                <a:tc>
-                  <a:txBody>
-                    <a:bodyPr/>
-                    <a:lstStyle/>
-                    <a:p>
-                      <a:pPr>
-                        <a:defRPr sz="1200">
-                          <a:solidFill>
-                            <a:srgbClr val="333333"/>
-                          </a:solidFill>
-                        </a:defRPr>
-                      </a:pPr>
-                      <a:r>
-                        <a:t>A</a:t>
-                      </a:r>
-                    </a:p>
-                  </a:txBody>
-                  <a:tcPr>
-                    <a:solidFill>
-                      <a:srgbClr val="FFFFFF"/>
-                    </a:solidFill>
-                  </a:tcPr>
-                </a:tc>
-                <a:tc>
-                  <a:txBody>
-                    <a:bodyPr/>
-                    <a:lstStyle/>
-                    <a:p>
-                      <a:pPr>
-                        <a:defRPr sz="1200">
-                          <a:solidFill>
-                            <a:srgbClr val="333333"/>
-                          </a:solidFill>
-                        </a:defRPr>
-                      </a:pPr>
-                      <a:r>
-                        <a:t>Native ABAP SSH/SFTP client class</a:t>
-                      </a:r>
-                    </a:p>
-                  </a:txBody>
-                  <a:tcPr>
-                    <a:solidFill>
-                      <a:srgbClr val="FFFFFF"/>
-                    </a:solidFill>
-                  </a:tcPr>
-                </a:tc>
-                <a:tc>
-                  <a:txBody>
-                    <a:bodyPr/>
-                    <a:lstStyle/>
-                    <a:p>
-                      <a:pPr>
-                        <a:defRPr sz="1200">
-                          <a:solidFill>
-                            <a:srgbClr val="333333"/>
-                          </a:solidFill>
-                        </a:defRPr>
-                      </a:pPr>
-                      <a:r>
-                        <a:t>Removes OS-script dependency; runs in-ABAP</a:t>
-                      </a:r>
-                    </a:p>
-                  </a:txBody>
-                  <a:tcPr>
-                    <a:solidFill>
-                      <a:srgbClr val="FFFFFF"/>
-                    </a:solidFill>
-                  </a:tcPr>
-                </a:tc>
-                <a:tc>
-                  <a:txBody>
-                    <a:bodyPr/>
-                    <a:lstStyle/>
-                    <a:p>
-                      <a:pPr>
-                        <a:defRPr sz="1200">
-                          <a:solidFill>
-                            <a:srgbClr val="333333"/>
-                          </a:solidFill>
-                        </a:defRPr>
-                      </a:pPr>
-                      <a:r>
-                        <a:t>All 16 reports + 3 wrappers in one swap</a:t>
-                      </a:r>
-                    </a:p>
-                  </a:txBody>
-                  <a:tcPr>
-                    <a:solidFill>
-                      <a:srgbClr val="FFFFFF"/>
-                    </a:solidFill>
-                  </a:tcPr>
-                </a:tc>
-              </a:tr>
-              <a:tr h="1028700">
-                <a:tc>
-                  <a:txBody>
-                    <a:bodyPr/>
-                    <a:lstStyle/>
-                    <a:p>
-                      <a:pPr>
-                        <a:defRPr sz="1200">
-                          <a:solidFill>
-                            <a:srgbClr val="333333"/>
-                          </a:solidFill>
-                        </a:defRPr>
-                      </a:pPr>
-                      <a:r>
-                        <a:t>B</a:t>
-                      </a:r>
-                    </a:p>
-                  </a:txBody>
-                  <a:tcPr>
-                    <a:solidFill>
-                      <a:srgbClr val="F0F2F7"/>
-                    </a:solidFill>
-                  </a:tcPr>
-                </a:tc>
-                <a:tc>
-                  <a:txBody>
-                    <a:bodyPr/>
-                    <a:lstStyle/>
-                    <a:p>
-                      <a:pPr>
-                        <a:defRPr sz="1200">
-                          <a:solidFill>
-                            <a:srgbClr val="333333"/>
-                          </a:solidFill>
-                        </a:defRPr>
-                      </a:pPr>
-                      <a:r>
-                        <a:t>BTP Integration Suite SFTP adapter (via destination)</a:t>
-                      </a:r>
-                    </a:p>
-                  </a:txBody>
-                  <a:tcPr>
-                    <a:solidFill>
-                      <a:srgbClr val="F0F2F7"/>
-                    </a:solidFill>
-                  </a:tcPr>
-                </a:tc>
-                <a:tc>
-                  <a:txBody>
-                    <a:bodyPr/>
-                    <a:lstStyle/>
-                    <a:p>
-                      <a:pPr>
-                        <a:defRPr sz="1200">
-                          <a:solidFill>
-                            <a:srgbClr val="333333"/>
-                          </a:solidFill>
-                        </a:defRPr>
-                      </a:pPr>
-                      <a:r>
-                        <a:t>Cleanest separation; aligns with SAP BTP roadmap</a:t>
-                      </a:r>
-                    </a:p>
-                  </a:txBody>
-                  <a:tcPr>
-                    <a:solidFill>
-                      <a:srgbClr val="F0F2F7"/>
-                    </a:solidFill>
-                  </a:tcPr>
-                </a:tc>
-                <a:tc>
-                  <a:txBody>
-                    <a:bodyPr/>
-                    <a:lstStyle/>
-                    <a:p>
-                      <a:pPr>
-                        <a:defRPr sz="1200">
-                          <a:solidFill>
-                            <a:srgbClr val="333333"/>
-                          </a:solidFill>
-                        </a:defRPr>
-                      </a:pPr>
-                      <a:r>
-                        <a:t>Same; needs BTP connectivity from on-prem</a:t>
-                      </a:r>
-                    </a:p>
-                  </a:txBody>
-                  <a:tcPr>
-                    <a:solidFill>
-                      <a:srgbClr val="F0F2F7"/>
-                    </a:solidFill>
-                  </a:tcPr>
-                </a:tc>
-              </a:tr>
-              <a:tr h="1028700">
-                <a:tc>
-                  <a:txBody>
-                    <a:bodyPr/>
-                    <a:lstStyle/>
-                    <a:p>
-                      <a:pPr>
-                        <a:defRPr sz="1200">
-                          <a:solidFill>
-                            <a:srgbClr val="333333"/>
-                          </a:solidFill>
-                        </a:defRPr>
-                      </a:pPr>
-                      <a:r>
-                        <a:t>C</a:t>
-                      </a:r>
-                    </a:p>
-                  </a:txBody>
-                  <a:tcPr>
-                    <a:solidFill>
-                      <a:srgbClr val="FFFFFF"/>
-                    </a:solidFill>
-                  </a:tcPr>
-                </a:tc>
-                <a:tc>
-                  <a:txBody>
-                    <a:bodyPr/>
-                    <a:lstStyle/>
-                    <a:p>
-                      <a:pPr>
-                        <a:defRPr sz="1200">
-                          <a:solidFill>
-                            <a:srgbClr val="333333"/>
-                          </a:solidFill>
-                        </a:defRPr>
-                      </a:pPr>
-                      <a:r>
-                        <a:t>Keep SXPG but rewrite the OS-side script</a:t>
-                      </a:r>
-                    </a:p>
-                  </a:txBody>
-                  <a:tcPr>
-                    <a:solidFill>
-                      <a:srgbClr val="FFFFFF"/>
-                    </a:solidFill>
-                  </a:tcPr>
-                </a:tc>
-                <a:tc>
-                  <a:txBody>
-                    <a:bodyPr/>
-                    <a:lstStyle/>
-                    <a:p>
-                      <a:pPr>
-                        <a:defRPr sz="1200">
-                          <a:solidFill>
-                            <a:srgbClr val="333333"/>
-                          </a:solidFill>
-                        </a:defRPr>
-                      </a:pPr>
-                      <a:r>
-                        <a:t>Minimal ABAP change; controls credentials in one script</a:t>
-                      </a:r>
-                    </a:p>
-                  </a:txBody>
-                  <a:tcPr>
-                    <a:solidFill>
-                      <a:srgbClr val="FFFFFF"/>
-                    </a:solidFill>
-                  </a:tcPr>
-                </a:tc>
-                <a:tc>
-                  <a:txBody>
-                    <a:bodyPr/>
-                    <a:lstStyle/>
-                    <a:p>
-                      <a:pPr>
-                        <a:defRPr sz="1200">
-                          <a:solidFill>
-                            <a:srgbClr val="333333"/>
-                          </a:solidFill>
-                        </a:defRPr>
-                      </a:pPr>
-                      <a:r>
-                        <a:t>All callers; doesn't remove technical debt</a:t>
-                      </a:r>
-                    </a:p>
-                  </a:txBody>
-                  <a:tcPr>
-                    <a:solidFill>
-                      <a:srgbClr val="FFFFFF"/>
-                    </a:solidFill>
-                  </a:tcPr>
-                </a:tc>
-              </a:tr>
-            </a:tbl>
-          </a:graphicData>
-        </a:graphic>
-      </p:graphicFrame>
       <p:sp>
         <p:nvSpPr>
-          <p:cNvPr id="5" name="TextBox 4"/>
+          <p:cNvPr id="4" name="TextBox 3"/>
           <p:cNvSpPr txBox="1"/>
           <p:nvPr/>
         </p:nvSpPr>
         <p:spPr>
           <a:xfrm>
-            <a:off x="457200" y="6126480"/>
-            <a:ext cx="11247120" cy="640080"/>
+            <a:off x="457200" y="1554480"/>
+            <a:ext cx="11247120" cy="5029200"/>
           </a:xfrm>
           <a:prstGeom prst="rect">
             <a:avLst/>
           </a:prstGeom>
-          <a:noFill/>
+          <a:solidFill>
+            <a:srgbClr val="F0F2F7"/>
+          </a:solidFill>
         </p:spPr>
         <p:txBody>
           <a:bodyPr wrap="square">
@@ -13792,14 +14384,253 @@
           <a:lstStyle/>
           <a:p>
             <a:pPr>
-              <a:defRPr sz="1200" b="1">
+              <a:defRPr sz="1200" b="0">
                 <a:solidFill>
-                  <a:srgbClr val="1F3A68"/>
+                  <a:srgbClr val="333333"/>
                 </a:solidFill>
+                <a:latin typeface="Consolas"/>
               </a:defRPr>
             </a:pPr>
             <a:r>
-              <a:t>Recommended: A or B. Both replace the SXPG_COMMAND_EXECUTE call site uniformly — same FORM scaffolding, same zfi_constants reads.</a:t>
+              <a:t>FUNCTION zmedi_get_from_sftp</a:t>
+            </a:r>
+          </a:p>
+          <a:p>
+            <a:pPr>
+              <a:defRPr sz="1200" b="0">
+                <a:solidFill>
+                  <a:srgbClr val="333333"/>
+                </a:solidFill>
+                <a:latin typeface="Consolas"/>
+              </a:defRPr>
+            </a:pPr>
+            <a:r>
+              <a:t>  IMPORTING command   TYPE sxpgcolist-name</a:t>
+            </a:r>
+          </a:p>
+          <a:p>
+            <a:pPr>
+              <a:defRPr sz="1200" b="0">
+                <a:solidFill>
+                  <a:srgbClr val="333333"/>
+                </a:solidFill>
+                <a:latin typeface="Consolas"/>
+              </a:defRPr>
+            </a:pPr>
+            <a:r>
+              <a:t>            constants TYPE bdc_prog</a:t>
+            </a:r>
+          </a:p>
+          <a:p>
+            <a:pPr>
+              <a:defRPr sz="1200" b="0">
+                <a:solidFill>
+                  <a:srgbClr val="333333"/>
+                </a:solidFill>
+                <a:latin typeface="Consolas"/>
+              </a:defRPr>
+            </a:pPr>
+            <a:r>
+              <a:t>  TABLES    return    LIKE bapiret2 OPTIONAL.</a:t>
+            </a:r>
+          </a:p>
+          <a:p>
+            <a:pPr>
+              <a:defRPr sz="1200" b="0">
+                <a:solidFill>
+                  <a:srgbClr val="333333"/>
+                </a:solidFill>
+                <a:latin typeface="Consolas"/>
+              </a:defRPr>
+            </a:pPr>
+          </a:p>
+          <a:p>
+            <a:pPr>
+              <a:defRPr sz="1200" b="0">
+                <a:solidFill>
+                  <a:srgbClr val="333333"/>
+                </a:solidFill>
+                <a:latin typeface="Consolas"/>
+              </a:defRPr>
+            </a:pPr>
+            <a:r>
+              <a:t>  SELECT * FROM zfi_constants INTO TABLE gt_constants WHERE pname = constants.</a:t>
+            </a:r>
+          </a:p>
+          <a:p>
+            <a:pPr>
+              <a:defRPr sz="1200" b="0">
+                <a:solidFill>
+                  <a:srgbClr val="333333"/>
+                </a:solidFill>
+                <a:latin typeface="Consolas"/>
+              </a:defRPr>
+            </a:pPr>
+          </a:p>
+          <a:p>
+            <a:pPr>
+              <a:defRPr sz="1200" b="0">
+                <a:solidFill>
+                  <a:srgbClr val="333333"/>
+                </a:solidFill>
+                <a:latin typeface="Consolas"/>
+              </a:defRPr>
+            </a:pPr>
+            <a:r>
+              <a:t>  PERFORM f_set_parameter USING 'FTP_USER'         'M' ''.</a:t>
+            </a:r>
+          </a:p>
+          <a:p>
+            <a:pPr>
+              <a:defRPr sz="1200" b="0">
+                <a:solidFill>
+                  <a:srgbClr val="333333"/>
+                </a:solidFill>
+                <a:latin typeface="Consolas"/>
+              </a:defRPr>
+            </a:pPr>
+            <a:r>
+              <a:t>  PERFORM f_set_parameter USING 'PASSPHRASE'       'M' ':'.</a:t>
+            </a:r>
+          </a:p>
+          <a:p>
+            <a:pPr>
+              <a:defRPr sz="1200" b="0">
+                <a:solidFill>
+                  <a:srgbClr val="333333"/>
+                </a:solidFill>
+                <a:latin typeface="Consolas"/>
+              </a:defRPr>
+            </a:pPr>
+            <a:r>
+              <a:t>  PERFORM f_set_parameter USING 'HOST_KEY'         'M' ';'.</a:t>
+            </a:r>
+          </a:p>
+          <a:p>
+            <a:pPr>
+              <a:defRPr sz="1200" b="0">
+                <a:solidFill>
+                  <a:srgbClr val="333333"/>
+                </a:solidFill>
+                <a:latin typeface="Consolas"/>
+              </a:defRPr>
+            </a:pPr>
+            <a:r>
+              <a:t>  PERFORM f_set_parameter USING 'FTP_DOMAIN'       'M' ';'.</a:t>
+            </a:r>
+          </a:p>
+          <a:p>
+            <a:pPr>
+              <a:defRPr sz="1200" b="0">
+                <a:solidFill>
+                  <a:srgbClr val="333333"/>
+                </a:solidFill>
+                <a:latin typeface="Consolas"/>
+              </a:defRPr>
+            </a:pPr>
+            <a:r>
+              <a:t>  PERFORM f_set_parameter USING 'PRIVATE_KEY_PATH' 'M' ';'.</a:t>
+            </a:r>
+          </a:p>
+          <a:p>
+            <a:pPr>
+              <a:defRPr sz="1200" b="0">
+                <a:solidFill>
+                  <a:srgbClr val="333333"/>
+                </a:solidFill>
+                <a:latin typeface="Consolas"/>
+              </a:defRPr>
+            </a:pPr>
+            <a:r>
+              <a:t>  PERFORM f_set_parameter USING 'SOURCE_PATH'      'M' ';'.</a:t>
+            </a:r>
+          </a:p>
+          <a:p>
+            <a:pPr>
+              <a:defRPr sz="1200" b="0">
+                <a:solidFill>
+                  <a:srgbClr val="333333"/>
+                </a:solidFill>
+                <a:latin typeface="Consolas"/>
+              </a:defRPr>
+            </a:pPr>
+          </a:p>
+          <a:p>
+            <a:pPr>
+              <a:defRPr sz="1200" b="0">
+                <a:solidFill>
+                  <a:srgbClr val="333333"/>
+                </a:solidFill>
+                <a:latin typeface="Consolas"/>
+              </a:defRPr>
+            </a:pPr>
+            <a:r>
+              <a:t>  CALL FUNCTION 'SXPG_COMMAND_EXECUTE'</a:t>
+            </a:r>
+          </a:p>
+          <a:p>
+            <a:pPr>
+              <a:defRPr sz="1200" b="0">
+                <a:solidFill>
+                  <a:srgbClr val="333333"/>
+                </a:solidFill>
+                <a:latin typeface="Consolas"/>
+              </a:defRPr>
+            </a:pPr>
+            <a:r>
+              <a:t>    EXPORTING commandname           = command</a:t>
+            </a:r>
+          </a:p>
+          <a:p>
+            <a:pPr>
+              <a:defRPr sz="1200" b="0">
+                <a:solidFill>
+                  <a:srgbClr val="333333"/>
+                </a:solidFill>
+                <a:latin typeface="Consolas"/>
+              </a:defRPr>
+            </a:pPr>
+            <a:r>
+              <a:t>              additional_parameters = gv_param</a:t>
+            </a:r>
+          </a:p>
+          <a:p>
+            <a:pPr>
+              <a:defRPr sz="1200" b="0">
+                <a:solidFill>
+                  <a:srgbClr val="333333"/>
+                </a:solidFill>
+                <a:latin typeface="Consolas"/>
+              </a:defRPr>
+            </a:pPr>
+            <a:r>
+              <a:t>    IMPORTING exitcode              = lv_ret_code</a:t>
+            </a:r>
+          </a:p>
+          <a:p>
+            <a:pPr>
+              <a:defRPr sz="1200" b="0">
+                <a:solidFill>
+                  <a:srgbClr val="333333"/>
+                </a:solidFill>
+                <a:latin typeface="Consolas"/>
+              </a:defRPr>
+            </a:pPr>
+            <a:r>
+              <a:t>    TABLES    exec_protocol         = lt_return[].</a:t>
+            </a:r>
+          </a:p>
+          <a:p>
+            <a:pPr>
+              <a:defRPr sz="1200" b="0">
+                <a:solidFill>
+                  <a:srgbClr val="333333"/>
+                </a:solidFill>
+                <a:latin typeface="Consolas"/>
+              </a:defRPr>
+            </a:pPr>
+            <a:r>
+              <a:t>ENDFUNCTION.</a:t>
             </a:r>
           </a:p>
         </p:txBody>

--- a/docs/tutorials/codebase-analysis/examples/report.pptx
+++ b/docs/tutorials/codebase-analysis/examples/report.pptx
@@ -3253,7 +3253,7 @@
               </a:defRPr>
             </a:pPr>
             <a:r>
-              <a:t>Migration proposal — one ABAP-level change point</a:t>
+              <a:t>Code example #2 — wrapper FM (ZMEDI_GET_FROM_SFTP)</a:t>
             </a:r>
           </a:p>
         </p:txBody>
@@ -3267,7 +3267,7 @@
         <p:spPr>
           <a:xfrm>
             <a:off x="457200" y="1005840"/>
-            <a:ext cx="11247120" cy="640080"/>
+            <a:ext cx="11247120" cy="457200"/>
           </a:xfrm>
           <a:prstGeom prst="rect">
             <a:avLst/>
@@ -3281,437 +3281,35 @@
           <a:lstStyle/>
           <a:p>
             <a:pPr>
-              <a:defRPr sz="1400" b="0">
+              <a:defRPr sz="1200" b="0">
                 <a:solidFill>
-                  <a:srgbClr val="C83636"/>
+                  <a:srgbClr val="333333"/>
                 </a:solidFill>
               </a:defRPr>
             </a:pPr>
             <a:r>
-              <a:t>Replace CALL FUNCTION 'SXPG_COMMAND_EXECUTE' (with SM69 entries that shell out to OS sftp/scp) with a native ABAP SFTP layer.</a:t>
+              <a:t>Same SXPG-shell pattern inside a function module — 2 reports invoke this instead of duplicating the plumbing.</a:t>
             </a:r>
           </a:p>
         </p:txBody>
       </p:sp>
-      <p:graphicFrame>
-        <p:nvGraphicFramePr>
-          <p:cNvPr id="4" name="Table 3"/>
-          <p:cNvGraphicFramePr>
-            <a:graphicFrameLocks noGrp="1"/>
-          </p:cNvGraphicFramePr>
-          <p:nvPr/>
-        </p:nvGraphicFramePr>
-        <p:xfrm>
-          <a:off x="457200" y="2011680"/>
-          <a:ext cx="11247120" cy="4114800"/>
-        </p:xfrm>
-        <a:graphic>
-          <a:graphicData uri="http://schemas.openxmlformats.org/drawingml/2006/table">
-            <a:tbl>
-              <a:tblPr firstRow="1" bandRow="1">
-                <a:tableStyleId>{5C22544A-7EE6-4342-B048-85BDC9FD1C3A}</a:tableStyleId>
-              </a:tblPr>
-              <a:tblGrid>
-                <a:gridCol w="457200"/>
-                <a:gridCol w="3657600"/>
-                <a:gridCol w="3931920"/>
-                <a:gridCol w="3200400"/>
-              </a:tblGrid>
-              <a:tr h="1028700">
-                <a:tc>
-                  <a:txBody>
-                    <a:bodyPr/>
-                    <a:lstStyle/>
-                    <a:p>
-                      <a:pPr>
-                        <a:defRPr sz="1300" b="1">
-                          <a:solidFill>
-                            <a:srgbClr val="FFFFFF"/>
-                          </a:solidFill>
-                        </a:defRPr>
-                      </a:pPr>
-                      <a:r>
-                        <a:t>#</a:t>
-                      </a:r>
-                    </a:p>
-                  </a:txBody>
-                  <a:tcPr>
-                    <a:solidFill>
-                      <a:srgbClr val="1F3A68"/>
-                    </a:solidFill>
-                  </a:tcPr>
-                </a:tc>
-                <a:tc>
-                  <a:txBody>
-                    <a:bodyPr/>
-                    <a:lstStyle/>
-                    <a:p>
-                      <a:pPr>
-                        <a:defRPr sz="1300" b="1">
-                          <a:solidFill>
-                            <a:srgbClr val="FFFFFF"/>
-                          </a:solidFill>
-                        </a:defRPr>
-                      </a:pPr>
-                      <a:r>
-                        <a:t>Target replacement</a:t>
-                      </a:r>
-                    </a:p>
-                  </a:txBody>
-                  <a:tcPr>
-                    <a:solidFill>
-                      <a:srgbClr val="1F3A68"/>
-                    </a:solidFill>
-                  </a:tcPr>
-                </a:tc>
-                <a:tc>
-                  <a:txBody>
-                    <a:bodyPr/>
-                    <a:lstStyle/>
-                    <a:p>
-                      <a:pPr>
-                        <a:defRPr sz="1300" b="1">
-                          <a:solidFill>
-                            <a:srgbClr val="FFFFFF"/>
-                          </a:solidFill>
-                        </a:defRPr>
-                      </a:pPr>
-                      <a:r>
-                        <a:t>Why</a:t>
-                      </a:r>
-                    </a:p>
-                  </a:txBody>
-                  <a:tcPr>
-                    <a:solidFill>
-                      <a:srgbClr val="1F3A68"/>
-                    </a:solidFill>
-                  </a:tcPr>
-                </a:tc>
-                <a:tc>
-                  <a:txBody>
-                    <a:bodyPr/>
-                    <a:lstStyle/>
-                    <a:p>
-                      <a:pPr>
-                        <a:defRPr sz="1300" b="1">
-                          <a:solidFill>
-                            <a:srgbClr val="FFFFFF"/>
-                          </a:solidFill>
-                        </a:defRPr>
-                      </a:pPr>
-                      <a:r>
-                        <a:t>Coverage</a:t>
-                      </a:r>
-                    </a:p>
-                  </a:txBody>
-                  <a:tcPr>
-                    <a:solidFill>
-                      <a:srgbClr val="1F3A68"/>
-                    </a:solidFill>
-                  </a:tcPr>
-                </a:tc>
-              </a:tr>
-              <a:tr h="1028700">
-                <a:tc>
-                  <a:txBody>
-                    <a:bodyPr/>
-                    <a:lstStyle/>
-                    <a:p>
-                      <a:pPr>
-                        <a:defRPr sz="1200">
-                          <a:solidFill>
-                            <a:srgbClr val="333333"/>
-                          </a:solidFill>
-                        </a:defRPr>
-                      </a:pPr>
-                      <a:r>
-                        <a:t>A</a:t>
-                      </a:r>
-                    </a:p>
-                  </a:txBody>
-                  <a:tcPr>
-                    <a:solidFill>
-                      <a:srgbClr val="FFFFFF"/>
-                    </a:solidFill>
-                  </a:tcPr>
-                </a:tc>
-                <a:tc>
-                  <a:txBody>
-                    <a:bodyPr/>
-                    <a:lstStyle/>
-                    <a:p>
-                      <a:pPr>
-                        <a:defRPr sz="1200">
-                          <a:solidFill>
-                            <a:srgbClr val="333333"/>
-                          </a:solidFill>
-                        </a:defRPr>
-                      </a:pPr>
-                      <a:r>
-                        <a:t>Native ABAP SSH/SFTP client class</a:t>
-                      </a:r>
-                    </a:p>
-                  </a:txBody>
-                  <a:tcPr>
-                    <a:solidFill>
-                      <a:srgbClr val="FFFFFF"/>
-                    </a:solidFill>
-                  </a:tcPr>
-                </a:tc>
-                <a:tc>
-                  <a:txBody>
-                    <a:bodyPr/>
-                    <a:lstStyle/>
-                    <a:p>
-                      <a:pPr>
-                        <a:defRPr sz="1200">
-                          <a:solidFill>
-                            <a:srgbClr val="333333"/>
-                          </a:solidFill>
-                        </a:defRPr>
-                      </a:pPr>
-                      <a:r>
-                        <a:t>Removes OS-script dependency; runs in-ABAP</a:t>
-                      </a:r>
-                    </a:p>
-                  </a:txBody>
-                  <a:tcPr>
-                    <a:solidFill>
-                      <a:srgbClr val="FFFFFF"/>
-                    </a:solidFill>
-                  </a:tcPr>
-                </a:tc>
-                <a:tc>
-                  <a:txBody>
-                    <a:bodyPr/>
-                    <a:lstStyle/>
-                    <a:p>
-                      <a:pPr>
-                        <a:defRPr sz="1200">
-                          <a:solidFill>
-                            <a:srgbClr val="333333"/>
-                          </a:solidFill>
-                        </a:defRPr>
-                      </a:pPr>
-                      <a:r>
-                        <a:t>All 16 reports + 3 wrappers in one swap</a:t>
-                      </a:r>
-                    </a:p>
-                  </a:txBody>
-                  <a:tcPr>
-                    <a:solidFill>
-                      <a:srgbClr val="FFFFFF"/>
-                    </a:solidFill>
-                  </a:tcPr>
-                </a:tc>
-              </a:tr>
-              <a:tr h="1028700">
-                <a:tc>
-                  <a:txBody>
-                    <a:bodyPr/>
-                    <a:lstStyle/>
-                    <a:p>
-                      <a:pPr>
-                        <a:defRPr sz="1200">
-                          <a:solidFill>
-                            <a:srgbClr val="333333"/>
-                          </a:solidFill>
-                        </a:defRPr>
-                      </a:pPr>
-                      <a:r>
-                        <a:t>B</a:t>
-                      </a:r>
-                    </a:p>
-                  </a:txBody>
-                  <a:tcPr>
-                    <a:solidFill>
-                      <a:srgbClr val="F0F2F7"/>
-                    </a:solidFill>
-                  </a:tcPr>
-                </a:tc>
-                <a:tc>
-                  <a:txBody>
-                    <a:bodyPr/>
-                    <a:lstStyle/>
-                    <a:p>
-                      <a:pPr>
-                        <a:defRPr sz="1200">
-                          <a:solidFill>
-                            <a:srgbClr val="333333"/>
-                          </a:solidFill>
-                        </a:defRPr>
-                      </a:pPr>
-                      <a:r>
-                        <a:t>BTP Integration Suite SFTP adapter (via destination)</a:t>
-                      </a:r>
-                    </a:p>
-                  </a:txBody>
-                  <a:tcPr>
-                    <a:solidFill>
-                      <a:srgbClr val="F0F2F7"/>
-                    </a:solidFill>
-                  </a:tcPr>
-                </a:tc>
-                <a:tc>
-                  <a:txBody>
-                    <a:bodyPr/>
-                    <a:lstStyle/>
-                    <a:p>
-                      <a:pPr>
-                        <a:defRPr sz="1200">
-                          <a:solidFill>
-                            <a:srgbClr val="333333"/>
-                          </a:solidFill>
-                        </a:defRPr>
-                      </a:pPr>
-                      <a:r>
-                        <a:t>Cleanest separation; aligns with SAP BTP roadmap</a:t>
-                      </a:r>
-                    </a:p>
-                  </a:txBody>
-                  <a:tcPr>
-                    <a:solidFill>
-                      <a:srgbClr val="F0F2F7"/>
-                    </a:solidFill>
-                  </a:tcPr>
-                </a:tc>
-                <a:tc>
-                  <a:txBody>
-                    <a:bodyPr/>
-                    <a:lstStyle/>
-                    <a:p>
-                      <a:pPr>
-                        <a:defRPr sz="1200">
-                          <a:solidFill>
-                            <a:srgbClr val="333333"/>
-                          </a:solidFill>
-                        </a:defRPr>
-                      </a:pPr>
-                      <a:r>
-                        <a:t>Same; needs BTP connectivity from on-prem</a:t>
-                      </a:r>
-                    </a:p>
-                  </a:txBody>
-                  <a:tcPr>
-                    <a:solidFill>
-                      <a:srgbClr val="F0F2F7"/>
-                    </a:solidFill>
-                  </a:tcPr>
-                </a:tc>
-              </a:tr>
-              <a:tr h="1028700">
-                <a:tc>
-                  <a:txBody>
-                    <a:bodyPr/>
-                    <a:lstStyle/>
-                    <a:p>
-                      <a:pPr>
-                        <a:defRPr sz="1200">
-                          <a:solidFill>
-                            <a:srgbClr val="333333"/>
-                          </a:solidFill>
-                        </a:defRPr>
-                      </a:pPr>
-                      <a:r>
-                        <a:t>C</a:t>
-                      </a:r>
-                    </a:p>
-                  </a:txBody>
-                  <a:tcPr>
-                    <a:solidFill>
-                      <a:srgbClr val="FFFFFF"/>
-                    </a:solidFill>
-                  </a:tcPr>
-                </a:tc>
-                <a:tc>
-                  <a:txBody>
-                    <a:bodyPr/>
-                    <a:lstStyle/>
-                    <a:p>
-                      <a:pPr>
-                        <a:defRPr sz="1200">
-                          <a:solidFill>
-                            <a:srgbClr val="333333"/>
-                          </a:solidFill>
-                        </a:defRPr>
-                      </a:pPr>
-                      <a:r>
-                        <a:t>Keep SXPG but rewrite the OS-side script</a:t>
-                      </a:r>
-                    </a:p>
-                  </a:txBody>
-                  <a:tcPr>
-                    <a:solidFill>
-                      <a:srgbClr val="FFFFFF"/>
-                    </a:solidFill>
-                  </a:tcPr>
-                </a:tc>
-                <a:tc>
-                  <a:txBody>
-                    <a:bodyPr/>
-                    <a:lstStyle/>
-                    <a:p>
-                      <a:pPr>
-                        <a:defRPr sz="1200">
-                          <a:solidFill>
-                            <a:srgbClr val="333333"/>
-                          </a:solidFill>
-                        </a:defRPr>
-                      </a:pPr>
-                      <a:r>
-                        <a:t>Minimal ABAP change; controls credentials in one script</a:t>
-                      </a:r>
-                    </a:p>
-                  </a:txBody>
-                  <a:tcPr>
-                    <a:solidFill>
-                      <a:srgbClr val="FFFFFF"/>
-                    </a:solidFill>
-                  </a:tcPr>
-                </a:tc>
-                <a:tc>
-                  <a:txBody>
-                    <a:bodyPr/>
-                    <a:lstStyle/>
-                    <a:p>
-                      <a:pPr>
-                        <a:defRPr sz="1200">
-                          <a:solidFill>
-                            <a:srgbClr val="333333"/>
-                          </a:solidFill>
-                        </a:defRPr>
-                      </a:pPr>
-                      <a:r>
-                        <a:t>All callers; doesn't remove technical debt</a:t>
-                      </a:r>
-                    </a:p>
-                  </a:txBody>
-                  <a:tcPr>
-                    <a:solidFill>
-                      <a:srgbClr val="FFFFFF"/>
-                    </a:solidFill>
-                  </a:tcPr>
-                </a:tc>
-              </a:tr>
-            </a:tbl>
-          </a:graphicData>
-        </a:graphic>
-      </p:graphicFrame>
       <p:sp>
         <p:nvSpPr>
-          <p:cNvPr id="5" name="TextBox 4"/>
+          <p:cNvPr id="4" name="TextBox 3"/>
           <p:cNvSpPr txBox="1"/>
           <p:nvPr/>
         </p:nvSpPr>
         <p:spPr>
           <a:xfrm>
-            <a:off x="457200" y="6126480"/>
-            <a:ext cx="11247120" cy="640080"/>
+            <a:off x="457200" y="1554480"/>
+            <a:ext cx="11247120" cy="5029200"/>
           </a:xfrm>
           <a:prstGeom prst="rect">
             <a:avLst/>
           </a:prstGeom>
-          <a:noFill/>
+          <a:solidFill>
+            <a:srgbClr val="F0F2F7"/>
+          </a:solidFill>
         </p:spPr>
         <p:txBody>
           <a:bodyPr wrap="square">
@@ -3720,14 +3318,253 @@
           <a:lstStyle/>
           <a:p>
             <a:pPr>
-              <a:defRPr sz="1200" b="1">
+              <a:defRPr sz="1200" b="0">
                 <a:solidFill>
-                  <a:srgbClr val="1F3A68"/>
+                  <a:srgbClr val="333333"/>
                 </a:solidFill>
+                <a:latin typeface="Consolas"/>
               </a:defRPr>
             </a:pPr>
             <a:r>
-              <a:t>Recommended: A or B. Both replace the SXPG_COMMAND_EXECUTE call site uniformly — same FORM scaffolding, same zfi_constants reads.</a:t>
+              <a:t>FUNCTION zmedi_get_from_sftp</a:t>
+            </a:r>
+          </a:p>
+          <a:p>
+            <a:pPr>
+              <a:defRPr sz="1200" b="0">
+                <a:solidFill>
+                  <a:srgbClr val="333333"/>
+                </a:solidFill>
+                <a:latin typeface="Consolas"/>
+              </a:defRPr>
+            </a:pPr>
+            <a:r>
+              <a:t>  IMPORTING command   TYPE sxpgcolist-name</a:t>
+            </a:r>
+          </a:p>
+          <a:p>
+            <a:pPr>
+              <a:defRPr sz="1200" b="0">
+                <a:solidFill>
+                  <a:srgbClr val="333333"/>
+                </a:solidFill>
+                <a:latin typeface="Consolas"/>
+              </a:defRPr>
+            </a:pPr>
+            <a:r>
+              <a:t>            constants TYPE bdc_prog</a:t>
+            </a:r>
+          </a:p>
+          <a:p>
+            <a:pPr>
+              <a:defRPr sz="1200" b="0">
+                <a:solidFill>
+                  <a:srgbClr val="333333"/>
+                </a:solidFill>
+                <a:latin typeface="Consolas"/>
+              </a:defRPr>
+            </a:pPr>
+            <a:r>
+              <a:t>  TABLES    return    LIKE bapiret2 OPTIONAL.</a:t>
+            </a:r>
+          </a:p>
+          <a:p>
+            <a:pPr>
+              <a:defRPr sz="1200" b="0">
+                <a:solidFill>
+                  <a:srgbClr val="333333"/>
+                </a:solidFill>
+                <a:latin typeface="Consolas"/>
+              </a:defRPr>
+            </a:pPr>
+          </a:p>
+          <a:p>
+            <a:pPr>
+              <a:defRPr sz="1200" b="0">
+                <a:solidFill>
+                  <a:srgbClr val="333333"/>
+                </a:solidFill>
+                <a:latin typeface="Consolas"/>
+              </a:defRPr>
+            </a:pPr>
+            <a:r>
+              <a:t>  SELECT * FROM zfi_constants INTO TABLE gt_constants WHERE pname = constants.</a:t>
+            </a:r>
+          </a:p>
+          <a:p>
+            <a:pPr>
+              <a:defRPr sz="1200" b="0">
+                <a:solidFill>
+                  <a:srgbClr val="333333"/>
+                </a:solidFill>
+                <a:latin typeface="Consolas"/>
+              </a:defRPr>
+            </a:pPr>
+          </a:p>
+          <a:p>
+            <a:pPr>
+              <a:defRPr sz="1200" b="0">
+                <a:solidFill>
+                  <a:srgbClr val="333333"/>
+                </a:solidFill>
+                <a:latin typeface="Consolas"/>
+              </a:defRPr>
+            </a:pPr>
+            <a:r>
+              <a:t>  PERFORM f_set_parameter USING 'FTP_USER'         'M' ''.</a:t>
+            </a:r>
+          </a:p>
+          <a:p>
+            <a:pPr>
+              <a:defRPr sz="1200" b="0">
+                <a:solidFill>
+                  <a:srgbClr val="333333"/>
+                </a:solidFill>
+                <a:latin typeface="Consolas"/>
+              </a:defRPr>
+            </a:pPr>
+            <a:r>
+              <a:t>  PERFORM f_set_parameter USING 'PASSPHRASE'       'M' ':'.</a:t>
+            </a:r>
+          </a:p>
+          <a:p>
+            <a:pPr>
+              <a:defRPr sz="1200" b="0">
+                <a:solidFill>
+                  <a:srgbClr val="333333"/>
+                </a:solidFill>
+                <a:latin typeface="Consolas"/>
+              </a:defRPr>
+            </a:pPr>
+            <a:r>
+              <a:t>  PERFORM f_set_parameter USING 'HOST_KEY'         'M' ';'.</a:t>
+            </a:r>
+          </a:p>
+          <a:p>
+            <a:pPr>
+              <a:defRPr sz="1200" b="0">
+                <a:solidFill>
+                  <a:srgbClr val="333333"/>
+                </a:solidFill>
+                <a:latin typeface="Consolas"/>
+              </a:defRPr>
+            </a:pPr>
+            <a:r>
+              <a:t>  PERFORM f_set_parameter USING 'FTP_DOMAIN'       'M' ';'.</a:t>
+            </a:r>
+          </a:p>
+          <a:p>
+            <a:pPr>
+              <a:defRPr sz="1200" b="0">
+                <a:solidFill>
+                  <a:srgbClr val="333333"/>
+                </a:solidFill>
+                <a:latin typeface="Consolas"/>
+              </a:defRPr>
+            </a:pPr>
+            <a:r>
+              <a:t>  PERFORM f_set_parameter USING 'PRIVATE_KEY_PATH' 'M' ';'.</a:t>
+            </a:r>
+          </a:p>
+          <a:p>
+            <a:pPr>
+              <a:defRPr sz="1200" b="0">
+                <a:solidFill>
+                  <a:srgbClr val="333333"/>
+                </a:solidFill>
+                <a:latin typeface="Consolas"/>
+              </a:defRPr>
+            </a:pPr>
+            <a:r>
+              <a:t>  PERFORM f_set_parameter USING 'SOURCE_PATH'      'M' ';'.</a:t>
+            </a:r>
+          </a:p>
+          <a:p>
+            <a:pPr>
+              <a:defRPr sz="1200" b="0">
+                <a:solidFill>
+                  <a:srgbClr val="333333"/>
+                </a:solidFill>
+                <a:latin typeface="Consolas"/>
+              </a:defRPr>
+            </a:pPr>
+          </a:p>
+          <a:p>
+            <a:pPr>
+              <a:defRPr sz="1200" b="0">
+                <a:solidFill>
+                  <a:srgbClr val="333333"/>
+                </a:solidFill>
+                <a:latin typeface="Consolas"/>
+              </a:defRPr>
+            </a:pPr>
+            <a:r>
+              <a:t>  CALL FUNCTION 'SXPG_COMMAND_EXECUTE'</a:t>
+            </a:r>
+          </a:p>
+          <a:p>
+            <a:pPr>
+              <a:defRPr sz="1200" b="0">
+                <a:solidFill>
+                  <a:srgbClr val="333333"/>
+                </a:solidFill>
+                <a:latin typeface="Consolas"/>
+              </a:defRPr>
+            </a:pPr>
+            <a:r>
+              <a:t>    EXPORTING commandname           = command</a:t>
+            </a:r>
+          </a:p>
+          <a:p>
+            <a:pPr>
+              <a:defRPr sz="1200" b="0">
+                <a:solidFill>
+                  <a:srgbClr val="333333"/>
+                </a:solidFill>
+                <a:latin typeface="Consolas"/>
+              </a:defRPr>
+            </a:pPr>
+            <a:r>
+              <a:t>              additional_parameters = gv_param</a:t>
+            </a:r>
+          </a:p>
+          <a:p>
+            <a:pPr>
+              <a:defRPr sz="1200" b="0">
+                <a:solidFill>
+                  <a:srgbClr val="333333"/>
+                </a:solidFill>
+                <a:latin typeface="Consolas"/>
+              </a:defRPr>
+            </a:pPr>
+            <a:r>
+              <a:t>    IMPORTING exitcode              = lv_ret_code</a:t>
+            </a:r>
+          </a:p>
+          <a:p>
+            <a:pPr>
+              <a:defRPr sz="1200" b="0">
+                <a:solidFill>
+                  <a:srgbClr val="333333"/>
+                </a:solidFill>
+                <a:latin typeface="Consolas"/>
+              </a:defRPr>
+            </a:pPr>
+            <a:r>
+              <a:t>    TABLES    exec_protocol         = lt_return[].</a:t>
+            </a:r>
+          </a:p>
+          <a:p>
+            <a:pPr>
+              <a:defRPr sz="1200" b="0">
+                <a:solidFill>
+                  <a:srgbClr val="333333"/>
+                </a:solidFill>
+                <a:latin typeface="Consolas"/>
+              </a:defRPr>
+            </a:pPr>
+            <a:r>
+              <a:t>ENDFUNCTION.</a:t>
             </a:r>
           </a:p>
         </p:txBody>
@@ -3780,7 +3617,7 @@
               </a:defRPr>
             </a:pPr>
             <a:r>
-              <a:t>Acceptance criteria — what 'migrated' means per consumer</a:t>
+              <a:t>Migration proposal — one ABAP-level change point</a:t>
             </a:r>
           </a:p>
         </p:txBody>
@@ -3793,8 +3630,8 @@
         </p:nvSpPr>
         <p:spPr>
           <a:xfrm>
-            <a:off x="457200" y="1097280"/>
-            <a:ext cx="11247120" cy="5486400"/>
+            <a:off x="457200" y="1005840"/>
+            <a:ext cx="11247120" cy="640080"/>
           </a:xfrm>
           <a:prstGeom prst="rect">
             <a:avLst/>
@@ -3808,218 +3645,453 @@
           <a:lstStyle/>
           <a:p>
             <a:pPr>
-              <a:defRPr sz="1300" b="0">
+              <a:defRPr sz="1400" b="0">
                 <a:solidFill>
-                  <a:srgbClr val="333333"/>
+                  <a:srgbClr val="C83636"/>
                 </a:solidFill>
               </a:defRPr>
             </a:pPr>
             <a:r>
-              <a:t>For each of the 16 reports + 3 wrapper FUGRs, the replacement must:</a:t>
-            </a:r>
-          </a:p>
+              <a:t>Replace CALL FUNCTION 'SXPG_COMMAND_EXECUTE' (with SM69 entries that shell out to OS sftp/scp) with a native ABAP SFTP layer.</a:t>
+            </a:r>
+          </a:p>
+        </p:txBody>
+      </p:sp>
+      <p:graphicFrame>
+        <p:nvGraphicFramePr>
+          <p:cNvPr id="4" name="Table 3"/>
+          <p:cNvGraphicFramePr>
+            <a:graphicFrameLocks noGrp="1"/>
+          </p:cNvGraphicFramePr>
+          <p:nvPr/>
+        </p:nvGraphicFramePr>
+        <p:xfrm>
+          <a:off x="457200" y="2011680"/>
+          <a:ext cx="11247120" cy="4114800"/>
+        </p:xfrm>
+        <a:graphic>
+          <a:graphicData uri="http://schemas.openxmlformats.org/drawingml/2006/table">
+            <a:tbl>
+              <a:tblPr firstRow="1" bandRow="1">
+                <a:tableStyleId>{5C22544A-7EE6-4342-B048-85BDC9FD1C3A}</a:tableStyleId>
+              </a:tblPr>
+              <a:tblGrid>
+                <a:gridCol w="457200"/>
+                <a:gridCol w="3657600"/>
+                <a:gridCol w="3931920"/>
+                <a:gridCol w="3200400"/>
+              </a:tblGrid>
+              <a:tr h="1028700">
+                <a:tc>
+                  <a:txBody>
+                    <a:bodyPr/>
+                    <a:lstStyle/>
+                    <a:p>
+                      <a:pPr>
+                        <a:defRPr sz="1300" b="1">
+                          <a:solidFill>
+                            <a:srgbClr val="FFFFFF"/>
+                          </a:solidFill>
+                        </a:defRPr>
+                      </a:pPr>
+                      <a:r>
+                        <a:t>#</a:t>
+                      </a:r>
+                    </a:p>
+                  </a:txBody>
+                  <a:tcPr>
+                    <a:solidFill>
+                      <a:srgbClr val="1F3A68"/>
+                    </a:solidFill>
+                  </a:tcPr>
+                </a:tc>
+                <a:tc>
+                  <a:txBody>
+                    <a:bodyPr/>
+                    <a:lstStyle/>
+                    <a:p>
+                      <a:pPr>
+                        <a:defRPr sz="1300" b="1">
+                          <a:solidFill>
+                            <a:srgbClr val="FFFFFF"/>
+                          </a:solidFill>
+                        </a:defRPr>
+                      </a:pPr>
+                      <a:r>
+                        <a:t>Target replacement</a:t>
+                      </a:r>
+                    </a:p>
+                  </a:txBody>
+                  <a:tcPr>
+                    <a:solidFill>
+                      <a:srgbClr val="1F3A68"/>
+                    </a:solidFill>
+                  </a:tcPr>
+                </a:tc>
+                <a:tc>
+                  <a:txBody>
+                    <a:bodyPr/>
+                    <a:lstStyle/>
+                    <a:p>
+                      <a:pPr>
+                        <a:defRPr sz="1300" b="1">
+                          <a:solidFill>
+                            <a:srgbClr val="FFFFFF"/>
+                          </a:solidFill>
+                        </a:defRPr>
+                      </a:pPr>
+                      <a:r>
+                        <a:t>Why</a:t>
+                      </a:r>
+                    </a:p>
+                  </a:txBody>
+                  <a:tcPr>
+                    <a:solidFill>
+                      <a:srgbClr val="1F3A68"/>
+                    </a:solidFill>
+                  </a:tcPr>
+                </a:tc>
+                <a:tc>
+                  <a:txBody>
+                    <a:bodyPr/>
+                    <a:lstStyle/>
+                    <a:p>
+                      <a:pPr>
+                        <a:defRPr sz="1300" b="1">
+                          <a:solidFill>
+                            <a:srgbClr val="FFFFFF"/>
+                          </a:solidFill>
+                        </a:defRPr>
+                      </a:pPr>
+                      <a:r>
+                        <a:t>Coverage</a:t>
+                      </a:r>
+                    </a:p>
+                  </a:txBody>
+                  <a:tcPr>
+                    <a:solidFill>
+                      <a:srgbClr val="1F3A68"/>
+                    </a:solidFill>
+                  </a:tcPr>
+                </a:tc>
+              </a:tr>
+              <a:tr h="1028700">
+                <a:tc>
+                  <a:txBody>
+                    <a:bodyPr/>
+                    <a:lstStyle/>
+                    <a:p>
+                      <a:pPr>
+                        <a:defRPr sz="1200">
+                          <a:solidFill>
+                            <a:srgbClr val="333333"/>
+                          </a:solidFill>
+                        </a:defRPr>
+                      </a:pPr>
+                      <a:r>
+                        <a:t>A</a:t>
+                      </a:r>
+                    </a:p>
+                  </a:txBody>
+                  <a:tcPr>
+                    <a:solidFill>
+                      <a:srgbClr val="FFFFFF"/>
+                    </a:solidFill>
+                  </a:tcPr>
+                </a:tc>
+                <a:tc>
+                  <a:txBody>
+                    <a:bodyPr/>
+                    <a:lstStyle/>
+                    <a:p>
+                      <a:pPr>
+                        <a:defRPr sz="1200">
+                          <a:solidFill>
+                            <a:srgbClr val="333333"/>
+                          </a:solidFill>
+                        </a:defRPr>
+                      </a:pPr>
+                      <a:r>
+                        <a:t>Native ABAP SSH/SFTP client class</a:t>
+                      </a:r>
+                    </a:p>
+                  </a:txBody>
+                  <a:tcPr>
+                    <a:solidFill>
+                      <a:srgbClr val="FFFFFF"/>
+                    </a:solidFill>
+                  </a:tcPr>
+                </a:tc>
+                <a:tc>
+                  <a:txBody>
+                    <a:bodyPr/>
+                    <a:lstStyle/>
+                    <a:p>
+                      <a:pPr>
+                        <a:defRPr sz="1200">
+                          <a:solidFill>
+                            <a:srgbClr val="333333"/>
+                          </a:solidFill>
+                        </a:defRPr>
+                      </a:pPr>
+                      <a:r>
+                        <a:t>Removes OS-script dependency; runs in-ABAP</a:t>
+                      </a:r>
+                    </a:p>
+                  </a:txBody>
+                  <a:tcPr>
+                    <a:solidFill>
+                      <a:srgbClr val="FFFFFF"/>
+                    </a:solidFill>
+                  </a:tcPr>
+                </a:tc>
+                <a:tc>
+                  <a:txBody>
+                    <a:bodyPr/>
+                    <a:lstStyle/>
+                    <a:p>
+                      <a:pPr>
+                        <a:defRPr sz="1200">
+                          <a:solidFill>
+                            <a:srgbClr val="333333"/>
+                          </a:solidFill>
+                        </a:defRPr>
+                      </a:pPr>
+                      <a:r>
+                        <a:t>All 16 reports + 3 wrappers in one swap</a:t>
+                      </a:r>
+                    </a:p>
+                  </a:txBody>
+                  <a:tcPr>
+                    <a:solidFill>
+                      <a:srgbClr val="FFFFFF"/>
+                    </a:solidFill>
+                  </a:tcPr>
+                </a:tc>
+              </a:tr>
+              <a:tr h="1028700">
+                <a:tc>
+                  <a:txBody>
+                    <a:bodyPr/>
+                    <a:lstStyle/>
+                    <a:p>
+                      <a:pPr>
+                        <a:defRPr sz="1200">
+                          <a:solidFill>
+                            <a:srgbClr val="333333"/>
+                          </a:solidFill>
+                        </a:defRPr>
+                      </a:pPr>
+                      <a:r>
+                        <a:t>B</a:t>
+                      </a:r>
+                    </a:p>
+                  </a:txBody>
+                  <a:tcPr>
+                    <a:solidFill>
+                      <a:srgbClr val="F0F2F7"/>
+                    </a:solidFill>
+                  </a:tcPr>
+                </a:tc>
+                <a:tc>
+                  <a:txBody>
+                    <a:bodyPr/>
+                    <a:lstStyle/>
+                    <a:p>
+                      <a:pPr>
+                        <a:defRPr sz="1200">
+                          <a:solidFill>
+                            <a:srgbClr val="333333"/>
+                          </a:solidFill>
+                        </a:defRPr>
+                      </a:pPr>
+                      <a:r>
+                        <a:t>BTP Integration Suite SFTP adapter (via destination)</a:t>
+                      </a:r>
+                    </a:p>
+                  </a:txBody>
+                  <a:tcPr>
+                    <a:solidFill>
+                      <a:srgbClr val="F0F2F7"/>
+                    </a:solidFill>
+                  </a:tcPr>
+                </a:tc>
+                <a:tc>
+                  <a:txBody>
+                    <a:bodyPr/>
+                    <a:lstStyle/>
+                    <a:p>
+                      <a:pPr>
+                        <a:defRPr sz="1200">
+                          <a:solidFill>
+                            <a:srgbClr val="333333"/>
+                          </a:solidFill>
+                        </a:defRPr>
+                      </a:pPr>
+                      <a:r>
+                        <a:t>Cleanest separation; aligns with SAP BTP roadmap</a:t>
+                      </a:r>
+                    </a:p>
+                  </a:txBody>
+                  <a:tcPr>
+                    <a:solidFill>
+                      <a:srgbClr val="F0F2F7"/>
+                    </a:solidFill>
+                  </a:tcPr>
+                </a:tc>
+                <a:tc>
+                  <a:txBody>
+                    <a:bodyPr/>
+                    <a:lstStyle/>
+                    <a:p>
+                      <a:pPr>
+                        <a:defRPr sz="1200">
+                          <a:solidFill>
+                            <a:srgbClr val="333333"/>
+                          </a:solidFill>
+                        </a:defRPr>
+                      </a:pPr>
+                      <a:r>
+                        <a:t>Same; needs BTP connectivity from on-prem</a:t>
+                      </a:r>
+                    </a:p>
+                  </a:txBody>
+                  <a:tcPr>
+                    <a:solidFill>
+                      <a:srgbClr val="F0F2F7"/>
+                    </a:solidFill>
+                  </a:tcPr>
+                </a:tc>
+              </a:tr>
+              <a:tr h="1028700">
+                <a:tc>
+                  <a:txBody>
+                    <a:bodyPr/>
+                    <a:lstStyle/>
+                    <a:p>
+                      <a:pPr>
+                        <a:defRPr sz="1200">
+                          <a:solidFill>
+                            <a:srgbClr val="333333"/>
+                          </a:solidFill>
+                        </a:defRPr>
+                      </a:pPr>
+                      <a:r>
+                        <a:t>C</a:t>
+                      </a:r>
+                    </a:p>
+                  </a:txBody>
+                  <a:tcPr>
+                    <a:solidFill>
+                      <a:srgbClr val="FFFFFF"/>
+                    </a:solidFill>
+                  </a:tcPr>
+                </a:tc>
+                <a:tc>
+                  <a:txBody>
+                    <a:bodyPr/>
+                    <a:lstStyle/>
+                    <a:p>
+                      <a:pPr>
+                        <a:defRPr sz="1200">
+                          <a:solidFill>
+                            <a:srgbClr val="333333"/>
+                          </a:solidFill>
+                        </a:defRPr>
+                      </a:pPr>
+                      <a:r>
+                        <a:t>Keep SXPG but rewrite the OS-side script</a:t>
+                      </a:r>
+                    </a:p>
+                  </a:txBody>
+                  <a:tcPr>
+                    <a:solidFill>
+                      <a:srgbClr val="FFFFFF"/>
+                    </a:solidFill>
+                  </a:tcPr>
+                </a:tc>
+                <a:tc>
+                  <a:txBody>
+                    <a:bodyPr/>
+                    <a:lstStyle/>
+                    <a:p>
+                      <a:pPr>
+                        <a:defRPr sz="1200">
+                          <a:solidFill>
+                            <a:srgbClr val="333333"/>
+                          </a:solidFill>
+                        </a:defRPr>
+                      </a:pPr>
+                      <a:r>
+                        <a:t>Minimal ABAP change; controls credentials in one script</a:t>
+                      </a:r>
+                    </a:p>
+                  </a:txBody>
+                  <a:tcPr>
+                    <a:solidFill>
+                      <a:srgbClr val="FFFFFF"/>
+                    </a:solidFill>
+                  </a:tcPr>
+                </a:tc>
+                <a:tc>
+                  <a:txBody>
+                    <a:bodyPr/>
+                    <a:lstStyle/>
+                    <a:p>
+                      <a:pPr>
+                        <a:defRPr sz="1200">
+                          <a:solidFill>
+                            <a:srgbClr val="333333"/>
+                          </a:solidFill>
+                        </a:defRPr>
+                      </a:pPr>
+                      <a:r>
+                        <a:t>All callers; doesn't remove technical debt</a:t>
+                      </a:r>
+                    </a:p>
+                  </a:txBody>
+                  <a:tcPr>
+                    <a:solidFill>
+                      <a:srgbClr val="FFFFFF"/>
+                    </a:solidFill>
+                  </a:tcPr>
+                </a:tc>
+              </a:tr>
+            </a:tbl>
+          </a:graphicData>
+        </a:graphic>
+      </p:graphicFrame>
+      <p:sp>
+        <p:nvSpPr>
+          <p:cNvPr id="5" name="TextBox 4"/>
+          <p:cNvSpPr txBox="1"/>
+          <p:nvPr/>
+        </p:nvSpPr>
+        <p:spPr>
+          <a:xfrm>
+            <a:off x="457200" y="6126480"/>
+            <a:ext cx="11247120" cy="640080"/>
+          </a:xfrm>
+          <a:prstGeom prst="rect">
+            <a:avLst/>
+          </a:prstGeom>
+          <a:noFill/>
+        </p:spPr>
+        <p:txBody>
+          <a:bodyPr wrap="square">
+            <a:spAutoFit/>
+          </a:bodyPr>
+          <a:lstStyle/>
           <a:p>
             <a:pPr>
-              <a:defRPr sz="1300" b="0">
+              <a:defRPr sz="1200" b="1">
                 <a:solidFill>
-                  <a:srgbClr val="333333"/>
+                  <a:srgbClr val="1F3A68"/>
                 </a:solidFill>
               </a:defRPr>
             </a:pPr>
-          </a:p>
-          <a:p>
-            <a:pPr>
-              <a:defRPr sz="1300" b="0">
-                <a:solidFill>
-                  <a:srgbClr val="333333"/>
-                </a:solidFill>
-              </a:defRPr>
-            </a:pPr>
-            <a:r>
-              <a:t>1. Read the same zfi_constants rows (same pname, same fnam keys) — or provide a 1:1 shim.</a:t>
-            </a:r>
-          </a:p>
-          <a:p>
-            <a:pPr>
-              <a:defRPr sz="1300" b="0">
-                <a:solidFill>
-                  <a:srgbClr val="333333"/>
-                </a:solidFill>
-              </a:defRPr>
-            </a:pPr>
-          </a:p>
-          <a:p>
-            <a:pPr>
-              <a:defRPr sz="1300" b="0">
-                <a:solidFill>
-                  <a:srgbClr val="333333"/>
-                </a:solidFill>
-              </a:defRPr>
-            </a:pPr>
-            <a:r>
-              <a:t>2. Reach the same remote host with the same credentials.</a:t>
-            </a:r>
-          </a:p>
-          <a:p>
-            <a:pPr>
-              <a:defRPr sz="1300" b="0">
-                <a:solidFill>
-                  <a:srgbClr val="333333"/>
-                </a:solidFill>
-              </a:defRPr>
-            </a:pPr>
-          </a:p>
-          <a:p>
-            <a:pPr>
-              <a:defRPr sz="1300" b="0">
-                <a:solidFill>
-                  <a:srgbClr val="333333"/>
-                </a:solidFill>
-              </a:defRPr>
-            </a:pPr>
-            <a:r>
-              <a:t>3. Support both auth modes — key-based (PRIVATE_KEY_PATH + HOST_KEY + PASSPHRASE) AND password-based (FTP_PSWD).</a:t>
-            </a:r>
-          </a:p>
-          <a:p>
-            <a:pPr>
-              <a:defRPr sz="1300" b="0">
-                <a:solidFill>
-                  <a:srgbClr val="333333"/>
-                </a:solidFill>
-              </a:defRPr>
-            </a:pPr>
-          </a:p>
-          <a:p>
-            <a:pPr>
-              <a:defRPr sz="1300" b="0">
-                <a:solidFill>
-                  <a:srgbClr val="333333"/>
-                </a:solidFill>
-              </a:defRPr>
-            </a:pPr>
-            <a:r>
-              <a:t>4. Preserve PGP encryption wrap for ZSFTP_BNP_PARIBAS_WITH_PGP.</a:t>
-            </a:r>
-          </a:p>
-          <a:p>
-            <a:pPr>
-              <a:defRPr sz="1300" b="0">
-                <a:solidFill>
-                  <a:srgbClr val="333333"/>
-                </a:solidFill>
-              </a:defRPr>
-            </a:pPr>
-          </a:p>
-          <a:p>
-            <a:pPr>
-              <a:defRPr sz="1300" b="0">
-                <a:solidFill>
-                  <a:srgbClr val="333333"/>
-                </a:solidFill>
-              </a:defRPr>
-            </a:pPr>
-            <a:r>
-              <a:t>5. Return success/failure semantics compatible with caller code (exitcode, exec_protocol log).</a:t>
-            </a:r>
-          </a:p>
-          <a:p>
-            <a:pPr>
-              <a:defRPr sz="1300" b="0">
-                <a:solidFill>
-                  <a:srgbClr val="333333"/>
-                </a:solidFill>
-              </a:defRPr>
-            </a:pPr>
-          </a:p>
-          <a:p>
-            <a:pPr>
-              <a:defRPr sz="1300" b="0">
-                <a:solidFill>
-                  <a:srgbClr val="333333"/>
-                </a:solidFill>
-              </a:defRPr>
-            </a:pPr>
-            <a:r>
-              <a:t>6. Coordinate cutover for the 3 SHARED SM69 entries — both callers migrate atomically:</a:t>
-            </a:r>
-          </a:p>
-          <a:p>
-            <a:pPr>
-              <a:defRPr sz="1300" b="0">
-                <a:solidFill>
-                  <a:srgbClr val="333333"/>
-                </a:solidFill>
-              </a:defRPr>
-            </a:pPr>
-            <a:r>
-              <a:t>       • ZFTP_BNPP            ← ZSFTP_BNP_PARIBAS + ZSFTP_BNP_PARIBAS_WITH_PGP</a:t>
-            </a:r>
-          </a:p>
-          <a:p>
-            <a:pPr>
-              <a:defRPr sz="1300" b="0">
-                <a:solidFill>
-                  <a:srgbClr val="333333"/>
-                </a:solidFill>
-              </a:defRPr>
-            </a:pPr>
-            <a:r>
-              <a:t>       • ZSFTP_CERIDIAN_GET   ← ZFFIU_ACC_POST + ZSFTP_CERIDIAN_PULL</a:t>
-            </a:r>
-          </a:p>
-          <a:p>
-            <a:pPr>
-              <a:defRPr sz="1300" b="0">
-                <a:solidFill>
-                  <a:srgbClr val="333333"/>
-                </a:solidFill>
-              </a:defRPr>
-            </a:pPr>
-            <a:r>
-              <a:t>       • ZSFTP_DMS_GET / PUT  ← ZDMS_UPLOAD_FILES + ZDMS_REPLACE_FILES</a:t>
-            </a:r>
-          </a:p>
-          <a:p>
-            <a:pPr>
-              <a:defRPr sz="1300" b="0">
-                <a:solidFill>
-                  <a:srgbClr val="333333"/>
-                </a:solidFill>
-              </a:defRPr>
-            </a:pPr>
-          </a:p>
-          <a:p>
-            <a:pPr>
-              <a:defRPr sz="1300" b="0">
-                <a:solidFill>
-                  <a:srgbClr val="333333"/>
-                </a:solidFill>
-              </a:defRPr>
-            </a:pPr>
-            <a:r>
-              <a:t>7. Per-report end-to-end test: trigger the report; assert file landed (pull) or was delivered (push).</a:t>
-            </a:r>
-          </a:p>
-          <a:p>
-            <a:pPr>
-              <a:defRPr sz="1300" b="0">
-                <a:solidFill>
-                  <a:srgbClr val="333333"/>
-                </a:solidFill>
-              </a:defRPr>
-            </a:pPr>
-          </a:p>
-          <a:p>
-            <a:pPr>
-              <a:defRPr sz="1300" b="0">
-                <a:solidFill>
-                  <a:srgbClr val="333333"/>
-                </a:solidFill>
-              </a:defRPr>
-            </a:pPr>
-            <a:r>
-              <a:t>8. ZDMS_SEND_FILE / ZDMS_EXTRACT_DOCS_TO_SFTP — investigate dynamic/cross-package callers before declaring it dead.</a:t>
+            <a:r>
+              <a:t>Recommended: A or B. Both replace the SXPG_COMMAND_EXECUTE call site uniformly — same FORM scaffolding, same zfi_constants reads.</a:t>
             </a:r>
           </a:p>
         </p:txBody>
@@ -4072,7 +4144,7 @@
               </a:defRPr>
             </a:pPr>
             <a:r>
-              <a:t>Completeness — 7 independent scans, no truncation</a:t>
+              <a:t>Acceptance criteria — what 'migrated' means per consumer</a:t>
             </a:r>
           </a:p>
         </p:txBody>
@@ -4086,7 +4158,7 @@
         <p:spPr>
           <a:xfrm>
             <a:off x="457200" y="1097280"/>
-            <a:ext cx="11247120" cy="640080"/>
+            <a:ext cx="11247120" cy="5486400"/>
           </a:xfrm>
           <a:prstGeom prst="rect">
             <a:avLst/>
@@ -4100,646 +4172,16 @@
           <a:lstStyle/>
           <a:p>
             <a:pPr>
-              <a:defRPr sz="1400" b="0">
+              <a:defRPr sz="1300" b="0">
                 <a:solidFill>
                   <a:srgbClr val="333333"/>
                 </a:solidFill>
               </a:defRPr>
             </a:pPr>
             <a:r>
-              <a:t>Seven SearchSource scans across Z001 + sub-packages, none truncated.</a:t>
-            </a:r>
-          </a:p>
-          <a:p>
-            <a:pPr>
-              <a:defRPr sz="1400" b="0">
-                <a:solidFill>
-                  <a:srgbClr val="333333"/>
-                </a:solidFill>
-              </a:defRPr>
-            </a:pPr>
-            <a:r>
-              <a:t>The 7th scan (`ZSFTP_` SM69-prefix) caught a missed wrapper FUGR — names don't always tell the truth.</a:t>
-            </a:r>
-          </a:p>
-        </p:txBody>
-      </p:sp>
-      <p:graphicFrame>
-        <p:nvGraphicFramePr>
-          <p:cNvPr id="4" name="Table 3"/>
-          <p:cNvGraphicFramePr>
-            <a:graphicFrameLocks noGrp="1"/>
-          </p:cNvGraphicFramePr>
-          <p:nvPr/>
-        </p:nvGraphicFramePr>
-        <p:xfrm>
-          <a:off x="457200" y="2103120"/>
-          <a:ext cx="11247120" cy="3291840"/>
-        </p:xfrm>
-        <a:graphic>
-          <a:graphicData uri="http://schemas.openxmlformats.org/drawingml/2006/table">
-            <a:tbl>
-              <a:tblPr firstRow="1" bandRow="1">
-                <a:tableStyleId>{5C22544A-7EE6-4342-B048-85BDC9FD1C3A}</a:tableStyleId>
-              </a:tblPr>
-              <a:tblGrid>
-                <a:gridCol w="2743200"/>
-                <a:gridCol w="6217920"/>
-                <a:gridCol w="2286000"/>
-              </a:tblGrid>
-              <a:tr h="411480">
-                <a:tc>
-                  <a:txBody>
-                    <a:bodyPr/>
-                    <a:lstStyle/>
-                    <a:p>
-                      <a:pPr>
-                        <a:defRPr sz="1300" b="1">
-                          <a:solidFill>
-                            <a:srgbClr val="FFFFFF"/>
-                          </a:solidFill>
-                        </a:defRPr>
-                      </a:pPr>
-                      <a:r>
-                        <a:t>Scan keyword</a:t>
-                      </a:r>
-                    </a:p>
-                  </a:txBody>
-                  <a:tcPr>
-                    <a:solidFill>
-                      <a:srgbClr val="1F3A68"/>
-                    </a:solidFill>
-                  </a:tcPr>
-                </a:tc>
-                <a:tc>
-                  <a:txBody>
-                    <a:bodyPr/>
-                    <a:lstStyle/>
-                    <a:p>
-                      <a:pPr>
-                        <a:defRPr sz="1300" b="1">
-                          <a:solidFill>
-                            <a:srgbClr val="FFFFFF"/>
-                          </a:solidFill>
-                        </a:defRPr>
-                      </a:pPr>
-                      <a:r>
-                        <a:t>Catches</a:t>
-                      </a:r>
-                    </a:p>
-                  </a:txBody>
-                  <a:tcPr>
-                    <a:solidFill>
-                      <a:srgbClr val="1F3A68"/>
-                    </a:solidFill>
-                  </a:tcPr>
-                </a:tc>
-                <a:tc>
-                  <a:txBody>
-                    <a:bodyPr/>
-                    <a:lstStyle/>
-                    <a:p>
-                      <a:pPr>
-                        <a:defRPr sz="1300" b="1">
-                          <a:solidFill>
-                            <a:srgbClr val="FFFFFF"/>
-                          </a:solidFill>
-                        </a:defRPr>
-                      </a:pPr>
-                      <a:r>
-                        <a:t>Hits / objects</a:t>
-                      </a:r>
-                    </a:p>
-                  </a:txBody>
-                  <a:tcPr>
-                    <a:solidFill>
-                      <a:srgbClr val="1F3A68"/>
-                    </a:solidFill>
-                  </a:tcPr>
-                </a:tc>
-              </a:tr>
-              <a:tr h="411480">
-                <a:tc>
-                  <a:txBody>
-                    <a:bodyPr/>
-                    <a:lstStyle/>
-                    <a:p>
-                      <a:pPr>
-                        <a:defRPr sz="1200">
-                          <a:solidFill>
-                            <a:srgbClr val="333333"/>
-                          </a:solidFill>
-                        </a:defRPr>
-                      </a:pPr>
-                      <a:r>
-                        <a:t>PRIVATE_KEY_PATH</a:t>
-                      </a:r>
-                    </a:p>
-                  </a:txBody>
-                  <a:tcPr>
-                    <a:solidFill>
-                      <a:srgbClr val="FFFFFF"/>
-                    </a:solidFill>
-                  </a:tcPr>
-                </a:tc>
-                <a:tc>
-                  <a:txBody>
-                    <a:bodyPr/>
-                    <a:lstStyle/>
-                    <a:p>
-                      <a:pPr>
-                        <a:defRPr sz="1200">
-                          <a:solidFill>
-                            <a:srgbClr val="333333"/>
-                          </a:solidFill>
-                        </a:defRPr>
-                      </a:pPr>
-                      <a:r>
-                        <a:t>Every key-auth SFTP call site (modern pattern)</a:t>
-                      </a:r>
-                    </a:p>
-                  </a:txBody>
-                  <a:tcPr>
-                    <a:solidFill>
-                      <a:srgbClr val="FFFFFF"/>
-                    </a:solidFill>
-                  </a:tcPr>
-                </a:tc>
-                <a:tc>
-                  <a:txBody>
-                    <a:bodyPr/>
-                    <a:lstStyle/>
-                    <a:p>
-                      <a:pPr>
-                        <a:defRPr sz="1200">
-                          <a:solidFill>
-                            <a:srgbClr val="333333"/>
-                          </a:solidFill>
-                        </a:defRPr>
-                      </a:pPr>
-                      <a:r>
-                        <a:t>9 / 6</a:t>
-                      </a:r>
-                    </a:p>
-                  </a:txBody>
-                  <a:tcPr>
-                    <a:solidFill>
-                      <a:srgbClr val="FFFFFF"/>
-                    </a:solidFill>
-                  </a:tcPr>
-                </a:tc>
-              </a:tr>
-              <a:tr h="411480">
-                <a:tc>
-                  <a:txBody>
-                    <a:bodyPr/>
-                    <a:lstStyle/>
-                    <a:p>
-                      <a:pPr>
-                        <a:defRPr sz="1200">
-                          <a:solidFill>
-                            <a:srgbClr val="333333"/>
-                          </a:solidFill>
-                        </a:defRPr>
-                      </a:pPr>
-                      <a:r>
-                        <a:t>FTP_PSWD</a:t>
-                      </a:r>
-                    </a:p>
-                  </a:txBody>
-                  <a:tcPr>
-                    <a:solidFill>
-                      <a:srgbClr val="F0F2F7"/>
-                    </a:solidFill>
-                  </a:tcPr>
-                </a:tc>
-                <a:tc>
-                  <a:txBody>
-                    <a:bodyPr/>
-                    <a:lstStyle/>
-                    <a:p>
-                      <a:pPr>
-                        <a:defRPr sz="1200">
-                          <a:solidFill>
-                            <a:srgbClr val="333333"/>
-                          </a:solidFill>
-                        </a:defRPr>
-                      </a:pPr>
-                      <a:r>
-                        <a:t>Every password-auth SFTP call site (legacy)</a:t>
-                      </a:r>
-                    </a:p>
-                  </a:txBody>
-                  <a:tcPr>
-                    <a:solidFill>
-                      <a:srgbClr val="F0F2F7"/>
-                    </a:solidFill>
-                  </a:tcPr>
-                </a:tc>
-                <a:tc>
-                  <a:txBody>
-                    <a:bodyPr/>
-                    <a:lstStyle/>
-                    <a:p>
-                      <a:pPr>
-                        <a:defRPr sz="1200">
-                          <a:solidFill>
-                            <a:srgbClr val="333333"/>
-                          </a:solidFill>
-                        </a:defRPr>
-                      </a:pPr>
-                      <a:r>
-                        <a:t>11 / 5</a:t>
-                      </a:r>
-                    </a:p>
-                  </a:txBody>
-                  <a:tcPr>
-                    <a:solidFill>
-                      <a:srgbClr val="F0F2F7"/>
-                    </a:solidFill>
-                  </a:tcPr>
-                </a:tc>
-              </a:tr>
-              <a:tr h="411480">
-                <a:tc>
-                  <a:txBody>
-                    <a:bodyPr/>
-                    <a:lstStyle/>
-                    <a:p>
-                      <a:pPr>
-                        <a:defRPr sz="1200">
-                          <a:solidFill>
-                            <a:srgbClr val="333333"/>
-                          </a:solidFill>
-                        </a:defRPr>
-                      </a:pPr>
-                      <a:r>
-                        <a:t>_FROM_SFTP</a:t>
-                      </a:r>
-                    </a:p>
-                  </a:txBody>
-                  <a:tcPr>
-                    <a:solidFill>
-                      <a:srgbClr val="FFFFFF"/>
-                    </a:solidFill>
-                  </a:tcPr>
-                </a:tc>
-                <a:tc>
-                  <a:txBody>
-                    <a:bodyPr/>
-                    <a:lstStyle/>
-                    <a:p>
-                      <a:pPr>
-                        <a:defRPr sz="1200">
-                          <a:solidFill>
-                            <a:srgbClr val="333333"/>
-                          </a:solidFill>
-                        </a:defRPr>
-                      </a:pPr>
-                      <a:r>
-                        <a:t>Wrapper FMs / forms with FROM naming</a:t>
-                      </a:r>
-                    </a:p>
-                  </a:txBody>
-                  <a:tcPr>
-                    <a:solidFill>
-                      <a:srgbClr val="FFFFFF"/>
-                    </a:solidFill>
-                  </a:tcPr>
-                </a:tc>
-                <a:tc>
-                  <a:txBody>
-                    <a:bodyPr/>
-                    <a:lstStyle/>
-                    <a:p>
-                      <a:pPr>
-                        <a:defRPr sz="1200">
-                          <a:solidFill>
-                            <a:srgbClr val="333333"/>
-                          </a:solidFill>
-                        </a:defRPr>
-                      </a:pPr>
-                      <a:r>
-                        <a:t>10 / 6</a:t>
-                      </a:r>
-                    </a:p>
-                  </a:txBody>
-                  <a:tcPr>
-                    <a:solidFill>
-                      <a:srgbClr val="FFFFFF"/>
-                    </a:solidFill>
-                  </a:tcPr>
-                </a:tc>
-              </a:tr>
-              <a:tr h="411480">
-                <a:tc>
-                  <a:txBody>
-                    <a:bodyPr/>
-                    <a:lstStyle/>
-                    <a:p>
-                      <a:pPr>
-                        <a:defRPr sz="1200">
-                          <a:solidFill>
-                            <a:srgbClr val="333333"/>
-                          </a:solidFill>
-                        </a:defRPr>
-                      </a:pPr>
-                      <a:r>
-                        <a:t>_TO_SFTP</a:t>
-                      </a:r>
-                    </a:p>
-                  </a:txBody>
-                  <a:tcPr>
-                    <a:solidFill>
-                      <a:srgbClr val="F0F2F7"/>
-                    </a:solidFill>
-                  </a:tcPr>
-                </a:tc>
-                <a:tc>
-                  <a:txBody>
-                    <a:bodyPr/>
-                    <a:lstStyle/>
-                    <a:p>
-                      <a:pPr>
-                        <a:defRPr sz="1200">
-                          <a:solidFill>
-                            <a:srgbClr val="333333"/>
-                          </a:solidFill>
-                        </a:defRPr>
-                      </a:pPr>
-                      <a:r>
-                        <a:t>Wrapper FMs / forms with TO naming (catches ZDMS_SEND_FILE)</a:t>
-                      </a:r>
-                    </a:p>
-                  </a:txBody>
-                  <a:tcPr>
-                    <a:solidFill>
-                      <a:srgbClr val="F0F2F7"/>
-                    </a:solidFill>
-                  </a:tcPr>
-                </a:tc>
-                <a:tc>
-                  <a:txBody>
-                    <a:bodyPr/>
-                    <a:lstStyle/>
-                    <a:p>
-                      <a:pPr>
-                        <a:defRPr sz="1200">
-                          <a:solidFill>
-                            <a:srgbClr val="333333"/>
-                          </a:solidFill>
-                        </a:defRPr>
-                      </a:pPr>
-                      <a:r>
-                        <a:t>8 / 5</a:t>
-                      </a:r>
-                    </a:p>
-                  </a:txBody>
-                  <a:tcPr>
-                    <a:solidFill>
-                      <a:srgbClr val="F0F2F7"/>
-                    </a:solidFill>
-                  </a:tcPr>
-                </a:tc>
-              </a:tr>
-              <a:tr h="411480">
-                <a:tc>
-                  <a:txBody>
-                    <a:bodyPr/>
-                    <a:lstStyle/>
-                    <a:p>
-                      <a:pPr>
-                        <a:defRPr sz="1200">
-                          <a:solidFill>
-                            <a:srgbClr val="333333"/>
-                          </a:solidFill>
-                        </a:defRPr>
-                      </a:pPr>
-                      <a:r>
-                        <a:t>ZSFTP_</a:t>
-                      </a:r>
-                    </a:p>
-                  </a:txBody>
-                  <a:tcPr>
-                    <a:solidFill>
-                      <a:srgbClr val="FFFFFF"/>
-                    </a:solidFill>
-                  </a:tcPr>
-                </a:tc>
-                <a:tc>
-                  <a:txBody>
-                    <a:bodyPr/>
-                    <a:lstStyle/>
-                    <a:p>
-                      <a:pPr>
-                        <a:defRPr sz="1200">
-                          <a:solidFill>
-                            <a:srgbClr val="333333"/>
-                          </a:solidFill>
-                        </a:defRPr>
-                      </a:pPr>
-                      <a:r>
-                        <a:t>Every SM69-command-literal in code (gold sanity)</a:t>
-                      </a:r>
-                    </a:p>
-                  </a:txBody>
-                  <a:tcPr>
-                    <a:solidFill>
-                      <a:srgbClr val="FFFFFF"/>
-                    </a:solidFill>
-                  </a:tcPr>
-                </a:tc>
-                <a:tc>
-                  <a:txBody>
-                    <a:bodyPr/>
-                    <a:lstStyle/>
-                    <a:p>
-                      <a:pPr>
-                        <a:defRPr sz="1200">
-                          <a:solidFill>
-                            <a:srgbClr val="333333"/>
-                          </a:solidFill>
-                        </a:defRPr>
-                      </a:pPr>
-                      <a:r>
-                        <a:t>36 / 13</a:t>
-                      </a:r>
-                    </a:p>
-                  </a:txBody>
-                  <a:tcPr>
-                    <a:solidFill>
-                      <a:srgbClr val="FFFFFF"/>
-                    </a:solidFill>
-                  </a:tcPr>
-                </a:tc>
-              </a:tr>
-              <a:tr h="411480">
-                <a:tc>
-                  <a:txBody>
-                    <a:bodyPr/>
-                    <a:lstStyle/>
-                    <a:p>
-                      <a:pPr>
-                        <a:defRPr sz="1200">
-                          <a:solidFill>
-                            <a:srgbClr val="333333"/>
-                          </a:solidFill>
-                        </a:defRPr>
-                      </a:pPr>
-                      <a:r>
-                        <a:t>ZFTP_</a:t>
-                      </a:r>
-                    </a:p>
-                  </a:txBody>
-                  <a:tcPr>
-                    <a:solidFill>
-                      <a:srgbClr val="F0F2F7"/>
-                    </a:solidFill>
-                  </a:tcPr>
-                </a:tc>
-                <a:tc>
-                  <a:txBody>
-                    <a:bodyPr/>
-                    <a:lstStyle/>
-                    <a:p>
-                      <a:pPr>
-                        <a:defRPr sz="1200">
-                          <a:solidFill>
-                            <a:srgbClr val="333333"/>
-                          </a:solidFill>
-                        </a:defRPr>
-                      </a:pPr>
-                      <a:r>
-                        <a:t>Alternate SM69 prefix (catches BNP / EOB / 837 / JPM literals)</a:t>
-                      </a:r>
-                    </a:p>
-                  </a:txBody>
-                  <a:tcPr>
-                    <a:solidFill>
-                      <a:srgbClr val="F0F2F7"/>
-                    </a:solidFill>
-                  </a:tcPr>
-                </a:tc>
-                <a:tc>
-                  <a:txBody>
-                    <a:bodyPr/>
-                    <a:lstStyle/>
-                    <a:p>
-                      <a:pPr>
-                        <a:defRPr sz="1200">
-                          <a:solidFill>
-                            <a:srgbClr val="333333"/>
-                          </a:solidFill>
-                        </a:defRPr>
-                      </a:pPr>
-                      <a:r>
-                        <a:t>7 / 7</a:t>
-                      </a:r>
-                    </a:p>
-                  </a:txBody>
-                  <a:tcPr>
-                    <a:solidFill>
-                      <a:srgbClr val="F0F2F7"/>
-                    </a:solidFill>
-                  </a:tcPr>
-                </a:tc>
-              </a:tr>
-              <a:tr h="411480">
-                <a:tc>
-                  <a:txBody>
-                    <a:bodyPr/>
-                    <a:lstStyle/>
-                    <a:p>
-                      <a:pPr>
-                        <a:defRPr sz="1200">
-                          <a:solidFill>
-                            <a:srgbClr val="333333"/>
-                          </a:solidFill>
-                        </a:defRPr>
-                      </a:pPr>
-                      <a:r>
-                        <a:t>FUNCTION zerx_</a:t>
-                      </a:r>
-                    </a:p>
-                  </a:txBody>
-                  <a:tcPr>
-                    <a:solidFill>
-                      <a:srgbClr val="FFFFFF"/>
-                    </a:solidFill>
-                  </a:tcPr>
-                </a:tc>
-                <a:tc>
-                  <a:txBody>
-                    <a:bodyPr/>
-                    <a:lstStyle/>
-                    <a:p>
-                      <a:pPr>
-                        <a:defRPr sz="1200">
-                          <a:solidFill>
-                            <a:srgbClr val="333333"/>
-                          </a:solidFill>
-                        </a:defRPr>
-                      </a:pPr>
-                      <a:r>
-                        <a:t>ZERX FUGR FM enumeration</a:t>
-                      </a:r>
-                    </a:p>
-                  </a:txBody>
-                  <a:tcPr>
-                    <a:solidFill>
-                      <a:srgbClr val="FFFFFF"/>
-                    </a:solidFill>
-                  </a:tcPr>
-                </a:tc>
-                <a:tc>
-                  <a:txBody>
-                    <a:bodyPr/>
-                    <a:lstStyle/>
-                    <a:p>
-                      <a:pPr>
-                        <a:defRPr sz="1200">
-                          <a:solidFill>
-                            <a:srgbClr val="333333"/>
-                          </a:solidFill>
-                        </a:defRPr>
-                      </a:pPr>
-                      <a:r>
-                        <a:t>2 / 1</a:t>
-                      </a:r>
-                    </a:p>
-                  </a:txBody>
-                  <a:tcPr>
-                    <a:solidFill>
-                      <a:srgbClr val="FFFFFF"/>
-                    </a:solidFill>
-                  </a:tcPr>
-                </a:tc>
-              </a:tr>
-            </a:tbl>
-          </a:graphicData>
-        </a:graphic>
-      </p:graphicFrame>
-      <p:sp>
-        <p:nvSpPr>
-          <p:cNvPr id="5" name="TextBox 4"/>
-          <p:cNvSpPr txBox="1"/>
-          <p:nvPr/>
-        </p:nvSpPr>
-        <p:spPr>
-          <a:xfrm>
-            <a:off x="457200" y="5577840"/>
-            <a:ext cx="11247120" cy="1097280"/>
-          </a:xfrm>
-          <a:prstGeom prst="rect">
-            <a:avLst/>
-          </a:prstGeom>
-          <a:noFill/>
-        </p:spPr>
-        <p:txBody>
-          <a:bodyPr wrap="square">
-            <a:spAutoFit/>
-          </a:bodyPr>
-          <a:lstStyle/>
+              <a:t>For each of the 16 reports + 3 wrapper FUGRs, the replacement must:</a:t>
+            </a:r>
+          </a:p>
           <a:p>
             <a:pPr>
               <a:defRPr sz="1300" b="0">
@@ -4748,9 +4190,6 @@
                 </a:solidFill>
               </a:defRPr>
             </a:pPr>
-            <a:r>
-              <a:t>Confidence: ≈ 97% within Z001 + PROG/FUGR/CLAS. Residual 3%: dynamic CALL FUNCTION lv_fm, hardcoded SFTP without zfi_constants lookup, or code outside Z001.</a:t>
-            </a:r>
           </a:p>
           <a:p>
             <a:pPr>
@@ -4761,7 +4200,190 @@
               </a:defRPr>
             </a:pPr>
             <a:r>
-              <a:t>Rises to ≈ 99% if customer confirms: 'all SFTP code lives in Z001 and reads zfi_constants'.</a:t>
+              <a:t>1. Read the same zfi_constants rows (same pname, same fnam keys) — or provide a 1:1 shim.</a:t>
+            </a:r>
+          </a:p>
+          <a:p>
+            <a:pPr>
+              <a:defRPr sz="1300" b="0">
+                <a:solidFill>
+                  <a:srgbClr val="333333"/>
+                </a:solidFill>
+              </a:defRPr>
+            </a:pPr>
+          </a:p>
+          <a:p>
+            <a:pPr>
+              <a:defRPr sz="1300" b="0">
+                <a:solidFill>
+                  <a:srgbClr val="333333"/>
+                </a:solidFill>
+              </a:defRPr>
+            </a:pPr>
+            <a:r>
+              <a:t>2. Reach the same remote host with the same credentials.</a:t>
+            </a:r>
+          </a:p>
+          <a:p>
+            <a:pPr>
+              <a:defRPr sz="1300" b="0">
+                <a:solidFill>
+                  <a:srgbClr val="333333"/>
+                </a:solidFill>
+              </a:defRPr>
+            </a:pPr>
+          </a:p>
+          <a:p>
+            <a:pPr>
+              <a:defRPr sz="1300" b="0">
+                <a:solidFill>
+                  <a:srgbClr val="333333"/>
+                </a:solidFill>
+              </a:defRPr>
+            </a:pPr>
+            <a:r>
+              <a:t>3. Support both auth modes — key-based (PRIVATE_KEY_PATH + HOST_KEY + PASSPHRASE) AND password-based (FTP_PSWD).</a:t>
+            </a:r>
+          </a:p>
+          <a:p>
+            <a:pPr>
+              <a:defRPr sz="1300" b="0">
+                <a:solidFill>
+                  <a:srgbClr val="333333"/>
+                </a:solidFill>
+              </a:defRPr>
+            </a:pPr>
+          </a:p>
+          <a:p>
+            <a:pPr>
+              <a:defRPr sz="1300" b="0">
+                <a:solidFill>
+                  <a:srgbClr val="333333"/>
+                </a:solidFill>
+              </a:defRPr>
+            </a:pPr>
+            <a:r>
+              <a:t>4. Preserve PGP encryption wrap for ZSFTP_BNP_PARIBAS_WITH_PGP.</a:t>
+            </a:r>
+          </a:p>
+          <a:p>
+            <a:pPr>
+              <a:defRPr sz="1300" b="0">
+                <a:solidFill>
+                  <a:srgbClr val="333333"/>
+                </a:solidFill>
+              </a:defRPr>
+            </a:pPr>
+          </a:p>
+          <a:p>
+            <a:pPr>
+              <a:defRPr sz="1300" b="0">
+                <a:solidFill>
+                  <a:srgbClr val="333333"/>
+                </a:solidFill>
+              </a:defRPr>
+            </a:pPr>
+            <a:r>
+              <a:t>5. Return success/failure semantics compatible with caller code (exitcode, exec_protocol log).</a:t>
+            </a:r>
+          </a:p>
+          <a:p>
+            <a:pPr>
+              <a:defRPr sz="1300" b="0">
+                <a:solidFill>
+                  <a:srgbClr val="333333"/>
+                </a:solidFill>
+              </a:defRPr>
+            </a:pPr>
+          </a:p>
+          <a:p>
+            <a:pPr>
+              <a:defRPr sz="1300" b="0">
+                <a:solidFill>
+                  <a:srgbClr val="333333"/>
+                </a:solidFill>
+              </a:defRPr>
+            </a:pPr>
+            <a:r>
+              <a:t>6. Coordinate cutover for the 3 SHARED SM69 entries — both callers migrate atomically:</a:t>
+            </a:r>
+          </a:p>
+          <a:p>
+            <a:pPr>
+              <a:defRPr sz="1300" b="0">
+                <a:solidFill>
+                  <a:srgbClr val="333333"/>
+                </a:solidFill>
+              </a:defRPr>
+            </a:pPr>
+            <a:r>
+              <a:t>       • ZFTP_BNPP            ← ZSFTP_BNP_PARIBAS + ZSFTP_BNP_PARIBAS_WITH_PGP</a:t>
+            </a:r>
+          </a:p>
+          <a:p>
+            <a:pPr>
+              <a:defRPr sz="1300" b="0">
+                <a:solidFill>
+                  <a:srgbClr val="333333"/>
+                </a:solidFill>
+              </a:defRPr>
+            </a:pPr>
+            <a:r>
+              <a:t>       • ZSFTP_CERIDIAN_GET   ← ZFFIU_ACC_POST + ZSFTP_CERIDIAN_PULL</a:t>
+            </a:r>
+          </a:p>
+          <a:p>
+            <a:pPr>
+              <a:defRPr sz="1300" b="0">
+                <a:solidFill>
+                  <a:srgbClr val="333333"/>
+                </a:solidFill>
+              </a:defRPr>
+            </a:pPr>
+            <a:r>
+              <a:t>       • ZSFTP_DMS_GET / PUT  ← ZDMS_UPLOAD_FILES + ZDMS_REPLACE_FILES</a:t>
+            </a:r>
+          </a:p>
+          <a:p>
+            <a:pPr>
+              <a:defRPr sz="1300" b="0">
+                <a:solidFill>
+                  <a:srgbClr val="333333"/>
+                </a:solidFill>
+              </a:defRPr>
+            </a:pPr>
+          </a:p>
+          <a:p>
+            <a:pPr>
+              <a:defRPr sz="1300" b="0">
+                <a:solidFill>
+                  <a:srgbClr val="333333"/>
+                </a:solidFill>
+              </a:defRPr>
+            </a:pPr>
+            <a:r>
+              <a:t>7. Per-report end-to-end test: trigger the report; assert file landed (pull) or was delivered (push).</a:t>
+            </a:r>
+          </a:p>
+          <a:p>
+            <a:pPr>
+              <a:defRPr sz="1300" b="0">
+                <a:solidFill>
+                  <a:srgbClr val="333333"/>
+                </a:solidFill>
+              </a:defRPr>
+            </a:pPr>
+          </a:p>
+          <a:p>
+            <a:pPr>
+              <a:defRPr sz="1300" b="0">
+                <a:solidFill>
+                  <a:srgbClr val="333333"/>
+                </a:solidFill>
+              </a:defRPr>
+            </a:pPr>
+            <a:r>
+              <a:t>8. ZDMS_SEND_FILE / ZDMS_EXTRACT_DOCS_TO_SFTP — investigate dynamic/cross-package callers before declaring it dead.</a:t>
             </a:r>
           </a:p>
         </p:txBody>
@@ -4807,14 +4429,14 @@
           <a:lstStyle/>
           <a:p>
             <a:pPr>
-              <a:defRPr sz="2600" b="1">
+              <a:defRPr sz="2800" b="1">
                 <a:solidFill>
                   <a:srgbClr val="1F3A68"/>
                 </a:solidFill>
               </a:defRPr>
             </a:pPr>
             <a:r>
-              <a:t>SFTP credential schema — what each fnam means</a:t>
+              <a:t>Completeness — 7 independent scans, no truncation</a:t>
             </a:r>
           </a:p>
         </p:txBody>
@@ -4827,7 +4449,7 @@
         </p:nvSpPr>
         <p:spPr>
           <a:xfrm>
-            <a:off x="457200" y="1005840"/>
+            <a:off x="457200" y="1097280"/>
             <a:ext cx="11247120" cy="640080"/>
           </a:xfrm>
           <a:prstGeom prst="rect">
@@ -4842,14 +4464,26 @@
           <a:lstStyle/>
           <a:p>
             <a:pPr>
-              <a:defRPr sz="1200" b="0">
+              <a:defRPr sz="1400" b="0">
                 <a:solidFill>
                   <a:srgbClr val="333333"/>
                 </a:solidFill>
               </a:defRPr>
             </a:pPr>
             <a:r>
-              <a:t>Each fnam below is a literal key in `READ TABLE i_constants WITH KEY fnam = '...'`. Below: what value it holds and how it's used in the SFTP shell command.</a:t>
+              <a:t>Seven SearchSource scans across Z001 + sub-packages, none truncated.</a:t>
+            </a:r>
+          </a:p>
+          <a:p>
+            <a:pPr>
+              <a:defRPr sz="1400" b="0">
+                <a:solidFill>
+                  <a:srgbClr val="333333"/>
+                </a:solidFill>
+              </a:defRPr>
+            </a:pPr>
+            <a:r>
+              <a:t>The 7th scan (`ZSFTP_` SM69-prefix) caught a missed wrapper FUGR — names don't always tell the truth.</a:t>
             </a:r>
           </a:p>
         </p:txBody>
@@ -4863,8 +4497,8 @@
           <p:nvPr/>
         </p:nvGraphicFramePr>
         <p:xfrm>
-          <a:off x="365760" y="1828800"/>
-          <a:ext cx="11430000" cy="4754880"/>
+          <a:off x="457200" y="2103120"/>
+          <a:ext cx="11247120" cy="3291840"/>
         </p:xfrm>
         <a:graphic>
           <a:graphicData uri="http://schemas.openxmlformats.org/drawingml/2006/table">
@@ -4873,25 +4507,25 @@
                 <a:tableStyleId>{5C22544A-7EE6-4342-B048-85BDC9FD1C3A}</a:tableStyleId>
               </a:tblPr>
               <a:tblGrid>
-                <a:gridCol w="3017520"/>
-                <a:gridCol w="3931920"/>
-                <a:gridCol w="4480560"/>
+                <a:gridCol w="2743200"/>
+                <a:gridCol w="6217920"/>
+                <a:gridCol w="2286000"/>
               </a:tblGrid>
-              <a:tr h="365760">
-                <a:tc>
-                  <a:txBody>
-                    <a:bodyPr/>
-                    <a:lstStyle/>
-                    <a:p>
-                      <a:pPr>
-                        <a:defRPr sz="1200" b="1">
+              <a:tr h="411480">
+                <a:tc>
+                  <a:txBody>
+                    <a:bodyPr/>
+                    <a:lstStyle/>
+                    <a:p>
+                      <a:pPr>
+                        <a:defRPr sz="1300" b="1">
                           <a:solidFill>
                             <a:srgbClr val="FFFFFF"/>
                           </a:solidFill>
                         </a:defRPr>
                       </a:pPr>
                       <a:r>
-                        <a:t>fnam (literal key)</a:t>
+                        <a:t>Scan keyword</a:t>
                       </a:r>
                     </a:p>
                   </a:txBody>
@@ -4907,14 +4541,14 @@
                     <a:lstStyle/>
                     <a:p>
                       <a:pPr>
-                        <a:defRPr sz="1200" b="1">
+                        <a:defRPr sz="1300" b="1">
                           <a:solidFill>
                             <a:srgbClr val="FFFFFF"/>
                           </a:solidFill>
                         </a:defRPr>
                       </a:pPr>
                       <a:r>
-                        <a:t>Holds</a:t>
+                        <a:t>Catches</a:t>
                       </a:r>
                     </a:p>
                   </a:txBody>
@@ -4930,14 +4564,14 @@
                     <a:lstStyle/>
                     <a:p>
                       <a:pPr>
-                        <a:defRPr sz="1200" b="1">
+                        <a:defRPr sz="1300" b="1">
                           <a:solidFill>
                             <a:srgbClr val="FFFFFF"/>
                           </a:solidFill>
                         </a:defRPr>
                       </a:pPr>
                       <a:r>
-                        <a:t>Used as</a:t>
+                        <a:t>Hits / objects</a:t>
                       </a:r>
                     </a:p>
                   </a:txBody>
@@ -4948,68 +4582,67 @@
                   </a:tcPr>
                 </a:tc>
               </a:tr>
-              <a:tr h="365760">
-                <a:tc>
-                  <a:txBody>
-                    <a:bodyPr/>
-                    <a:lstStyle/>
-                    <a:p>
-                      <a:pPr>
-                        <a:defRPr sz="1100">
-                          <a:solidFill>
-                            <a:srgbClr val="333333"/>
-                          </a:solidFill>
-                          <a:latin typeface="Consolas"/>
-                        </a:defRPr>
-                      </a:pPr>
-                      <a:r>
-                        <a:t>'FTP_USER'</a:t>
-                      </a:r>
-                    </a:p>
-                  </a:txBody>
-                  <a:tcPr>
-                    <a:solidFill>
-                      <a:srgbClr val="FFFFFF"/>
-                    </a:solidFill>
-                  </a:tcPr>
-                </a:tc>
-                <a:tc>
-                  <a:txBody>
-                    <a:bodyPr/>
-                    <a:lstStyle/>
-                    <a:p>
-                      <a:pPr>
-                        <a:defRPr sz="1100">
-                          <a:solidFill>
-                            <a:srgbClr val="333333"/>
-                          </a:solidFill>
-                        </a:defRPr>
-                      </a:pPr>
-                      <a:r>
-                        <a:t>SFTP username for the remote endpoint</a:t>
-                      </a:r>
-                    </a:p>
-                  </a:txBody>
-                  <a:tcPr>
-                    <a:solidFill>
-                      <a:srgbClr val="FFFFFF"/>
-                    </a:solidFill>
-                  </a:tcPr>
-                </a:tc>
-                <a:tc>
-                  <a:txBody>
-                    <a:bodyPr/>
-                    <a:lstStyle/>
-                    <a:p>
-                      <a:pPr>
-                        <a:defRPr sz="1100">
-                          <a:solidFill>
-                            <a:srgbClr val="333333"/>
-                          </a:solidFill>
-                        </a:defRPr>
-                      </a:pPr>
-                      <a:r>
-                        <a:t>Login user in the sftp/scp command</a:t>
+              <a:tr h="411480">
+                <a:tc>
+                  <a:txBody>
+                    <a:bodyPr/>
+                    <a:lstStyle/>
+                    <a:p>
+                      <a:pPr>
+                        <a:defRPr sz="1200">
+                          <a:solidFill>
+                            <a:srgbClr val="333333"/>
+                          </a:solidFill>
+                        </a:defRPr>
+                      </a:pPr>
+                      <a:r>
+                        <a:t>PRIVATE_KEY_PATH</a:t>
+                      </a:r>
+                    </a:p>
+                  </a:txBody>
+                  <a:tcPr>
+                    <a:solidFill>
+                      <a:srgbClr val="FFFFFF"/>
+                    </a:solidFill>
+                  </a:tcPr>
+                </a:tc>
+                <a:tc>
+                  <a:txBody>
+                    <a:bodyPr/>
+                    <a:lstStyle/>
+                    <a:p>
+                      <a:pPr>
+                        <a:defRPr sz="1200">
+                          <a:solidFill>
+                            <a:srgbClr val="333333"/>
+                          </a:solidFill>
+                        </a:defRPr>
+                      </a:pPr>
+                      <a:r>
+                        <a:t>Every key-auth SFTP call site (modern pattern)</a:t>
+                      </a:r>
+                    </a:p>
+                  </a:txBody>
+                  <a:tcPr>
+                    <a:solidFill>
+                      <a:srgbClr val="FFFFFF"/>
+                    </a:solidFill>
+                  </a:tcPr>
+                </a:tc>
+                <a:tc>
+                  <a:txBody>
+                    <a:bodyPr/>
+                    <a:lstStyle/>
+                    <a:p>
+                      <a:pPr>
+                        <a:defRPr sz="1200">
+                          <a:solidFill>
+                            <a:srgbClr val="333333"/>
+                          </a:solidFill>
+                        </a:defRPr>
+                      </a:pPr>
+                      <a:r>
+                        <a:t>9 / 6</a:t>
                       </a:r>
                     </a:p>
                   </a:txBody>
@@ -5020,68 +4653,67 @@
                   </a:tcPr>
                 </a:tc>
               </a:tr>
-              <a:tr h="365760">
-                <a:tc>
-                  <a:txBody>
-                    <a:bodyPr/>
-                    <a:lstStyle/>
-                    <a:p>
-                      <a:pPr>
-                        <a:defRPr sz="1100">
-                          <a:solidFill>
-                            <a:srgbClr val="333333"/>
-                          </a:solidFill>
-                          <a:latin typeface="Consolas"/>
-                        </a:defRPr>
-                      </a:pPr>
-                      <a:r>
-                        <a:t>'FTP_PSWD'</a:t>
-                      </a:r>
-                    </a:p>
-                  </a:txBody>
-                  <a:tcPr>
-                    <a:solidFill>
-                      <a:srgbClr val="F0F2F7"/>
-                    </a:solidFill>
-                  </a:tcPr>
-                </a:tc>
-                <a:tc>
-                  <a:txBody>
-                    <a:bodyPr/>
-                    <a:lstStyle/>
-                    <a:p>
-                      <a:pPr>
-                        <a:defRPr sz="1100">
-                          <a:solidFill>
-                            <a:srgbClr val="333333"/>
-                          </a:solidFill>
-                        </a:defRPr>
-                      </a:pPr>
-                      <a:r>
-                        <a:t>Password (legacy/fallback auth)</a:t>
-                      </a:r>
-                    </a:p>
-                  </a:txBody>
-                  <a:tcPr>
-                    <a:solidFill>
-                      <a:srgbClr val="F0F2F7"/>
-                    </a:solidFill>
-                  </a:tcPr>
-                </a:tc>
-                <a:tc>
-                  <a:txBody>
-                    <a:bodyPr/>
-                    <a:lstStyle/>
-                    <a:p>
-                      <a:pPr>
-                        <a:defRPr sz="1100">
-                          <a:solidFill>
-                            <a:srgbClr val="333333"/>
-                          </a:solidFill>
-                        </a:defRPr>
-                      </a:pPr>
-                      <a:r>
-                        <a:t>Password component when key auth is not used</a:t>
+              <a:tr h="411480">
+                <a:tc>
+                  <a:txBody>
+                    <a:bodyPr/>
+                    <a:lstStyle/>
+                    <a:p>
+                      <a:pPr>
+                        <a:defRPr sz="1200">
+                          <a:solidFill>
+                            <a:srgbClr val="333333"/>
+                          </a:solidFill>
+                        </a:defRPr>
+                      </a:pPr>
+                      <a:r>
+                        <a:t>FTP_PSWD</a:t>
+                      </a:r>
+                    </a:p>
+                  </a:txBody>
+                  <a:tcPr>
+                    <a:solidFill>
+                      <a:srgbClr val="F0F2F7"/>
+                    </a:solidFill>
+                  </a:tcPr>
+                </a:tc>
+                <a:tc>
+                  <a:txBody>
+                    <a:bodyPr/>
+                    <a:lstStyle/>
+                    <a:p>
+                      <a:pPr>
+                        <a:defRPr sz="1200">
+                          <a:solidFill>
+                            <a:srgbClr val="333333"/>
+                          </a:solidFill>
+                        </a:defRPr>
+                      </a:pPr>
+                      <a:r>
+                        <a:t>Every password-auth SFTP call site (legacy)</a:t>
+                      </a:r>
+                    </a:p>
+                  </a:txBody>
+                  <a:tcPr>
+                    <a:solidFill>
+                      <a:srgbClr val="F0F2F7"/>
+                    </a:solidFill>
+                  </a:tcPr>
+                </a:tc>
+                <a:tc>
+                  <a:txBody>
+                    <a:bodyPr/>
+                    <a:lstStyle/>
+                    <a:p>
+                      <a:pPr>
+                        <a:defRPr sz="1200">
+                          <a:solidFill>
+                            <a:srgbClr val="333333"/>
+                          </a:solidFill>
+                        </a:defRPr>
+                      </a:pPr>
+                      <a:r>
+                        <a:t>11 / 5</a:t>
                       </a:r>
                     </a:p>
                   </a:txBody>
@@ -5092,68 +4724,67 @@
                   </a:tcPr>
                 </a:tc>
               </a:tr>
-              <a:tr h="365760">
-                <a:tc>
-                  <a:txBody>
-                    <a:bodyPr/>
-                    <a:lstStyle/>
-                    <a:p>
-                      <a:pPr>
-                        <a:defRPr sz="1100">
-                          <a:solidFill>
-                            <a:srgbClr val="333333"/>
-                          </a:solidFill>
-                          <a:latin typeface="Consolas"/>
-                        </a:defRPr>
-                      </a:pPr>
-                      <a:r>
-                        <a:t>'FTP_DOMAIN'</a:t>
-                      </a:r>
-                    </a:p>
-                  </a:txBody>
-                  <a:tcPr>
-                    <a:solidFill>
-                      <a:srgbClr val="FFFFFF"/>
-                    </a:solidFill>
-                  </a:tcPr>
-                </a:tc>
-                <a:tc>
-                  <a:txBody>
-                    <a:bodyPr/>
-                    <a:lstStyle/>
-                    <a:p>
-                      <a:pPr>
-                        <a:defRPr sz="1100">
-                          <a:solidFill>
-                            <a:srgbClr val="333333"/>
-                          </a:solidFill>
-                        </a:defRPr>
-                      </a:pPr>
-                      <a:r>
-                        <a:t>Remote SFTP server hostname (FQDN)</a:t>
-                      </a:r>
-                    </a:p>
-                  </a:txBody>
-                  <a:tcPr>
-                    <a:solidFill>
-                      <a:srgbClr val="FFFFFF"/>
-                    </a:solidFill>
-                  </a:tcPr>
-                </a:tc>
-                <a:tc>
-                  <a:txBody>
-                    <a:bodyPr/>
-                    <a:lstStyle/>
-                    <a:p>
-                      <a:pPr>
-                        <a:defRPr sz="1100">
-                          <a:solidFill>
-                            <a:srgbClr val="333333"/>
-                          </a:solidFill>
-                        </a:defRPr>
-                      </a:pPr>
-                      <a:r>
-                        <a:t>Host portion of `user@host[:port]`</a:t>
+              <a:tr h="411480">
+                <a:tc>
+                  <a:txBody>
+                    <a:bodyPr/>
+                    <a:lstStyle/>
+                    <a:p>
+                      <a:pPr>
+                        <a:defRPr sz="1200">
+                          <a:solidFill>
+                            <a:srgbClr val="333333"/>
+                          </a:solidFill>
+                        </a:defRPr>
+                      </a:pPr>
+                      <a:r>
+                        <a:t>_FROM_SFTP</a:t>
+                      </a:r>
+                    </a:p>
+                  </a:txBody>
+                  <a:tcPr>
+                    <a:solidFill>
+                      <a:srgbClr val="FFFFFF"/>
+                    </a:solidFill>
+                  </a:tcPr>
+                </a:tc>
+                <a:tc>
+                  <a:txBody>
+                    <a:bodyPr/>
+                    <a:lstStyle/>
+                    <a:p>
+                      <a:pPr>
+                        <a:defRPr sz="1200">
+                          <a:solidFill>
+                            <a:srgbClr val="333333"/>
+                          </a:solidFill>
+                        </a:defRPr>
+                      </a:pPr>
+                      <a:r>
+                        <a:t>Wrapper FMs / forms with FROM naming</a:t>
+                      </a:r>
+                    </a:p>
+                  </a:txBody>
+                  <a:tcPr>
+                    <a:solidFill>
+                      <a:srgbClr val="FFFFFF"/>
+                    </a:solidFill>
+                  </a:tcPr>
+                </a:tc>
+                <a:tc>
+                  <a:txBody>
+                    <a:bodyPr/>
+                    <a:lstStyle/>
+                    <a:p>
+                      <a:pPr>
+                        <a:defRPr sz="1200">
+                          <a:solidFill>
+                            <a:srgbClr val="333333"/>
+                          </a:solidFill>
+                        </a:defRPr>
+                      </a:pPr>
+                      <a:r>
+                        <a:t>10 / 6</a:t>
                       </a:r>
                     </a:p>
                   </a:txBody>
@@ -5164,68 +4795,67 @@
                   </a:tcPr>
                 </a:tc>
               </a:tr>
-              <a:tr h="365760">
-                <a:tc>
-                  <a:txBody>
-                    <a:bodyPr/>
-                    <a:lstStyle/>
-                    <a:p>
-                      <a:pPr>
-                        <a:defRPr sz="1100">
-                          <a:solidFill>
-                            <a:srgbClr val="333333"/>
-                          </a:solidFill>
-                          <a:latin typeface="Consolas"/>
-                        </a:defRPr>
-                      </a:pPr>
-                      <a:r>
-                        <a:t>'FTP_PORT'</a:t>
-                      </a:r>
-                    </a:p>
-                  </a:txBody>
-                  <a:tcPr>
-                    <a:solidFill>
-                      <a:srgbClr val="F0F2F7"/>
-                    </a:solidFill>
-                  </a:tcPr>
-                </a:tc>
-                <a:tc>
-                  <a:txBody>
-                    <a:bodyPr/>
-                    <a:lstStyle/>
-                    <a:p>
-                      <a:pPr>
-                        <a:defRPr sz="1100">
-                          <a:solidFill>
-                            <a:srgbClr val="333333"/>
-                          </a:solidFill>
-                        </a:defRPr>
-                      </a:pPr>
-                      <a:r>
-                        <a:t>TCP port (default 22 if not set)</a:t>
-                      </a:r>
-                    </a:p>
-                  </a:txBody>
-                  <a:tcPr>
-                    <a:solidFill>
-                      <a:srgbClr val="F0F2F7"/>
-                    </a:solidFill>
-                  </a:tcPr>
-                </a:tc>
-                <a:tc>
-                  <a:txBody>
-                    <a:bodyPr/>
-                    <a:lstStyle/>
-                    <a:p>
-                      <a:pPr>
-                        <a:defRPr sz="1100">
-                          <a:solidFill>
-                            <a:srgbClr val="333333"/>
-                          </a:solidFill>
-                        </a:defRPr>
-                      </a:pPr>
-                      <a:r>
-                        <a:t>`:port` suffix after host</a:t>
+              <a:tr h="411480">
+                <a:tc>
+                  <a:txBody>
+                    <a:bodyPr/>
+                    <a:lstStyle/>
+                    <a:p>
+                      <a:pPr>
+                        <a:defRPr sz="1200">
+                          <a:solidFill>
+                            <a:srgbClr val="333333"/>
+                          </a:solidFill>
+                        </a:defRPr>
+                      </a:pPr>
+                      <a:r>
+                        <a:t>_TO_SFTP</a:t>
+                      </a:r>
+                    </a:p>
+                  </a:txBody>
+                  <a:tcPr>
+                    <a:solidFill>
+                      <a:srgbClr val="F0F2F7"/>
+                    </a:solidFill>
+                  </a:tcPr>
+                </a:tc>
+                <a:tc>
+                  <a:txBody>
+                    <a:bodyPr/>
+                    <a:lstStyle/>
+                    <a:p>
+                      <a:pPr>
+                        <a:defRPr sz="1200">
+                          <a:solidFill>
+                            <a:srgbClr val="333333"/>
+                          </a:solidFill>
+                        </a:defRPr>
+                      </a:pPr>
+                      <a:r>
+                        <a:t>Wrapper FMs / forms with TO naming (catches ZDMS_SEND_FILE)</a:t>
+                      </a:r>
+                    </a:p>
+                  </a:txBody>
+                  <a:tcPr>
+                    <a:solidFill>
+                      <a:srgbClr val="F0F2F7"/>
+                    </a:solidFill>
+                  </a:tcPr>
+                </a:tc>
+                <a:tc>
+                  <a:txBody>
+                    <a:bodyPr/>
+                    <a:lstStyle/>
+                    <a:p>
+                      <a:pPr>
+                        <a:defRPr sz="1200">
+                          <a:solidFill>
+                            <a:srgbClr val="333333"/>
+                          </a:solidFill>
+                        </a:defRPr>
+                      </a:pPr>
+                      <a:r>
+                        <a:t>8 / 5</a:t>
                       </a:r>
                     </a:p>
                   </a:txBody>
@@ -5236,68 +4866,67 @@
                   </a:tcPr>
                 </a:tc>
               </a:tr>
-              <a:tr h="365760">
-                <a:tc>
-                  <a:txBody>
-                    <a:bodyPr/>
-                    <a:lstStyle/>
-                    <a:p>
-                      <a:pPr>
-                        <a:defRPr sz="1100">
-                          <a:solidFill>
-                            <a:srgbClr val="333333"/>
-                          </a:solidFill>
-                          <a:latin typeface="Consolas"/>
-                        </a:defRPr>
-                      </a:pPr>
-                      <a:r>
-                        <a:t>'HOST_KEY'</a:t>
-                      </a:r>
-                    </a:p>
-                  </a:txBody>
-                  <a:tcPr>
-                    <a:solidFill>
-                      <a:srgbClr val="FFFFFF"/>
-                    </a:solidFill>
-                  </a:tcPr>
-                </a:tc>
-                <a:tc>
-                  <a:txBody>
-                    <a:bodyPr/>
-                    <a:lstStyle/>
-                    <a:p>
-                      <a:pPr>
-                        <a:defRPr sz="1100">
-                          <a:solidFill>
-                            <a:srgbClr val="333333"/>
-                          </a:solidFill>
-                        </a:defRPr>
-                      </a:pPr>
-                      <a:r>
-                        <a:t>Server's host-key fingerprint (md5/sha)</a:t>
-                      </a:r>
-                    </a:p>
-                  </a:txBody>
-                  <a:tcPr>
-                    <a:solidFill>
-                      <a:srgbClr val="FFFFFF"/>
-                    </a:solidFill>
-                  </a:tcPr>
-                </a:tc>
-                <a:tc>
-                  <a:txBody>
-                    <a:bodyPr/>
-                    <a:lstStyle/>
-                    <a:p>
-                      <a:pPr>
-                        <a:defRPr sz="1100">
-                          <a:solidFill>
-                            <a:srgbClr val="333333"/>
-                          </a:solidFill>
-                        </a:defRPr>
-                      </a:pPr>
-                      <a:r>
-                        <a:t>Server identity verification flag for sftp client</a:t>
+              <a:tr h="411480">
+                <a:tc>
+                  <a:txBody>
+                    <a:bodyPr/>
+                    <a:lstStyle/>
+                    <a:p>
+                      <a:pPr>
+                        <a:defRPr sz="1200">
+                          <a:solidFill>
+                            <a:srgbClr val="333333"/>
+                          </a:solidFill>
+                        </a:defRPr>
+                      </a:pPr>
+                      <a:r>
+                        <a:t>ZSFTP_</a:t>
+                      </a:r>
+                    </a:p>
+                  </a:txBody>
+                  <a:tcPr>
+                    <a:solidFill>
+                      <a:srgbClr val="FFFFFF"/>
+                    </a:solidFill>
+                  </a:tcPr>
+                </a:tc>
+                <a:tc>
+                  <a:txBody>
+                    <a:bodyPr/>
+                    <a:lstStyle/>
+                    <a:p>
+                      <a:pPr>
+                        <a:defRPr sz="1200">
+                          <a:solidFill>
+                            <a:srgbClr val="333333"/>
+                          </a:solidFill>
+                        </a:defRPr>
+                      </a:pPr>
+                      <a:r>
+                        <a:t>Every SM69-command-literal in code (gold sanity)</a:t>
+                      </a:r>
+                    </a:p>
+                  </a:txBody>
+                  <a:tcPr>
+                    <a:solidFill>
+                      <a:srgbClr val="FFFFFF"/>
+                    </a:solidFill>
+                  </a:tcPr>
+                </a:tc>
+                <a:tc>
+                  <a:txBody>
+                    <a:bodyPr/>
+                    <a:lstStyle/>
+                    <a:p>
+                      <a:pPr>
+                        <a:defRPr sz="1200">
+                          <a:solidFill>
+                            <a:srgbClr val="333333"/>
+                          </a:solidFill>
+                        </a:defRPr>
+                      </a:pPr>
+                      <a:r>
+                        <a:t>36 / 13</a:t>
                       </a:r>
                     </a:p>
                   </a:txBody>
@@ -5308,68 +4937,67 @@
                   </a:tcPr>
                 </a:tc>
               </a:tr>
-              <a:tr h="365760">
-                <a:tc>
-                  <a:txBody>
-                    <a:bodyPr/>
-                    <a:lstStyle/>
-                    <a:p>
-                      <a:pPr>
-                        <a:defRPr sz="1100">
-                          <a:solidFill>
-                            <a:srgbClr val="333333"/>
-                          </a:solidFill>
-                          <a:latin typeface="Consolas"/>
-                        </a:defRPr>
-                      </a:pPr>
-                      <a:r>
-                        <a:t>'PRIVATE_KEY_PATH'</a:t>
-                      </a:r>
-                    </a:p>
-                  </a:txBody>
-                  <a:tcPr>
-                    <a:solidFill>
-                      <a:srgbClr val="F0F2F7"/>
-                    </a:solidFill>
-                  </a:tcPr>
-                </a:tc>
-                <a:tc>
-                  <a:txBody>
-                    <a:bodyPr/>
-                    <a:lstStyle/>
-                    <a:p>
-                      <a:pPr>
-                        <a:defRPr sz="1100">
-                          <a:solidFill>
-                            <a:srgbClr val="333333"/>
-                          </a:solidFill>
-                        </a:defRPr>
-                      </a:pPr>
-                      <a:r>
-                        <a:t>Path on SAP app server to the private key file</a:t>
-                      </a:r>
-                    </a:p>
-                  </a:txBody>
-                  <a:tcPr>
-                    <a:solidFill>
-                      <a:srgbClr val="F0F2F7"/>
-                    </a:solidFill>
-                  </a:tcPr>
-                </a:tc>
-                <a:tc>
-                  <a:txBody>
-                    <a:bodyPr/>
-                    <a:lstStyle/>
-                    <a:p>
-                      <a:pPr>
-                        <a:defRPr sz="1100">
-                          <a:solidFill>
-                            <a:srgbClr val="333333"/>
-                          </a:solidFill>
-                        </a:defRPr>
-                      </a:pPr>
-                      <a:r>
-                        <a:t>`-i &lt;path&gt;` to sftp / passed to the OS command</a:t>
+              <a:tr h="411480">
+                <a:tc>
+                  <a:txBody>
+                    <a:bodyPr/>
+                    <a:lstStyle/>
+                    <a:p>
+                      <a:pPr>
+                        <a:defRPr sz="1200">
+                          <a:solidFill>
+                            <a:srgbClr val="333333"/>
+                          </a:solidFill>
+                        </a:defRPr>
+                      </a:pPr>
+                      <a:r>
+                        <a:t>ZFTP_</a:t>
+                      </a:r>
+                    </a:p>
+                  </a:txBody>
+                  <a:tcPr>
+                    <a:solidFill>
+                      <a:srgbClr val="F0F2F7"/>
+                    </a:solidFill>
+                  </a:tcPr>
+                </a:tc>
+                <a:tc>
+                  <a:txBody>
+                    <a:bodyPr/>
+                    <a:lstStyle/>
+                    <a:p>
+                      <a:pPr>
+                        <a:defRPr sz="1200">
+                          <a:solidFill>
+                            <a:srgbClr val="333333"/>
+                          </a:solidFill>
+                        </a:defRPr>
+                      </a:pPr>
+                      <a:r>
+                        <a:t>Alternate SM69 prefix (catches BNP / EOB / 837 / JPM literals)</a:t>
+                      </a:r>
+                    </a:p>
+                  </a:txBody>
+                  <a:tcPr>
+                    <a:solidFill>
+                      <a:srgbClr val="F0F2F7"/>
+                    </a:solidFill>
+                  </a:tcPr>
+                </a:tc>
+                <a:tc>
+                  <a:txBody>
+                    <a:bodyPr/>
+                    <a:lstStyle/>
+                    <a:p>
+                      <a:pPr>
+                        <a:defRPr sz="1200">
+                          <a:solidFill>
+                            <a:srgbClr val="333333"/>
+                          </a:solidFill>
+                        </a:defRPr>
+                      </a:pPr>
+                      <a:r>
+                        <a:t>7 / 7</a:t>
                       </a:r>
                     </a:p>
                   </a:txBody>
@@ -5380,434 +5008,73 @@
                   </a:tcPr>
                 </a:tc>
               </a:tr>
-              <a:tr h="365760">
-                <a:tc>
-                  <a:txBody>
-                    <a:bodyPr/>
-                    <a:lstStyle/>
-                    <a:p>
-                      <a:pPr>
-                        <a:defRPr sz="1100">
-                          <a:solidFill>
-                            <a:srgbClr val="333333"/>
-                          </a:solidFill>
-                          <a:latin typeface="Consolas"/>
-                        </a:defRPr>
-                      </a:pPr>
-                      <a:r>
-                        <a:t>'PASSPHRASE'</a:t>
-                      </a:r>
-                    </a:p>
-                  </a:txBody>
-                  <a:tcPr>
-                    <a:solidFill>
-                      <a:srgbClr val="FFFFFF"/>
-                    </a:solidFill>
-                  </a:tcPr>
-                </a:tc>
-                <a:tc>
-                  <a:txBody>
-                    <a:bodyPr/>
-                    <a:lstStyle/>
-                    <a:p>
-                      <a:pPr>
-                        <a:defRPr sz="1100">
-                          <a:solidFill>
-                            <a:srgbClr val="333333"/>
-                          </a:solidFill>
-                        </a:defRPr>
-                      </a:pPr>
-                      <a:r>
-                        <a:t>Passphrase that unlocks PRIVATE_KEY_PATH</a:t>
-                      </a:r>
-                    </a:p>
-                  </a:txBody>
-                  <a:tcPr>
-                    <a:solidFill>
-                      <a:srgbClr val="FFFFFF"/>
-                    </a:solidFill>
-                  </a:tcPr>
-                </a:tc>
-                <a:tc>
-                  <a:txBody>
-                    <a:bodyPr/>
-                    <a:lstStyle/>
-                    <a:p>
-                      <a:pPr>
-                        <a:defRPr sz="1100">
-                          <a:solidFill>
-                            <a:srgbClr val="333333"/>
-                          </a:solidFill>
-                        </a:defRPr>
-                      </a:pPr>
-                      <a:r>
-                        <a:t>Decrypts the private key at runtime</a:t>
-                      </a:r>
-                    </a:p>
-                  </a:txBody>
-                  <a:tcPr>
-                    <a:solidFill>
-                      <a:srgbClr val="FFFFFF"/>
-                    </a:solidFill>
-                  </a:tcPr>
-                </a:tc>
-              </a:tr>
-              <a:tr h="365760">
-                <a:tc>
-                  <a:txBody>
-                    <a:bodyPr/>
-                    <a:lstStyle/>
-                    <a:p>
-                      <a:pPr>
-                        <a:defRPr sz="1100">
-                          <a:solidFill>
-                            <a:srgbClr val="333333"/>
-                          </a:solidFill>
-                          <a:latin typeface="Consolas"/>
-                        </a:defRPr>
-                      </a:pPr>
-                      <a:r>
-                        <a:t>'SOURCE_FOLDER' / 'SOURCE_PATH'</a:t>
-                      </a:r>
-                    </a:p>
-                  </a:txBody>
-                  <a:tcPr>
-                    <a:solidFill>
-                      <a:srgbClr val="F0F2F7"/>
-                    </a:solidFill>
-                  </a:tcPr>
-                </a:tc>
-                <a:tc>
-                  <a:txBody>
-                    <a:bodyPr/>
-                    <a:lstStyle/>
-                    <a:p>
-                      <a:pPr>
-                        <a:defRPr sz="1100">
-                          <a:solidFill>
-                            <a:srgbClr val="333333"/>
-                          </a:solidFill>
-                        </a:defRPr>
-                      </a:pPr>
-                      <a:r>
-                        <a:t>Remote folder on the SFTP server to read from</a:t>
-                      </a:r>
-                    </a:p>
-                  </a:txBody>
-                  <a:tcPr>
-                    <a:solidFill>
-                      <a:srgbClr val="F0F2F7"/>
-                    </a:solidFill>
-                  </a:tcPr>
-                </a:tc>
-                <a:tc>
-                  <a:txBody>
-                    <a:bodyPr/>
-                    <a:lstStyle/>
-                    <a:p>
-                      <a:pPr>
-                        <a:defRPr sz="1100">
-                          <a:solidFill>
-                            <a:srgbClr val="333333"/>
-                          </a:solidFill>
-                        </a:defRPr>
-                      </a:pPr>
-                      <a:r>
-                        <a:t>Source path argument in the sftp command</a:t>
-                      </a:r>
-                    </a:p>
-                  </a:txBody>
-                  <a:tcPr>
-                    <a:solidFill>
-                      <a:srgbClr val="F0F2F7"/>
-                    </a:solidFill>
-                  </a:tcPr>
-                </a:tc>
-              </a:tr>
-              <a:tr h="365760">
-                <a:tc>
-                  <a:txBody>
-                    <a:bodyPr/>
-                    <a:lstStyle/>
-                    <a:p>
-                      <a:pPr>
-                        <a:defRPr sz="1100">
-                          <a:solidFill>
-                            <a:srgbClr val="333333"/>
-                          </a:solidFill>
-                          <a:latin typeface="Consolas"/>
-                        </a:defRPr>
-                      </a:pPr>
-                      <a:r>
-                        <a:t>'FOLDER_PATH'</a:t>
-                      </a:r>
-                    </a:p>
-                  </a:txBody>
-                  <a:tcPr>
-                    <a:solidFill>
-                      <a:srgbClr val="FFFFFF"/>
-                    </a:solidFill>
-                  </a:tcPr>
-                </a:tc>
-                <a:tc>
-                  <a:txBody>
-                    <a:bodyPr/>
-                    <a:lstStyle/>
-                    <a:p>
-                      <a:pPr>
-                        <a:defRPr sz="1100">
-                          <a:solidFill>
-                            <a:srgbClr val="333333"/>
-                          </a:solidFill>
-                        </a:defRPr>
-                      </a:pPr>
-                      <a:r>
-                        <a:t>Local folder on SAP app server (AL11 path)</a:t>
-                      </a:r>
-                    </a:p>
-                  </a:txBody>
-                  <a:tcPr>
-                    <a:solidFill>
-                      <a:srgbClr val="FFFFFF"/>
-                    </a:solidFill>
-                  </a:tcPr>
-                </a:tc>
-                <a:tc>
-                  <a:txBody>
-                    <a:bodyPr/>
-                    <a:lstStyle/>
-                    <a:p>
-                      <a:pPr>
-                        <a:defRPr sz="1100">
-                          <a:solidFill>
-                            <a:srgbClr val="333333"/>
-                          </a:solidFill>
-                        </a:defRPr>
-                      </a:pPr>
-                      <a:r>
-                        <a:t>Destination for pull / source for push</a:t>
-                      </a:r>
-                    </a:p>
-                  </a:txBody>
-                  <a:tcPr>
-                    <a:solidFill>
-                      <a:srgbClr val="FFFFFF"/>
-                    </a:solidFill>
-                  </a:tcPr>
-                </a:tc>
-              </a:tr>
-              <a:tr h="365760">
-                <a:tc>
-                  <a:txBody>
-                    <a:bodyPr/>
-                    <a:lstStyle/>
-                    <a:p>
-                      <a:pPr>
-                        <a:defRPr sz="1100">
-                          <a:solidFill>
-                            <a:srgbClr val="333333"/>
-                          </a:solidFill>
-                          <a:latin typeface="Consolas"/>
-                        </a:defRPr>
-                      </a:pPr>
-                      <a:r>
-                        <a:t>'FILE_EXT' / 'SFTP_FILE_EXT' / 'ECS_FILE_EXT'</a:t>
-                      </a:r>
-                    </a:p>
-                  </a:txBody>
-                  <a:tcPr>
-                    <a:solidFill>
-                      <a:srgbClr val="F0F2F7"/>
-                    </a:solidFill>
-                  </a:tcPr>
-                </a:tc>
-                <a:tc>
-                  <a:txBody>
-                    <a:bodyPr/>
-                    <a:lstStyle/>
-                    <a:p>
-                      <a:pPr>
-                        <a:defRPr sz="1100">
-                          <a:solidFill>
-                            <a:srgbClr val="333333"/>
-                          </a:solidFill>
-                        </a:defRPr>
-                      </a:pPr>
-                      <a:r>
-                        <a:t>File-name pattern (e.g. *.csv, *.EDI)</a:t>
-                      </a:r>
-                    </a:p>
-                  </a:txBody>
-                  <a:tcPr>
-                    <a:solidFill>
-                      <a:srgbClr val="F0F2F7"/>
-                    </a:solidFill>
-                  </a:tcPr>
-                </a:tc>
-                <a:tc>
-                  <a:txBody>
-                    <a:bodyPr/>
-                    <a:lstStyle/>
-                    <a:p>
-                      <a:pPr>
-                        <a:defRPr sz="1100">
-                          <a:solidFill>
-                            <a:srgbClr val="333333"/>
-                          </a:solidFill>
-                        </a:defRPr>
-                      </a:pPr>
-                      <a:r>
-                        <a:t>Filter for which files to move</a:t>
-                      </a:r>
-                    </a:p>
-                  </a:txBody>
-                  <a:tcPr>
-                    <a:solidFill>
-                      <a:srgbClr val="F0F2F7"/>
-                    </a:solidFill>
-                  </a:tcPr>
-                </a:tc>
-              </a:tr>
-              <a:tr h="365760">
-                <a:tc>
-                  <a:txBody>
-                    <a:bodyPr/>
-                    <a:lstStyle/>
-                    <a:p>
-                      <a:pPr>
-                        <a:defRPr sz="1100">
-                          <a:solidFill>
-                            <a:srgbClr val="333333"/>
-                          </a:solidFill>
-                          <a:latin typeface="Consolas"/>
-                        </a:defRPr>
-                      </a:pPr>
-                      <a:r>
-                        <a:t>'ZDEST_FOLD' / 'DESTINATION_FOLDER'</a:t>
-                      </a:r>
-                    </a:p>
-                  </a:txBody>
-                  <a:tcPr>
-                    <a:solidFill>
-                      <a:srgbClr val="FFFFFF"/>
-                    </a:solidFill>
-                  </a:tcPr>
-                </a:tc>
-                <a:tc>
-                  <a:txBody>
-                    <a:bodyPr/>
-                    <a:lstStyle/>
-                    <a:p>
-                      <a:pPr>
-                        <a:defRPr sz="1100">
-                          <a:solidFill>
-                            <a:srgbClr val="333333"/>
-                          </a:solidFill>
-                        </a:defRPr>
-                      </a:pPr>
-                      <a:r>
-                        <a:t>Remote target folder for push operations</a:t>
-                      </a:r>
-                    </a:p>
-                  </a:txBody>
-                  <a:tcPr>
-                    <a:solidFill>
-                      <a:srgbClr val="FFFFFF"/>
-                    </a:solidFill>
-                  </a:tcPr>
-                </a:tc>
-                <a:tc>
-                  <a:txBody>
-                    <a:bodyPr/>
-                    <a:lstStyle/>
-                    <a:p>
-                      <a:pPr>
-                        <a:defRPr sz="1100">
-                          <a:solidFill>
-                            <a:srgbClr val="333333"/>
-                          </a:solidFill>
-                        </a:defRPr>
-                      </a:pPr>
-                      <a:r>
-                        <a:t>Destination path argument in the sftp command</a:t>
-                      </a:r>
-                    </a:p>
-                  </a:txBody>
-                  <a:tcPr>
-                    <a:solidFill>
-                      <a:srgbClr val="FFFFFF"/>
-                    </a:solidFill>
-                  </a:tcPr>
-                </a:tc>
-              </a:tr>
-              <a:tr h="365760">
-                <a:tc>
-                  <a:txBody>
-                    <a:bodyPr/>
-                    <a:lstStyle/>
-                    <a:p>
-                      <a:pPr>
-                        <a:defRPr sz="1100">
-                          <a:solidFill>
-                            <a:srgbClr val="333333"/>
-                          </a:solidFill>
-                          <a:latin typeface="Consolas"/>
-                        </a:defRPr>
-                      </a:pPr>
-                      <a:r>
-                        <a:t>'PUBLIC_KEY_ID' / 'PRIVATE_KEY_US' / 'PRIVATE_KEY_NONUS'</a:t>
-                      </a:r>
-                    </a:p>
-                  </a:txBody>
-                  <a:tcPr>
-                    <a:solidFill>
-                      <a:srgbClr val="F0F2F7"/>
-                    </a:solidFill>
-                  </a:tcPr>
-                </a:tc>
-                <a:tc>
-                  <a:txBody>
-                    <a:bodyPr/>
-                    <a:lstStyle/>
-                    <a:p>
-                      <a:pPr>
-                        <a:defRPr sz="1100">
-                          <a:solidFill>
-                            <a:srgbClr val="333333"/>
-                          </a:solidFill>
-                        </a:defRPr>
-                      </a:pPr>
-                      <a:r>
-                        <a:t>PGP key identifiers (BNP-PGP variant only)</a:t>
-                      </a:r>
-                    </a:p>
-                  </a:txBody>
-                  <a:tcPr>
-                    <a:solidFill>
-                      <a:srgbClr val="F0F2F7"/>
-                    </a:solidFill>
-                  </a:tcPr>
-                </a:tc>
-                <a:tc>
-                  <a:txBody>
-                    <a:bodyPr/>
-                    <a:lstStyle/>
-                    <a:p>
-                      <a:pPr>
-                        <a:defRPr sz="1100">
-                          <a:solidFill>
-                            <a:srgbClr val="333333"/>
-                          </a:solidFill>
-                        </a:defRPr>
-                      </a:pPr>
-                      <a:r>
-                        <a:t>PGP encryption layer added on top of SFTP</a:t>
-                      </a:r>
-                    </a:p>
-                  </a:txBody>
-                  <a:tcPr>
-                    <a:solidFill>
-                      <a:srgbClr val="F0F2F7"/>
+              <a:tr h="411480">
+                <a:tc>
+                  <a:txBody>
+                    <a:bodyPr/>
+                    <a:lstStyle/>
+                    <a:p>
+                      <a:pPr>
+                        <a:defRPr sz="1200">
+                          <a:solidFill>
+                            <a:srgbClr val="333333"/>
+                          </a:solidFill>
+                        </a:defRPr>
+                      </a:pPr>
+                      <a:r>
+                        <a:t>FUNCTION zerx_</a:t>
+                      </a:r>
+                    </a:p>
+                  </a:txBody>
+                  <a:tcPr>
+                    <a:solidFill>
+                      <a:srgbClr val="FFFFFF"/>
+                    </a:solidFill>
+                  </a:tcPr>
+                </a:tc>
+                <a:tc>
+                  <a:txBody>
+                    <a:bodyPr/>
+                    <a:lstStyle/>
+                    <a:p>
+                      <a:pPr>
+                        <a:defRPr sz="1200">
+                          <a:solidFill>
+                            <a:srgbClr val="333333"/>
+                          </a:solidFill>
+                        </a:defRPr>
+                      </a:pPr>
+                      <a:r>
+                        <a:t>ZERX FUGR FM enumeration</a:t>
+                      </a:r>
+                    </a:p>
+                  </a:txBody>
+                  <a:tcPr>
+                    <a:solidFill>
+                      <a:srgbClr val="FFFFFF"/>
+                    </a:solidFill>
+                  </a:tcPr>
+                </a:tc>
+                <a:tc>
+                  <a:txBody>
+                    <a:bodyPr/>
+                    <a:lstStyle/>
+                    <a:p>
+                      <a:pPr>
+                        <a:defRPr sz="1200">
+                          <a:solidFill>
+                            <a:srgbClr val="333333"/>
+                          </a:solidFill>
+                        </a:defRPr>
+                      </a:pPr>
+                      <a:r>
+                        <a:t>2 / 1</a:t>
+                      </a:r>
+                    </a:p>
+                  </a:txBody>
+                  <a:tcPr>
+                    <a:solidFill>
+                      <a:srgbClr val="FFFFFF"/>
                     </a:solidFill>
                   </a:tcPr>
                 </a:tc>
@@ -5816,6 +5083,53 @@
           </a:graphicData>
         </a:graphic>
       </p:graphicFrame>
+      <p:sp>
+        <p:nvSpPr>
+          <p:cNvPr id="5" name="TextBox 4"/>
+          <p:cNvSpPr txBox="1"/>
+          <p:nvPr/>
+        </p:nvSpPr>
+        <p:spPr>
+          <a:xfrm>
+            <a:off x="457200" y="5577840"/>
+            <a:ext cx="11247120" cy="1097280"/>
+          </a:xfrm>
+          <a:prstGeom prst="rect">
+            <a:avLst/>
+          </a:prstGeom>
+          <a:noFill/>
+        </p:spPr>
+        <p:txBody>
+          <a:bodyPr wrap="square">
+            <a:spAutoFit/>
+          </a:bodyPr>
+          <a:lstStyle/>
+          <a:p>
+            <a:pPr>
+              <a:defRPr sz="1300" b="0">
+                <a:solidFill>
+                  <a:srgbClr val="333333"/>
+                </a:solidFill>
+              </a:defRPr>
+            </a:pPr>
+            <a:r>
+              <a:t>Confidence: ≈ 97% within Z001 + PROG/FUGR/CLAS. Residual 3%: dynamic CALL FUNCTION lv_fm, hardcoded SFTP without zfi_constants lookup, or code outside Z001.</a:t>
+            </a:r>
+          </a:p>
+          <a:p>
+            <a:pPr>
+              <a:defRPr sz="1300" b="0">
+                <a:solidFill>
+                  <a:srgbClr val="333333"/>
+                </a:solidFill>
+              </a:defRPr>
+            </a:pPr>
+            <a:r>
+              <a:t>Rises to ≈ 99% if customer confirms: 'all SFTP code lives in Z001 and reads zfi_constants'.</a:t>
+            </a:r>
+          </a:p>
+        </p:txBody>
+      </p:sp>
     </p:spTree>
   </p:cSld>
   <p:clrMapOvr>
@@ -8235,6 +7549,41 @@
           </a:graphicData>
         </a:graphic>
       </p:graphicFrame>
+      <p:sp>
+        <p:nvSpPr>
+          <p:cNvPr id="4" name="TextBox 3"/>
+          <p:cNvSpPr txBox="1"/>
+          <p:nvPr/>
+        </p:nvSpPr>
+        <p:spPr>
+          <a:xfrm>
+            <a:off x="457200" y="6400800"/>
+            <a:ext cx="11247120" cy="365760"/>
+          </a:xfrm>
+          <a:prstGeom prst="rect">
+            <a:avLst/>
+          </a:prstGeom>
+          <a:noFill/>
+        </p:spPr>
+        <p:txBody>
+          <a:bodyPr wrap="square">
+            <a:spAutoFit/>
+          </a:bodyPr>
+          <a:lstStyle/>
+          <a:p>
+            <a:pPr>
+              <a:defRPr sz="1000" b="1">
+                <a:solidFill>
+                  <a:srgbClr val="1F3A68"/>
+                </a:solidFill>
+              </a:defRPr>
+            </a:pPr>
+            <a:r>
+              <a:t>Sources: SM69 names from `PARAMETERS p_comm TYPE sxpgcolist-name DEFAULT '...'` (or `lv_comm = '...'`) in each report's main source. Auth/direction inferred from credential bag + assembly pattern.</a:t>
+            </a:r>
+          </a:p>
+        </p:txBody>
+      </p:sp>
     </p:spTree>
   </p:cSld>
   <p:clrMapOvr>
@@ -8311,14 +7660,14 @@
           <a:lstStyle/>
           <a:p>
             <a:pPr>
-              <a:defRPr sz="1200" b="0">
+              <a:defRPr sz="1100" b="0">
                 <a:solidFill>
                   <a:srgbClr val="333333"/>
                 </a:solidFill>
               </a:defRPr>
             </a:pPr>
             <a:r>
-              <a:t>Each row is one consumer. ✓ = the report reads that fnam key from zfi_constants and concatenates it into the SXPG additional_parameters.</a:t>
+              <a:t>Each row = one consumer. ✓ = the report reads that fnam via `READ TABLE i_constants WITH KEY fnam = '...'.` after `SELECT * FROM zfi_constants WHERE pname = '&lt;consumer pname&gt;'.`</a:t>
             </a:r>
           </a:p>
         </p:txBody>
@@ -12431,14 +11780,14 @@
           <a:lstStyle/>
           <a:p>
             <a:pPr>
-              <a:defRPr sz="2800" b="1">
+              <a:defRPr sz="2600" b="1">
                 <a:solidFill>
                   <a:srgbClr val="1F3A68"/>
                 </a:solidFill>
               </a:defRPr>
             </a:pPr>
             <a:r>
-              <a:t>3 wrapper function groups — single point of credential binding</a:t>
+              <a:t>SFTP credential schema — what each fnam means</a:t>
             </a:r>
           </a:p>
         </p:txBody>
@@ -12451,8 +11800,8 @@
         </p:nvSpPr>
         <p:spPr>
           <a:xfrm>
-            <a:off x="457200" y="1097280"/>
-            <a:ext cx="11247120" cy="731520"/>
+            <a:off x="457200" y="1005840"/>
+            <a:ext cx="11247120" cy="640080"/>
           </a:xfrm>
           <a:prstGeom prst="rect">
             <a:avLst/>
@@ -12466,26 +11815,26 @@
           <a:lstStyle/>
           <a:p>
             <a:pPr>
-              <a:defRPr sz="1400" b="0">
+              <a:defRPr sz="1200" b="0">
                 <a:solidFill>
                   <a:srgbClr val="333333"/>
                 </a:solidFill>
               </a:defRPr>
             </a:pPr>
             <a:r>
-              <a:t>Three FUGRs wrap SXPG_COMMAND_EXECUTE so callers stay clean of SFTP plumbing.</a:t>
+              <a:t>All values stored in DDIC table `zfi_constants` — columns (PNAME, FNAM, FVAL). Reports SELECT rows by `pname`, then READ specific values by `fnam`.</a:t>
             </a:r>
           </a:p>
           <a:p>
             <a:pPr>
-              <a:defRPr sz="1400" b="0">
+              <a:defRPr sz="1100" i="1">
                 <a:solidFill>
-                  <a:srgbClr val="333333"/>
+                  <a:srgbClr val="C83636"/>
                 </a:solidFill>
               </a:defRPr>
             </a:pPr>
             <a:r>
-              <a:t>Replace the wrapper internals once → every caller migrates as a side effect.</a:t>
+              <a:t>Migration team retrieves the actual FVAL strings via SE16 / SecureStorage on the SAP system — they are not written to any artifact in this repo.</a:t>
             </a:r>
           </a:p>
         </p:txBody>
@@ -12499,8 +11848,8 @@
           <p:nvPr/>
         </p:nvGraphicFramePr>
         <p:xfrm>
-          <a:off x="457200" y="2286000"/>
-          <a:ext cx="11247120" cy="3200400"/>
+          <a:off x="365760" y="1828800"/>
+          <a:ext cx="11430000" cy="4754880"/>
         </p:xfrm>
         <a:graphic>
           <a:graphicData uri="http://schemas.openxmlformats.org/drawingml/2006/table">
@@ -12509,12 +11858,11 @@
                 <a:tableStyleId>{5C22544A-7EE6-4342-B048-85BDC9FD1C3A}</a:tableStyleId>
               </a:tblPr>
               <a:tblGrid>
-                <a:gridCol w="1645920"/>
-                <a:gridCol w="2743200"/>
-                <a:gridCol w="3657600"/>
-                <a:gridCol w="3200400"/>
+                <a:gridCol w="3017520"/>
+                <a:gridCol w="3931920"/>
+                <a:gridCol w="4480560"/>
               </a:tblGrid>
-              <a:tr h="800100">
+              <a:tr h="365760">
                 <a:tc>
                   <a:txBody>
                     <a:bodyPr/>
@@ -12528,7 +11876,7 @@
                         </a:defRPr>
                       </a:pPr>
                       <a:r>
-                        <a:t>FUGR</a:t>
+                        <a:t>fnam (literal key)</a:t>
                       </a:r>
                     </a:p>
                   </a:txBody>
@@ -12551,7 +11899,7 @@
                         </a:defRPr>
                       </a:pPr>
                       <a:r>
-                        <a:t>Description</a:t>
+                        <a:t>Holds</a:t>
                       </a:r>
                     </a:p>
                   </a:txBody>
@@ -12574,7 +11922,7 @@
                         </a:defRPr>
                       </a:pPr>
                       <a:r>
-                        <a:t>Wrapper function modules</a:t>
+                        <a:t>Used as</a:t>
                       </a:r>
                     </a:p>
                   </a:txBody>
@@ -12584,114 +11932,69 @@
                     </a:solidFill>
                   </a:tcPr>
                 </a:tc>
-                <a:tc>
-                  <a:txBody>
-                    <a:bodyPr/>
-                    <a:lstStyle/>
-                    <a:p>
-                      <a:pPr>
-                        <a:defRPr sz="1200" b="1">
-                          <a:solidFill>
-                            <a:srgbClr val="FFFFFF"/>
-                          </a:solidFill>
-                        </a:defRPr>
-                      </a:pPr>
-                      <a:r>
-                        <a:t>Used by</a:t>
-                      </a:r>
-                    </a:p>
-                  </a:txBody>
-                  <a:tcPr>
-                    <a:solidFill>
-                      <a:srgbClr val="1F3A68"/>
-                    </a:solidFill>
-                  </a:tcPr>
-                </a:tc>
               </a:tr>
-              <a:tr h="800100">
-                <a:tc>
-                  <a:txBody>
-                    <a:bodyPr/>
-                    <a:lstStyle/>
-                    <a:p>
-                      <a:pPr>
-                        <a:defRPr sz="1200">
-                          <a:solidFill>
-                            <a:srgbClr val="333333"/>
-                          </a:solidFill>
-                        </a:defRPr>
-                      </a:pPr>
-                      <a:r>
-                        <a:t>ZMEDICARE</a:t>
-                      </a:r>
-                    </a:p>
-                  </a:txBody>
-                  <a:tcPr>
-                    <a:solidFill>
-                      <a:srgbClr val="FFFFFF"/>
-                    </a:solidFill>
-                  </a:tcPr>
-                </a:tc>
-                <a:tc>
-                  <a:txBody>
-                    <a:bodyPr/>
-                    <a:lstStyle/>
-                    <a:p>
-                      <a:pPr>
-                        <a:defRPr sz="1200">
-                          <a:solidFill>
-                            <a:srgbClr val="333333"/>
-                          </a:solidFill>
-                        </a:defRPr>
-                      </a:pPr>
-                      <a:r>
-                        <a:t>Medicare Project FG</a:t>
-                      </a:r>
-                    </a:p>
-                  </a:txBody>
-                  <a:tcPr>
-                    <a:solidFill>
-                      <a:srgbClr val="FFFFFF"/>
-                    </a:solidFill>
-                  </a:tcPr>
-                </a:tc>
-                <a:tc>
-                  <a:txBody>
-                    <a:bodyPr/>
-                    <a:lstStyle/>
-                    <a:p>
-                      <a:pPr>
-                        <a:defRPr sz="1200">
-                          <a:solidFill>
-                            <a:srgbClr val="333333"/>
-                          </a:solidFill>
-                        </a:defRPr>
-                      </a:pPr>
-                      <a:r>
-                        <a:t>ZMEDI_GET_FROM_SFTP, ZMEDI_PUT_FROM_SFTP</a:t>
-                      </a:r>
-                    </a:p>
-                  </a:txBody>
-                  <a:tcPr>
-                    <a:solidFill>
-                      <a:srgbClr val="FFFFFF"/>
-                    </a:solidFill>
-                  </a:tcPr>
-                </a:tc>
-                <a:tc>
-                  <a:txBody>
-                    <a:bodyPr/>
-                    <a:lstStyle/>
-                    <a:p>
-                      <a:pPr>
-                        <a:defRPr sz="1200">
-                          <a:solidFill>
-                            <a:srgbClr val="333333"/>
-                          </a:solidFill>
-                        </a:defRPr>
-                      </a:pPr>
-                      <a:r>
-                        <a:t>ZSD_MEDICARE_PDF_PROCESS</a:t>
+              <a:tr h="365760">
+                <a:tc>
+                  <a:txBody>
+                    <a:bodyPr/>
+                    <a:lstStyle/>
+                    <a:p>
+                      <a:pPr>
+                        <a:defRPr sz="1100">
+                          <a:solidFill>
+                            <a:srgbClr val="333333"/>
+                          </a:solidFill>
+                          <a:latin typeface="Consolas"/>
+                        </a:defRPr>
+                      </a:pPr>
+                      <a:r>
+                        <a:t>'FTP_USER'</a:t>
+                      </a:r>
+                    </a:p>
+                  </a:txBody>
+                  <a:tcPr>
+                    <a:solidFill>
+                      <a:srgbClr val="FFFFFF"/>
+                    </a:solidFill>
+                  </a:tcPr>
+                </a:tc>
+                <a:tc>
+                  <a:txBody>
+                    <a:bodyPr/>
+                    <a:lstStyle/>
+                    <a:p>
+                      <a:pPr>
+                        <a:defRPr sz="1100">
+                          <a:solidFill>
+                            <a:srgbClr val="333333"/>
+                          </a:solidFill>
+                        </a:defRPr>
+                      </a:pPr>
+                      <a:r>
+                        <a:t>SFTP username for the remote endpoint</a:t>
+                      </a:r>
+                    </a:p>
+                  </a:txBody>
+                  <a:tcPr>
+                    <a:solidFill>
+                      <a:srgbClr val="FFFFFF"/>
+                    </a:solidFill>
+                  </a:tcPr>
+                </a:tc>
+                <a:tc>
+                  <a:txBody>
+                    <a:bodyPr/>
+                    <a:lstStyle/>
+                    <a:p>
+                      <a:pPr>
+                        <a:defRPr sz="1100">
+                          <a:solidFill>
+                            <a:srgbClr val="333333"/>
+                          </a:solidFill>
+                        </a:defRPr>
+                      </a:pPr>
+                      <a:r>
+                        <a:t>Login user in the sftp/scp command</a:t>
                       </a:r>
                     </a:p>
                   </a:txBody>
@@ -12702,90 +12005,68 @@
                   </a:tcPr>
                 </a:tc>
               </a:tr>
-              <a:tr h="800100">
-                <a:tc>
-                  <a:txBody>
-                    <a:bodyPr/>
-                    <a:lstStyle/>
-                    <a:p>
-                      <a:pPr>
-                        <a:defRPr sz="1200">
-                          <a:solidFill>
-                            <a:srgbClr val="333333"/>
-                          </a:solidFill>
-                        </a:defRPr>
-                      </a:pPr>
-                      <a:r>
-                        <a:t>ZERX</a:t>
-                      </a:r>
-                    </a:p>
-                  </a:txBody>
-                  <a:tcPr>
-                    <a:solidFill>
-                      <a:srgbClr val="F0F2F7"/>
-                    </a:solidFill>
-                  </a:tcPr>
-                </a:tc>
-                <a:tc>
-                  <a:txBody>
-                    <a:bodyPr/>
-                    <a:lstStyle/>
-                    <a:p>
-                      <a:pPr>
-                        <a:defRPr sz="1200">
-                          <a:solidFill>
-                            <a:srgbClr val="333333"/>
-                          </a:solidFill>
-                        </a:defRPr>
-                      </a:pPr>
-                      <a:r>
-                        <a:t>Medicare Project FG (eRx)</a:t>
-                      </a:r>
-                    </a:p>
-                  </a:txBody>
-                  <a:tcPr>
-                    <a:solidFill>
-                      <a:srgbClr val="F0F2F7"/>
-                    </a:solidFill>
-                  </a:tcPr>
-                </a:tc>
-                <a:tc>
-                  <a:txBody>
-                    <a:bodyPr/>
-                    <a:lstStyle/>
-                    <a:p>
-                      <a:pPr>
-                        <a:defRPr sz="1200">
-                          <a:solidFill>
-                            <a:srgbClr val="333333"/>
-                          </a:solidFill>
-                        </a:defRPr>
-                      </a:pPr>
-                      <a:r>
-                        <a:t>ZERX_GET_FROM_SFTP, ZERX_PUT_FROM_SFTP</a:t>
-                      </a:r>
-                    </a:p>
-                  </a:txBody>
-                  <a:tcPr>
-                    <a:solidFill>
-                      <a:srgbClr val="F0F2F7"/>
-                    </a:solidFill>
-                  </a:tcPr>
-                </a:tc>
-                <a:tc>
-                  <a:txBody>
-                    <a:bodyPr/>
-                    <a:lstStyle/>
-                    <a:p>
-                      <a:pPr>
-                        <a:defRPr sz="1200">
-                          <a:solidFill>
-                            <a:srgbClr val="333333"/>
-                          </a:solidFill>
-                        </a:defRPr>
-                      </a:pPr>
-                      <a:r>
-                        <a:t>ZSD_ERX_DMS_FILE_PROCESS</a:t>
+              <a:tr h="365760">
+                <a:tc>
+                  <a:txBody>
+                    <a:bodyPr/>
+                    <a:lstStyle/>
+                    <a:p>
+                      <a:pPr>
+                        <a:defRPr sz="1100">
+                          <a:solidFill>
+                            <a:srgbClr val="333333"/>
+                          </a:solidFill>
+                          <a:latin typeface="Consolas"/>
+                        </a:defRPr>
+                      </a:pPr>
+                      <a:r>
+                        <a:t>'FTP_PSWD'</a:t>
+                      </a:r>
+                    </a:p>
+                  </a:txBody>
+                  <a:tcPr>
+                    <a:solidFill>
+                      <a:srgbClr val="F0F2F7"/>
+                    </a:solidFill>
+                  </a:tcPr>
+                </a:tc>
+                <a:tc>
+                  <a:txBody>
+                    <a:bodyPr/>
+                    <a:lstStyle/>
+                    <a:p>
+                      <a:pPr>
+                        <a:defRPr sz="1100">
+                          <a:solidFill>
+                            <a:srgbClr val="333333"/>
+                          </a:solidFill>
+                        </a:defRPr>
+                      </a:pPr>
+                      <a:r>
+                        <a:t>Password (legacy/fallback auth)</a:t>
+                      </a:r>
+                    </a:p>
+                  </a:txBody>
+                  <a:tcPr>
+                    <a:solidFill>
+                      <a:srgbClr val="F0F2F7"/>
+                    </a:solidFill>
+                  </a:tcPr>
+                </a:tc>
+                <a:tc>
+                  <a:txBody>
+                    <a:bodyPr/>
+                    <a:lstStyle/>
+                    <a:p>
+                      <a:pPr>
+                        <a:defRPr sz="1100">
+                          <a:solidFill>
+                            <a:srgbClr val="333333"/>
+                          </a:solidFill>
+                        </a:defRPr>
+                      </a:pPr>
+                      <a:r>
+                        <a:t>Password component when key auth is not used</a:t>
                       </a:r>
                     </a:p>
                   </a:txBody>
@@ -12796,96 +12077,722 @@
                   </a:tcPr>
                 </a:tc>
               </a:tr>
-              <a:tr h="800100">
-                <a:tc>
-                  <a:txBody>
-                    <a:bodyPr/>
-                    <a:lstStyle/>
-                    <a:p>
-                      <a:pPr>
-                        <a:defRPr sz="1200">
-                          <a:solidFill>
-                            <a:srgbClr val="333333"/>
-                          </a:solidFill>
-                        </a:defRPr>
-                      </a:pPr>
-                      <a:r>
-                        <a:t>ZDMS_SEND_FILE</a:t>
-                      </a:r>
-                    </a:p>
-                  </a:txBody>
-                  <a:tcPr>
-                    <a:solidFill>
-                      <a:srgbClr val="FFFFFF"/>
-                    </a:solidFill>
-                  </a:tcPr>
-                </a:tc>
-                <a:tc>
-                  <a:txBody>
-                    <a:bodyPr/>
-                    <a:lstStyle/>
-                    <a:p>
-                      <a:pPr>
-                        <a:defRPr sz="1200">
-                          <a:solidFill>
-                            <a:srgbClr val="333333"/>
-                          </a:solidFill>
-                        </a:defRPr>
-                      </a:pPr>
-                      <a:r>
-                        <a:t>DMS document extract FG</a:t>
-                      </a:r>
-                    </a:p>
-                  </a:txBody>
-                  <a:tcPr>
-                    <a:solidFill>
-                      <a:srgbClr val="FFFFFF"/>
-                    </a:solidFill>
-                  </a:tcPr>
-                </a:tc>
-                <a:tc>
-                  <a:txBody>
-                    <a:bodyPr/>
-                    <a:lstStyle/>
-                    <a:p>
-                      <a:pPr>
-                        <a:defRPr sz="1200">
-                          <a:solidFill>
-                            <a:srgbClr val="333333"/>
-                          </a:solidFill>
-                        </a:defRPr>
-                      </a:pPr>
-                      <a:r>
-                        <a:t>ZDMS_EXTRACT_DOCS_TO_SFTP</a:t>
-                      </a:r>
-                    </a:p>
-                  </a:txBody>
-                  <a:tcPr>
-                    <a:solidFill>
-                      <a:srgbClr val="FFFFFF"/>
-                    </a:solidFill>
-                  </a:tcPr>
-                </a:tc>
-                <a:tc>
-                  <a:txBody>
-                    <a:bodyPr/>
-                    <a:lstStyle/>
-                    <a:p>
-                      <a:pPr>
-                        <a:defRPr sz="1200">
-                          <a:solidFill>
-                            <a:srgbClr val="333333"/>
-                          </a:solidFill>
-                        </a:defRPr>
-                      </a:pPr>
-                      <a:r>
-                        <a:t>0 callers in Z001 (dynamic / cross-package / dead?)</a:t>
-                      </a:r>
-                    </a:p>
-                  </a:txBody>
-                  <a:tcPr>
-                    <a:solidFill>
-                      <a:srgbClr val="FFFFFF"/>
+              <a:tr h="365760">
+                <a:tc>
+                  <a:txBody>
+                    <a:bodyPr/>
+                    <a:lstStyle/>
+                    <a:p>
+                      <a:pPr>
+                        <a:defRPr sz="1100">
+                          <a:solidFill>
+                            <a:srgbClr val="333333"/>
+                          </a:solidFill>
+                          <a:latin typeface="Consolas"/>
+                        </a:defRPr>
+                      </a:pPr>
+                      <a:r>
+                        <a:t>'FTP_DOMAIN'</a:t>
+                      </a:r>
+                    </a:p>
+                  </a:txBody>
+                  <a:tcPr>
+                    <a:solidFill>
+                      <a:srgbClr val="FFFFFF"/>
+                    </a:solidFill>
+                  </a:tcPr>
+                </a:tc>
+                <a:tc>
+                  <a:txBody>
+                    <a:bodyPr/>
+                    <a:lstStyle/>
+                    <a:p>
+                      <a:pPr>
+                        <a:defRPr sz="1100">
+                          <a:solidFill>
+                            <a:srgbClr val="333333"/>
+                          </a:solidFill>
+                        </a:defRPr>
+                      </a:pPr>
+                      <a:r>
+                        <a:t>Remote SFTP server hostname (FQDN)</a:t>
+                      </a:r>
+                    </a:p>
+                  </a:txBody>
+                  <a:tcPr>
+                    <a:solidFill>
+                      <a:srgbClr val="FFFFFF"/>
+                    </a:solidFill>
+                  </a:tcPr>
+                </a:tc>
+                <a:tc>
+                  <a:txBody>
+                    <a:bodyPr/>
+                    <a:lstStyle/>
+                    <a:p>
+                      <a:pPr>
+                        <a:defRPr sz="1100">
+                          <a:solidFill>
+                            <a:srgbClr val="333333"/>
+                          </a:solidFill>
+                        </a:defRPr>
+                      </a:pPr>
+                      <a:r>
+                        <a:t>Host portion of `user@host[:port]`</a:t>
+                      </a:r>
+                    </a:p>
+                  </a:txBody>
+                  <a:tcPr>
+                    <a:solidFill>
+                      <a:srgbClr val="FFFFFF"/>
+                    </a:solidFill>
+                  </a:tcPr>
+                </a:tc>
+              </a:tr>
+              <a:tr h="365760">
+                <a:tc>
+                  <a:txBody>
+                    <a:bodyPr/>
+                    <a:lstStyle/>
+                    <a:p>
+                      <a:pPr>
+                        <a:defRPr sz="1100">
+                          <a:solidFill>
+                            <a:srgbClr val="333333"/>
+                          </a:solidFill>
+                          <a:latin typeface="Consolas"/>
+                        </a:defRPr>
+                      </a:pPr>
+                      <a:r>
+                        <a:t>'FTP_PORT'</a:t>
+                      </a:r>
+                    </a:p>
+                  </a:txBody>
+                  <a:tcPr>
+                    <a:solidFill>
+                      <a:srgbClr val="F0F2F7"/>
+                    </a:solidFill>
+                  </a:tcPr>
+                </a:tc>
+                <a:tc>
+                  <a:txBody>
+                    <a:bodyPr/>
+                    <a:lstStyle/>
+                    <a:p>
+                      <a:pPr>
+                        <a:defRPr sz="1100">
+                          <a:solidFill>
+                            <a:srgbClr val="333333"/>
+                          </a:solidFill>
+                        </a:defRPr>
+                      </a:pPr>
+                      <a:r>
+                        <a:t>TCP port (default 22 if not set)</a:t>
+                      </a:r>
+                    </a:p>
+                  </a:txBody>
+                  <a:tcPr>
+                    <a:solidFill>
+                      <a:srgbClr val="F0F2F7"/>
+                    </a:solidFill>
+                  </a:tcPr>
+                </a:tc>
+                <a:tc>
+                  <a:txBody>
+                    <a:bodyPr/>
+                    <a:lstStyle/>
+                    <a:p>
+                      <a:pPr>
+                        <a:defRPr sz="1100">
+                          <a:solidFill>
+                            <a:srgbClr val="333333"/>
+                          </a:solidFill>
+                        </a:defRPr>
+                      </a:pPr>
+                      <a:r>
+                        <a:t>`:port` suffix after host</a:t>
+                      </a:r>
+                    </a:p>
+                  </a:txBody>
+                  <a:tcPr>
+                    <a:solidFill>
+                      <a:srgbClr val="F0F2F7"/>
+                    </a:solidFill>
+                  </a:tcPr>
+                </a:tc>
+              </a:tr>
+              <a:tr h="365760">
+                <a:tc>
+                  <a:txBody>
+                    <a:bodyPr/>
+                    <a:lstStyle/>
+                    <a:p>
+                      <a:pPr>
+                        <a:defRPr sz="1100">
+                          <a:solidFill>
+                            <a:srgbClr val="333333"/>
+                          </a:solidFill>
+                          <a:latin typeface="Consolas"/>
+                        </a:defRPr>
+                      </a:pPr>
+                      <a:r>
+                        <a:t>'HOST_KEY'</a:t>
+                      </a:r>
+                    </a:p>
+                  </a:txBody>
+                  <a:tcPr>
+                    <a:solidFill>
+                      <a:srgbClr val="FFFFFF"/>
+                    </a:solidFill>
+                  </a:tcPr>
+                </a:tc>
+                <a:tc>
+                  <a:txBody>
+                    <a:bodyPr/>
+                    <a:lstStyle/>
+                    <a:p>
+                      <a:pPr>
+                        <a:defRPr sz="1100">
+                          <a:solidFill>
+                            <a:srgbClr val="333333"/>
+                          </a:solidFill>
+                        </a:defRPr>
+                      </a:pPr>
+                      <a:r>
+                        <a:t>Server's host-key fingerprint (md5/sha)</a:t>
+                      </a:r>
+                    </a:p>
+                  </a:txBody>
+                  <a:tcPr>
+                    <a:solidFill>
+                      <a:srgbClr val="FFFFFF"/>
+                    </a:solidFill>
+                  </a:tcPr>
+                </a:tc>
+                <a:tc>
+                  <a:txBody>
+                    <a:bodyPr/>
+                    <a:lstStyle/>
+                    <a:p>
+                      <a:pPr>
+                        <a:defRPr sz="1100">
+                          <a:solidFill>
+                            <a:srgbClr val="333333"/>
+                          </a:solidFill>
+                        </a:defRPr>
+                      </a:pPr>
+                      <a:r>
+                        <a:t>Server identity verification flag for sftp client</a:t>
+                      </a:r>
+                    </a:p>
+                  </a:txBody>
+                  <a:tcPr>
+                    <a:solidFill>
+                      <a:srgbClr val="FFFFFF"/>
+                    </a:solidFill>
+                  </a:tcPr>
+                </a:tc>
+              </a:tr>
+              <a:tr h="365760">
+                <a:tc>
+                  <a:txBody>
+                    <a:bodyPr/>
+                    <a:lstStyle/>
+                    <a:p>
+                      <a:pPr>
+                        <a:defRPr sz="1100">
+                          <a:solidFill>
+                            <a:srgbClr val="333333"/>
+                          </a:solidFill>
+                          <a:latin typeface="Consolas"/>
+                        </a:defRPr>
+                      </a:pPr>
+                      <a:r>
+                        <a:t>'PRIVATE_KEY_PATH'</a:t>
+                      </a:r>
+                    </a:p>
+                  </a:txBody>
+                  <a:tcPr>
+                    <a:solidFill>
+                      <a:srgbClr val="F0F2F7"/>
+                    </a:solidFill>
+                  </a:tcPr>
+                </a:tc>
+                <a:tc>
+                  <a:txBody>
+                    <a:bodyPr/>
+                    <a:lstStyle/>
+                    <a:p>
+                      <a:pPr>
+                        <a:defRPr sz="1100">
+                          <a:solidFill>
+                            <a:srgbClr val="333333"/>
+                          </a:solidFill>
+                        </a:defRPr>
+                      </a:pPr>
+                      <a:r>
+                        <a:t>Path on SAP app server to the private key file</a:t>
+                      </a:r>
+                    </a:p>
+                  </a:txBody>
+                  <a:tcPr>
+                    <a:solidFill>
+                      <a:srgbClr val="F0F2F7"/>
+                    </a:solidFill>
+                  </a:tcPr>
+                </a:tc>
+                <a:tc>
+                  <a:txBody>
+                    <a:bodyPr/>
+                    <a:lstStyle/>
+                    <a:p>
+                      <a:pPr>
+                        <a:defRPr sz="1100">
+                          <a:solidFill>
+                            <a:srgbClr val="333333"/>
+                          </a:solidFill>
+                        </a:defRPr>
+                      </a:pPr>
+                      <a:r>
+                        <a:t>`-i &lt;path&gt;` to sftp / passed to the OS command</a:t>
+                      </a:r>
+                    </a:p>
+                  </a:txBody>
+                  <a:tcPr>
+                    <a:solidFill>
+                      <a:srgbClr val="F0F2F7"/>
+                    </a:solidFill>
+                  </a:tcPr>
+                </a:tc>
+              </a:tr>
+              <a:tr h="365760">
+                <a:tc>
+                  <a:txBody>
+                    <a:bodyPr/>
+                    <a:lstStyle/>
+                    <a:p>
+                      <a:pPr>
+                        <a:defRPr sz="1100">
+                          <a:solidFill>
+                            <a:srgbClr val="333333"/>
+                          </a:solidFill>
+                          <a:latin typeface="Consolas"/>
+                        </a:defRPr>
+                      </a:pPr>
+                      <a:r>
+                        <a:t>'PASSPHRASE'</a:t>
+                      </a:r>
+                    </a:p>
+                  </a:txBody>
+                  <a:tcPr>
+                    <a:solidFill>
+                      <a:srgbClr val="FFFFFF"/>
+                    </a:solidFill>
+                  </a:tcPr>
+                </a:tc>
+                <a:tc>
+                  <a:txBody>
+                    <a:bodyPr/>
+                    <a:lstStyle/>
+                    <a:p>
+                      <a:pPr>
+                        <a:defRPr sz="1100">
+                          <a:solidFill>
+                            <a:srgbClr val="333333"/>
+                          </a:solidFill>
+                        </a:defRPr>
+                      </a:pPr>
+                      <a:r>
+                        <a:t>Passphrase that unlocks PRIVATE_KEY_PATH</a:t>
+                      </a:r>
+                    </a:p>
+                  </a:txBody>
+                  <a:tcPr>
+                    <a:solidFill>
+                      <a:srgbClr val="FFFFFF"/>
+                    </a:solidFill>
+                  </a:tcPr>
+                </a:tc>
+                <a:tc>
+                  <a:txBody>
+                    <a:bodyPr/>
+                    <a:lstStyle/>
+                    <a:p>
+                      <a:pPr>
+                        <a:defRPr sz="1100">
+                          <a:solidFill>
+                            <a:srgbClr val="333333"/>
+                          </a:solidFill>
+                        </a:defRPr>
+                      </a:pPr>
+                      <a:r>
+                        <a:t>Decrypts the private key at runtime</a:t>
+                      </a:r>
+                    </a:p>
+                  </a:txBody>
+                  <a:tcPr>
+                    <a:solidFill>
+                      <a:srgbClr val="FFFFFF"/>
+                    </a:solidFill>
+                  </a:tcPr>
+                </a:tc>
+              </a:tr>
+              <a:tr h="365760">
+                <a:tc>
+                  <a:txBody>
+                    <a:bodyPr/>
+                    <a:lstStyle/>
+                    <a:p>
+                      <a:pPr>
+                        <a:defRPr sz="1100">
+                          <a:solidFill>
+                            <a:srgbClr val="333333"/>
+                          </a:solidFill>
+                          <a:latin typeface="Consolas"/>
+                        </a:defRPr>
+                      </a:pPr>
+                      <a:r>
+                        <a:t>'SOURCE_FOLDER' / 'SOURCE_PATH'</a:t>
+                      </a:r>
+                    </a:p>
+                  </a:txBody>
+                  <a:tcPr>
+                    <a:solidFill>
+                      <a:srgbClr val="F0F2F7"/>
+                    </a:solidFill>
+                  </a:tcPr>
+                </a:tc>
+                <a:tc>
+                  <a:txBody>
+                    <a:bodyPr/>
+                    <a:lstStyle/>
+                    <a:p>
+                      <a:pPr>
+                        <a:defRPr sz="1100">
+                          <a:solidFill>
+                            <a:srgbClr val="333333"/>
+                          </a:solidFill>
+                        </a:defRPr>
+                      </a:pPr>
+                      <a:r>
+                        <a:t>Remote folder on the SFTP server to read from</a:t>
+                      </a:r>
+                    </a:p>
+                  </a:txBody>
+                  <a:tcPr>
+                    <a:solidFill>
+                      <a:srgbClr val="F0F2F7"/>
+                    </a:solidFill>
+                  </a:tcPr>
+                </a:tc>
+                <a:tc>
+                  <a:txBody>
+                    <a:bodyPr/>
+                    <a:lstStyle/>
+                    <a:p>
+                      <a:pPr>
+                        <a:defRPr sz="1100">
+                          <a:solidFill>
+                            <a:srgbClr val="333333"/>
+                          </a:solidFill>
+                        </a:defRPr>
+                      </a:pPr>
+                      <a:r>
+                        <a:t>Source path argument in the sftp command</a:t>
+                      </a:r>
+                    </a:p>
+                  </a:txBody>
+                  <a:tcPr>
+                    <a:solidFill>
+                      <a:srgbClr val="F0F2F7"/>
+                    </a:solidFill>
+                  </a:tcPr>
+                </a:tc>
+              </a:tr>
+              <a:tr h="365760">
+                <a:tc>
+                  <a:txBody>
+                    <a:bodyPr/>
+                    <a:lstStyle/>
+                    <a:p>
+                      <a:pPr>
+                        <a:defRPr sz="1100">
+                          <a:solidFill>
+                            <a:srgbClr val="333333"/>
+                          </a:solidFill>
+                          <a:latin typeface="Consolas"/>
+                        </a:defRPr>
+                      </a:pPr>
+                      <a:r>
+                        <a:t>'FOLDER_PATH'</a:t>
+                      </a:r>
+                    </a:p>
+                  </a:txBody>
+                  <a:tcPr>
+                    <a:solidFill>
+                      <a:srgbClr val="FFFFFF"/>
+                    </a:solidFill>
+                  </a:tcPr>
+                </a:tc>
+                <a:tc>
+                  <a:txBody>
+                    <a:bodyPr/>
+                    <a:lstStyle/>
+                    <a:p>
+                      <a:pPr>
+                        <a:defRPr sz="1100">
+                          <a:solidFill>
+                            <a:srgbClr val="333333"/>
+                          </a:solidFill>
+                        </a:defRPr>
+                      </a:pPr>
+                      <a:r>
+                        <a:t>Local folder on SAP app server (AL11 path)</a:t>
+                      </a:r>
+                    </a:p>
+                  </a:txBody>
+                  <a:tcPr>
+                    <a:solidFill>
+                      <a:srgbClr val="FFFFFF"/>
+                    </a:solidFill>
+                  </a:tcPr>
+                </a:tc>
+                <a:tc>
+                  <a:txBody>
+                    <a:bodyPr/>
+                    <a:lstStyle/>
+                    <a:p>
+                      <a:pPr>
+                        <a:defRPr sz="1100">
+                          <a:solidFill>
+                            <a:srgbClr val="333333"/>
+                          </a:solidFill>
+                        </a:defRPr>
+                      </a:pPr>
+                      <a:r>
+                        <a:t>Destination for pull / source for push</a:t>
+                      </a:r>
+                    </a:p>
+                  </a:txBody>
+                  <a:tcPr>
+                    <a:solidFill>
+                      <a:srgbClr val="FFFFFF"/>
+                    </a:solidFill>
+                  </a:tcPr>
+                </a:tc>
+              </a:tr>
+              <a:tr h="365760">
+                <a:tc>
+                  <a:txBody>
+                    <a:bodyPr/>
+                    <a:lstStyle/>
+                    <a:p>
+                      <a:pPr>
+                        <a:defRPr sz="1100">
+                          <a:solidFill>
+                            <a:srgbClr val="333333"/>
+                          </a:solidFill>
+                          <a:latin typeface="Consolas"/>
+                        </a:defRPr>
+                      </a:pPr>
+                      <a:r>
+                        <a:t>'FILE_EXT' / 'SFTP_FILE_EXT' / 'ECS_FILE_EXT'</a:t>
+                      </a:r>
+                    </a:p>
+                  </a:txBody>
+                  <a:tcPr>
+                    <a:solidFill>
+                      <a:srgbClr val="F0F2F7"/>
+                    </a:solidFill>
+                  </a:tcPr>
+                </a:tc>
+                <a:tc>
+                  <a:txBody>
+                    <a:bodyPr/>
+                    <a:lstStyle/>
+                    <a:p>
+                      <a:pPr>
+                        <a:defRPr sz="1100">
+                          <a:solidFill>
+                            <a:srgbClr val="333333"/>
+                          </a:solidFill>
+                        </a:defRPr>
+                      </a:pPr>
+                      <a:r>
+                        <a:t>File-name pattern (e.g. *.csv, *.EDI)</a:t>
+                      </a:r>
+                    </a:p>
+                  </a:txBody>
+                  <a:tcPr>
+                    <a:solidFill>
+                      <a:srgbClr val="F0F2F7"/>
+                    </a:solidFill>
+                  </a:tcPr>
+                </a:tc>
+                <a:tc>
+                  <a:txBody>
+                    <a:bodyPr/>
+                    <a:lstStyle/>
+                    <a:p>
+                      <a:pPr>
+                        <a:defRPr sz="1100">
+                          <a:solidFill>
+                            <a:srgbClr val="333333"/>
+                          </a:solidFill>
+                        </a:defRPr>
+                      </a:pPr>
+                      <a:r>
+                        <a:t>Filter for which files to move</a:t>
+                      </a:r>
+                    </a:p>
+                  </a:txBody>
+                  <a:tcPr>
+                    <a:solidFill>
+                      <a:srgbClr val="F0F2F7"/>
+                    </a:solidFill>
+                  </a:tcPr>
+                </a:tc>
+              </a:tr>
+              <a:tr h="365760">
+                <a:tc>
+                  <a:txBody>
+                    <a:bodyPr/>
+                    <a:lstStyle/>
+                    <a:p>
+                      <a:pPr>
+                        <a:defRPr sz="1100">
+                          <a:solidFill>
+                            <a:srgbClr val="333333"/>
+                          </a:solidFill>
+                          <a:latin typeface="Consolas"/>
+                        </a:defRPr>
+                      </a:pPr>
+                      <a:r>
+                        <a:t>'ZDEST_FOLD' / 'DESTINATION_FOLDER'</a:t>
+                      </a:r>
+                    </a:p>
+                  </a:txBody>
+                  <a:tcPr>
+                    <a:solidFill>
+                      <a:srgbClr val="FFFFFF"/>
+                    </a:solidFill>
+                  </a:tcPr>
+                </a:tc>
+                <a:tc>
+                  <a:txBody>
+                    <a:bodyPr/>
+                    <a:lstStyle/>
+                    <a:p>
+                      <a:pPr>
+                        <a:defRPr sz="1100">
+                          <a:solidFill>
+                            <a:srgbClr val="333333"/>
+                          </a:solidFill>
+                        </a:defRPr>
+                      </a:pPr>
+                      <a:r>
+                        <a:t>Remote target folder for push operations</a:t>
+                      </a:r>
+                    </a:p>
+                  </a:txBody>
+                  <a:tcPr>
+                    <a:solidFill>
+                      <a:srgbClr val="FFFFFF"/>
+                    </a:solidFill>
+                  </a:tcPr>
+                </a:tc>
+                <a:tc>
+                  <a:txBody>
+                    <a:bodyPr/>
+                    <a:lstStyle/>
+                    <a:p>
+                      <a:pPr>
+                        <a:defRPr sz="1100">
+                          <a:solidFill>
+                            <a:srgbClr val="333333"/>
+                          </a:solidFill>
+                        </a:defRPr>
+                      </a:pPr>
+                      <a:r>
+                        <a:t>Destination path argument in the sftp command</a:t>
+                      </a:r>
+                    </a:p>
+                  </a:txBody>
+                  <a:tcPr>
+                    <a:solidFill>
+                      <a:srgbClr val="FFFFFF"/>
+                    </a:solidFill>
+                  </a:tcPr>
+                </a:tc>
+              </a:tr>
+              <a:tr h="365760">
+                <a:tc>
+                  <a:txBody>
+                    <a:bodyPr/>
+                    <a:lstStyle/>
+                    <a:p>
+                      <a:pPr>
+                        <a:defRPr sz="1100">
+                          <a:solidFill>
+                            <a:srgbClr val="333333"/>
+                          </a:solidFill>
+                          <a:latin typeface="Consolas"/>
+                        </a:defRPr>
+                      </a:pPr>
+                      <a:r>
+                        <a:t>'PUBLIC_KEY_ID' / 'PRIVATE_KEY_US' / 'PRIVATE_KEY_NONUS'</a:t>
+                      </a:r>
+                    </a:p>
+                  </a:txBody>
+                  <a:tcPr>
+                    <a:solidFill>
+                      <a:srgbClr val="F0F2F7"/>
+                    </a:solidFill>
+                  </a:tcPr>
+                </a:tc>
+                <a:tc>
+                  <a:txBody>
+                    <a:bodyPr/>
+                    <a:lstStyle/>
+                    <a:p>
+                      <a:pPr>
+                        <a:defRPr sz="1100">
+                          <a:solidFill>
+                            <a:srgbClr val="333333"/>
+                          </a:solidFill>
+                        </a:defRPr>
+                      </a:pPr>
+                      <a:r>
+                        <a:t>PGP key identifiers (BNP-PGP variant only)</a:t>
+                      </a:r>
+                    </a:p>
+                  </a:txBody>
+                  <a:tcPr>
+                    <a:solidFill>
+                      <a:srgbClr val="F0F2F7"/>
+                    </a:solidFill>
+                  </a:tcPr>
+                </a:tc>
+                <a:tc>
+                  <a:txBody>
+                    <a:bodyPr/>
+                    <a:lstStyle/>
+                    <a:p>
+                      <a:pPr>
+                        <a:defRPr sz="1100">
+                          <a:solidFill>
+                            <a:srgbClr val="333333"/>
+                          </a:solidFill>
+                        </a:defRPr>
+                      </a:pPr>
+                      <a:r>
+                        <a:t>PGP encryption layer added on top of SFTP</a:t>
+                      </a:r>
+                    </a:p>
+                  </a:txBody>
+                  <a:tcPr>
+                    <a:solidFill>
+                      <a:srgbClr val="F0F2F7"/>
                     </a:solidFill>
                   </a:tcPr>
                 </a:tc>
@@ -12894,65 +12801,6 @@
           </a:graphicData>
         </a:graphic>
       </p:graphicFrame>
-      <p:sp>
-        <p:nvSpPr>
-          <p:cNvPr id="5" name="TextBox 4"/>
-          <p:cNvSpPr txBox="1"/>
-          <p:nvPr/>
-        </p:nvSpPr>
-        <p:spPr>
-          <a:xfrm>
-            <a:off x="457200" y="5760720"/>
-            <a:ext cx="11247120" cy="822960"/>
-          </a:xfrm>
-          <a:prstGeom prst="rect">
-            <a:avLst/>
-          </a:prstGeom>
-          <a:noFill/>
-        </p:spPr>
-        <p:txBody>
-          <a:bodyPr wrap="square">
-            <a:spAutoFit/>
-          </a:bodyPr>
-          <a:lstStyle/>
-          <a:p>
-            <a:pPr>
-              <a:defRPr sz="1200" b="0">
-                <a:solidFill>
-                  <a:srgbClr val="333333"/>
-                </a:solidFill>
-              </a:defRPr>
-            </a:pPr>
-            <a:r>
-              <a:t>Each wrapper FM reads zfi_constants, assembles the same FTP_USER/HOST_KEY/PRIVATE_KEY_PATH parameter bundle,</a:t>
-            </a:r>
-          </a:p>
-          <a:p>
-            <a:pPr>
-              <a:defRPr sz="1200" b="0">
-                <a:solidFill>
-                  <a:srgbClr val="333333"/>
-                </a:solidFill>
-              </a:defRPr>
-            </a:pPr>
-            <a:r>
-              <a:t>and calls CALL FUNCTION 'SXPG_COMMAND_EXECUTE' — exactly like the 14 direct callers.</a:t>
-            </a:r>
-          </a:p>
-          <a:p>
-            <a:pPr>
-              <a:defRPr sz="1200" b="0">
-                <a:solidFill>
-                  <a:srgbClr val="333333"/>
-                </a:solidFill>
-              </a:defRPr>
-            </a:pPr>
-            <a:r>
-              <a:t>ZDMS_SEND_FILE was discovered late, via the ZSFTP_ SM69-prefix sanity scan — not the initial wrapper-substring search.</a:t>
-            </a:r>
-          </a:p>
-        </p:txBody>
-      </p:sp>
     </p:spTree>
   </p:cSld>
   <p:clrMapOvr>
@@ -13001,7 +12849,7 @@
               </a:defRPr>
             </a:pPr>
             <a:r>
-              <a:t>11 objects discovered beyond the stakeholder seed list</a:t>
+              <a:t>3 wrapper function groups — single point of credential binding</a:t>
             </a:r>
           </a:p>
         </p:txBody>
@@ -13014,8 +12862,8 @@
         </p:nvSpPr>
         <p:spPr>
           <a:xfrm>
-            <a:off x="457200" y="1005840"/>
-            <a:ext cx="11247120" cy="548640"/>
+            <a:off x="457200" y="1097280"/>
+            <a:ext cx="11247120" cy="731520"/>
           </a:xfrm>
           <a:prstGeom prst="rect">
             <a:avLst/>
@@ -13031,12 +12879,24 @@
             <a:pPr>
               <a:defRPr sz="1400" b="0">
                 <a:solidFill>
-                  <a:srgbClr val="C83636"/>
+                  <a:srgbClr val="333333"/>
                 </a:solidFill>
               </a:defRPr>
             </a:pPr>
             <a:r>
-              <a:t>The 13-seed list found 8 confirmed SFTP reports. Stage-3 sweep found 11 more (+46%).</a:t>
+              <a:t>Three FUGRs wrap SXPG_COMMAND_EXECUTE so callers stay clean of SFTP plumbing.</a:t>
+            </a:r>
+          </a:p>
+          <a:p>
+            <a:pPr>
+              <a:defRPr sz="1400" b="0">
+                <a:solidFill>
+                  <a:srgbClr val="333333"/>
+                </a:solidFill>
+              </a:defRPr>
+            </a:pPr>
+            <a:r>
+              <a:t>Replace the wrapper internals once → every caller migrates as a side effect.</a:t>
             </a:r>
           </a:p>
         </p:txBody>
@@ -13050,8 +12910,8 @@
           <p:nvPr/>
         </p:nvGraphicFramePr>
         <p:xfrm>
-          <a:off x="457200" y="1828800"/>
-          <a:ext cx="11247120" cy="4572000"/>
+          <a:off x="457200" y="2286000"/>
+          <a:ext cx="11247120" cy="3200400"/>
         </p:xfrm>
         <a:graphic>
           <a:graphicData uri="http://schemas.openxmlformats.org/drawingml/2006/table">
@@ -13060,25 +12920,26 @@
                 <a:tableStyleId>{5C22544A-7EE6-4342-B048-85BDC9FD1C3A}</a:tableStyleId>
               </a:tblPr>
               <a:tblGrid>
+                <a:gridCol w="1645920"/>
+                <a:gridCol w="2743200"/>
+                <a:gridCol w="3657600"/>
                 <a:gridCol w="3200400"/>
-                <a:gridCol w="914400"/>
-                <a:gridCol w="7132320"/>
               </a:tblGrid>
-              <a:tr h="381000">
-                <a:tc>
-                  <a:txBody>
-                    <a:bodyPr/>
-                    <a:lstStyle/>
-                    <a:p>
-                      <a:pPr>
-                        <a:defRPr sz="1300" b="1">
+              <a:tr h="800100">
+                <a:tc>
+                  <a:txBody>
+                    <a:bodyPr/>
+                    <a:lstStyle/>
+                    <a:p>
+                      <a:pPr>
+                        <a:defRPr sz="1200" b="1">
                           <a:solidFill>
                             <a:srgbClr val="FFFFFF"/>
                           </a:solidFill>
                         </a:defRPr>
                       </a:pPr>
                       <a:r>
-                        <a:t>Object</a:t>
+                        <a:t>FUGR</a:t>
                       </a:r>
                     </a:p>
                   </a:txBody>
@@ -13094,14 +12955,14 @@
                     <a:lstStyle/>
                     <a:p>
                       <a:pPr>
-                        <a:defRPr sz="1300" b="1">
+                        <a:defRPr sz="1200" b="1">
                           <a:solidFill>
                             <a:srgbClr val="FFFFFF"/>
                           </a:solidFill>
                         </a:defRPr>
                       </a:pPr>
                       <a:r>
-                        <a:t>Type</a:t>
+                        <a:t>Description</a:t>
                       </a:r>
                     </a:p>
                   </a:txBody>
@@ -13117,14 +12978,14 @@
                     <a:lstStyle/>
                     <a:p>
                       <a:pPr>
-                        <a:defRPr sz="1300" b="1">
+                        <a:defRPr sz="1200" b="1">
                           <a:solidFill>
                             <a:srgbClr val="FFFFFF"/>
                           </a:solidFill>
                         </a:defRPr>
                       </a:pPr>
                       <a:r>
-                        <a:t>Why missed in seed list</a:t>
+                        <a:t>Wrapper function modules</a:t>
                       </a:r>
                     </a:p>
                   </a:txBody>
@@ -13134,68 +12995,114 @@
                     </a:solidFill>
                   </a:tcPr>
                 </a:tc>
+                <a:tc>
+                  <a:txBody>
+                    <a:bodyPr/>
+                    <a:lstStyle/>
+                    <a:p>
+                      <a:pPr>
+                        <a:defRPr sz="1200" b="1">
+                          <a:solidFill>
+                            <a:srgbClr val="FFFFFF"/>
+                          </a:solidFill>
+                        </a:defRPr>
+                      </a:pPr>
+                      <a:r>
+                        <a:t>Used by</a:t>
+                      </a:r>
+                    </a:p>
+                  </a:txBody>
+                  <a:tcPr>
+                    <a:solidFill>
+                      <a:srgbClr val="1F3A68"/>
+                    </a:solidFill>
+                  </a:tcPr>
+                </a:tc>
               </a:tr>
-              <a:tr h="381000">
-                <a:tc>
-                  <a:txBody>
-                    <a:bodyPr/>
-                    <a:lstStyle/>
-                    <a:p>
-                      <a:pPr>
-                        <a:defRPr sz="1100">
-                          <a:solidFill>
-                            <a:srgbClr val="333333"/>
-                          </a:solidFill>
-                        </a:defRPr>
-                      </a:pPr>
-                      <a:r>
-                        <a:t>ZSFTP_BNP_PARIBAS</a:t>
-                      </a:r>
-                    </a:p>
-                  </a:txBody>
-                  <a:tcPr>
-                    <a:solidFill>
-                      <a:srgbClr val="FFFFFF"/>
-                    </a:solidFill>
-                  </a:tcPr>
-                </a:tc>
-                <a:tc>
-                  <a:txBody>
-                    <a:bodyPr/>
-                    <a:lstStyle/>
-                    <a:p>
-                      <a:pPr>
-                        <a:defRPr sz="1100">
-                          <a:solidFill>
-                            <a:srgbClr val="333333"/>
-                          </a:solidFill>
-                        </a:defRPr>
-                      </a:pPr>
-                      <a:r>
-                        <a:t>PROG</a:t>
-                      </a:r>
-                    </a:p>
-                  </a:txBody>
-                  <a:tcPr>
-                    <a:solidFill>
-                      <a:srgbClr val="FFFFFF"/>
-                    </a:solidFill>
-                  </a:tcPr>
-                </a:tc>
-                <a:tc>
-                  <a:txBody>
-                    <a:bodyPr/>
-                    <a:lstStyle/>
-                    <a:p>
-                      <a:pPr>
-                        <a:defRPr sz="1100">
-                          <a:solidFill>
-                            <a:srgbClr val="333333"/>
-                          </a:solidFill>
-                        </a:defRPr>
-                      </a:pPr>
-                      <a:r>
-                        <a:t>Password-only auth — no PRIVATE_KEY_PATH marker</a:t>
+              <a:tr h="800100">
+                <a:tc>
+                  <a:txBody>
+                    <a:bodyPr/>
+                    <a:lstStyle/>
+                    <a:p>
+                      <a:pPr>
+                        <a:defRPr sz="1200">
+                          <a:solidFill>
+                            <a:srgbClr val="333333"/>
+                          </a:solidFill>
+                        </a:defRPr>
+                      </a:pPr>
+                      <a:r>
+                        <a:t>ZMEDICARE</a:t>
+                      </a:r>
+                    </a:p>
+                  </a:txBody>
+                  <a:tcPr>
+                    <a:solidFill>
+                      <a:srgbClr val="FFFFFF"/>
+                    </a:solidFill>
+                  </a:tcPr>
+                </a:tc>
+                <a:tc>
+                  <a:txBody>
+                    <a:bodyPr/>
+                    <a:lstStyle/>
+                    <a:p>
+                      <a:pPr>
+                        <a:defRPr sz="1200">
+                          <a:solidFill>
+                            <a:srgbClr val="333333"/>
+                          </a:solidFill>
+                        </a:defRPr>
+                      </a:pPr>
+                      <a:r>
+                        <a:t>Medicare Project FG</a:t>
+                      </a:r>
+                    </a:p>
+                  </a:txBody>
+                  <a:tcPr>
+                    <a:solidFill>
+                      <a:srgbClr val="FFFFFF"/>
+                    </a:solidFill>
+                  </a:tcPr>
+                </a:tc>
+                <a:tc>
+                  <a:txBody>
+                    <a:bodyPr/>
+                    <a:lstStyle/>
+                    <a:p>
+                      <a:pPr>
+                        <a:defRPr sz="1200">
+                          <a:solidFill>
+                            <a:srgbClr val="333333"/>
+                          </a:solidFill>
+                        </a:defRPr>
+                      </a:pPr>
+                      <a:r>
+                        <a:t>ZMEDI_GET_FROM_SFTP, ZMEDI_PUT_FROM_SFTP</a:t>
+                      </a:r>
+                    </a:p>
+                  </a:txBody>
+                  <a:tcPr>
+                    <a:solidFill>
+                      <a:srgbClr val="FFFFFF"/>
+                    </a:solidFill>
+                  </a:tcPr>
+                </a:tc>
+                <a:tc>
+                  <a:txBody>
+                    <a:bodyPr/>
+                    <a:lstStyle/>
+                    <a:p>
+                      <a:pPr>
+                        <a:defRPr sz="1200">
+                          <a:solidFill>
+                            <a:srgbClr val="333333"/>
+                          </a:solidFill>
+                        </a:defRPr>
+                      </a:pPr>
+                      <a:r>
+                        <a:t>ZSD_MEDICARE_PDF_PROCESS</a:t>
                       </a:r>
                     </a:p>
                   </a:txBody>
@@ -13206,67 +13113,90 @@
                   </a:tcPr>
                 </a:tc>
               </a:tr>
-              <a:tr h="381000">
-                <a:tc>
-                  <a:txBody>
-                    <a:bodyPr/>
-                    <a:lstStyle/>
-                    <a:p>
-                      <a:pPr>
-                        <a:defRPr sz="1100">
-                          <a:solidFill>
-                            <a:srgbClr val="333333"/>
-                          </a:solidFill>
-                        </a:defRPr>
-                      </a:pPr>
-                      <a:r>
-                        <a:t>ZSFTP_BNP_PARIBAS_WITH_PGP</a:t>
-                      </a:r>
-                    </a:p>
-                  </a:txBody>
-                  <a:tcPr>
-                    <a:solidFill>
-                      <a:srgbClr val="F0F2F7"/>
-                    </a:solidFill>
-                  </a:tcPr>
-                </a:tc>
-                <a:tc>
-                  <a:txBody>
-                    <a:bodyPr/>
-                    <a:lstStyle/>
-                    <a:p>
-                      <a:pPr>
-                        <a:defRPr sz="1100">
-                          <a:solidFill>
-                            <a:srgbClr val="333333"/>
-                          </a:solidFill>
-                        </a:defRPr>
-                      </a:pPr>
-                      <a:r>
-                        <a:t>PROG</a:t>
-                      </a:r>
-                    </a:p>
-                  </a:txBody>
-                  <a:tcPr>
-                    <a:solidFill>
-                      <a:srgbClr val="F0F2F7"/>
-                    </a:solidFill>
-                  </a:tcPr>
-                </a:tc>
-                <a:tc>
-                  <a:txBody>
-                    <a:bodyPr/>
-                    <a:lstStyle/>
-                    <a:p>
-                      <a:pPr>
-                        <a:defRPr sz="1100">
-                          <a:solidFill>
-                            <a:srgbClr val="333333"/>
-                          </a:solidFill>
-                        </a:defRPr>
-                      </a:pPr>
-                      <a:r>
-                        <a:t>Newer PGP variant of existing BNP report</a:t>
+              <a:tr h="800100">
+                <a:tc>
+                  <a:txBody>
+                    <a:bodyPr/>
+                    <a:lstStyle/>
+                    <a:p>
+                      <a:pPr>
+                        <a:defRPr sz="1200">
+                          <a:solidFill>
+                            <a:srgbClr val="333333"/>
+                          </a:solidFill>
+                        </a:defRPr>
+                      </a:pPr>
+                      <a:r>
+                        <a:t>ZERX</a:t>
+                      </a:r>
+                    </a:p>
+                  </a:txBody>
+                  <a:tcPr>
+                    <a:solidFill>
+                      <a:srgbClr val="F0F2F7"/>
+                    </a:solidFill>
+                  </a:tcPr>
+                </a:tc>
+                <a:tc>
+                  <a:txBody>
+                    <a:bodyPr/>
+                    <a:lstStyle/>
+                    <a:p>
+                      <a:pPr>
+                        <a:defRPr sz="1200">
+                          <a:solidFill>
+                            <a:srgbClr val="333333"/>
+                          </a:solidFill>
+                        </a:defRPr>
+                      </a:pPr>
+                      <a:r>
+                        <a:t>Medicare Project FG (eRx)</a:t>
+                      </a:r>
+                    </a:p>
+                  </a:txBody>
+                  <a:tcPr>
+                    <a:solidFill>
+                      <a:srgbClr val="F0F2F7"/>
+                    </a:solidFill>
+                  </a:tcPr>
+                </a:tc>
+                <a:tc>
+                  <a:txBody>
+                    <a:bodyPr/>
+                    <a:lstStyle/>
+                    <a:p>
+                      <a:pPr>
+                        <a:defRPr sz="1200">
+                          <a:solidFill>
+                            <a:srgbClr val="333333"/>
+                          </a:solidFill>
+                        </a:defRPr>
+                      </a:pPr>
+                      <a:r>
+                        <a:t>ZERX_GET_FROM_SFTP, ZERX_PUT_FROM_SFTP</a:t>
+                      </a:r>
+                    </a:p>
+                  </a:txBody>
+                  <a:tcPr>
+                    <a:solidFill>
+                      <a:srgbClr val="F0F2F7"/>
+                    </a:solidFill>
+                  </a:tcPr>
+                </a:tc>
+                <a:tc>
+                  <a:txBody>
+                    <a:bodyPr/>
+                    <a:lstStyle/>
+                    <a:p>
+                      <a:pPr>
+                        <a:defRPr sz="1200">
+                          <a:solidFill>
+                            <a:srgbClr val="333333"/>
+                          </a:solidFill>
+                        </a:defRPr>
+                      </a:pPr>
+                      <a:r>
+                        <a:t>ZSD_ERX_DMS_FILE_PROCESS</a:t>
                       </a:r>
                     </a:p>
                   </a:txBody>
@@ -13277,582 +13207,14 @@
                   </a:tcPr>
                 </a:tc>
               </a:tr>
-              <a:tr h="381000">
-                <a:tc>
-                  <a:txBody>
-                    <a:bodyPr/>
-                    <a:lstStyle/>
-                    <a:p>
-                      <a:pPr>
-                        <a:defRPr sz="1100">
-                          <a:solidFill>
-                            <a:srgbClr val="333333"/>
-                          </a:solidFill>
-                        </a:defRPr>
-                      </a:pPr>
-                      <a:r>
-                        <a:t>ZSFTP_CERIDIAN_PULL</a:t>
-                      </a:r>
-                    </a:p>
-                  </a:txBody>
-                  <a:tcPr>
-                    <a:solidFill>
-                      <a:srgbClr val="FFFFFF"/>
-                    </a:solidFill>
-                  </a:tcPr>
-                </a:tc>
-                <a:tc>
-                  <a:txBody>
-                    <a:bodyPr/>
-                    <a:lstStyle/>
-                    <a:p>
-                      <a:pPr>
-                        <a:defRPr sz="1100">
-                          <a:solidFill>
-                            <a:srgbClr val="333333"/>
-                          </a:solidFill>
-                        </a:defRPr>
-                      </a:pPr>
-                      <a:r>
-                        <a:t>PROG</a:t>
-                      </a:r>
-                    </a:p>
-                  </a:txBody>
-                  <a:tcPr>
-                    <a:solidFill>
-                      <a:srgbClr val="FFFFFF"/>
-                    </a:solidFill>
-                  </a:tcPr>
-                </a:tc>
-                <a:tc>
-                  <a:txBody>
-                    <a:bodyPr/>
-                    <a:lstStyle/>
-                    <a:p>
-                      <a:pPr>
-                        <a:defRPr sz="1100">
-                          <a:solidFill>
-                            <a:srgbClr val="333333"/>
-                          </a:solidFill>
-                        </a:defRPr>
-                      </a:pPr>
-                      <a:r>
-                        <a:t>Operator-facing duplicate of ZFFIU_ACC_POST flow</a:t>
-                      </a:r>
-                    </a:p>
-                  </a:txBody>
-                  <a:tcPr>
-                    <a:solidFill>
-                      <a:srgbClr val="FFFFFF"/>
-                    </a:solidFill>
-                  </a:tcPr>
-                </a:tc>
-              </a:tr>
-              <a:tr h="381000">
-                <a:tc>
-                  <a:txBody>
-                    <a:bodyPr/>
-                    <a:lstStyle/>
-                    <a:p>
-                      <a:pPr>
-                        <a:defRPr sz="1100">
-                          <a:solidFill>
-                            <a:srgbClr val="333333"/>
-                          </a:solidFill>
-                        </a:defRPr>
-                      </a:pPr>
-                      <a:r>
-                        <a:t>ZSFTP_CITI_SEND</a:t>
-                      </a:r>
-                    </a:p>
-                  </a:txBody>
-                  <a:tcPr>
-                    <a:solidFill>
-                      <a:srgbClr val="F0F2F7"/>
-                    </a:solidFill>
-                  </a:tcPr>
-                </a:tc>
-                <a:tc>
-                  <a:txBody>
-                    <a:bodyPr/>
-                    <a:lstStyle/>
-                    <a:p>
-                      <a:pPr>
-                        <a:defRPr sz="1100">
-                          <a:solidFill>
-                            <a:srgbClr val="333333"/>
-                          </a:solidFill>
-                        </a:defRPr>
-                      </a:pPr>
-                      <a:r>
-                        <a:t>PROG</a:t>
-                      </a:r>
-                    </a:p>
-                  </a:txBody>
-                  <a:tcPr>
-                    <a:solidFill>
-                      <a:srgbClr val="F0F2F7"/>
-                    </a:solidFill>
-                  </a:tcPr>
-                </a:tc>
-                <a:tc>
-                  <a:txBody>
-                    <a:bodyPr/>
-                    <a:lstStyle/>
-                    <a:p>
-                      <a:pPr>
-                        <a:defRPr sz="1100">
-                          <a:solidFill>
-                            <a:srgbClr val="333333"/>
-                          </a:solidFill>
-                        </a:defRPr>
-                      </a:pPr>
-                      <a:r>
-                        <a:t>Outbound counterpart of ZSFTP_CITI_PULL</a:t>
-                      </a:r>
-                    </a:p>
-                  </a:txBody>
-                  <a:tcPr>
-                    <a:solidFill>
-                      <a:srgbClr val="F0F2F7"/>
-                    </a:solidFill>
-                  </a:tcPr>
-                </a:tc>
-              </a:tr>
-              <a:tr h="381000">
-                <a:tc>
-                  <a:txBody>
-                    <a:bodyPr/>
-                    <a:lstStyle/>
-                    <a:p>
-                      <a:pPr>
-                        <a:defRPr sz="1100">
-                          <a:solidFill>
-                            <a:srgbClr val="333333"/>
-                          </a:solidFill>
-                        </a:defRPr>
-                      </a:pPr>
-                      <a:r>
-                        <a:t>ZSFTP_JPM</a:t>
-                      </a:r>
-                    </a:p>
-                  </a:txBody>
-                  <a:tcPr>
-                    <a:solidFill>
-                      <a:srgbClr val="FFFFFF"/>
-                    </a:solidFill>
-                  </a:tcPr>
-                </a:tc>
-                <a:tc>
-                  <a:txBody>
-                    <a:bodyPr/>
-                    <a:lstStyle/>
-                    <a:p>
-                      <a:pPr>
-                        <a:defRPr sz="1100">
-                          <a:solidFill>
-                            <a:srgbClr val="333333"/>
-                          </a:solidFill>
-                        </a:defRPr>
-                      </a:pPr>
-                      <a:r>
-                        <a:t>PROG</a:t>
-                      </a:r>
-                    </a:p>
-                  </a:txBody>
-                  <a:tcPr>
-                    <a:solidFill>
-                      <a:srgbClr val="FFFFFF"/>
-                    </a:solidFill>
-                  </a:tcPr>
-                </a:tc>
-                <a:tc>
-                  <a:txBody>
-                    <a:bodyPr/>
-                    <a:lstStyle/>
-                    <a:p>
-                      <a:pPr>
-                        <a:defRPr sz="1100">
-                          <a:solidFill>
-                            <a:srgbClr val="333333"/>
-                          </a:solidFill>
-                        </a:defRPr>
-                      </a:pPr>
-                      <a:r>
-                        <a:t>Entire JPMorgan integration not in seeds</a:t>
-                      </a:r>
-                    </a:p>
-                  </a:txBody>
-                  <a:tcPr>
-                    <a:solidFill>
-                      <a:srgbClr val="FFFFFF"/>
-                    </a:solidFill>
-                  </a:tcPr>
-                </a:tc>
-              </a:tr>
-              <a:tr h="381000">
-                <a:tc>
-                  <a:txBody>
-                    <a:bodyPr/>
-                    <a:lstStyle/>
-                    <a:p>
-                      <a:pPr>
-                        <a:defRPr sz="1100">
-                          <a:solidFill>
-                            <a:srgbClr val="333333"/>
-                          </a:solidFill>
-                        </a:defRPr>
-                      </a:pPr>
-                      <a:r>
-                        <a:t>ZSFTP_JPM_PULL</a:t>
-                      </a:r>
-                    </a:p>
-                  </a:txBody>
-                  <a:tcPr>
-                    <a:solidFill>
-                      <a:srgbClr val="F0F2F7"/>
-                    </a:solidFill>
-                  </a:tcPr>
-                </a:tc>
-                <a:tc>
-                  <a:txBody>
-                    <a:bodyPr/>
-                    <a:lstStyle/>
-                    <a:p>
-                      <a:pPr>
-                        <a:defRPr sz="1100">
-                          <a:solidFill>
-                            <a:srgbClr val="333333"/>
-                          </a:solidFill>
-                        </a:defRPr>
-                      </a:pPr>
-                      <a:r>
-                        <a:t>PROG</a:t>
-                      </a:r>
-                    </a:p>
-                  </a:txBody>
-                  <a:tcPr>
-                    <a:solidFill>
-                      <a:srgbClr val="F0F2F7"/>
-                    </a:solidFill>
-                  </a:tcPr>
-                </a:tc>
-                <a:tc>
-                  <a:txBody>
-                    <a:bodyPr/>
-                    <a:lstStyle/>
-                    <a:p>
-                      <a:pPr>
-                        <a:defRPr sz="1100">
-                          <a:solidFill>
-                            <a:srgbClr val="333333"/>
-                          </a:solidFill>
-                        </a:defRPr>
-                      </a:pPr>
-                      <a:r>
-                        <a:t>Entire JPMorgan integration not in seeds</a:t>
-                      </a:r>
-                    </a:p>
-                  </a:txBody>
-                  <a:tcPr>
-                    <a:solidFill>
-                      <a:srgbClr val="F0F2F7"/>
-                    </a:solidFill>
-                  </a:tcPr>
-                </a:tc>
-              </a:tr>
-              <a:tr h="381000">
-                <a:tc>
-                  <a:txBody>
-                    <a:bodyPr/>
-                    <a:lstStyle/>
-                    <a:p>
-                      <a:pPr>
-                        <a:defRPr sz="1100">
-                          <a:solidFill>
-                            <a:srgbClr val="333333"/>
-                          </a:solidFill>
-                        </a:defRPr>
-                      </a:pPr>
-                      <a:r>
-                        <a:t>ZDMS_REPLACE_FILES</a:t>
-                      </a:r>
-                    </a:p>
-                  </a:txBody>
-                  <a:tcPr>
-                    <a:solidFill>
-                      <a:srgbClr val="FFFFFF"/>
-                    </a:solidFill>
-                  </a:tcPr>
-                </a:tc>
-                <a:tc>
-                  <a:txBody>
-                    <a:bodyPr/>
-                    <a:lstStyle/>
-                    <a:p>
-                      <a:pPr>
-                        <a:defRPr sz="1100">
-                          <a:solidFill>
-                            <a:srgbClr val="333333"/>
-                          </a:solidFill>
-                        </a:defRPr>
-                      </a:pPr>
-                      <a:r>
-                        <a:t>PROG</a:t>
-                      </a:r>
-                    </a:p>
-                  </a:txBody>
-                  <a:tcPr>
-                    <a:solidFill>
-                      <a:srgbClr val="FFFFFF"/>
-                    </a:solidFill>
-                  </a:tcPr>
-                </a:tc>
-                <a:tc>
-                  <a:txBody>
-                    <a:bodyPr/>
-                    <a:lstStyle/>
-                    <a:p>
-                      <a:pPr>
-                        <a:defRPr sz="1100">
-                          <a:solidFill>
-                            <a:srgbClr val="333333"/>
-                          </a:solidFill>
-                        </a:defRPr>
-                      </a:pPr>
-                      <a:r>
-                        <a:t>Adjacent DMS report sharing SM69 commands</a:t>
-                      </a:r>
-                    </a:p>
-                  </a:txBody>
-                  <a:tcPr>
-                    <a:solidFill>
-                      <a:srgbClr val="FFFFFF"/>
-                    </a:solidFill>
-                  </a:tcPr>
-                </a:tc>
-              </a:tr>
-              <a:tr h="381000">
-                <a:tc>
-                  <a:txBody>
-                    <a:bodyPr/>
-                    <a:lstStyle/>
-                    <a:p>
-                      <a:pPr>
-                        <a:defRPr sz="1100">
-                          <a:solidFill>
-                            <a:srgbClr val="333333"/>
-                          </a:solidFill>
-                        </a:defRPr>
-                      </a:pPr>
-                      <a:r>
-                        <a:t>ZSD_ERX_DMS_FILE_PROCESS</a:t>
-                      </a:r>
-                    </a:p>
-                  </a:txBody>
-                  <a:tcPr>
-                    <a:solidFill>
-                      <a:srgbClr val="F0F2F7"/>
-                    </a:solidFill>
-                  </a:tcPr>
-                </a:tc>
-                <a:tc>
-                  <a:txBody>
-                    <a:bodyPr/>
-                    <a:lstStyle/>
-                    <a:p>
-                      <a:pPr>
-                        <a:defRPr sz="1100">
-                          <a:solidFill>
-                            <a:srgbClr val="333333"/>
-                          </a:solidFill>
-                        </a:defRPr>
-                      </a:pPr>
-                      <a:r>
-                        <a:t>PROG</a:t>
-                      </a:r>
-                    </a:p>
-                  </a:txBody>
-                  <a:tcPr>
-                    <a:solidFill>
-                      <a:srgbClr val="F0F2F7"/>
-                    </a:solidFill>
-                  </a:tcPr>
-                </a:tc>
-                <a:tc>
-                  <a:txBody>
-                    <a:bodyPr/>
-                    <a:lstStyle/>
-                    <a:p>
-                      <a:pPr>
-                        <a:defRPr sz="1100">
-                          <a:solidFill>
-                            <a:srgbClr val="333333"/>
-                          </a:solidFill>
-                        </a:defRPr>
-                      </a:pPr>
-                      <a:r>
-                        <a:t>Indirect SFTP via ZERX wrapper FUGR</a:t>
-                      </a:r>
-                    </a:p>
-                  </a:txBody>
-                  <a:tcPr>
-                    <a:solidFill>
-                      <a:srgbClr val="F0F2F7"/>
-                    </a:solidFill>
-                  </a:tcPr>
-                </a:tc>
-              </a:tr>
-              <a:tr h="381000">
-                <a:tc>
-                  <a:txBody>
-                    <a:bodyPr/>
-                    <a:lstStyle/>
-                    <a:p>
-                      <a:pPr>
-                        <a:defRPr sz="1100">
-                          <a:solidFill>
-                            <a:srgbClr val="333333"/>
-                          </a:solidFill>
-                        </a:defRPr>
-                      </a:pPr>
-                      <a:r>
-                        <a:t>ZMEDICARE</a:t>
-                      </a:r>
-                    </a:p>
-                  </a:txBody>
-                  <a:tcPr>
-                    <a:solidFill>
-                      <a:srgbClr val="FFFFFF"/>
-                    </a:solidFill>
-                  </a:tcPr>
-                </a:tc>
-                <a:tc>
-                  <a:txBody>
-                    <a:bodyPr/>
-                    <a:lstStyle/>
-                    <a:p>
-                      <a:pPr>
-                        <a:defRPr sz="1100">
-                          <a:solidFill>
-                            <a:srgbClr val="333333"/>
-                          </a:solidFill>
-                        </a:defRPr>
-                      </a:pPr>
-                      <a:r>
-                        <a:t>FUGR</a:t>
-                      </a:r>
-                    </a:p>
-                  </a:txBody>
-                  <a:tcPr>
-                    <a:solidFill>
-                      <a:srgbClr val="FFFFFF"/>
-                    </a:solidFill>
-                  </a:tcPr>
-                </a:tc>
-                <a:tc>
-                  <a:txBody>
-                    <a:bodyPr/>
-                    <a:lstStyle/>
-                    <a:p>
-                      <a:pPr>
-                        <a:defRPr sz="1100">
-                          <a:solidFill>
-                            <a:srgbClr val="333333"/>
-                          </a:solidFill>
-                        </a:defRPr>
-                      </a:pPr>
-                      <a:r>
-                        <a:t>Wrapper FUGR — never in a 'report list'</a:t>
-                      </a:r>
-                    </a:p>
-                  </a:txBody>
-                  <a:tcPr>
-                    <a:solidFill>
-                      <a:srgbClr val="FFFFFF"/>
-                    </a:solidFill>
-                  </a:tcPr>
-                </a:tc>
-              </a:tr>
-              <a:tr h="381000">
-                <a:tc>
-                  <a:txBody>
-                    <a:bodyPr/>
-                    <a:lstStyle/>
-                    <a:p>
-                      <a:pPr>
-                        <a:defRPr sz="1100">
-                          <a:solidFill>
-                            <a:srgbClr val="333333"/>
-                          </a:solidFill>
-                        </a:defRPr>
-                      </a:pPr>
-                      <a:r>
-                        <a:t>ZERX</a:t>
-                      </a:r>
-                    </a:p>
-                  </a:txBody>
-                  <a:tcPr>
-                    <a:solidFill>
-                      <a:srgbClr val="F0F2F7"/>
-                    </a:solidFill>
-                  </a:tcPr>
-                </a:tc>
-                <a:tc>
-                  <a:txBody>
-                    <a:bodyPr/>
-                    <a:lstStyle/>
-                    <a:p>
-                      <a:pPr>
-                        <a:defRPr sz="1100">
-                          <a:solidFill>
-                            <a:srgbClr val="333333"/>
-                          </a:solidFill>
-                        </a:defRPr>
-                      </a:pPr>
-                      <a:r>
-                        <a:t>FUGR</a:t>
-                      </a:r>
-                    </a:p>
-                  </a:txBody>
-                  <a:tcPr>
-                    <a:solidFill>
-                      <a:srgbClr val="F0F2F7"/>
-                    </a:solidFill>
-                  </a:tcPr>
-                </a:tc>
-                <a:tc>
-                  <a:txBody>
-                    <a:bodyPr/>
-                    <a:lstStyle/>
-                    <a:p>
-                      <a:pPr>
-                        <a:defRPr sz="1100">
-                          <a:solidFill>
-                            <a:srgbClr val="333333"/>
-                          </a:solidFill>
-                        </a:defRPr>
-                      </a:pPr>
-                      <a:r>
-                        <a:t>Same — wrapper FUGR for eRx/DMS path</a:t>
-                      </a:r>
-                    </a:p>
-                  </a:txBody>
-                  <a:tcPr>
-                    <a:solidFill>
-                      <a:srgbClr val="F0F2F7"/>
-                    </a:solidFill>
-                  </a:tcPr>
-                </a:tc>
-              </a:tr>
-              <a:tr h="381000">
-                <a:tc>
-                  <a:txBody>
-                    <a:bodyPr/>
-                    <a:lstStyle/>
-                    <a:p>
-                      <a:pPr>
-                        <a:defRPr sz="1100">
+              <a:tr h="800100">
+                <a:tc>
+                  <a:txBody>
+                    <a:bodyPr/>
+                    <a:lstStyle/>
+                    <a:p>
+                      <a:pPr>
+                        <a:defRPr sz="1200">
                           <a:solidFill>
                             <a:srgbClr val="333333"/>
                           </a:solidFill>
@@ -13875,37 +13237,60 @@
                     <a:lstStyle/>
                     <a:p>
                       <a:pPr>
-                        <a:defRPr sz="1100">
-                          <a:solidFill>
-                            <a:srgbClr val="333333"/>
-                          </a:solidFill>
-                        </a:defRPr>
-                      </a:pPr>
-                      <a:r>
-                        <a:t>FUGR</a:t>
-                      </a:r>
-                    </a:p>
-                  </a:txBody>
-                  <a:tcPr>
-                    <a:solidFill>
-                      <a:srgbClr val="FFFFFF"/>
-                    </a:solidFill>
-                  </a:tcPr>
-                </a:tc>
-                <a:tc>
-                  <a:txBody>
-                    <a:bodyPr/>
-                    <a:lstStyle/>
-                    <a:p>
-                      <a:pPr>
-                        <a:defRPr sz="1100">
-                          <a:solidFill>
-                            <a:srgbClr val="333333"/>
-                          </a:solidFill>
-                        </a:defRPr>
-                      </a:pPr>
-                      <a:r>
-                        <a:t>Wrapper FUGR with _TO_SFTP naming — initial substring scan looked for _FROM_SFTP only</a:t>
+                        <a:defRPr sz="1200">
+                          <a:solidFill>
+                            <a:srgbClr val="333333"/>
+                          </a:solidFill>
+                        </a:defRPr>
+                      </a:pPr>
+                      <a:r>
+                        <a:t>DMS document extract FG</a:t>
+                      </a:r>
+                    </a:p>
+                  </a:txBody>
+                  <a:tcPr>
+                    <a:solidFill>
+                      <a:srgbClr val="FFFFFF"/>
+                    </a:solidFill>
+                  </a:tcPr>
+                </a:tc>
+                <a:tc>
+                  <a:txBody>
+                    <a:bodyPr/>
+                    <a:lstStyle/>
+                    <a:p>
+                      <a:pPr>
+                        <a:defRPr sz="1200">
+                          <a:solidFill>
+                            <a:srgbClr val="333333"/>
+                          </a:solidFill>
+                        </a:defRPr>
+                      </a:pPr>
+                      <a:r>
+                        <a:t>ZDMS_EXTRACT_DOCS_TO_SFTP</a:t>
+                      </a:r>
+                    </a:p>
+                  </a:txBody>
+                  <a:tcPr>
+                    <a:solidFill>
+                      <a:srgbClr val="FFFFFF"/>
+                    </a:solidFill>
+                  </a:tcPr>
+                </a:tc>
+                <a:tc>
+                  <a:txBody>
+                    <a:bodyPr/>
+                    <a:lstStyle/>
+                    <a:p>
+                      <a:pPr>
+                        <a:defRPr sz="1200">
+                          <a:solidFill>
+                            <a:srgbClr val="333333"/>
+                          </a:solidFill>
+                        </a:defRPr>
+                      </a:pPr>
+                      <a:r>
+                        <a:t>0 callers in Z001 (dynamic / cross-package / dead?)</a:t>
                       </a:r>
                     </a:p>
                   </a:txBody>
@@ -13920,6 +13305,65 @@
           </a:graphicData>
         </a:graphic>
       </p:graphicFrame>
+      <p:sp>
+        <p:nvSpPr>
+          <p:cNvPr id="5" name="TextBox 4"/>
+          <p:cNvSpPr txBox="1"/>
+          <p:nvPr/>
+        </p:nvSpPr>
+        <p:spPr>
+          <a:xfrm>
+            <a:off x="457200" y="5760720"/>
+            <a:ext cx="11247120" cy="822960"/>
+          </a:xfrm>
+          <a:prstGeom prst="rect">
+            <a:avLst/>
+          </a:prstGeom>
+          <a:noFill/>
+        </p:spPr>
+        <p:txBody>
+          <a:bodyPr wrap="square">
+            <a:spAutoFit/>
+          </a:bodyPr>
+          <a:lstStyle/>
+          <a:p>
+            <a:pPr>
+              <a:defRPr sz="1200" b="0">
+                <a:solidFill>
+                  <a:srgbClr val="333333"/>
+                </a:solidFill>
+              </a:defRPr>
+            </a:pPr>
+            <a:r>
+              <a:t>Each wrapper FM reads zfi_constants, assembles the same FTP_USER/HOST_KEY/PRIVATE_KEY_PATH parameter bundle,</a:t>
+            </a:r>
+          </a:p>
+          <a:p>
+            <a:pPr>
+              <a:defRPr sz="1200" b="0">
+                <a:solidFill>
+                  <a:srgbClr val="333333"/>
+                </a:solidFill>
+              </a:defRPr>
+            </a:pPr>
+            <a:r>
+              <a:t>and calls CALL FUNCTION 'SXPG_COMMAND_EXECUTE' — exactly like the 14 direct callers.</a:t>
+            </a:r>
+          </a:p>
+          <a:p>
+            <a:pPr>
+              <a:defRPr sz="1200" b="0">
+                <a:solidFill>
+                  <a:srgbClr val="333333"/>
+                </a:solidFill>
+              </a:defRPr>
+            </a:pPr>
+            <a:r>
+              <a:t>ZDMS_SEND_FILE was discovered late, via the ZSFTP_ SM69-prefix sanity scan — not the initial wrapper-substring search.</a:t>
+            </a:r>
+          </a:p>
+        </p:txBody>
+      </p:sp>
     </p:spTree>
   </p:cSld>
   <p:clrMapOvr>
@@ -13968,7 +13412,7 @@
               </a:defRPr>
             </a:pPr>
             <a:r>
-              <a:t>Code example #1 — direct SXPG call (ZSFTP_CITI_PULL)</a:t>
+              <a:t>11 objects discovered beyond the stakeholder seed list</a:t>
             </a:r>
           </a:p>
         </p:txBody>
@@ -13982,7 +13426,7 @@
         <p:spPr>
           <a:xfrm>
             <a:off x="457200" y="1005840"/>
-            <a:ext cx="11247120" cy="457200"/>
+            <a:ext cx="11247120" cy="548640"/>
           </a:xfrm>
           <a:prstGeom prst="rect">
             <a:avLst/>
@@ -13996,281 +13440,897 @@
           <a:lstStyle/>
           <a:p>
             <a:pPr>
-              <a:defRPr sz="1200" b="0">
+              <a:defRPr sz="1400" b="0">
                 <a:solidFill>
-                  <a:srgbClr val="333333"/>
+                  <a:srgbClr val="C83636"/>
                 </a:solidFill>
               </a:defRPr>
             </a:pPr>
             <a:r>
-              <a:t>Pattern shared by 14 of 16 reports: read credentials from zfi_constants, assemble shell parameters, call SXPG.</a:t>
+              <a:t>The 13-seed list found 8 confirmed SFTP reports. Stage-3 sweep found 11 more (+46%).</a:t>
             </a:r>
           </a:p>
         </p:txBody>
       </p:sp>
-      <p:sp>
-        <p:nvSpPr>
-          <p:cNvPr id="4" name="TextBox 3"/>
-          <p:cNvSpPr txBox="1"/>
+      <p:graphicFrame>
+        <p:nvGraphicFramePr>
+          <p:cNvPr id="4" name="Table 3"/>
+          <p:cNvGraphicFramePr>
+            <a:graphicFrameLocks noGrp="1"/>
+          </p:cNvGraphicFramePr>
           <p:nvPr/>
-        </p:nvSpPr>
-        <p:spPr>
-          <a:xfrm>
-            <a:off x="457200" y="1554480"/>
-            <a:ext cx="11247120" cy="5029200"/>
-          </a:xfrm>
-          <a:prstGeom prst="rect">
-            <a:avLst/>
-          </a:prstGeom>
-          <a:solidFill>
-            <a:srgbClr val="F0F2F7"/>
-          </a:solidFill>
-        </p:spPr>
-        <p:txBody>
-          <a:bodyPr wrap="square">
-            <a:spAutoFit/>
-          </a:bodyPr>
-          <a:lstStyle/>
-          <a:p>
-            <a:pPr>
-              <a:defRPr sz="1200" b="0">
-                <a:solidFill>
-                  <a:srgbClr val="333333"/>
-                </a:solidFill>
-                <a:latin typeface="Consolas"/>
-              </a:defRPr>
-            </a:pPr>
-            <a:r>
-              <a:t>PARAMETERS: p_comm TYPE sxpgcolist-name OBLIGATORY DEFAULT 'ZSFTP_CITI_PULL'.</a:t>
-            </a:r>
-          </a:p>
-          <a:p>
-            <a:pPr>
-              <a:defRPr sz="1200" b="0">
-                <a:solidFill>
-                  <a:srgbClr val="333333"/>
-                </a:solidFill>
-                <a:latin typeface="Consolas"/>
-              </a:defRPr>
-            </a:pPr>
-          </a:p>
-          <a:p>
-            <a:pPr>
-              <a:defRPr sz="1200" b="0">
-                <a:solidFill>
-                  <a:srgbClr val="333333"/>
-                </a:solidFill>
-                <a:latin typeface="Consolas"/>
-              </a:defRPr>
-            </a:pPr>
-            <a:r>
-              <a:t>SELECT * FROM zfi_constants INTO TABLE i_constants WHERE pname = 'ZSFTP_CITI'.</a:t>
-            </a:r>
-          </a:p>
-          <a:p>
-            <a:pPr>
-              <a:defRPr sz="1200" b="0">
-                <a:solidFill>
-                  <a:srgbClr val="333333"/>
-                </a:solidFill>
-                <a:latin typeface="Consolas"/>
-              </a:defRPr>
-            </a:pPr>
-          </a:p>
-          <a:p>
-            <a:pPr>
-              <a:defRPr sz="1200" b="0">
-                <a:solidFill>
-                  <a:srgbClr val="333333"/>
-                </a:solidFill>
-                <a:latin typeface="Consolas"/>
-              </a:defRPr>
-            </a:pPr>
-            <a:r>
-              <a:t>PERFORM f_set_parameter USING 'SOURCE_FOLDER'    'M' ''.</a:t>
-            </a:r>
-          </a:p>
-          <a:p>
-            <a:pPr>
-              <a:defRPr sz="1200" b="0">
-                <a:solidFill>
-                  <a:srgbClr val="333333"/>
-                </a:solidFill>
-                <a:latin typeface="Consolas"/>
-              </a:defRPr>
-            </a:pPr>
-            <a:r>
-              <a:t>PERFORM f_set_parameter USING 'PASSPHRASE'       'M' ' '.</a:t>
-            </a:r>
-          </a:p>
-          <a:p>
-            <a:pPr>
-              <a:defRPr sz="1200" b="0">
-                <a:solidFill>
-                  <a:srgbClr val="333333"/>
-                </a:solidFill>
-                <a:latin typeface="Consolas"/>
-              </a:defRPr>
-            </a:pPr>
-            <a:r>
-              <a:t>PERFORM f_set_parameter USING 'FTP_USER'         'M' ' '.</a:t>
-            </a:r>
-          </a:p>
-          <a:p>
-            <a:pPr>
-              <a:defRPr sz="1200" b="0">
-                <a:solidFill>
-                  <a:srgbClr val="333333"/>
-                </a:solidFill>
-                <a:latin typeface="Consolas"/>
-              </a:defRPr>
-            </a:pPr>
-            <a:r>
-              <a:t>PERFORM f_set_parameter USING 'FTP_DOMAIN'       'M' '@'.</a:t>
-            </a:r>
-          </a:p>
-          <a:p>
-            <a:pPr>
-              <a:defRPr sz="1200" b="0">
-                <a:solidFill>
-                  <a:srgbClr val="333333"/>
-                </a:solidFill>
-                <a:latin typeface="Consolas"/>
-              </a:defRPr>
-            </a:pPr>
-            <a:r>
-              <a:t>PERFORM f_set_parameter USING 'HOST_KEY'         'M' ' '.</a:t>
-            </a:r>
-          </a:p>
-          <a:p>
-            <a:pPr>
-              <a:defRPr sz="1200" b="0">
-                <a:solidFill>
-                  <a:srgbClr val="333333"/>
-                </a:solidFill>
-                <a:latin typeface="Consolas"/>
-              </a:defRPr>
-            </a:pPr>
-            <a:r>
-              <a:t>PERFORM f_set_parameter USING 'PRIVATE_KEY_PATH' 'M' ' '.</a:t>
-            </a:r>
-          </a:p>
-          <a:p>
-            <a:pPr>
-              <a:defRPr sz="1200" b="0">
-                <a:solidFill>
-                  <a:srgbClr val="333333"/>
-                </a:solidFill>
-                <a:latin typeface="Consolas"/>
-              </a:defRPr>
-            </a:pPr>
-          </a:p>
-          <a:p>
-            <a:pPr>
-              <a:defRPr sz="1200" b="0">
-                <a:solidFill>
-                  <a:srgbClr val="333333"/>
-                </a:solidFill>
-                <a:latin typeface="Consolas"/>
-              </a:defRPr>
-            </a:pPr>
-            <a:r>
-              <a:t>CALL FUNCTION 'SXPG_COMMAND_EXECUTE'</a:t>
-            </a:r>
-          </a:p>
-          <a:p>
-            <a:pPr>
-              <a:defRPr sz="1200" b="0">
-                <a:solidFill>
-                  <a:srgbClr val="333333"/>
-                </a:solidFill>
-                <a:latin typeface="Consolas"/>
-              </a:defRPr>
-            </a:pPr>
-            <a:r>
-              <a:t>  EXPORTING</a:t>
-            </a:r>
-          </a:p>
-          <a:p>
-            <a:pPr>
-              <a:defRPr sz="1200" b="0">
-                <a:solidFill>
-                  <a:srgbClr val="333333"/>
-                </a:solidFill>
-                <a:latin typeface="Consolas"/>
-              </a:defRPr>
-            </a:pPr>
-            <a:r>
-              <a:t>    commandname           = p_comm</a:t>
-            </a:r>
-          </a:p>
-          <a:p>
-            <a:pPr>
-              <a:defRPr sz="1200" b="0">
-                <a:solidFill>
-                  <a:srgbClr val="333333"/>
-                </a:solidFill>
-                <a:latin typeface="Consolas"/>
-              </a:defRPr>
-            </a:pPr>
-            <a:r>
-              <a:t>    additional_parameters = g_path</a:t>
-            </a:r>
-          </a:p>
-          <a:p>
-            <a:pPr>
-              <a:defRPr sz="1200" b="0">
-                <a:solidFill>
-                  <a:srgbClr val="333333"/>
-                </a:solidFill>
-                <a:latin typeface="Consolas"/>
-              </a:defRPr>
-            </a:pPr>
-            <a:r>
-              <a:t>  IMPORTING</a:t>
-            </a:r>
-          </a:p>
-          <a:p>
-            <a:pPr>
-              <a:defRPr sz="1200" b="0">
-                <a:solidFill>
-                  <a:srgbClr val="333333"/>
-                </a:solidFill>
-                <a:latin typeface="Consolas"/>
-              </a:defRPr>
-            </a:pPr>
-            <a:r>
-              <a:t>    exitcode              = g_ret_code</a:t>
-            </a:r>
-          </a:p>
-          <a:p>
-            <a:pPr>
-              <a:defRPr sz="1200" b="0">
-                <a:solidFill>
-                  <a:srgbClr val="333333"/>
-                </a:solidFill>
-                <a:latin typeface="Consolas"/>
-              </a:defRPr>
-            </a:pPr>
-            <a:r>
-              <a:t>  TABLES</a:t>
-            </a:r>
-          </a:p>
-          <a:p>
-            <a:pPr>
-              <a:defRPr sz="1200" b="0">
-                <a:solidFill>
-                  <a:srgbClr val="333333"/>
-                </a:solidFill>
-                <a:latin typeface="Consolas"/>
-              </a:defRPr>
-            </a:pPr>
-            <a:r>
-              <a:t>    exec_protocol         = i_return[].</a:t>
-            </a:r>
-          </a:p>
-        </p:txBody>
-      </p:sp>
+        </p:nvGraphicFramePr>
+        <p:xfrm>
+          <a:off x="457200" y="1828800"/>
+          <a:ext cx="11247120" cy="4572000"/>
+        </p:xfrm>
+        <a:graphic>
+          <a:graphicData uri="http://schemas.openxmlformats.org/drawingml/2006/table">
+            <a:tbl>
+              <a:tblPr firstRow="1" bandRow="1">
+                <a:tableStyleId>{5C22544A-7EE6-4342-B048-85BDC9FD1C3A}</a:tableStyleId>
+              </a:tblPr>
+              <a:tblGrid>
+                <a:gridCol w="3200400"/>
+                <a:gridCol w="914400"/>
+                <a:gridCol w="7132320"/>
+              </a:tblGrid>
+              <a:tr h="381000">
+                <a:tc>
+                  <a:txBody>
+                    <a:bodyPr/>
+                    <a:lstStyle/>
+                    <a:p>
+                      <a:pPr>
+                        <a:defRPr sz="1300" b="1">
+                          <a:solidFill>
+                            <a:srgbClr val="FFFFFF"/>
+                          </a:solidFill>
+                        </a:defRPr>
+                      </a:pPr>
+                      <a:r>
+                        <a:t>Object</a:t>
+                      </a:r>
+                    </a:p>
+                  </a:txBody>
+                  <a:tcPr>
+                    <a:solidFill>
+                      <a:srgbClr val="1F3A68"/>
+                    </a:solidFill>
+                  </a:tcPr>
+                </a:tc>
+                <a:tc>
+                  <a:txBody>
+                    <a:bodyPr/>
+                    <a:lstStyle/>
+                    <a:p>
+                      <a:pPr>
+                        <a:defRPr sz="1300" b="1">
+                          <a:solidFill>
+                            <a:srgbClr val="FFFFFF"/>
+                          </a:solidFill>
+                        </a:defRPr>
+                      </a:pPr>
+                      <a:r>
+                        <a:t>Type</a:t>
+                      </a:r>
+                    </a:p>
+                  </a:txBody>
+                  <a:tcPr>
+                    <a:solidFill>
+                      <a:srgbClr val="1F3A68"/>
+                    </a:solidFill>
+                  </a:tcPr>
+                </a:tc>
+                <a:tc>
+                  <a:txBody>
+                    <a:bodyPr/>
+                    <a:lstStyle/>
+                    <a:p>
+                      <a:pPr>
+                        <a:defRPr sz="1300" b="1">
+                          <a:solidFill>
+                            <a:srgbClr val="FFFFFF"/>
+                          </a:solidFill>
+                        </a:defRPr>
+                      </a:pPr>
+                      <a:r>
+                        <a:t>Why missed in seed list</a:t>
+                      </a:r>
+                    </a:p>
+                  </a:txBody>
+                  <a:tcPr>
+                    <a:solidFill>
+                      <a:srgbClr val="1F3A68"/>
+                    </a:solidFill>
+                  </a:tcPr>
+                </a:tc>
+              </a:tr>
+              <a:tr h="381000">
+                <a:tc>
+                  <a:txBody>
+                    <a:bodyPr/>
+                    <a:lstStyle/>
+                    <a:p>
+                      <a:pPr>
+                        <a:defRPr sz="1100">
+                          <a:solidFill>
+                            <a:srgbClr val="333333"/>
+                          </a:solidFill>
+                        </a:defRPr>
+                      </a:pPr>
+                      <a:r>
+                        <a:t>ZSFTP_BNP_PARIBAS</a:t>
+                      </a:r>
+                    </a:p>
+                  </a:txBody>
+                  <a:tcPr>
+                    <a:solidFill>
+                      <a:srgbClr val="FFFFFF"/>
+                    </a:solidFill>
+                  </a:tcPr>
+                </a:tc>
+                <a:tc>
+                  <a:txBody>
+                    <a:bodyPr/>
+                    <a:lstStyle/>
+                    <a:p>
+                      <a:pPr>
+                        <a:defRPr sz="1100">
+                          <a:solidFill>
+                            <a:srgbClr val="333333"/>
+                          </a:solidFill>
+                        </a:defRPr>
+                      </a:pPr>
+                      <a:r>
+                        <a:t>PROG</a:t>
+                      </a:r>
+                    </a:p>
+                  </a:txBody>
+                  <a:tcPr>
+                    <a:solidFill>
+                      <a:srgbClr val="FFFFFF"/>
+                    </a:solidFill>
+                  </a:tcPr>
+                </a:tc>
+                <a:tc>
+                  <a:txBody>
+                    <a:bodyPr/>
+                    <a:lstStyle/>
+                    <a:p>
+                      <a:pPr>
+                        <a:defRPr sz="1100">
+                          <a:solidFill>
+                            <a:srgbClr val="333333"/>
+                          </a:solidFill>
+                        </a:defRPr>
+                      </a:pPr>
+                      <a:r>
+                        <a:t>Password-only auth — no PRIVATE_KEY_PATH marker</a:t>
+                      </a:r>
+                    </a:p>
+                  </a:txBody>
+                  <a:tcPr>
+                    <a:solidFill>
+                      <a:srgbClr val="FFFFFF"/>
+                    </a:solidFill>
+                  </a:tcPr>
+                </a:tc>
+              </a:tr>
+              <a:tr h="381000">
+                <a:tc>
+                  <a:txBody>
+                    <a:bodyPr/>
+                    <a:lstStyle/>
+                    <a:p>
+                      <a:pPr>
+                        <a:defRPr sz="1100">
+                          <a:solidFill>
+                            <a:srgbClr val="333333"/>
+                          </a:solidFill>
+                        </a:defRPr>
+                      </a:pPr>
+                      <a:r>
+                        <a:t>ZSFTP_BNP_PARIBAS_WITH_PGP</a:t>
+                      </a:r>
+                    </a:p>
+                  </a:txBody>
+                  <a:tcPr>
+                    <a:solidFill>
+                      <a:srgbClr val="F0F2F7"/>
+                    </a:solidFill>
+                  </a:tcPr>
+                </a:tc>
+                <a:tc>
+                  <a:txBody>
+                    <a:bodyPr/>
+                    <a:lstStyle/>
+                    <a:p>
+                      <a:pPr>
+                        <a:defRPr sz="1100">
+                          <a:solidFill>
+                            <a:srgbClr val="333333"/>
+                          </a:solidFill>
+                        </a:defRPr>
+                      </a:pPr>
+                      <a:r>
+                        <a:t>PROG</a:t>
+                      </a:r>
+                    </a:p>
+                  </a:txBody>
+                  <a:tcPr>
+                    <a:solidFill>
+                      <a:srgbClr val="F0F2F7"/>
+                    </a:solidFill>
+                  </a:tcPr>
+                </a:tc>
+                <a:tc>
+                  <a:txBody>
+                    <a:bodyPr/>
+                    <a:lstStyle/>
+                    <a:p>
+                      <a:pPr>
+                        <a:defRPr sz="1100">
+                          <a:solidFill>
+                            <a:srgbClr val="333333"/>
+                          </a:solidFill>
+                        </a:defRPr>
+                      </a:pPr>
+                      <a:r>
+                        <a:t>Newer PGP variant of existing BNP report</a:t>
+                      </a:r>
+                    </a:p>
+                  </a:txBody>
+                  <a:tcPr>
+                    <a:solidFill>
+                      <a:srgbClr val="F0F2F7"/>
+                    </a:solidFill>
+                  </a:tcPr>
+                </a:tc>
+              </a:tr>
+              <a:tr h="381000">
+                <a:tc>
+                  <a:txBody>
+                    <a:bodyPr/>
+                    <a:lstStyle/>
+                    <a:p>
+                      <a:pPr>
+                        <a:defRPr sz="1100">
+                          <a:solidFill>
+                            <a:srgbClr val="333333"/>
+                          </a:solidFill>
+                        </a:defRPr>
+                      </a:pPr>
+                      <a:r>
+                        <a:t>ZSFTP_CERIDIAN_PULL</a:t>
+                      </a:r>
+                    </a:p>
+                  </a:txBody>
+                  <a:tcPr>
+                    <a:solidFill>
+                      <a:srgbClr val="FFFFFF"/>
+                    </a:solidFill>
+                  </a:tcPr>
+                </a:tc>
+                <a:tc>
+                  <a:txBody>
+                    <a:bodyPr/>
+                    <a:lstStyle/>
+                    <a:p>
+                      <a:pPr>
+                        <a:defRPr sz="1100">
+                          <a:solidFill>
+                            <a:srgbClr val="333333"/>
+                          </a:solidFill>
+                        </a:defRPr>
+                      </a:pPr>
+                      <a:r>
+                        <a:t>PROG</a:t>
+                      </a:r>
+                    </a:p>
+                  </a:txBody>
+                  <a:tcPr>
+                    <a:solidFill>
+                      <a:srgbClr val="FFFFFF"/>
+                    </a:solidFill>
+                  </a:tcPr>
+                </a:tc>
+                <a:tc>
+                  <a:txBody>
+                    <a:bodyPr/>
+                    <a:lstStyle/>
+                    <a:p>
+                      <a:pPr>
+                        <a:defRPr sz="1100">
+                          <a:solidFill>
+                            <a:srgbClr val="333333"/>
+                          </a:solidFill>
+                        </a:defRPr>
+                      </a:pPr>
+                      <a:r>
+                        <a:t>Operator-facing duplicate of ZFFIU_ACC_POST flow</a:t>
+                      </a:r>
+                    </a:p>
+                  </a:txBody>
+                  <a:tcPr>
+                    <a:solidFill>
+                      <a:srgbClr val="FFFFFF"/>
+                    </a:solidFill>
+                  </a:tcPr>
+                </a:tc>
+              </a:tr>
+              <a:tr h="381000">
+                <a:tc>
+                  <a:txBody>
+                    <a:bodyPr/>
+                    <a:lstStyle/>
+                    <a:p>
+                      <a:pPr>
+                        <a:defRPr sz="1100">
+                          <a:solidFill>
+                            <a:srgbClr val="333333"/>
+                          </a:solidFill>
+                        </a:defRPr>
+                      </a:pPr>
+                      <a:r>
+                        <a:t>ZSFTP_CITI_SEND</a:t>
+                      </a:r>
+                    </a:p>
+                  </a:txBody>
+                  <a:tcPr>
+                    <a:solidFill>
+                      <a:srgbClr val="F0F2F7"/>
+                    </a:solidFill>
+                  </a:tcPr>
+                </a:tc>
+                <a:tc>
+                  <a:txBody>
+                    <a:bodyPr/>
+                    <a:lstStyle/>
+                    <a:p>
+                      <a:pPr>
+                        <a:defRPr sz="1100">
+                          <a:solidFill>
+                            <a:srgbClr val="333333"/>
+                          </a:solidFill>
+                        </a:defRPr>
+                      </a:pPr>
+                      <a:r>
+                        <a:t>PROG</a:t>
+                      </a:r>
+                    </a:p>
+                  </a:txBody>
+                  <a:tcPr>
+                    <a:solidFill>
+                      <a:srgbClr val="F0F2F7"/>
+                    </a:solidFill>
+                  </a:tcPr>
+                </a:tc>
+                <a:tc>
+                  <a:txBody>
+                    <a:bodyPr/>
+                    <a:lstStyle/>
+                    <a:p>
+                      <a:pPr>
+                        <a:defRPr sz="1100">
+                          <a:solidFill>
+                            <a:srgbClr val="333333"/>
+                          </a:solidFill>
+                        </a:defRPr>
+                      </a:pPr>
+                      <a:r>
+                        <a:t>Outbound counterpart of ZSFTP_CITI_PULL</a:t>
+                      </a:r>
+                    </a:p>
+                  </a:txBody>
+                  <a:tcPr>
+                    <a:solidFill>
+                      <a:srgbClr val="F0F2F7"/>
+                    </a:solidFill>
+                  </a:tcPr>
+                </a:tc>
+              </a:tr>
+              <a:tr h="381000">
+                <a:tc>
+                  <a:txBody>
+                    <a:bodyPr/>
+                    <a:lstStyle/>
+                    <a:p>
+                      <a:pPr>
+                        <a:defRPr sz="1100">
+                          <a:solidFill>
+                            <a:srgbClr val="333333"/>
+                          </a:solidFill>
+                        </a:defRPr>
+                      </a:pPr>
+                      <a:r>
+                        <a:t>ZSFTP_JPM</a:t>
+                      </a:r>
+                    </a:p>
+                  </a:txBody>
+                  <a:tcPr>
+                    <a:solidFill>
+                      <a:srgbClr val="FFFFFF"/>
+                    </a:solidFill>
+                  </a:tcPr>
+                </a:tc>
+                <a:tc>
+                  <a:txBody>
+                    <a:bodyPr/>
+                    <a:lstStyle/>
+                    <a:p>
+                      <a:pPr>
+                        <a:defRPr sz="1100">
+                          <a:solidFill>
+                            <a:srgbClr val="333333"/>
+                          </a:solidFill>
+                        </a:defRPr>
+                      </a:pPr>
+                      <a:r>
+                        <a:t>PROG</a:t>
+                      </a:r>
+                    </a:p>
+                  </a:txBody>
+                  <a:tcPr>
+                    <a:solidFill>
+                      <a:srgbClr val="FFFFFF"/>
+                    </a:solidFill>
+                  </a:tcPr>
+                </a:tc>
+                <a:tc>
+                  <a:txBody>
+                    <a:bodyPr/>
+                    <a:lstStyle/>
+                    <a:p>
+                      <a:pPr>
+                        <a:defRPr sz="1100">
+                          <a:solidFill>
+                            <a:srgbClr val="333333"/>
+                          </a:solidFill>
+                        </a:defRPr>
+                      </a:pPr>
+                      <a:r>
+                        <a:t>Entire JPMorgan integration not in seeds</a:t>
+                      </a:r>
+                    </a:p>
+                  </a:txBody>
+                  <a:tcPr>
+                    <a:solidFill>
+                      <a:srgbClr val="FFFFFF"/>
+                    </a:solidFill>
+                  </a:tcPr>
+                </a:tc>
+              </a:tr>
+              <a:tr h="381000">
+                <a:tc>
+                  <a:txBody>
+                    <a:bodyPr/>
+                    <a:lstStyle/>
+                    <a:p>
+                      <a:pPr>
+                        <a:defRPr sz="1100">
+                          <a:solidFill>
+                            <a:srgbClr val="333333"/>
+                          </a:solidFill>
+                        </a:defRPr>
+                      </a:pPr>
+                      <a:r>
+                        <a:t>ZSFTP_JPM_PULL</a:t>
+                      </a:r>
+                    </a:p>
+                  </a:txBody>
+                  <a:tcPr>
+                    <a:solidFill>
+                      <a:srgbClr val="F0F2F7"/>
+                    </a:solidFill>
+                  </a:tcPr>
+                </a:tc>
+                <a:tc>
+                  <a:txBody>
+                    <a:bodyPr/>
+                    <a:lstStyle/>
+                    <a:p>
+                      <a:pPr>
+                        <a:defRPr sz="1100">
+                          <a:solidFill>
+                            <a:srgbClr val="333333"/>
+                          </a:solidFill>
+                        </a:defRPr>
+                      </a:pPr>
+                      <a:r>
+                        <a:t>PROG</a:t>
+                      </a:r>
+                    </a:p>
+                  </a:txBody>
+                  <a:tcPr>
+                    <a:solidFill>
+                      <a:srgbClr val="F0F2F7"/>
+                    </a:solidFill>
+                  </a:tcPr>
+                </a:tc>
+                <a:tc>
+                  <a:txBody>
+                    <a:bodyPr/>
+                    <a:lstStyle/>
+                    <a:p>
+                      <a:pPr>
+                        <a:defRPr sz="1100">
+                          <a:solidFill>
+                            <a:srgbClr val="333333"/>
+                          </a:solidFill>
+                        </a:defRPr>
+                      </a:pPr>
+                      <a:r>
+                        <a:t>Entire JPMorgan integration not in seeds</a:t>
+                      </a:r>
+                    </a:p>
+                  </a:txBody>
+                  <a:tcPr>
+                    <a:solidFill>
+                      <a:srgbClr val="F0F2F7"/>
+                    </a:solidFill>
+                  </a:tcPr>
+                </a:tc>
+              </a:tr>
+              <a:tr h="381000">
+                <a:tc>
+                  <a:txBody>
+                    <a:bodyPr/>
+                    <a:lstStyle/>
+                    <a:p>
+                      <a:pPr>
+                        <a:defRPr sz="1100">
+                          <a:solidFill>
+                            <a:srgbClr val="333333"/>
+                          </a:solidFill>
+                        </a:defRPr>
+                      </a:pPr>
+                      <a:r>
+                        <a:t>ZDMS_REPLACE_FILES</a:t>
+                      </a:r>
+                    </a:p>
+                  </a:txBody>
+                  <a:tcPr>
+                    <a:solidFill>
+                      <a:srgbClr val="FFFFFF"/>
+                    </a:solidFill>
+                  </a:tcPr>
+                </a:tc>
+                <a:tc>
+                  <a:txBody>
+                    <a:bodyPr/>
+                    <a:lstStyle/>
+                    <a:p>
+                      <a:pPr>
+                        <a:defRPr sz="1100">
+                          <a:solidFill>
+                            <a:srgbClr val="333333"/>
+                          </a:solidFill>
+                        </a:defRPr>
+                      </a:pPr>
+                      <a:r>
+                        <a:t>PROG</a:t>
+                      </a:r>
+                    </a:p>
+                  </a:txBody>
+                  <a:tcPr>
+                    <a:solidFill>
+                      <a:srgbClr val="FFFFFF"/>
+                    </a:solidFill>
+                  </a:tcPr>
+                </a:tc>
+                <a:tc>
+                  <a:txBody>
+                    <a:bodyPr/>
+                    <a:lstStyle/>
+                    <a:p>
+                      <a:pPr>
+                        <a:defRPr sz="1100">
+                          <a:solidFill>
+                            <a:srgbClr val="333333"/>
+                          </a:solidFill>
+                        </a:defRPr>
+                      </a:pPr>
+                      <a:r>
+                        <a:t>Adjacent DMS report sharing SM69 commands</a:t>
+                      </a:r>
+                    </a:p>
+                  </a:txBody>
+                  <a:tcPr>
+                    <a:solidFill>
+                      <a:srgbClr val="FFFFFF"/>
+                    </a:solidFill>
+                  </a:tcPr>
+                </a:tc>
+              </a:tr>
+              <a:tr h="381000">
+                <a:tc>
+                  <a:txBody>
+                    <a:bodyPr/>
+                    <a:lstStyle/>
+                    <a:p>
+                      <a:pPr>
+                        <a:defRPr sz="1100">
+                          <a:solidFill>
+                            <a:srgbClr val="333333"/>
+                          </a:solidFill>
+                        </a:defRPr>
+                      </a:pPr>
+                      <a:r>
+                        <a:t>ZSD_ERX_DMS_FILE_PROCESS</a:t>
+                      </a:r>
+                    </a:p>
+                  </a:txBody>
+                  <a:tcPr>
+                    <a:solidFill>
+                      <a:srgbClr val="F0F2F7"/>
+                    </a:solidFill>
+                  </a:tcPr>
+                </a:tc>
+                <a:tc>
+                  <a:txBody>
+                    <a:bodyPr/>
+                    <a:lstStyle/>
+                    <a:p>
+                      <a:pPr>
+                        <a:defRPr sz="1100">
+                          <a:solidFill>
+                            <a:srgbClr val="333333"/>
+                          </a:solidFill>
+                        </a:defRPr>
+                      </a:pPr>
+                      <a:r>
+                        <a:t>PROG</a:t>
+                      </a:r>
+                    </a:p>
+                  </a:txBody>
+                  <a:tcPr>
+                    <a:solidFill>
+                      <a:srgbClr val="F0F2F7"/>
+                    </a:solidFill>
+                  </a:tcPr>
+                </a:tc>
+                <a:tc>
+                  <a:txBody>
+                    <a:bodyPr/>
+                    <a:lstStyle/>
+                    <a:p>
+                      <a:pPr>
+                        <a:defRPr sz="1100">
+                          <a:solidFill>
+                            <a:srgbClr val="333333"/>
+                          </a:solidFill>
+                        </a:defRPr>
+                      </a:pPr>
+                      <a:r>
+                        <a:t>Indirect SFTP via ZERX wrapper FUGR</a:t>
+                      </a:r>
+                    </a:p>
+                  </a:txBody>
+                  <a:tcPr>
+                    <a:solidFill>
+                      <a:srgbClr val="F0F2F7"/>
+                    </a:solidFill>
+                  </a:tcPr>
+                </a:tc>
+              </a:tr>
+              <a:tr h="381000">
+                <a:tc>
+                  <a:txBody>
+                    <a:bodyPr/>
+                    <a:lstStyle/>
+                    <a:p>
+                      <a:pPr>
+                        <a:defRPr sz="1100">
+                          <a:solidFill>
+                            <a:srgbClr val="333333"/>
+                          </a:solidFill>
+                        </a:defRPr>
+                      </a:pPr>
+                      <a:r>
+                        <a:t>ZMEDICARE</a:t>
+                      </a:r>
+                    </a:p>
+                  </a:txBody>
+                  <a:tcPr>
+                    <a:solidFill>
+                      <a:srgbClr val="FFFFFF"/>
+                    </a:solidFill>
+                  </a:tcPr>
+                </a:tc>
+                <a:tc>
+                  <a:txBody>
+                    <a:bodyPr/>
+                    <a:lstStyle/>
+                    <a:p>
+                      <a:pPr>
+                        <a:defRPr sz="1100">
+                          <a:solidFill>
+                            <a:srgbClr val="333333"/>
+                          </a:solidFill>
+                        </a:defRPr>
+                      </a:pPr>
+                      <a:r>
+                        <a:t>FUGR</a:t>
+                      </a:r>
+                    </a:p>
+                  </a:txBody>
+                  <a:tcPr>
+                    <a:solidFill>
+                      <a:srgbClr val="FFFFFF"/>
+                    </a:solidFill>
+                  </a:tcPr>
+                </a:tc>
+                <a:tc>
+                  <a:txBody>
+                    <a:bodyPr/>
+                    <a:lstStyle/>
+                    <a:p>
+                      <a:pPr>
+                        <a:defRPr sz="1100">
+                          <a:solidFill>
+                            <a:srgbClr val="333333"/>
+                          </a:solidFill>
+                        </a:defRPr>
+                      </a:pPr>
+                      <a:r>
+                        <a:t>Wrapper FUGR — never in a 'report list'</a:t>
+                      </a:r>
+                    </a:p>
+                  </a:txBody>
+                  <a:tcPr>
+                    <a:solidFill>
+                      <a:srgbClr val="FFFFFF"/>
+                    </a:solidFill>
+                  </a:tcPr>
+                </a:tc>
+              </a:tr>
+              <a:tr h="381000">
+                <a:tc>
+                  <a:txBody>
+                    <a:bodyPr/>
+                    <a:lstStyle/>
+                    <a:p>
+                      <a:pPr>
+                        <a:defRPr sz="1100">
+                          <a:solidFill>
+                            <a:srgbClr val="333333"/>
+                          </a:solidFill>
+                        </a:defRPr>
+                      </a:pPr>
+                      <a:r>
+                        <a:t>ZERX</a:t>
+                      </a:r>
+                    </a:p>
+                  </a:txBody>
+                  <a:tcPr>
+                    <a:solidFill>
+                      <a:srgbClr val="F0F2F7"/>
+                    </a:solidFill>
+                  </a:tcPr>
+                </a:tc>
+                <a:tc>
+                  <a:txBody>
+                    <a:bodyPr/>
+                    <a:lstStyle/>
+                    <a:p>
+                      <a:pPr>
+                        <a:defRPr sz="1100">
+                          <a:solidFill>
+                            <a:srgbClr val="333333"/>
+                          </a:solidFill>
+                        </a:defRPr>
+                      </a:pPr>
+                      <a:r>
+                        <a:t>FUGR</a:t>
+                      </a:r>
+                    </a:p>
+                  </a:txBody>
+                  <a:tcPr>
+                    <a:solidFill>
+                      <a:srgbClr val="F0F2F7"/>
+                    </a:solidFill>
+                  </a:tcPr>
+                </a:tc>
+                <a:tc>
+                  <a:txBody>
+                    <a:bodyPr/>
+                    <a:lstStyle/>
+                    <a:p>
+                      <a:pPr>
+                        <a:defRPr sz="1100">
+                          <a:solidFill>
+                            <a:srgbClr val="333333"/>
+                          </a:solidFill>
+                        </a:defRPr>
+                      </a:pPr>
+                      <a:r>
+                        <a:t>Same — wrapper FUGR for eRx/DMS path</a:t>
+                      </a:r>
+                    </a:p>
+                  </a:txBody>
+                  <a:tcPr>
+                    <a:solidFill>
+                      <a:srgbClr val="F0F2F7"/>
+                    </a:solidFill>
+                  </a:tcPr>
+                </a:tc>
+              </a:tr>
+              <a:tr h="381000">
+                <a:tc>
+                  <a:txBody>
+                    <a:bodyPr/>
+                    <a:lstStyle/>
+                    <a:p>
+                      <a:pPr>
+                        <a:defRPr sz="1100">
+                          <a:solidFill>
+                            <a:srgbClr val="333333"/>
+                          </a:solidFill>
+                        </a:defRPr>
+                      </a:pPr>
+                      <a:r>
+                        <a:t>ZDMS_SEND_FILE</a:t>
+                      </a:r>
+                    </a:p>
+                  </a:txBody>
+                  <a:tcPr>
+                    <a:solidFill>
+                      <a:srgbClr val="FFFFFF"/>
+                    </a:solidFill>
+                  </a:tcPr>
+                </a:tc>
+                <a:tc>
+                  <a:txBody>
+                    <a:bodyPr/>
+                    <a:lstStyle/>
+                    <a:p>
+                      <a:pPr>
+                        <a:defRPr sz="1100">
+                          <a:solidFill>
+                            <a:srgbClr val="333333"/>
+                          </a:solidFill>
+                        </a:defRPr>
+                      </a:pPr>
+                      <a:r>
+                        <a:t>FUGR</a:t>
+                      </a:r>
+                    </a:p>
+                  </a:txBody>
+                  <a:tcPr>
+                    <a:solidFill>
+                      <a:srgbClr val="FFFFFF"/>
+                    </a:solidFill>
+                  </a:tcPr>
+                </a:tc>
+                <a:tc>
+                  <a:txBody>
+                    <a:bodyPr/>
+                    <a:lstStyle/>
+                    <a:p>
+                      <a:pPr>
+                        <a:defRPr sz="1100">
+                          <a:solidFill>
+                            <a:srgbClr val="333333"/>
+                          </a:solidFill>
+                        </a:defRPr>
+                      </a:pPr>
+                      <a:r>
+                        <a:t>Wrapper FUGR with _TO_SFTP naming — initial substring scan looked for _FROM_SFTP only</a:t>
+                      </a:r>
+                    </a:p>
+                  </a:txBody>
+                  <a:tcPr>
+                    <a:solidFill>
+                      <a:srgbClr val="FFFFFF"/>
+                    </a:solidFill>
+                  </a:tcPr>
+                </a:tc>
+              </a:tr>
+            </a:tbl>
+          </a:graphicData>
+        </a:graphic>
+      </p:graphicFrame>
     </p:spTree>
   </p:cSld>
   <p:clrMapOvr>
@@ -14319,7 +14379,7 @@
               </a:defRPr>
             </a:pPr>
             <a:r>
-              <a:t>Code example #2 — wrapper FM (ZMEDI_GET_FROM_SFTP)</a:t>
+              <a:t>Code example #1 — direct SXPG call (ZSFTP_CITI_PULL)</a:t>
             </a:r>
           </a:p>
         </p:txBody>
@@ -14354,7 +14414,7 @@
               </a:defRPr>
             </a:pPr>
             <a:r>
-              <a:t>Same SXPG-shell pattern inside a function module — 2 reports invoke this instead of duplicating the plumbing.</a:t>
+              <a:t>Pattern shared by 14 of 16 reports: read credentials from zfi_constants, assemble shell parameters, call SXPG.</a:t>
             </a:r>
           </a:p>
         </p:txBody>
@@ -14392,7 +14452,7 @@
               </a:defRPr>
             </a:pPr>
             <a:r>
-              <a:t>FUNCTION zmedi_get_from_sftp</a:t>
+              <a:t>PARAMETERS: p_comm TYPE sxpgcolist-name OBLIGATORY DEFAULT 'ZSFTP_CITI_PULL'.</a:t>
             </a:r>
           </a:p>
           <a:p>
@@ -14404,9 +14464,6 @@
                 <a:latin typeface="Consolas"/>
               </a:defRPr>
             </a:pPr>
-            <a:r>
-              <a:t>  IMPORTING command   TYPE sxpgcolist-name</a:t>
-            </a:r>
           </a:p>
           <a:p>
             <a:pPr>
@@ -14418,7 +14475,7 @@
               </a:defRPr>
             </a:pPr>
             <a:r>
-              <a:t>            constants TYPE bdc_prog</a:t>
+              <a:t>SELECT * FROM zfi_constants INTO TABLE i_constants WHERE pname = 'ZSFTP_CITI'.</a:t>
             </a:r>
           </a:p>
           <a:p>
@@ -14430,9 +14487,6 @@
                 <a:latin typeface="Consolas"/>
               </a:defRPr>
             </a:pPr>
-            <a:r>
-              <a:t>  TABLES    return    LIKE bapiret2 OPTIONAL.</a:t>
-            </a:r>
           </a:p>
           <a:p>
             <a:pPr>
@@ -14443,6 +14497,9 @@
                 <a:latin typeface="Consolas"/>
               </a:defRPr>
             </a:pPr>
+            <a:r>
+              <a:t>PERFORM f_set_parameter USING 'SOURCE_FOLDER'    'M' ''.</a:t>
+            </a:r>
           </a:p>
           <a:p>
             <a:pPr>
@@ -14454,7 +14511,7 @@
               </a:defRPr>
             </a:pPr>
             <a:r>
-              <a:t>  SELECT * FROM zfi_constants INTO TABLE gt_constants WHERE pname = constants.</a:t>
+              <a:t>PERFORM f_set_parameter USING 'PASSPHRASE'       'M' ' '.</a:t>
             </a:r>
           </a:p>
           <a:p>
@@ -14466,6 +14523,9 @@
                 <a:latin typeface="Consolas"/>
               </a:defRPr>
             </a:pPr>
+            <a:r>
+              <a:t>PERFORM f_set_parameter USING 'FTP_USER'         'M' ' '.</a:t>
+            </a:r>
           </a:p>
           <a:p>
             <a:pPr>
@@ -14477,7 +14537,7 @@
               </a:defRPr>
             </a:pPr>
             <a:r>
-              <a:t>  PERFORM f_set_parameter USING 'FTP_USER'         'M' ''.</a:t>
+              <a:t>PERFORM f_set_parameter USING 'FTP_DOMAIN'       'M' '@'.</a:t>
             </a:r>
           </a:p>
           <a:p>
@@ -14490,7 +14550,7 @@
               </a:defRPr>
             </a:pPr>
             <a:r>
-              <a:t>  PERFORM f_set_parameter USING 'PASSPHRASE'       'M' ':'.</a:t>
+              <a:t>PERFORM f_set_parameter USING 'HOST_KEY'         'M' ' '.</a:t>
             </a:r>
           </a:p>
           <a:p>
@@ -14503,7 +14563,7 @@
               </a:defRPr>
             </a:pPr>
             <a:r>
-              <a:t>  PERFORM f_set_parameter USING 'HOST_KEY'         'M' ';'.</a:t>
+              <a:t>PERFORM f_set_parameter USING 'PRIVATE_KEY_PATH' 'M' ' '.</a:t>
             </a:r>
           </a:p>
           <a:p>
@@ -14515,9 +14575,6 @@
                 <a:latin typeface="Consolas"/>
               </a:defRPr>
             </a:pPr>
-            <a:r>
-              <a:t>  PERFORM f_set_parameter USING 'FTP_DOMAIN'       'M' ';'.</a:t>
-            </a:r>
           </a:p>
           <a:p>
             <a:pPr>
@@ -14529,7 +14586,7 @@
               </a:defRPr>
             </a:pPr>
             <a:r>
-              <a:t>  PERFORM f_set_parameter USING 'PRIVATE_KEY_PATH' 'M' ';'.</a:t>
+              <a:t>CALL FUNCTION 'SXPG_COMMAND_EXECUTE'</a:t>
             </a:r>
           </a:p>
           <a:p>
@@ -14542,7 +14599,7 @@
               </a:defRPr>
             </a:pPr>
             <a:r>
-              <a:t>  PERFORM f_set_parameter USING 'SOURCE_PATH'      'M' ';'.</a:t>
+              <a:t>  EXPORTING</a:t>
             </a:r>
           </a:p>
           <a:p>
@@ -14554,6 +14611,9 @@
                 <a:latin typeface="Consolas"/>
               </a:defRPr>
             </a:pPr>
+            <a:r>
+              <a:t>    commandname           = p_comm</a:t>
+            </a:r>
           </a:p>
           <a:p>
             <a:pPr>
@@ -14565,7 +14625,7 @@
               </a:defRPr>
             </a:pPr>
             <a:r>
-              <a:t>  CALL FUNCTION 'SXPG_COMMAND_EXECUTE'</a:t>
+              <a:t>    additional_parameters = g_path</a:t>
             </a:r>
           </a:p>
           <a:p>
@@ -14578,7 +14638,7 @@
               </a:defRPr>
             </a:pPr>
             <a:r>
-              <a:t>    EXPORTING commandname           = command</a:t>
+              <a:t>  IMPORTING</a:t>
             </a:r>
           </a:p>
           <a:p>
@@ -14591,7 +14651,7 @@
               </a:defRPr>
             </a:pPr>
             <a:r>
-              <a:t>              additional_parameters = gv_param</a:t>
+              <a:t>    exitcode              = g_ret_code</a:t>
             </a:r>
           </a:p>
           <a:p>
@@ -14604,7 +14664,7 @@
               </a:defRPr>
             </a:pPr>
             <a:r>
-              <a:t>    IMPORTING exitcode              = lv_ret_code</a:t>
+              <a:t>  TABLES</a:t>
             </a:r>
           </a:p>
           <a:p>
@@ -14617,20 +14677,7 @@
               </a:defRPr>
             </a:pPr>
             <a:r>
-              <a:t>    TABLES    exec_protocol         = lt_return[].</a:t>
-            </a:r>
-          </a:p>
-          <a:p>
-            <a:pPr>
-              <a:defRPr sz="1200" b="0">
-                <a:solidFill>
-                  <a:srgbClr val="333333"/>
-                </a:solidFill>
-                <a:latin typeface="Consolas"/>
-              </a:defRPr>
-            </a:pPr>
-            <a:r>
-              <a:t>ENDFUNCTION.</a:t>
+              <a:t>    exec_protocol         = i_return[].</a:t>
             </a:r>
           </a:p>
         </p:txBody>
